--- a/output/2.pptx
+++ b/output/2.pptx
@@ -3104,8 +3104,8 @@
         </p:nvCxnSpPr>
         <p:spPr>
           <a:xfrm>
-            <a:off x="4572000.0" y="2571750.0"/>
-            <a:ext cx="2286000.0" cy="0.0"/>
+            <a:off x="4114800.0" y="2571750.0"/>
+            <a:ext cx="3200400.0" cy="0.0"/>
           </a:xfrm>
           <a:prstGeom prst="line">
             <a:avLst/>
@@ -3139,8 +3139,8 @@
         </p:nvCxnSpPr>
         <p:spPr>
           <a:xfrm flipV="1">
-            <a:off x="4572000.0" y="285750.0"/>
-            <a:ext cx="0.0" cy="2286000.0"/>
+            <a:off x="4572000.0" y="-171450.0"/>
+            <a:ext cx="0.0" cy="3200400.0"/>
           </a:xfrm>
           <a:prstGeom prst="line">
             <a:avLst/>
@@ -3174,8 +3174,8 @@
         </p:nvCxnSpPr>
         <p:spPr>
           <a:xfrm flipV="1">
-            <a:off x="4800600.0" y="2205990.0"/>
-            <a:ext cx="228600.0" cy="137160.0"/>
+            <a:off x="4663440.0" y="2388870.0"/>
+            <a:ext cx="137160.0" cy="91440.0"/>
           </a:xfrm>
           <a:prstGeom prst="line">
             <a:avLst/>
@@ -3209,8 +3209,8 @@
         </p:nvCxnSpPr>
         <p:spPr>
           <a:xfrm flipV="1">
-            <a:off x="5029200.0" y="1977390.0"/>
-            <a:ext cx="228600.0" cy="228600.0"/>
+            <a:off x="4800600.0" y="2205990.0"/>
+            <a:ext cx="228600.0" cy="182880.0"/>
           </a:xfrm>
           <a:prstGeom prst="line">
             <a:avLst/>
@@ -3244,8 +3244,8 @@
         </p:nvCxnSpPr>
         <p:spPr>
           <a:xfrm flipV="1">
-            <a:off x="5257800.0" y="1657350.0"/>
-            <a:ext cx="228600.0" cy="320040.0"/>
+            <a:off x="5029200.0" y="1977390.0"/>
+            <a:ext cx="228600.0" cy="228600.0"/>
           </a:xfrm>
           <a:prstGeom prst="line">
             <a:avLst/>
@@ -3279,8 +3279,8 @@
         </p:nvCxnSpPr>
         <p:spPr>
           <a:xfrm flipV="1">
-            <a:off x="5486400.0" y="1200150.0"/>
-            <a:ext cx="228600.0" cy="457200.0"/>
+            <a:off x="5257800.0" y="1703070.0"/>
+            <a:ext cx="228600.0" cy="274320.0"/>
           </a:xfrm>
           <a:prstGeom prst="line">
             <a:avLst/>
@@ -3314,8 +3314,8 @@
         </p:nvCxnSpPr>
         <p:spPr>
           <a:xfrm flipV="1">
-            <a:off x="5715000.0" y="971550.0"/>
-            <a:ext cx="137160.0" cy="228600.0"/>
+            <a:off x="5486400.0" y="1428750.0"/>
+            <a:ext cx="228600.0" cy="274320.0"/>
           </a:xfrm>
           <a:prstGeom prst="line">
             <a:avLst/>
@@ -3349,8 +3349,8 @@
         </p:nvCxnSpPr>
         <p:spPr>
           <a:xfrm flipV="1">
-            <a:off x="5852160.0" y="834390.0"/>
-            <a:ext cx="91440.0" cy="137160.0"/>
+            <a:off x="5715000.0" y="1200150.0"/>
+            <a:ext cx="228600.0" cy="228600.0"/>
           </a:xfrm>
           <a:prstGeom prst="line">
             <a:avLst/>
@@ -3384,8 +3384,8 @@
         </p:nvCxnSpPr>
         <p:spPr>
           <a:xfrm flipV="1">
-            <a:off x="5943600.0" y="697230.0000000002"/>
-            <a:ext cx="91440.0" cy="137159.99999999977"/>
+            <a:off x="5943600.0" y="971550.0"/>
+            <a:ext cx="137160.0" cy="228600.0"/>
           </a:xfrm>
           <a:prstGeom prst="line">
             <a:avLst/>
@@ -3419,8 +3419,8 @@
         </p:nvCxnSpPr>
         <p:spPr>
           <a:xfrm flipV="1">
-            <a:off x="6035040.0" y="514350.0"/>
-            <a:ext cx="137160.0" cy="182880.00000000023"/>
+            <a:off x="6080760.0" y="697230.0000000002"/>
+            <a:ext cx="137160.0" cy="274319.99999999977"/>
           </a:xfrm>
           <a:prstGeom prst="line">
             <a:avLst/>
@@ -3454,8 +3454,8 @@
         </p:nvCxnSpPr>
         <p:spPr>
           <a:xfrm flipV="1">
-            <a:off x="6172200.0" y="331470.0"/>
-            <a:ext cx="137160.0" cy="182880.0"/>
+            <a:off x="6217920.0" y="377190.0"/>
+            <a:ext cx="137160.0" cy="320040.00000000023"/>
           </a:xfrm>
           <a:prstGeom prst="line">
             <a:avLst/>
@@ -3489,8 +3489,8 @@
         </p:nvCxnSpPr>
         <p:spPr>
           <a:xfrm flipV="1">
-            <a:off x="6309360.0" y="194310.0"/>
-            <a:ext cx="91440.0" cy="137160.0"/>
+            <a:off x="6355080.0" y="57150.0"/>
+            <a:ext cx="137160.0" cy="320040.0"/>
           </a:xfrm>
           <a:prstGeom prst="line">
             <a:avLst/>
@@ -3524,7 +3524,7 @@
         </p:nvCxnSpPr>
         <p:spPr>
           <a:xfrm flipV="1">
-            <a:off x="5715000.0" y="1200150.0"/>
+            <a:off x="5943600.0" y="1200150.0"/>
             <a:ext cx="0.0" cy="1371600.0"/>
           </a:xfrm>
           <a:prstGeom prst="line">
@@ -3561,7 +3561,7 @@
         <p:spPr>
           <a:xfrm>
             <a:off x="4572000.0" y="1200150.0"/>
-            <a:ext cx="1143000.0" cy="0.0"/>
+            <a:ext cx="1371600.0" cy="0.0"/>
           </a:xfrm>
           <a:prstGeom prst="line">
             <a:avLst/>
@@ -3596,7 +3596,7 @@
         </p:nvSpPr>
         <p:spPr>
           <a:xfrm>
-            <a:off x="5676900" y="1162050"/>
+            <a:off x="5905500" y="1162050"/>
             <a:ext cx="76200" cy="76200"/>
           </a:xfrm>
           <a:prstGeom prst="ellipse">
@@ -3641,7 +3641,7 @@
         </p:nvSpPr>
         <p:spPr>
           <a:xfrm>
-            <a:off x="4480560" y="2663190"/>
+            <a:off x="7086600" y="2663190"/>
             <a:ext cx="635000" cy="254000"/>
           </a:xfrm>
           <a:prstGeom prst="rect">
@@ -3664,7 +3664,7 @@
               </a:defRPr>
             </a:pPr>
             <a:r>
-              <a:t>O</a:t>
+              <a:t>x</a:t>
             </a:r>
           </a:p>
         </p:txBody>
@@ -3677,7 +3677,7 @@
         </p:nvSpPr>
         <p:spPr>
           <a:xfrm>
-            <a:off x="6949440" y="2571750"/>
+            <a:off x="4480560" y="57150"/>
             <a:ext cx="635000" cy="254000"/>
           </a:xfrm>
           <a:prstGeom prst="rect">
@@ -3700,7 +3700,7 @@
               </a:defRPr>
             </a:pPr>
             <a:r>
-              <a:t>x</a:t>
+              <a:t>y</a:t>
             </a:r>
           </a:p>
         </p:txBody>
@@ -3713,7 +3713,7 @@
         </p:nvSpPr>
         <p:spPr>
           <a:xfrm>
-            <a:off x="4572000" y="194310"/>
+            <a:off x="4434840" y="2708910"/>
             <a:ext cx="635000" cy="254000"/>
           </a:xfrm>
           <a:prstGeom prst="rect">
@@ -3736,7 +3736,7 @@
               </a:defRPr>
             </a:pPr>
             <a:r>
-              <a:t>y</a:t>
+              <a:t>O</a:t>
             </a:r>
           </a:p>
         </p:txBody>
@@ -3749,7 +3749,7 @@
         </p:nvSpPr>
         <p:spPr>
           <a:xfrm>
-            <a:off x="5715000" y="2663190"/>
+            <a:off x="5943600" y="2754630"/>
             <a:ext cx="635000" cy="254000"/>
           </a:xfrm>
           <a:prstGeom prst="rect">
@@ -3785,7 +3785,7 @@
         </p:nvSpPr>
         <p:spPr>
           <a:xfrm>
-            <a:off x="4480560" y="1200150"/>
+            <a:off x="4251960" y="1200150"/>
             <a:ext cx="635000" cy="254000"/>
           </a:xfrm>
           <a:prstGeom prst="rect">
@@ -3821,7 +3821,7 @@
         </p:nvSpPr>
         <p:spPr>
           <a:xfrm>
-            <a:off x="6172200" y="742950"/>
+            <a:off x="6400800" y="377190"/>
             <a:ext cx="635000" cy="254000"/>
           </a:xfrm>
           <a:prstGeom prst="rect">

--- a/output/2.pptx
+++ b/output/2.pptx
@@ -3104,8 +3104,8 @@
         </p:nvCxnSpPr>
         <p:spPr>
           <a:xfrm>
-            <a:off x="4114800.0" y="2571750.0"/>
-            <a:ext cx="3200400.0" cy="0.0"/>
+            <a:off x="2286000.0" y="2571750.0"/>
+            <a:ext cx="4572000.0" cy="0.0"/>
           </a:xfrm>
           <a:prstGeom prst="line">
             <a:avLst/>
@@ -3139,8 +3139,8 @@
         </p:nvCxnSpPr>
         <p:spPr>
           <a:xfrm flipV="1">
-            <a:off x="4572000.0" y="-171450.0"/>
-            <a:ext cx="0.0" cy="3200400.0"/>
+            <a:off x="4572000.0" y="285750.0"/>
+            <a:ext cx="0.0" cy="4572000.0"/>
           </a:xfrm>
           <a:prstGeom prst="line">
             <a:avLst/>
@@ -3174,8 +3174,8 @@
         </p:nvCxnSpPr>
         <p:spPr>
           <a:xfrm flipV="1">
-            <a:off x="4663440.0" y="2388870.0"/>
-            <a:ext cx="137160.0" cy="91440.0"/>
+            <a:off x="4572000.0" y="2571018.48"/>
+            <a:ext cx="22860.0" cy="731.5200000000186"/>
           </a:xfrm>
           <a:prstGeom prst="line">
             <a:avLst/>
@@ -3209,8 +3209,8 @@
         </p:nvCxnSpPr>
         <p:spPr>
           <a:xfrm flipV="1">
-            <a:off x="4800600.0" y="2205990.0"/>
-            <a:ext cx="228600.0" cy="182880.0"/>
+            <a:off x="4594860.0" y="2568778.2"/>
+            <a:ext cx="22860.0" cy="2240.279999999795"/>
           </a:xfrm>
           <a:prstGeom prst="line">
             <a:avLst/>
@@ -3244,8 +3244,8 @@
         </p:nvCxnSpPr>
         <p:spPr>
           <a:xfrm flipV="1">
-            <a:off x="5029200.0" y="1977390.0"/>
-            <a:ext cx="228600.0" cy="228600.0"/>
+            <a:off x="4617720.0" y="2565074.88"/>
+            <a:ext cx="22860.0" cy="3703.320000000298"/>
           </a:xfrm>
           <a:prstGeom prst="line">
             <a:avLst/>
@@ -3279,8 +3279,8 @@
         </p:nvCxnSpPr>
         <p:spPr>
           <a:xfrm flipV="1">
-            <a:off x="5257800.0" y="1703070.0"/>
-            <a:ext cx="228600.0" cy="274320.0"/>
+            <a:off x="4640580.0" y="2559862.8"/>
+            <a:ext cx="22860.0" cy="5212.0800000000745"/>
           </a:xfrm>
           <a:prstGeom prst="line">
             <a:avLst/>
@@ -3314,8 +3314,8 @@
         </p:nvCxnSpPr>
         <p:spPr>
           <a:xfrm flipV="1">
-            <a:off x="5486400.0" y="1428750.0"/>
-            <a:ext cx="228600.0" cy="274320.0"/>
+            <a:off x="4663440.0" y="2553187.68"/>
+            <a:ext cx="22860.0" cy="6675.119999999646"/>
           </a:xfrm>
           <a:prstGeom prst="line">
             <a:avLst/>
@@ -3349,8 +3349,8 @@
         </p:nvCxnSpPr>
         <p:spPr>
           <a:xfrm flipV="1">
-            <a:off x="5715000.0" y="1200150.0"/>
-            <a:ext cx="228600.0" cy="228600.0"/>
+            <a:off x="4686300.0" y="2545003.8"/>
+            <a:ext cx="22860.0" cy="8183.880000000354"/>
           </a:xfrm>
           <a:prstGeom prst="line">
             <a:avLst/>
@@ -3384,8 +3384,8 @@
         </p:nvCxnSpPr>
         <p:spPr>
           <a:xfrm flipV="1">
-            <a:off x="5943600.0" y="971550.0"/>
-            <a:ext cx="137160.0" cy="228600.0"/>
+            <a:off x="4709160.0" y="2535356.88"/>
+            <a:ext cx="22860.0" cy="9646.919999999925"/>
           </a:xfrm>
           <a:prstGeom prst="line">
             <a:avLst/>
@@ -3419,8 +3419,8 @@
         </p:nvCxnSpPr>
         <p:spPr>
           <a:xfrm flipV="1">
-            <a:off x="6080760.0" y="697230.0000000002"/>
-            <a:ext cx="137160.0" cy="274319.99999999977"/>
+            <a:off x="4732020.0" y="2524201.2"/>
+            <a:ext cx="22860.0" cy="11155.679999999702"/>
           </a:xfrm>
           <a:prstGeom prst="line">
             <a:avLst/>
@@ -3454,8 +3454,8 @@
         </p:nvCxnSpPr>
         <p:spPr>
           <a:xfrm flipV="1">
-            <a:off x="6217920.0" y="377190.0"/>
-            <a:ext cx="137160.0" cy="320040.00000000023"/>
+            <a:off x="4754880.0" y="2511582.48"/>
+            <a:ext cx="22860.0" cy="12618.720000000205"/>
           </a:xfrm>
           <a:prstGeom prst="line">
             <a:avLst/>
@@ -3489,8 +3489,8 @@
         </p:nvCxnSpPr>
         <p:spPr>
           <a:xfrm flipV="1">
-            <a:off x="6355080.0" y="57150.0"/>
-            <a:ext cx="137160.0" cy="320040.0"/>
+            <a:off x="4777740.0" y="2497455.0"/>
+            <a:ext cx="22860.0" cy="14127.479999999981"/>
           </a:xfrm>
           <a:prstGeom prst="line">
             <a:avLst/>
@@ -3524,8 +3524,8 @@
         </p:nvCxnSpPr>
         <p:spPr>
           <a:xfrm flipV="1">
-            <a:off x="5943600.0" y="1200150.0"/>
-            <a:ext cx="0.0" cy="1371600.0"/>
+            <a:off x="4800600.0" y="2481864.48"/>
+            <a:ext cx="22860.0" cy="15590.520000000019"/>
           </a:xfrm>
           <a:prstGeom prst="line">
             <a:avLst/>
@@ -3534,7 +3534,6 @@
             <a:solidFill>
               <a:srgbClr val="00C8FF"/>
             </a:solidFill>
-            <a:prstDash val="sysDash"/>
           </a:ln>
         </p:spPr>
         <p:style>
@@ -3559,9 +3558,9 @@
           <p:nvPr/>
         </p:nvCxnSpPr>
         <p:spPr>
-          <a:xfrm>
-            <a:off x="4572000.0" y="1200150.0"/>
-            <a:ext cx="1371600.0" cy="0.0"/>
+          <a:xfrm flipV="1">
+            <a:off x="4823460.0" y="2464765.2"/>
+            <a:ext cx="22860.0" cy="17099.279999999795"/>
           </a:xfrm>
           <a:prstGeom prst="line">
             <a:avLst/>
@@ -3570,7 +3569,6 @@
             <a:solidFill>
               <a:srgbClr val="00C8FF"/>
             </a:solidFill>
-            <a:prstDash val="sysDash"/>
           </a:ln>
         </p:spPr>
         <p:style>
@@ -3588,15 +3586,470 @@
           </a:fontRef>
         </p:style>
       </p:cxnSp>
-      <p:sp>
-        <p:nvSpPr>
-          <p:cNvPr id="16" name="Oval 15"/>
+      <p:cxnSp>
+        <p:nvCxnSpPr>
+          <p:cNvPr id="16" name="Connector 15"/>
+          <p:cNvCxnSpPr/>
+          <p:nvPr/>
+        </p:nvCxnSpPr>
+        <p:spPr>
+          <a:xfrm flipV="1">
+            <a:off x="4846320.0" y="2446202.88"/>
+            <a:ext cx="22860.0" cy="18562.320000000298"/>
+          </a:xfrm>
+          <a:prstGeom prst="line">
+            <a:avLst/>
+          </a:prstGeom>
+          <a:ln w="25400">
+            <a:solidFill>
+              <a:srgbClr val="00C8FF"/>
+            </a:solidFill>
+          </a:ln>
+        </p:spPr>
+        <p:style>
+          <a:lnRef idx="2">
+            <a:schemeClr val="accent1"/>
+          </a:lnRef>
+          <a:fillRef idx="0">
+            <a:schemeClr val="accent1"/>
+          </a:fillRef>
+          <a:effectRef idx="1">
+            <a:schemeClr val="accent1"/>
+          </a:effectRef>
+          <a:fontRef idx="minor">
+            <a:schemeClr val="tx1"/>
+          </a:fontRef>
+        </p:style>
+      </p:cxnSp>
+      <p:cxnSp>
+        <p:nvCxnSpPr>
+          <p:cNvPr id="17" name="Connector 16"/>
+          <p:cNvCxnSpPr/>
+          <p:nvPr/>
+        </p:nvCxnSpPr>
+        <p:spPr>
+          <a:xfrm flipV="1">
+            <a:off x="4869180.0" y="2426131.8"/>
+            <a:ext cx="22860.0" cy="20071.080000000075"/>
+          </a:xfrm>
+          <a:prstGeom prst="line">
+            <a:avLst/>
+          </a:prstGeom>
+          <a:ln w="25400">
+            <a:solidFill>
+              <a:srgbClr val="00C8FF"/>
+            </a:solidFill>
+          </a:ln>
+        </p:spPr>
+        <p:style>
+          <a:lnRef idx="2">
+            <a:schemeClr val="accent1"/>
+          </a:lnRef>
+          <a:fillRef idx="0">
+            <a:schemeClr val="accent1"/>
+          </a:fillRef>
+          <a:effectRef idx="1">
+            <a:schemeClr val="accent1"/>
+          </a:effectRef>
+          <a:fontRef idx="minor">
+            <a:schemeClr val="tx1"/>
+          </a:fontRef>
+        </p:style>
+      </p:cxnSp>
+      <p:cxnSp>
+        <p:nvCxnSpPr>
+          <p:cNvPr id="18" name="Connector 17"/>
+          <p:cNvCxnSpPr/>
+          <p:nvPr/>
+        </p:nvCxnSpPr>
+        <p:spPr>
+          <a:xfrm flipV="1">
+            <a:off x="4892040.0" y="2404597.68"/>
+            <a:ext cx="22860.0" cy="21534.119999999646"/>
+          </a:xfrm>
+          <a:prstGeom prst="line">
+            <a:avLst/>
+          </a:prstGeom>
+          <a:ln w="25400">
+            <a:solidFill>
+              <a:srgbClr val="00C8FF"/>
+            </a:solidFill>
+          </a:ln>
+        </p:spPr>
+        <p:style>
+          <a:lnRef idx="2">
+            <a:schemeClr val="accent1"/>
+          </a:lnRef>
+          <a:fillRef idx="0">
+            <a:schemeClr val="accent1"/>
+          </a:fillRef>
+          <a:effectRef idx="1">
+            <a:schemeClr val="accent1"/>
+          </a:effectRef>
+          <a:fontRef idx="minor">
+            <a:schemeClr val="tx1"/>
+          </a:fontRef>
+        </p:style>
+      </p:cxnSp>
+      <p:cxnSp>
+        <p:nvCxnSpPr>
+          <p:cNvPr id="19" name="Connector 18"/>
+          <p:cNvCxnSpPr/>
+          <p:nvPr/>
+        </p:nvCxnSpPr>
+        <p:spPr>
+          <a:xfrm flipV="1">
+            <a:off x="4914900.0" y="2381554.8"/>
+            <a:ext cx="22860.0" cy="23042.880000000354"/>
+          </a:xfrm>
+          <a:prstGeom prst="line">
+            <a:avLst/>
+          </a:prstGeom>
+          <a:ln w="25400">
+            <a:solidFill>
+              <a:srgbClr val="00C8FF"/>
+            </a:solidFill>
+          </a:ln>
+        </p:spPr>
+        <p:style>
+          <a:lnRef idx="2">
+            <a:schemeClr val="accent1"/>
+          </a:lnRef>
+          <a:fillRef idx="0">
+            <a:schemeClr val="accent1"/>
+          </a:fillRef>
+          <a:effectRef idx="1">
+            <a:schemeClr val="accent1"/>
+          </a:effectRef>
+          <a:fontRef idx="minor">
+            <a:schemeClr val="tx1"/>
+          </a:fontRef>
+        </p:style>
+      </p:cxnSp>
+      <p:cxnSp>
+        <p:nvCxnSpPr>
+          <p:cNvPr id="20" name="Connector 19"/>
+          <p:cNvCxnSpPr/>
+          <p:nvPr/>
+        </p:nvCxnSpPr>
+        <p:spPr>
+          <a:xfrm flipV="1">
+            <a:off x="4937760.0" y="2357048.88"/>
+            <a:ext cx="22860.0" cy="24505.919999999925"/>
+          </a:xfrm>
+          <a:prstGeom prst="line">
+            <a:avLst/>
+          </a:prstGeom>
+          <a:ln w="25400">
+            <a:solidFill>
+              <a:srgbClr val="00C8FF"/>
+            </a:solidFill>
+          </a:ln>
+        </p:spPr>
+        <p:style>
+          <a:lnRef idx="2">
+            <a:schemeClr val="accent1"/>
+          </a:lnRef>
+          <a:fillRef idx="0">
+            <a:schemeClr val="accent1"/>
+          </a:fillRef>
+          <a:effectRef idx="1">
+            <a:schemeClr val="accent1"/>
+          </a:effectRef>
+          <a:fontRef idx="minor">
+            <a:schemeClr val="tx1"/>
+          </a:fontRef>
+        </p:style>
+      </p:cxnSp>
+      <p:cxnSp>
+        <p:nvCxnSpPr>
+          <p:cNvPr id="21" name="Connector 20"/>
+          <p:cNvCxnSpPr/>
+          <p:nvPr/>
+        </p:nvCxnSpPr>
+        <p:spPr>
+          <a:xfrm flipV="1">
+            <a:off x="4960620.0" y="2331034.2"/>
+            <a:ext cx="22860.0" cy="26014.679999999702"/>
+          </a:xfrm>
+          <a:prstGeom prst="line">
+            <a:avLst/>
+          </a:prstGeom>
+          <a:ln w="25400">
+            <a:solidFill>
+              <a:srgbClr val="00C8FF"/>
+            </a:solidFill>
+          </a:ln>
+        </p:spPr>
+        <p:style>
+          <a:lnRef idx="2">
+            <a:schemeClr val="accent1"/>
+          </a:lnRef>
+          <a:fillRef idx="0">
+            <a:schemeClr val="accent1"/>
+          </a:fillRef>
+          <a:effectRef idx="1">
+            <a:schemeClr val="accent1"/>
+          </a:effectRef>
+          <a:fontRef idx="minor">
+            <a:schemeClr val="tx1"/>
+          </a:fontRef>
+        </p:style>
+      </p:cxnSp>
+      <p:cxnSp>
+        <p:nvCxnSpPr>
+          <p:cNvPr id="22" name="Connector 21"/>
+          <p:cNvCxnSpPr/>
+          <p:nvPr/>
+        </p:nvCxnSpPr>
+        <p:spPr>
+          <a:xfrm flipV="1">
+            <a:off x="4983480.0" y="2303556.48"/>
+            <a:ext cx="22860.0" cy="27477.720000000205"/>
+          </a:xfrm>
+          <a:prstGeom prst="line">
+            <a:avLst/>
+          </a:prstGeom>
+          <a:ln w="25400">
+            <a:solidFill>
+              <a:srgbClr val="00C8FF"/>
+            </a:solidFill>
+          </a:ln>
+        </p:spPr>
+        <p:style>
+          <a:lnRef idx="2">
+            <a:schemeClr val="accent1"/>
+          </a:lnRef>
+          <a:fillRef idx="0">
+            <a:schemeClr val="accent1"/>
+          </a:fillRef>
+          <a:effectRef idx="1">
+            <a:schemeClr val="accent1"/>
+          </a:effectRef>
+          <a:fontRef idx="minor">
+            <a:schemeClr val="tx1"/>
+          </a:fontRef>
+        </p:style>
+      </p:cxnSp>
+      <p:cxnSp>
+        <p:nvCxnSpPr>
+          <p:cNvPr id="23" name="Connector 22"/>
+          <p:cNvCxnSpPr/>
+          <p:nvPr/>
+        </p:nvCxnSpPr>
+        <p:spPr>
+          <a:xfrm flipV="1">
+            <a:off x="5006340.0" y="2274570.0"/>
+            <a:ext cx="22860.0" cy="28986.47999999998"/>
+          </a:xfrm>
+          <a:prstGeom prst="line">
+            <a:avLst/>
+          </a:prstGeom>
+          <a:ln w="25400">
+            <a:solidFill>
+              <a:srgbClr val="00C8FF"/>
+            </a:solidFill>
+          </a:ln>
+        </p:spPr>
+        <p:style>
+          <a:lnRef idx="2">
+            <a:schemeClr val="accent1"/>
+          </a:lnRef>
+          <a:fillRef idx="0">
+            <a:schemeClr val="accent1"/>
+          </a:fillRef>
+          <a:effectRef idx="1">
+            <a:schemeClr val="accent1"/>
+          </a:effectRef>
+          <a:fontRef idx="minor">
+            <a:schemeClr val="tx1"/>
+          </a:fontRef>
+        </p:style>
+      </p:cxnSp>
+      <p:cxnSp>
+        <p:nvCxnSpPr>
+          <p:cNvPr id="24" name="Connector 23"/>
+          <p:cNvCxnSpPr/>
+          <p:nvPr/>
+        </p:nvCxnSpPr>
+        <p:spPr>
+          <a:xfrm flipV="1">
+            <a:off x="5029200.0" y="2244120.48"/>
+            <a:ext cx="22860.0" cy="30449.52000000002"/>
+          </a:xfrm>
+          <a:prstGeom prst="line">
+            <a:avLst/>
+          </a:prstGeom>
+          <a:ln w="25400">
+            <a:solidFill>
+              <a:srgbClr val="00C8FF"/>
+            </a:solidFill>
+          </a:ln>
+        </p:spPr>
+        <p:style>
+          <a:lnRef idx="2">
+            <a:schemeClr val="accent1"/>
+          </a:lnRef>
+          <a:fillRef idx="0">
+            <a:schemeClr val="accent1"/>
+          </a:fillRef>
+          <a:effectRef idx="1">
+            <a:schemeClr val="accent1"/>
+          </a:effectRef>
+          <a:fontRef idx="minor">
+            <a:schemeClr val="tx1"/>
+          </a:fontRef>
+        </p:style>
+      </p:cxnSp>
+      <p:cxnSp>
+        <p:nvCxnSpPr>
+          <p:cNvPr id="25" name="Connector 24"/>
+          <p:cNvCxnSpPr/>
+          <p:nvPr/>
+        </p:nvCxnSpPr>
+        <p:spPr>
+          <a:xfrm flipV="1">
+            <a:off x="5052060.0" y="2212162.2"/>
+            <a:ext cx="22860.0" cy="31958.279999999795"/>
+          </a:xfrm>
+          <a:prstGeom prst="line">
+            <a:avLst/>
+          </a:prstGeom>
+          <a:ln w="25400">
+            <a:solidFill>
+              <a:srgbClr val="00C8FF"/>
+            </a:solidFill>
+          </a:ln>
+        </p:spPr>
+        <p:style>
+          <a:lnRef idx="2">
+            <a:schemeClr val="accent1"/>
+          </a:lnRef>
+          <a:fillRef idx="0">
+            <a:schemeClr val="accent1"/>
+          </a:fillRef>
+          <a:effectRef idx="1">
+            <a:schemeClr val="accent1"/>
+          </a:effectRef>
+          <a:fontRef idx="minor">
+            <a:schemeClr val="tx1"/>
+          </a:fontRef>
+        </p:style>
+      </p:cxnSp>
+      <p:cxnSp>
+        <p:nvCxnSpPr>
+          <p:cNvPr id="26" name="Connector 25"/>
+          <p:cNvCxnSpPr/>
+          <p:nvPr/>
+        </p:nvCxnSpPr>
+        <p:spPr>
+          <a:xfrm flipV="1">
+            <a:off x="5074920.0" y="2178740.88"/>
+            <a:ext cx="22860.0" cy="33421.3200000003"/>
+          </a:xfrm>
+          <a:prstGeom prst="line">
+            <a:avLst/>
+          </a:prstGeom>
+          <a:ln w="25400">
+            <a:solidFill>
+              <a:srgbClr val="00C8FF"/>
+            </a:solidFill>
+          </a:ln>
+        </p:spPr>
+        <p:style>
+          <a:lnRef idx="2">
+            <a:schemeClr val="accent1"/>
+          </a:lnRef>
+          <a:fillRef idx="0">
+            <a:schemeClr val="accent1"/>
+          </a:fillRef>
+          <a:effectRef idx="1">
+            <a:schemeClr val="accent1"/>
+          </a:effectRef>
+          <a:fontRef idx="minor">
+            <a:schemeClr val="tx1"/>
+          </a:fontRef>
+        </p:style>
+      </p:cxnSp>
+      <p:cxnSp>
+        <p:nvCxnSpPr>
+          <p:cNvPr id="27" name="Connector 26"/>
+          <p:cNvCxnSpPr/>
+          <p:nvPr/>
+        </p:nvCxnSpPr>
+        <p:spPr>
+          <a:xfrm flipV="1">
+            <a:off x="5097780.0" y="2143810.8"/>
+            <a:ext cx="22860.0" cy="34930.080000000075"/>
+          </a:xfrm>
+          <a:prstGeom prst="line">
+            <a:avLst/>
+          </a:prstGeom>
+          <a:ln w="25400">
+            <a:solidFill>
+              <a:srgbClr val="00C8FF"/>
+            </a:solidFill>
+          </a:ln>
+        </p:spPr>
+        <p:style>
+          <a:lnRef idx="2">
+            <a:schemeClr val="accent1"/>
+          </a:lnRef>
+          <a:fillRef idx="0">
+            <a:schemeClr val="accent1"/>
+          </a:fillRef>
+          <a:effectRef idx="1">
+            <a:schemeClr val="accent1"/>
+          </a:effectRef>
+          <a:fontRef idx="minor">
+            <a:schemeClr val="tx1"/>
+          </a:fontRef>
+        </p:style>
+      </p:cxnSp>
+      <p:cxnSp>
+        <p:nvCxnSpPr>
+          <p:cNvPr id="28" name="Connector 27"/>
+          <p:cNvCxnSpPr/>
+          <p:nvPr/>
+        </p:nvCxnSpPr>
+        <p:spPr>
+          <a:xfrm flipV="1">
+            <a:off x="5120640.0" y="2107417.68"/>
+            <a:ext cx="22860.0" cy="36393.119999999646"/>
+          </a:xfrm>
+          <a:prstGeom prst="line">
+            <a:avLst/>
+          </a:prstGeom>
+          <a:ln w="25400">
+            <a:solidFill>
+              <a:srgbClr val="00C8FF"/>
+            </a:solidFill>
+          </a:ln>
+        </p:spPr>
+        <p:style>
+          <a:lnRef idx="2">
+            <a:schemeClr val="accent1"/>
+          </a:lnRef>
+          <a:fillRef idx="0">
+            <a:schemeClr val="accent1"/>
+          </a:fillRef>
+          <a:effectRef idx="1">
+            <a:schemeClr val="accent1"/>
+          </a:effectRef>
+          <a:fontRef idx="minor">
+            <a:schemeClr val="tx1"/>
+          </a:fontRef>
+        </p:style>
+      </p:cxnSp>
+      <p:sp>
+        <p:nvSpPr>
+          <p:cNvPr id="29" name="Oval 28"/>
           <p:cNvSpPr/>
           <p:nvPr/>
         </p:nvSpPr>
         <p:spPr>
           <a:xfrm>
-            <a:off x="5905500" y="1162050"/>
+            <a:off x="4991100" y="2236470"/>
             <a:ext cx="76200" cy="76200"/>
           </a:xfrm>
           <a:prstGeom prst="ellipse">
@@ -3635,13 +4088,13 @@
       </p:sp>
       <p:sp>
         <p:nvSpPr>
-          <p:cNvPr id="17" name="TextBox 16"/>
+          <p:cNvPr id="30" name="TextBox 29"/>
           <p:cNvSpPr txBox="1"/>
           <p:nvPr/>
         </p:nvSpPr>
         <p:spPr>
           <a:xfrm>
-            <a:off x="7086600" y="2663190"/>
+            <a:off x="4572000" y="2571750"/>
             <a:ext cx="635000" cy="254000"/>
           </a:xfrm>
           <a:prstGeom prst="rect">
@@ -3664,20 +4117,20 @@
               </a:defRPr>
             </a:pPr>
             <a:r>
-              <a:t>x</a:t>
-            </a:r>
-          </a:p>
-        </p:txBody>
-      </p:sp>
-      <p:sp>
-        <p:nvSpPr>
-          <p:cNvPr id="18" name="TextBox 17"/>
+              <a:t>O</a:t>
+            </a:r>
+          </a:p>
+        </p:txBody>
+      </p:sp>
+      <p:sp>
+        <p:nvSpPr>
+          <p:cNvPr id="31" name="TextBox 30"/>
           <p:cNvSpPr txBox="1"/>
           <p:nvPr/>
         </p:nvSpPr>
         <p:spPr>
           <a:xfrm>
-            <a:off x="4480560" y="57150"/>
+            <a:off x="5166360" y="2594610"/>
             <a:ext cx="635000" cy="254000"/>
           </a:xfrm>
           <a:prstGeom prst="rect">
@@ -3700,20 +4153,20 @@
               </a:defRPr>
             </a:pPr>
             <a:r>
-              <a:t>y</a:t>
-            </a:r>
-          </a:p>
-        </p:txBody>
-      </p:sp>
-      <p:sp>
-        <p:nvSpPr>
-          <p:cNvPr id="19" name="TextBox 18"/>
+              <a:t>x</a:t>
+            </a:r>
+          </a:p>
+        </p:txBody>
+      </p:sp>
+      <p:sp>
+        <p:nvSpPr>
+          <p:cNvPr id="32" name="TextBox 31"/>
           <p:cNvSpPr txBox="1"/>
           <p:nvPr/>
         </p:nvSpPr>
         <p:spPr>
           <a:xfrm>
-            <a:off x="4434840" y="2708910"/>
+            <a:off x="4549140" y="2068830"/>
             <a:ext cx="635000" cy="254000"/>
           </a:xfrm>
           <a:prstGeom prst="rect">
@@ -3736,20 +4189,20 @@
               </a:defRPr>
             </a:pPr>
             <a:r>
-              <a:t>O</a:t>
-            </a:r>
-          </a:p>
-        </p:txBody>
-      </p:sp>
-      <p:sp>
-        <p:nvSpPr>
-          <p:cNvPr id="20" name="TextBox 19"/>
+              <a:t>y</a:t>
+            </a:r>
+          </a:p>
+        </p:txBody>
+      </p:sp>
+      <p:sp>
+        <p:nvSpPr>
+          <p:cNvPr id="33" name="TextBox 32"/>
           <p:cNvSpPr txBox="1"/>
           <p:nvPr/>
         </p:nvSpPr>
         <p:spPr>
           <a:xfrm>
-            <a:off x="5943600" y="2754630"/>
+            <a:off x="5029200" y="2594610"/>
             <a:ext cx="635000" cy="254000"/>
           </a:xfrm>
           <a:prstGeom prst="rect">
@@ -3779,13 +4232,13 @@
       </p:sp>
       <p:sp>
         <p:nvSpPr>
-          <p:cNvPr id="21" name="TextBox 20"/>
+          <p:cNvPr id="34" name="TextBox 33"/>
           <p:cNvSpPr txBox="1"/>
           <p:nvPr/>
         </p:nvSpPr>
         <p:spPr>
           <a:xfrm>
-            <a:off x="4251960" y="1200150"/>
+            <a:off x="4526280" y="2274570"/>
             <a:ext cx="635000" cy="254000"/>
           </a:xfrm>
           <a:prstGeom prst="rect">
@@ -3808,20 +4261,20 @@
               </a:defRPr>
             </a:pPr>
             <a:r>
-              <a:t>f(a)</a:t>
-            </a:r>
-          </a:p>
-        </p:txBody>
-      </p:sp>
-      <p:sp>
-        <p:nvSpPr>
-          <p:cNvPr id="22" name="TextBox 21"/>
+              <a:t>$f(a)$</a:t>
+            </a:r>
+          </a:p>
+        </p:txBody>
+      </p:sp>
+      <p:sp>
+        <p:nvSpPr>
+          <p:cNvPr id="35" name="TextBox 34"/>
           <p:cNvSpPr txBox="1"/>
           <p:nvPr/>
         </p:nvSpPr>
         <p:spPr>
           <a:xfrm>
-            <a:off x="6400800" y="377190"/>
+            <a:off x="5052060" y="2183130"/>
             <a:ext cx="635000" cy="254000"/>
           </a:xfrm>
           <a:prstGeom prst="rect">
@@ -3844,7 +4297,7 @@
               </a:defRPr>
             </a:pPr>
             <a:r>
-              <a:t>y=f(x)</a:t>
+              <a:t>$y=f(x)$</a:t>
             </a:r>
           </a:p>
         </p:txBody>

--- a/output/2.pptx
+++ b/output/2.pptx
@@ -3174,8 +3174,8 @@
         </p:nvCxnSpPr>
         <p:spPr>
           <a:xfrm flipV="1">
-            <a:off x="4572000.0" y="2571018.48"/>
-            <a:ext cx="22860.0" cy="731.5200000000186"/>
+            <a:off x="4800600.0" y="2457450.0"/>
+            <a:ext cx="45720.0" cy="22860.0"/>
           </a:xfrm>
           <a:prstGeom prst="line">
             <a:avLst/>
@@ -3209,8 +3209,8 @@
         </p:nvCxnSpPr>
         <p:spPr>
           <a:xfrm flipV="1">
-            <a:off x="4594860.0" y="2568778.2"/>
-            <a:ext cx="22860.0" cy="2240.279999999795"/>
+            <a:off x="4846320.0" y="2430018.0"/>
+            <a:ext cx="45720.0" cy="27432.0"/>
           </a:xfrm>
           <a:prstGeom prst="line">
             <a:avLst/>
@@ -3244,8 +3244,8 @@
         </p:nvCxnSpPr>
         <p:spPr>
           <a:xfrm flipV="1">
-            <a:off x="4617720.0" y="2565074.88"/>
-            <a:ext cx="22860.0" cy="3703.320000000298"/>
+            <a:off x="4892040.0" y="2393442.0"/>
+            <a:ext cx="45720.0" cy="36576.0"/>
           </a:xfrm>
           <a:prstGeom prst="line">
             <a:avLst/>
@@ -3279,8 +3279,8 @@
         </p:nvCxnSpPr>
         <p:spPr>
           <a:xfrm flipV="1">
-            <a:off x="4640580.0" y="2559862.8"/>
-            <a:ext cx="22860.0" cy="5212.0800000000745"/>
+            <a:off x="4937760.0" y="2356866.0"/>
+            <a:ext cx="45720.0" cy="36576.0"/>
           </a:xfrm>
           <a:prstGeom prst="line">
             <a:avLst/>
@@ -3314,8 +3314,8 @@
         </p:nvCxnSpPr>
         <p:spPr>
           <a:xfrm flipV="1">
-            <a:off x="4663440.0" y="2553187.68"/>
-            <a:ext cx="22860.0" cy="6675.119999999646"/>
+            <a:off x="4983480.0" y="2315718.0"/>
+            <a:ext cx="45720.0" cy="41148.0"/>
           </a:xfrm>
           <a:prstGeom prst="line">
             <a:avLst/>
@@ -3349,8 +3349,8 @@
         </p:nvCxnSpPr>
         <p:spPr>
           <a:xfrm flipV="1">
-            <a:off x="4686300.0" y="2545003.8"/>
-            <a:ext cx="22860.0" cy="8183.880000000354"/>
+            <a:off x="5029200.0" y="2269998.0"/>
+            <a:ext cx="45720.0" cy="45720.0"/>
           </a:xfrm>
           <a:prstGeom prst="line">
             <a:avLst/>
@@ -3384,8 +3384,8 @@
         </p:nvCxnSpPr>
         <p:spPr>
           <a:xfrm flipV="1">
-            <a:off x="4709160.0" y="2535356.88"/>
-            <a:ext cx="22860.0" cy="9646.919999999925"/>
+            <a:off x="5074920.0" y="2219706.0"/>
+            <a:ext cx="45720.0" cy="50292.0"/>
           </a:xfrm>
           <a:prstGeom prst="line">
             <a:avLst/>
@@ -3419,8 +3419,8 @@
         </p:nvCxnSpPr>
         <p:spPr>
           <a:xfrm flipV="1">
-            <a:off x="4732020.0" y="2524201.2"/>
-            <a:ext cx="22860.0" cy="11155.679999999702"/>
+            <a:off x="5120640.0" y="2164842.0"/>
+            <a:ext cx="45720.0" cy="54864.0"/>
           </a:xfrm>
           <a:prstGeom prst="line">
             <a:avLst/>
@@ -3454,8 +3454,8 @@
         </p:nvCxnSpPr>
         <p:spPr>
           <a:xfrm flipV="1">
-            <a:off x="4754880.0" y="2511582.48"/>
-            <a:ext cx="22860.0" cy="12618.720000000205"/>
+            <a:off x="5166360.0" y="2105406.0"/>
+            <a:ext cx="45720.0" cy="59436.0"/>
           </a:xfrm>
           <a:prstGeom prst="line">
             <a:avLst/>
@@ -3489,8 +3489,8 @@
         </p:nvCxnSpPr>
         <p:spPr>
           <a:xfrm flipV="1">
-            <a:off x="4777740.0" y="2497455.0"/>
-            <a:ext cx="22860.0" cy="14127.479999999981"/>
+            <a:off x="5212080.0" y="2041398.0"/>
+            <a:ext cx="45720.0" cy="64008.0"/>
           </a:xfrm>
           <a:prstGeom prst="line">
             <a:avLst/>
@@ -3524,8 +3524,8 @@
         </p:nvCxnSpPr>
         <p:spPr>
           <a:xfrm flipV="1">
-            <a:off x="4800600.0" y="2481864.48"/>
-            <a:ext cx="22860.0" cy="15590.520000000019"/>
+            <a:off x="5257800.0" y="1972818.0"/>
+            <a:ext cx="45720.0" cy="68580.0"/>
           </a:xfrm>
           <a:prstGeom prst="line">
             <a:avLst/>
@@ -3559,8 +3559,8 @@
         </p:nvCxnSpPr>
         <p:spPr>
           <a:xfrm flipV="1">
-            <a:off x="4823460.0" y="2464765.2"/>
-            <a:ext cx="22860.0" cy="17099.279999999795"/>
+            <a:off x="5303520.0" y="1899666.0"/>
+            <a:ext cx="45720.0" cy="73152.0"/>
           </a:xfrm>
           <a:prstGeom prst="line">
             <a:avLst/>
@@ -3594,8 +3594,8 @@
         </p:nvCxnSpPr>
         <p:spPr>
           <a:xfrm flipV="1">
-            <a:off x="4846320.0" y="2446202.88"/>
-            <a:ext cx="22860.0" cy="18562.320000000298"/>
+            <a:off x="5349240.0" y="1821942.0"/>
+            <a:ext cx="45720.0" cy="77724.0"/>
           </a:xfrm>
           <a:prstGeom prst="line">
             <a:avLst/>
@@ -3629,8 +3629,8 @@
         </p:nvCxnSpPr>
         <p:spPr>
           <a:xfrm flipV="1">
-            <a:off x="4869180.0" y="2426131.8"/>
-            <a:ext cx="22860.0" cy="20071.080000000075"/>
+            <a:off x="5394960.0" y="1739646.0"/>
+            <a:ext cx="45720.0" cy="82296.0"/>
           </a:xfrm>
           <a:prstGeom prst="line">
             <a:avLst/>
@@ -3664,8 +3664,8 @@
         </p:nvCxnSpPr>
         <p:spPr>
           <a:xfrm flipV="1">
-            <a:off x="4892040.0" y="2404597.68"/>
-            <a:ext cx="22860.0" cy="21534.119999999646"/>
+            <a:off x="5440680.0" y="1657350.0"/>
+            <a:ext cx="45720.0" cy="82296.0"/>
           </a:xfrm>
           <a:prstGeom prst="line">
             <a:avLst/>
@@ -3699,8 +3699,8 @@
         </p:nvCxnSpPr>
         <p:spPr>
           <a:xfrm flipV="1">
-            <a:off x="4914900.0" y="2381554.8"/>
-            <a:ext cx="22860.0" cy="23042.880000000354"/>
+            <a:off x="5486400.0" y="1570482.0"/>
+            <a:ext cx="45720.0" cy="86868.0"/>
           </a:xfrm>
           <a:prstGeom prst="line">
             <a:avLst/>
@@ -3734,8 +3734,8 @@
         </p:nvCxnSpPr>
         <p:spPr>
           <a:xfrm flipV="1">
-            <a:off x="4937760.0" y="2357048.88"/>
-            <a:ext cx="22860.0" cy="24505.919999999925"/>
+            <a:off x="5532120.0" y="1479042.0"/>
+            <a:ext cx="45720.0" cy="91440.0"/>
           </a:xfrm>
           <a:prstGeom prst="line">
             <a:avLst/>
@@ -3769,8 +3769,8 @@
         </p:nvCxnSpPr>
         <p:spPr>
           <a:xfrm flipV="1">
-            <a:off x="4960620.0" y="2331034.2"/>
-            <a:ext cx="22860.0" cy="26014.679999999702"/>
+            <a:off x="5577840.0" y="1383030.0"/>
+            <a:ext cx="45720.0" cy="96012.0"/>
           </a:xfrm>
           <a:prstGeom prst="line">
             <a:avLst/>
@@ -3804,8 +3804,8 @@
         </p:nvCxnSpPr>
         <p:spPr>
           <a:xfrm flipV="1">
-            <a:off x="4983480.0" y="2303556.48"/>
-            <a:ext cx="22860.0" cy="27477.720000000205"/>
+            <a:off x="5623560.0" y="1282446.0"/>
+            <a:ext cx="45720.0" cy="100584.0"/>
           </a:xfrm>
           <a:prstGeom prst="line">
             <a:avLst/>
@@ -3839,8 +3839,8 @@
         </p:nvCxnSpPr>
         <p:spPr>
           <a:xfrm flipV="1">
-            <a:off x="5006340.0" y="2274570.0"/>
-            <a:ext cx="22860.0" cy="28986.47999999998"/>
+            <a:off x="5669280.0" y="1177290.0"/>
+            <a:ext cx="45720.0" cy="105156.0"/>
           </a:xfrm>
           <a:prstGeom prst="line">
             <a:avLst/>
@@ -3874,8 +3874,8 @@
         </p:nvCxnSpPr>
         <p:spPr>
           <a:xfrm flipV="1">
-            <a:off x="5029200.0" y="2244120.48"/>
-            <a:ext cx="22860.0" cy="30449.52000000002"/>
+            <a:off x="5715000.0" y="1067562.0"/>
+            <a:ext cx="45720.0" cy="109728.0"/>
           </a:xfrm>
           <a:prstGeom prst="line">
             <a:avLst/>
@@ -3909,8 +3909,8 @@
         </p:nvCxnSpPr>
         <p:spPr>
           <a:xfrm flipV="1">
-            <a:off x="5052060.0" y="2212162.2"/>
-            <a:ext cx="22860.0" cy="31958.279999999795"/>
+            <a:off x="5760720.0" y="953262.0"/>
+            <a:ext cx="45720.0" cy="114300.0"/>
           </a:xfrm>
           <a:prstGeom prst="line">
             <a:avLst/>
@@ -3944,8 +3944,8 @@
         </p:nvCxnSpPr>
         <p:spPr>
           <a:xfrm flipV="1">
-            <a:off x="5074920.0" y="2178740.88"/>
-            <a:ext cx="22860.0" cy="33421.3200000003"/>
+            <a:off x="5806440.0" y="834390.0"/>
+            <a:ext cx="45720.0" cy="118872.0"/>
           </a:xfrm>
           <a:prstGeom prst="line">
             <a:avLst/>
@@ -3979,8 +3979,8 @@
         </p:nvCxnSpPr>
         <p:spPr>
           <a:xfrm flipV="1">
-            <a:off x="5097780.0" y="2143810.8"/>
-            <a:ext cx="22860.0" cy="34930.080000000075"/>
+            <a:off x="5852160.0" y="710945.9999999998"/>
+            <a:ext cx="45720.0" cy="123444.00000000023"/>
           </a:xfrm>
           <a:prstGeom prst="line">
             <a:avLst/>
@@ -4014,8 +4014,8 @@
         </p:nvCxnSpPr>
         <p:spPr>
           <a:xfrm flipV="1">
-            <a:off x="5120640.0" y="2107417.68"/>
-            <a:ext cx="22860.0" cy="36393.119999999646"/>
+            <a:off x="5897880.0" y="578357.9999999998"/>
+            <a:ext cx="45720.0" cy="132588.0"/>
           </a:xfrm>
           <a:prstGeom prst="line">
             <a:avLst/>
@@ -4049,7 +4049,7 @@
         </p:nvSpPr>
         <p:spPr>
           <a:xfrm>
-            <a:off x="4991100" y="2236470"/>
+            <a:off x="5448300" y="1619250"/>
             <a:ext cx="76200" cy="76200"/>
           </a:xfrm>
           <a:prstGeom prst="ellipse">
@@ -4094,7 +4094,7 @@
         </p:nvSpPr>
         <p:spPr>
           <a:xfrm>
-            <a:off x="4572000" y="2571750"/>
+            <a:off x="4480560" y="2663190"/>
             <a:ext cx="635000" cy="254000"/>
           </a:xfrm>
           <a:prstGeom prst="rect">
@@ -4117,7 +4117,7 @@
               </a:defRPr>
             </a:pPr>
             <a:r>
-              <a:t>O</a:t>
+              <a:t>$O$</a:t>
             </a:r>
           </a:p>
         </p:txBody>
@@ -4130,7 +4130,7 @@
         </p:nvSpPr>
         <p:spPr>
           <a:xfrm>
-            <a:off x="5166360" y="2594610"/>
+            <a:off x="6035040" y="2708910"/>
             <a:ext cx="635000" cy="254000"/>
           </a:xfrm>
           <a:prstGeom prst="rect">
@@ -4153,7 +4153,7 @@
               </a:defRPr>
             </a:pPr>
             <a:r>
-              <a:t>x</a:t>
+              <a:t>$x$</a:t>
             </a:r>
           </a:p>
         </p:txBody>
@@ -4166,7 +4166,7 @@
         </p:nvSpPr>
         <p:spPr>
           <a:xfrm>
-            <a:off x="4549140" y="2068830"/>
+            <a:off x="4434840" y="742950"/>
             <a:ext cx="635000" cy="254000"/>
           </a:xfrm>
           <a:prstGeom prst="rect">
@@ -4189,7 +4189,7 @@
               </a:defRPr>
             </a:pPr>
             <a:r>
-              <a:t>y</a:t>
+              <a:t>$y$</a:t>
             </a:r>
           </a:p>
         </p:txBody>
@@ -4202,7 +4202,7 @@
         </p:nvSpPr>
         <p:spPr>
           <a:xfrm>
-            <a:off x="5029200" y="2594610"/>
+            <a:off x="5486400" y="2754630"/>
             <a:ext cx="635000" cy="254000"/>
           </a:xfrm>
           <a:prstGeom prst="rect">
@@ -4225,7 +4225,7 @@
               </a:defRPr>
             </a:pPr>
             <a:r>
-              <a:t>a</a:t>
+              <a:t>$a$</a:t>
             </a:r>
           </a:p>
         </p:txBody>
@@ -4238,7 +4238,7 @@
         </p:nvSpPr>
         <p:spPr>
           <a:xfrm>
-            <a:off x="4526280" y="2274570"/>
+            <a:off x="4343400" y="1657350"/>
             <a:ext cx="635000" cy="254000"/>
           </a:xfrm>
           <a:prstGeom prst="rect">
@@ -4274,7 +4274,7 @@
         </p:nvSpPr>
         <p:spPr>
           <a:xfrm>
-            <a:off x="5052060" y="2183130"/>
+            <a:off x="5760720" y="1200150"/>
             <a:ext cx="635000" cy="254000"/>
           </a:xfrm>
           <a:prstGeom prst="rect">

--- a/output/2.pptx
+++ b/output/2.pptx
@@ -3174,8 +3174,8 @@
         </p:nvCxnSpPr>
         <p:spPr>
           <a:xfrm flipV="1">
-            <a:off x="4800600.0" y="2457450.0"/>
-            <a:ext cx="45720.0" cy="22860.0"/>
+            <a:off x="4663440.0" y="2476606.68"/>
+            <a:ext cx="182880.0" cy="76901.04000000004"/>
           </a:xfrm>
           <a:prstGeom prst="line">
             <a:avLst/>
@@ -3209,8 +3209,8 @@
         </p:nvCxnSpPr>
         <p:spPr>
           <a:xfrm flipV="1">
-            <a:off x="4846320.0" y="2430018.0"/>
-            <a:ext cx="45720.0" cy="27432.0"/>
+            <a:off x="4846320.0" y="2367290.16"/>
+            <a:ext cx="182880.0" cy="109316.52000000002"/>
           </a:xfrm>
           <a:prstGeom prst="line">
             <a:avLst/>
@@ -3244,8 +3244,8 @@
         </p:nvCxnSpPr>
         <p:spPr>
           <a:xfrm flipV="1">
-            <a:off x="4892040.0" y="2393442.0"/>
-            <a:ext cx="45720.0" cy="36576.0"/>
+            <a:off x="5029200.0" y="2232873.36"/>
+            <a:ext cx="182880.0" cy="134416.80000000028"/>
           </a:xfrm>
           <a:prstGeom prst="line">
             <a:avLst/>
@@ -3279,8 +3279,8 @@
         </p:nvCxnSpPr>
         <p:spPr>
           <a:xfrm flipV="1">
-            <a:off x="4937760.0" y="2356866.0"/>
-            <a:ext cx="45720.0" cy="36576.0"/>
+            <a:off x="5212080.0" y="2078705.52"/>
+            <a:ext cx="182880.0" cy="154167.83999999985"/>
           </a:xfrm>
           <a:prstGeom prst="line">
             <a:avLst/>
@@ -3314,8 +3314,8 @@
         </p:nvCxnSpPr>
         <p:spPr>
           <a:xfrm flipV="1">
-            <a:off x="4983480.0" y="2315718.0"/>
-            <a:ext cx="45720.0" cy="41148.0"/>
+            <a:off x="5394960.0" y="1906432.56"/>
+            <a:ext cx="182880.0" cy="172272.95999999996"/>
           </a:xfrm>
           <a:prstGeom prst="line">
             <a:avLst/>
@@ -3349,8 +3349,8 @@
         </p:nvCxnSpPr>
         <p:spPr>
           <a:xfrm flipV="1">
-            <a:off x="5029200.0" y="2269998.0"/>
-            <a:ext cx="45720.0" cy="45720.0"/>
+            <a:off x="5577840.0" y="1714408.56"/>
+            <a:ext cx="182880.0" cy="192024.0"/>
           </a:xfrm>
           <a:prstGeom prst="line">
             <a:avLst/>
@@ -3384,8 +3384,8 @@
         </p:nvCxnSpPr>
         <p:spPr>
           <a:xfrm flipV="1">
-            <a:off x="5074920.0" y="2219706.0"/>
-            <a:ext cx="45720.0" cy="50292.0"/>
+            <a:off x="5760720.0" y="1503547.9200000002"/>
+            <a:ext cx="182880.0" cy="210860.6399999999"/>
           </a:xfrm>
           <a:prstGeom prst="line">
             <a:avLst/>
@@ -3419,8 +3419,8 @@
         </p:nvCxnSpPr>
         <p:spPr>
           <a:xfrm flipV="1">
-            <a:off x="5120640.0" y="2164842.0"/>
-            <a:ext cx="45720.0" cy="54864.0"/>
+            <a:off x="5943600.0" y="1273027.6800000002"/>
+            <a:ext cx="182880.0" cy="230520.24"/>
           </a:xfrm>
           <a:prstGeom prst="line">
             <a:avLst/>
@@ -3454,8 +3454,8 @@
         </p:nvCxnSpPr>
         <p:spPr>
           <a:xfrm flipV="1">
-            <a:off x="5166360.0" y="2105406.0"/>
-            <a:ext cx="45720.0" cy="59436.0"/>
+            <a:off x="6126480.0" y="1022847.8400000001"/>
+            <a:ext cx="182880.0" cy="250179.84000000008"/>
           </a:xfrm>
           <a:prstGeom prst="line">
             <a:avLst/>
@@ -3489,8 +3489,8 @@
         </p:nvCxnSpPr>
         <p:spPr>
           <a:xfrm flipV="1">
-            <a:off x="5212080.0" y="2041398.0"/>
-            <a:ext cx="45720.0" cy="64008.0"/>
+            <a:off x="6309360.0" y="752916.96"/>
+            <a:ext cx="182880.0" cy="269930.8800000001"/>
           </a:xfrm>
           <a:prstGeom prst="line">
             <a:avLst/>
@@ -3524,8 +3524,8 @@
         </p:nvCxnSpPr>
         <p:spPr>
           <a:xfrm flipV="1">
-            <a:off x="5257800.0" y="1972818.0"/>
-            <a:ext cx="45720.0" cy="68580.0"/>
+            <a:off x="6492240.0" y="463326.48"/>
+            <a:ext cx="182880.0" cy="289590.48"/>
           </a:xfrm>
           <a:prstGeom prst="line">
             <a:avLst/>
@@ -3559,8 +3559,8 @@
         </p:nvCxnSpPr>
         <p:spPr>
           <a:xfrm flipV="1">
-            <a:off x="5303520.0" y="1899666.0"/>
-            <a:ext cx="45720.0" cy="73152.0"/>
+            <a:off x="6675120.0" y="285750.0"/>
+            <a:ext cx="182880.0" cy="177576.47999999998"/>
           </a:xfrm>
           <a:prstGeom prst="line">
             <a:avLst/>
@@ -3594,8 +3594,8 @@
         </p:nvCxnSpPr>
         <p:spPr>
           <a:xfrm flipV="1">
-            <a:off x="5349240.0" y="1821942.0"/>
-            <a:ext cx="45720.0" cy="77724.0"/>
+            <a:off x="6858000.0" y="89611.19999999972"/>
+            <a:ext cx="182880.0" cy="196138.80000000028"/>
           </a:xfrm>
           <a:prstGeom prst="line">
             <a:avLst/>
@@ -3629,8 +3629,8 @@
         </p:nvCxnSpPr>
         <p:spPr>
           <a:xfrm flipV="1">
-            <a:off x="5394960.0" y="1739646.0"/>
-            <a:ext cx="45720.0" cy="82296.0"/>
+            <a:off x="7040880.0" y="-123078.23999999976"/>
+            <a:ext cx="182880.0" cy="212689.43999999948"/>
           </a:xfrm>
           <a:prstGeom prst="line">
             <a:avLst/>
@@ -3664,8 +3664,8 @@
         </p:nvCxnSpPr>
         <p:spPr>
           <a:xfrm flipV="1">
-            <a:off x="5440680.0" y="1657350.0"/>
-            <a:ext cx="45720.0" cy="82296.0"/>
+            <a:off x="7223760.0" y="-352592.64000000013"/>
+            <a:ext cx="182880.0" cy="229514.40000000037"/>
           </a:xfrm>
           <a:prstGeom prst="line">
             <a:avLst/>
@@ -3699,8 +3699,8 @@
         </p:nvCxnSpPr>
         <p:spPr>
           <a:xfrm flipV="1">
-            <a:off x="5486400.0" y="1570482.0"/>
-            <a:ext cx="45720.0" cy="86868.0"/>
+            <a:off x="7406640.0" y="-598932.0"/>
+            <a:ext cx="182880.0" cy="246339.35999999987"/>
           </a:xfrm>
           <a:prstGeom prst="line">
             <a:avLst/>
@@ -3734,8 +3734,8 @@
         </p:nvCxnSpPr>
         <p:spPr>
           <a:xfrm flipV="1">
-            <a:off x="5532120.0" y="1479042.0"/>
-            <a:ext cx="45720.0" cy="91440.0"/>
+            <a:off x="7589520.0" y="-862187.7599999998"/>
+            <a:ext cx="182880.0" cy="263255.7599999998"/>
           </a:xfrm>
           <a:prstGeom prst="line">
             <a:avLst/>
@@ -3769,8 +3769,8 @@
         </p:nvCxnSpPr>
         <p:spPr>
           <a:xfrm flipV="1">
-            <a:off x="5577840.0" y="1383030.0"/>
-            <a:ext cx="45720.0" cy="96012.0"/>
+            <a:off x="7772400.0" y="-1142177.0400000005"/>
+            <a:ext cx="182880.0" cy="279989.2800000007"/>
           </a:xfrm>
           <a:prstGeom prst="line">
             <a:avLst/>
@@ -3804,8 +3804,8 @@
         </p:nvCxnSpPr>
         <p:spPr>
           <a:xfrm flipV="1">
-            <a:off x="5623560.0" y="1282446.0"/>
-            <a:ext cx="45720.0" cy="100584.0"/>
+            <a:off x="7955280.0" y="-1438991.2799999998"/>
+            <a:ext cx="182880.0" cy="296814.2399999993"/>
           </a:xfrm>
           <a:prstGeom prst="line">
             <a:avLst/>
@@ -3839,8 +3839,8 @@
         </p:nvCxnSpPr>
         <p:spPr>
           <a:xfrm flipV="1">
-            <a:off x="5669280.0" y="1177290.0"/>
-            <a:ext cx="45720.0" cy="105156.0"/>
+            <a:off x="8138160.0" y="-1752539.04"/>
+            <a:ext cx="182880.0" cy="313547.76000000024"/>
           </a:xfrm>
           <a:prstGeom prst="line">
             <a:avLst/>
@@ -3866,190 +3866,15 @@
           </a:fontRef>
         </p:style>
       </p:cxnSp>
-      <p:cxnSp>
-        <p:nvCxnSpPr>
-          <p:cNvPr id="24" name="Connector 23"/>
-          <p:cNvCxnSpPr/>
-          <p:nvPr/>
-        </p:nvCxnSpPr>
-        <p:spPr>
-          <a:xfrm flipV="1">
-            <a:off x="5715000.0" y="1067562.0"/>
-            <a:ext cx="45720.0" cy="109728.0"/>
-          </a:xfrm>
-          <a:prstGeom prst="line">
-            <a:avLst/>
-          </a:prstGeom>
-          <a:ln w="25400">
-            <a:solidFill>
-              <a:srgbClr val="00C8FF"/>
-            </a:solidFill>
-          </a:ln>
-        </p:spPr>
-        <p:style>
-          <a:lnRef idx="2">
-            <a:schemeClr val="accent1"/>
-          </a:lnRef>
-          <a:fillRef idx="0">
-            <a:schemeClr val="accent1"/>
-          </a:fillRef>
-          <a:effectRef idx="1">
-            <a:schemeClr val="accent1"/>
-          </a:effectRef>
-          <a:fontRef idx="minor">
-            <a:schemeClr val="tx1"/>
-          </a:fontRef>
-        </p:style>
-      </p:cxnSp>
-      <p:cxnSp>
-        <p:nvCxnSpPr>
-          <p:cNvPr id="25" name="Connector 24"/>
-          <p:cNvCxnSpPr/>
-          <p:nvPr/>
-        </p:nvCxnSpPr>
-        <p:spPr>
-          <a:xfrm flipV="1">
-            <a:off x="5760720.0" y="953262.0"/>
-            <a:ext cx="45720.0" cy="114300.0"/>
-          </a:xfrm>
-          <a:prstGeom prst="line">
-            <a:avLst/>
-          </a:prstGeom>
-          <a:ln w="25400">
-            <a:solidFill>
-              <a:srgbClr val="00C8FF"/>
-            </a:solidFill>
-          </a:ln>
-        </p:spPr>
-        <p:style>
-          <a:lnRef idx="2">
-            <a:schemeClr val="accent1"/>
-          </a:lnRef>
-          <a:fillRef idx="0">
-            <a:schemeClr val="accent1"/>
-          </a:fillRef>
-          <a:effectRef idx="1">
-            <a:schemeClr val="accent1"/>
-          </a:effectRef>
-          <a:fontRef idx="minor">
-            <a:schemeClr val="tx1"/>
-          </a:fontRef>
-        </p:style>
-      </p:cxnSp>
-      <p:cxnSp>
-        <p:nvCxnSpPr>
-          <p:cNvPr id="26" name="Connector 25"/>
-          <p:cNvCxnSpPr/>
-          <p:nvPr/>
-        </p:nvCxnSpPr>
-        <p:spPr>
-          <a:xfrm flipV="1">
-            <a:off x="5806440.0" y="834390.0"/>
-            <a:ext cx="45720.0" cy="118872.0"/>
-          </a:xfrm>
-          <a:prstGeom prst="line">
-            <a:avLst/>
-          </a:prstGeom>
-          <a:ln w="25400">
-            <a:solidFill>
-              <a:srgbClr val="00C8FF"/>
-            </a:solidFill>
-          </a:ln>
-        </p:spPr>
-        <p:style>
-          <a:lnRef idx="2">
-            <a:schemeClr val="accent1"/>
-          </a:lnRef>
-          <a:fillRef idx="0">
-            <a:schemeClr val="accent1"/>
-          </a:fillRef>
-          <a:effectRef idx="1">
-            <a:schemeClr val="accent1"/>
-          </a:effectRef>
-          <a:fontRef idx="minor">
-            <a:schemeClr val="tx1"/>
-          </a:fontRef>
-        </p:style>
-      </p:cxnSp>
-      <p:cxnSp>
-        <p:nvCxnSpPr>
-          <p:cNvPr id="27" name="Connector 26"/>
-          <p:cNvCxnSpPr/>
-          <p:nvPr/>
-        </p:nvCxnSpPr>
-        <p:spPr>
-          <a:xfrm flipV="1">
-            <a:off x="5852160.0" y="710945.9999999998"/>
-            <a:ext cx="45720.0" cy="123444.00000000023"/>
-          </a:xfrm>
-          <a:prstGeom prst="line">
-            <a:avLst/>
-          </a:prstGeom>
-          <a:ln w="25400">
-            <a:solidFill>
-              <a:srgbClr val="00C8FF"/>
-            </a:solidFill>
-          </a:ln>
-        </p:spPr>
-        <p:style>
-          <a:lnRef idx="2">
-            <a:schemeClr val="accent1"/>
-          </a:lnRef>
-          <a:fillRef idx="0">
-            <a:schemeClr val="accent1"/>
-          </a:fillRef>
-          <a:effectRef idx="1">
-            <a:schemeClr val="accent1"/>
-          </a:effectRef>
-          <a:fontRef idx="minor">
-            <a:schemeClr val="tx1"/>
-          </a:fontRef>
-        </p:style>
-      </p:cxnSp>
-      <p:cxnSp>
-        <p:nvCxnSpPr>
-          <p:cNvPr id="28" name="Connector 27"/>
-          <p:cNvCxnSpPr/>
-          <p:nvPr/>
-        </p:nvCxnSpPr>
-        <p:spPr>
-          <a:xfrm flipV="1">
-            <a:off x="5897880.0" y="578357.9999999998"/>
-            <a:ext cx="45720.0" cy="132588.0"/>
-          </a:xfrm>
-          <a:prstGeom prst="line">
-            <a:avLst/>
-          </a:prstGeom>
-          <a:ln w="25400">
-            <a:solidFill>
-              <a:srgbClr val="00C8FF"/>
-            </a:solidFill>
-          </a:ln>
-        </p:spPr>
-        <p:style>
-          <a:lnRef idx="2">
-            <a:schemeClr val="accent1"/>
-          </a:lnRef>
-          <a:fillRef idx="0">
-            <a:schemeClr val="accent1"/>
-          </a:fillRef>
-          <a:effectRef idx="1">
-            <a:schemeClr val="accent1"/>
-          </a:effectRef>
-          <a:fontRef idx="minor">
-            <a:schemeClr val="tx1"/>
-          </a:fontRef>
-        </p:style>
-      </p:cxnSp>
-      <p:sp>
-        <p:nvSpPr>
-          <p:cNvPr id="29" name="Oval 28"/>
+      <p:sp>
+        <p:nvSpPr>
+          <p:cNvPr id="24" name="Oval 23"/>
           <p:cNvSpPr/>
           <p:nvPr/>
         </p:nvSpPr>
         <p:spPr>
           <a:xfrm>
-            <a:off x="5448300" y="1619250"/>
+            <a:off x="6819900" y="247650"/>
             <a:ext cx="76200" cy="76200"/>
           </a:xfrm>
           <a:prstGeom prst="ellipse">
@@ -4088,13 +3913,13 @@
       </p:sp>
       <p:sp>
         <p:nvSpPr>
-          <p:cNvPr id="30" name="TextBox 29"/>
+          <p:cNvPr id="25" name="TextBox 24"/>
           <p:cNvSpPr txBox="1"/>
           <p:nvPr/>
         </p:nvSpPr>
         <p:spPr>
           <a:xfrm>
-            <a:off x="4480560" y="2663190"/>
+            <a:off x="4251960" y="2891790"/>
             <a:ext cx="635000" cy="254000"/>
           </a:xfrm>
           <a:prstGeom prst="rect">
@@ -4117,20 +3942,20 @@
               </a:defRPr>
             </a:pPr>
             <a:r>
-              <a:t>$O$</a:t>
-            </a:r>
-          </a:p>
-        </p:txBody>
-      </p:sp>
-      <p:sp>
-        <p:nvSpPr>
-          <p:cNvPr id="31" name="TextBox 30"/>
+              <a:t>O</a:t>
+            </a:r>
+          </a:p>
+        </p:txBody>
+      </p:sp>
+      <p:sp>
+        <p:nvSpPr>
+          <p:cNvPr id="26" name="TextBox 25"/>
           <p:cNvSpPr txBox="1"/>
           <p:nvPr/>
         </p:nvSpPr>
         <p:spPr>
           <a:xfrm>
-            <a:off x="6035040" y="2708910"/>
+            <a:off x="9372600" y="2891790"/>
             <a:ext cx="635000" cy="254000"/>
           </a:xfrm>
           <a:prstGeom prst="rect">
@@ -4153,20 +3978,20 @@
               </a:defRPr>
             </a:pPr>
             <a:r>
-              <a:t>$x$</a:t>
-            </a:r>
-          </a:p>
-        </p:txBody>
-      </p:sp>
-      <p:sp>
-        <p:nvSpPr>
-          <p:cNvPr id="32" name="TextBox 31"/>
+              <a:t>x</a:t>
+            </a:r>
+          </a:p>
+        </p:txBody>
+      </p:sp>
+      <p:sp>
+        <p:nvSpPr>
+          <p:cNvPr id="27" name="TextBox 26"/>
           <p:cNvSpPr txBox="1"/>
           <p:nvPr/>
         </p:nvSpPr>
         <p:spPr>
           <a:xfrm>
-            <a:off x="4434840" y="742950"/>
+            <a:off x="4251960" y="-2228850"/>
             <a:ext cx="635000" cy="254000"/>
           </a:xfrm>
           <a:prstGeom prst="rect">
@@ -4189,20 +4014,20 @@
               </a:defRPr>
             </a:pPr>
             <a:r>
-              <a:t>$y$</a:t>
-            </a:r>
-          </a:p>
-        </p:txBody>
-      </p:sp>
-      <p:sp>
-        <p:nvSpPr>
-          <p:cNvPr id="33" name="TextBox 32"/>
+              <a:t>y</a:t>
+            </a:r>
+          </a:p>
+        </p:txBody>
+      </p:sp>
+      <p:sp>
+        <p:nvSpPr>
+          <p:cNvPr id="28" name="TextBox 27"/>
           <p:cNvSpPr txBox="1"/>
           <p:nvPr/>
         </p:nvSpPr>
         <p:spPr>
           <a:xfrm>
-            <a:off x="5486400" y="2754630"/>
+            <a:off x="8001000" y="-1314450"/>
             <a:ext cx="635000" cy="254000"/>
           </a:xfrm>
           <a:prstGeom prst="rect">
@@ -4225,20 +4050,20 @@
               </a:defRPr>
             </a:pPr>
             <a:r>
-              <a:t>$a$</a:t>
-            </a:r>
-          </a:p>
-        </p:txBody>
-      </p:sp>
-      <p:sp>
-        <p:nvSpPr>
-          <p:cNvPr id="34" name="TextBox 33"/>
+              <a:t>$y=f(x)$</a:t>
+            </a:r>
+          </a:p>
+        </p:txBody>
+      </p:sp>
+      <p:sp>
+        <p:nvSpPr>
+          <p:cNvPr id="29" name="TextBox 28"/>
           <p:cNvSpPr txBox="1"/>
           <p:nvPr/>
         </p:nvSpPr>
         <p:spPr>
           <a:xfrm>
-            <a:off x="4343400" y="1657350"/>
+            <a:off x="6858000" y="2891790"/>
             <a:ext cx="635000" cy="254000"/>
           </a:xfrm>
           <a:prstGeom prst="rect">
@@ -4261,20 +4086,20 @@
               </a:defRPr>
             </a:pPr>
             <a:r>
-              <a:t>$f(a)$</a:t>
-            </a:r>
-          </a:p>
-        </p:txBody>
-      </p:sp>
-      <p:sp>
-        <p:nvSpPr>
-          <p:cNvPr id="35" name="TextBox 34"/>
+              <a:t>$a$</a:t>
+            </a:r>
+          </a:p>
+        </p:txBody>
+      </p:sp>
+      <p:sp>
+        <p:nvSpPr>
+          <p:cNvPr id="30" name="TextBox 29"/>
           <p:cNvSpPr txBox="1"/>
           <p:nvPr/>
         </p:nvSpPr>
         <p:spPr>
           <a:xfrm>
-            <a:off x="5760720" y="1200150"/>
+            <a:off x="4023360" y="285750"/>
             <a:ext cx="635000" cy="254000"/>
           </a:xfrm>
           <a:prstGeom prst="rect">
@@ -4297,7 +4122,7 @@
               </a:defRPr>
             </a:pPr>
             <a:r>
-              <a:t>$y=f(x)$</a:t>
+              <a:t>$f(a)$</a:t>
             </a:r>
           </a:p>
         </p:txBody>

--- a/output/2.pptx
+++ b/output/2.pptx
@@ -3173,9 +3173,9 @@
           <p:nvPr/>
         </p:nvCxnSpPr>
         <p:spPr>
-          <a:xfrm flipV="1">
-            <a:off x="4663440.0" y="2476606.68"/>
-            <a:ext cx="182880.0" cy="76901.04000000004"/>
+          <a:xfrm>
+            <a:off x="3657600.0" y="742950.0"/>
+            <a:ext cx="72189.47368421033" cy="72189.47368421056"/>
           </a:xfrm>
           <a:prstGeom prst="line">
             <a:avLst/>
@@ -3208,9 +3208,9 @@
           <p:nvPr/>
         </p:nvCxnSpPr>
         <p:spPr>
-          <a:xfrm flipV="1">
-            <a:off x="4846320.0" y="2367290.16"/>
-            <a:ext cx="182880.0" cy="109316.52000000002"/>
+          <a:xfrm>
+            <a:off x="3729789.4736842103" y="815139.4736842106"/>
+            <a:ext cx="72189.4736842108" cy="72189.47368421056"/>
           </a:xfrm>
           <a:prstGeom prst="line">
             <a:avLst/>
@@ -3243,9 +3243,9 @@
           <p:nvPr/>
         </p:nvCxnSpPr>
         <p:spPr>
-          <a:xfrm flipV="1">
-            <a:off x="5029200.0" y="2232873.36"/>
-            <a:ext cx="182880.0" cy="134416.80000000028"/>
+          <a:xfrm>
+            <a:off x="3801978.947368421" y="887328.9473684211"/>
+            <a:ext cx="72189.47368421033" cy="72189.47368421056"/>
           </a:xfrm>
           <a:prstGeom prst="line">
             <a:avLst/>
@@ -3278,9 +3278,9 @@
           <p:nvPr/>
         </p:nvCxnSpPr>
         <p:spPr>
-          <a:xfrm flipV="1">
-            <a:off x="5212080.0" y="2078705.52"/>
-            <a:ext cx="182880.0" cy="154167.83999999985"/>
+          <a:xfrm>
+            <a:off x="3874168.4210526315" y="959518.4210526317"/>
+            <a:ext cx="72189.4736842108" cy="72189.47368421056"/>
           </a:xfrm>
           <a:prstGeom prst="line">
             <a:avLst/>
@@ -3313,9 +3313,9 @@
           <p:nvPr/>
         </p:nvCxnSpPr>
         <p:spPr>
-          <a:xfrm flipV="1">
-            <a:off x="5394960.0" y="1906432.56"/>
-            <a:ext cx="182880.0" cy="172272.95999999996"/>
+          <a:xfrm>
+            <a:off x="3946357.8947368423" y="1031707.8947368423"/>
+            <a:ext cx="72189.47368421033" cy="72189.47368421056"/>
           </a:xfrm>
           <a:prstGeom prst="line">
             <a:avLst/>
@@ -3348,9 +3348,9 @@
           <p:nvPr/>
         </p:nvCxnSpPr>
         <p:spPr>
-          <a:xfrm flipV="1">
-            <a:off x="5577840.0" y="1714408.56"/>
-            <a:ext cx="182880.0" cy="192024.0"/>
+          <a:xfrm>
+            <a:off x="4018547.3684210526" y="1103897.3684210528"/>
+            <a:ext cx="72189.4736842108" cy="72189.47368421056"/>
           </a:xfrm>
           <a:prstGeom prst="line">
             <a:avLst/>
@@ -3383,9 +3383,9 @@
           <p:nvPr/>
         </p:nvCxnSpPr>
         <p:spPr>
-          <a:xfrm flipV="1">
-            <a:off x="5760720.0" y="1503547.9200000002"/>
-            <a:ext cx="182880.0" cy="210860.6399999999"/>
+          <a:xfrm>
+            <a:off x="4090736.8421052634" y="1176086.8421052634"/>
+            <a:ext cx="72189.47368421033" cy="72189.47368421056"/>
           </a:xfrm>
           <a:prstGeom prst="line">
             <a:avLst/>
@@ -3418,9 +3418,9 @@
           <p:nvPr/>
         </p:nvCxnSpPr>
         <p:spPr>
-          <a:xfrm flipV="1">
-            <a:off x="5943600.0" y="1273027.6800000002"/>
-            <a:ext cx="182880.0" cy="230520.24"/>
+          <a:xfrm>
+            <a:off x="4162926.3157894737" y="1248276.315789474"/>
+            <a:ext cx="72189.4736842108" cy="72189.47368421033"/>
           </a:xfrm>
           <a:prstGeom prst="line">
             <a:avLst/>
@@ -3453,9 +3453,9 @@
           <p:nvPr/>
         </p:nvCxnSpPr>
         <p:spPr>
-          <a:xfrm flipV="1">
-            <a:off x="6126480.0" y="1022847.8400000001"/>
-            <a:ext cx="182880.0" cy="250179.84000000008"/>
+          <a:xfrm>
+            <a:off x="4235115.7894736845" y="1320465.7894736843"/>
+            <a:ext cx="72189.47368421033" cy="72189.47368421056"/>
           </a:xfrm>
           <a:prstGeom prst="line">
             <a:avLst/>
@@ -3488,9 +3488,9 @@
           <p:nvPr/>
         </p:nvCxnSpPr>
         <p:spPr>
-          <a:xfrm flipV="1">
-            <a:off x="6309360.0" y="752916.96"/>
-            <a:ext cx="182880.0" cy="269930.8800000001"/>
+          <a:xfrm>
+            <a:off x="4307305.263157895" y="1392655.2631578948"/>
+            <a:ext cx="72189.47368421033" cy="72189.47368421033"/>
           </a:xfrm>
           <a:prstGeom prst="line">
             <a:avLst/>
@@ -3523,9 +3523,9 @@
           <p:nvPr/>
         </p:nvCxnSpPr>
         <p:spPr>
-          <a:xfrm flipV="1">
-            <a:off x="6492240.0" y="463326.48"/>
-            <a:ext cx="182880.0" cy="289590.48"/>
+          <a:xfrm>
+            <a:off x="4379494.736842105" y="1464844.7368421052"/>
+            <a:ext cx="72189.47368421033" cy="72189.4736842108"/>
           </a:xfrm>
           <a:prstGeom prst="line">
             <a:avLst/>
@@ -3558,9 +3558,9 @@
           <p:nvPr/>
         </p:nvCxnSpPr>
         <p:spPr>
-          <a:xfrm flipV="1">
-            <a:off x="6675120.0" y="285750.0"/>
-            <a:ext cx="182880.0" cy="177576.47999999998"/>
+          <a:xfrm>
+            <a:off x="4451684.2105263155" y="1537034.210526316"/>
+            <a:ext cx="72189.47368421126" cy="72189.47368421033"/>
           </a:xfrm>
           <a:prstGeom prst="line">
             <a:avLst/>
@@ -3593,9 +3593,9 @@
           <p:nvPr/>
         </p:nvCxnSpPr>
         <p:spPr>
-          <a:xfrm flipV="1">
-            <a:off x="6858000.0" y="89611.19999999972"/>
-            <a:ext cx="182880.0" cy="196138.80000000028"/>
+          <a:xfrm>
+            <a:off x="4523873.684210527" y="1609223.6842105263"/>
+            <a:ext cx="72189.47368421033" cy="72189.4736842108"/>
           </a:xfrm>
           <a:prstGeom prst="line">
             <a:avLst/>
@@ -3628,9 +3628,9 @@
           <p:nvPr/>
         </p:nvCxnSpPr>
         <p:spPr>
-          <a:xfrm flipV="1">
-            <a:off x="7040880.0" y="-123078.23999999976"/>
-            <a:ext cx="182880.0" cy="212689.43999999948"/>
+          <a:xfrm>
+            <a:off x="4596063.157894737" y="1681413.157894737"/>
+            <a:ext cx="72189.47368421033" cy="72189.47368421033"/>
           </a:xfrm>
           <a:prstGeom prst="line">
             <a:avLst/>
@@ -3663,9 +3663,9 @@
           <p:nvPr/>
         </p:nvCxnSpPr>
         <p:spPr>
-          <a:xfrm flipV="1">
-            <a:off x="7223760.0" y="-352592.64000000013"/>
-            <a:ext cx="182880.0" cy="229514.40000000037"/>
+          <a:xfrm>
+            <a:off x="4668252.631578947" y="1753602.6315789474"/>
+            <a:ext cx="72189.47368421033" cy="72189.47368421033"/>
           </a:xfrm>
           <a:prstGeom prst="line">
             <a:avLst/>
@@ -3698,9 +3698,9 @@
           <p:nvPr/>
         </p:nvCxnSpPr>
         <p:spPr>
-          <a:xfrm flipV="1">
-            <a:off x="7406640.0" y="-598932.0"/>
-            <a:ext cx="182880.0" cy="246339.35999999987"/>
+          <a:xfrm>
+            <a:off x="4740442.105263158" y="1825792.1052631577"/>
+            <a:ext cx="72189.47368421033" cy="72189.4736842108"/>
           </a:xfrm>
           <a:prstGeom prst="line">
             <a:avLst/>
@@ -3733,9 +3733,9 @@
           <p:nvPr/>
         </p:nvCxnSpPr>
         <p:spPr>
-          <a:xfrm flipV="1">
-            <a:off x="7589520.0" y="-862187.7599999998"/>
-            <a:ext cx="182880.0" cy="263255.7599999998"/>
+          <a:xfrm>
+            <a:off x="4812631.578947368" y="1897981.5789473685"/>
+            <a:ext cx="72189.47368421126" cy="72189.47368421033"/>
           </a:xfrm>
           <a:prstGeom prst="line">
             <a:avLst/>
@@ -3768,9 +3768,9 @@
           <p:nvPr/>
         </p:nvCxnSpPr>
         <p:spPr>
-          <a:xfrm flipV="1">
-            <a:off x="7772400.0" y="-1142177.0400000005"/>
-            <a:ext cx="182880.0" cy="279989.2800000007"/>
+          <a:xfrm>
+            <a:off x="4884821.052631579" y="1970171.0526315789"/>
+            <a:ext cx="72189.47368421033" cy="72189.47368421056"/>
           </a:xfrm>
           <a:prstGeom prst="line">
             <a:avLst/>
@@ -3803,9 +3803,9 @@
           <p:nvPr/>
         </p:nvCxnSpPr>
         <p:spPr>
-          <a:xfrm flipV="1">
-            <a:off x="7955280.0" y="-1438991.2799999998"/>
-            <a:ext cx="182880.0" cy="296814.2399999993"/>
+          <a:xfrm>
+            <a:off x="4957010.52631579" y="2042360.5263157894"/>
+            <a:ext cx="71732.27368421014" cy="71732.27368421038"/>
           </a:xfrm>
           <a:prstGeom prst="line">
             <a:avLst/>
@@ -3839,8 +3839,8 @@
         </p:nvCxnSpPr>
         <p:spPr>
           <a:xfrm flipV="1">
-            <a:off x="8138160.0" y="-1752539.04"/>
-            <a:ext cx="182880.0" cy="313547.76000000024"/>
+            <a:off x="5029200.0" y="1597192.105263158"/>
+            <a:ext cx="60157.89473684225" cy="60157.89473684202"/>
           </a:xfrm>
           <a:prstGeom prst="line">
             <a:avLst/>
@@ -3866,15 +3866,688 @@
           </a:fontRef>
         </p:style>
       </p:cxnSp>
-      <p:sp>
-        <p:nvSpPr>
-          <p:cNvPr id="24" name="Oval 23"/>
+      <p:cxnSp>
+        <p:nvCxnSpPr>
+          <p:cNvPr id="24" name="Connector 23"/>
+          <p:cNvCxnSpPr/>
+          <p:nvPr/>
+        </p:nvCxnSpPr>
+        <p:spPr>
+          <a:xfrm flipV="1">
+            <a:off x="5089357.894736842" y="1537034.210526316"/>
+            <a:ext cx="60157.89473684225" cy="60157.89473684202"/>
+          </a:xfrm>
+          <a:prstGeom prst="line">
+            <a:avLst/>
+          </a:prstGeom>
+          <a:ln w="25400">
+            <a:solidFill>
+              <a:srgbClr val="00C8FF"/>
+            </a:solidFill>
+          </a:ln>
+        </p:spPr>
+        <p:style>
+          <a:lnRef idx="2">
+            <a:schemeClr val="accent1"/>
+          </a:lnRef>
+          <a:fillRef idx="0">
+            <a:schemeClr val="accent1"/>
+          </a:fillRef>
+          <a:effectRef idx="1">
+            <a:schemeClr val="accent1"/>
+          </a:effectRef>
+          <a:fontRef idx="minor">
+            <a:schemeClr val="tx1"/>
+          </a:fontRef>
+        </p:style>
+      </p:cxnSp>
+      <p:cxnSp>
+        <p:nvCxnSpPr>
+          <p:cNvPr id="25" name="Connector 24"/>
+          <p:cNvCxnSpPr/>
+          <p:nvPr/>
+        </p:nvCxnSpPr>
+        <p:spPr>
+          <a:xfrm flipV="1">
+            <a:off x="5149515.7894736845" y="1476876.315789474"/>
+            <a:ext cx="60157.89473684132" cy="60157.89473684202"/>
+          </a:xfrm>
+          <a:prstGeom prst="line">
+            <a:avLst/>
+          </a:prstGeom>
+          <a:ln w="25400">
+            <a:solidFill>
+              <a:srgbClr val="00C8FF"/>
+            </a:solidFill>
+          </a:ln>
+        </p:spPr>
+        <p:style>
+          <a:lnRef idx="2">
+            <a:schemeClr val="accent1"/>
+          </a:lnRef>
+          <a:fillRef idx="0">
+            <a:schemeClr val="accent1"/>
+          </a:fillRef>
+          <a:effectRef idx="1">
+            <a:schemeClr val="accent1"/>
+          </a:effectRef>
+          <a:fontRef idx="minor">
+            <a:schemeClr val="tx1"/>
+          </a:fontRef>
+        </p:style>
+      </p:cxnSp>
+      <p:cxnSp>
+        <p:nvCxnSpPr>
+          <p:cNvPr id="26" name="Connector 25"/>
+          <p:cNvCxnSpPr/>
+          <p:nvPr/>
+        </p:nvCxnSpPr>
+        <p:spPr>
+          <a:xfrm flipV="1">
+            <a:off x="5209673.684210526" y="1416718.4210526317"/>
+            <a:ext cx="60157.89473684225" cy="60157.89473684225"/>
+          </a:xfrm>
+          <a:prstGeom prst="line">
+            <a:avLst/>
+          </a:prstGeom>
+          <a:ln w="25400">
+            <a:solidFill>
+              <a:srgbClr val="00C8FF"/>
+            </a:solidFill>
+          </a:ln>
+        </p:spPr>
+        <p:style>
+          <a:lnRef idx="2">
+            <a:schemeClr val="accent1"/>
+          </a:lnRef>
+          <a:fillRef idx="0">
+            <a:schemeClr val="accent1"/>
+          </a:fillRef>
+          <a:effectRef idx="1">
+            <a:schemeClr val="accent1"/>
+          </a:effectRef>
+          <a:fontRef idx="minor">
+            <a:schemeClr val="tx1"/>
+          </a:fontRef>
+        </p:style>
+      </p:cxnSp>
+      <p:cxnSp>
+        <p:nvCxnSpPr>
+          <p:cNvPr id="27" name="Connector 26"/>
+          <p:cNvCxnSpPr/>
+          <p:nvPr/>
+        </p:nvCxnSpPr>
+        <p:spPr>
+          <a:xfrm flipV="1">
+            <a:off x="5269831.578947368" y="1356560.5263157894"/>
+            <a:ext cx="60157.89473684225" cy="60157.89473684225"/>
+          </a:xfrm>
+          <a:prstGeom prst="line">
+            <a:avLst/>
+          </a:prstGeom>
+          <a:ln w="25400">
+            <a:solidFill>
+              <a:srgbClr val="00C8FF"/>
+            </a:solidFill>
+          </a:ln>
+        </p:spPr>
+        <p:style>
+          <a:lnRef idx="2">
+            <a:schemeClr val="accent1"/>
+          </a:lnRef>
+          <a:fillRef idx="0">
+            <a:schemeClr val="accent1"/>
+          </a:fillRef>
+          <a:effectRef idx="1">
+            <a:schemeClr val="accent1"/>
+          </a:effectRef>
+          <a:fontRef idx="minor">
+            <a:schemeClr val="tx1"/>
+          </a:fontRef>
+        </p:style>
+      </p:cxnSp>
+      <p:cxnSp>
+        <p:nvCxnSpPr>
+          <p:cNvPr id="28" name="Connector 27"/>
+          <p:cNvCxnSpPr/>
+          <p:nvPr/>
+        </p:nvCxnSpPr>
+        <p:spPr>
+          <a:xfrm flipV="1">
+            <a:off x="5329989.47368421" y="1296402.6315789474"/>
+            <a:ext cx="60157.89473684225" cy="60157.89473684202"/>
+          </a:xfrm>
+          <a:prstGeom prst="line">
+            <a:avLst/>
+          </a:prstGeom>
+          <a:ln w="25400">
+            <a:solidFill>
+              <a:srgbClr val="00C8FF"/>
+            </a:solidFill>
+          </a:ln>
+        </p:spPr>
+        <p:style>
+          <a:lnRef idx="2">
+            <a:schemeClr val="accent1"/>
+          </a:lnRef>
+          <a:fillRef idx="0">
+            <a:schemeClr val="accent1"/>
+          </a:fillRef>
+          <a:effectRef idx="1">
+            <a:schemeClr val="accent1"/>
+          </a:effectRef>
+          <a:fontRef idx="minor">
+            <a:schemeClr val="tx1"/>
+          </a:fontRef>
+        </p:style>
+      </p:cxnSp>
+      <p:cxnSp>
+        <p:nvCxnSpPr>
+          <p:cNvPr id="29" name="Connector 28"/>
+          <p:cNvCxnSpPr/>
+          <p:nvPr/>
+        </p:nvCxnSpPr>
+        <p:spPr>
+          <a:xfrm flipV="1">
+            <a:off x="5390147.368421053" y="1236244.7368421052"/>
+            <a:ext cx="60157.89473684225" cy="60157.89473684225"/>
+          </a:xfrm>
+          <a:prstGeom prst="line">
+            <a:avLst/>
+          </a:prstGeom>
+          <a:ln w="25400">
+            <a:solidFill>
+              <a:srgbClr val="00C8FF"/>
+            </a:solidFill>
+          </a:ln>
+        </p:spPr>
+        <p:style>
+          <a:lnRef idx="2">
+            <a:schemeClr val="accent1"/>
+          </a:lnRef>
+          <a:fillRef idx="0">
+            <a:schemeClr val="accent1"/>
+          </a:fillRef>
+          <a:effectRef idx="1">
+            <a:schemeClr val="accent1"/>
+          </a:effectRef>
+          <a:fontRef idx="minor">
+            <a:schemeClr val="tx1"/>
+          </a:fontRef>
+        </p:style>
+      </p:cxnSp>
+      <p:cxnSp>
+        <p:nvCxnSpPr>
+          <p:cNvPr id="30" name="Connector 29"/>
+          <p:cNvCxnSpPr/>
+          <p:nvPr/>
+        </p:nvCxnSpPr>
+        <p:spPr>
+          <a:xfrm flipV="1">
+            <a:off x="5450305.263157895" y="1176086.8421052631"/>
+            <a:ext cx="60157.89473684225" cy="60157.89473684202"/>
+          </a:xfrm>
+          <a:prstGeom prst="line">
+            <a:avLst/>
+          </a:prstGeom>
+          <a:ln w="25400">
+            <a:solidFill>
+              <a:srgbClr val="00C8FF"/>
+            </a:solidFill>
+          </a:ln>
+        </p:spPr>
+        <p:style>
+          <a:lnRef idx="2">
+            <a:schemeClr val="accent1"/>
+          </a:lnRef>
+          <a:fillRef idx="0">
+            <a:schemeClr val="accent1"/>
+          </a:fillRef>
+          <a:effectRef idx="1">
+            <a:schemeClr val="accent1"/>
+          </a:effectRef>
+          <a:fontRef idx="minor">
+            <a:schemeClr val="tx1"/>
+          </a:fontRef>
+        </p:style>
+      </p:cxnSp>
+      <p:cxnSp>
+        <p:nvCxnSpPr>
+          <p:cNvPr id="31" name="Connector 30"/>
+          <p:cNvCxnSpPr/>
+          <p:nvPr/>
+        </p:nvCxnSpPr>
+        <p:spPr>
+          <a:xfrm flipV="1">
+            <a:off x="5510463.157894737" y="1115928.9473684211"/>
+            <a:ext cx="60157.89473684225" cy="60157.89473684202"/>
+          </a:xfrm>
+          <a:prstGeom prst="line">
+            <a:avLst/>
+          </a:prstGeom>
+          <a:ln w="25400">
+            <a:solidFill>
+              <a:srgbClr val="00C8FF"/>
+            </a:solidFill>
+          </a:ln>
+        </p:spPr>
+        <p:style>
+          <a:lnRef idx="2">
+            <a:schemeClr val="accent1"/>
+          </a:lnRef>
+          <a:fillRef idx="0">
+            <a:schemeClr val="accent1"/>
+          </a:fillRef>
+          <a:effectRef idx="1">
+            <a:schemeClr val="accent1"/>
+          </a:effectRef>
+          <a:fontRef idx="minor">
+            <a:schemeClr val="tx1"/>
+          </a:fontRef>
+        </p:style>
+      </p:cxnSp>
+      <p:cxnSp>
+        <p:nvCxnSpPr>
+          <p:cNvPr id="32" name="Connector 31"/>
+          <p:cNvCxnSpPr/>
+          <p:nvPr/>
+        </p:nvCxnSpPr>
+        <p:spPr>
+          <a:xfrm flipV="1">
+            <a:off x="5570621.052631579" y="1055771.0526315789"/>
+            <a:ext cx="60157.89473684132" cy="60157.89473684225"/>
+          </a:xfrm>
+          <a:prstGeom prst="line">
+            <a:avLst/>
+          </a:prstGeom>
+          <a:ln w="25400">
+            <a:solidFill>
+              <a:srgbClr val="00C8FF"/>
+            </a:solidFill>
+          </a:ln>
+        </p:spPr>
+        <p:style>
+          <a:lnRef idx="2">
+            <a:schemeClr val="accent1"/>
+          </a:lnRef>
+          <a:fillRef idx="0">
+            <a:schemeClr val="accent1"/>
+          </a:fillRef>
+          <a:effectRef idx="1">
+            <a:schemeClr val="accent1"/>
+          </a:effectRef>
+          <a:fontRef idx="minor">
+            <a:schemeClr val="tx1"/>
+          </a:fontRef>
+        </p:style>
+      </p:cxnSp>
+      <p:cxnSp>
+        <p:nvCxnSpPr>
+          <p:cNvPr id="33" name="Connector 32"/>
+          <p:cNvCxnSpPr/>
+          <p:nvPr/>
+        </p:nvCxnSpPr>
+        <p:spPr>
+          <a:xfrm flipV="1">
+            <a:off x="5630778.947368421" y="995613.1578947369"/>
+            <a:ext cx="60157.89473684225" cy="60157.89473684202"/>
+          </a:xfrm>
+          <a:prstGeom prst="line">
+            <a:avLst/>
+          </a:prstGeom>
+          <a:ln w="25400">
+            <a:solidFill>
+              <a:srgbClr val="00C8FF"/>
+            </a:solidFill>
+          </a:ln>
+        </p:spPr>
+        <p:style>
+          <a:lnRef idx="2">
+            <a:schemeClr val="accent1"/>
+          </a:lnRef>
+          <a:fillRef idx="0">
+            <a:schemeClr val="accent1"/>
+          </a:fillRef>
+          <a:effectRef idx="1">
+            <a:schemeClr val="accent1"/>
+          </a:effectRef>
+          <a:fontRef idx="minor">
+            <a:schemeClr val="tx1"/>
+          </a:fontRef>
+        </p:style>
+      </p:cxnSp>
+      <p:cxnSp>
+        <p:nvCxnSpPr>
+          <p:cNvPr id="34" name="Connector 33"/>
+          <p:cNvCxnSpPr/>
+          <p:nvPr/>
+        </p:nvCxnSpPr>
+        <p:spPr>
+          <a:xfrm flipV="1">
+            <a:off x="5690936.842105263" y="935455.2631578948"/>
+            <a:ext cx="60157.89473684225" cy="60157.89473684202"/>
+          </a:xfrm>
+          <a:prstGeom prst="line">
+            <a:avLst/>
+          </a:prstGeom>
+          <a:ln w="25400">
+            <a:solidFill>
+              <a:srgbClr val="00C8FF"/>
+            </a:solidFill>
+          </a:ln>
+        </p:spPr>
+        <p:style>
+          <a:lnRef idx="2">
+            <a:schemeClr val="accent1"/>
+          </a:lnRef>
+          <a:fillRef idx="0">
+            <a:schemeClr val="accent1"/>
+          </a:fillRef>
+          <a:effectRef idx="1">
+            <a:schemeClr val="accent1"/>
+          </a:effectRef>
+          <a:fontRef idx="minor">
+            <a:schemeClr val="tx1"/>
+          </a:fontRef>
+        </p:style>
+      </p:cxnSp>
+      <p:cxnSp>
+        <p:nvCxnSpPr>
+          <p:cNvPr id="35" name="Connector 34"/>
+          <p:cNvCxnSpPr/>
+          <p:nvPr/>
+        </p:nvCxnSpPr>
+        <p:spPr>
+          <a:xfrm flipV="1">
+            <a:off x="5751094.736842105" y="875297.3684210528"/>
+            <a:ext cx="60157.89473684225" cy="60157.89473684202"/>
+          </a:xfrm>
+          <a:prstGeom prst="line">
+            <a:avLst/>
+          </a:prstGeom>
+          <a:ln w="25400">
+            <a:solidFill>
+              <a:srgbClr val="00C8FF"/>
+            </a:solidFill>
+          </a:ln>
+        </p:spPr>
+        <p:style>
+          <a:lnRef idx="2">
+            <a:schemeClr val="accent1"/>
+          </a:lnRef>
+          <a:fillRef idx="0">
+            <a:schemeClr val="accent1"/>
+          </a:fillRef>
+          <a:effectRef idx="1">
+            <a:schemeClr val="accent1"/>
+          </a:effectRef>
+          <a:fontRef idx="minor">
+            <a:schemeClr val="tx1"/>
+          </a:fontRef>
+        </p:style>
+      </p:cxnSp>
+      <p:cxnSp>
+        <p:nvCxnSpPr>
+          <p:cNvPr id="36" name="Connector 35"/>
+          <p:cNvCxnSpPr/>
+          <p:nvPr/>
+        </p:nvCxnSpPr>
+        <p:spPr>
+          <a:xfrm flipV="1">
+            <a:off x="5811252.631578947" y="815139.4736842106"/>
+            <a:ext cx="60157.89473684225" cy="60157.89473684225"/>
+          </a:xfrm>
+          <a:prstGeom prst="line">
+            <a:avLst/>
+          </a:prstGeom>
+          <a:ln w="25400">
+            <a:solidFill>
+              <a:srgbClr val="00C8FF"/>
+            </a:solidFill>
+          </a:ln>
+        </p:spPr>
+        <p:style>
+          <a:lnRef idx="2">
+            <a:schemeClr val="accent1"/>
+          </a:lnRef>
+          <a:fillRef idx="0">
+            <a:schemeClr val="accent1"/>
+          </a:fillRef>
+          <a:effectRef idx="1">
+            <a:schemeClr val="accent1"/>
+          </a:effectRef>
+          <a:fontRef idx="minor">
+            <a:schemeClr val="tx1"/>
+          </a:fontRef>
+        </p:style>
+      </p:cxnSp>
+      <p:cxnSp>
+        <p:nvCxnSpPr>
+          <p:cNvPr id="37" name="Connector 36"/>
+          <p:cNvCxnSpPr/>
+          <p:nvPr/>
+        </p:nvCxnSpPr>
+        <p:spPr>
+          <a:xfrm flipV="1">
+            <a:off x="5871410.52631579" y="754981.5789473685"/>
+            <a:ext cx="60157.89473684132" cy="60157.89473684202"/>
+          </a:xfrm>
+          <a:prstGeom prst="line">
+            <a:avLst/>
+          </a:prstGeom>
+          <a:ln w="25400">
+            <a:solidFill>
+              <a:srgbClr val="00C8FF"/>
+            </a:solidFill>
+          </a:ln>
+        </p:spPr>
+        <p:style>
+          <a:lnRef idx="2">
+            <a:schemeClr val="accent1"/>
+          </a:lnRef>
+          <a:fillRef idx="0">
+            <a:schemeClr val="accent1"/>
+          </a:fillRef>
+          <a:effectRef idx="1">
+            <a:schemeClr val="accent1"/>
+          </a:effectRef>
+          <a:fontRef idx="minor">
+            <a:schemeClr val="tx1"/>
+          </a:fontRef>
+        </p:style>
+      </p:cxnSp>
+      <p:cxnSp>
+        <p:nvCxnSpPr>
+          <p:cNvPr id="38" name="Connector 37"/>
+          <p:cNvCxnSpPr/>
+          <p:nvPr/>
+        </p:nvCxnSpPr>
+        <p:spPr>
+          <a:xfrm flipV="1">
+            <a:off x="5931568.421052631" y="694823.6842105261"/>
+            <a:ext cx="60157.89473684318" cy="60157.894736842485"/>
+          </a:xfrm>
+          <a:prstGeom prst="line">
+            <a:avLst/>
+          </a:prstGeom>
+          <a:ln w="25400">
+            <a:solidFill>
+              <a:srgbClr val="00C8FF"/>
+            </a:solidFill>
+          </a:ln>
+        </p:spPr>
+        <p:style>
+          <a:lnRef idx="2">
+            <a:schemeClr val="accent1"/>
+          </a:lnRef>
+          <a:fillRef idx="0">
+            <a:schemeClr val="accent1"/>
+          </a:fillRef>
+          <a:effectRef idx="1">
+            <a:schemeClr val="accent1"/>
+          </a:effectRef>
+          <a:fontRef idx="minor">
+            <a:schemeClr val="tx1"/>
+          </a:fontRef>
+        </p:style>
+      </p:cxnSp>
+      <p:cxnSp>
+        <p:nvCxnSpPr>
+          <p:cNvPr id="39" name="Connector 38"/>
+          <p:cNvCxnSpPr/>
+          <p:nvPr/>
+        </p:nvCxnSpPr>
+        <p:spPr>
+          <a:xfrm flipV="1">
+            <a:off x="5991726.315789474" y="634665.7894736843"/>
+            <a:ext cx="60157.89473684132" cy="60157.89473684179"/>
+          </a:xfrm>
+          <a:prstGeom prst="line">
+            <a:avLst/>
+          </a:prstGeom>
+          <a:ln w="25400">
+            <a:solidFill>
+              <a:srgbClr val="00C8FF"/>
+            </a:solidFill>
+          </a:ln>
+        </p:spPr>
+        <p:style>
+          <a:lnRef idx="2">
+            <a:schemeClr val="accent1"/>
+          </a:lnRef>
+          <a:fillRef idx="0">
+            <a:schemeClr val="accent1"/>
+          </a:fillRef>
+          <a:effectRef idx="1">
+            <a:schemeClr val="accent1"/>
+          </a:effectRef>
+          <a:fontRef idx="minor">
+            <a:schemeClr val="tx1"/>
+          </a:fontRef>
+        </p:style>
+      </p:cxnSp>
+      <p:cxnSp>
+        <p:nvCxnSpPr>
+          <p:cNvPr id="40" name="Connector 39"/>
+          <p:cNvCxnSpPr/>
+          <p:nvPr/>
+        </p:nvCxnSpPr>
+        <p:spPr>
+          <a:xfrm flipV="1">
+            <a:off x="6051884.2105263155" y="574507.8947368423"/>
+            <a:ext cx="60157.89473684225" cy="60157.89473684202"/>
+          </a:xfrm>
+          <a:prstGeom prst="line">
+            <a:avLst/>
+          </a:prstGeom>
+          <a:ln w="25400">
+            <a:solidFill>
+              <a:srgbClr val="00C8FF"/>
+            </a:solidFill>
+          </a:ln>
+        </p:spPr>
+        <p:style>
+          <a:lnRef idx="2">
+            <a:schemeClr val="accent1"/>
+          </a:lnRef>
+          <a:fillRef idx="0">
+            <a:schemeClr val="accent1"/>
+          </a:fillRef>
+          <a:effectRef idx="1">
+            <a:schemeClr val="accent1"/>
+          </a:effectRef>
+          <a:fontRef idx="minor">
+            <a:schemeClr val="tx1"/>
+          </a:fontRef>
+        </p:style>
+      </p:cxnSp>
+      <p:cxnSp>
+        <p:nvCxnSpPr>
+          <p:cNvPr id="41" name="Connector 40"/>
+          <p:cNvCxnSpPr/>
+          <p:nvPr/>
+        </p:nvCxnSpPr>
+        <p:spPr>
+          <a:xfrm flipV="1">
+            <a:off x="6112042.105263158" y="514350.0"/>
+            <a:ext cx="60157.89473684225" cy="60157.89473684225"/>
+          </a:xfrm>
+          <a:prstGeom prst="line">
+            <a:avLst/>
+          </a:prstGeom>
+          <a:ln w="25400">
+            <a:solidFill>
+              <a:srgbClr val="00C8FF"/>
+            </a:solidFill>
+          </a:ln>
+        </p:spPr>
+        <p:style>
+          <a:lnRef idx="2">
+            <a:schemeClr val="accent1"/>
+          </a:lnRef>
+          <a:fillRef idx="0">
+            <a:schemeClr val="accent1"/>
+          </a:fillRef>
+          <a:effectRef idx="1">
+            <a:schemeClr val="accent1"/>
+          </a:effectRef>
+          <a:fontRef idx="minor">
+            <a:schemeClr val="tx1"/>
+          </a:fontRef>
+        </p:style>
+      </p:cxnSp>
+      <p:sp>
+        <p:nvSpPr>
+          <p:cNvPr id="42" name="Oval 41"/>
           <p:cNvSpPr/>
           <p:nvPr/>
         </p:nvSpPr>
         <p:spPr>
           <a:xfrm>
-            <a:off x="6819900" y="247650"/>
+            <a:off x="4991100" y="2076450"/>
+            <a:ext cx="76200" cy="76200"/>
+          </a:xfrm>
+          <a:prstGeom prst="ellipse">
+            <a:avLst/>
+          </a:prstGeom>
+          <a:noFill/>
+          <a:ln>
+            <a:solidFill>
+              <a:srgbClr val="FFFFFF"/>
+            </a:solidFill>
+          </a:ln>
+        </p:spPr>
+        <p:style>
+          <a:lnRef idx="1">
+            <a:schemeClr val="accent1"/>
+          </a:lnRef>
+          <a:fillRef idx="3">
+            <a:schemeClr val="accent1"/>
+          </a:fillRef>
+          <a:effectRef idx="2">
+            <a:schemeClr val="accent1"/>
+          </a:effectRef>
+          <a:fontRef idx="minor">
+            <a:schemeClr val="lt1"/>
+          </a:fontRef>
+        </p:style>
+        <p:txBody>
+          <a:bodyPr rtlCol="0" anchor="ctr"/>
+          <a:lstStyle/>
+          <a:p>
+            <a:pPr algn="ctr"/>
+          </a:p>
+        </p:txBody>
+      </p:sp>
+      <p:sp>
+        <p:nvSpPr>
+          <p:cNvPr id="43" name="Oval 42"/>
+          <p:cNvSpPr/>
+          <p:nvPr/>
+        </p:nvSpPr>
+        <p:spPr>
+          <a:xfrm>
+            <a:off x="4991100" y="1619250"/>
             <a:ext cx="76200" cy="76200"/>
           </a:xfrm>
           <a:prstGeom prst="ellipse">
@@ -3913,13 +4586,13 @@
       </p:sp>
       <p:sp>
         <p:nvSpPr>
-          <p:cNvPr id="25" name="TextBox 24"/>
+          <p:cNvPr id="44" name="TextBox 43"/>
           <p:cNvSpPr txBox="1"/>
           <p:nvPr/>
         </p:nvSpPr>
         <p:spPr>
           <a:xfrm>
-            <a:off x="4251960" y="2891790"/>
+            <a:off x="5806440" y="925830"/>
             <a:ext cx="635000" cy="254000"/>
           </a:xfrm>
           <a:prstGeom prst="rect">
@@ -3942,187 +4615,7 @@
               </a:defRPr>
             </a:pPr>
             <a:r>
-              <a:t>O</a:t>
-            </a:r>
-          </a:p>
-        </p:txBody>
-      </p:sp>
-      <p:sp>
-        <p:nvSpPr>
-          <p:cNvPr id="26" name="TextBox 25"/>
-          <p:cNvSpPr txBox="1"/>
-          <p:nvPr/>
-        </p:nvSpPr>
-        <p:spPr>
-          <a:xfrm>
-            <a:off x="9372600" y="2891790"/>
-            <a:ext cx="635000" cy="254000"/>
-          </a:xfrm>
-          <a:prstGeom prst="rect">
-            <a:avLst/>
-          </a:prstGeom>
-          <a:noFill/>
-        </p:spPr>
-        <p:txBody>
-          <a:bodyPr wrap="none">
-            <a:spAutoFit/>
-          </a:bodyPr>
-          <a:lstStyle/>
-          <a:p>
-            <a:pPr>
-              <a:defRPr sz="1200">
-                <a:solidFill>
-                  <a:srgbClr val="FFFFFF"/>
-                </a:solidFill>
-                <a:latin typeface="Inter"/>
-              </a:defRPr>
-            </a:pPr>
-            <a:r>
-              <a:t>x</a:t>
-            </a:r>
-          </a:p>
-        </p:txBody>
-      </p:sp>
-      <p:sp>
-        <p:nvSpPr>
-          <p:cNvPr id="27" name="TextBox 26"/>
-          <p:cNvSpPr txBox="1"/>
-          <p:nvPr/>
-        </p:nvSpPr>
-        <p:spPr>
-          <a:xfrm>
-            <a:off x="4251960" y="-2228850"/>
-            <a:ext cx="635000" cy="254000"/>
-          </a:xfrm>
-          <a:prstGeom prst="rect">
-            <a:avLst/>
-          </a:prstGeom>
-          <a:noFill/>
-        </p:spPr>
-        <p:txBody>
-          <a:bodyPr wrap="none">
-            <a:spAutoFit/>
-          </a:bodyPr>
-          <a:lstStyle/>
-          <a:p>
-            <a:pPr>
-              <a:defRPr sz="1200">
-                <a:solidFill>
-                  <a:srgbClr val="FFFFFF"/>
-                </a:solidFill>
-                <a:latin typeface="Inter"/>
-              </a:defRPr>
-            </a:pPr>
-            <a:r>
-              <a:t>y</a:t>
-            </a:r>
-          </a:p>
-        </p:txBody>
-      </p:sp>
-      <p:sp>
-        <p:nvSpPr>
-          <p:cNvPr id="28" name="TextBox 27"/>
-          <p:cNvSpPr txBox="1"/>
-          <p:nvPr/>
-        </p:nvSpPr>
-        <p:spPr>
-          <a:xfrm>
-            <a:off x="8001000" y="-1314450"/>
-            <a:ext cx="635000" cy="254000"/>
-          </a:xfrm>
-          <a:prstGeom prst="rect">
-            <a:avLst/>
-          </a:prstGeom>
-          <a:noFill/>
-        </p:spPr>
-        <p:txBody>
-          <a:bodyPr wrap="none">
-            <a:spAutoFit/>
-          </a:bodyPr>
-          <a:lstStyle/>
-          <a:p>
-            <a:pPr>
-              <a:defRPr sz="1200">
-                <a:solidFill>
-                  <a:srgbClr val="FFFFFF"/>
-                </a:solidFill>
-                <a:latin typeface="Inter"/>
-              </a:defRPr>
-            </a:pPr>
-            <a:r>
-              <a:t>$y=f(x)$</a:t>
-            </a:r>
-          </a:p>
-        </p:txBody>
-      </p:sp>
-      <p:sp>
-        <p:nvSpPr>
-          <p:cNvPr id="29" name="TextBox 28"/>
-          <p:cNvSpPr txBox="1"/>
-          <p:nvPr/>
-        </p:nvSpPr>
-        <p:spPr>
-          <a:xfrm>
-            <a:off x="6858000" y="2891790"/>
-            <a:ext cx="635000" cy="254000"/>
-          </a:xfrm>
-          <a:prstGeom prst="rect">
-            <a:avLst/>
-          </a:prstGeom>
-          <a:noFill/>
-        </p:spPr>
-        <p:txBody>
-          <a:bodyPr wrap="none">
-            <a:spAutoFit/>
-          </a:bodyPr>
-          <a:lstStyle/>
-          <a:p>
-            <a:pPr>
-              <a:defRPr sz="1200">
-                <a:solidFill>
-                  <a:srgbClr val="FFFFFF"/>
-                </a:solidFill>
-                <a:latin typeface="Inter"/>
-              </a:defRPr>
-            </a:pPr>
-            <a:r>
-              <a:t>$a$</a:t>
-            </a:r>
-          </a:p>
-        </p:txBody>
-      </p:sp>
-      <p:sp>
-        <p:nvSpPr>
-          <p:cNvPr id="30" name="TextBox 29"/>
-          <p:cNvSpPr txBox="1"/>
-          <p:nvPr/>
-        </p:nvSpPr>
-        <p:spPr>
-          <a:xfrm>
-            <a:off x="4023360" y="285750"/>
-            <a:ext cx="635000" cy="254000"/>
-          </a:xfrm>
-          <a:prstGeom prst="rect">
-            <a:avLst/>
-          </a:prstGeom>
-          <a:noFill/>
-        </p:spPr>
-        <p:txBody>
-          <a:bodyPr wrap="none">
-            <a:spAutoFit/>
-          </a:bodyPr>
-          <a:lstStyle/>
-          <a:p>
-            <a:pPr>
-              <a:defRPr sz="1200">
-                <a:solidFill>
-                  <a:srgbClr val="FFFFFF"/>
-                </a:solidFill>
-                <a:latin typeface="Inter"/>
-              </a:defRPr>
-            </a:pPr>
-            <a:r>
-              <a:t>$f(a)$</a:t>
+              <a:t>y=f(x)</a:t>
             </a:r>
           </a:p>
         </p:txBody>

--- a/output/2.pptx
+++ b/output/2.pptx
@@ -3174,8 +3174,8 @@
         </p:nvCxnSpPr>
         <p:spPr>
           <a:xfrm>
-            <a:off x="3657600.0" y="742950.0"/>
-            <a:ext cx="72189.47368421033" cy="72189.47368421056"/>
+            <a:off x="4343400.0" y="1428750.0"/>
+            <a:ext cx="22860.0" cy="22860.0"/>
           </a:xfrm>
           <a:prstGeom prst="line">
             <a:avLst/>
@@ -3209,8 +3209,8 @@
         </p:nvCxnSpPr>
         <p:spPr>
           <a:xfrm>
-            <a:off x="3729789.4736842103" y="815139.4736842106"/>
-            <a:ext cx="72189.4736842108" cy="72189.47368421056"/>
+            <a:off x="4366260.0" y="1451610.0"/>
+            <a:ext cx="22860.0" cy="22860.0"/>
           </a:xfrm>
           <a:prstGeom prst="line">
             <a:avLst/>
@@ -3244,8 +3244,8 @@
         </p:nvCxnSpPr>
         <p:spPr>
           <a:xfrm>
-            <a:off x="3801978.947368421" y="887328.9473684211"/>
-            <a:ext cx="72189.47368421033" cy="72189.47368421056"/>
+            <a:off x="4389120.0" y="1474470.0"/>
+            <a:ext cx="22860.0" cy="22860.0"/>
           </a:xfrm>
           <a:prstGeom prst="line">
             <a:avLst/>
@@ -3279,8 +3279,8 @@
         </p:nvCxnSpPr>
         <p:spPr>
           <a:xfrm>
-            <a:off x="3874168.4210526315" y="959518.4210526317"/>
-            <a:ext cx="72189.4736842108" cy="72189.47368421056"/>
+            <a:off x="4411980.0" y="1497330.0"/>
+            <a:ext cx="22860.0" cy="22860.0"/>
           </a:xfrm>
           <a:prstGeom prst="line">
             <a:avLst/>
@@ -3314,8 +3314,8 @@
         </p:nvCxnSpPr>
         <p:spPr>
           <a:xfrm>
-            <a:off x="3946357.8947368423" y="1031707.8947368423"/>
-            <a:ext cx="72189.47368421033" cy="72189.47368421056"/>
+            <a:off x="4434840.0" y="1520190.0"/>
+            <a:ext cx="22860.0" cy="22860.0"/>
           </a:xfrm>
           <a:prstGeom prst="line">
             <a:avLst/>
@@ -3349,8 +3349,8 @@
         </p:nvCxnSpPr>
         <p:spPr>
           <a:xfrm>
-            <a:off x="4018547.3684210526" y="1103897.3684210528"/>
-            <a:ext cx="72189.4736842108" cy="72189.47368421056"/>
+            <a:off x="4457700.0" y="1543050.0"/>
+            <a:ext cx="22860.0" cy="22860.0"/>
           </a:xfrm>
           <a:prstGeom prst="line">
             <a:avLst/>
@@ -3384,8 +3384,8 @@
         </p:nvCxnSpPr>
         <p:spPr>
           <a:xfrm>
-            <a:off x="4090736.8421052634" y="1176086.8421052634"/>
-            <a:ext cx="72189.47368421033" cy="72189.47368421056"/>
+            <a:off x="4480560.0" y="1565910.0"/>
+            <a:ext cx="22860.0" cy="22860.0"/>
           </a:xfrm>
           <a:prstGeom prst="line">
             <a:avLst/>
@@ -3419,8 +3419,8 @@
         </p:nvCxnSpPr>
         <p:spPr>
           <a:xfrm>
-            <a:off x="4162926.3157894737" y="1248276.315789474"/>
-            <a:ext cx="72189.4736842108" cy="72189.47368421033"/>
+            <a:off x="4503420.0" y="1588770.0"/>
+            <a:ext cx="22860.0" cy="22860.0"/>
           </a:xfrm>
           <a:prstGeom prst="line">
             <a:avLst/>
@@ -3454,8 +3454,8 @@
         </p:nvCxnSpPr>
         <p:spPr>
           <a:xfrm>
-            <a:off x="4235115.7894736845" y="1320465.7894736843"/>
-            <a:ext cx="72189.47368421033" cy="72189.47368421056"/>
+            <a:off x="4526280.0" y="1611630.0"/>
+            <a:ext cx="22860.0" cy="22860.0"/>
           </a:xfrm>
           <a:prstGeom prst="line">
             <a:avLst/>
@@ -3489,8 +3489,8 @@
         </p:nvCxnSpPr>
         <p:spPr>
           <a:xfrm>
-            <a:off x="4307305.263157895" y="1392655.2631578948"/>
-            <a:ext cx="72189.47368421033" cy="72189.47368421033"/>
+            <a:off x="4549140.0" y="1634490.0"/>
+            <a:ext cx="22860.0" cy="22860.0"/>
           </a:xfrm>
           <a:prstGeom prst="line">
             <a:avLst/>
@@ -3524,8 +3524,8 @@
         </p:nvCxnSpPr>
         <p:spPr>
           <a:xfrm>
-            <a:off x="4379494.736842105" y="1464844.7368421052"/>
-            <a:ext cx="72189.47368421033" cy="72189.4736842108"/>
+            <a:off x="4572000.0" y="1657350.0"/>
+            <a:ext cx="22860.0" cy="22860.0"/>
           </a:xfrm>
           <a:prstGeom prst="line">
             <a:avLst/>
@@ -3559,8 +3559,8 @@
         </p:nvCxnSpPr>
         <p:spPr>
           <a:xfrm>
-            <a:off x="4451684.2105263155" y="1537034.210526316"/>
-            <a:ext cx="72189.47368421126" cy="72189.47368421033"/>
+            <a:off x="4594860.0" y="1680210.0"/>
+            <a:ext cx="22860.0" cy="22860.0"/>
           </a:xfrm>
           <a:prstGeom prst="line">
             <a:avLst/>
@@ -3594,8 +3594,8 @@
         </p:nvCxnSpPr>
         <p:spPr>
           <a:xfrm>
-            <a:off x="4523873.684210527" y="1609223.6842105263"/>
-            <a:ext cx="72189.47368421033" cy="72189.4736842108"/>
+            <a:off x="4617720.0" y="1703070.0"/>
+            <a:ext cx="22860.0" cy="22860.0"/>
           </a:xfrm>
           <a:prstGeom prst="line">
             <a:avLst/>
@@ -3629,8 +3629,8 @@
         </p:nvCxnSpPr>
         <p:spPr>
           <a:xfrm>
-            <a:off x="4596063.157894737" y="1681413.157894737"/>
-            <a:ext cx="72189.47368421033" cy="72189.47368421033"/>
+            <a:off x="4640580.0" y="1725930.0"/>
+            <a:ext cx="22860.0" cy="22860.0"/>
           </a:xfrm>
           <a:prstGeom prst="line">
             <a:avLst/>
@@ -3664,8 +3664,8 @@
         </p:nvCxnSpPr>
         <p:spPr>
           <a:xfrm>
-            <a:off x="4668252.631578947" y="1753602.6315789474"/>
-            <a:ext cx="72189.47368421033" cy="72189.47368421033"/>
+            <a:off x="4663440.0" y="1748790.0"/>
+            <a:ext cx="22860.0" cy="22860.0"/>
           </a:xfrm>
           <a:prstGeom prst="line">
             <a:avLst/>
@@ -3699,8 +3699,8 @@
         </p:nvCxnSpPr>
         <p:spPr>
           <a:xfrm>
-            <a:off x="4740442.105263158" y="1825792.1052631577"/>
-            <a:ext cx="72189.47368421033" cy="72189.4736842108"/>
+            <a:off x="4686300.0" y="1771650.0"/>
+            <a:ext cx="22860.0" cy="22860.0"/>
           </a:xfrm>
           <a:prstGeom prst="line">
             <a:avLst/>
@@ -3734,8 +3734,8 @@
         </p:nvCxnSpPr>
         <p:spPr>
           <a:xfrm>
-            <a:off x="4812631.578947368" y="1897981.5789473685"/>
-            <a:ext cx="72189.47368421126" cy="72189.47368421033"/>
+            <a:off x="4709160.0" y="1794510.0"/>
+            <a:ext cx="22860.0" cy="22860.0"/>
           </a:xfrm>
           <a:prstGeom prst="line">
             <a:avLst/>
@@ -3769,8 +3769,8 @@
         </p:nvCxnSpPr>
         <p:spPr>
           <a:xfrm>
-            <a:off x="4884821.052631579" y="1970171.0526315789"/>
-            <a:ext cx="72189.47368421033" cy="72189.47368421056"/>
+            <a:off x="4732020.0" y="1817370.0"/>
+            <a:ext cx="22860.0" cy="22860.0"/>
           </a:xfrm>
           <a:prstGeom prst="line">
             <a:avLst/>
@@ -3804,8 +3804,8 @@
         </p:nvCxnSpPr>
         <p:spPr>
           <a:xfrm>
-            <a:off x="4957010.52631579" y="2042360.5263157894"/>
-            <a:ext cx="71732.27368421014" cy="71732.27368421038"/>
+            <a:off x="4754880.0" y="1840230.0"/>
+            <a:ext cx="22860.0" cy="22860.0"/>
           </a:xfrm>
           <a:prstGeom prst="line">
             <a:avLst/>
@@ -3838,667 +3838,1367 @@
           <p:nvPr/>
         </p:nvCxnSpPr>
         <p:spPr>
+          <a:xfrm>
+            <a:off x="4777740.0" y="1863090.0"/>
+            <a:ext cx="22860.0" cy="22860.0"/>
+          </a:xfrm>
+          <a:prstGeom prst="line">
+            <a:avLst/>
+          </a:prstGeom>
+          <a:ln w="25400">
+            <a:solidFill>
+              <a:srgbClr val="00C8FF"/>
+            </a:solidFill>
+          </a:ln>
+        </p:spPr>
+        <p:style>
+          <a:lnRef idx="2">
+            <a:schemeClr val="accent1"/>
+          </a:lnRef>
+          <a:fillRef idx="0">
+            <a:schemeClr val="accent1"/>
+          </a:fillRef>
+          <a:effectRef idx="1">
+            <a:schemeClr val="accent1"/>
+          </a:effectRef>
+          <a:fontRef idx="minor">
+            <a:schemeClr val="tx1"/>
+          </a:fontRef>
+        </p:style>
+      </p:cxnSp>
+      <p:cxnSp>
+        <p:nvCxnSpPr>
+          <p:cNvPr id="24" name="Connector 23"/>
+          <p:cNvCxnSpPr/>
+          <p:nvPr/>
+        </p:nvCxnSpPr>
+        <p:spPr>
+          <a:xfrm>
+            <a:off x="4800600.0" y="1885950.0"/>
+            <a:ext cx="22860.0" cy="22860.0"/>
+          </a:xfrm>
+          <a:prstGeom prst="line">
+            <a:avLst/>
+          </a:prstGeom>
+          <a:ln w="25400">
+            <a:solidFill>
+              <a:srgbClr val="00C8FF"/>
+            </a:solidFill>
+          </a:ln>
+        </p:spPr>
+        <p:style>
+          <a:lnRef idx="2">
+            <a:schemeClr val="accent1"/>
+          </a:lnRef>
+          <a:fillRef idx="0">
+            <a:schemeClr val="accent1"/>
+          </a:fillRef>
+          <a:effectRef idx="1">
+            <a:schemeClr val="accent1"/>
+          </a:effectRef>
+          <a:fontRef idx="minor">
+            <a:schemeClr val="tx1"/>
+          </a:fontRef>
+        </p:style>
+      </p:cxnSp>
+      <p:cxnSp>
+        <p:nvCxnSpPr>
+          <p:cNvPr id="25" name="Connector 24"/>
+          <p:cNvCxnSpPr/>
+          <p:nvPr/>
+        </p:nvCxnSpPr>
+        <p:spPr>
+          <a:xfrm>
+            <a:off x="4823460.0" y="1908810.0"/>
+            <a:ext cx="22860.0" cy="22860.0"/>
+          </a:xfrm>
+          <a:prstGeom prst="line">
+            <a:avLst/>
+          </a:prstGeom>
+          <a:ln w="25400">
+            <a:solidFill>
+              <a:srgbClr val="00C8FF"/>
+            </a:solidFill>
+          </a:ln>
+        </p:spPr>
+        <p:style>
+          <a:lnRef idx="2">
+            <a:schemeClr val="accent1"/>
+          </a:lnRef>
+          <a:fillRef idx="0">
+            <a:schemeClr val="accent1"/>
+          </a:fillRef>
+          <a:effectRef idx="1">
+            <a:schemeClr val="accent1"/>
+          </a:effectRef>
+          <a:fontRef idx="minor">
+            <a:schemeClr val="tx1"/>
+          </a:fontRef>
+        </p:style>
+      </p:cxnSp>
+      <p:cxnSp>
+        <p:nvCxnSpPr>
+          <p:cNvPr id="26" name="Connector 25"/>
+          <p:cNvCxnSpPr/>
+          <p:nvPr/>
+        </p:nvCxnSpPr>
+        <p:spPr>
+          <a:xfrm>
+            <a:off x="4846320.0" y="1931670.0"/>
+            <a:ext cx="22860.0" cy="22860.0"/>
+          </a:xfrm>
+          <a:prstGeom prst="line">
+            <a:avLst/>
+          </a:prstGeom>
+          <a:ln w="25400">
+            <a:solidFill>
+              <a:srgbClr val="00C8FF"/>
+            </a:solidFill>
+          </a:ln>
+        </p:spPr>
+        <p:style>
+          <a:lnRef idx="2">
+            <a:schemeClr val="accent1"/>
+          </a:lnRef>
+          <a:fillRef idx="0">
+            <a:schemeClr val="accent1"/>
+          </a:fillRef>
+          <a:effectRef idx="1">
+            <a:schemeClr val="accent1"/>
+          </a:effectRef>
+          <a:fontRef idx="minor">
+            <a:schemeClr val="tx1"/>
+          </a:fontRef>
+        </p:style>
+      </p:cxnSp>
+      <p:cxnSp>
+        <p:nvCxnSpPr>
+          <p:cNvPr id="27" name="Connector 26"/>
+          <p:cNvCxnSpPr/>
+          <p:nvPr/>
+        </p:nvCxnSpPr>
+        <p:spPr>
+          <a:xfrm>
+            <a:off x="4869180.0" y="1954530.0"/>
+            <a:ext cx="22860.0" cy="22860.0"/>
+          </a:xfrm>
+          <a:prstGeom prst="line">
+            <a:avLst/>
+          </a:prstGeom>
+          <a:ln w="25400">
+            <a:solidFill>
+              <a:srgbClr val="00C8FF"/>
+            </a:solidFill>
+          </a:ln>
+        </p:spPr>
+        <p:style>
+          <a:lnRef idx="2">
+            <a:schemeClr val="accent1"/>
+          </a:lnRef>
+          <a:fillRef idx="0">
+            <a:schemeClr val="accent1"/>
+          </a:fillRef>
+          <a:effectRef idx="1">
+            <a:schemeClr val="accent1"/>
+          </a:effectRef>
+          <a:fontRef idx="minor">
+            <a:schemeClr val="tx1"/>
+          </a:fontRef>
+        </p:style>
+      </p:cxnSp>
+      <p:cxnSp>
+        <p:nvCxnSpPr>
+          <p:cNvPr id="28" name="Connector 27"/>
+          <p:cNvCxnSpPr/>
+          <p:nvPr/>
+        </p:nvCxnSpPr>
+        <p:spPr>
+          <a:xfrm>
+            <a:off x="4892040.0" y="1977390.0"/>
+            <a:ext cx="22860.0" cy="22860.0"/>
+          </a:xfrm>
+          <a:prstGeom prst="line">
+            <a:avLst/>
+          </a:prstGeom>
+          <a:ln w="25400">
+            <a:solidFill>
+              <a:srgbClr val="00C8FF"/>
+            </a:solidFill>
+          </a:ln>
+        </p:spPr>
+        <p:style>
+          <a:lnRef idx="2">
+            <a:schemeClr val="accent1"/>
+          </a:lnRef>
+          <a:fillRef idx="0">
+            <a:schemeClr val="accent1"/>
+          </a:fillRef>
+          <a:effectRef idx="1">
+            <a:schemeClr val="accent1"/>
+          </a:effectRef>
+          <a:fontRef idx="minor">
+            <a:schemeClr val="tx1"/>
+          </a:fontRef>
+        </p:style>
+      </p:cxnSp>
+      <p:cxnSp>
+        <p:nvCxnSpPr>
+          <p:cNvPr id="29" name="Connector 28"/>
+          <p:cNvCxnSpPr/>
+          <p:nvPr/>
+        </p:nvCxnSpPr>
+        <p:spPr>
+          <a:xfrm>
+            <a:off x="4914900.0" y="2000250.0"/>
+            <a:ext cx="22860.0" cy="22860.0"/>
+          </a:xfrm>
+          <a:prstGeom prst="line">
+            <a:avLst/>
+          </a:prstGeom>
+          <a:ln w="25400">
+            <a:solidFill>
+              <a:srgbClr val="00C8FF"/>
+            </a:solidFill>
+          </a:ln>
+        </p:spPr>
+        <p:style>
+          <a:lnRef idx="2">
+            <a:schemeClr val="accent1"/>
+          </a:lnRef>
+          <a:fillRef idx="0">
+            <a:schemeClr val="accent1"/>
+          </a:fillRef>
+          <a:effectRef idx="1">
+            <a:schemeClr val="accent1"/>
+          </a:effectRef>
+          <a:fontRef idx="minor">
+            <a:schemeClr val="tx1"/>
+          </a:fontRef>
+        </p:style>
+      </p:cxnSp>
+      <p:cxnSp>
+        <p:nvCxnSpPr>
+          <p:cNvPr id="30" name="Connector 29"/>
+          <p:cNvCxnSpPr/>
+          <p:nvPr/>
+        </p:nvCxnSpPr>
+        <p:spPr>
+          <a:xfrm>
+            <a:off x="4937760.0" y="2023110.0"/>
+            <a:ext cx="22860.0" cy="22860.0"/>
+          </a:xfrm>
+          <a:prstGeom prst="line">
+            <a:avLst/>
+          </a:prstGeom>
+          <a:ln w="25400">
+            <a:solidFill>
+              <a:srgbClr val="00C8FF"/>
+            </a:solidFill>
+          </a:ln>
+        </p:spPr>
+        <p:style>
+          <a:lnRef idx="2">
+            <a:schemeClr val="accent1"/>
+          </a:lnRef>
+          <a:fillRef idx="0">
+            <a:schemeClr val="accent1"/>
+          </a:fillRef>
+          <a:effectRef idx="1">
+            <a:schemeClr val="accent1"/>
+          </a:effectRef>
+          <a:fontRef idx="minor">
+            <a:schemeClr val="tx1"/>
+          </a:fontRef>
+        </p:style>
+      </p:cxnSp>
+      <p:cxnSp>
+        <p:nvCxnSpPr>
+          <p:cNvPr id="31" name="Connector 30"/>
+          <p:cNvCxnSpPr/>
+          <p:nvPr/>
+        </p:nvCxnSpPr>
+        <p:spPr>
+          <a:xfrm>
+            <a:off x="4960620.0" y="2045970.0"/>
+            <a:ext cx="22860.0" cy="22860.0"/>
+          </a:xfrm>
+          <a:prstGeom prst="line">
+            <a:avLst/>
+          </a:prstGeom>
+          <a:ln w="25400">
+            <a:solidFill>
+              <a:srgbClr val="00C8FF"/>
+            </a:solidFill>
+          </a:ln>
+        </p:spPr>
+        <p:style>
+          <a:lnRef idx="2">
+            <a:schemeClr val="accent1"/>
+          </a:lnRef>
+          <a:fillRef idx="0">
+            <a:schemeClr val="accent1"/>
+          </a:fillRef>
+          <a:effectRef idx="1">
+            <a:schemeClr val="accent1"/>
+          </a:effectRef>
+          <a:fontRef idx="minor">
+            <a:schemeClr val="tx1"/>
+          </a:fontRef>
+        </p:style>
+      </p:cxnSp>
+      <p:cxnSp>
+        <p:nvCxnSpPr>
+          <p:cNvPr id="32" name="Connector 31"/>
+          <p:cNvCxnSpPr/>
+          <p:nvPr/>
+        </p:nvCxnSpPr>
+        <p:spPr>
+          <a:xfrm>
+            <a:off x="4983480.0" y="2068830.0"/>
+            <a:ext cx="41148.0" cy="41148.0"/>
+          </a:xfrm>
+          <a:prstGeom prst="line">
+            <a:avLst/>
+          </a:prstGeom>
+          <a:ln w="25400">
+            <a:solidFill>
+              <a:srgbClr val="00C8FF"/>
+            </a:solidFill>
+          </a:ln>
+        </p:spPr>
+        <p:style>
+          <a:lnRef idx="2">
+            <a:schemeClr val="accent1"/>
+          </a:lnRef>
+          <a:fillRef idx="0">
+            <a:schemeClr val="accent1"/>
+          </a:fillRef>
+          <a:effectRef idx="1">
+            <a:schemeClr val="accent1"/>
+          </a:effectRef>
+          <a:fontRef idx="minor">
+            <a:schemeClr val="tx1"/>
+          </a:fontRef>
+        </p:style>
+      </p:cxnSp>
+      <p:cxnSp>
+        <p:nvCxnSpPr>
+          <p:cNvPr id="33" name="Connector 32"/>
+          <p:cNvCxnSpPr/>
+          <p:nvPr/>
+        </p:nvCxnSpPr>
+        <p:spPr>
           <a:xfrm flipV="1">
-            <a:off x="5029200.0" y="1597192.105263158"/>
-            <a:ext cx="60157.89473684225" cy="60157.89473684202"/>
-          </a:xfrm>
-          <a:prstGeom prst="line">
-            <a:avLst/>
-          </a:prstGeom>
-          <a:ln w="25400">
-            <a:solidFill>
-              <a:srgbClr val="00C8FF"/>
-            </a:solidFill>
-          </a:ln>
-        </p:spPr>
-        <p:style>
-          <a:lnRef idx="2">
-            <a:schemeClr val="accent1"/>
-          </a:lnRef>
-          <a:fillRef idx="0">
-            <a:schemeClr val="accent1"/>
-          </a:fillRef>
-          <a:effectRef idx="1">
-            <a:schemeClr val="accent1"/>
-          </a:effectRef>
-          <a:fontRef idx="minor">
-            <a:schemeClr val="tx1"/>
-          </a:fontRef>
-        </p:style>
-      </p:cxnSp>
-      <p:cxnSp>
-        <p:nvCxnSpPr>
-          <p:cNvPr id="24" name="Connector 23"/>
+            <a:off x="5033772.0" y="1629918.0"/>
+            <a:ext cx="22860.0" cy="22860.0"/>
+          </a:xfrm>
+          <a:prstGeom prst="line">
+            <a:avLst/>
+          </a:prstGeom>
+          <a:ln w="25400">
+            <a:solidFill>
+              <a:srgbClr val="00C8FF"/>
+            </a:solidFill>
+          </a:ln>
+        </p:spPr>
+        <p:style>
+          <a:lnRef idx="2">
+            <a:schemeClr val="accent1"/>
+          </a:lnRef>
+          <a:fillRef idx="0">
+            <a:schemeClr val="accent1"/>
+          </a:fillRef>
+          <a:effectRef idx="1">
+            <a:schemeClr val="accent1"/>
+          </a:effectRef>
+          <a:fontRef idx="minor">
+            <a:schemeClr val="tx1"/>
+          </a:fontRef>
+        </p:style>
+      </p:cxnSp>
+      <p:cxnSp>
+        <p:nvCxnSpPr>
+          <p:cNvPr id="34" name="Connector 33"/>
           <p:cNvCxnSpPr/>
           <p:nvPr/>
         </p:nvCxnSpPr>
         <p:spPr>
           <a:xfrm flipV="1">
-            <a:off x="5089357.894736842" y="1537034.210526316"/>
-            <a:ext cx="60157.89473684225" cy="60157.89473684202"/>
-          </a:xfrm>
-          <a:prstGeom prst="line">
-            <a:avLst/>
-          </a:prstGeom>
-          <a:ln w="25400">
-            <a:solidFill>
-              <a:srgbClr val="00C8FF"/>
-            </a:solidFill>
-          </a:ln>
-        </p:spPr>
-        <p:style>
-          <a:lnRef idx="2">
-            <a:schemeClr val="accent1"/>
-          </a:lnRef>
-          <a:fillRef idx="0">
-            <a:schemeClr val="accent1"/>
-          </a:fillRef>
-          <a:effectRef idx="1">
-            <a:schemeClr val="accent1"/>
-          </a:effectRef>
-          <a:fontRef idx="minor">
-            <a:schemeClr val="tx1"/>
-          </a:fontRef>
-        </p:style>
-      </p:cxnSp>
-      <p:cxnSp>
-        <p:nvCxnSpPr>
-          <p:cNvPr id="25" name="Connector 24"/>
+            <a:off x="5056632.0" y="1607058.0"/>
+            <a:ext cx="22860.0" cy="22860.0"/>
+          </a:xfrm>
+          <a:prstGeom prst="line">
+            <a:avLst/>
+          </a:prstGeom>
+          <a:ln w="25400">
+            <a:solidFill>
+              <a:srgbClr val="00C8FF"/>
+            </a:solidFill>
+          </a:ln>
+        </p:spPr>
+        <p:style>
+          <a:lnRef idx="2">
+            <a:schemeClr val="accent1"/>
+          </a:lnRef>
+          <a:fillRef idx="0">
+            <a:schemeClr val="accent1"/>
+          </a:fillRef>
+          <a:effectRef idx="1">
+            <a:schemeClr val="accent1"/>
+          </a:effectRef>
+          <a:fontRef idx="minor">
+            <a:schemeClr val="tx1"/>
+          </a:fontRef>
+        </p:style>
+      </p:cxnSp>
+      <p:cxnSp>
+        <p:nvCxnSpPr>
+          <p:cNvPr id="35" name="Connector 34"/>
           <p:cNvCxnSpPr/>
           <p:nvPr/>
         </p:nvCxnSpPr>
         <p:spPr>
           <a:xfrm flipV="1">
-            <a:off x="5149515.7894736845" y="1476876.315789474"/>
-            <a:ext cx="60157.89473684132" cy="60157.89473684202"/>
-          </a:xfrm>
-          <a:prstGeom prst="line">
-            <a:avLst/>
-          </a:prstGeom>
-          <a:ln w="25400">
-            <a:solidFill>
-              <a:srgbClr val="00C8FF"/>
-            </a:solidFill>
-          </a:ln>
-        </p:spPr>
-        <p:style>
-          <a:lnRef idx="2">
-            <a:schemeClr val="accent1"/>
-          </a:lnRef>
-          <a:fillRef idx="0">
-            <a:schemeClr val="accent1"/>
-          </a:fillRef>
-          <a:effectRef idx="1">
-            <a:schemeClr val="accent1"/>
-          </a:effectRef>
-          <a:fontRef idx="minor">
-            <a:schemeClr val="tx1"/>
-          </a:fontRef>
-        </p:style>
-      </p:cxnSp>
-      <p:cxnSp>
-        <p:nvCxnSpPr>
-          <p:cNvPr id="26" name="Connector 25"/>
+            <a:off x="5079492.0" y="1584198.0"/>
+            <a:ext cx="22860.0" cy="22860.0"/>
+          </a:xfrm>
+          <a:prstGeom prst="line">
+            <a:avLst/>
+          </a:prstGeom>
+          <a:ln w="25400">
+            <a:solidFill>
+              <a:srgbClr val="00C8FF"/>
+            </a:solidFill>
+          </a:ln>
+        </p:spPr>
+        <p:style>
+          <a:lnRef idx="2">
+            <a:schemeClr val="accent1"/>
+          </a:lnRef>
+          <a:fillRef idx="0">
+            <a:schemeClr val="accent1"/>
+          </a:fillRef>
+          <a:effectRef idx="1">
+            <a:schemeClr val="accent1"/>
+          </a:effectRef>
+          <a:fontRef idx="minor">
+            <a:schemeClr val="tx1"/>
+          </a:fontRef>
+        </p:style>
+      </p:cxnSp>
+      <p:cxnSp>
+        <p:nvCxnSpPr>
+          <p:cNvPr id="36" name="Connector 35"/>
           <p:cNvCxnSpPr/>
           <p:nvPr/>
         </p:nvCxnSpPr>
         <p:spPr>
           <a:xfrm flipV="1">
-            <a:off x="5209673.684210526" y="1416718.4210526317"/>
-            <a:ext cx="60157.89473684225" cy="60157.89473684225"/>
-          </a:xfrm>
-          <a:prstGeom prst="line">
-            <a:avLst/>
-          </a:prstGeom>
-          <a:ln w="25400">
-            <a:solidFill>
-              <a:srgbClr val="00C8FF"/>
-            </a:solidFill>
-          </a:ln>
-        </p:spPr>
-        <p:style>
-          <a:lnRef idx="2">
-            <a:schemeClr val="accent1"/>
-          </a:lnRef>
-          <a:fillRef idx="0">
-            <a:schemeClr val="accent1"/>
-          </a:fillRef>
-          <a:effectRef idx="1">
-            <a:schemeClr val="accent1"/>
-          </a:effectRef>
-          <a:fontRef idx="minor">
-            <a:schemeClr val="tx1"/>
-          </a:fontRef>
-        </p:style>
-      </p:cxnSp>
-      <p:cxnSp>
-        <p:nvCxnSpPr>
-          <p:cNvPr id="27" name="Connector 26"/>
+            <a:off x="5102352.0" y="1561338.0"/>
+            <a:ext cx="22860.0" cy="22860.0"/>
+          </a:xfrm>
+          <a:prstGeom prst="line">
+            <a:avLst/>
+          </a:prstGeom>
+          <a:ln w="25400">
+            <a:solidFill>
+              <a:srgbClr val="00C8FF"/>
+            </a:solidFill>
+          </a:ln>
+        </p:spPr>
+        <p:style>
+          <a:lnRef idx="2">
+            <a:schemeClr val="accent1"/>
+          </a:lnRef>
+          <a:fillRef idx="0">
+            <a:schemeClr val="accent1"/>
+          </a:fillRef>
+          <a:effectRef idx="1">
+            <a:schemeClr val="accent1"/>
+          </a:effectRef>
+          <a:fontRef idx="minor">
+            <a:schemeClr val="tx1"/>
+          </a:fontRef>
+        </p:style>
+      </p:cxnSp>
+      <p:cxnSp>
+        <p:nvCxnSpPr>
+          <p:cNvPr id="37" name="Connector 36"/>
           <p:cNvCxnSpPr/>
           <p:nvPr/>
         </p:nvCxnSpPr>
         <p:spPr>
           <a:xfrm flipV="1">
-            <a:off x="5269831.578947368" y="1356560.5263157894"/>
-            <a:ext cx="60157.89473684225" cy="60157.89473684225"/>
-          </a:xfrm>
-          <a:prstGeom prst="line">
-            <a:avLst/>
-          </a:prstGeom>
-          <a:ln w="25400">
-            <a:solidFill>
-              <a:srgbClr val="00C8FF"/>
-            </a:solidFill>
-          </a:ln>
-        </p:spPr>
-        <p:style>
-          <a:lnRef idx="2">
-            <a:schemeClr val="accent1"/>
-          </a:lnRef>
-          <a:fillRef idx="0">
-            <a:schemeClr val="accent1"/>
-          </a:fillRef>
-          <a:effectRef idx="1">
-            <a:schemeClr val="accent1"/>
-          </a:effectRef>
-          <a:fontRef idx="minor">
-            <a:schemeClr val="tx1"/>
-          </a:fontRef>
-        </p:style>
-      </p:cxnSp>
-      <p:cxnSp>
-        <p:nvCxnSpPr>
-          <p:cNvPr id="28" name="Connector 27"/>
+            <a:off x="5125212.0" y="1538478.0"/>
+            <a:ext cx="22860.0" cy="22860.0"/>
+          </a:xfrm>
+          <a:prstGeom prst="line">
+            <a:avLst/>
+          </a:prstGeom>
+          <a:ln w="25400">
+            <a:solidFill>
+              <a:srgbClr val="00C8FF"/>
+            </a:solidFill>
+          </a:ln>
+        </p:spPr>
+        <p:style>
+          <a:lnRef idx="2">
+            <a:schemeClr val="accent1"/>
+          </a:lnRef>
+          <a:fillRef idx="0">
+            <a:schemeClr val="accent1"/>
+          </a:fillRef>
+          <a:effectRef idx="1">
+            <a:schemeClr val="accent1"/>
+          </a:effectRef>
+          <a:fontRef idx="minor">
+            <a:schemeClr val="tx1"/>
+          </a:fontRef>
+        </p:style>
+      </p:cxnSp>
+      <p:cxnSp>
+        <p:nvCxnSpPr>
+          <p:cNvPr id="38" name="Connector 37"/>
           <p:cNvCxnSpPr/>
           <p:nvPr/>
         </p:nvCxnSpPr>
         <p:spPr>
           <a:xfrm flipV="1">
-            <a:off x="5329989.47368421" y="1296402.6315789474"/>
-            <a:ext cx="60157.89473684225" cy="60157.89473684202"/>
-          </a:xfrm>
-          <a:prstGeom prst="line">
-            <a:avLst/>
-          </a:prstGeom>
-          <a:ln w="25400">
-            <a:solidFill>
-              <a:srgbClr val="00C8FF"/>
-            </a:solidFill>
-          </a:ln>
-        </p:spPr>
-        <p:style>
-          <a:lnRef idx="2">
-            <a:schemeClr val="accent1"/>
-          </a:lnRef>
-          <a:fillRef idx="0">
-            <a:schemeClr val="accent1"/>
-          </a:fillRef>
-          <a:effectRef idx="1">
-            <a:schemeClr val="accent1"/>
-          </a:effectRef>
-          <a:fontRef idx="minor">
-            <a:schemeClr val="tx1"/>
-          </a:fontRef>
-        </p:style>
-      </p:cxnSp>
-      <p:cxnSp>
-        <p:nvCxnSpPr>
-          <p:cNvPr id="29" name="Connector 28"/>
+            <a:off x="5148072.0" y="1515618.0"/>
+            <a:ext cx="22860.0" cy="22860.0"/>
+          </a:xfrm>
+          <a:prstGeom prst="line">
+            <a:avLst/>
+          </a:prstGeom>
+          <a:ln w="25400">
+            <a:solidFill>
+              <a:srgbClr val="00C8FF"/>
+            </a:solidFill>
+          </a:ln>
+        </p:spPr>
+        <p:style>
+          <a:lnRef idx="2">
+            <a:schemeClr val="accent1"/>
+          </a:lnRef>
+          <a:fillRef idx="0">
+            <a:schemeClr val="accent1"/>
+          </a:fillRef>
+          <a:effectRef idx="1">
+            <a:schemeClr val="accent1"/>
+          </a:effectRef>
+          <a:fontRef idx="minor">
+            <a:schemeClr val="tx1"/>
+          </a:fontRef>
+        </p:style>
+      </p:cxnSp>
+      <p:cxnSp>
+        <p:nvCxnSpPr>
+          <p:cNvPr id="39" name="Connector 38"/>
           <p:cNvCxnSpPr/>
           <p:nvPr/>
         </p:nvCxnSpPr>
         <p:spPr>
           <a:xfrm flipV="1">
-            <a:off x="5390147.368421053" y="1236244.7368421052"/>
-            <a:ext cx="60157.89473684225" cy="60157.89473684225"/>
-          </a:xfrm>
-          <a:prstGeom prst="line">
-            <a:avLst/>
-          </a:prstGeom>
-          <a:ln w="25400">
-            <a:solidFill>
-              <a:srgbClr val="00C8FF"/>
-            </a:solidFill>
-          </a:ln>
-        </p:spPr>
-        <p:style>
-          <a:lnRef idx="2">
-            <a:schemeClr val="accent1"/>
-          </a:lnRef>
-          <a:fillRef idx="0">
-            <a:schemeClr val="accent1"/>
-          </a:fillRef>
-          <a:effectRef idx="1">
-            <a:schemeClr val="accent1"/>
-          </a:effectRef>
-          <a:fontRef idx="minor">
-            <a:schemeClr val="tx1"/>
-          </a:fontRef>
-        </p:style>
-      </p:cxnSp>
-      <p:cxnSp>
-        <p:nvCxnSpPr>
-          <p:cNvPr id="30" name="Connector 29"/>
+            <a:off x="5170932.0" y="1492758.0"/>
+            <a:ext cx="22860.0" cy="22860.0"/>
+          </a:xfrm>
+          <a:prstGeom prst="line">
+            <a:avLst/>
+          </a:prstGeom>
+          <a:ln w="25400">
+            <a:solidFill>
+              <a:srgbClr val="00C8FF"/>
+            </a:solidFill>
+          </a:ln>
+        </p:spPr>
+        <p:style>
+          <a:lnRef idx="2">
+            <a:schemeClr val="accent1"/>
+          </a:lnRef>
+          <a:fillRef idx="0">
+            <a:schemeClr val="accent1"/>
+          </a:fillRef>
+          <a:effectRef idx="1">
+            <a:schemeClr val="accent1"/>
+          </a:effectRef>
+          <a:fontRef idx="minor">
+            <a:schemeClr val="tx1"/>
+          </a:fontRef>
+        </p:style>
+      </p:cxnSp>
+      <p:cxnSp>
+        <p:nvCxnSpPr>
+          <p:cNvPr id="40" name="Connector 39"/>
           <p:cNvCxnSpPr/>
           <p:nvPr/>
         </p:nvCxnSpPr>
         <p:spPr>
           <a:xfrm flipV="1">
-            <a:off x="5450305.263157895" y="1176086.8421052631"/>
-            <a:ext cx="60157.89473684225" cy="60157.89473684202"/>
-          </a:xfrm>
-          <a:prstGeom prst="line">
-            <a:avLst/>
-          </a:prstGeom>
-          <a:ln w="25400">
-            <a:solidFill>
-              <a:srgbClr val="00C8FF"/>
-            </a:solidFill>
-          </a:ln>
-        </p:spPr>
-        <p:style>
-          <a:lnRef idx="2">
-            <a:schemeClr val="accent1"/>
-          </a:lnRef>
-          <a:fillRef idx="0">
-            <a:schemeClr val="accent1"/>
-          </a:fillRef>
-          <a:effectRef idx="1">
-            <a:schemeClr val="accent1"/>
-          </a:effectRef>
-          <a:fontRef idx="minor">
-            <a:schemeClr val="tx1"/>
-          </a:fontRef>
-        </p:style>
-      </p:cxnSp>
-      <p:cxnSp>
-        <p:nvCxnSpPr>
-          <p:cNvPr id="31" name="Connector 30"/>
+            <a:off x="5193792.0" y="1469898.0"/>
+            <a:ext cx="22860.0" cy="22860.0"/>
+          </a:xfrm>
+          <a:prstGeom prst="line">
+            <a:avLst/>
+          </a:prstGeom>
+          <a:ln w="25400">
+            <a:solidFill>
+              <a:srgbClr val="00C8FF"/>
+            </a:solidFill>
+          </a:ln>
+        </p:spPr>
+        <p:style>
+          <a:lnRef idx="2">
+            <a:schemeClr val="accent1"/>
+          </a:lnRef>
+          <a:fillRef idx="0">
+            <a:schemeClr val="accent1"/>
+          </a:fillRef>
+          <a:effectRef idx="1">
+            <a:schemeClr val="accent1"/>
+          </a:effectRef>
+          <a:fontRef idx="minor">
+            <a:schemeClr val="tx1"/>
+          </a:fontRef>
+        </p:style>
+      </p:cxnSp>
+      <p:cxnSp>
+        <p:nvCxnSpPr>
+          <p:cNvPr id="41" name="Connector 40"/>
           <p:cNvCxnSpPr/>
           <p:nvPr/>
         </p:nvCxnSpPr>
         <p:spPr>
           <a:xfrm flipV="1">
-            <a:off x="5510463.157894737" y="1115928.9473684211"/>
-            <a:ext cx="60157.89473684225" cy="60157.89473684202"/>
-          </a:xfrm>
-          <a:prstGeom prst="line">
-            <a:avLst/>
-          </a:prstGeom>
-          <a:ln w="25400">
-            <a:solidFill>
-              <a:srgbClr val="00C8FF"/>
-            </a:solidFill>
-          </a:ln>
-        </p:spPr>
-        <p:style>
-          <a:lnRef idx="2">
-            <a:schemeClr val="accent1"/>
-          </a:lnRef>
-          <a:fillRef idx="0">
-            <a:schemeClr val="accent1"/>
-          </a:fillRef>
-          <a:effectRef idx="1">
-            <a:schemeClr val="accent1"/>
-          </a:effectRef>
-          <a:fontRef idx="minor">
-            <a:schemeClr val="tx1"/>
-          </a:fontRef>
-        </p:style>
-      </p:cxnSp>
-      <p:cxnSp>
-        <p:nvCxnSpPr>
-          <p:cNvPr id="32" name="Connector 31"/>
+            <a:off x="5216652.0" y="1447038.0"/>
+            <a:ext cx="22860.0" cy="22860.0"/>
+          </a:xfrm>
+          <a:prstGeom prst="line">
+            <a:avLst/>
+          </a:prstGeom>
+          <a:ln w="25400">
+            <a:solidFill>
+              <a:srgbClr val="00C8FF"/>
+            </a:solidFill>
+          </a:ln>
+        </p:spPr>
+        <p:style>
+          <a:lnRef idx="2">
+            <a:schemeClr val="accent1"/>
+          </a:lnRef>
+          <a:fillRef idx="0">
+            <a:schemeClr val="accent1"/>
+          </a:fillRef>
+          <a:effectRef idx="1">
+            <a:schemeClr val="accent1"/>
+          </a:effectRef>
+          <a:fontRef idx="minor">
+            <a:schemeClr val="tx1"/>
+          </a:fontRef>
+        </p:style>
+      </p:cxnSp>
+      <p:cxnSp>
+        <p:nvCxnSpPr>
+          <p:cNvPr id="42" name="Connector 41"/>
           <p:cNvCxnSpPr/>
           <p:nvPr/>
         </p:nvCxnSpPr>
         <p:spPr>
           <a:xfrm flipV="1">
-            <a:off x="5570621.052631579" y="1055771.0526315789"/>
-            <a:ext cx="60157.89473684132" cy="60157.89473684225"/>
-          </a:xfrm>
-          <a:prstGeom prst="line">
-            <a:avLst/>
-          </a:prstGeom>
-          <a:ln w="25400">
-            <a:solidFill>
-              <a:srgbClr val="00C8FF"/>
-            </a:solidFill>
-          </a:ln>
-        </p:spPr>
-        <p:style>
-          <a:lnRef idx="2">
-            <a:schemeClr val="accent1"/>
-          </a:lnRef>
-          <a:fillRef idx="0">
-            <a:schemeClr val="accent1"/>
-          </a:fillRef>
-          <a:effectRef idx="1">
-            <a:schemeClr val="accent1"/>
-          </a:effectRef>
-          <a:fontRef idx="minor">
-            <a:schemeClr val="tx1"/>
-          </a:fontRef>
-        </p:style>
-      </p:cxnSp>
-      <p:cxnSp>
-        <p:nvCxnSpPr>
-          <p:cNvPr id="33" name="Connector 32"/>
+            <a:off x="5239512.0" y="1424178.0"/>
+            <a:ext cx="22860.0" cy="22860.0"/>
+          </a:xfrm>
+          <a:prstGeom prst="line">
+            <a:avLst/>
+          </a:prstGeom>
+          <a:ln w="25400">
+            <a:solidFill>
+              <a:srgbClr val="00C8FF"/>
+            </a:solidFill>
+          </a:ln>
+        </p:spPr>
+        <p:style>
+          <a:lnRef idx="2">
+            <a:schemeClr val="accent1"/>
+          </a:lnRef>
+          <a:fillRef idx="0">
+            <a:schemeClr val="accent1"/>
+          </a:fillRef>
+          <a:effectRef idx="1">
+            <a:schemeClr val="accent1"/>
+          </a:effectRef>
+          <a:fontRef idx="minor">
+            <a:schemeClr val="tx1"/>
+          </a:fontRef>
+        </p:style>
+      </p:cxnSp>
+      <p:cxnSp>
+        <p:nvCxnSpPr>
+          <p:cNvPr id="43" name="Connector 42"/>
           <p:cNvCxnSpPr/>
           <p:nvPr/>
         </p:nvCxnSpPr>
         <p:spPr>
           <a:xfrm flipV="1">
-            <a:off x="5630778.947368421" y="995613.1578947369"/>
-            <a:ext cx="60157.89473684225" cy="60157.89473684202"/>
-          </a:xfrm>
-          <a:prstGeom prst="line">
-            <a:avLst/>
-          </a:prstGeom>
-          <a:ln w="25400">
-            <a:solidFill>
-              <a:srgbClr val="00C8FF"/>
-            </a:solidFill>
-          </a:ln>
-        </p:spPr>
-        <p:style>
-          <a:lnRef idx="2">
-            <a:schemeClr val="accent1"/>
-          </a:lnRef>
-          <a:fillRef idx="0">
-            <a:schemeClr val="accent1"/>
-          </a:fillRef>
-          <a:effectRef idx="1">
-            <a:schemeClr val="accent1"/>
-          </a:effectRef>
-          <a:fontRef idx="minor">
-            <a:schemeClr val="tx1"/>
-          </a:fontRef>
-        </p:style>
-      </p:cxnSp>
-      <p:cxnSp>
-        <p:nvCxnSpPr>
-          <p:cNvPr id="34" name="Connector 33"/>
+            <a:off x="5262372.0" y="1401318.0"/>
+            <a:ext cx="22860.0" cy="22860.0"/>
+          </a:xfrm>
+          <a:prstGeom prst="line">
+            <a:avLst/>
+          </a:prstGeom>
+          <a:ln w="25400">
+            <a:solidFill>
+              <a:srgbClr val="00C8FF"/>
+            </a:solidFill>
+          </a:ln>
+        </p:spPr>
+        <p:style>
+          <a:lnRef idx="2">
+            <a:schemeClr val="accent1"/>
+          </a:lnRef>
+          <a:fillRef idx="0">
+            <a:schemeClr val="accent1"/>
+          </a:fillRef>
+          <a:effectRef idx="1">
+            <a:schemeClr val="accent1"/>
+          </a:effectRef>
+          <a:fontRef idx="minor">
+            <a:schemeClr val="tx1"/>
+          </a:fontRef>
+        </p:style>
+      </p:cxnSp>
+      <p:cxnSp>
+        <p:nvCxnSpPr>
+          <p:cNvPr id="44" name="Connector 43"/>
           <p:cNvCxnSpPr/>
           <p:nvPr/>
         </p:nvCxnSpPr>
         <p:spPr>
           <a:xfrm flipV="1">
-            <a:off x="5690936.842105263" y="935455.2631578948"/>
-            <a:ext cx="60157.89473684225" cy="60157.89473684202"/>
-          </a:xfrm>
-          <a:prstGeom prst="line">
-            <a:avLst/>
-          </a:prstGeom>
-          <a:ln w="25400">
-            <a:solidFill>
-              <a:srgbClr val="00C8FF"/>
-            </a:solidFill>
-          </a:ln>
-        </p:spPr>
-        <p:style>
-          <a:lnRef idx="2">
-            <a:schemeClr val="accent1"/>
-          </a:lnRef>
-          <a:fillRef idx="0">
-            <a:schemeClr val="accent1"/>
-          </a:fillRef>
-          <a:effectRef idx="1">
-            <a:schemeClr val="accent1"/>
-          </a:effectRef>
-          <a:fontRef idx="minor">
-            <a:schemeClr val="tx1"/>
-          </a:fontRef>
-        </p:style>
-      </p:cxnSp>
-      <p:cxnSp>
-        <p:nvCxnSpPr>
-          <p:cNvPr id="35" name="Connector 34"/>
+            <a:off x="5285232.0" y="1378458.0"/>
+            <a:ext cx="22860.0" cy="22860.0"/>
+          </a:xfrm>
+          <a:prstGeom prst="line">
+            <a:avLst/>
+          </a:prstGeom>
+          <a:ln w="25400">
+            <a:solidFill>
+              <a:srgbClr val="00C8FF"/>
+            </a:solidFill>
+          </a:ln>
+        </p:spPr>
+        <p:style>
+          <a:lnRef idx="2">
+            <a:schemeClr val="accent1"/>
+          </a:lnRef>
+          <a:fillRef idx="0">
+            <a:schemeClr val="accent1"/>
+          </a:fillRef>
+          <a:effectRef idx="1">
+            <a:schemeClr val="accent1"/>
+          </a:effectRef>
+          <a:fontRef idx="minor">
+            <a:schemeClr val="tx1"/>
+          </a:fontRef>
+        </p:style>
+      </p:cxnSp>
+      <p:cxnSp>
+        <p:nvCxnSpPr>
+          <p:cNvPr id="45" name="Connector 44"/>
           <p:cNvCxnSpPr/>
           <p:nvPr/>
         </p:nvCxnSpPr>
         <p:spPr>
           <a:xfrm flipV="1">
-            <a:off x="5751094.736842105" y="875297.3684210528"/>
-            <a:ext cx="60157.89473684225" cy="60157.89473684202"/>
-          </a:xfrm>
-          <a:prstGeom prst="line">
-            <a:avLst/>
-          </a:prstGeom>
-          <a:ln w="25400">
-            <a:solidFill>
-              <a:srgbClr val="00C8FF"/>
-            </a:solidFill>
-          </a:ln>
-        </p:spPr>
-        <p:style>
-          <a:lnRef idx="2">
-            <a:schemeClr val="accent1"/>
-          </a:lnRef>
-          <a:fillRef idx="0">
-            <a:schemeClr val="accent1"/>
-          </a:fillRef>
-          <a:effectRef idx="1">
-            <a:schemeClr val="accent1"/>
-          </a:effectRef>
-          <a:fontRef idx="minor">
-            <a:schemeClr val="tx1"/>
-          </a:fontRef>
-        </p:style>
-      </p:cxnSp>
-      <p:cxnSp>
-        <p:nvCxnSpPr>
-          <p:cNvPr id="36" name="Connector 35"/>
+            <a:off x="5308092.0" y="1355598.0"/>
+            <a:ext cx="22860.0" cy="22860.0"/>
+          </a:xfrm>
+          <a:prstGeom prst="line">
+            <a:avLst/>
+          </a:prstGeom>
+          <a:ln w="25400">
+            <a:solidFill>
+              <a:srgbClr val="00C8FF"/>
+            </a:solidFill>
+          </a:ln>
+        </p:spPr>
+        <p:style>
+          <a:lnRef idx="2">
+            <a:schemeClr val="accent1"/>
+          </a:lnRef>
+          <a:fillRef idx="0">
+            <a:schemeClr val="accent1"/>
+          </a:fillRef>
+          <a:effectRef idx="1">
+            <a:schemeClr val="accent1"/>
+          </a:effectRef>
+          <a:fontRef idx="minor">
+            <a:schemeClr val="tx1"/>
+          </a:fontRef>
+        </p:style>
+      </p:cxnSp>
+      <p:cxnSp>
+        <p:nvCxnSpPr>
+          <p:cNvPr id="46" name="Connector 45"/>
           <p:cNvCxnSpPr/>
           <p:nvPr/>
         </p:nvCxnSpPr>
         <p:spPr>
           <a:xfrm flipV="1">
-            <a:off x="5811252.631578947" y="815139.4736842106"/>
-            <a:ext cx="60157.89473684225" cy="60157.89473684225"/>
-          </a:xfrm>
-          <a:prstGeom prst="line">
-            <a:avLst/>
-          </a:prstGeom>
-          <a:ln w="25400">
-            <a:solidFill>
-              <a:srgbClr val="00C8FF"/>
-            </a:solidFill>
-          </a:ln>
-        </p:spPr>
-        <p:style>
-          <a:lnRef idx="2">
-            <a:schemeClr val="accent1"/>
-          </a:lnRef>
-          <a:fillRef idx="0">
-            <a:schemeClr val="accent1"/>
-          </a:fillRef>
-          <a:effectRef idx="1">
-            <a:schemeClr val="accent1"/>
-          </a:effectRef>
-          <a:fontRef idx="minor">
-            <a:schemeClr val="tx1"/>
-          </a:fontRef>
-        </p:style>
-      </p:cxnSp>
-      <p:cxnSp>
-        <p:nvCxnSpPr>
-          <p:cNvPr id="37" name="Connector 36"/>
+            <a:off x="5330952.0" y="1332738.0"/>
+            <a:ext cx="22860.0" cy="22860.0"/>
+          </a:xfrm>
+          <a:prstGeom prst="line">
+            <a:avLst/>
+          </a:prstGeom>
+          <a:ln w="25400">
+            <a:solidFill>
+              <a:srgbClr val="00C8FF"/>
+            </a:solidFill>
+          </a:ln>
+        </p:spPr>
+        <p:style>
+          <a:lnRef idx="2">
+            <a:schemeClr val="accent1"/>
+          </a:lnRef>
+          <a:fillRef idx="0">
+            <a:schemeClr val="accent1"/>
+          </a:fillRef>
+          <a:effectRef idx="1">
+            <a:schemeClr val="accent1"/>
+          </a:effectRef>
+          <a:fontRef idx="minor">
+            <a:schemeClr val="tx1"/>
+          </a:fontRef>
+        </p:style>
+      </p:cxnSp>
+      <p:cxnSp>
+        <p:nvCxnSpPr>
+          <p:cNvPr id="47" name="Connector 46"/>
           <p:cNvCxnSpPr/>
           <p:nvPr/>
         </p:nvCxnSpPr>
         <p:spPr>
           <a:xfrm flipV="1">
-            <a:off x="5871410.52631579" y="754981.5789473685"/>
-            <a:ext cx="60157.89473684132" cy="60157.89473684202"/>
-          </a:xfrm>
-          <a:prstGeom prst="line">
-            <a:avLst/>
-          </a:prstGeom>
-          <a:ln w="25400">
-            <a:solidFill>
-              <a:srgbClr val="00C8FF"/>
-            </a:solidFill>
-          </a:ln>
-        </p:spPr>
-        <p:style>
-          <a:lnRef idx="2">
-            <a:schemeClr val="accent1"/>
-          </a:lnRef>
-          <a:fillRef idx="0">
-            <a:schemeClr val="accent1"/>
-          </a:fillRef>
-          <a:effectRef idx="1">
-            <a:schemeClr val="accent1"/>
-          </a:effectRef>
-          <a:fontRef idx="minor">
-            <a:schemeClr val="tx1"/>
-          </a:fontRef>
-        </p:style>
-      </p:cxnSp>
-      <p:cxnSp>
-        <p:nvCxnSpPr>
-          <p:cNvPr id="38" name="Connector 37"/>
+            <a:off x="5353812.0" y="1309878.0"/>
+            <a:ext cx="22860.0" cy="22860.0"/>
+          </a:xfrm>
+          <a:prstGeom prst="line">
+            <a:avLst/>
+          </a:prstGeom>
+          <a:ln w="25400">
+            <a:solidFill>
+              <a:srgbClr val="00C8FF"/>
+            </a:solidFill>
+          </a:ln>
+        </p:spPr>
+        <p:style>
+          <a:lnRef idx="2">
+            <a:schemeClr val="accent1"/>
+          </a:lnRef>
+          <a:fillRef idx="0">
+            <a:schemeClr val="accent1"/>
+          </a:fillRef>
+          <a:effectRef idx="1">
+            <a:schemeClr val="accent1"/>
+          </a:effectRef>
+          <a:fontRef idx="minor">
+            <a:schemeClr val="tx1"/>
+          </a:fontRef>
+        </p:style>
+      </p:cxnSp>
+      <p:cxnSp>
+        <p:nvCxnSpPr>
+          <p:cNvPr id="48" name="Connector 47"/>
           <p:cNvCxnSpPr/>
           <p:nvPr/>
         </p:nvCxnSpPr>
         <p:spPr>
           <a:xfrm flipV="1">
-            <a:off x="5931568.421052631" y="694823.6842105261"/>
-            <a:ext cx="60157.89473684318" cy="60157.894736842485"/>
-          </a:xfrm>
-          <a:prstGeom prst="line">
-            <a:avLst/>
-          </a:prstGeom>
-          <a:ln w="25400">
-            <a:solidFill>
-              <a:srgbClr val="00C8FF"/>
-            </a:solidFill>
-          </a:ln>
-        </p:spPr>
-        <p:style>
-          <a:lnRef idx="2">
-            <a:schemeClr val="accent1"/>
-          </a:lnRef>
-          <a:fillRef idx="0">
-            <a:schemeClr val="accent1"/>
-          </a:fillRef>
-          <a:effectRef idx="1">
-            <a:schemeClr val="accent1"/>
-          </a:effectRef>
-          <a:fontRef idx="minor">
-            <a:schemeClr val="tx1"/>
-          </a:fontRef>
-        </p:style>
-      </p:cxnSp>
-      <p:cxnSp>
-        <p:nvCxnSpPr>
-          <p:cNvPr id="39" name="Connector 38"/>
+            <a:off x="5376672.0" y="1287018.0"/>
+            <a:ext cx="22860.0" cy="22860.0"/>
+          </a:xfrm>
+          <a:prstGeom prst="line">
+            <a:avLst/>
+          </a:prstGeom>
+          <a:ln w="25400">
+            <a:solidFill>
+              <a:srgbClr val="00C8FF"/>
+            </a:solidFill>
+          </a:ln>
+        </p:spPr>
+        <p:style>
+          <a:lnRef idx="2">
+            <a:schemeClr val="accent1"/>
+          </a:lnRef>
+          <a:fillRef idx="0">
+            <a:schemeClr val="accent1"/>
+          </a:fillRef>
+          <a:effectRef idx="1">
+            <a:schemeClr val="accent1"/>
+          </a:effectRef>
+          <a:fontRef idx="minor">
+            <a:schemeClr val="tx1"/>
+          </a:fontRef>
+        </p:style>
+      </p:cxnSp>
+      <p:cxnSp>
+        <p:nvCxnSpPr>
+          <p:cNvPr id="49" name="Connector 48"/>
           <p:cNvCxnSpPr/>
           <p:nvPr/>
         </p:nvCxnSpPr>
         <p:spPr>
           <a:xfrm flipV="1">
-            <a:off x="5991726.315789474" y="634665.7894736843"/>
-            <a:ext cx="60157.89473684132" cy="60157.89473684179"/>
-          </a:xfrm>
-          <a:prstGeom prst="line">
-            <a:avLst/>
-          </a:prstGeom>
-          <a:ln w="25400">
-            <a:solidFill>
-              <a:srgbClr val="00C8FF"/>
-            </a:solidFill>
-          </a:ln>
-        </p:spPr>
-        <p:style>
-          <a:lnRef idx="2">
-            <a:schemeClr val="accent1"/>
-          </a:lnRef>
-          <a:fillRef idx="0">
-            <a:schemeClr val="accent1"/>
-          </a:fillRef>
-          <a:effectRef idx="1">
-            <a:schemeClr val="accent1"/>
-          </a:effectRef>
-          <a:fontRef idx="minor">
-            <a:schemeClr val="tx1"/>
-          </a:fontRef>
-        </p:style>
-      </p:cxnSp>
-      <p:cxnSp>
-        <p:nvCxnSpPr>
-          <p:cNvPr id="40" name="Connector 39"/>
+            <a:off x="5399532.0" y="1264158.0"/>
+            <a:ext cx="22860.0" cy="22860.0"/>
+          </a:xfrm>
+          <a:prstGeom prst="line">
+            <a:avLst/>
+          </a:prstGeom>
+          <a:ln w="25400">
+            <a:solidFill>
+              <a:srgbClr val="00C8FF"/>
+            </a:solidFill>
+          </a:ln>
+        </p:spPr>
+        <p:style>
+          <a:lnRef idx="2">
+            <a:schemeClr val="accent1"/>
+          </a:lnRef>
+          <a:fillRef idx="0">
+            <a:schemeClr val="accent1"/>
+          </a:fillRef>
+          <a:effectRef idx="1">
+            <a:schemeClr val="accent1"/>
+          </a:effectRef>
+          <a:fontRef idx="minor">
+            <a:schemeClr val="tx1"/>
+          </a:fontRef>
+        </p:style>
+      </p:cxnSp>
+      <p:cxnSp>
+        <p:nvCxnSpPr>
+          <p:cNvPr id="50" name="Connector 49"/>
           <p:cNvCxnSpPr/>
           <p:nvPr/>
         </p:nvCxnSpPr>
         <p:spPr>
           <a:xfrm flipV="1">
-            <a:off x="6051884.2105263155" y="574507.8947368423"/>
-            <a:ext cx="60157.89473684225" cy="60157.89473684202"/>
-          </a:xfrm>
-          <a:prstGeom prst="line">
-            <a:avLst/>
-          </a:prstGeom>
-          <a:ln w="25400">
-            <a:solidFill>
-              <a:srgbClr val="00C8FF"/>
-            </a:solidFill>
-          </a:ln>
-        </p:spPr>
-        <p:style>
-          <a:lnRef idx="2">
-            <a:schemeClr val="accent1"/>
-          </a:lnRef>
-          <a:fillRef idx="0">
-            <a:schemeClr val="accent1"/>
-          </a:fillRef>
-          <a:effectRef idx="1">
-            <a:schemeClr val="accent1"/>
-          </a:effectRef>
-          <a:fontRef idx="minor">
-            <a:schemeClr val="tx1"/>
-          </a:fontRef>
-        </p:style>
-      </p:cxnSp>
-      <p:cxnSp>
-        <p:nvCxnSpPr>
-          <p:cNvPr id="41" name="Connector 40"/>
+            <a:off x="5422392.0" y="1241298.0"/>
+            <a:ext cx="22860.0" cy="22860.0"/>
+          </a:xfrm>
+          <a:prstGeom prst="line">
+            <a:avLst/>
+          </a:prstGeom>
+          <a:ln w="25400">
+            <a:solidFill>
+              <a:srgbClr val="00C8FF"/>
+            </a:solidFill>
+          </a:ln>
+        </p:spPr>
+        <p:style>
+          <a:lnRef idx="2">
+            <a:schemeClr val="accent1"/>
+          </a:lnRef>
+          <a:fillRef idx="0">
+            <a:schemeClr val="accent1"/>
+          </a:fillRef>
+          <a:effectRef idx="1">
+            <a:schemeClr val="accent1"/>
+          </a:effectRef>
+          <a:fontRef idx="minor">
+            <a:schemeClr val="tx1"/>
+          </a:fontRef>
+        </p:style>
+      </p:cxnSp>
+      <p:cxnSp>
+        <p:nvCxnSpPr>
+          <p:cNvPr id="51" name="Connector 50"/>
           <p:cNvCxnSpPr/>
           <p:nvPr/>
         </p:nvCxnSpPr>
         <p:spPr>
           <a:xfrm flipV="1">
-            <a:off x="6112042.105263158" y="514350.0"/>
-            <a:ext cx="60157.89473684225" cy="60157.89473684225"/>
-          </a:xfrm>
-          <a:prstGeom prst="line">
-            <a:avLst/>
-          </a:prstGeom>
-          <a:ln w="25400">
-            <a:solidFill>
-              <a:srgbClr val="00C8FF"/>
-            </a:solidFill>
-          </a:ln>
-        </p:spPr>
-        <p:style>
-          <a:lnRef idx="2">
-            <a:schemeClr val="accent1"/>
-          </a:lnRef>
-          <a:fillRef idx="0">
-            <a:schemeClr val="accent1"/>
-          </a:fillRef>
-          <a:effectRef idx="1">
-            <a:schemeClr val="accent1"/>
-          </a:effectRef>
-          <a:fontRef idx="minor">
-            <a:schemeClr val="tx1"/>
-          </a:fontRef>
-        </p:style>
-      </p:cxnSp>
-      <p:sp>
-        <p:nvSpPr>
-          <p:cNvPr id="42" name="Oval 41"/>
+            <a:off x="5445252.0" y="1218438.0"/>
+            <a:ext cx="22860.0" cy="22860.0"/>
+          </a:xfrm>
+          <a:prstGeom prst="line">
+            <a:avLst/>
+          </a:prstGeom>
+          <a:ln w="25400">
+            <a:solidFill>
+              <a:srgbClr val="00C8FF"/>
+            </a:solidFill>
+          </a:ln>
+        </p:spPr>
+        <p:style>
+          <a:lnRef idx="2">
+            <a:schemeClr val="accent1"/>
+          </a:lnRef>
+          <a:fillRef idx="0">
+            <a:schemeClr val="accent1"/>
+          </a:fillRef>
+          <a:effectRef idx="1">
+            <a:schemeClr val="accent1"/>
+          </a:effectRef>
+          <a:fontRef idx="minor">
+            <a:schemeClr val="tx1"/>
+          </a:fontRef>
+        </p:style>
+      </p:cxnSp>
+      <p:cxnSp>
+        <p:nvCxnSpPr>
+          <p:cNvPr id="52" name="Connector 51"/>
+          <p:cNvCxnSpPr/>
+          <p:nvPr/>
+        </p:nvCxnSpPr>
+        <p:spPr>
+          <a:xfrm flipV="1">
+            <a:off x="5468112.0" y="1195578.0"/>
+            <a:ext cx="22860.0" cy="22860.0"/>
+          </a:xfrm>
+          <a:prstGeom prst="line">
+            <a:avLst/>
+          </a:prstGeom>
+          <a:ln w="25400">
+            <a:solidFill>
+              <a:srgbClr val="00C8FF"/>
+            </a:solidFill>
+          </a:ln>
+        </p:spPr>
+        <p:style>
+          <a:lnRef idx="2">
+            <a:schemeClr val="accent1"/>
+          </a:lnRef>
+          <a:fillRef idx="0">
+            <a:schemeClr val="accent1"/>
+          </a:fillRef>
+          <a:effectRef idx="1">
+            <a:schemeClr val="accent1"/>
+          </a:effectRef>
+          <a:fontRef idx="minor">
+            <a:schemeClr val="tx1"/>
+          </a:fontRef>
+        </p:style>
+      </p:cxnSp>
+      <p:cxnSp>
+        <p:nvCxnSpPr>
+          <p:cNvPr id="53" name="Connector 52"/>
+          <p:cNvCxnSpPr/>
+          <p:nvPr/>
+        </p:nvCxnSpPr>
+        <p:spPr>
+          <a:xfrm flipV="1">
+            <a:off x="5490972.0" y="1172718.0"/>
+            <a:ext cx="22860.0" cy="22860.0"/>
+          </a:xfrm>
+          <a:prstGeom prst="line">
+            <a:avLst/>
+          </a:prstGeom>
+          <a:ln w="25400">
+            <a:solidFill>
+              <a:srgbClr val="00C8FF"/>
+            </a:solidFill>
+          </a:ln>
+        </p:spPr>
+        <p:style>
+          <a:lnRef idx="2">
+            <a:schemeClr val="accent1"/>
+          </a:lnRef>
+          <a:fillRef idx="0">
+            <a:schemeClr val="accent1"/>
+          </a:fillRef>
+          <a:effectRef idx="1">
+            <a:schemeClr val="accent1"/>
+          </a:effectRef>
+          <a:fontRef idx="minor">
+            <a:schemeClr val="tx1"/>
+          </a:fontRef>
+        </p:style>
+      </p:cxnSp>
+      <p:cxnSp>
+        <p:nvCxnSpPr>
+          <p:cNvPr id="54" name="Connector 53"/>
+          <p:cNvCxnSpPr/>
+          <p:nvPr/>
+        </p:nvCxnSpPr>
+        <p:spPr>
+          <a:xfrm flipV="1">
+            <a:off x="5513832.0" y="1149858.0"/>
+            <a:ext cx="22860.0" cy="22860.0"/>
+          </a:xfrm>
+          <a:prstGeom prst="line">
+            <a:avLst/>
+          </a:prstGeom>
+          <a:ln w="25400">
+            <a:solidFill>
+              <a:srgbClr val="00C8FF"/>
+            </a:solidFill>
+          </a:ln>
+        </p:spPr>
+        <p:style>
+          <a:lnRef idx="2">
+            <a:schemeClr val="accent1"/>
+          </a:lnRef>
+          <a:fillRef idx="0">
+            <a:schemeClr val="accent1"/>
+          </a:fillRef>
+          <a:effectRef idx="1">
+            <a:schemeClr val="accent1"/>
+          </a:effectRef>
+          <a:fontRef idx="minor">
+            <a:schemeClr val="tx1"/>
+          </a:fontRef>
+        </p:style>
+      </p:cxnSp>
+      <p:cxnSp>
+        <p:nvCxnSpPr>
+          <p:cNvPr id="55" name="Connector 54"/>
+          <p:cNvCxnSpPr/>
+          <p:nvPr/>
+        </p:nvCxnSpPr>
+        <p:spPr>
+          <a:xfrm flipV="1">
+            <a:off x="5536692.0" y="1126998.0"/>
+            <a:ext cx="22860.0" cy="22860.0"/>
+          </a:xfrm>
+          <a:prstGeom prst="line">
+            <a:avLst/>
+          </a:prstGeom>
+          <a:ln w="25400">
+            <a:solidFill>
+              <a:srgbClr val="00C8FF"/>
+            </a:solidFill>
+          </a:ln>
+        </p:spPr>
+        <p:style>
+          <a:lnRef idx="2">
+            <a:schemeClr val="accent1"/>
+          </a:lnRef>
+          <a:fillRef idx="0">
+            <a:schemeClr val="accent1"/>
+          </a:fillRef>
+          <a:effectRef idx="1">
+            <a:schemeClr val="accent1"/>
+          </a:effectRef>
+          <a:fontRef idx="minor">
+            <a:schemeClr val="tx1"/>
+          </a:fontRef>
+        </p:style>
+      </p:cxnSp>
+      <p:cxnSp>
+        <p:nvCxnSpPr>
+          <p:cNvPr id="56" name="Connector 55"/>
+          <p:cNvCxnSpPr/>
+          <p:nvPr/>
+        </p:nvCxnSpPr>
+        <p:spPr>
+          <a:xfrm flipV="1">
+            <a:off x="5559552.0" y="1104138.0"/>
+            <a:ext cx="22860.0" cy="22860.0"/>
+          </a:xfrm>
+          <a:prstGeom prst="line">
+            <a:avLst/>
+          </a:prstGeom>
+          <a:ln w="25400">
+            <a:solidFill>
+              <a:srgbClr val="00C8FF"/>
+            </a:solidFill>
+          </a:ln>
+        </p:spPr>
+        <p:style>
+          <a:lnRef idx="2">
+            <a:schemeClr val="accent1"/>
+          </a:lnRef>
+          <a:fillRef idx="0">
+            <a:schemeClr val="accent1"/>
+          </a:fillRef>
+          <a:effectRef idx="1">
+            <a:schemeClr val="accent1"/>
+          </a:effectRef>
+          <a:fontRef idx="minor">
+            <a:schemeClr val="tx1"/>
+          </a:fontRef>
+        </p:style>
+      </p:cxnSp>
+      <p:cxnSp>
+        <p:nvCxnSpPr>
+          <p:cNvPr id="57" name="Connector 56"/>
+          <p:cNvCxnSpPr/>
+          <p:nvPr/>
+        </p:nvCxnSpPr>
+        <p:spPr>
+          <a:xfrm flipV="1">
+            <a:off x="5582412.0" y="1081278.0"/>
+            <a:ext cx="22860.0" cy="22860.0"/>
+          </a:xfrm>
+          <a:prstGeom prst="line">
+            <a:avLst/>
+          </a:prstGeom>
+          <a:ln w="25400">
+            <a:solidFill>
+              <a:srgbClr val="00C8FF"/>
+            </a:solidFill>
+          </a:ln>
+        </p:spPr>
+        <p:style>
+          <a:lnRef idx="2">
+            <a:schemeClr val="accent1"/>
+          </a:lnRef>
+          <a:fillRef idx="0">
+            <a:schemeClr val="accent1"/>
+          </a:fillRef>
+          <a:effectRef idx="1">
+            <a:schemeClr val="accent1"/>
+          </a:effectRef>
+          <a:fontRef idx="minor">
+            <a:schemeClr val="tx1"/>
+          </a:fontRef>
+        </p:style>
+      </p:cxnSp>
+      <p:cxnSp>
+        <p:nvCxnSpPr>
+          <p:cNvPr id="58" name="Connector 57"/>
+          <p:cNvCxnSpPr/>
+          <p:nvPr/>
+        </p:nvCxnSpPr>
+        <p:spPr>
+          <a:xfrm flipV="1">
+            <a:off x="5605272.0" y="1058418.0"/>
+            <a:ext cx="22860.0" cy="22860.0"/>
+          </a:xfrm>
+          <a:prstGeom prst="line">
+            <a:avLst/>
+          </a:prstGeom>
+          <a:ln w="25400">
+            <a:solidFill>
+              <a:srgbClr val="00C8FF"/>
+            </a:solidFill>
+          </a:ln>
+        </p:spPr>
+        <p:style>
+          <a:lnRef idx="2">
+            <a:schemeClr val="accent1"/>
+          </a:lnRef>
+          <a:fillRef idx="0">
+            <a:schemeClr val="accent1"/>
+          </a:fillRef>
+          <a:effectRef idx="1">
+            <a:schemeClr val="accent1"/>
+          </a:effectRef>
+          <a:fontRef idx="minor">
+            <a:schemeClr val="tx1"/>
+          </a:fontRef>
+        </p:style>
+      </p:cxnSp>
+      <p:cxnSp>
+        <p:nvCxnSpPr>
+          <p:cNvPr id="59" name="Connector 58"/>
+          <p:cNvCxnSpPr/>
+          <p:nvPr/>
+        </p:nvCxnSpPr>
+        <p:spPr>
+          <a:xfrm flipV="1">
+            <a:off x="5628132.0" y="1035558.0"/>
+            <a:ext cx="22860.0" cy="22860.0"/>
+          </a:xfrm>
+          <a:prstGeom prst="line">
+            <a:avLst/>
+          </a:prstGeom>
+          <a:ln w="25400">
+            <a:solidFill>
+              <a:srgbClr val="00C8FF"/>
+            </a:solidFill>
+          </a:ln>
+        </p:spPr>
+        <p:style>
+          <a:lnRef idx="2">
+            <a:schemeClr val="accent1"/>
+          </a:lnRef>
+          <a:fillRef idx="0">
+            <a:schemeClr val="accent1"/>
+          </a:fillRef>
+          <a:effectRef idx="1">
+            <a:schemeClr val="accent1"/>
+          </a:effectRef>
+          <a:fontRef idx="minor">
+            <a:schemeClr val="tx1"/>
+          </a:fontRef>
+        </p:style>
+      </p:cxnSp>
+      <p:cxnSp>
+        <p:nvCxnSpPr>
+          <p:cNvPr id="60" name="Connector 59"/>
+          <p:cNvCxnSpPr/>
+          <p:nvPr/>
+        </p:nvCxnSpPr>
+        <p:spPr>
+          <a:xfrm flipV="1">
+            <a:off x="5650992.0" y="1012698.0"/>
+            <a:ext cx="22860.0" cy="22860.0"/>
+          </a:xfrm>
+          <a:prstGeom prst="line">
+            <a:avLst/>
+          </a:prstGeom>
+          <a:ln w="25400">
+            <a:solidFill>
+              <a:srgbClr val="00C8FF"/>
+            </a:solidFill>
+          </a:ln>
+        </p:spPr>
+        <p:style>
+          <a:lnRef idx="2">
+            <a:schemeClr val="accent1"/>
+          </a:lnRef>
+          <a:fillRef idx="0">
+            <a:schemeClr val="accent1"/>
+          </a:fillRef>
+          <a:effectRef idx="1">
+            <a:schemeClr val="accent1"/>
+          </a:effectRef>
+          <a:fontRef idx="minor">
+            <a:schemeClr val="tx1"/>
+          </a:fontRef>
+        </p:style>
+      </p:cxnSp>
+      <p:cxnSp>
+        <p:nvCxnSpPr>
+          <p:cNvPr id="61" name="Connector 60"/>
+          <p:cNvCxnSpPr/>
+          <p:nvPr/>
+        </p:nvCxnSpPr>
+        <p:spPr>
+          <a:xfrm flipV="1">
+            <a:off x="5673852.0" y="971550.0"/>
+            <a:ext cx="41148.0" cy="41148.0"/>
+          </a:xfrm>
+          <a:prstGeom prst="line">
+            <a:avLst/>
+          </a:prstGeom>
+          <a:ln w="25400">
+            <a:solidFill>
+              <a:srgbClr val="00C8FF"/>
+            </a:solidFill>
+          </a:ln>
+        </p:spPr>
+        <p:style>
+          <a:lnRef idx="2">
+            <a:schemeClr val="accent1"/>
+          </a:lnRef>
+          <a:fillRef idx="0">
+            <a:schemeClr val="accent1"/>
+          </a:fillRef>
+          <a:effectRef idx="1">
+            <a:schemeClr val="accent1"/>
+          </a:effectRef>
+          <a:fontRef idx="minor">
+            <a:schemeClr val="tx1"/>
+          </a:fontRef>
+        </p:style>
+      </p:cxnSp>
+      <p:sp>
+        <p:nvSpPr>
+          <p:cNvPr id="62" name="Oval 61"/>
           <p:cNvSpPr/>
           <p:nvPr/>
         </p:nvSpPr>
@@ -4541,7 +5241,7 @@
       </p:sp>
       <p:sp>
         <p:nvSpPr>
-          <p:cNvPr id="43" name="Oval 42"/>
+          <p:cNvPr id="63" name="Oval 62"/>
           <p:cNvSpPr/>
           <p:nvPr/>
         </p:nvSpPr>
@@ -4586,13 +5286,13 @@
       </p:sp>
       <p:sp>
         <p:nvSpPr>
-          <p:cNvPr id="44" name="TextBox 43"/>
+          <p:cNvPr id="64" name="TextBox 63"/>
           <p:cNvSpPr txBox="1"/>
           <p:nvPr/>
         </p:nvSpPr>
         <p:spPr>
           <a:xfrm>
-            <a:off x="5806440" y="925830"/>
+            <a:off x="5349240" y="1108710"/>
             <a:ext cx="635000" cy="254000"/>
           </a:xfrm>
           <a:prstGeom prst="rect">

--- a/output/2.pptx
+++ b/output/2.pptx
@@ -4155,7 +4155,7 @@
         <p:spPr>
           <a:xfrm>
             <a:off x="4983480.0" y="2068830.0"/>
-            <a:ext cx="41148.0" cy="41148.0"/>
+            <a:ext cx="22860.0" cy="22860.0"/>
           </a:xfrm>
           <a:prstGeom prst="line">
             <a:avLst/>
@@ -4189,7 +4189,7 @@
         </p:nvCxnSpPr>
         <p:spPr>
           <a:xfrm flipV="1">
-            <a:off x="5033772.0" y="1629918.0"/>
+            <a:off x="5029200.0" y="1634490.0"/>
             <a:ext cx="22860.0" cy="22860.0"/>
           </a:xfrm>
           <a:prstGeom prst="line">
@@ -4224,7 +4224,7 @@
         </p:nvCxnSpPr>
         <p:spPr>
           <a:xfrm flipV="1">
-            <a:off x="5056632.0" y="1607058.0"/>
+            <a:off x="5052060.0" y="1611630.0"/>
             <a:ext cx="22860.0" cy="22860.0"/>
           </a:xfrm>
           <a:prstGeom prst="line">
@@ -4259,7 +4259,7 @@
         </p:nvCxnSpPr>
         <p:spPr>
           <a:xfrm flipV="1">
-            <a:off x="5079492.0" y="1584198.0"/>
+            <a:off x="5074920.0" y="1588770.0"/>
             <a:ext cx="22860.0" cy="22860.0"/>
           </a:xfrm>
           <a:prstGeom prst="line">
@@ -4294,7 +4294,7 @@
         </p:nvCxnSpPr>
         <p:spPr>
           <a:xfrm flipV="1">
-            <a:off x="5102352.0" y="1561338.0"/>
+            <a:off x="5097780.0" y="1565910.0"/>
             <a:ext cx="22860.0" cy="22860.0"/>
           </a:xfrm>
           <a:prstGeom prst="line">
@@ -4329,7 +4329,7 @@
         </p:nvCxnSpPr>
         <p:spPr>
           <a:xfrm flipV="1">
-            <a:off x="5125212.0" y="1538478.0"/>
+            <a:off x="5120640.0" y="1543050.0"/>
             <a:ext cx="22860.0" cy="22860.0"/>
           </a:xfrm>
           <a:prstGeom prst="line">
@@ -4364,7 +4364,7 @@
         </p:nvCxnSpPr>
         <p:spPr>
           <a:xfrm flipV="1">
-            <a:off x="5148072.0" y="1515618.0"/>
+            <a:off x="5143500.0" y="1520190.0"/>
             <a:ext cx="22860.0" cy="22860.0"/>
           </a:xfrm>
           <a:prstGeom prst="line">
@@ -4399,7 +4399,7 @@
         </p:nvCxnSpPr>
         <p:spPr>
           <a:xfrm flipV="1">
-            <a:off x="5170932.0" y="1492758.0"/>
+            <a:off x="5166360.0" y="1497330.0"/>
             <a:ext cx="22860.0" cy="22860.0"/>
           </a:xfrm>
           <a:prstGeom prst="line">
@@ -4434,7 +4434,7 @@
         </p:nvCxnSpPr>
         <p:spPr>
           <a:xfrm flipV="1">
-            <a:off x="5193792.0" y="1469898.0"/>
+            <a:off x="5189220.0" y="1474470.0"/>
             <a:ext cx="22860.0" cy="22860.0"/>
           </a:xfrm>
           <a:prstGeom prst="line">
@@ -4469,7 +4469,7 @@
         </p:nvCxnSpPr>
         <p:spPr>
           <a:xfrm flipV="1">
-            <a:off x="5216652.0" y="1447038.0"/>
+            <a:off x="5212080.0" y="1451610.0"/>
             <a:ext cx="22860.0" cy="22860.0"/>
           </a:xfrm>
           <a:prstGeom prst="line">
@@ -4504,7 +4504,7 @@
         </p:nvCxnSpPr>
         <p:spPr>
           <a:xfrm flipV="1">
-            <a:off x="5239512.0" y="1424178.0"/>
+            <a:off x="5234940.0" y="1428750.0"/>
             <a:ext cx="22860.0" cy="22860.0"/>
           </a:xfrm>
           <a:prstGeom prst="line">
@@ -4539,7 +4539,7 @@
         </p:nvCxnSpPr>
         <p:spPr>
           <a:xfrm flipV="1">
-            <a:off x="5262372.0" y="1401318.0"/>
+            <a:off x="5257800.0" y="1405890.0"/>
             <a:ext cx="22860.0" cy="22860.0"/>
           </a:xfrm>
           <a:prstGeom prst="line">
@@ -4574,7 +4574,7 @@
         </p:nvCxnSpPr>
         <p:spPr>
           <a:xfrm flipV="1">
-            <a:off x="5285232.0" y="1378458.0"/>
+            <a:off x="5280660.0" y="1383030.0"/>
             <a:ext cx="22860.0" cy="22860.0"/>
           </a:xfrm>
           <a:prstGeom prst="line">
@@ -4609,7 +4609,7 @@
         </p:nvCxnSpPr>
         <p:spPr>
           <a:xfrm flipV="1">
-            <a:off x="5308092.0" y="1355598.0"/>
+            <a:off x="5303520.0" y="1360170.0"/>
             <a:ext cx="22860.0" cy="22860.0"/>
           </a:xfrm>
           <a:prstGeom prst="line">
@@ -4644,7 +4644,7 @@
         </p:nvCxnSpPr>
         <p:spPr>
           <a:xfrm flipV="1">
-            <a:off x="5330952.0" y="1332738.0"/>
+            <a:off x="5326380.0" y="1337310.0"/>
             <a:ext cx="22860.0" cy="22860.0"/>
           </a:xfrm>
           <a:prstGeom prst="line">
@@ -4679,7 +4679,7 @@
         </p:nvCxnSpPr>
         <p:spPr>
           <a:xfrm flipV="1">
-            <a:off x="5353812.0" y="1309878.0"/>
+            <a:off x="5349240.0" y="1314450.0"/>
             <a:ext cx="22860.0" cy="22860.0"/>
           </a:xfrm>
           <a:prstGeom prst="line">
@@ -4714,7 +4714,7 @@
         </p:nvCxnSpPr>
         <p:spPr>
           <a:xfrm flipV="1">
-            <a:off x="5376672.0" y="1287018.0"/>
+            <a:off x="5372100.0" y="1291590.0"/>
             <a:ext cx="22860.0" cy="22860.0"/>
           </a:xfrm>
           <a:prstGeom prst="line">
@@ -4749,7 +4749,7 @@
         </p:nvCxnSpPr>
         <p:spPr>
           <a:xfrm flipV="1">
-            <a:off x="5399532.0" y="1264158.0"/>
+            <a:off x="5394960.0" y="1268730.0"/>
             <a:ext cx="22860.0" cy="22860.0"/>
           </a:xfrm>
           <a:prstGeom prst="line">
@@ -4784,7 +4784,7 @@
         </p:nvCxnSpPr>
         <p:spPr>
           <a:xfrm flipV="1">
-            <a:off x="5422392.0" y="1241298.0"/>
+            <a:off x="5417820.0" y="1245870.0"/>
             <a:ext cx="22860.0" cy="22860.0"/>
           </a:xfrm>
           <a:prstGeom prst="line">
@@ -4819,7 +4819,7 @@
         </p:nvCxnSpPr>
         <p:spPr>
           <a:xfrm flipV="1">
-            <a:off x="5445252.0" y="1218438.0"/>
+            <a:off x="5440680.0" y="1223010.0"/>
             <a:ext cx="22860.0" cy="22860.0"/>
           </a:xfrm>
           <a:prstGeom prst="line">
@@ -4854,7 +4854,7 @@
         </p:nvCxnSpPr>
         <p:spPr>
           <a:xfrm flipV="1">
-            <a:off x="5468112.0" y="1195578.0"/>
+            <a:off x="5463540.0" y="1200150.0"/>
             <a:ext cx="22860.0" cy="22860.0"/>
           </a:xfrm>
           <a:prstGeom prst="line">
@@ -4889,7 +4889,7 @@
         </p:nvCxnSpPr>
         <p:spPr>
           <a:xfrm flipV="1">
-            <a:off x="5490972.0" y="1172718.0"/>
+            <a:off x="5486400.0" y="1177290.0"/>
             <a:ext cx="22860.0" cy="22860.0"/>
           </a:xfrm>
           <a:prstGeom prst="line">
@@ -4924,7 +4924,7 @@
         </p:nvCxnSpPr>
         <p:spPr>
           <a:xfrm flipV="1">
-            <a:off x="5513832.0" y="1149858.0"/>
+            <a:off x="5509260.0" y="1154430.0"/>
             <a:ext cx="22860.0" cy="22860.0"/>
           </a:xfrm>
           <a:prstGeom prst="line">
@@ -4959,7 +4959,7 @@
         </p:nvCxnSpPr>
         <p:spPr>
           <a:xfrm flipV="1">
-            <a:off x="5536692.0" y="1126998.0"/>
+            <a:off x="5532120.0" y="1131570.0"/>
             <a:ext cx="22860.0" cy="22860.0"/>
           </a:xfrm>
           <a:prstGeom prst="line">
@@ -4994,7 +4994,7 @@
         </p:nvCxnSpPr>
         <p:spPr>
           <a:xfrm flipV="1">
-            <a:off x="5559552.0" y="1104138.0"/>
+            <a:off x="5554980.0" y="1108710.0"/>
             <a:ext cx="22860.0" cy="22860.0"/>
           </a:xfrm>
           <a:prstGeom prst="line">
@@ -5029,7 +5029,7 @@
         </p:nvCxnSpPr>
         <p:spPr>
           <a:xfrm flipV="1">
-            <a:off x="5582412.0" y="1081278.0"/>
+            <a:off x="5577840.0" y="1085850.0"/>
             <a:ext cx="22860.0" cy="22860.0"/>
           </a:xfrm>
           <a:prstGeom prst="line">
@@ -5064,7 +5064,7 @@
         </p:nvCxnSpPr>
         <p:spPr>
           <a:xfrm flipV="1">
-            <a:off x="5605272.0" y="1058418.0"/>
+            <a:off x="5600700.0" y="1062990.0"/>
             <a:ext cx="22860.0" cy="22860.0"/>
           </a:xfrm>
           <a:prstGeom prst="line">
@@ -5099,7 +5099,7 @@
         </p:nvCxnSpPr>
         <p:spPr>
           <a:xfrm flipV="1">
-            <a:off x="5628132.0" y="1035558.0"/>
+            <a:off x="5623560.0" y="1040130.0"/>
             <a:ext cx="22860.0" cy="22860.0"/>
           </a:xfrm>
           <a:prstGeom prst="line">
@@ -5134,7 +5134,7 @@
         </p:nvCxnSpPr>
         <p:spPr>
           <a:xfrm flipV="1">
-            <a:off x="5650992.0" y="1012698.0"/>
+            <a:off x="5646420.0" y="1017270.0"/>
             <a:ext cx="22860.0" cy="22860.0"/>
           </a:xfrm>
           <a:prstGeom prst="line">
@@ -5169,8 +5169,8 @@
         </p:nvCxnSpPr>
         <p:spPr>
           <a:xfrm flipV="1">
-            <a:off x="5673852.0" y="971550.0"/>
-            <a:ext cx="41148.0" cy="41148.0"/>
+            <a:off x="5669280.0" y="994410.0"/>
+            <a:ext cx="22860.0" cy="22860.0"/>
           </a:xfrm>
           <a:prstGeom prst="line">
             <a:avLst/>
@@ -5292,7 +5292,7 @@
         </p:nvSpPr>
         <p:spPr>
           <a:xfrm>
-            <a:off x="5349240" y="1108710"/>
+            <a:off x="5394960" y="1337310"/>
             <a:ext cx="635000" cy="254000"/>
           </a:xfrm>
           <a:prstGeom prst="rect">
@@ -5315,7 +5315,7 @@
               </a:defRPr>
             </a:pPr>
             <a:r>
-              <a:t>y=f(x)</a:t>
+              <a:t>$y=f(x)$</a:t>
             </a:r>
           </a:p>
         </p:txBody>

--- a/output/2.pptx
+++ b/output/2.pptx
@@ -3104,8 +3104,8 @@
         </p:nvCxnSpPr>
         <p:spPr>
           <a:xfrm>
-            <a:off x="2286000.0" y="2571750.0"/>
-            <a:ext cx="4572000.0" cy="0.0"/>
+            <a:off x="4343400.0" y="2571750.0"/>
+            <a:ext cx="1508760.0" cy="0.0"/>
           </a:xfrm>
           <a:prstGeom prst="line">
             <a:avLst/>
@@ -3139,8 +3139,8 @@
         </p:nvCxnSpPr>
         <p:spPr>
           <a:xfrm flipV="1">
-            <a:off x="4572000.0" y="285750.0"/>
-            <a:ext cx="0.0" cy="4572000.0"/>
+            <a:off x="4572000.0" y="1108710.0"/>
+            <a:ext cx="0.0" cy="1691640.0"/>
           </a:xfrm>
           <a:prstGeom prst="line">
             <a:avLst/>
@@ -3166,41 +3166,1255 @@
           </a:fontRef>
         </p:style>
       </p:cxnSp>
-      <p:cxnSp>
-        <p:nvCxnSpPr>
-          <p:cNvPr id="4" name="Connector 3"/>
-          <p:cNvCxnSpPr/>
+      <p:sp>
+        <p:nvSpPr>
+          <p:cNvPr id="4" name="Freeform 3"/>
+          <p:cNvSpPr/>
           <p:nvPr/>
-        </p:nvCxnSpPr>
+        </p:nvSpPr>
         <p:spPr>
           <a:xfrm>
-            <a:off x="4343400.0" y="1428750.0"/>
-            <a:ext cx="22860.0" cy="22860.0"/>
+            <a:off x="4389120" y="1017270"/>
+            <a:ext cx="1280160" cy="1139793"/>
           </a:xfrm>
-          <a:prstGeom prst="line">
+          <a:custGeom>
             <a:avLst/>
-          </a:prstGeom>
-          <a:ln w="25400">
+            <a:gdLst/>
+            <a:ahLst/>
+            <a:cxnLst/>
+            <a:rect l="l" t="t" r="r" b="b"/>
+            <a:pathLst>
+              <a:path w="1280160" h="1139793">
+                <a:moveTo>
+                  <a:pt x="0" y="457200"/>
+                </a:moveTo>
+                <a:lnTo>
+                  <a:pt x="4281" y="461481"/>
+                </a:lnTo>
+                <a:close/>
+                <a:lnTo>
+                  <a:pt x="8563" y="465763"/>
+                </a:lnTo>
+                <a:close/>
+                <a:lnTo>
+                  <a:pt x="12844" y="470044"/>
+                </a:lnTo>
+                <a:close/>
+                <a:lnTo>
+                  <a:pt x="17126" y="474326"/>
+                </a:lnTo>
+                <a:close/>
+                <a:lnTo>
+                  <a:pt x="21407" y="478607"/>
+                </a:lnTo>
+                <a:close/>
+                <a:lnTo>
+                  <a:pt x="25689" y="482889"/>
+                </a:lnTo>
+                <a:close/>
+                <a:lnTo>
+                  <a:pt x="29970" y="487170"/>
+                </a:lnTo>
+                <a:close/>
+                <a:lnTo>
+                  <a:pt x="34252" y="491452"/>
+                </a:lnTo>
+                <a:close/>
+                <a:lnTo>
+                  <a:pt x="38533" y="495733"/>
+                </a:lnTo>
+                <a:close/>
+                <a:lnTo>
+                  <a:pt x="42815" y="500015"/>
+                </a:lnTo>
+                <a:close/>
+                <a:lnTo>
+                  <a:pt x="47096" y="504296"/>
+                </a:lnTo>
+                <a:close/>
+                <a:lnTo>
+                  <a:pt x="51378" y="508578"/>
+                </a:lnTo>
+                <a:close/>
+                <a:lnTo>
+                  <a:pt x="55659" y="512859"/>
+                </a:lnTo>
+                <a:close/>
+                <a:lnTo>
+                  <a:pt x="59941" y="517141"/>
+                </a:lnTo>
+                <a:close/>
+                <a:lnTo>
+                  <a:pt x="64222" y="521422"/>
+                </a:lnTo>
+                <a:close/>
+                <a:lnTo>
+                  <a:pt x="68504" y="525704"/>
+                </a:lnTo>
+                <a:close/>
+                <a:lnTo>
+                  <a:pt x="72785" y="529985"/>
+                </a:lnTo>
+                <a:close/>
+                <a:lnTo>
+                  <a:pt x="77066" y="534266"/>
+                </a:lnTo>
+                <a:close/>
+                <a:lnTo>
+                  <a:pt x="81348" y="538548"/>
+                </a:lnTo>
+                <a:close/>
+                <a:lnTo>
+                  <a:pt x="85629" y="542829"/>
+                </a:lnTo>
+                <a:close/>
+                <a:lnTo>
+                  <a:pt x="89911" y="547111"/>
+                </a:lnTo>
+                <a:close/>
+                <a:lnTo>
+                  <a:pt x="94192" y="551392"/>
+                </a:lnTo>
+                <a:close/>
+                <a:lnTo>
+                  <a:pt x="98474" y="555674"/>
+                </a:lnTo>
+                <a:close/>
+                <a:lnTo>
+                  <a:pt x="102755" y="559955"/>
+                </a:lnTo>
+                <a:close/>
+                <a:lnTo>
+                  <a:pt x="107037" y="564237"/>
+                </a:lnTo>
+                <a:close/>
+                <a:lnTo>
+                  <a:pt x="111318" y="568518"/>
+                </a:lnTo>
+                <a:close/>
+                <a:lnTo>
+                  <a:pt x="115600" y="572800"/>
+                </a:lnTo>
+                <a:close/>
+                <a:lnTo>
+                  <a:pt x="119881" y="577081"/>
+                </a:lnTo>
+                <a:close/>
+                <a:lnTo>
+                  <a:pt x="124163" y="581363"/>
+                </a:lnTo>
+                <a:close/>
+                <a:lnTo>
+                  <a:pt x="128444" y="585644"/>
+                </a:lnTo>
+                <a:close/>
+                <a:lnTo>
+                  <a:pt x="132726" y="589926"/>
+                </a:lnTo>
+                <a:close/>
+                <a:lnTo>
+                  <a:pt x="137007" y="594207"/>
+                </a:lnTo>
+                <a:close/>
+                <a:lnTo>
+                  <a:pt x="141289" y="598489"/>
+                </a:lnTo>
+                <a:close/>
+                <a:lnTo>
+                  <a:pt x="145570" y="602770"/>
+                </a:lnTo>
+                <a:close/>
+                <a:lnTo>
+                  <a:pt x="149852" y="607052"/>
+                </a:lnTo>
+                <a:close/>
+                <a:lnTo>
+                  <a:pt x="154133" y="611333"/>
+                </a:lnTo>
+                <a:close/>
+                <a:lnTo>
+                  <a:pt x="158414" y="615614"/>
+                </a:lnTo>
+                <a:close/>
+                <a:lnTo>
+                  <a:pt x="162696" y="619896"/>
+                </a:lnTo>
+                <a:close/>
+                <a:lnTo>
+                  <a:pt x="166977" y="624177"/>
+                </a:lnTo>
+                <a:close/>
+                <a:lnTo>
+                  <a:pt x="171259" y="628459"/>
+                </a:lnTo>
+                <a:close/>
+                <a:lnTo>
+                  <a:pt x="175540" y="632740"/>
+                </a:lnTo>
+                <a:close/>
+                <a:lnTo>
+                  <a:pt x="179822" y="637022"/>
+                </a:lnTo>
+                <a:close/>
+                <a:lnTo>
+                  <a:pt x="184103" y="641303"/>
+                </a:lnTo>
+                <a:close/>
+                <a:lnTo>
+                  <a:pt x="188385" y="645585"/>
+                </a:lnTo>
+                <a:close/>
+                <a:lnTo>
+                  <a:pt x="192666" y="649866"/>
+                </a:lnTo>
+                <a:close/>
+                <a:lnTo>
+                  <a:pt x="196948" y="654148"/>
+                </a:lnTo>
+                <a:close/>
+                <a:lnTo>
+                  <a:pt x="201229" y="658429"/>
+                </a:lnTo>
+                <a:close/>
+                <a:lnTo>
+                  <a:pt x="205511" y="662711"/>
+                </a:lnTo>
+                <a:close/>
+                <a:lnTo>
+                  <a:pt x="209792" y="666992"/>
+                </a:lnTo>
+                <a:close/>
+                <a:lnTo>
+                  <a:pt x="214074" y="671274"/>
+                </a:lnTo>
+                <a:close/>
+                <a:lnTo>
+                  <a:pt x="218355" y="675555"/>
+                </a:lnTo>
+                <a:close/>
+                <a:lnTo>
+                  <a:pt x="222637" y="679837"/>
+                </a:lnTo>
+                <a:close/>
+                <a:lnTo>
+                  <a:pt x="226918" y="684118"/>
+                </a:lnTo>
+                <a:close/>
+                <a:lnTo>
+                  <a:pt x="231199" y="688399"/>
+                </a:lnTo>
+                <a:close/>
+                <a:lnTo>
+                  <a:pt x="235481" y="692681"/>
+                </a:lnTo>
+                <a:close/>
+                <a:lnTo>
+                  <a:pt x="239762" y="696962"/>
+                </a:lnTo>
+                <a:close/>
+                <a:lnTo>
+                  <a:pt x="244044" y="701244"/>
+                </a:lnTo>
+                <a:close/>
+                <a:lnTo>
+                  <a:pt x="248325" y="705525"/>
+                </a:lnTo>
+                <a:close/>
+                <a:lnTo>
+                  <a:pt x="252607" y="709807"/>
+                </a:lnTo>
+                <a:close/>
+                <a:lnTo>
+                  <a:pt x="256888" y="714088"/>
+                </a:lnTo>
+                <a:close/>
+                <a:lnTo>
+                  <a:pt x="261170" y="718370"/>
+                </a:lnTo>
+                <a:close/>
+                <a:lnTo>
+                  <a:pt x="265451" y="722651"/>
+                </a:lnTo>
+                <a:close/>
+                <a:lnTo>
+                  <a:pt x="269733" y="726933"/>
+                </a:lnTo>
+                <a:close/>
+                <a:lnTo>
+                  <a:pt x="274014" y="731214"/>
+                </a:lnTo>
+                <a:close/>
+                <a:lnTo>
+                  <a:pt x="278296" y="735496"/>
+                </a:lnTo>
+                <a:close/>
+                <a:lnTo>
+                  <a:pt x="282577" y="739777"/>
+                </a:lnTo>
+                <a:close/>
+                <a:lnTo>
+                  <a:pt x="286859" y="744059"/>
+                </a:lnTo>
+                <a:close/>
+                <a:lnTo>
+                  <a:pt x="291140" y="748340"/>
+                </a:lnTo>
+                <a:close/>
+                <a:lnTo>
+                  <a:pt x="295422" y="752622"/>
+                </a:lnTo>
+                <a:close/>
+                <a:lnTo>
+                  <a:pt x="299703" y="756903"/>
+                </a:lnTo>
+                <a:close/>
+                <a:lnTo>
+                  <a:pt x="303984" y="761184"/>
+                </a:lnTo>
+                <a:close/>
+                <a:lnTo>
+                  <a:pt x="308266" y="765466"/>
+                </a:lnTo>
+                <a:close/>
+                <a:lnTo>
+                  <a:pt x="312547" y="769747"/>
+                </a:lnTo>
+                <a:close/>
+                <a:lnTo>
+                  <a:pt x="316829" y="774029"/>
+                </a:lnTo>
+                <a:close/>
+                <a:lnTo>
+                  <a:pt x="321110" y="778310"/>
+                </a:lnTo>
+                <a:close/>
+                <a:lnTo>
+                  <a:pt x="325392" y="782592"/>
+                </a:lnTo>
+                <a:close/>
+                <a:lnTo>
+                  <a:pt x="329673" y="786873"/>
+                </a:lnTo>
+                <a:close/>
+                <a:lnTo>
+                  <a:pt x="333955" y="791155"/>
+                </a:lnTo>
+                <a:close/>
+                <a:lnTo>
+                  <a:pt x="338236" y="795436"/>
+                </a:lnTo>
+                <a:close/>
+                <a:lnTo>
+                  <a:pt x="342518" y="799718"/>
+                </a:lnTo>
+                <a:close/>
+                <a:lnTo>
+                  <a:pt x="346799" y="803999"/>
+                </a:lnTo>
+                <a:close/>
+                <a:lnTo>
+                  <a:pt x="351081" y="808281"/>
+                </a:lnTo>
+                <a:close/>
+                <a:lnTo>
+                  <a:pt x="355362" y="812562"/>
+                </a:lnTo>
+                <a:close/>
+                <a:lnTo>
+                  <a:pt x="359644" y="816844"/>
+                </a:lnTo>
+                <a:close/>
+                <a:lnTo>
+                  <a:pt x="363925" y="821125"/>
+                </a:lnTo>
+                <a:close/>
+                <a:lnTo>
+                  <a:pt x="368207" y="825407"/>
+                </a:lnTo>
+                <a:close/>
+                <a:lnTo>
+                  <a:pt x="372488" y="829688"/>
+                </a:lnTo>
+                <a:close/>
+                <a:lnTo>
+                  <a:pt x="376769" y="833969"/>
+                </a:lnTo>
+                <a:close/>
+                <a:lnTo>
+                  <a:pt x="381051" y="838251"/>
+                </a:lnTo>
+                <a:close/>
+                <a:lnTo>
+                  <a:pt x="385332" y="842532"/>
+                </a:lnTo>
+                <a:close/>
+                <a:lnTo>
+                  <a:pt x="389614" y="846814"/>
+                </a:lnTo>
+                <a:close/>
+                <a:lnTo>
+                  <a:pt x="393895" y="851095"/>
+                </a:lnTo>
+                <a:close/>
+                <a:lnTo>
+                  <a:pt x="398177" y="855377"/>
+                </a:lnTo>
+                <a:close/>
+                <a:lnTo>
+                  <a:pt x="402458" y="859658"/>
+                </a:lnTo>
+                <a:close/>
+                <a:lnTo>
+                  <a:pt x="406740" y="863940"/>
+                </a:lnTo>
+                <a:close/>
+                <a:lnTo>
+                  <a:pt x="411021" y="868221"/>
+                </a:lnTo>
+                <a:close/>
+                <a:lnTo>
+                  <a:pt x="415303" y="872503"/>
+                </a:lnTo>
+                <a:close/>
+                <a:lnTo>
+                  <a:pt x="419584" y="876784"/>
+                </a:lnTo>
+                <a:close/>
+                <a:lnTo>
+                  <a:pt x="423866" y="881066"/>
+                </a:lnTo>
+                <a:close/>
+                <a:lnTo>
+                  <a:pt x="428147" y="885347"/>
+                </a:lnTo>
+                <a:close/>
+                <a:lnTo>
+                  <a:pt x="432429" y="889629"/>
+                </a:lnTo>
+                <a:close/>
+                <a:lnTo>
+                  <a:pt x="436710" y="893910"/>
+                </a:lnTo>
+                <a:close/>
+                <a:lnTo>
+                  <a:pt x="440992" y="898192"/>
+                </a:lnTo>
+                <a:close/>
+                <a:lnTo>
+                  <a:pt x="445273" y="902473"/>
+                </a:lnTo>
+                <a:close/>
+                <a:lnTo>
+                  <a:pt x="449555" y="906755"/>
+                </a:lnTo>
+                <a:close/>
+                <a:lnTo>
+                  <a:pt x="453836" y="911036"/>
+                </a:lnTo>
+                <a:close/>
+                <a:lnTo>
+                  <a:pt x="458117" y="915317"/>
+                </a:lnTo>
+                <a:close/>
+                <a:lnTo>
+                  <a:pt x="462399" y="919599"/>
+                </a:lnTo>
+                <a:close/>
+                <a:lnTo>
+                  <a:pt x="466680" y="923880"/>
+                </a:lnTo>
+                <a:close/>
+                <a:lnTo>
+                  <a:pt x="470962" y="928162"/>
+                </a:lnTo>
+                <a:close/>
+                <a:lnTo>
+                  <a:pt x="475243" y="932443"/>
+                </a:lnTo>
+                <a:close/>
+                <a:lnTo>
+                  <a:pt x="479525" y="936725"/>
+                </a:lnTo>
+                <a:close/>
+                <a:lnTo>
+                  <a:pt x="483806" y="941006"/>
+                </a:lnTo>
+                <a:close/>
+                <a:lnTo>
+                  <a:pt x="488088" y="945288"/>
+                </a:lnTo>
+                <a:close/>
+                <a:lnTo>
+                  <a:pt x="492369" y="949569"/>
+                </a:lnTo>
+                <a:close/>
+                <a:lnTo>
+                  <a:pt x="496651" y="953851"/>
+                </a:lnTo>
+                <a:close/>
+                <a:lnTo>
+                  <a:pt x="500932" y="958132"/>
+                </a:lnTo>
+                <a:close/>
+                <a:lnTo>
+                  <a:pt x="505214" y="962414"/>
+                </a:lnTo>
+                <a:close/>
+                <a:lnTo>
+                  <a:pt x="509495" y="966695"/>
+                </a:lnTo>
+                <a:close/>
+                <a:lnTo>
+                  <a:pt x="513777" y="970977"/>
+                </a:lnTo>
+                <a:close/>
+                <a:lnTo>
+                  <a:pt x="518058" y="975258"/>
+                </a:lnTo>
+                <a:close/>
+                <a:lnTo>
+                  <a:pt x="522340" y="979540"/>
+                </a:lnTo>
+                <a:close/>
+                <a:lnTo>
+                  <a:pt x="526621" y="983821"/>
+                </a:lnTo>
+                <a:close/>
+                <a:lnTo>
+                  <a:pt x="530902" y="988102"/>
+                </a:lnTo>
+                <a:close/>
+                <a:lnTo>
+                  <a:pt x="535184" y="992384"/>
+                </a:lnTo>
+                <a:close/>
+                <a:lnTo>
+                  <a:pt x="539465" y="996665"/>
+                </a:lnTo>
+                <a:close/>
+                <a:lnTo>
+                  <a:pt x="543747" y="1000947"/>
+                </a:lnTo>
+                <a:close/>
+                <a:lnTo>
+                  <a:pt x="548028" y="1005228"/>
+                </a:lnTo>
+                <a:close/>
+                <a:lnTo>
+                  <a:pt x="552310" y="1009510"/>
+                </a:lnTo>
+                <a:close/>
+                <a:lnTo>
+                  <a:pt x="556591" y="1013791"/>
+                </a:lnTo>
+                <a:close/>
+                <a:lnTo>
+                  <a:pt x="560873" y="1018073"/>
+                </a:lnTo>
+                <a:close/>
+                <a:lnTo>
+                  <a:pt x="565154" y="1022354"/>
+                </a:lnTo>
+                <a:close/>
+                <a:lnTo>
+                  <a:pt x="569436" y="1026636"/>
+                </a:lnTo>
+                <a:close/>
+                <a:lnTo>
+                  <a:pt x="573717" y="1030917"/>
+                </a:lnTo>
+                <a:close/>
+                <a:lnTo>
+                  <a:pt x="577999" y="1035199"/>
+                </a:lnTo>
+                <a:close/>
+                <a:lnTo>
+                  <a:pt x="582280" y="1039480"/>
+                </a:lnTo>
+                <a:close/>
+                <a:lnTo>
+                  <a:pt x="586562" y="1043762"/>
+                </a:lnTo>
+                <a:close/>
+                <a:lnTo>
+                  <a:pt x="590843" y="1048043"/>
+                </a:lnTo>
+                <a:close/>
+                <a:lnTo>
+                  <a:pt x="595125" y="1052325"/>
+                </a:lnTo>
+                <a:close/>
+                <a:lnTo>
+                  <a:pt x="599406" y="1056605"/>
+                </a:lnTo>
+                <a:close/>
+                <a:lnTo>
+                  <a:pt x="603687" y="1060889"/>
+                </a:lnTo>
+                <a:close/>
+                <a:lnTo>
+                  <a:pt x="607969" y="1065171"/>
+                </a:lnTo>
+                <a:close/>
+                <a:lnTo>
+                  <a:pt x="612250" y="1069421"/>
+                </a:lnTo>
+                <a:close/>
+                <a:lnTo>
+                  <a:pt x="616532" y="1073901"/>
+                </a:lnTo>
+                <a:close/>
+                <a:lnTo>
+                  <a:pt x="620813" y="1077226"/>
+                </a:lnTo>
+                <a:close/>
+                <a:lnTo>
+                  <a:pt x="625095" y="1085606"/>
+                </a:lnTo>
+                <a:close/>
+                <a:lnTo>
+                  <a:pt x="629376" y="1073535"/>
+                </a:lnTo>
+                <a:close/>
+                <a:lnTo>
+                  <a:pt x="633658" y="1139793"/>
+                </a:lnTo>
+                <a:close/>
+                <a:lnTo>
+                  <a:pt x="637939" y="850113"/>
+                </a:lnTo>
+                <a:close/>
+                <a:lnTo>
+                  <a:pt x="642221" y="591254"/>
+                </a:lnTo>
+                <a:close/>
+                <a:lnTo>
+                  <a:pt x="646502" y="646618"/>
+                </a:lnTo>
+                <a:close/>
+                <a:lnTo>
+                  <a:pt x="650784" y="625922"/>
+                </a:lnTo>
+                <a:close/>
+                <a:lnTo>
+                  <a:pt x="655065" y="625972"/>
+                </a:lnTo>
+                <a:close/>
+                <a:lnTo>
+                  <a:pt x="659347" y="620605"/>
+                </a:lnTo>
+                <a:close/>
+                <a:lnTo>
+                  <a:pt x="663628" y="616577"/>
+                </a:lnTo>
+                <a:close/>
+                <a:lnTo>
+                  <a:pt x="667910" y="612243"/>
+                </a:lnTo>
+                <a:close/>
+                <a:lnTo>
+                  <a:pt x="672191" y="607970"/>
+                </a:lnTo>
+                <a:close/>
+                <a:lnTo>
+                  <a:pt x="676473" y="603688"/>
+                </a:lnTo>
+                <a:close/>
+                <a:lnTo>
+                  <a:pt x="680754" y="599406"/>
+                </a:lnTo>
+                <a:close/>
+                <a:lnTo>
+                  <a:pt x="685035" y="595125"/>
+                </a:lnTo>
+                <a:close/>
+                <a:lnTo>
+                  <a:pt x="689317" y="590843"/>
+                </a:lnTo>
+                <a:close/>
+                <a:lnTo>
+                  <a:pt x="693598" y="586562"/>
+                </a:lnTo>
+                <a:close/>
+                <a:lnTo>
+                  <a:pt x="697880" y="582280"/>
+                </a:lnTo>
+                <a:close/>
+                <a:lnTo>
+                  <a:pt x="702161" y="577999"/>
+                </a:lnTo>
+                <a:close/>
+                <a:lnTo>
+                  <a:pt x="706443" y="573717"/>
+                </a:lnTo>
+                <a:close/>
+                <a:lnTo>
+                  <a:pt x="710724" y="569436"/>
+                </a:lnTo>
+                <a:close/>
+                <a:lnTo>
+                  <a:pt x="715006" y="565154"/>
+                </a:lnTo>
+                <a:close/>
+                <a:lnTo>
+                  <a:pt x="719287" y="560873"/>
+                </a:lnTo>
+                <a:close/>
+                <a:lnTo>
+                  <a:pt x="723569" y="556591"/>
+                </a:lnTo>
+                <a:close/>
+                <a:lnTo>
+                  <a:pt x="727850" y="552310"/>
+                </a:lnTo>
+                <a:close/>
+                <a:lnTo>
+                  <a:pt x="732132" y="548028"/>
+                </a:lnTo>
+                <a:close/>
+                <a:lnTo>
+                  <a:pt x="736413" y="543747"/>
+                </a:lnTo>
+                <a:close/>
+                <a:lnTo>
+                  <a:pt x="740695" y="539465"/>
+                </a:lnTo>
+                <a:close/>
+                <a:lnTo>
+                  <a:pt x="744976" y="535184"/>
+                </a:lnTo>
+                <a:close/>
+                <a:lnTo>
+                  <a:pt x="749258" y="530902"/>
+                </a:lnTo>
+                <a:close/>
+                <a:lnTo>
+                  <a:pt x="753539" y="526621"/>
+                </a:lnTo>
+                <a:close/>
+                <a:lnTo>
+                  <a:pt x="757820" y="522340"/>
+                </a:lnTo>
+                <a:close/>
+                <a:lnTo>
+                  <a:pt x="762102" y="518058"/>
+                </a:lnTo>
+                <a:close/>
+                <a:lnTo>
+                  <a:pt x="766383" y="513777"/>
+                </a:lnTo>
+                <a:close/>
+                <a:lnTo>
+                  <a:pt x="770665" y="509495"/>
+                </a:lnTo>
+                <a:close/>
+                <a:lnTo>
+                  <a:pt x="774946" y="505214"/>
+                </a:lnTo>
+                <a:close/>
+                <a:lnTo>
+                  <a:pt x="779228" y="500932"/>
+                </a:lnTo>
+                <a:close/>
+                <a:lnTo>
+                  <a:pt x="783509" y="496651"/>
+                </a:lnTo>
+                <a:close/>
+                <a:lnTo>
+                  <a:pt x="787791" y="492369"/>
+                </a:lnTo>
+                <a:close/>
+                <a:lnTo>
+                  <a:pt x="792072" y="488088"/>
+                </a:lnTo>
+                <a:close/>
+                <a:lnTo>
+                  <a:pt x="796354" y="483806"/>
+                </a:lnTo>
+                <a:close/>
+                <a:lnTo>
+                  <a:pt x="800635" y="479525"/>
+                </a:lnTo>
+                <a:close/>
+                <a:lnTo>
+                  <a:pt x="804917" y="475243"/>
+                </a:lnTo>
+                <a:close/>
+                <a:lnTo>
+                  <a:pt x="809198" y="470962"/>
+                </a:lnTo>
+                <a:close/>
+                <a:lnTo>
+                  <a:pt x="813480" y="466680"/>
+                </a:lnTo>
+                <a:close/>
+                <a:lnTo>
+                  <a:pt x="817761" y="462399"/>
+                </a:lnTo>
+                <a:close/>
+                <a:lnTo>
+                  <a:pt x="822043" y="458117"/>
+                </a:lnTo>
+                <a:close/>
+                <a:lnTo>
+                  <a:pt x="826324" y="453836"/>
+                </a:lnTo>
+                <a:close/>
+                <a:lnTo>
+                  <a:pt x="830605" y="449555"/>
+                </a:lnTo>
+                <a:close/>
+                <a:lnTo>
+                  <a:pt x="834887" y="445273"/>
+                </a:lnTo>
+                <a:close/>
+                <a:lnTo>
+                  <a:pt x="839168" y="440992"/>
+                </a:lnTo>
+                <a:close/>
+                <a:lnTo>
+                  <a:pt x="843450" y="436710"/>
+                </a:lnTo>
+                <a:close/>
+                <a:lnTo>
+                  <a:pt x="847731" y="432429"/>
+                </a:lnTo>
+                <a:close/>
+                <a:lnTo>
+                  <a:pt x="852013" y="428147"/>
+                </a:lnTo>
+                <a:close/>
+                <a:lnTo>
+                  <a:pt x="856294" y="423866"/>
+                </a:lnTo>
+                <a:close/>
+                <a:lnTo>
+                  <a:pt x="860576" y="419584"/>
+                </a:lnTo>
+                <a:close/>
+                <a:lnTo>
+                  <a:pt x="864857" y="415303"/>
+                </a:lnTo>
+                <a:close/>
+                <a:lnTo>
+                  <a:pt x="869139" y="411021"/>
+                </a:lnTo>
+                <a:close/>
+                <a:lnTo>
+                  <a:pt x="873420" y="406740"/>
+                </a:lnTo>
+                <a:close/>
+                <a:lnTo>
+                  <a:pt x="877702" y="402458"/>
+                </a:lnTo>
+                <a:close/>
+                <a:lnTo>
+                  <a:pt x="881983" y="398177"/>
+                </a:lnTo>
+                <a:close/>
+                <a:lnTo>
+                  <a:pt x="886265" y="393895"/>
+                </a:lnTo>
+                <a:close/>
+                <a:lnTo>
+                  <a:pt x="890546" y="389614"/>
+                </a:lnTo>
+                <a:close/>
+                <a:lnTo>
+                  <a:pt x="894828" y="385332"/>
+                </a:lnTo>
+                <a:close/>
+                <a:lnTo>
+                  <a:pt x="899109" y="381051"/>
+                </a:lnTo>
+                <a:close/>
+                <a:lnTo>
+                  <a:pt x="903391" y="376769"/>
+                </a:lnTo>
+                <a:close/>
+                <a:lnTo>
+                  <a:pt x="907672" y="372488"/>
+                </a:lnTo>
+                <a:close/>
+                <a:lnTo>
+                  <a:pt x="911953" y="368207"/>
+                </a:lnTo>
+                <a:close/>
+                <a:lnTo>
+                  <a:pt x="916235" y="363925"/>
+                </a:lnTo>
+                <a:close/>
+                <a:lnTo>
+                  <a:pt x="920516" y="359644"/>
+                </a:lnTo>
+                <a:close/>
+                <a:lnTo>
+                  <a:pt x="924798" y="355362"/>
+                </a:lnTo>
+                <a:close/>
+                <a:lnTo>
+                  <a:pt x="929079" y="351081"/>
+                </a:lnTo>
+                <a:close/>
+                <a:lnTo>
+                  <a:pt x="933361" y="346799"/>
+                </a:lnTo>
+                <a:close/>
+                <a:lnTo>
+                  <a:pt x="937642" y="342518"/>
+                </a:lnTo>
+                <a:close/>
+                <a:lnTo>
+                  <a:pt x="941924" y="338236"/>
+                </a:lnTo>
+                <a:close/>
+                <a:lnTo>
+                  <a:pt x="946205" y="333955"/>
+                </a:lnTo>
+                <a:close/>
+                <a:lnTo>
+                  <a:pt x="950487" y="329673"/>
+                </a:lnTo>
+                <a:close/>
+                <a:lnTo>
+                  <a:pt x="954768" y="325392"/>
+                </a:lnTo>
+                <a:close/>
+                <a:lnTo>
+                  <a:pt x="959050" y="321110"/>
+                </a:lnTo>
+                <a:close/>
+                <a:lnTo>
+                  <a:pt x="963331" y="316829"/>
+                </a:lnTo>
+                <a:close/>
+                <a:lnTo>
+                  <a:pt x="967613" y="312547"/>
+                </a:lnTo>
+                <a:close/>
+                <a:lnTo>
+                  <a:pt x="971894" y="308266"/>
+                </a:lnTo>
+                <a:close/>
+                <a:lnTo>
+                  <a:pt x="976176" y="303984"/>
+                </a:lnTo>
+                <a:close/>
+                <a:lnTo>
+                  <a:pt x="980457" y="299703"/>
+                </a:lnTo>
+                <a:close/>
+                <a:lnTo>
+                  <a:pt x="984738" y="295422"/>
+                </a:lnTo>
+                <a:close/>
+                <a:lnTo>
+                  <a:pt x="989020" y="291140"/>
+                </a:lnTo>
+                <a:close/>
+                <a:lnTo>
+                  <a:pt x="993301" y="286859"/>
+                </a:lnTo>
+                <a:close/>
+                <a:lnTo>
+                  <a:pt x="997583" y="282577"/>
+                </a:lnTo>
+                <a:close/>
+                <a:lnTo>
+                  <a:pt x="1001864" y="278296"/>
+                </a:lnTo>
+                <a:close/>
+                <a:lnTo>
+                  <a:pt x="1006146" y="274014"/>
+                </a:lnTo>
+                <a:close/>
+                <a:lnTo>
+                  <a:pt x="1010427" y="269733"/>
+                </a:lnTo>
+                <a:close/>
+                <a:lnTo>
+                  <a:pt x="1014709" y="265451"/>
+                </a:lnTo>
+                <a:close/>
+                <a:lnTo>
+                  <a:pt x="1018990" y="261170"/>
+                </a:lnTo>
+                <a:close/>
+                <a:lnTo>
+                  <a:pt x="1023272" y="256888"/>
+                </a:lnTo>
+                <a:close/>
+                <a:lnTo>
+                  <a:pt x="1027553" y="252607"/>
+                </a:lnTo>
+                <a:close/>
+                <a:lnTo>
+                  <a:pt x="1031835" y="248325"/>
+                </a:lnTo>
+                <a:close/>
+                <a:lnTo>
+                  <a:pt x="1036116" y="244044"/>
+                </a:lnTo>
+                <a:close/>
+                <a:lnTo>
+                  <a:pt x="1040398" y="239762"/>
+                </a:lnTo>
+                <a:close/>
+                <a:lnTo>
+                  <a:pt x="1044679" y="235481"/>
+                </a:lnTo>
+                <a:close/>
+                <a:lnTo>
+                  <a:pt x="1048961" y="231199"/>
+                </a:lnTo>
+                <a:close/>
+                <a:lnTo>
+                  <a:pt x="1053242" y="226918"/>
+                </a:lnTo>
+                <a:close/>
+                <a:lnTo>
+                  <a:pt x="1057523" y="222637"/>
+                </a:lnTo>
+                <a:close/>
+                <a:lnTo>
+                  <a:pt x="1061805" y="218355"/>
+                </a:lnTo>
+                <a:close/>
+                <a:lnTo>
+                  <a:pt x="1066086" y="214074"/>
+                </a:lnTo>
+                <a:close/>
+                <a:lnTo>
+                  <a:pt x="1070368" y="209792"/>
+                </a:lnTo>
+                <a:close/>
+                <a:lnTo>
+                  <a:pt x="1074649" y="205511"/>
+                </a:lnTo>
+                <a:close/>
+                <a:lnTo>
+                  <a:pt x="1078931" y="201229"/>
+                </a:lnTo>
+                <a:close/>
+                <a:lnTo>
+                  <a:pt x="1083212" y="196948"/>
+                </a:lnTo>
+                <a:close/>
+                <a:lnTo>
+                  <a:pt x="1087494" y="192666"/>
+                </a:lnTo>
+                <a:close/>
+                <a:lnTo>
+                  <a:pt x="1091775" y="188385"/>
+                </a:lnTo>
+                <a:close/>
+                <a:lnTo>
+                  <a:pt x="1096057" y="184103"/>
+                </a:lnTo>
+                <a:close/>
+                <a:lnTo>
+                  <a:pt x="1100338" y="179822"/>
+                </a:lnTo>
+                <a:close/>
+                <a:lnTo>
+                  <a:pt x="1104620" y="175540"/>
+                </a:lnTo>
+                <a:close/>
+                <a:lnTo>
+                  <a:pt x="1108901" y="171259"/>
+                </a:lnTo>
+                <a:close/>
+                <a:lnTo>
+                  <a:pt x="1113183" y="166977"/>
+                </a:lnTo>
+                <a:close/>
+                <a:lnTo>
+                  <a:pt x="1117464" y="162696"/>
+                </a:lnTo>
+                <a:close/>
+                <a:lnTo>
+                  <a:pt x="1121746" y="158414"/>
+                </a:lnTo>
+                <a:close/>
+                <a:lnTo>
+                  <a:pt x="1126027" y="154133"/>
+                </a:lnTo>
+                <a:close/>
+                <a:lnTo>
+                  <a:pt x="1130308" y="149852"/>
+                </a:lnTo>
+                <a:close/>
+                <a:lnTo>
+                  <a:pt x="1134590" y="145570"/>
+                </a:lnTo>
+                <a:close/>
+                <a:lnTo>
+                  <a:pt x="1138871" y="141289"/>
+                </a:lnTo>
+                <a:close/>
+                <a:lnTo>
+                  <a:pt x="1143153" y="137007"/>
+                </a:lnTo>
+                <a:close/>
+                <a:lnTo>
+                  <a:pt x="1147434" y="132726"/>
+                </a:lnTo>
+                <a:close/>
+                <a:lnTo>
+                  <a:pt x="1151716" y="128444"/>
+                </a:lnTo>
+                <a:close/>
+                <a:lnTo>
+                  <a:pt x="1155997" y="124163"/>
+                </a:lnTo>
+                <a:close/>
+                <a:lnTo>
+                  <a:pt x="1160279" y="119881"/>
+                </a:lnTo>
+                <a:close/>
+                <a:lnTo>
+                  <a:pt x="1164560" y="115600"/>
+                </a:lnTo>
+                <a:close/>
+                <a:lnTo>
+                  <a:pt x="1168842" y="111318"/>
+                </a:lnTo>
+                <a:close/>
+                <a:lnTo>
+                  <a:pt x="1173123" y="107037"/>
+                </a:lnTo>
+                <a:close/>
+                <a:lnTo>
+                  <a:pt x="1177405" y="102755"/>
+                </a:lnTo>
+                <a:close/>
+                <a:lnTo>
+                  <a:pt x="1181686" y="98474"/>
+                </a:lnTo>
+                <a:close/>
+                <a:lnTo>
+                  <a:pt x="1185968" y="94192"/>
+                </a:lnTo>
+                <a:close/>
+                <a:lnTo>
+                  <a:pt x="1190249" y="89911"/>
+                </a:lnTo>
+                <a:close/>
+                <a:lnTo>
+                  <a:pt x="1194531" y="85629"/>
+                </a:lnTo>
+                <a:close/>
+                <a:lnTo>
+                  <a:pt x="1198812" y="81348"/>
+                </a:lnTo>
+                <a:close/>
+                <a:lnTo>
+                  <a:pt x="1203094" y="77066"/>
+                </a:lnTo>
+                <a:close/>
+                <a:lnTo>
+                  <a:pt x="1207375" y="72785"/>
+                </a:lnTo>
+                <a:close/>
+                <a:lnTo>
+                  <a:pt x="1211656" y="68504"/>
+                </a:lnTo>
+                <a:close/>
+                <a:lnTo>
+                  <a:pt x="1215938" y="64222"/>
+                </a:lnTo>
+                <a:close/>
+                <a:lnTo>
+                  <a:pt x="1220219" y="59941"/>
+                </a:lnTo>
+                <a:close/>
+                <a:lnTo>
+                  <a:pt x="1224501" y="55659"/>
+                </a:lnTo>
+                <a:close/>
+                <a:lnTo>
+                  <a:pt x="1228782" y="51378"/>
+                </a:lnTo>
+                <a:close/>
+                <a:lnTo>
+                  <a:pt x="1233064" y="47096"/>
+                </a:lnTo>
+                <a:close/>
+                <a:lnTo>
+                  <a:pt x="1237345" y="42815"/>
+                </a:lnTo>
+                <a:close/>
+                <a:lnTo>
+                  <a:pt x="1241627" y="38533"/>
+                </a:lnTo>
+                <a:close/>
+                <a:lnTo>
+                  <a:pt x="1245908" y="34252"/>
+                </a:lnTo>
+                <a:close/>
+                <a:lnTo>
+                  <a:pt x="1250190" y="29970"/>
+                </a:lnTo>
+                <a:close/>
+                <a:lnTo>
+                  <a:pt x="1254471" y="25689"/>
+                </a:lnTo>
+                <a:close/>
+                <a:lnTo>
+                  <a:pt x="1258753" y="21407"/>
+                </a:lnTo>
+                <a:close/>
+                <a:lnTo>
+                  <a:pt x="1263034" y="17126"/>
+                </a:lnTo>
+                <a:close/>
+                <a:lnTo>
+                  <a:pt x="1267316" y="12844"/>
+                </a:lnTo>
+                <a:close/>
+                <a:lnTo>
+                  <a:pt x="1271597" y="8563"/>
+                </a:lnTo>
+                <a:close/>
+                <a:lnTo>
+                  <a:pt x="1275879" y="4281"/>
+                </a:lnTo>
+                <a:close/>
+                <a:lnTo>
+                  <a:pt x="1280160" y="0"/>
+                </a:lnTo>
+                <a:close/>
+              </a:path>
+            </a:pathLst>
+          </a:custGeom>
+          <a:ln w="31750">
             <a:solidFill>
-              <a:srgbClr val="00C8FF"/>
+              <a:srgbClr val="00E5FF"/>
             </a:solidFill>
           </a:ln>
         </p:spPr>
         <p:style>
-          <a:lnRef idx="2">
+          <a:lnRef idx="1">
             <a:schemeClr val="accent1"/>
           </a:lnRef>
-          <a:fillRef idx="0">
+          <a:fillRef idx="3">
             <a:schemeClr val="accent1"/>
           </a:fillRef>
-          <a:effectRef idx="1">
+          <a:effectRef idx="2">
             <a:schemeClr val="accent1"/>
           </a:effectRef>
           <a:fontRef idx="minor">
-            <a:schemeClr val="tx1"/>
+            <a:schemeClr val="lt1"/>
           </a:fontRef>
         </p:style>
-      </p:cxnSp>
+        <p:txBody>
+          <a:bodyPr rtlCol="0" anchor="ctr"/>
+          <a:lstStyle/>
+          <a:p>
+            <a:pPr algn="ctr"/>
+          </a:p>
+        </p:txBody>
+      </p:sp>
       <p:cxnSp>
         <p:nvCxnSpPr>
           <p:cNvPr id="5" name="Connector 4"/>
@@ -3208,17 +4422,18 @@
           <p:nvPr/>
         </p:nvCxnSpPr>
         <p:spPr>
-          <a:xfrm>
-            <a:off x="4366260.0" y="1451610.0"/>
-            <a:ext cx="22860.0" cy="22860.0"/>
+          <a:xfrm flipV="1">
+            <a:off x="5029200.0" y="1657350.0"/>
+            <a:ext cx="0.0" cy="914400.0"/>
           </a:xfrm>
           <a:prstGeom prst="line">
             <a:avLst/>
           </a:prstGeom>
-          <a:ln w="25400">
+          <a:ln w="12700">
             <a:solidFill>
-              <a:srgbClr val="00C8FF"/>
+              <a:srgbClr val="787878"/>
             </a:solidFill>
+            <a:prstDash val="sysDash"/>
           </a:ln>
         </p:spPr>
         <p:style>
@@ -3244,16 +4459,17 @@
         </p:nvCxnSpPr>
         <p:spPr>
           <a:xfrm>
-            <a:off x="4389120.0" y="1474470.0"/>
-            <a:ext cx="22860.0" cy="22860.0"/>
+            <a:off x="4572000.0" y="2114550.0"/>
+            <a:ext cx="457200.0" cy="0.0"/>
           </a:xfrm>
           <a:prstGeom prst="line">
             <a:avLst/>
           </a:prstGeom>
-          <a:ln w="25400">
+          <a:ln w="12700">
             <a:solidFill>
-              <a:srgbClr val="00C8FF"/>
+              <a:srgbClr val="787878"/>
             </a:solidFill>
+            <a:prstDash val="sysDash"/>
           </a:ln>
         </p:spPr>
         <p:style>
@@ -3279,16 +4495,17 @@
         </p:nvCxnSpPr>
         <p:spPr>
           <a:xfrm>
-            <a:off x="4411980.0" y="1497330.0"/>
-            <a:ext cx="22860.0" cy="22860.0"/>
+            <a:off x="4572000.0" y="1657350.0"/>
+            <a:ext cx="457200.0" cy="0.0"/>
           </a:xfrm>
           <a:prstGeom prst="line">
             <a:avLst/>
           </a:prstGeom>
-          <a:ln w="25400">
+          <a:ln w="12700">
             <a:solidFill>
-              <a:srgbClr val="00C8FF"/>
+              <a:srgbClr val="787878"/>
             </a:solidFill>
+            <a:prstDash val="sysDash"/>
           </a:ln>
         </p:spPr>
         <p:style>
@@ -3306,1912 +4523,24 @@
           </a:fontRef>
         </p:style>
       </p:cxnSp>
-      <p:cxnSp>
-        <p:nvCxnSpPr>
-          <p:cNvPr id="8" name="Connector 7"/>
-          <p:cNvCxnSpPr/>
+      <p:sp>
+        <p:nvSpPr>
+          <p:cNvPr id="8" name="Oval 7"/>
+          <p:cNvSpPr/>
           <p:nvPr/>
-        </p:nvCxnSpPr>
+        </p:nvSpPr>
         <p:spPr>
           <a:xfrm>
-            <a:off x="4434840.0" y="1520190.0"/>
-            <a:ext cx="22860.0" cy="22860.0"/>
-          </a:xfrm>
-          <a:prstGeom prst="line">
-            <a:avLst/>
-          </a:prstGeom>
-          <a:ln w="25400">
-            <a:solidFill>
-              <a:srgbClr val="00C8FF"/>
-            </a:solidFill>
-          </a:ln>
-        </p:spPr>
-        <p:style>
-          <a:lnRef idx="2">
-            <a:schemeClr val="accent1"/>
-          </a:lnRef>
-          <a:fillRef idx="0">
-            <a:schemeClr val="accent1"/>
-          </a:fillRef>
-          <a:effectRef idx="1">
-            <a:schemeClr val="accent1"/>
-          </a:effectRef>
-          <a:fontRef idx="minor">
-            <a:schemeClr val="tx1"/>
-          </a:fontRef>
-        </p:style>
-      </p:cxnSp>
-      <p:cxnSp>
-        <p:nvCxnSpPr>
-          <p:cNvPr id="9" name="Connector 8"/>
-          <p:cNvCxnSpPr/>
-          <p:nvPr/>
-        </p:nvCxnSpPr>
-        <p:spPr>
-          <a:xfrm>
-            <a:off x="4457700.0" y="1543050.0"/>
-            <a:ext cx="22860.0" cy="22860.0"/>
-          </a:xfrm>
-          <a:prstGeom prst="line">
-            <a:avLst/>
-          </a:prstGeom>
-          <a:ln w="25400">
-            <a:solidFill>
-              <a:srgbClr val="00C8FF"/>
-            </a:solidFill>
-          </a:ln>
-        </p:spPr>
-        <p:style>
-          <a:lnRef idx="2">
-            <a:schemeClr val="accent1"/>
-          </a:lnRef>
-          <a:fillRef idx="0">
-            <a:schemeClr val="accent1"/>
-          </a:fillRef>
-          <a:effectRef idx="1">
-            <a:schemeClr val="accent1"/>
-          </a:effectRef>
-          <a:fontRef idx="minor">
-            <a:schemeClr val="tx1"/>
-          </a:fontRef>
-        </p:style>
-      </p:cxnSp>
-      <p:cxnSp>
-        <p:nvCxnSpPr>
-          <p:cNvPr id="10" name="Connector 9"/>
-          <p:cNvCxnSpPr/>
-          <p:nvPr/>
-        </p:nvCxnSpPr>
-        <p:spPr>
-          <a:xfrm>
-            <a:off x="4480560.0" y="1565910.0"/>
-            <a:ext cx="22860.0" cy="22860.0"/>
-          </a:xfrm>
-          <a:prstGeom prst="line">
-            <a:avLst/>
-          </a:prstGeom>
-          <a:ln w="25400">
-            <a:solidFill>
-              <a:srgbClr val="00C8FF"/>
-            </a:solidFill>
-          </a:ln>
-        </p:spPr>
-        <p:style>
-          <a:lnRef idx="2">
-            <a:schemeClr val="accent1"/>
-          </a:lnRef>
-          <a:fillRef idx="0">
-            <a:schemeClr val="accent1"/>
-          </a:fillRef>
-          <a:effectRef idx="1">
-            <a:schemeClr val="accent1"/>
-          </a:effectRef>
-          <a:fontRef idx="minor">
-            <a:schemeClr val="tx1"/>
-          </a:fontRef>
-        </p:style>
-      </p:cxnSp>
-      <p:cxnSp>
-        <p:nvCxnSpPr>
-          <p:cNvPr id="11" name="Connector 10"/>
-          <p:cNvCxnSpPr/>
-          <p:nvPr/>
-        </p:nvCxnSpPr>
-        <p:spPr>
-          <a:xfrm>
-            <a:off x="4503420.0" y="1588770.0"/>
-            <a:ext cx="22860.0" cy="22860.0"/>
-          </a:xfrm>
-          <a:prstGeom prst="line">
-            <a:avLst/>
-          </a:prstGeom>
-          <a:ln w="25400">
-            <a:solidFill>
-              <a:srgbClr val="00C8FF"/>
-            </a:solidFill>
-          </a:ln>
-        </p:spPr>
-        <p:style>
-          <a:lnRef idx="2">
-            <a:schemeClr val="accent1"/>
-          </a:lnRef>
-          <a:fillRef idx="0">
-            <a:schemeClr val="accent1"/>
-          </a:fillRef>
-          <a:effectRef idx="1">
-            <a:schemeClr val="accent1"/>
-          </a:effectRef>
-          <a:fontRef idx="minor">
-            <a:schemeClr val="tx1"/>
-          </a:fontRef>
-        </p:style>
-      </p:cxnSp>
-      <p:cxnSp>
-        <p:nvCxnSpPr>
-          <p:cNvPr id="12" name="Connector 11"/>
-          <p:cNvCxnSpPr/>
-          <p:nvPr/>
-        </p:nvCxnSpPr>
-        <p:spPr>
-          <a:xfrm>
-            <a:off x="4526280.0" y="1611630.0"/>
-            <a:ext cx="22860.0" cy="22860.0"/>
-          </a:xfrm>
-          <a:prstGeom prst="line">
-            <a:avLst/>
-          </a:prstGeom>
-          <a:ln w="25400">
-            <a:solidFill>
-              <a:srgbClr val="00C8FF"/>
-            </a:solidFill>
-          </a:ln>
-        </p:spPr>
-        <p:style>
-          <a:lnRef idx="2">
-            <a:schemeClr val="accent1"/>
-          </a:lnRef>
-          <a:fillRef idx="0">
-            <a:schemeClr val="accent1"/>
-          </a:fillRef>
-          <a:effectRef idx="1">
-            <a:schemeClr val="accent1"/>
-          </a:effectRef>
-          <a:fontRef idx="minor">
-            <a:schemeClr val="tx1"/>
-          </a:fontRef>
-        </p:style>
-      </p:cxnSp>
-      <p:cxnSp>
-        <p:nvCxnSpPr>
-          <p:cNvPr id="13" name="Connector 12"/>
-          <p:cNvCxnSpPr/>
-          <p:nvPr/>
-        </p:nvCxnSpPr>
-        <p:spPr>
-          <a:xfrm>
-            <a:off x="4549140.0" y="1634490.0"/>
-            <a:ext cx="22860.0" cy="22860.0"/>
-          </a:xfrm>
-          <a:prstGeom prst="line">
-            <a:avLst/>
-          </a:prstGeom>
-          <a:ln w="25400">
-            <a:solidFill>
-              <a:srgbClr val="00C8FF"/>
-            </a:solidFill>
-          </a:ln>
-        </p:spPr>
-        <p:style>
-          <a:lnRef idx="2">
-            <a:schemeClr val="accent1"/>
-          </a:lnRef>
-          <a:fillRef idx="0">
-            <a:schemeClr val="accent1"/>
-          </a:fillRef>
-          <a:effectRef idx="1">
-            <a:schemeClr val="accent1"/>
-          </a:effectRef>
-          <a:fontRef idx="minor">
-            <a:schemeClr val="tx1"/>
-          </a:fontRef>
-        </p:style>
-      </p:cxnSp>
-      <p:cxnSp>
-        <p:nvCxnSpPr>
-          <p:cNvPr id="14" name="Connector 13"/>
-          <p:cNvCxnSpPr/>
-          <p:nvPr/>
-        </p:nvCxnSpPr>
-        <p:spPr>
-          <a:xfrm>
-            <a:off x="4572000.0" y="1657350.0"/>
-            <a:ext cx="22860.0" cy="22860.0"/>
-          </a:xfrm>
-          <a:prstGeom prst="line">
-            <a:avLst/>
-          </a:prstGeom>
-          <a:ln w="25400">
-            <a:solidFill>
-              <a:srgbClr val="00C8FF"/>
-            </a:solidFill>
-          </a:ln>
-        </p:spPr>
-        <p:style>
-          <a:lnRef idx="2">
-            <a:schemeClr val="accent1"/>
-          </a:lnRef>
-          <a:fillRef idx="0">
-            <a:schemeClr val="accent1"/>
-          </a:fillRef>
-          <a:effectRef idx="1">
-            <a:schemeClr val="accent1"/>
-          </a:effectRef>
-          <a:fontRef idx="minor">
-            <a:schemeClr val="tx1"/>
-          </a:fontRef>
-        </p:style>
-      </p:cxnSp>
-      <p:cxnSp>
-        <p:nvCxnSpPr>
-          <p:cNvPr id="15" name="Connector 14"/>
-          <p:cNvCxnSpPr/>
-          <p:nvPr/>
-        </p:nvCxnSpPr>
-        <p:spPr>
-          <a:xfrm>
-            <a:off x="4594860.0" y="1680210.0"/>
-            <a:ext cx="22860.0" cy="22860.0"/>
-          </a:xfrm>
-          <a:prstGeom prst="line">
-            <a:avLst/>
-          </a:prstGeom>
-          <a:ln w="25400">
-            <a:solidFill>
-              <a:srgbClr val="00C8FF"/>
-            </a:solidFill>
-          </a:ln>
-        </p:spPr>
-        <p:style>
-          <a:lnRef idx="2">
-            <a:schemeClr val="accent1"/>
-          </a:lnRef>
-          <a:fillRef idx="0">
-            <a:schemeClr val="accent1"/>
-          </a:fillRef>
-          <a:effectRef idx="1">
-            <a:schemeClr val="accent1"/>
-          </a:effectRef>
-          <a:fontRef idx="minor">
-            <a:schemeClr val="tx1"/>
-          </a:fontRef>
-        </p:style>
-      </p:cxnSp>
-      <p:cxnSp>
-        <p:nvCxnSpPr>
-          <p:cNvPr id="16" name="Connector 15"/>
-          <p:cNvCxnSpPr/>
-          <p:nvPr/>
-        </p:nvCxnSpPr>
-        <p:spPr>
-          <a:xfrm>
-            <a:off x="4617720.0" y="1703070.0"/>
-            <a:ext cx="22860.0" cy="22860.0"/>
-          </a:xfrm>
-          <a:prstGeom prst="line">
-            <a:avLst/>
-          </a:prstGeom>
-          <a:ln w="25400">
-            <a:solidFill>
-              <a:srgbClr val="00C8FF"/>
-            </a:solidFill>
-          </a:ln>
-        </p:spPr>
-        <p:style>
-          <a:lnRef idx="2">
-            <a:schemeClr val="accent1"/>
-          </a:lnRef>
-          <a:fillRef idx="0">
-            <a:schemeClr val="accent1"/>
-          </a:fillRef>
-          <a:effectRef idx="1">
-            <a:schemeClr val="accent1"/>
-          </a:effectRef>
-          <a:fontRef idx="minor">
-            <a:schemeClr val="tx1"/>
-          </a:fontRef>
-        </p:style>
-      </p:cxnSp>
-      <p:cxnSp>
-        <p:nvCxnSpPr>
-          <p:cNvPr id="17" name="Connector 16"/>
-          <p:cNvCxnSpPr/>
-          <p:nvPr/>
-        </p:nvCxnSpPr>
-        <p:spPr>
-          <a:xfrm>
-            <a:off x="4640580.0" y="1725930.0"/>
-            <a:ext cx="22860.0" cy="22860.0"/>
-          </a:xfrm>
-          <a:prstGeom prst="line">
-            <a:avLst/>
-          </a:prstGeom>
-          <a:ln w="25400">
-            <a:solidFill>
-              <a:srgbClr val="00C8FF"/>
-            </a:solidFill>
-          </a:ln>
-        </p:spPr>
-        <p:style>
-          <a:lnRef idx="2">
-            <a:schemeClr val="accent1"/>
-          </a:lnRef>
-          <a:fillRef idx="0">
-            <a:schemeClr val="accent1"/>
-          </a:fillRef>
-          <a:effectRef idx="1">
-            <a:schemeClr val="accent1"/>
-          </a:effectRef>
-          <a:fontRef idx="minor">
-            <a:schemeClr val="tx1"/>
-          </a:fontRef>
-        </p:style>
-      </p:cxnSp>
-      <p:cxnSp>
-        <p:nvCxnSpPr>
-          <p:cNvPr id="18" name="Connector 17"/>
-          <p:cNvCxnSpPr/>
-          <p:nvPr/>
-        </p:nvCxnSpPr>
-        <p:spPr>
-          <a:xfrm>
-            <a:off x="4663440.0" y="1748790.0"/>
-            <a:ext cx="22860.0" cy="22860.0"/>
-          </a:xfrm>
-          <a:prstGeom prst="line">
-            <a:avLst/>
-          </a:prstGeom>
-          <a:ln w="25400">
-            <a:solidFill>
-              <a:srgbClr val="00C8FF"/>
-            </a:solidFill>
-          </a:ln>
-        </p:spPr>
-        <p:style>
-          <a:lnRef idx="2">
-            <a:schemeClr val="accent1"/>
-          </a:lnRef>
-          <a:fillRef idx="0">
-            <a:schemeClr val="accent1"/>
-          </a:fillRef>
-          <a:effectRef idx="1">
-            <a:schemeClr val="accent1"/>
-          </a:effectRef>
-          <a:fontRef idx="minor">
-            <a:schemeClr val="tx1"/>
-          </a:fontRef>
-        </p:style>
-      </p:cxnSp>
-      <p:cxnSp>
-        <p:nvCxnSpPr>
-          <p:cNvPr id="19" name="Connector 18"/>
-          <p:cNvCxnSpPr/>
-          <p:nvPr/>
-        </p:nvCxnSpPr>
-        <p:spPr>
-          <a:xfrm>
-            <a:off x="4686300.0" y="1771650.0"/>
-            <a:ext cx="22860.0" cy="22860.0"/>
-          </a:xfrm>
-          <a:prstGeom prst="line">
-            <a:avLst/>
-          </a:prstGeom>
-          <a:ln w="25400">
-            <a:solidFill>
-              <a:srgbClr val="00C8FF"/>
-            </a:solidFill>
-          </a:ln>
-        </p:spPr>
-        <p:style>
-          <a:lnRef idx="2">
-            <a:schemeClr val="accent1"/>
-          </a:lnRef>
-          <a:fillRef idx="0">
-            <a:schemeClr val="accent1"/>
-          </a:fillRef>
-          <a:effectRef idx="1">
-            <a:schemeClr val="accent1"/>
-          </a:effectRef>
-          <a:fontRef idx="minor">
-            <a:schemeClr val="tx1"/>
-          </a:fontRef>
-        </p:style>
-      </p:cxnSp>
-      <p:cxnSp>
-        <p:nvCxnSpPr>
-          <p:cNvPr id="20" name="Connector 19"/>
-          <p:cNvCxnSpPr/>
-          <p:nvPr/>
-        </p:nvCxnSpPr>
-        <p:spPr>
-          <a:xfrm>
-            <a:off x="4709160.0" y="1794510.0"/>
-            <a:ext cx="22860.0" cy="22860.0"/>
-          </a:xfrm>
-          <a:prstGeom prst="line">
-            <a:avLst/>
-          </a:prstGeom>
-          <a:ln w="25400">
-            <a:solidFill>
-              <a:srgbClr val="00C8FF"/>
-            </a:solidFill>
-          </a:ln>
-        </p:spPr>
-        <p:style>
-          <a:lnRef idx="2">
-            <a:schemeClr val="accent1"/>
-          </a:lnRef>
-          <a:fillRef idx="0">
-            <a:schemeClr val="accent1"/>
-          </a:fillRef>
-          <a:effectRef idx="1">
-            <a:schemeClr val="accent1"/>
-          </a:effectRef>
-          <a:fontRef idx="minor">
-            <a:schemeClr val="tx1"/>
-          </a:fontRef>
-        </p:style>
-      </p:cxnSp>
-      <p:cxnSp>
-        <p:nvCxnSpPr>
-          <p:cNvPr id="21" name="Connector 20"/>
-          <p:cNvCxnSpPr/>
-          <p:nvPr/>
-        </p:nvCxnSpPr>
-        <p:spPr>
-          <a:xfrm>
-            <a:off x="4732020.0" y="1817370.0"/>
-            <a:ext cx="22860.0" cy="22860.0"/>
-          </a:xfrm>
-          <a:prstGeom prst="line">
-            <a:avLst/>
-          </a:prstGeom>
-          <a:ln w="25400">
-            <a:solidFill>
-              <a:srgbClr val="00C8FF"/>
-            </a:solidFill>
-          </a:ln>
-        </p:spPr>
-        <p:style>
-          <a:lnRef idx="2">
-            <a:schemeClr val="accent1"/>
-          </a:lnRef>
-          <a:fillRef idx="0">
-            <a:schemeClr val="accent1"/>
-          </a:fillRef>
-          <a:effectRef idx="1">
-            <a:schemeClr val="accent1"/>
-          </a:effectRef>
-          <a:fontRef idx="minor">
-            <a:schemeClr val="tx1"/>
-          </a:fontRef>
-        </p:style>
-      </p:cxnSp>
-      <p:cxnSp>
-        <p:nvCxnSpPr>
-          <p:cNvPr id="22" name="Connector 21"/>
-          <p:cNvCxnSpPr/>
-          <p:nvPr/>
-        </p:nvCxnSpPr>
-        <p:spPr>
-          <a:xfrm>
-            <a:off x="4754880.0" y="1840230.0"/>
-            <a:ext cx="22860.0" cy="22860.0"/>
-          </a:xfrm>
-          <a:prstGeom prst="line">
-            <a:avLst/>
-          </a:prstGeom>
-          <a:ln w="25400">
-            <a:solidFill>
-              <a:srgbClr val="00C8FF"/>
-            </a:solidFill>
-          </a:ln>
-        </p:spPr>
-        <p:style>
-          <a:lnRef idx="2">
-            <a:schemeClr val="accent1"/>
-          </a:lnRef>
-          <a:fillRef idx="0">
-            <a:schemeClr val="accent1"/>
-          </a:fillRef>
-          <a:effectRef idx="1">
-            <a:schemeClr val="accent1"/>
-          </a:effectRef>
-          <a:fontRef idx="minor">
-            <a:schemeClr val="tx1"/>
-          </a:fontRef>
-        </p:style>
-      </p:cxnSp>
-      <p:cxnSp>
-        <p:nvCxnSpPr>
-          <p:cNvPr id="23" name="Connector 22"/>
-          <p:cNvCxnSpPr/>
-          <p:nvPr/>
-        </p:nvCxnSpPr>
-        <p:spPr>
-          <a:xfrm>
-            <a:off x="4777740.0" y="1863090.0"/>
-            <a:ext cx="22860.0" cy="22860.0"/>
-          </a:xfrm>
-          <a:prstGeom prst="line">
-            <a:avLst/>
-          </a:prstGeom>
-          <a:ln w="25400">
-            <a:solidFill>
-              <a:srgbClr val="00C8FF"/>
-            </a:solidFill>
-          </a:ln>
-        </p:spPr>
-        <p:style>
-          <a:lnRef idx="2">
-            <a:schemeClr val="accent1"/>
-          </a:lnRef>
-          <a:fillRef idx="0">
-            <a:schemeClr val="accent1"/>
-          </a:fillRef>
-          <a:effectRef idx="1">
-            <a:schemeClr val="accent1"/>
-          </a:effectRef>
-          <a:fontRef idx="minor">
-            <a:schemeClr val="tx1"/>
-          </a:fontRef>
-        </p:style>
-      </p:cxnSp>
-      <p:cxnSp>
-        <p:nvCxnSpPr>
-          <p:cNvPr id="24" name="Connector 23"/>
-          <p:cNvCxnSpPr/>
-          <p:nvPr/>
-        </p:nvCxnSpPr>
-        <p:spPr>
-          <a:xfrm>
-            <a:off x="4800600.0" y="1885950.0"/>
-            <a:ext cx="22860.0" cy="22860.0"/>
-          </a:xfrm>
-          <a:prstGeom prst="line">
-            <a:avLst/>
-          </a:prstGeom>
-          <a:ln w="25400">
-            <a:solidFill>
-              <a:srgbClr val="00C8FF"/>
-            </a:solidFill>
-          </a:ln>
-        </p:spPr>
-        <p:style>
-          <a:lnRef idx="2">
-            <a:schemeClr val="accent1"/>
-          </a:lnRef>
-          <a:fillRef idx="0">
-            <a:schemeClr val="accent1"/>
-          </a:fillRef>
-          <a:effectRef idx="1">
-            <a:schemeClr val="accent1"/>
-          </a:effectRef>
-          <a:fontRef idx="minor">
-            <a:schemeClr val="tx1"/>
-          </a:fontRef>
-        </p:style>
-      </p:cxnSp>
-      <p:cxnSp>
-        <p:nvCxnSpPr>
-          <p:cNvPr id="25" name="Connector 24"/>
-          <p:cNvCxnSpPr/>
-          <p:nvPr/>
-        </p:nvCxnSpPr>
-        <p:spPr>
-          <a:xfrm>
-            <a:off x="4823460.0" y="1908810.0"/>
-            <a:ext cx="22860.0" cy="22860.0"/>
-          </a:xfrm>
-          <a:prstGeom prst="line">
-            <a:avLst/>
-          </a:prstGeom>
-          <a:ln w="25400">
-            <a:solidFill>
-              <a:srgbClr val="00C8FF"/>
-            </a:solidFill>
-          </a:ln>
-        </p:spPr>
-        <p:style>
-          <a:lnRef idx="2">
-            <a:schemeClr val="accent1"/>
-          </a:lnRef>
-          <a:fillRef idx="0">
-            <a:schemeClr val="accent1"/>
-          </a:fillRef>
-          <a:effectRef idx="1">
-            <a:schemeClr val="accent1"/>
-          </a:effectRef>
-          <a:fontRef idx="minor">
-            <a:schemeClr val="tx1"/>
-          </a:fontRef>
-        </p:style>
-      </p:cxnSp>
-      <p:cxnSp>
-        <p:nvCxnSpPr>
-          <p:cNvPr id="26" name="Connector 25"/>
-          <p:cNvCxnSpPr/>
-          <p:nvPr/>
-        </p:nvCxnSpPr>
-        <p:spPr>
-          <a:xfrm>
-            <a:off x="4846320.0" y="1931670.0"/>
-            <a:ext cx="22860.0" cy="22860.0"/>
-          </a:xfrm>
-          <a:prstGeom prst="line">
-            <a:avLst/>
-          </a:prstGeom>
-          <a:ln w="25400">
-            <a:solidFill>
-              <a:srgbClr val="00C8FF"/>
-            </a:solidFill>
-          </a:ln>
-        </p:spPr>
-        <p:style>
-          <a:lnRef idx="2">
-            <a:schemeClr val="accent1"/>
-          </a:lnRef>
-          <a:fillRef idx="0">
-            <a:schemeClr val="accent1"/>
-          </a:fillRef>
-          <a:effectRef idx="1">
-            <a:schemeClr val="accent1"/>
-          </a:effectRef>
-          <a:fontRef idx="minor">
-            <a:schemeClr val="tx1"/>
-          </a:fontRef>
-        </p:style>
-      </p:cxnSp>
-      <p:cxnSp>
-        <p:nvCxnSpPr>
-          <p:cNvPr id="27" name="Connector 26"/>
-          <p:cNvCxnSpPr/>
-          <p:nvPr/>
-        </p:nvCxnSpPr>
-        <p:spPr>
-          <a:xfrm>
-            <a:off x="4869180.0" y="1954530.0"/>
-            <a:ext cx="22860.0" cy="22860.0"/>
-          </a:xfrm>
-          <a:prstGeom prst="line">
-            <a:avLst/>
-          </a:prstGeom>
-          <a:ln w="25400">
-            <a:solidFill>
-              <a:srgbClr val="00C8FF"/>
-            </a:solidFill>
-          </a:ln>
-        </p:spPr>
-        <p:style>
-          <a:lnRef idx="2">
-            <a:schemeClr val="accent1"/>
-          </a:lnRef>
-          <a:fillRef idx="0">
-            <a:schemeClr val="accent1"/>
-          </a:fillRef>
-          <a:effectRef idx="1">
-            <a:schemeClr val="accent1"/>
-          </a:effectRef>
-          <a:fontRef idx="minor">
-            <a:schemeClr val="tx1"/>
-          </a:fontRef>
-        </p:style>
-      </p:cxnSp>
-      <p:cxnSp>
-        <p:nvCxnSpPr>
-          <p:cNvPr id="28" name="Connector 27"/>
-          <p:cNvCxnSpPr/>
-          <p:nvPr/>
-        </p:nvCxnSpPr>
-        <p:spPr>
-          <a:xfrm>
-            <a:off x="4892040.0" y="1977390.0"/>
-            <a:ext cx="22860.0" cy="22860.0"/>
-          </a:xfrm>
-          <a:prstGeom prst="line">
-            <a:avLst/>
-          </a:prstGeom>
-          <a:ln w="25400">
-            <a:solidFill>
-              <a:srgbClr val="00C8FF"/>
-            </a:solidFill>
-          </a:ln>
-        </p:spPr>
-        <p:style>
-          <a:lnRef idx="2">
-            <a:schemeClr val="accent1"/>
-          </a:lnRef>
-          <a:fillRef idx="0">
-            <a:schemeClr val="accent1"/>
-          </a:fillRef>
-          <a:effectRef idx="1">
-            <a:schemeClr val="accent1"/>
-          </a:effectRef>
-          <a:fontRef idx="minor">
-            <a:schemeClr val="tx1"/>
-          </a:fontRef>
-        </p:style>
-      </p:cxnSp>
-      <p:cxnSp>
-        <p:nvCxnSpPr>
-          <p:cNvPr id="29" name="Connector 28"/>
-          <p:cNvCxnSpPr/>
-          <p:nvPr/>
-        </p:nvCxnSpPr>
-        <p:spPr>
-          <a:xfrm>
-            <a:off x="4914900.0" y="2000250.0"/>
-            <a:ext cx="22860.0" cy="22860.0"/>
-          </a:xfrm>
-          <a:prstGeom prst="line">
-            <a:avLst/>
-          </a:prstGeom>
-          <a:ln w="25400">
-            <a:solidFill>
-              <a:srgbClr val="00C8FF"/>
-            </a:solidFill>
-          </a:ln>
-        </p:spPr>
-        <p:style>
-          <a:lnRef idx="2">
-            <a:schemeClr val="accent1"/>
-          </a:lnRef>
-          <a:fillRef idx="0">
-            <a:schemeClr val="accent1"/>
-          </a:fillRef>
-          <a:effectRef idx="1">
-            <a:schemeClr val="accent1"/>
-          </a:effectRef>
-          <a:fontRef idx="minor">
-            <a:schemeClr val="tx1"/>
-          </a:fontRef>
-        </p:style>
-      </p:cxnSp>
-      <p:cxnSp>
-        <p:nvCxnSpPr>
-          <p:cNvPr id="30" name="Connector 29"/>
-          <p:cNvCxnSpPr/>
-          <p:nvPr/>
-        </p:nvCxnSpPr>
-        <p:spPr>
-          <a:xfrm>
-            <a:off x="4937760.0" y="2023110.0"/>
-            <a:ext cx="22860.0" cy="22860.0"/>
-          </a:xfrm>
-          <a:prstGeom prst="line">
-            <a:avLst/>
-          </a:prstGeom>
-          <a:ln w="25400">
-            <a:solidFill>
-              <a:srgbClr val="00C8FF"/>
-            </a:solidFill>
-          </a:ln>
-        </p:spPr>
-        <p:style>
-          <a:lnRef idx="2">
-            <a:schemeClr val="accent1"/>
-          </a:lnRef>
-          <a:fillRef idx="0">
-            <a:schemeClr val="accent1"/>
-          </a:fillRef>
-          <a:effectRef idx="1">
-            <a:schemeClr val="accent1"/>
-          </a:effectRef>
-          <a:fontRef idx="minor">
-            <a:schemeClr val="tx1"/>
-          </a:fontRef>
-        </p:style>
-      </p:cxnSp>
-      <p:cxnSp>
-        <p:nvCxnSpPr>
-          <p:cNvPr id="31" name="Connector 30"/>
-          <p:cNvCxnSpPr/>
-          <p:nvPr/>
-        </p:nvCxnSpPr>
-        <p:spPr>
-          <a:xfrm>
-            <a:off x="4960620.0" y="2045970.0"/>
-            <a:ext cx="22860.0" cy="22860.0"/>
-          </a:xfrm>
-          <a:prstGeom prst="line">
-            <a:avLst/>
-          </a:prstGeom>
-          <a:ln w="25400">
-            <a:solidFill>
-              <a:srgbClr val="00C8FF"/>
-            </a:solidFill>
-          </a:ln>
-        </p:spPr>
-        <p:style>
-          <a:lnRef idx="2">
-            <a:schemeClr val="accent1"/>
-          </a:lnRef>
-          <a:fillRef idx="0">
-            <a:schemeClr val="accent1"/>
-          </a:fillRef>
-          <a:effectRef idx="1">
-            <a:schemeClr val="accent1"/>
-          </a:effectRef>
-          <a:fontRef idx="minor">
-            <a:schemeClr val="tx1"/>
-          </a:fontRef>
-        </p:style>
-      </p:cxnSp>
-      <p:cxnSp>
-        <p:nvCxnSpPr>
-          <p:cNvPr id="32" name="Connector 31"/>
-          <p:cNvCxnSpPr/>
-          <p:nvPr/>
-        </p:nvCxnSpPr>
-        <p:spPr>
-          <a:xfrm>
-            <a:off x="4983480.0" y="2068830.0"/>
-            <a:ext cx="22860.0" cy="22860.0"/>
-          </a:xfrm>
-          <a:prstGeom prst="line">
-            <a:avLst/>
-          </a:prstGeom>
-          <a:ln w="25400">
-            <a:solidFill>
-              <a:srgbClr val="00C8FF"/>
-            </a:solidFill>
-          </a:ln>
-        </p:spPr>
-        <p:style>
-          <a:lnRef idx="2">
-            <a:schemeClr val="accent1"/>
-          </a:lnRef>
-          <a:fillRef idx="0">
-            <a:schemeClr val="accent1"/>
-          </a:fillRef>
-          <a:effectRef idx="1">
-            <a:schemeClr val="accent1"/>
-          </a:effectRef>
-          <a:fontRef idx="minor">
-            <a:schemeClr val="tx1"/>
-          </a:fontRef>
-        </p:style>
-      </p:cxnSp>
-      <p:cxnSp>
-        <p:nvCxnSpPr>
-          <p:cNvPr id="33" name="Connector 32"/>
-          <p:cNvCxnSpPr/>
-          <p:nvPr/>
-        </p:nvCxnSpPr>
-        <p:spPr>
-          <a:xfrm flipV="1">
-            <a:off x="5029200.0" y="1634490.0"/>
-            <a:ext cx="22860.0" cy="22860.0"/>
-          </a:xfrm>
-          <a:prstGeom prst="line">
-            <a:avLst/>
-          </a:prstGeom>
-          <a:ln w="25400">
-            <a:solidFill>
-              <a:srgbClr val="00C8FF"/>
-            </a:solidFill>
-          </a:ln>
-        </p:spPr>
-        <p:style>
-          <a:lnRef idx="2">
-            <a:schemeClr val="accent1"/>
-          </a:lnRef>
-          <a:fillRef idx="0">
-            <a:schemeClr val="accent1"/>
-          </a:fillRef>
-          <a:effectRef idx="1">
-            <a:schemeClr val="accent1"/>
-          </a:effectRef>
-          <a:fontRef idx="minor">
-            <a:schemeClr val="tx1"/>
-          </a:fontRef>
-        </p:style>
-      </p:cxnSp>
-      <p:cxnSp>
-        <p:nvCxnSpPr>
-          <p:cNvPr id="34" name="Connector 33"/>
-          <p:cNvCxnSpPr/>
-          <p:nvPr/>
-        </p:nvCxnSpPr>
-        <p:spPr>
-          <a:xfrm flipV="1">
-            <a:off x="5052060.0" y="1611630.0"/>
-            <a:ext cx="22860.0" cy="22860.0"/>
-          </a:xfrm>
-          <a:prstGeom prst="line">
-            <a:avLst/>
-          </a:prstGeom>
-          <a:ln w="25400">
-            <a:solidFill>
-              <a:srgbClr val="00C8FF"/>
-            </a:solidFill>
-          </a:ln>
-        </p:spPr>
-        <p:style>
-          <a:lnRef idx="2">
-            <a:schemeClr val="accent1"/>
-          </a:lnRef>
-          <a:fillRef idx="0">
-            <a:schemeClr val="accent1"/>
-          </a:fillRef>
-          <a:effectRef idx="1">
-            <a:schemeClr val="accent1"/>
-          </a:effectRef>
-          <a:fontRef idx="minor">
-            <a:schemeClr val="tx1"/>
-          </a:fontRef>
-        </p:style>
-      </p:cxnSp>
-      <p:cxnSp>
-        <p:nvCxnSpPr>
-          <p:cNvPr id="35" name="Connector 34"/>
-          <p:cNvCxnSpPr/>
-          <p:nvPr/>
-        </p:nvCxnSpPr>
-        <p:spPr>
-          <a:xfrm flipV="1">
-            <a:off x="5074920.0" y="1588770.0"/>
-            <a:ext cx="22860.0" cy="22860.0"/>
-          </a:xfrm>
-          <a:prstGeom prst="line">
-            <a:avLst/>
-          </a:prstGeom>
-          <a:ln w="25400">
-            <a:solidFill>
-              <a:srgbClr val="00C8FF"/>
-            </a:solidFill>
-          </a:ln>
-        </p:spPr>
-        <p:style>
-          <a:lnRef idx="2">
-            <a:schemeClr val="accent1"/>
-          </a:lnRef>
-          <a:fillRef idx="0">
-            <a:schemeClr val="accent1"/>
-          </a:fillRef>
-          <a:effectRef idx="1">
-            <a:schemeClr val="accent1"/>
-          </a:effectRef>
-          <a:fontRef idx="minor">
-            <a:schemeClr val="tx1"/>
-          </a:fontRef>
-        </p:style>
-      </p:cxnSp>
-      <p:cxnSp>
-        <p:nvCxnSpPr>
-          <p:cNvPr id="36" name="Connector 35"/>
-          <p:cNvCxnSpPr/>
-          <p:nvPr/>
-        </p:nvCxnSpPr>
-        <p:spPr>
-          <a:xfrm flipV="1">
-            <a:off x="5097780.0" y="1565910.0"/>
-            <a:ext cx="22860.0" cy="22860.0"/>
-          </a:xfrm>
-          <a:prstGeom prst="line">
-            <a:avLst/>
-          </a:prstGeom>
-          <a:ln w="25400">
-            <a:solidFill>
-              <a:srgbClr val="00C8FF"/>
-            </a:solidFill>
-          </a:ln>
-        </p:spPr>
-        <p:style>
-          <a:lnRef idx="2">
-            <a:schemeClr val="accent1"/>
-          </a:lnRef>
-          <a:fillRef idx="0">
-            <a:schemeClr val="accent1"/>
-          </a:fillRef>
-          <a:effectRef idx="1">
-            <a:schemeClr val="accent1"/>
-          </a:effectRef>
-          <a:fontRef idx="minor">
-            <a:schemeClr val="tx1"/>
-          </a:fontRef>
-        </p:style>
-      </p:cxnSp>
-      <p:cxnSp>
-        <p:nvCxnSpPr>
-          <p:cNvPr id="37" name="Connector 36"/>
-          <p:cNvCxnSpPr/>
-          <p:nvPr/>
-        </p:nvCxnSpPr>
-        <p:spPr>
-          <a:xfrm flipV="1">
-            <a:off x="5120640.0" y="1543050.0"/>
-            <a:ext cx="22860.0" cy="22860.0"/>
-          </a:xfrm>
-          <a:prstGeom prst="line">
-            <a:avLst/>
-          </a:prstGeom>
-          <a:ln w="25400">
-            <a:solidFill>
-              <a:srgbClr val="00C8FF"/>
-            </a:solidFill>
-          </a:ln>
-        </p:spPr>
-        <p:style>
-          <a:lnRef idx="2">
-            <a:schemeClr val="accent1"/>
-          </a:lnRef>
-          <a:fillRef idx="0">
-            <a:schemeClr val="accent1"/>
-          </a:fillRef>
-          <a:effectRef idx="1">
-            <a:schemeClr val="accent1"/>
-          </a:effectRef>
-          <a:fontRef idx="minor">
-            <a:schemeClr val="tx1"/>
-          </a:fontRef>
-        </p:style>
-      </p:cxnSp>
-      <p:cxnSp>
-        <p:nvCxnSpPr>
-          <p:cNvPr id="38" name="Connector 37"/>
-          <p:cNvCxnSpPr/>
-          <p:nvPr/>
-        </p:nvCxnSpPr>
-        <p:spPr>
-          <a:xfrm flipV="1">
-            <a:off x="5143500.0" y="1520190.0"/>
-            <a:ext cx="22860.0" cy="22860.0"/>
-          </a:xfrm>
-          <a:prstGeom prst="line">
-            <a:avLst/>
-          </a:prstGeom>
-          <a:ln w="25400">
-            <a:solidFill>
-              <a:srgbClr val="00C8FF"/>
-            </a:solidFill>
-          </a:ln>
-        </p:spPr>
-        <p:style>
-          <a:lnRef idx="2">
-            <a:schemeClr val="accent1"/>
-          </a:lnRef>
-          <a:fillRef idx="0">
-            <a:schemeClr val="accent1"/>
-          </a:fillRef>
-          <a:effectRef idx="1">
-            <a:schemeClr val="accent1"/>
-          </a:effectRef>
-          <a:fontRef idx="minor">
-            <a:schemeClr val="tx1"/>
-          </a:fontRef>
-        </p:style>
-      </p:cxnSp>
-      <p:cxnSp>
-        <p:nvCxnSpPr>
-          <p:cNvPr id="39" name="Connector 38"/>
-          <p:cNvCxnSpPr/>
-          <p:nvPr/>
-        </p:nvCxnSpPr>
-        <p:spPr>
-          <a:xfrm flipV="1">
-            <a:off x="5166360.0" y="1497330.0"/>
-            <a:ext cx="22860.0" cy="22860.0"/>
-          </a:xfrm>
-          <a:prstGeom prst="line">
-            <a:avLst/>
-          </a:prstGeom>
-          <a:ln w="25400">
-            <a:solidFill>
-              <a:srgbClr val="00C8FF"/>
-            </a:solidFill>
-          </a:ln>
-        </p:spPr>
-        <p:style>
-          <a:lnRef idx="2">
-            <a:schemeClr val="accent1"/>
-          </a:lnRef>
-          <a:fillRef idx="0">
-            <a:schemeClr val="accent1"/>
-          </a:fillRef>
-          <a:effectRef idx="1">
-            <a:schemeClr val="accent1"/>
-          </a:effectRef>
-          <a:fontRef idx="minor">
-            <a:schemeClr val="tx1"/>
-          </a:fontRef>
-        </p:style>
-      </p:cxnSp>
-      <p:cxnSp>
-        <p:nvCxnSpPr>
-          <p:cNvPr id="40" name="Connector 39"/>
-          <p:cNvCxnSpPr/>
-          <p:nvPr/>
-        </p:nvCxnSpPr>
-        <p:spPr>
-          <a:xfrm flipV="1">
-            <a:off x="5189220.0" y="1474470.0"/>
-            <a:ext cx="22860.0" cy="22860.0"/>
-          </a:xfrm>
-          <a:prstGeom prst="line">
-            <a:avLst/>
-          </a:prstGeom>
-          <a:ln w="25400">
-            <a:solidFill>
-              <a:srgbClr val="00C8FF"/>
-            </a:solidFill>
-          </a:ln>
-        </p:spPr>
-        <p:style>
-          <a:lnRef idx="2">
-            <a:schemeClr val="accent1"/>
-          </a:lnRef>
-          <a:fillRef idx="0">
-            <a:schemeClr val="accent1"/>
-          </a:fillRef>
-          <a:effectRef idx="1">
-            <a:schemeClr val="accent1"/>
-          </a:effectRef>
-          <a:fontRef idx="minor">
-            <a:schemeClr val="tx1"/>
-          </a:fontRef>
-        </p:style>
-      </p:cxnSp>
-      <p:cxnSp>
-        <p:nvCxnSpPr>
-          <p:cNvPr id="41" name="Connector 40"/>
-          <p:cNvCxnSpPr/>
-          <p:nvPr/>
-        </p:nvCxnSpPr>
-        <p:spPr>
-          <a:xfrm flipV="1">
-            <a:off x="5212080.0" y="1451610.0"/>
-            <a:ext cx="22860.0" cy="22860.0"/>
-          </a:xfrm>
-          <a:prstGeom prst="line">
-            <a:avLst/>
-          </a:prstGeom>
-          <a:ln w="25400">
-            <a:solidFill>
-              <a:srgbClr val="00C8FF"/>
-            </a:solidFill>
-          </a:ln>
-        </p:spPr>
-        <p:style>
-          <a:lnRef idx="2">
-            <a:schemeClr val="accent1"/>
-          </a:lnRef>
-          <a:fillRef idx="0">
-            <a:schemeClr val="accent1"/>
-          </a:fillRef>
-          <a:effectRef idx="1">
-            <a:schemeClr val="accent1"/>
-          </a:effectRef>
-          <a:fontRef idx="minor">
-            <a:schemeClr val="tx1"/>
-          </a:fontRef>
-        </p:style>
-      </p:cxnSp>
-      <p:cxnSp>
-        <p:nvCxnSpPr>
-          <p:cNvPr id="42" name="Connector 41"/>
-          <p:cNvCxnSpPr/>
-          <p:nvPr/>
-        </p:nvCxnSpPr>
-        <p:spPr>
-          <a:xfrm flipV="1">
-            <a:off x="5234940.0" y="1428750.0"/>
-            <a:ext cx="22860.0" cy="22860.0"/>
-          </a:xfrm>
-          <a:prstGeom prst="line">
-            <a:avLst/>
-          </a:prstGeom>
-          <a:ln w="25400">
-            <a:solidFill>
-              <a:srgbClr val="00C8FF"/>
-            </a:solidFill>
-          </a:ln>
-        </p:spPr>
-        <p:style>
-          <a:lnRef idx="2">
-            <a:schemeClr val="accent1"/>
-          </a:lnRef>
-          <a:fillRef idx="0">
-            <a:schemeClr val="accent1"/>
-          </a:fillRef>
-          <a:effectRef idx="1">
-            <a:schemeClr val="accent1"/>
-          </a:effectRef>
-          <a:fontRef idx="minor">
-            <a:schemeClr val="tx1"/>
-          </a:fontRef>
-        </p:style>
-      </p:cxnSp>
-      <p:cxnSp>
-        <p:nvCxnSpPr>
-          <p:cNvPr id="43" name="Connector 42"/>
-          <p:cNvCxnSpPr/>
-          <p:nvPr/>
-        </p:nvCxnSpPr>
-        <p:spPr>
-          <a:xfrm flipV="1">
-            <a:off x="5257800.0" y="1405890.0"/>
-            <a:ext cx="22860.0" cy="22860.0"/>
-          </a:xfrm>
-          <a:prstGeom prst="line">
-            <a:avLst/>
-          </a:prstGeom>
-          <a:ln w="25400">
-            <a:solidFill>
-              <a:srgbClr val="00C8FF"/>
-            </a:solidFill>
-          </a:ln>
-        </p:spPr>
-        <p:style>
-          <a:lnRef idx="2">
-            <a:schemeClr val="accent1"/>
-          </a:lnRef>
-          <a:fillRef idx="0">
-            <a:schemeClr val="accent1"/>
-          </a:fillRef>
-          <a:effectRef idx="1">
-            <a:schemeClr val="accent1"/>
-          </a:effectRef>
-          <a:fontRef idx="minor">
-            <a:schemeClr val="tx1"/>
-          </a:fontRef>
-        </p:style>
-      </p:cxnSp>
-      <p:cxnSp>
-        <p:nvCxnSpPr>
-          <p:cNvPr id="44" name="Connector 43"/>
-          <p:cNvCxnSpPr/>
-          <p:nvPr/>
-        </p:nvCxnSpPr>
-        <p:spPr>
-          <a:xfrm flipV="1">
-            <a:off x="5280660.0" y="1383030.0"/>
-            <a:ext cx="22860.0" cy="22860.0"/>
-          </a:xfrm>
-          <a:prstGeom prst="line">
-            <a:avLst/>
-          </a:prstGeom>
-          <a:ln w="25400">
-            <a:solidFill>
-              <a:srgbClr val="00C8FF"/>
-            </a:solidFill>
-          </a:ln>
-        </p:spPr>
-        <p:style>
-          <a:lnRef idx="2">
-            <a:schemeClr val="accent1"/>
-          </a:lnRef>
-          <a:fillRef idx="0">
-            <a:schemeClr val="accent1"/>
-          </a:fillRef>
-          <a:effectRef idx="1">
-            <a:schemeClr val="accent1"/>
-          </a:effectRef>
-          <a:fontRef idx="minor">
-            <a:schemeClr val="tx1"/>
-          </a:fontRef>
-        </p:style>
-      </p:cxnSp>
-      <p:cxnSp>
-        <p:nvCxnSpPr>
-          <p:cNvPr id="45" name="Connector 44"/>
-          <p:cNvCxnSpPr/>
-          <p:nvPr/>
-        </p:nvCxnSpPr>
-        <p:spPr>
-          <a:xfrm flipV="1">
-            <a:off x="5303520.0" y="1360170.0"/>
-            <a:ext cx="22860.0" cy="22860.0"/>
-          </a:xfrm>
-          <a:prstGeom prst="line">
-            <a:avLst/>
-          </a:prstGeom>
-          <a:ln w="25400">
-            <a:solidFill>
-              <a:srgbClr val="00C8FF"/>
-            </a:solidFill>
-          </a:ln>
-        </p:spPr>
-        <p:style>
-          <a:lnRef idx="2">
-            <a:schemeClr val="accent1"/>
-          </a:lnRef>
-          <a:fillRef idx="0">
-            <a:schemeClr val="accent1"/>
-          </a:fillRef>
-          <a:effectRef idx="1">
-            <a:schemeClr val="accent1"/>
-          </a:effectRef>
-          <a:fontRef idx="minor">
-            <a:schemeClr val="tx1"/>
-          </a:fontRef>
-        </p:style>
-      </p:cxnSp>
-      <p:cxnSp>
-        <p:nvCxnSpPr>
-          <p:cNvPr id="46" name="Connector 45"/>
-          <p:cNvCxnSpPr/>
-          <p:nvPr/>
-        </p:nvCxnSpPr>
-        <p:spPr>
-          <a:xfrm flipV="1">
-            <a:off x="5326380.0" y="1337310.0"/>
-            <a:ext cx="22860.0" cy="22860.0"/>
-          </a:xfrm>
-          <a:prstGeom prst="line">
-            <a:avLst/>
-          </a:prstGeom>
-          <a:ln w="25400">
-            <a:solidFill>
-              <a:srgbClr val="00C8FF"/>
-            </a:solidFill>
-          </a:ln>
-        </p:spPr>
-        <p:style>
-          <a:lnRef idx="2">
-            <a:schemeClr val="accent1"/>
-          </a:lnRef>
-          <a:fillRef idx="0">
-            <a:schemeClr val="accent1"/>
-          </a:fillRef>
-          <a:effectRef idx="1">
-            <a:schemeClr val="accent1"/>
-          </a:effectRef>
-          <a:fontRef idx="minor">
-            <a:schemeClr val="tx1"/>
-          </a:fontRef>
-        </p:style>
-      </p:cxnSp>
-      <p:cxnSp>
-        <p:nvCxnSpPr>
-          <p:cNvPr id="47" name="Connector 46"/>
-          <p:cNvCxnSpPr/>
-          <p:nvPr/>
-        </p:nvCxnSpPr>
-        <p:spPr>
-          <a:xfrm flipV="1">
-            <a:off x="5349240.0" y="1314450.0"/>
-            <a:ext cx="22860.0" cy="22860.0"/>
-          </a:xfrm>
-          <a:prstGeom prst="line">
-            <a:avLst/>
-          </a:prstGeom>
-          <a:ln w="25400">
-            <a:solidFill>
-              <a:srgbClr val="00C8FF"/>
-            </a:solidFill>
-          </a:ln>
-        </p:spPr>
-        <p:style>
-          <a:lnRef idx="2">
-            <a:schemeClr val="accent1"/>
-          </a:lnRef>
-          <a:fillRef idx="0">
-            <a:schemeClr val="accent1"/>
-          </a:fillRef>
-          <a:effectRef idx="1">
-            <a:schemeClr val="accent1"/>
-          </a:effectRef>
-          <a:fontRef idx="minor">
-            <a:schemeClr val="tx1"/>
-          </a:fontRef>
-        </p:style>
-      </p:cxnSp>
-      <p:cxnSp>
-        <p:nvCxnSpPr>
-          <p:cNvPr id="48" name="Connector 47"/>
-          <p:cNvCxnSpPr/>
-          <p:nvPr/>
-        </p:nvCxnSpPr>
-        <p:spPr>
-          <a:xfrm flipV="1">
-            <a:off x="5372100.0" y="1291590.0"/>
-            <a:ext cx="22860.0" cy="22860.0"/>
-          </a:xfrm>
-          <a:prstGeom prst="line">
-            <a:avLst/>
-          </a:prstGeom>
-          <a:ln w="25400">
-            <a:solidFill>
-              <a:srgbClr val="00C8FF"/>
-            </a:solidFill>
-          </a:ln>
-        </p:spPr>
-        <p:style>
-          <a:lnRef idx="2">
-            <a:schemeClr val="accent1"/>
-          </a:lnRef>
-          <a:fillRef idx="0">
-            <a:schemeClr val="accent1"/>
-          </a:fillRef>
-          <a:effectRef idx="1">
-            <a:schemeClr val="accent1"/>
-          </a:effectRef>
-          <a:fontRef idx="minor">
-            <a:schemeClr val="tx1"/>
-          </a:fontRef>
-        </p:style>
-      </p:cxnSp>
-      <p:cxnSp>
-        <p:nvCxnSpPr>
-          <p:cNvPr id="49" name="Connector 48"/>
-          <p:cNvCxnSpPr/>
-          <p:nvPr/>
-        </p:nvCxnSpPr>
-        <p:spPr>
-          <a:xfrm flipV="1">
-            <a:off x="5394960.0" y="1268730.0"/>
-            <a:ext cx="22860.0" cy="22860.0"/>
-          </a:xfrm>
-          <a:prstGeom prst="line">
-            <a:avLst/>
-          </a:prstGeom>
-          <a:ln w="25400">
-            <a:solidFill>
-              <a:srgbClr val="00C8FF"/>
-            </a:solidFill>
-          </a:ln>
-        </p:spPr>
-        <p:style>
-          <a:lnRef idx="2">
-            <a:schemeClr val="accent1"/>
-          </a:lnRef>
-          <a:fillRef idx="0">
-            <a:schemeClr val="accent1"/>
-          </a:fillRef>
-          <a:effectRef idx="1">
-            <a:schemeClr val="accent1"/>
-          </a:effectRef>
-          <a:fontRef idx="minor">
-            <a:schemeClr val="tx1"/>
-          </a:fontRef>
-        </p:style>
-      </p:cxnSp>
-      <p:cxnSp>
-        <p:nvCxnSpPr>
-          <p:cNvPr id="50" name="Connector 49"/>
-          <p:cNvCxnSpPr/>
-          <p:nvPr/>
-        </p:nvCxnSpPr>
-        <p:spPr>
-          <a:xfrm flipV="1">
-            <a:off x="5417820.0" y="1245870.0"/>
-            <a:ext cx="22860.0" cy="22860.0"/>
-          </a:xfrm>
-          <a:prstGeom prst="line">
-            <a:avLst/>
-          </a:prstGeom>
-          <a:ln w="25400">
-            <a:solidFill>
-              <a:srgbClr val="00C8FF"/>
-            </a:solidFill>
-          </a:ln>
-        </p:spPr>
-        <p:style>
-          <a:lnRef idx="2">
-            <a:schemeClr val="accent1"/>
-          </a:lnRef>
-          <a:fillRef idx="0">
-            <a:schemeClr val="accent1"/>
-          </a:fillRef>
-          <a:effectRef idx="1">
-            <a:schemeClr val="accent1"/>
-          </a:effectRef>
-          <a:fontRef idx="minor">
-            <a:schemeClr val="tx1"/>
-          </a:fontRef>
-        </p:style>
-      </p:cxnSp>
-      <p:cxnSp>
-        <p:nvCxnSpPr>
-          <p:cNvPr id="51" name="Connector 50"/>
-          <p:cNvCxnSpPr/>
-          <p:nvPr/>
-        </p:nvCxnSpPr>
-        <p:spPr>
-          <a:xfrm flipV="1">
-            <a:off x="5440680.0" y="1223010.0"/>
-            <a:ext cx="22860.0" cy="22860.0"/>
-          </a:xfrm>
-          <a:prstGeom prst="line">
-            <a:avLst/>
-          </a:prstGeom>
-          <a:ln w="25400">
-            <a:solidFill>
-              <a:srgbClr val="00C8FF"/>
-            </a:solidFill>
-          </a:ln>
-        </p:spPr>
-        <p:style>
-          <a:lnRef idx="2">
-            <a:schemeClr val="accent1"/>
-          </a:lnRef>
-          <a:fillRef idx="0">
-            <a:schemeClr val="accent1"/>
-          </a:fillRef>
-          <a:effectRef idx="1">
-            <a:schemeClr val="accent1"/>
-          </a:effectRef>
-          <a:fontRef idx="minor">
-            <a:schemeClr val="tx1"/>
-          </a:fontRef>
-        </p:style>
-      </p:cxnSp>
-      <p:cxnSp>
-        <p:nvCxnSpPr>
-          <p:cNvPr id="52" name="Connector 51"/>
-          <p:cNvCxnSpPr/>
-          <p:nvPr/>
-        </p:nvCxnSpPr>
-        <p:spPr>
-          <a:xfrm flipV="1">
-            <a:off x="5463540.0" y="1200150.0"/>
-            <a:ext cx="22860.0" cy="22860.0"/>
-          </a:xfrm>
-          <a:prstGeom prst="line">
-            <a:avLst/>
-          </a:prstGeom>
-          <a:ln w="25400">
-            <a:solidFill>
-              <a:srgbClr val="00C8FF"/>
-            </a:solidFill>
-          </a:ln>
-        </p:spPr>
-        <p:style>
-          <a:lnRef idx="2">
-            <a:schemeClr val="accent1"/>
-          </a:lnRef>
-          <a:fillRef idx="0">
-            <a:schemeClr val="accent1"/>
-          </a:fillRef>
-          <a:effectRef idx="1">
-            <a:schemeClr val="accent1"/>
-          </a:effectRef>
-          <a:fontRef idx="minor">
-            <a:schemeClr val="tx1"/>
-          </a:fontRef>
-        </p:style>
-      </p:cxnSp>
-      <p:cxnSp>
-        <p:nvCxnSpPr>
-          <p:cNvPr id="53" name="Connector 52"/>
-          <p:cNvCxnSpPr/>
-          <p:nvPr/>
-        </p:nvCxnSpPr>
-        <p:spPr>
-          <a:xfrm flipV="1">
-            <a:off x="5486400.0" y="1177290.0"/>
-            <a:ext cx="22860.0" cy="22860.0"/>
-          </a:xfrm>
-          <a:prstGeom prst="line">
-            <a:avLst/>
-          </a:prstGeom>
-          <a:ln w="25400">
-            <a:solidFill>
-              <a:srgbClr val="00C8FF"/>
-            </a:solidFill>
-          </a:ln>
-        </p:spPr>
-        <p:style>
-          <a:lnRef idx="2">
-            <a:schemeClr val="accent1"/>
-          </a:lnRef>
-          <a:fillRef idx="0">
-            <a:schemeClr val="accent1"/>
-          </a:fillRef>
-          <a:effectRef idx="1">
-            <a:schemeClr val="accent1"/>
-          </a:effectRef>
-          <a:fontRef idx="minor">
-            <a:schemeClr val="tx1"/>
-          </a:fontRef>
-        </p:style>
-      </p:cxnSp>
-      <p:cxnSp>
-        <p:nvCxnSpPr>
-          <p:cNvPr id="54" name="Connector 53"/>
-          <p:cNvCxnSpPr/>
-          <p:nvPr/>
-        </p:nvCxnSpPr>
-        <p:spPr>
-          <a:xfrm flipV="1">
-            <a:off x="5509260.0" y="1154430.0"/>
-            <a:ext cx="22860.0" cy="22860.0"/>
-          </a:xfrm>
-          <a:prstGeom prst="line">
-            <a:avLst/>
-          </a:prstGeom>
-          <a:ln w="25400">
-            <a:solidFill>
-              <a:srgbClr val="00C8FF"/>
-            </a:solidFill>
-          </a:ln>
-        </p:spPr>
-        <p:style>
-          <a:lnRef idx="2">
-            <a:schemeClr val="accent1"/>
-          </a:lnRef>
-          <a:fillRef idx="0">
-            <a:schemeClr val="accent1"/>
-          </a:fillRef>
-          <a:effectRef idx="1">
-            <a:schemeClr val="accent1"/>
-          </a:effectRef>
-          <a:fontRef idx="minor">
-            <a:schemeClr val="tx1"/>
-          </a:fontRef>
-        </p:style>
-      </p:cxnSp>
-      <p:cxnSp>
-        <p:nvCxnSpPr>
-          <p:cNvPr id="55" name="Connector 54"/>
-          <p:cNvCxnSpPr/>
-          <p:nvPr/>
-        </p:nvCxnSpPr>
-        <p:spPr>
-          <a:xfrm flipV="1">
-            <a:off x="5532120.0" y="1131570.0"/>
-            <a:ext cx="22860.0" cy="22860.0"/>
-          </a:xfrm>
-          <a:prstGeom prst="line">
-            <a:avLst/>
-          </a:prstGeom>
-          <a:ln w="25400">
-            <a:solidFill>
-              <a:srgbClr val="00C8FF"/>
-            </a:solidFill>
-          </a:ln>
-        </p:spPr>
-        <p:style>
-          <a:lnRef idx="2">
-            <a:schemeClr val="accent1"/>
-          </a:lnRef>
-          <a:fillRef idx="0">
-            <a:schemeClr val="accent1"/>
-          </a:fillRef>
-          <a:effectRef idx="1">
-            <a:schemeClr val="accent1"/>
-          </a:effectRef>
-          <a:fontRef idx="minor">
-            <a:schemeClr val="tx1"/>
-          </a:fontRef>
-        </p:style>
-      </p:cxnSp>
-      <p:cxnSp>
-        <p:nvCxnSpPr>
-          <p:cNvPr id="56" name="Connector 55"/>
-          <p:cNvCxnSpPr/>
-          <p:nvPr/>
-        </p:nvCxnSpPr>
-        <p:spPr>
-          <a:xfrm flipV="1">
-            <a:off x="5554980.0" y="1108710.0"/>
-            <a:ext cx="22860.0" cy="22860.0"/>
-          </a:xfrm>
-          <a:prstGeom prst="line">
-            <a:avLst/>
-          </a:prstGeom>
-          <a:ln w="25400">
-            <a:solidFill>
-              <a:srgbClr val="00C8FF"/>
-            </a:solidFill>
-          </a:ln>
-        </p:spPr>
-        <p:style>
-          <a:lnRef idx="2">
-            <a:schemeClr val="accent1"/>
-          </a:lnRef>
-          <a:fillRef idx="0">
-            <a:schemeClr val="accent1"/>
-          </a:fillRef>
-          <a:effectRef idx="1">
-            <a:schemeClr val="accent1"/>
-          </a:effectRef>
-          <a:fontRef idx="minor">
-            <a:schemeClr val="tx1"/>
-          </a:fontRef>
-        </p:style>
-      </p:cxnSp>
-      <p:cxnSp>
-        <p:nvCxnSpPr>
-          <p:cNvPr id="57" name="Connector 56"/>
-          <p:cNvCxnSpPr/>
-          <p:nvPr/>
-        </p:nvCxnSpPr>
-        <p:spPr>
-          <a:xfrm flipV="1">
-            <a:off x="5577840.0" y="1085850.0"/>
-            <a:ext cx="22860.0" cy="22860.0"/>
-          </a:xfrm>
-          <a:prstGeom prst="line">
-            <a:avLst/>
-          </a:prstGeom>
-          <a:ln w="25400">
-            <a:solidFill>
-              <a:srgbClr val="00C8FF"/>
-            </a:solidFill>
-          </a:ln>
-        </p:spPr>
-        <p:style>
-          <a:lnRef idx="2">
-            <a:schemeClr val="accent1"/>
-          </a:lnRef>
-          <a:fillRef idx="0">
-            <a:schemeClr val="accent1"/>
-          </a:fillRef>
-          <a:effectRef idx="1">
-            <a:schemeClr val="accent1"/>
-          </a:effectRef>
-          <a:fontRef idx="minor">
-            <a:schemeClr val="tx1"/>
-          </a:fontRef>
-        </p:style>
-      </p:cxnSp>
-      <p:cxnSp>
-        <p:nvCxnSpPr>
-          <p:cNvPr id="58" name="Connector 57"/>
-          <p:cNvCxnSpPr/>
-          <p:nvPr/>
-        </p:nvCxnSpPr>
-        <p:spPr>
-          <a:xfrm flipV="1">
-            <a:off x="5600700.0" y="1062990.0"/>
-            <a:ext cx="22860.0" cy="22860.0"/>
-          </a:xfrm>
-          <a:prstGeom prst="line">
-            <a:avLst/>
-          </a:prstGeom>
-          <a:ln w="25400">
-            <a:solidFill>
-              <a:srgbClr val="00C8FF"/>
-            </a:solidFill>
-          </a:ln>
-        </p:spPr>
-        <p:style>
-          <a:lnRef idx="2">
-            <a:schemeClr val="accent1"/>
-          </a:lnRef>
-          <a:fillRef idx="0">
-            <a:schemeClr val="accent1"/>
-          </a:fillRef>
-          <a:effectRef idx="1">
-            <a:schemeClr val="accent1"/>
-          </a:effectRef>
-          <a:fontRef idx="minor">
-            <a:schemeClr val="tx1"/>
-          </a:fontRef>
-        </p:style>
-      </p:cxnSp>
-      <p:cxnSp>
-        <p:nvCxnSpPr>
-          <p:cNvPr id="59" name="Connector 58"/>
-          <p:cNvCxnSpPr/>
-          <p:nvPr/>
-        </p:nvCxnSpPr>
-        <p:spPr>
-          <a:xfrm flipV="1">
-            <a:off x="5623560.0" y="1040130.0"/>
-            <a:ext cx="22860.0" cy="22860.0"/>
-          </a:xfrm>
-          <a:prstGeom prst="line">
-            <a:avLst/>
-          </a:prstGeom>
-          <a:ln w="25400">
-            <a:solidFill>
-              <a:srgbClr val="00C8FF"/>
-            </a:solidFill>
-          </a:ln>
-        </p:spPr>
-        <p:style>
-          <a:lnRef idx="2">
-            <a:schemeClr val="accent1"/>
-          </a:lnRef>
-          <a:fillRef idx="0">
-            <a:schemeClr val="accent1"/>
-          </a:fillRef>
-          <a:effectRef idx="1">
-            <a:schemeClr val="accent1"/>
-          </a:effectRef>
-          <a:fontRef idx="minor">
-            <a:schemeClr val="tx1"/>
-          </a:fontRef>
-        </p:style>
-      </p:cxnSp>
-      <p:cxnSp>
-        <p:nvCxnSpPr>
-          <p:cNvPr id="60" name="Connector 59"/>
-          <p:cNvCxnSpPr/>
-          <p:nvPr/>
-        </p:nvCxnSpPr>
-        <p:spPr>
-          <a:xfrm flipV="1">
-            <a:off x="5646420.0" y="1017270.0"/>
-            <a:ext cx="22860.0" cy="22860.0"/>
-          </a:xfrm>
-          <a:prstGeom prst="line">
-            <a:avLst/>
-          </a:prstGeom>
-          <a:ln w="25400">
-            <a:solidFill>
-              <a:srgbClr val="00C8FF"/>
-            </a:solidFill>
-          </a:ln>
-        </p:spPr>
-        <p:style>
-          <a:lnRef idx="2">
-            <a:schemeClr val="accent1"/>
-          </a:lnRef>
-          <a:fillRef idx="0">
-            <a:schemeClr val="accent1"/>
-          </a:fillRef>
-          <a:effectRef idx="1">
-            <a:schemeClr val="accent1"/>
-          </a:effectRef>
-          <a:fontRef idx="minor">
-            <a:schemeClr val="tx1"/>
-          </a:fontRef>
-        </p:style>
-      </p:cxnSp>
-      <p:cxnSp>
-        <p:nvCxnSpPr>
-          <p:cNvPr id="61" name="Connector 60"/>
-          <p:cNvCxnSpPr/>
-          <p:nvPr/>
-        </p:nvCxnSpPr>
-        <p:spPr>
-          <a:xfrm flipV="1">
-            <a:off x="5669280.0" y="994410.0"/>
-            <a:ext cx="22860.0" cy="22860.0"/>
-          </a:xfrm>
-          <a:prstGeom prst="line">
-            <a:avLst/>
-          </a:prstGeom>
-          <a:ln w="25400">
-            <a:solidFill>
-              <a:srgbClr val="00C8FF"/>
-            </a:solidFill>
-          </a:ln>
-        </p:spPr>
-        <p:style>
-          <a:lnRef idx="2">
-            <a:schemeClr val="accent1"/>
-          </a:lnRef>
-          <a:fillRef idx="0">
-            <a:schemeClr val="accent1"/>
-          </a:fillRef>
-          <a:effectRef idx="1">
-            <a:schemeClr val="accent1"/>
-          </a:effectRef>
-          <a:fontRef idx="minor">
-            <a:schemeClr val="tx1"/>
-          </a:fontRef>
-        </p:style>
-      </p:cxnSp>
-      <p:sp>
-        <p:nvSpPr>
-          <p:cNvPr id="62" name="Oval 61"/>
-          <p:cNvSpPr/>
-          <p:nvPr/>
-        </p:nvSpPr>
-        <p:spPr>
-          <a:xfrm>
-            <a:off x="4991100" y="2076450"/>
-            <a:ext cx="76200" cy="76200"/>
+            <a:off x="4978400" y="2063750"/>
+            <a:ext cx="101600" cy="101600"/>
           </a:xfrm>
           <a:prstGeom prst="ellipse">
             <a:avLst/>
           </a:prstGeom>
-          <a:noFill/>
-          <a:ln>
+          <a:solidFill>
+            <a:srgbClr val="0A0A0A"/>
+          </a:solidFill>
+          <a:ln w="12700">
             <a:solidFill>
               <a:srgbClr val="FFFFFF"/>
             </a:solidFill>
@@ -5241,14 +4570,14 @@
       </p:sp>
       <p:sp>
         <p:nvSpPr>
-          <p:cNvPr id="63" name="Oval 62"/>
+          <p:cNvPr id="9" name="Oval 8"/>
           <p:cNvSpPr/>
           <p:nvPr/>
         </p:nvSpPr>
         <p:spPr>
           <a:xfrm>
-            <a:off x="4991100" y="1619250"/>
-            <a:ext cx="76200" cy="76200"/>
+            <a:off x="4978400" y="1606550"/>
+            <a:ext cx="101600" cy="101600"/>
           </a:xfrm>
           <a:prstGeom prst="ellipse">
             <a:avLst/>
@@ -5256,7 +4585,7 @@
           <a:solidFill>
             <a:srgbClr val="FFFFFF"/>
           </a:solidFill>
-          <a:ln>
+          <a:ln w="12700">
             <a:solidFill>
               <a:srgbClr val="FFFFFF"/>
             </a:solidFill>
@@ -5286,14 +4615,912 @@
       </p:sp>
       <p:sp>
         <p:nvSpPr>
-          <p:cNvPr id="64" name="TextBox 63"/>
+          <p:cNvPr id="10" name="Freeform 9"/>
+          <p:cNvSpPr/>
+          <p:nvPr/>
+        </p:nvSpPr>
+        <p:spPr>
+          <a:xfrm>
+            <a:off x="4846320" y="1931670"/>
+            <a:ext cx="91440" cy="91440"/>
+          </a:xfrm>
+          <a:custGeom>
+            <a:avLst/>
+            <a:gdLst/>
+            <a:ahLst/>
+            <a:cxnLst/>
+            <a:rect l="l" t="t" r="r" b="b"/>
+            <a:pathLst>
+              <a:path w="91440" h="91440">
+                <a:moveTo>
+                  <a:pt x="0" y="0"/>
+                </a:moveTo>
+                <a:lnTo>
+                  <a:pt x="924" y="924"/>
+                </a:lnTo>
+                <a:close/>
+                <a:lnTo>
+                  <a:pt x="1847" y="1847"/>
+                </a:lnTo>
+                <a:close/>
+                <a:lnTo>
+                  <a:pt x="2771" y="2771"/>
+                </a:lnTo>
+                <a:close/>
+                <a:lnTo>
+                  <a:pt x="3695" y="3695"/>
+                </a:lnTo>
+                <a:close/>
+                <a:lnTo>
+                  <a:pt x="4618" y="4618"/>
+                </a:lnTo>
+                <a:close/>
+                <a:lnTo>
+                  <a:pt x="5542" y="5542"/>
+                </a:lnTo>
+                <a:close/>
+                <a:lnTo>
+                  <a:pt x="6465" y="6465"/>
+                </a:lnTo>
+                <a:close/>
+                <a:lnTo>
+                  <a:pt x="7389" y="7389"/>
+                </a:lnTo>
+                <a:close/>
+                <a:lnTo>
+                  <a:pt x="8313" y="8313"/>
+                </a:lnTo>
+                <a:close/>
+                <a:lnTo>
+                  <a:pt x="9236" y="9236"/>
+                </a:lnTo>
+                <a:close/>
+                <a:lnTo>
+                  <a:pt x="10160" y="10160"/>
+                </a:lnTo>
+                <a:close/>
+                <a:lnTo>
+                  <a:pt x="11084" y="11084"/>
+                </a:lnTo>
+                <a:close/>
+                <a:lnTo>
+                  <a:pt x="12007" y="12007"/>
+                </a:lnTo>
+                <a:close/>
+                <a:lnTo>
+                  <a:pt x="12931" y="12931"/>
+                </a:lnTo>
+                <a:close/>
+                <a:lnTo>
+                  <a:pt x="13855" y="13855"/>
+                </a:lnTo>
+                <a:close/>
+                <a:lnTo>
+                  <a:pt x="14778" y="14778"/>
+                </a:lnTo>
+                <a:close/>
+                <a:lnTo>
+                  <a:pt x="15702" y="15702"/>
+                </a:lnTo>
+                <a:close/>
+                <a:lnTo>
+                  <a:pt x="16625" y="16625"/>
+                </a:lnTo>
+                <a:close/>
+                <a:lnTo>
+                  <a:pt x="17549" y="17549"/>
+                </a:lnTo>
+                <a:close/>
+                <a:lnTo>
+                  <a:pt x="18473" y="18473"/>
+                </a:lnTo>
+                <a:close/>
+                <a:lnTo>
+                  <a:pt x="19396" y="19396"/>
+                </a:lnTo>
+                <a:close/>
+                <a:lnTo>
+                  <a:pt x="20320" y="20320"/>
+                </a:lnTo>
+                <a:close/>
+                <a:lnTo>
+                  <a:pt x="21244" y="21244"/>
+                </a:lnTo>
+                <a:close/>
+                <a:lnTo>
+                  <a:pt x="22167" y="22167"/>
+                </a:lnTo>
+                <a:close/>
+                <a:lnTo>
+                  <a:pt x="23091" y="23091"/>
+                </a:lnTo>
+                <a:close/>
+                <a:lnTo>
+                  <a:pt x="24015" y="24015"/>
+                </a:lnTo>
+                <a:close/>
+                <a:lnTo>
+                  <a:pt x="24938" y="24938"/>
+                </a:lnTo>
+                <a:close/>
+                <a:lnTo>
+                  <a:pt x="25862" y="25862"/>
+                </a:lnTo>
+                <a:close/>
+                <a:lnTo>
+                  <a:pt x="26785" y="26785"/>
+                </a:lnTo>
+                <a:close/>
+                <a:lnTo>
+                  <a:pt x="27709" y="27709"/>
+                </a:lnTo>
+                <a:close/>
+                <a:lnTo>
+                  <a:pt x="28633" y="28633"/>
+                </a:lnTo>
+                <a:close/>
+                <a:lnTo>
+                  <a:pt x="29556" y="29556"/>
+                </a:lnTo>
+                <a:close/>
+                <a:lnTo>
+                  <a:pt x="30480" y="30480"/>
+                </a:lnTo>
+                <a:close/>
+                <a:lnTo>
+                  <a:pt x="31404" y="31404"/>
+                </a:lnTo>
+                <a:close/>
+                <a:lnTo>
+                  <a:pt x="32327" y="32327"/>
+                </a:lnTo>
+                <a:close/>
+                <a:lnTo>
+                  <a:pt x="33251" y="33251"/>
+                </a:lnTo>
+                <a:close/>
+                <a:lnTo>
+                  <a:pt x="34175" y="34175"/>
+                </a:lnTo>
+                <a:close/>
+                <a:lnTo>
+                  <a:pt x="35098" y="35098"/>
+                </a:lnTo>
+                <a:close/>
+                <a:lnTo>
+                  <a:pt x="36022" y="36022"/>
+                </a:lnTo>
+                <a:close/>
+                <a:lnTo>
+                  <a:pt x="36945" y="36945"/>
+                </a:lnTo>
+                <a:close/>
+                <a:lnTo>
+                  <a:pt x="37869" y="37869"/>
+                </a:lnTo>
+                <a:close/>
+                <a:lnTo>
+                  <a:pt x="38793" y="38793"/>
+                </a:lnTo>
+                <a:close/>
+                <a:lnTo>
+                  <a:pt x="39716" y="39716"/>
+                </a:lnTo>
+                <a:close/>
+                <a:lnTo>
+                  <a:pt x="40640" y="40640"/>
+                </a:lnTo>
+                <a:close/>
+                <a:lnTo>
+                  <a:pt x="41564" y="41564"/>
+                </a:lnTo>
+                <a:close/>
+                <a:lnTo>
+                  <a:pt x="42487" y="42487"/>
+                </a:lnTo>
+                <a:close/>
+                <a:lnTo>
+                  <a:pt x="43411" y="43411"/>
+                </a:lnTo>
+                <a:close/>
+                <a:lnTo>
+                  <a:pt x="44335" y="44335"/>
+                </a:lnTo>
+                <a:close/>
+                <a:lnTo>
+                  <a:pt x="45258" y="45258"/>
+                </a:lnTo>
+                <a:close/>
+                <a:lnTo>
+                  <a:pt x="46182" y="46182"/>
+                </a:lnTo>
+                <a:close/>
+                <a:lnTo>
+                  <a:pt x="47105" y="47105"/>
+                </a:lnTo>
+                <a:close/>
+                <a:lnTo>
+                  <a:pt x="48029" y="48029"/>
+                </a:lnTo>
+                <a:close/>
+                <a:lnTo>
+                  <a:pt x="48953" y="48953"/>
+                </a:lnTo>
+                <a:close/>
+                <a:lnTo>
+                  <a:pt x="49876" y="49876"/>
+                </a:lnTo>
+                <a:close/>
+                <a:lnTo>
+                  <a:pt x="50800" y="50800"/>
+                </a:lnTo>
+                <a:close/>
+                <a:lnTo>
+                  <a:pt x="51724" y="51724"/>
+                </a:lnTo>
+                <a:close/>
+                <a:lnTo>
+                  <a:pt x="52647" y="52647"/>
+                </a:lnTo>
+                <a:close/>
+                <a:lnTo>
+                  <a:pt x="53571" y="53571"/>
+                </a:lnTo>
+                <a:close/>
+                <a:lnTo>
+                  <a:pt x="54495" y="54495"/>
+                </a:lnTo>
+                <a:close/>
+                <a:lnTo>
+                  <a:pt x="55418" y="55418"/>
+                </a:lnTo>
+                <a:close/>
+                <a:lnTo>
+                  <a:pt x="56342" y="56342"/>
+                </a:lnTo>
+                <a:close/>
+                <a:lnTo>
+                  <a:pt x="57265" y="57265"/>
+                </a:lnTo>
+                <a:close/>
+                <a:lnTo>
+                  <a:pt x="58189" y="58189"/>
+                </a:lnTo>
+                <a:close/>
+                <a:lnTo>
+                  <a:pt x="59113" y="59113"/>
+                </a:lnTo>
+                <a:close/>
+                <a:lnTo>
+                  <a:pt x="60036" y="60036"/>
+                </a:lnTo>
+                <a:close/>
+                <a:lnTo>
+                  <a:pt x="60960" y="60960"/>
+                </a:lnTo>
+                <a:close/>
+                <a:lnTo>
+                  <a:pt x="61884" y="61884"/>
+                </a:lnTo>
+                <a:close/>
+                <a:lnTo>
+                  <a:pt x="62807" y="62807"/>
+                </a:lnTo>
+                <a:close/>
+                <a:lnTo>
+                  <a:pt x="63731" y="63731"/>
+                </a:lnTo>
+                <a:close/>
+                <a:lnTo>
+                  <a:pt x="64655" y="64655"/>
+                </a:lnTo>
+                <a:close/>
+                <a:lnTo>
+                  <a:pt x="65578" y="65578"/>
+                </a:lnTo>
+                <a:close/>
+                <a:lnTo>
+                  <a:pt x="66502" y="66502"/>
+                </a:lnTo>
+                <a:close/>
+                <a:lnTo>
+                  <a:pt x="67425" y="67425"/>
+                </a:lnTo>
+                <a:close/>
+                <a:lnTo>
+                  <a:pt x="68349" y="68349"/>
+                </a:lnTo>
+                <a:close/>
+                <a:lnTo>
+                  <a:pt x="69273" y="69273"/>
+                </a:lnTo>
+                <a:close/>
+                <a:lnTo>
+                  <a:pt x="70196" y="70196"/>
+                </a:lnTo>
+                <a:close/>
+                <a:lnTo>
+                  <a:pt x="71120" y="71120"/>
+                </a:lnTo>
+                <a:close/>
+                <a:lnTo>
+                  <a:pt x="72044" y="72044"/>
+                </a:lnTo>
+                <a:close/>
+                <a:lnTo>
+                  <a:pt x="72967" y="72967"/>
+                </a:lnTo>
+                <a:close/>
+                <a:lnTo>
+                  <a:pt x="73891" y="73891"/>
+                </a:lnTo>
+                <a:close/>
+                <a:lnTo>
+                  <a:pt x="74815" y="74815"/>
+                </a:lnTo>
+                <a:close/>
+                <a:lnTo>
+                  <a:pt x="75738" y="75738"/>
+                </a:lnTo>
+                <a:close/>
+                <a:lnTo>
+                  <a:pt x="76662" y="76662"/>
+                </a:lnTo>
+                <a:close/>
+                <a:lnTo>
+                  <a:pt x="77585" y="77585"/>
+                </a:lnTo>
+                <a:close/>
+                <a:lnTo>
+                  <a:pt x="78509" y="78509"/>
+                </a:lnTo>
+                <a:close/>
+                <a:lnTo>
+                  <a:pt x="79433" y="79433"/>
+                </a:lnTo>
+                <a:close/>
+                <a:lnTo>
+                  <a:pt x="80356" y="80356"/>
+                </a:lnTo>
+                <a:close/>
+                <a:lnTo>
+                  <a:pt x="81280" y="81280"/>
+                </a:lnTo>
+                <a:close/>
+                <a:lnTo>
+                  <a:pt x="82204" y="82204"/>
+                </a:lnTo>
+                <a:close/>
+                <a:lnTo>
+                  <a:pt x="83127" y="83127"/>
+                </a:lnTo>
+                <a:close/>
+                <a:lnTo>
+                  <a:pt x="84051" y="84051"/>
+                </a:lnTo>
+                <a:close/>
+                <a:lnTo>
+                  <a:pt x="84975" y="84975"/>
+                </a:lnTo>
+                <a:close/>
+                <a:lnTo>
+                  <a:pt x="85898" y="85898"/>
+                </a:lnTo>
+                <a:close/>
+                <a:lnTo>
+                  <a:pt x="86822" y="86822"/>
+                </a:lnTo>
+                <a:close/>
+                <a:lnTo>
+                  <a:pt x="87745" y="87745"/>
+                </a:lnTo>
+                <a:close/>
+                <a:lnTo>
+                  <a:pt x="88669" y="88669"/>
+                </a:lnTo>
+                <a:close/>
+                <a:lnTo>
+                  <a:pt x="89593" y="89593"/>
+                </a:lnTo>
+                <a:close/>
+                <a:lnTo>
+                  <a:pt x="90516" y="90516"/>
+                </a:lnTo>
+                <a:close/>
+                <a:lnTo>
+                  <a:pt x="91440" y="91440"/>
+                </a:lnTo>
+                <a:close/>
+              </a:path>
+            </a:pathLst>
+          </a:custGeom>
+          <a:ln w="19050">
+            <a:solidFill>
+              <a:srgbClr val="B4B4B4"/>
+            </a:solidFill>
+          </a:ln>
+        </p:spPr>
+        <p:style>
+          <a:lnRef idx="1">
+            <a:schemeClr val="accent1"/>
+          </a:lnRef>
+          <a:fillRef idx="3">
+            <a:schemeClr val="accent1"/>
+          </a:fillRef>
+          <a:effectRef idx="2">
+            <a:schemeClr val="accent1"/>
+          </a:effectRef>
+          <a:fontRef idx="minor">
+            <a:schemeClr val="lt1"/>
+          </a:fontRef>
+        </p:style>
+        <p:txBody>
+          <a:bodyPr rtlCol="0" anchor="ctr"/>
+          <a:lstStyle/>
+          <a:p>
+            <a:pPr algn="ctr"/>
+          </a:p>
+        </p:txBody>
+      </p:sp>
+      <p:sp>
+        <p:nvSpPr>
+          <p:cNvPr id="11" name="Freeform 10"/>
+          <p:cNvSpPr/>
+          <p:nvPr/>
+        </p:nvSpPr>
+        <p:spPr>
+          <a:xfrm>
+            <a:off x="5166360" y="1291590"/>
+            <a:ext cx="228600" cy="228600"/>
+          </a:xfrm>
+          <a:custGeom>
+            <a:avLst/>
+            <a:gdLst/>
+            <a:ahLst/>
+            <a:cxnLst/>
+            <a:rect l="l" t="t" r="r" b="b"/>
+            <a:pathLst>
+              <a:path w="228600" h="228600">
+                <a:moveTo>
+                  <a:pt x="0" y="228600"/>
+                </a:moveTo>
+                <a:lnTo>
+                  <a:pt x="2309" y="226291"/>
+                </a:lnTo>
+                <a:close/>
+                <a:lnTo>
+                  <a:pt x="4618" y="223982"/>
+                </a:lnTo>
+                <a:close/>
+                <a:lnTo>
+                  <a:pt x="6927" y="221673"/>
+                </a:lnTo>
+                <a:close/>
+                <a:lnTo>
+                  <a:pt x="9236" y="219364"/>
+                </a:lnTo>
+                <a:close/>
+                <a:lnTo>
+                  <a:pt x="11545" y="217055"/>
+                </a:lnTo>
+                <a:close/>
+                <a:lnTo>
+                  <a:pt x="13855" y="214745"/>
+                </a:lnTo>
+                <a:close/>
+                <a:lnTo>
+                  <a:pt x="16164" y="212436"/>
+                </a:lnTo>
+                <a:close/>
+                <a:lnTo>
+                  <a:pt x="18473" y="210127"/>
+                </a:lnTo>
+                <a:close/>
+                <a:lnTo>
+                  <a:pt x="20782" y="207818"/>
+                </a:lnTo>
+                <a:close/>
+                <a:lnTo>
+                  <a:pt x="23091" y="205509"/>
+                </a:lnTo>
+                <a:close/>
+                <a:lnTo>
+                  <a:pt x="25400" y="203200"/>
+                </a:lnTo>
+                <a:close/>
+                <a:lnTo>
+                  <a:pt x="27709" y="200891"/>
+                </a:lnTo>
+                <a:close/>
+                <a:lnTo>
+                  <a:pt x="30018" y="198582"/>
+                </a:lnTo>
+                <a:close/>
+                <a:lnTo>
+                  <a:pt x="32327" y="196273"/>
+                </a:lnTo>
+                <a:close/>
+                <a:lnTo>
+                  <a:pt x="34636" y="193964"/>
+                </a:lnTo>
+                <a:close/>
+                <a:lnTo>
+                  <a:pt x="36945" y="191655"/>
+                </a:lnTo>
+                <a:close/>
+                <a:lnTo>
+                  <a:pt x="39255" y="189345"/>
+                </a:lnTo>
+                <a:close/>
+                <a:lnTo>
+                  <a:pt x="41564" y="187036"/>
+                </a:lnTo>
+                <a:close/>
+                <a:lnTo>
+                  <a:pt x="43873" y="184727"/>
+                </a:lnTo>
+                <a:close/>
+                <a:lnTo>
+                  <a:pt x="46182" y="182418"/>
+                </a:lnTo>
+                <a:close/>
+                <a:lnTo>
+                  <a:pt x="48491" y="180109"/>
+                </a:lnTo>
+                <a:close/>
+                <a:lnTo>
+                  <a:pt x="50800" y="177800"/>
+                </a:lnTo>
+                <a:close/>
+                <a:lnTo>
+                  <a:pt x="53109" y="175491"/>
+                </a:lnTo>
+                <a:close/>
+                <a:lnTo>
+                  <a:pt x="55418" y="173182"/>
+                </a:lnTo>
+                <a:close/>
+                <a:lnTo>
+                  <a:pt x="57727" y="170873"/>
+                </a:lnTo>
+                <a:close/>
+                <a:lnTo>
+                  <a:pt x="60036" y="168564"/>
+                </a:lnTo>
+                <a:close/>
+                <a:lnTo>
+                  <a:pt x="62345" y="166255"/>
+                </a:lnTo>
+                <a:close/>
+                <a:lnTo>
+                  <a:pt x="64655" y="163945"/>
+                </a:lnTo>
+                <a:close/>
+                <a:lnTo>
+                  <a:pt x="66964" y="161636"/>
+                </a:lnTo>
+                <a:close/>
+                <a:lnTo>
+                  <a:pt x="69273" y="159327"/>
+                </a:lnTo>
+                <a:close/>
+                <a:lnTo>
+                  <a:pt x="71582" y="157018"/>
+                </a:lnTo>
+                <a:close/>
+                <a:lnTo>
+                  <a:pt x="73891" y="154709"/>
+                </a:lnTo>
+                <a:close/>
+                <a:lnTo>
+                  <a:pt x="76200" y="152400"/>
+                </a:lnTo>
+                <a:close/>
+                <a:lnTo>
+                  <a:pt x="78509" y="150091"/>
+                </a:lnTo>
+                <a:close/>
+                <a:lnTo>
+                  <a:pt x="80818" y="147782"/>
+                </a:lnTo>
+                <a:close/>
+                <a:lnTo>
+                  <a:pt x="83127" y="145473"/>
+                </a:lnTo>
+                <a:close/>
+                <a:lnTo>
+                  <a:pt x="85436" y="143164"/>
+                </a:lnTo>
+                <a:close/>
+                <a:lnTo>
+                  <a:pt x="87745" y="140855"/>
+                </a:lnTo>
+                <a:close/>
+                <a:lnTo>
+                  <a:pt x="90055" y="138545"/>
+                </a:lnTo>
+                <a:close/>
+                <a:lnTo>
+                  <a:pt x="92364" y="136236"/>
+                </a:lnTo>
+                <a:close/>
+                <a:lnTo>
+                  <a:pt x="94673" y="133927"/>
+                </a:lnTo>
+                <a:close/>
+                <a:lnTo>
+                  <a:pt x="96982" y="131618"/>
+                </a:lnTo>
+                <a:close/>
+                <a:lnTo>
+                  <a:pt x="99291" y="129309"/>
+                </a:lnTo>
+                <a:close/>
+                <a:lnTo>
+                  <a:pt x="101600" y="127000"/>
+                </a:lnTo>
+                <a:close/>
+                <a:lnTo>
+                  <a:pt x="103909" y="124691"/>
+                </a:lnTo>
+                <a:close/>
+                <a:lnTo>
+                  <a:pt x="106218" y="122382"/>
+                </a:lnTo>
+                <a:close/>
+                <a:lnTo>
+                  <a:pt x="108527" y="120073"/>
+                </a:lnTo>
+                <a:close/>
+                <a:lnTo>
+                  <a:pt x="110836" y="117764"/>
+                </a:lnTo>
+                <a:close/>
+                <a:lnTo>
+                  <a:pt x="113145" y="115455"/>
+                </a:lnTo>
+                <a:close/>
+                <a:lnTo>
+                  <a:pt x="115455" y="113145"/>
+                </a:lnTo>
+                <a:close/>
+                <a:lnTo>
+                  <a:pt x="117764" y="110836"/>
+                </a:lnTo>
+                <a:close/>
+                <a:lnTo>
+                  <a:pt x="120073" y="108527"/>
+                </a:lnTo>
+                <a:close/>
+                <a:lnTo>
+                  <a:pt x="122382" y="106218"/>
+                </a:lnTo>
+                <a:close/>
+                <a:lnTo>
+                  <a:pt x="124691" y="103909"/>
+                </a:lnTo>
+                <a:close/>
+                <a:lnTo>
+                  <a:pt x="127000" y="101600"/>
+                </a:lnTo>
+                <a:close/>
+                <a:lnTo>
+                  <a:pt x="129309" y="99291"/>
+                </a:lnTo>
+                <a:close/>
+                <a:lnTo>
+                  <a:pt x="131618" y="96982"/>
+                </a:lnTo>
+                <a:close/>
+                <a:lnTo>
+                  <a:pt x="133927" y="94673"/>
+                </a:lnTo>
+                <a:close/>
+                <a:lnTo>
+                  <a:pt x="136236" y="92364"/>
+                </a:lnTo>
+                <a:close/>
+                <a:lnTo>
+                  <a:pt x="138545" y="90055"/>
+                </a:lnTo>
+                <a:close/>
+                <a:lnTo>
+                  <a:pt x="140855" y="87745"/>
+                </a:lnTo>
+                <a:close/>
+                <a:lnTo>
+                  <a:pt x="143164" y="85436"/>
+                </a:lnTo>
+                <a:close/>
+                <a:lnTo>
+                  <a:pt x="145473" y="83127"/>
+                </a:lnTo>
+                <a:close/>
+                <a:lnTo>
+                  <a:pt x="147782" y="80818"/>
+                </a:lnTo>
+                <a:close/>
+                <a:lnTo>
+                  <a:pt x="150091" y="78509"/>
+                </a:lnTo>
+                <a:close/>
+                <a:lnTo>
+                  <a:pt x="152400" y="76200"/>
+                </a:lnTo>
+                <a:close/>
+                <a:lnTo>
+                  <a:pt x="154709" y="73891"/>
+                </a:lnTo>
+                <a:close/>
+                <a:lnTo>
+                  <a:pt x="157018" y="71582"/>
+                </a:lnTo>
+                <a:close/>
+                <a:lnTo>
+                  <a:pt x="159327" y="69273"/>
+                </a:lnTo>
+                <a:close/>
+                <a:lnTo>
+                  <a:pt x="161636" y="66964"/>
+                </a:lnTo>
+                <a:close/>
+                <a:lnTo>
+                  <a:pt x="163945" y="64655"/>
+                </a:lnTo>
+                <a:close/>
+                <a:lnTo>
+                  <a:pt x="166255" y="62345"/>
+                </a:lnTo>
+                <a:close/>
+                <a:lnTo>
+                  <a:pt x="168564" y="60036"/>
+                </a:lnTo>
+                <a:close/>
+                <a:lnTo>
+                  <a:pt x="170873" y="57727"/>
+                </a:lnTo>
+                <a:close/>
+                <a:lnTo>
+                  <a:pt x="173182" y="55418"/>
+                </a:lnTo>
+                <a:close/>
+                <a:lnTo>
+                  <a:pt x="175491" y="53109"/>
+                </a:lnTo>
+                <a:close/>
+                <a:lnTo>
+                  <a:pt x="177800" y="50800"/>
+                </a:lnTo>
+                <a:close/>
+                <a:lnTo>
+                  <a:pt x="180109" y="48491"/>
+                </a:lnTo>
+                <a:close/>
+                <a:lnTo>
+                  <a:pt x="182418" y="46182"/>
+                </a:lnTo>
+                <a:close/>
+                <a:lnTo>
+                  <a:pt x="184727" y="43873"/>
+                </a:lnTo>
+                <a:close/>
+                <a:lnTo>
+                  <a:pt x="187036" y="41564"/>
+                </a:lnTo>
+                <a:close/>
+                <a:lnTo>
+                  <a:pt x="189345" y="39255"/>
+                </a:lnTo>
+                <a:close/>
+                <a:lnTo>
+                  <a:pt x="191655" y="36945"/>
+                </a:lnTo>
+                <a:close/>
+                <a:lnTo>
+                  <a:pt x="193964" y="34636"/>
+                </a:lnTo>
+                <a:close/>
+                <a:lnTo>
+                  <a:pt x="196273" y="32327"/>
+                </a:lnTo>
+                <a:close/>
+                <a:lnTo>
+                  <a:pt x="198582" y="30018"/>
+                </a:lnTo>
+                <a:close/>
+                <a:lnTo>
+                  <a:pt x="200891" y="27709"/>
+                </a:lnTo>
+                <a:close/>
+                <a:lnTo>
+                  <a:pt x="203200" y="25400"/>
+                </a:lnTo>
+                <a:close/>
+                <a:lnTo>
+                  <a:pt x="205509" y="23091"/>
+                </a:lnTo>
+                <a:close/>
+                <a:lnTo>
+                  <a:pt x="207818" y="20782"/>
+                </a:lnTo>
+                <a:close/>
+                <a:lnTo>
+                  <a:pt x="210127" y="18473"/>
+                </a:lnTo>
+                <a:close/>
+                <a:lnTo>
+                  <a:pt x="212436" y="16164"/>
+                </a:lnTo>
+                <a:close/>
+                <a:lnTo>
+                  <a:pt x="214745" y="13855"/>
+                </a:lnTo>
+                <a:close/>
+                <a:lnTo>
+                  <a:pt x="217055" y="11545"/>
+                </a:lnTo>
+                <a:close/>
+                <a:lnTo>
+                  <a:pt x="219364" y="9236"/>
+                </a:lnTo>
+                <a:close/>
+                <a:lnTo>
+                  <a:pt x="221673" y="6927"/>
+                </a:lnTo>
+                <a:close/>
+                <a:lnTo>
+                  <a:pt x="223982" y="4618"/>
+                </a:lnTo>
+                <a:close/>
+                <a:lnTo>
+                  <a:pt x="226291" y="2309"/>
+                </a:lnTo>
+                <a:close/>
+                <a:lnTo>
+                  <a:pt x="228600" y="0"/>
+                </a:lnTo>
+                <a:close/>
+              </a:path>
+            </a:pathLst>
+          </a:custGeom>
+          <a:ln w="19050">
+            <a:solidFill>
+              <a:srgbClr val="B4B4B4"/>
+            </a:solidFill>
+          </a:ln>
+        </p:spPr>
+        <p:style>
+          <a:lnRef idx="1">
+            <a:schemeClr val="accent1"/>
+          </a:lnRef>
+          <a:fillRef idx="3">
+            <a:schemeClr val="accent1"/>
+          </a:fillRef>
+          <a:effectRef idx="2">
+            <a:schemeClr val="accent1"/>
+          </a:effectRef>
+          <a:fontRef idx="minor">
+            <a:schemeClr val="lt1"/>
+          </a:fontRef>
+        </p:style>
+        <p:txBody>
+          <a:bodyPr rtlCol="0" anchor="ctr"/>
+          <a:lstStyle/>
+          <a:p>
+            <a:pPr algn="ctr"/>
+          </a:p>
+        </p:txBody>
+      </p:sp>
+      <p:sp>
+        <p:nvSpPr>
+          <p:cNvPr id="12" name="TextBox 11"/>
           <p:cNvSpPr txBox="1"/>
           <p:nvPr/>
         </p:nvSpPr>
         <p:spPr>
           <a:xfrm>
-            <a:off x="5394960" y="1337310"/>
-            <a:ext cx="635000" cy="254000"/>
+            <a:off x="4775200" y="2345690"/>
+            <a:ext cx="1524000" cy="508000"/>
           </a:xfrm>
           <a:prstGeom prst="rect">
             <a:avLst/>
@@ -5307,7 +5534,7 @@
           <a:lstStyle/>
           <a:p>
             <a:pPr>
-              <a:defRPr sz="1200">
+              <a:defRPr sz="1400" b="1">
                 <a:solidFill>
                   <a:srgbClr val="FFFFFF"/>
                 </a:solidFill>
@@ -5315,7 +5542,79 @@
               </a:defRPr>
             </a:pPr>
             <a:r>
-              <a:t>$y=f(x)$</a:t>
+              <a:t>1</a:t>
+            </a:r>
+          </a:p>
+        </p:txBody>
+      </p:sp>
+      <p:sp>
+        <p:nvSpPr>
+          <p:cNvPr id="13" name="TextBox 12"/>
+          <p:cNvSpPr txBox="1"/>
+          <p:nvPr/>
+        </p:nvSpPr>
+        <p:spPr>
+          <a:xfrm>
+            <a:off x="4226560" y="1797050"/>
+            <a:ext cx="1524000" cy="508000"/>
+          </a:xfrm>
+          <a:prstGeom prst="rect">
+            <a:avLst/>
+          </a:prstGeom>
+          <a:noFill/>
+        </p:spPr>
+        <p:txBody>
+          <a:bodyPr wrap="none">
+            <a:spAutoFit/>
+          </a:bodyPr>
+          <a:lstStyle/>
+          <a:p>
+            <a:pPr>
+              <a:defRPr sz="1400" b="1">
+                <a:solidFill>
+                  <a:srgbClr val="FFFFFF"/>
+                </a:solidFill>
+                <a:latin typeface="Inter"/>
+              </a:defRPr>
+            </a:pPr>
+            <a:r>
+              <a:t>1</a:t>
+            </a:r>
+          </a:p>
+        </p:txBody>
+      </p:sp>
+      <p:sp>
+        <p:nvSpPr>
+          <p:cNvPr id="14" name="TextBox 13"/>
+          <p:cNvSpPr txBox="1"/>
+          <p:nvPr/>
+        </p:nvSpPr>
+        <p:spPr>
+          <a:xfrm>
+            <a:off x="4226560" y="1339850"/>
+            <a:ext cx="1524000" cy="508000"/>
+          </a:xfrm>
+          <a:prstGeom prst="rect">
+            <a:avLst/>
+          </a:prstGeom>
+          <a:noFill/>
+        </p:spPr>
+        <p:txBody>
+          <a:bodyPr wrap="none">
+            <a:spAutoFit/>
+          </a:bodyPr>
+          <a:lstStyle/>
+          <a:p>
+            <a:pPr>
+              <a:defRPr sz="1400" b="1">
+                <a:solidFill>
+                  <a:srgbClr val="FFFFFF"/>
+                </a:solidFill>
+                <a:latin typeface="Inter"/>
+              </a:defRPr>
+            </a:pPr>
+            <a:r>
+              <a:t>2</a:t>
             </a:r>
           </a:p>
         </p:txBody>

--- a/output/2.pptx
+++ b/output/2.pptx
@@ -3084,7 +3084,7 @@
     <p:bg>
       <p:bgPr>
         <a:solidFill>
-          <a:srgbClr val="1E1E23"/>
+          <a:srgbClr val="000000"/>
         </a:solidFill>
         <a:effectLst/>
       </p:bgPr>
@@ -3104,8 +3104,8 @@
         </p:nvCxnSpPr>
         <p:spPr>
           <a:xfrm>
-            <a:off x="4343400.0" y="2571750.0"/>
-            <a:ext cx="1508760.0" cy="0.0"/>
+            <a:off x="4297680.0" y="2571750.0"/>
+            <a:ext cx="1554480.0" cy="0.0"/>
           </a:xfrm>
           <a:prstGeom prst="line">
             <a:avLst/>
@@ -3139,8 +3139,8 @@
         </p:nvCxnSpPr>
         <p:spPr>
           <a:xfrm flipV="1">
-            <a:off x="4572000.0" y="1108710.0"/>
-            <a:ext cx="0.0" cy="1691640.0"/>
+            <a:off x="4572000.0" y="834390.0"/>
+            <a:ext cx="0.0" cy="1874520.0"/>
           </a:xfrm>
           <a:prstGeom prst="line">
             <a:avLst/>
@@ -3174,8 +3174,8 @@
         </p:nvSpPr>
         <p:spPr>
           <a:xfrm>
-            <a:off x="4389120" y="1017270"/>
-            <a:ext cx="1280160" cy="1139793"/>
+            <a:off x="4343400" y="971550"/>
+            <a:ext cx="1371600" cy="1141668"/>
           </a:xfrm>
           <a:custGeom>
             <a:avLst/>
@@ -3184,64 +3184,60 @@
             <a:cxnLst/>
             <a:rect l="l" t="t" r="r" b="b"/>
             <a:pathLst>
-              <a:path w="1280160" h="1139793">
+              <a:path w="1371600" h="1141668">
                 <a:moveTo>
                   <a:pt x="0" y="457200"/>
                 </a:moveTo>
                 <a:lnTo>
-                  <a:pt x="4281" y="461481"/>
-                </a:lnTo>
-                <a:close/>
-                <a:lnTo>
-                  <a:pt x="8563" y="465763"/>
-                </a:lnTo>
-                <a:close/>
-                <a:lnTo>
-                  <a:pt x="12844" y="470044"/>
-                </a:lnTo>
-                <a:close/>
-                <a:lnTo>
-                  <a:pt x="17126" y="474326"/>
-                </a:lnTo>
-                <a:close/>
-                <a:lnTo>
-                  <a:pt x="21407" y="478607"/>
-                </a:lnTo>
-                <a:close/>
-                <a:lnTo>
-                  <a:pt x="25689" y="482889"/>
-                </a:lnTo>
-                <a:close/>
-                <a:lnTo>
-                  <a:pt x="29970" y="487170"/>
-                </a:lnTo>
-                <a:close/>
-                <a:lnTo>
-                  <a:pt x="34252" y="491452"/>
-                </a:lnTo>
-                <a:close/>
-                <a:lnTo>
-                  <a:pt x="38533" y="495733"/>
-                </a:lnTo>
-                <a:close/>
-                <a:lnTo>
-                  <a:pt x="42815" y="500015"/>
-                </a:lnTo>
-                <a:close/>
-                <a:lnTo>
-                  <a:pt x="47096" y="504296"/>
-                </a:lnTo>
-                <a:close/>
-                <a:lnTo>
-                  <a:pt x="51378" y="508578"/>
-                </a:lnTo>
-                <a:close/>
-                <a:lnTo>
-                  <a:pt x="55659" y="512859"/>
-                </a:lnTo>
-                <a:close/>
-                <a:lnTo>
-                  <a:pt x="59941" y="517141"/>
+                  <a:pt x="4587" y="461787"/>
+                </a:lnTo>
+                <a:close/>
+                <a:lnTo>
+                  <a:pt x="9175" y="466375"/>
+                </a:lnTo>
+                <a:close/>
+                <a:lnTo>
+                  <a:pt x="13762" y="470962"/>
+                </a:lnTo>
+                <a:close/>
+                <a:lnTo>
+                  <a:pt x="18349" y="475549"/>
+                </a:lnTo>
+                <a:close/>
+                <a:lnTo>
+                  <a:pt x="22936" y="480136"/>
+                </a:lnTo>
+                <a:close/>
+                <a:lnTo>
+                  <a:pt x="27524" y="484724"/>
+                </a:lnTo>
+                <a:close/>
+                <a:lnTo>
+                  <a:pt x="32111" y="489311"/>
+                </a:lnTo>
+                <a:close/>
+                <a:lnTo>
+                  <a:pt x="36698" y="493898"/>
+                </a:lnTo>
+                <a:close/>
+                <a:lnTo>
+                  <a:pt x="41286" y="498486"/>
+                </a:lnTo>
+                <a:close/>
+                <a:lnTo>
+                  <a:pt x="45873" y="503073"/>
+                </a:lnTo>
+                <a:close/>
+                <a:lnTo>
+                  <a:pt x="50460" y="507660"/>
+                </a:lnTo>
+                <a:close/>
+                <a:lnTo>
+                  <a:pt x="55047" y="512247"/>
+                </a:lnTo>
+                <a:close/>
+                <a:lnTo>
+                  <a:pt x="59635" y="516835"/>
                 </a:lnTo>
                 <a:close/>
                 <a:lnTo>
@@ -3249,59 +3245,55 @@
                 </a:lnTo>
                 <a:close/>
                 <a:lnTo>
-                  <a:pt x="68504" y="525704"/>
-                </a:lnTo>
-                <a:close/>
-                <a:lnTo>
-                  <a:pt x="72785" y="529985"/>
-                </a:lnTo>
-                <a:close/>
-                <a:lnTo>
-                  <a:pt x="77066" y="534266"/>
-                </a:lnTo>
-                <a:close/>
-                <a:lnTo>
-                  <a:pt x="81348" y="538548"/>
-                </a:lnTo>
-                <a:close/>
-                <a:lnTo>
-                  <a:pt x="85629" y="542829"/>
-                </a:lnTo>
-                <a:close/>
-                <a:lnTo>
-                  <a:pt x="89911" y="547111"/>
-                </a:lnTo>
-                <a:close/>
-                <a:lnTo>
-                  <a:pt x="94192" y="551392"/>
-                </a:lnTo>
-                <a:close/>
-                <a:lnTo>
-                  <a:pt x="98474" y="555674"/>
-                </a:lnTo>
-                <a:close/>
-                <a:lnTo>
-                  <a:pt x="102755" y="559955"/>
-                </a:lnTo>
-                <a:close/>
-                <a:lnTo>
-                  <a:pt x="107037" y="564237"/>
-                </a:lnTo>
-                <a:close/>
-                <a:lnTo>
-                  <a:pt x="111318" y="568518"/>
-                </a:lnTo>
-                <a:close/>
-                <a:lnTo>
-                  <a:pt x="115600" y="572800"/>
-                </a:lnTo>
-                <a:close/>
-                <a:lnTo>
-                  <a:pt x="119881" y="577081"/>
-                </a:lnTo>
-                <a:close/>
-                <a:lnTo>
-                  <a:pt x="124163" y="581363"/>
+                  <a:pt x="68809" y="526009"/>
+                </a:lnTo>
+                <a:close/>
+                <a:lnTo>
+                  <a:pt x="73397" y="530597"/>
+                </a:lnTo>
+                <a:close/>
+                <a:lnTo>
+                  <a:pt x="77984" y="535184"/>
+                </a:lnTo>
+                <a:close/>
+                <a:lnTo>
+                  <a:pt x="82571" y="539771"/>
+                </a:lnTo>
+                <a:close/>
+                <a:lnTo>
+                  <a:pt x="87159" y="544359"/>
+                </a:lnTo>
+                <a:close/>
+                <a:lnTo>
+                  <a:pt x="91746" y="548946"/>
+                </a:lnTo>
+                <a:close/>
+                <a:lnTo>
+                  <a:pt x="96333" y="553533"/>
+                </a:lnTo>
+                <a:close/>
+                <a:lnTo>
+                  <a:pt x="100920" y="558120"/>
+                </a:lnTo>
+                <a:close/>
+                <a:lnTo>
+                  <a:pt x="105508" y="562708"/>
+                </a:lnTo>
+                <a:close/>
+                <a:lnTo>
+                  <a:pt x="110095" y="567295"/>
+                </a:lnTo>
+                <a:close/>
+                <a:lnTo>
+                  <a:pt x="114682" y="571882"/>
+                </a:lnTo>
+                <a:close/>
+                <a:lnTo>
+                  <a:pt x="119270" y="576470"/>
+                </a:lnTo>
+                <a:close/>
+                <a:lnTo>
+                  <a:pt x="123857" y="581057"/>
                 </a:lnTo>
                 <a:close/>
                 <a:lnTo>
@@ -3309,59 +3301,55 @@
                 </a:lnTo>
                 <a:close/>
                 <a:lnTo>
-                  <a:pt x="132726" y="589926"/>
-                </a:lnTo>
-                <a:close/>
-                <a:lnTo>
-                  <a:pt x="137007" y="594207"/>
-                </a:lnTo>
-                <a:close/>
-                <a:lnTo>
-                  <a:pt x="141289" y="598489"/>
-                </a:lnTo>
-                <a:close/>
-                <a:lnTo>
-                  <a:pt x="145570" y="602770"/>
-                </a:lnTo>
-                <a:close/>
-                <a:lnTo>
-                  <a:pt x="149852" y="607052"/>
-                </a:lnTo>
-                <a:close/>
-                <a:lnTo>
-                  <a:pt x="154133" y="611333"/>
-                </a:lnTo>
-                <a:close/>
-                <a:lnTo>
-                  <a:pt x="158414" y="615614"/>
-                </a:lnTo>
-                <a:close/>
-                <a:lnTo>
-                  <a:pt x="162696" y="619896"/>
-                </a:lnTo>
-                <a:close/>
-                <a:lnTo>
-                  <a:pt x="166977" y="624177"/>
-                </a:lnTo>
-                <a:close/>
-                <a:lnTo>
-                  <a:pt x="171259" y="628459"/>
-                </a:lnTo>
-                <a:close/>
-                <a:lnTo>
-                  <a:pt x="175540" y="632740"/>
-                </a:lnTo>
-                <a:close/>
-                <a:lnTo>
-                  <a:pt x="179822" y="637022"/>
-                </a:lnTo>
-                <a:close/>
-                <a:lnTo>
-                  <a:pt x="184103" y="641303"/>
-                </a:lnTo>
-                <a:close/>
-                <a:lnTo>
-                  <a:pt x="188385" y="645585"/>
+                  <a:pt x="133031" y="590231"/>
+                </a:lnTo>
+                <a:close/>
+                <a:lnTo>
+                  <a:pt x="137619" y="594819"/>
+                </a:lnTo>
+                <a:close/>
+                <a:lnTo>
+                  <a:pt x="142206" y="599406"/>
+                </a:lnTo>
+                <a:close/>
+                <a:lnTo>
+                  <a:pt x="146793" y="603993"/>
+                </a:lnTo>
+                <a:close/>
+                <a:lnTo>
+                  <a:pt x="151381" y="608581"/>
+                </a:lnTo>
+                <a:close/>
+                <a:lnTo>
+                  <a:pt x="155968" y="613168"/>
+                </a:lnTo>
+                <a:close/>
+                <a:lnTo>
+                  <a:pt x="160555" y="617755"/>
+                </a:lnTo>
+                <a:close/>
+                <a:lnTo>
+                  <a:pt x="165142" y="622342"/>
+                </a:lnTo>
+                <a:close/>
+                <a:lnTo>
+                  <a:pt x="169730" y="626930"/>
+                </a:lnTo>
+                <a:close/>
+                <a:lnTo>
+                  <a:pt x="174317" y="631517"/>
+                </a:lnTo>
+                <a:close/>
+                <a:lnTo>
+                  <a:pt x="178904" y="636104"/>
+                </a:lnTo>
+                <a:close/>
+                <a:lnTo>
+                  <a:pt x="183492" y="640692"/>
+                </a:lnTo>
+                <a:close/>
+                <a:lnTo>
+                  <a:pt x="188079" y="645279"/>
                 </a:lnTo>
                 <a:close/>
                 <a:lnTo>
@@ -3369,59 +3357,55 @@
                 </a:lnTo>
                 <a:close/>
                 <a:lnTo>
-                  <a:pt x="196948" y="654148"/>
-                </a:lnTo>
-                <a:close/>
-                <a:lnTo>
-                  <a:pt x="201229" y="658429"/>
-                </a:lnTo>
-                <a:close/>
-                <a:lnTo>
-                  <a:pt x="205511" y="662711"/>
-                </a:lnTo>
-                <a:close/>
-                <a:lnTo>
-                  <a:pt x="209792" y="666992"/>
-                </a:lnTo>
-                <a:close/>
-                <a:lnTo>
-                  <a:pt x="214074" y="671274"/>
-                </a:lnTo>
-                <a:close/>
-                <a:lnTo>
-                  <a:pt x="218355" y="675555"/>
-                </a:lnTo>
-                <a:close/>
-                <a:lnTo>
-                  <a:pt x="222637" y="679837"/>
-                </a:lnTo>
-                <a:close/>
-                <a:lnTo>
-                  <a:pt x="226918" y="684118"/>
-                </a:lnTo>
-                <a:close/>
-                <a:lnTo>
-                  <a:pt x="231199" y="688399"/>
-                </a:lnTo>
-                <a:close/>
-                <a:lnTo>
-                  <a:pt x="235481" y="692681"/>
-                </a:lnTo>
-                <a:close/>
-                <a:lnTo>
-                  <a:pt x="239762" y="696962"/>
-                </a:lnTo>
-                <a:close/>
-                <a:lnTo>
-                  <a:pt x="244044" y="701244"/>
-                </a:lnTo>
-                <a:close/>
-                <a:lnTo>
-                  <a:pt x="248325" y="705525"/>
-                </a:lnTo>
-                <a:close/>
-                <a:lnTo>
-                  <a:pt x="252607" y="709807"/>
+                  <a:pt x="197254" y="654454"/>
+                </a:lnTo>
+                <a:close/>
+                <a:lnTo>
+                  <a:pt x="201841" y="659041"/>
+                </a:lnTo>
+                <a:close/>
+                <a:lnTo>
+                  <a:pt x="206428" y="663628"/>
+                </a:lnTo>
+                <a:close/>
+                <a:lnTo>
+                  <a:pt x="211015" y="668215"/>
+                </a:lnTo>
+                <a:close/>
+                <a:lnTo>
+                  <a:pt x="215603" y="672803"/>
+                </a:lnTo>
+                <a:close/>
+                <a:lnTo>
+                  <a:pt x="220190" y="677390"/>
+                </a:lnTo>
+                <a:close/>
+                <a:lnTo>
+                  <a:pt x="224777" y="681977"/>
+                </a:lnTo>
+                <a:close/>
+                <a:lnTo>
+                  <a:pt x="229365" y="686565"/>
+                </a:lnTo>
+                <a:close/>
+                <a:lnTo>
+                  <a:pt x="233952" y="691152"/>
+                </a:lnTo>
+                <a:close/>
+                <a:lnTo>
+                  <a:pt x="238539" y="695739"/>
+                </a:lnTo>
+                <a:close/>
+                <a:lnTo>
+                  <a:pt x="243126" y="700326"/>
+                </a:lnTo>
+                <a:close/>
+                <a:lnTo>
+                  <a:pt x="247714" y="704914"/>
+                </a:lnTo>
+                <a:close/>
+                <a:lnTo>
+                  <a:pt x="252301" y="709501"/>
                 </a:lnTo>
                 <a:close/>
                 <a:lnTo>
@@ -3429,59 +3413,55 @@
                 </a:lnTo>
                 <a:close/>
                 <a:lnTo>
-                  <a:pt x="261170" y="718370"/>
-                </a:lnTo>
-                <a:close/>
-                <a:lnTo>
-                  <a:pt x="265451" y="722651"/>
-                </a:lnTo>
-                <a:close/>
-                <a:lnTo>
-                  <a:pt x="269733" y="726933"/>
-                </a:lnTo>
-                <a:close/>
-                <a:lnTo>
-                  <a:pt x="274014" y="731214"/>
-                </a:lnTo>
-                <a:close/>
-                <a:lnTo>
-                  <a:pt x="278296" y="735496"/>
-                </a:lnTo>
-                <a:close/>
-                <a:lnTo>
-                  <a:pt x="282577" y="739777"/>
-                </a:lnTo>
-                <a:close/>
-                <a:lnTo>
-                  <a:pt x="286859" y="744059"/>
-                </a:lnTo>
-                <a:close/>
-                <a:lnTo>
-                  <a:pt x="291140" y="748340"/>
-                </a:lnTo>
-                <a:close/>
-                <a:lnTo>
-                  <a:pt x="295422" y="752622"/>
-                </a:lnTo>
-                <a:close/>
-                <a:lnTo>
-                  <a:pt x="299703" y="756903"/>
-                </a:lnTo>
-                <a:close/>
-                <a:lnTo>
-                  <a:pt x="303984" y="761184"/>
-                </a:lnTo>
-                <a:close/>
-                <a:lnTo>
-                  <a:pt x="308266" y="765466"/>
-                </a:lnTo>
-                <a:close/>
-                <a:lnTo>
-                  <a:pt x="312547" y="769747"/>
-                </a:lnTo>
-                <a:close/>
-                <a:lnTo>
-                  <a:pt x="316829" y="774029"/>
+                  <a:pt x="261476" y="718676"/>
+                </a:lnTo>
+                <a:close/>
+                <a:lnTo>
+                  <a:pt x="266063" y="723263"/>
+                </a:lnTo>
+                <a:close/>
+                <a:lnTo>
+                  <a:pt x="270650" y="727850"/>
+                </a:lnTo>
+                <a:close/>
+                <a:lnTo>
+                  <a:pt x="275237" y="732437"/>
+                </a:lnTo>
+                <a:close/>
+                <a:lnTo>
+                  <a:pt x="279825" y="737025"/>
+                </a:lnTo>
+                <a:close/>
+                <a:lnTo>
+                  <a:pt x="284412" y="741612"/>
+                </a:lnTo>
+                <a:close/>
+                <a:lnTo>
+                  <a:pt x="288999" y="746199"/>
+                </a:lnTo>
+                <a:close/>
+                <a:lnTo>
+                  <a:pt x="293587" y="750787"/>
+                </a:lnTo>
+                <a:close/>
+                <a:lnTo>
+                  <a:pt x="298174" y="755374"/>
+                </a:lnTo>
+                <a:close/>
+                <a:lnTo>
+                  <a:pt x="302761" y="759961"/>
+                </a:lnTo>
+                <a:close/>
+                <a:lnTo>
+                  <a:pt x="307348" y="764548"/>
+                </a:lnTo>
+                <a:close/>
+                <a:lnTo>
+                  <a:pt x="311936" y="769136"/>
+                </a:lnTo>
+                <a:close/>
+                <a:lnTo>
+                  <a:pt x="316523" y="773723"/>
                 </a:lnTo>
                 <a:close/>
                 <a:lnTo>
@@ -3489,59 +3469,55 @@
                 </a:lnTo>
                 <a:close/>
                 <a:lnTo>
-                  <a:pt x="325392" y="782592"/>
-                </a:lnTo>
-                <a:close/>
-                <a:lnTo>
-                  <a:pt x="329673" y="786873"/>
-                </a:lnTo>
-                <a:close/>
-                <a:lnTo>
-                  <a:pt x="333955" y="791155"/>
-                </a:lnTo>
-                <a:close/>
-                <a:lnTo>
-                  <a:pt x="338236" y="795436"/>
-                </a:lnTo>
-                <a:close/>
-                <a:lnTo>
-                  <a:pt x="342518" y="799718"/>
-                </a:lnTo>
-                <a:close/>
-                <a:lnTo>
-                  <a:pt x="346799" y="803999"/>
-                </a:lnTo>
-                <a:close/>
-                <a:lnTo>
-                  <a:pt x="351081" y="808281"/>
-                </a:lnTo>
-                <a:close/>
-                <a:lnTo>
-                  <a:pt x="355362" y="812562"/>
-                </a:lnTo>
-                <a:close/>
-                <a:lnTo>
-                  <a:pt x="359644" y="816844"/>
-                </a:lnTo>
-                <a:close/>
-                <a:lnTo>
-                  <a:pt x="363925" y="821125"/>
-                </a:lnTo>
-                <a:close/>
-                <a:lnTo>
-                  <a:pt x="368207" y="825407"/>
-                </a:lnTo>
-                <a:close/>
-                <a:lnTo>
-                  <a:pt x="372488" y="829688"/>
-                </a:lnTo>
-                <a:close/>
-                <a:lnTo>
-                  <a:pt x="376769" y="833969"/>
-                </a:lnTo>
-                <a:close/>
-                <a:lnTo>
-                  <a:pt x="381051" y="838251"/>
+                  <a:pt x="325698" y="782898"/>
+                </a:lnTo>
+                <a:close/>
+                <a:lnTo>
+                  <a:pt x="330285" y="787485"/>
+                </a:lnTo>
+                <a:close/>
+                <a:lnTo>
+                  <a:pt x="334872" y="792072"/>
+                </a:lnTo>
+                <a:close/>
+                <a:lnTo>
+                  <a:pt x="339460" y="796660"/>
+                </a:lnTo>
+                <a:close/>
+                <a:lnTo>
+                  <a:pt x="344047" y="801247"/>
+                </a:lnTo>
+                <a:close/>
+                <a:lnTo>
+                  <a:pt x="348634" y="805834"/>
+                </a:lnTo>
+                <a:close/>
+                <a:lnTo>
+                  <a:pt x="353221" y="810421"/>
+                </a:lnTo>
+                <a:close/>
+                <a:lnTo>
+                  <a:pt x="357809" y="815009"/>
+                </a:lnTo>
+                <a:close/>
+                <a:lnTo>
+                  <a:pt x="362396" y="819596"/>
+                </a:lnTo>
+                <a:close/>
+                <a:lnTo>
+                  <a:pt x="366983" y="824183"/>
+                </a:lnTo>
+                <a:close/>
+                <a:lnTo>
+                  <a:pt x="371571" y="828771"/>
+                </a:lnTo>
+                <a:close/>
+                <a:lnTo>
+                  <a:pt x="376158" y="833358"/>
+                </a:lnTo>
+                <a:close/>
+                <a:lnTo>
+                  <a:pt x="380745" y="837945"/>
                 </a:lnTo>
                 <a:close/>
                 <a:lnTo>
@@ -3549,59 +3525,55 @@
                 </a:lnTo>
                 <a:close/>
                 <a:lnTo>
-                  <a:pt x="389614" y="846814"/>
-                </a:lnTo>
-                <a:close/>
-                <a:lnTo>
-                  <a:pt x="393895" y="851095"/>
-                </a:lnTo>
-                <a:close/>
-                <a:lnTo>
-                  <a:pt x="398177" y="855377"/>
-                </a:lnTo>
-                <a:close/>
-                <a:lnTo>
-                  <a:pt x="402458" y="859658"/>
-                </a:lnTo>
-                <a:close/>
-                <a:lnTo>
-                  <a:pt x="406740" y="863940"/>
-                </a:lnTo>
-                <a:close/>
-                <a:lnTo>
-                  <a:pt x="411021" y="868221"/>
-                </a:lnTo>
-                <a:close/>
-                <a:lnTo>
-                  <a:pt x="415303" y="872503"/>
-                </a:lnTo>
-                <a:close/>
-                <a:lnTo>
-                  <a:pt x="419584" y="876784"/>
-                </a:lnTo>
-                <a:close/>
-                <a:lnTo>
-                  <a:pt x="423866" y="881066"/>
-                </a:lnTo>
-                <a:close/>
-                <a:lnTo>
-                  <a:pt x="428147" y="885347"/>
-                </a:lnTo>
-                <a:close/>
-                <a:lnTo>
-                  <a:pt x="432429" y="889629"/>
-                </a:lnTo>
-                <a:close/>
-                <a:lnTo>
-                  <a:pt x="436710" y="893910"/>
-                </a:lnTo>
-                <a:close/>
-                <a:lnTo>
-                  <a:pt x="440992" y="898192"/>
-                </a:lnTo>
-                <a:close/>
-                <a:lnTo>
-                  <a:pt x="445273" y="902473"/>
+                  <a:pt x="389920" y="847120"/>
+                </a:lnTo>
+                <a:close/>
+                <a:lnTo>
+                  <a:pt x="394507" y="851707"/>
+                </a:lnTo>
+                <a:close/>
+                <a:lnTo>
+                  <a:pt x="399094" y="856294"/>
+                </a:lnTo>
+                <a:close/>
+                <a:lnTo>
+                  <a:pt x="403682" y="860882"/>
+                </a:lnTo>
+                <a:close/>
+                <a:lnTo>
+                  <a:pt x="408269" y="865469"/>
+                </a:lnTo>
+                <a:close/>
+                <a:lnTo>
+                  <a:pt x="412856" y="870056"/>
+                </a:lnTo>
+                <a:close/>
+                <a:lnTo>
+                  <a:pt x="417443" y="874643"/>
+                </a:lnTo>
+                <a:close/>
+                <a:lnTo>
+                  <a:pt x="422031" y="879231"/>
+                </a:lnTo>
+                <a:close/>
+                <a:lnTo>
+                  <a:pt x="426618" y="883818"/>
+                </a:lnTo>
+                <a:close/>
+                <a:lnTo>
+                  <a:pt x="431205" y="888405"/>
+                </a:lnTo>
+                <a:close/>
+                <a:lnTo>
+                  <a:pt x="435793" y="892993"/>
+                </a:lnTo>
+                <a:close/>
+                <a:lnTo>
+                  <a:pt x="440380" y="897580"/>
+                </a:lnTo>
+                <a:close/>
+                <a:lnTo>
+                  <a:pt x="444967" y="902167"/>
                 </a:lnTo>
                 <a:close/>
                 <a:lnTo>
@@ -3609,59 +3581,55 @@
                 </a:lnTo>
                 <a:close/>
                 <a:lnTo>
-                  <a:pt x="453836" y="911036"/>
-                </a:lnTo>
-                <a:close/>
-                <a:lnTo>
-                  <a:pt x="458117" y="915317"/>
-                </a:lnTo>
-                <a:close/>
-                <a:lnTo>
-                  <a:pt x="462399" y="919599"/>
-                </a:lnTo>
-                <a:close/>
-                <a:lnTo>
-                  <a:pt x="466680" y="923880"/>
-                </a:lnTo>
-                <a:close/>
-                <a:lnTo>
-                  <a:pt x="470962" y="928162"/>
-                </a:lnTo>
-                <a:close/>
-                <a:lnTo>
-                  <a:pt x="475243" y="932443"/>
-                </a:lnTo>
-                <a:close/>
-                <a:lnTo>
-                  <a:pt x="479525" y="936725"/>
-                </a:lnTo>
-                <a:close/>
-                <a:lnTo>
-                  <a:pt x="483806" y="941006"/>
-                </a:lnTo>
-                <a:close/>
-                <a:lnTo>
-                  <a:pt x="488088" y="945288"/>
-                </a:lnTo>
-                <a:close/>
-                <a:lnTo>
-                  <a:pt x="492369" y="949569"/>
-                </a:lnTo>
-                <a:close/>
-                <a:lnTo>
-                  <a:pt x="496651" y="953851"/>
-                </a:lnTo>
-                <a:close/>
-                <a:lnTo>
-                  <a:pt x="500932" y="958132"/>
-                </a:lnTo>
-                <a:close/>
-                <a:lnTo>
-                  <a:pt x="505214" y="962414"/>
-                </a:lnTo>
-                <a:close/>
-                <a:lnTo>
-                  <a:pt x="509495" y="966695"/>
+                  <a:pt x="454142" y="911342"/>
+                </a:lnTo>
+                <a:close/>
+                <a:lnTo>
+                  <a:pt x="458729" y="915929"/>
+                </a:lnTo>
+                <a:close/>
+                <a:lnTo>
+                  <a:pt x="463316" y="920516"/>
+                </a:lnTo>
+                <a:close/>
+                <a:lnTo>
+                  <a:pt x="467904" y="925104"/>
+                </a:lnTo>
+                <a:close/>
+                <a:lnTo>
+                  <a:pt x="472491" y="929691"/>
+                </a:lnTo>
+                <a:close/>
+                <a:lnTo>
+                  <a:pt x="477078" y="934278"/>
+                </a:lnTo>
+                <a:close/>
+                <a:lnTo>
+                  <a:pt x="481666" y="938866"/>
+                </a:lnTo>
+                <a:close/>
+                <a:lnTo>
+                  <a:pt x="486253" y="943453"/>
+                </a:lnTo>
+                <a:close/>
+                <a:lnTo>
+                  <a:pt x="490840" y="948040"/>
+                </a:lnTo>
+                <a:close/>
+                <a:lnTo>
+                  <a:pt x="495427" y="952627"/>
+                </a:lnTo>
+                <a:close/>
+                <a:lnTo>
+                  <a:pt x="500015" y="957215"/>
+                </a:lnTo>
+                <a:close/>
+                <a:lnTo>
+                  <a:pt x="504602" y="961802"/>
+                </a:lnTo>
+                <a:close/>
+                <a:lnTo>
+                  <a:pt x="509189" y="966389"/>
                 </a:lnTo>
                 <a:close/>
                 <a:lnTo>
@@ -3669,59 +3637,55 @@
                 </a:lnTo>
                 <a:close/>
                 <a:lnTo>
-                  <a:pt x="518058" y="975258"/>
-                </a:lnTo>
-                <a:close/>
-                <a:lnTo>
-                  <a:pt x="522340" y="979540"/>
-                </a:lnTo>
-                <a:close/>
-                <a:lnTo>
-                  <a:pt x="526621" y="983821"/>
-                </a:lnTo>
-                <a:close/>
-                <a:lnTo>
-                  <a:pt x="530902" y="988102"/>
-                </a:lnTo>
-                <a:close/>
-                <a:lnTo>
-                  <a:pt x="535184" y="992384"/>
-                </a:lnTo>
-                <a:close/>
-                <a:lnTo>
-                  <a:pt x="539465" y="996665"/>
-                </a:lnTo>
-                <a:close/>
-                <a:lnTo>
-                  <a:pt x="543747" y="1000947"/>
-                </a:lnTo>
-                <a:close/>
-                <a:lnTo>
-                  <a:pt x="548028" y="1005228"/>
-                </a:lnTo>
-                <a:close/>
-                <a:lnTo>
-                  <a:pt x="552310" y="1009510"/>
-                </a:lnTo>
-                <a:close/>
-                <a:lnTo>
-                  <a:pt x="556591" y="1013791"/>
-                </a:lnTo>
-                <a:close/>
-                <a:lnTo>
-                  <a:pt x="560873" y="1018073"/>
-                </a:lnTo>
-                <a:close/>
-                <a:lnTo>
-                  <a:pt x="565154" y="1022354"/>
-                </a:lnTo>
-                <a:close/>
-                <a:lnTo>
-                  <a:pt x="569436" y="1026636"/>
-                </a:lnTo>
-                <a:close/>
-                <a:lnTo>
-                  <a:pt x="573717" y="1030917"/>
+                  <a:pt x="518364" y="975564"/>
+                </a:lnTo>
+                <a:close/>
+                <a:lnTo>
+                  <a:pt x="522951" y="980151"/>
+                </a:lnTo>
+                <a:close/>
+                <a:lnTo>
+                  <a:pt x="527538" y="984738"/>
+                </a:lnTo>
+                <a:close/>
+                <a:lnTo>
+                  <a:pt x="532126" y="989326"/>
+                </a:lnTo>
+                <a:close/>
+                <a:lnTo>
+                  <a:pt x="536713" y="993913"/>
+                </a:lnTo>
+                <a:close/>
+                <a:lnTo>
+                  <a:pt x="541300" y="998500"/>
+                </a:lnTo>
+                <a:close/>
+                <a:lnTo>
+                  <a:pt x="545888" y="1003088"/>
+                </a:lnTo>
+                <a:close/>
+                <a:lnTo>
+                  <a:pt x="550475" y="1007675"/>
+                </a:lnTo>
+                <a:close/>
+                <a:lnTo>
+                  <a:pt x="555062" y="1012262"/>
+                </a:lnTo>
+                <a:close/>
+                <a:lnTo>
+                  <a:pt x="559649" y="1016849"/>
+                </a:lnTo>
+                <a:close/>
+                <a:lnTo>
+                  <a:pt x="564237" y="1021437"/>
+                </a:lnTo>
+                <a:close/>
+                <a:lnTo>
+                  <a:pt x="568824" y="1026024"/>
+                </a:lnTo>
+                <a:close/>
+                <a:lnTo>
+                  <a:pt x="573411" y="1030611"/>
                 </a:lnTo>
                 <a:close/>
                 <a:lnTo>
@@ -3729,659 +3693,695 @@
                 </a:lnTo>
                 <a:close/>
                 <a:lnTo>
-                  <a:pt x="582280" y="1039480"/>
-                </a:lnTo>
-                <a:close/>
-                <a:lnTo>
-                  <a:pt x="586562" y="1043762"/>
-                </a:lnTo>
-                <a:close/>
-                <a:lnTo>
-                  <a:pt x="590843" y="1048043"/>
-                </a:lnTo>
-                <a:close/>
-                <a:lnTo>
-                  <a:pt x="595125" y="1052325"/>
-                </a:lnTo>
-                <a:close/>
-                <a:lnTo>
-                  <a:pt x="599406" y="1056605"/>
-                </a:lnTo>
-                <a:close/>
-                <a:lnTo>
-                  <a:pt x="603687" y="1060889"/>
-                </a:lnTo>
-                <a:close/>
-                <a:lnTo>
-                  <a:pt x="607969" y="1065171"/>
-                </a:lnTo>
-                <a:close/>
-                <a:lnTo>
-                  <a:pt x="612250" y="1069421"/>
-                </a:lnTo>
-                <a:close/>
-                <a:lnTo>
-                  <a:pt x="616532" y="1073901"/>
-                </a:lnTo>
-                <a:close/>
-                <a:lnTo>
-                  <a:pt x="620813" y="1077226"/>
-                </a:lnTo>
-                <a:close/>
-                <a:lnTo>
-                  <a:pt x="625095" y="1085606"/>
-                </a:lnTo>
-                <a:close/>
-                <a:lnTo>
-                  <a:pt x="629376" y="1073535"/>
-                </a:lnTo>
-                <a:close/>
-                <a:lnTo>
-                  <a:pt x="633658" y="1139793"/>
-                </a:lnTo>
-                <a:close/>
-                <a:lnTo>
-                  <a:pt x="637939" y="850113"/>
-                </a:lnTo>
-                <a:close/>
-                <a:lnTo>
-                  <a:pt x="642221" y="591254"/>
-                </a:lnTo>
-                <a:close/>
-                <a:lnTo>
-                  <a:pt x="646502" y="646618"/>
-                </a:lnTo>
-                <a:close/>
-                <a:lnTo>
-                  <a:pt x="650784" y="625922"/>
-                </a:lnTo>
-                <a:close/>
-                <a:lnTo>
-                  <a:pt x="655065" y="625972"/>
-                </a:lnTo>
-                <a:close/>
-                <a:lnTo>
-                  <a:pt x="659347" y="620605"/>
-                </a:lnTo>
-                <a:close/>
-                <a:lnTo>
-                  <a:pt x="663628" y="616577"/>
-                </a:lnTo>
-                <a:close/>
-                <a:lnTo>
-                  <a:pt x="667910" y="612243"/>
-                </a:lnTo>
-                <a:close/>
-                <a:lnTo>
-                  <a:pt x="672191" y="607970"/>
-                </a:lnTo>
-                <a:close/>
-                <a:lnTo>
-                  <a:pt x="676473" y="603688"/>
-                </a:lnTo>
-                <a:close/>
-                <a:lnTo>
-                  <a:pt x="680754" y="599406"/>
-                </a:lnTo>
-                <a:close/>
-                <a:lnTo>
-                  <a:pt x="685035" y="595125"/>
-                </a:lnTo>
-                <a:close/>
-                <a:lnTo>
-                  <a:pt x="689317" y="590843"/>
-                </a:lnTo>
-                <a:close/>
-                <a:lnTo>
-                  <a:pt x="693598" y="586562"/>
-                </a:lnTo>
-                <a:close/>
-                <a:lnTo>
-                  <a:pt x="697880" y="582280"/>
-                </a:lnTo>
-                <a:close/>
-                <a:lnTo>
-                  <a:pt x="702161" y="577999"/>
-                </a:lnTo>
-                <a:close/>
-                <a:lnTo>
-                  <a:pt x="706443" y="573717"/>
-                </a:lnTo>
-                <a:close/>
-                <a:lnTo>
-                  <a:pt x="710724" y="569436"/>
-                </a:lnTo>
-                <a:close/>
-                <a:lnTo>
-                  <a:pt x="715006" y="565154"/>
-                </a:lnTo>
-                <a:close/>
-                <a:lnTo>
-                  <a:pt x="719287" y="560873"/>
-                </a:lnTo>
-                <a:close/>
-                <a:lnTo>
-                  <a:pt x="723569" y="556591"/>
-                </a:lnTo>
-                <a:close/>
-                <a:lnTo>
-                  <a:pt x="727850" y="552310"/>
-                </a:lnTo>
-                <a:close/>
-                <a:lnTo>
-                  <a:pt x="732132" y="548028"/>
-                </a:lnTo>
-                <a:close/>
-                <a:lnTo>
-                  <a:pt x="736413" y="543747"/>
-                </a:lnTo>
-                <a:close/>
-                <a:lnTo>
-                  <a:pt x="740695" y="539465"/>
-                </a:lnTo>
-                <a:close/>
-                <a:lnTo>
-                  <a:pt x="744976" y="535184"/>
-                </a:lnTo>
-                <a:close/>
-                <a:lnTo>
-                  <a:pt x="749258" y="530902"/>
-                </a:lnTo>
-                <a:close/>
-                <a:lnTo>
-                  <a:pt x="753539" y="526621"/>
-                </a:lnTo>
-                <a:close/>
-                <a:lnTo>
-                  <a:pt x="757820" y="522340"/>
-                </a:lnTo>
-                <a:close/>
-                <a:lnTo>
-                  <a:pt x="762102" y="518058"/>
-                </a:lnTo>
-                <a:close/>
-                <a:lnTo>
-                  <a:pt x="766383" y="513777"/>
-                </a:lnTo>
-                <a:close/>
-                <a:lnTo>
-                  <a:pt x="770665" y="509495"/>
-                </a:lnTo>
-                <a:close/>
-                <a:lnTo>
-                  <a:pt x="774946" y="505214"/>
-                </a:lnTo>
-                <a:close/>
-                <a:lnTo>
-                  <a:pt x="779228" y="500932"/>
-                </a:lnTo>
-                <a:close/>
-                <a:lnTo>
-                  <a:pt x="783509" y="496651"/>
-                </a:lnTo>
-                <a:close/>
-                <a:lnTo>
-                  <a:pt x="787791" y="492369"/>
-                </a:lnTo>
-                <a:close/>
-                <a:lnTo>
-                  <a:pt x="792072" y="488088"/>
-                </a:lnTo>
-                <a:close/>
-                <a:lnTo>
-                  <a:pt x="796354" y="483806"/>
-                </a:lnTo>
-                <a:close/>
-                <a:lnTo>
-                  <a:pt x="800635" y="479525"/>
-                </a:lnTo>
-                <a:close/>
-                <a:lnTo>
-                  <a:pt x="804917" y="475243"/>
-                </a:lnTo>
-                <a:close/>
-                <a:lnTo>
-                  <a:pt x="809198" y="470962"/>
-                </a:lnTo>
-                <a:close/>
-                <a:lnTo>
-                  <a:pt x="813480" y="466680"/>
-                </a:lnTo>
-                <a:close/>
-                <a:lnTo>
-                  <a:pt x="817761" y="462399"/>
-                </a:lnTo>
-                <a:close/>
-                <a:lnTo>
-                  <a:pt x="822043" y="458117"/>
-                </a:lnTo>
-                <a:close/>
-                <a:lnTo>
-                  <a:pt x="826324" y="453836"/>
-                </a:lnTo>
-                <a:close/>
-                <a:lnTo>
-                  <a:pt x="830605" y="449555"/>
-                </a:lnTo>
-                <a:close/>
-                <a:lnTo>
-                  <a:pt x="834887" y="445273"/>
-                </a:lnTo>
-                <a:close/>
-                <a:lnTo>
-                  <a:pt x="839168" y="440992"/>
-                </a:lnTo>
-                <a:close/>
-                <a:lnTo>
-                  <a:pt x="843450" y="436710"/>
-                </a:lnTo>
-                <a:close/>
-                <a:lnTo>
-                  <a:pt x="847731" y="432429"/>
-                </a:lnTo>
-                <a:close/>
-                <a:lnTo>
-                  <a:pt x="852013" y="428147"/>
-                </a:lnTo>
-                <a:close/>
-                <a:lnTo>
-                  <a:pt x="856294" y="423866"/>
-                </a:lnTo>
-                <a:close/>
-                <a:lnTo>
-                  <a:pt x="860576" y="419584"/>
-                </a:lnTo>
-                <a:close/>
-                <a:lnTo>
-                  <a:pt x="864857" y="415303"/>
-                </a:lnTo>
-                <a:close/>
-                <a:lnTo>
-                  <a:pt x="869139" y="411021"/>
-                </a:lnTo>
-                <a:close/>
-                <a:lnTo>
-                  <a:pt x="873420" y="406740"/>
-                </a:lnTo>
-                <a:close/>
-                <a:lnTo>
-                  <a:pt x="877702" y="402458"/>
-                </a:lnTo>
-                <a:close/>
-                <a:lnTo>
-                  <a:pt x="881983" y="398177"/>
-                </a:lnTo>
-                <a:close/>
-                <a:lnTo>
-                  <a:pt x="886265" y="393895"/>
-                </a:lnTo>
-                <a:close/>
-                <a:lnTo>
-                  <a:pt x="890546" y="389614"/>
-                </a:lnTo>
-                <a:close/>
-                <a:lnTo>
-                  <a:pt x="894828" y="385332"/>
-                </a:lnTo>
-                <a:close/>
-                <a:lnTo>
-                  <a:pt x="899109" y="381051"/>
-                </a:lnTo>
-                <a:close/>
-                <a:lnTo>
-                  <a:pt x="903391" y="376769"/>
-                </a:lnTo>
-                <a:close/>
-                <a:lnTo>
-                  <a:pt x="907672" y="372488"/>
-                </a:lnTo>
-                <a:close/>
-                <a:lnTo>
-                  <a:pt x="911953" y="368207"/>
-                </a:lnTo>
-                <a:close/>
-                <a:lnTo>
-                  <a:pt x="916235" y="363925"/>
-                </a:lnTo>
-                <a:close/>
-                <a:lnTo>
-                  <a:pt x="920516" y="359644"/>
-                </a:lnTo>
-                <a:close/>
-                <a:lnTo>
-                  <a:pt x="924798" y="355362"/>
-                </a:lnTo>
-                <a:close/>
-                <a:lnTo>
-                  <a:pt x="929079" y="351081"/>
-                </a:lnTo>
-                <a:close/>
-                <a:lnTo>
-                  <a:pt x="933361" y="346799"/>
-                </a:lnTo>
-                <a:close/>
-                <a:lnTo>
-                  <a:pt x="937642" y="342518"/>
-                </a:lnTo>
-                <a:close/>
-                <a:lnTo>
-                  <a:pt x="941924" y="338236"/>
-                </a:lnTo>
-                <a:close/>
-                <a:lnTo>
-                  <a:pt x="946205" y="333955"/>
-                </a:lnTo>
-                <a:close/>
-                <a:lnTo>
-                  <a:pt x="950487" y="329673"/>
-                </a:lnTo>
-                <a:close/>
-                <a:lnTo>
-                  <a:pt x="954768" y="325392"/>
-                </a:lnTo>
-                <a:close/>
-                <a:lnTo>
-                  <a:pt x="959050" y="321110"/>
-                </a:lnTo>
-                <a:close/>
-                <a:lnTo>
-                  <a:pt x="963331" y="316829"/>
-                </a:lnTo>
-                <a:close/>
-                <a:lnTo>
-                  <a:pt x="967613" y="312547"/>
-                </a:lnTo>
-                <a:close/>
-                <a:lnTo>
-                  <a:pt x="971894" y="308266"/>
-                </a:lnTo>
-                <a:close/>
-                <a:lnTo>
-                  <a:pt x="976176" y="303984"/>
-                </a:lnTo>
-                <a:close/>
-                <a:lnTo>
-                  <a:pt x="980457" y="299703"/>
-                </a:lnTo>
-                <a:close/>
-                <a:lnTo>
-                  <a:pt x="984738" y="295422"/>
-                </a:lnTo>
-                <a:close/>
-                <a:lnTo>
-                  <a:pt x="989020" y="291140"/>
-                </a:lnTo>
-                <a:close/>
-                <a:lnTo>
-                  <a:pt x="993301" y="286859"/>
-                </a:lnTo>
-                <a:close/>
-                <a:lnTo>
-                  <a:pt x="997583" y="282577"/>
-                </a:lnTo>
-                <a:close/>
-                <a:lnTo>
-                  <a:pt x="1001864" y="278296"/>
-                </a:lnTo>
-                <a:close/>
-                <a:lnTo>
-                  <a:pt x="1006146" y="274014"/>
-                </a:lnTo>
-                <a:close/>
-                <a:lnTo>
-                  <a:pt x="1010427" y="269733"/>
-                </a:lnTo>
-                <a:close/>
-                <a:lnTo>
-                  <a:pt x="1014709" y="265451"/>
-                </a:lnTo>
-                <a:close/>
-                <a:lnTo>
-                  <a:pt x="1018990" y="261170"/>
-                </a:lnTo>
-                <a:close/>
-                <a:lnTo>
-                  <a:pt x="1023272" y="256888"/>
-                </a:lnTo>
-                <a:close/>
-                <a:lnTo>
-                  <a:pt x="1027553" y="252607"/>
-                </a:lnTo>
-                <a:close/>
-                <a:lnTo>
-                  <a:pt x="1031835" y="248325"/>
-                </a:lnTo>
-                <a:close/>
-                <a:lnTo>
-                  <a:pt x="1036116" y="244044"/>
-                </a:lnTo>
-                <a:close/>
-                <a:lnTo>
-                  <a:pt x="1040398" y="239762"/>
-                </a:lnTo>
-                <a:close/>
-                <a:lnTo>
-                  <a:pt x="1044679" y="235481"/>
-                </a:lnTo>
-                <a:close/>
-                <a:lnTo>
-                  <a:pt x="1048961" y="231199"/>
-                </a:lnTo>
-                <a:close/>
-                <a:lnTo>
-                  <a:pt x="1053242" y="226918"/>
-                </a:lnTo>
-                <a:close/>
-                <a:lnTo>
-                  <a:pt x="1057523" y="222637"/>
-                </a:lnTo>
-                <a:close/>
-                <a:lnTo>
-                  <a:pt x="1061805" y="218355"/>
-                </a:lnTo>
-                <a:close/>
-                <a:lnTo>
-                  <a:pt x="1066086" y="214074"/>
-                </a:lnTo>
-                <a:close/>
-                <a:lnTo>
-                  <a:pt x="1070368" y="209792"/>
-                </a:lnTo>
-                <a:close/>
-                <a:lnTo>
-                  <a:pt x="1074649" y="205511"/>
-                </a:lnTo>
-                <a:close/>
-                <a:lnTo>
-                  <a:pt x="1078931" y="201229"/>
-                </a:lnTo>
-                <a:close/>
-                <a:lnTo>
-                  <a:pt x="1083212" y="196948"/>
-                </a:lnTo>
-                <a:close/>
-                <a:lnTo>
-                  <a:pt x="1087494" y="192666"/>
-                </a:lnTo>
-                <a:close/>
-                <a:lnTo>
-                  <a:pt x="1091775" y="188385"/>
-                </a:lnTo>
-                <a:close/>
-                <a:lnTo>
-                  <a:pt x="1096057" y="184103"/>
-                </a:lnTo>
-                <a:close/>
-                <a:lnTo>
-                  <a:pt x="1100338" y="179822"/>
-                </a:lnTo>
-                <a:close/>
-                <a:lnTo>
-                  <a:pt x="1104620" y="175540"/>
-                </a:lnTo>
-                <a:close/>
-                <a:lnTo>
-                  <a:pt x="1108901" y="171259"/>
-                </a:lnTo>
-                <a:close/>
-                <a:lnTo>
-                  <a:pt x="1113183" y="166977"/>
-                </a:lnTo>
-                <a:close/>
-                <a:lnTo>
-                  <a:pt x="1117464" y="162696"/>
-                </a:lnTo>
-                <a:close/>
-                <a:lnTo>
-                  <a:pt x="1121746" y="158414"/>
-                </a:lnTo>
-                <a:close/>
-                <a:lnTo>
-                  <a:pt x="1126027" y="154133"/>
-                </a:lnTo>
-                <a:close/>
-                <a:lnTo>
-                  <a:pt x="1130308" y="149852"/>
-                </a:lnTo>
-                <a:close/>
-                <a:lnTo>
-                  <a:pt x="1134590" y="145570"/>
-                </a:lnTo>
-                <a:close/>
-                <a:lnTo>
-                  <a:pt x="1138871" y="141289"/>
-                </a:lnTo>
-                <a:close/>
-                <a:lnTo>
-                  <a:pt x="1143153" y="137007"/>
-                </a:lnTo>
-                <a:close/>
-                <a:lnTo>
-                  <a:pt x="1147434" y="132726"/>
-                </a:lnTo>
-                <a:close/>
-                <a:lnTo>
-                  <a:pt x="1151716" y="128444"/>
-                </a:lnTo>
-                <a:close/>
-                <a:lnTo>
-                  <a:pt x="1155997" y="124163"/>
-                </a:lnTo>
-                <a:close/>
-                <a:lnTo>
-                  <a:pt x="1160279" y="119881"/>
-                </a:lnTo>
-                <a:close/>
-                <a:lnTo>
-                  <a:pt x="1164560" y="115600"/>
-                </a:lnTo>
-                <a:close/>
-                <a:lnTo>
-                  <a:pt x="1168842" y="111318"/>
-                </a:lnTo>
-                <a:close/>
-                <a:lnTo>
-                  <a:pt x="1173123" y="107037"/>
-                </a:lnTo>
-                <a:close/>
-                <a:lnTo>
-                  <a:pt x="1177405" y="102755"/>
-                </a:lnTo>
-                <a:close/>
-                <a:lnTo>
-                  <a:pt x="1181686" y="98474"/>
-                </a:lnTo>
-                <a:close/>
-                <a:lnTo>
-                  <a:pt x="1185968" y="94192"/>
-                </a:lnTo>
-                <a:close/>
-                <a:lnTo>
-                  <a:pt x="1190249" y="89911"/>
-                </a:lnTo>
-                <a:close/>
-                <a:lnTo>
-                  <a:pt x="1194531" y="85629"/>
-                </a:lnTo>
-                <a:close/>
-                <a:lnTo>
-                  <a:pt x="1198812" y="81348"/>
-                </a:lnTo>
-                <a:close/>
-                <a:lnTo>
-                  <a:pt x="1203094" y="77066"/>
-                </a:lnTo>
-                <a:close/>
-                <a:lnTo>
-                  <a:pt x="1207375" y="72785"/>
-                </a:lnTo>
-                <a:close/>
-                <a:lnTo>
-                  <a:pt x="1211656" y="68504"/>
-                </a:lnTo>
-                <a:close/>
-                <a:lnTo>
-                  <a:pt x="1215938" y="64222"/>
-                </a:lnTo>
-                <a:close/>
-                <a:lnTo>
-                  <a:pt x="1220219" y="59941"/>
-                </a:lnTo>
-                <a:close/>
-                <a:lnTo>
-                  <a:pt x="1224501" y="55659"/>
-                </a:lnTo>
-                <a:close/>
-                <a:lnTo>
-                  <a:pt x="1228782" y="51378"/>
-                </a:lnTo>
-                <a:close/>
-                <a:lnTo>
-                  <a:pt x="1233064" y="47096"/>
-                </a:lnTo>
-                <a:close/>
-                <a:lnTo>
-                  <a:pt x="1237345" y="42815"/>
-                </a:lnTo>
-                <a:close/>
-                <a:lnTo>
-                  <a:pt x="1241627" y="38533"/>
-                </a:lnTo>
-                <a:close/>
-                <a:lnTo>
-                  <a:pt x="1245908" y="34252"/>
-                </a:lnTo>
-                <a:close/>
-                <a:lnTo>
-                  <a:pt x="1250190" y="29970"/>
-                </a:lnTo>
-                <a:close/>
-                <a:lnTo>
-                  <a:pt x="1254471" y="25689"/>
-                </a:lnTo>
-                <a:close/>
-                <a:lnTo>
-                  <a:pt x="1258753" y="21407"/>
-                </a:lnTo>
-                <a:close/>
-                <a:lnTo>
-                  <a:pt x="1263034" y="17126"/>
-                </a:lnTo>
-                <a:close/>
-                <a:lnTo>
-                  <a:pt x="1267316" y="12844"/>
-                </a:lnTo>
-                <a:close/>
-                <a:lnTo>
-                  <a:pt x="1271597" y="8563"/>
-                </a:lnTo>
-                <a:close/>
-                <a:lnTo>
-                  <a:pt x="1275879" y="4281"/>
-                </a:lnTo>
-                <a:close/>
-                <a:lnTo>
-                  <a:pt x="1280160" y="0"/>
+                  <a:pt x="582586" y="1039786"/>
+                </a:lnTo>
+                <a:close/>
+                <a:lnTo>
+                  <a:pt x="587173" y="1044373"/>
+                </a:lnTo>
+                <a:close/>
+                <a:lnTo>
+                  <a:pt x="591761" y="1048961"/>
+                </a:lnTo>
+                <a:close/>
+                <a:lnTo>
+                  <a:pt x="596348" y="1053548"/>
+                </a:lnTo>
+                <a:close/>
+                <a:lnTo>
+                  <a:pt x="600935" y="1058135"/>
+                </a:lnTo>
+                <a:close/>
+                <a:lnTo>
+                  <a:pt x="605522" y="1062722"/>
+                </a:lnTo>
+                <a:close/>
+                <a:lnTo>
+                  <a:pt x="610110" y="1067310"/>
+                </a:lnTo>
+                <a:close/>
+                <a:lnTo>
+                  <a:pt x="614697" y="1071897"/>
+                </a:lnTo>
+                <a:close/>
+                <a:lnTo>
+                  <a:pt x="619284" y="1076484"/>
+                </a:lnTo>
+                <a:close/>
+                <a:lnTo>
+                  <a:pt x="623872" y="1081072"/>
+                </a:lnTo>
+                <a:close/>
+                <a:lnTo>
+                  <a:pt x="628459" y="1085659"/>
+                </a:lnTo>
+                <a:close/>
+                <a:lnTo>
+                  <a:pt x="633046" y="1090246"/>
+                </a:lnTo>
+                <a:close/>
+                <a:lnTo>
+                  <a:pt x="637633" y="1094833"/>
+                </a:lnTo>
+                <a:close/>
+                <a:lnTo>
+                  <a:pt x="642221" y="1099421"/>
+                </a:lnTo>
+                <a:close/>
+                <a:lnTo>
+                  <a:pt x="646808" y="1104008"/>
+                </a:lnTo>
+                <a:close/>
+                <a:lnTo>
+                  <a:pt x="651395" y="1108595"/>
+                </a:lnTo>
+                <a:close/>
+                <a:lnTo>
+                  <a:pt x="655983" y="1113183"/>
+                </a:lnTo>
+                <a:close/>
+                <a:lnTo>
+                  <a:pt x="660570" y="1117770"/>
+                </a:lnTo>
+                <a:close/>
+                <a:lnTo>
+                  <a:pt x="665157" y="1122357"/>
+                </a:lnTo>
+                <a:close/>
+                <a:lnTo>
+                  <a:pt x="669744" y="1126947"/>
+                </a:lnTo>
+                <a:close/>
+                <a:lnTo>
+                  <a:pt x="674332" y="1131556"/>
+                </a:lnTo>
+                <a:close/>
+                <a:lnTo>
+                  <a:pt x="678919" y="1136324"/>
+                </a:lnTo>
+                <a:close/>
+                <a:lnTo>
+                  <a:pt x="683506" y="1141668"/>
+                </a:lnTo>
+                <a:close/>
+                <a:lnTo>
+                  <a:pt x="688094" y="683763"/>
+                </a:lnTo>
+                <a:close/>
+                <a:lnTo>
+                  <a:pt x="692681" y="678974"/>
+                </a:lnTo>
+                <a:close/>
+                <a:lnTo>
+                  <a:pt x="697268" y="674338"/>
+                </a:lnTo>
+                <a:close/>
+                <a:lnTo>
+                  <a:pt x="701856" y="669745"/>
+                </a:lnTo>
+                <a:close/>
+                <a:lnTo>
+                  <a:pt x="706443" y="665157"/>
+                </a:lnTo>
+                <a:close/>
+                <a:lnTo>
+                  <a:pt x="711030" y="660570"/>
+                </a:lnTo>
+                <a:close/>
+                <a:lnTo>
+                  <a:pt x="715617" y="655983"/>
+                </a:lnTo>
+                <a:close/>
+                <a:lnTo>
+                  <a:pt x="720205" y="651395"/>
+                </a:lnTo>
+                <a:close/>
+                <a:lnTo>
+                  <a:pt x="724792" y="646808"/>
+                </a:lnTo>
+                <a:close/>
+                <a:lnTo>
+                  <a:pt x="729379" y="642221"/>
+                </a:lnTo>
+                <a:close/>
+                <a:lnTo>
+                  <a:pt x="733967" y="637633"/>
+                </a:lnTo>
+                <a:close/>
+                <a:lnTo>
+                  <a:pt x="738554" y="633046"/>
+                </a:lnTo>
+                <a:close/>
+                <a:lnTo>
+                  <a:pt x="743141" y="628459"/>
+                </a:lnTo>
+                <a:close/>
+                <a:lnTo>
+                  <a:pt x="747728" y="623872"/>
+                </a:lnTo>
+                <a:close/>
+                <a:lnTo>
+                  <a:pt x="752316" y="619284"/>
+                </a:lnTo>
+                <a:close/>
+                <a:lnTo>
+                  <a:pt x="756903" y="614697"/>
+                </a:lnTo>
+                <a:close/>
+                <a:lnTo>
+                  <a:pt x="761490" y="610110"/>
+                </a:lnTo>
+                <a:close/>
+                <a:lnTo>
+                  <a:pt x="766078" y="605522"/>
+                </a:lnTo>
+                <a:close/>
+                <a:lnTo>
+                  <a:pt x="770665" y="600935"/>
+                </a:lnTo>
+                <a:close/>
+                <a:lnTo>
+                  <a:pt x="775252" y="596348"/>
+                </a:lnTo>
+                <a:close/>
+                <a:lnTo>
+                  <a:pt x="779839" y="591761"/>
+                </a:lnTo>
+                <a:close/>
+                <a:lnTo>
+                  <a:pt x="784427" y="587173"/>
+                </a:lnTo>
+                <a:close/>
+                <a:lnTo>
+                  <a:pt x="789014" y="582586"/>
+                </a:lnTo>
+                <a:close/>
+                <a:lnTo>
+                  <a:pt x="793601" y="577999"/>
+                </a:lnTo>
+                <a:close/>
+                <a:lnTo>
+                  <a:pt x="798189" y="573411"/>
+                </a:lnTo>
+                <a:close/>
+                <a:lnTo>
+                  <a:pt x="802776" y="568824"/>
+                </a:lnTo>
+                <a:close/>
+                <a:lnTo>
+                  <a:pt x="807363" y="564237"/>
+                </a:lnTo>
+                <a:close/>
+                <a:lnTo>
+                  <a:pt x="811951" y="559649"/>
+                </a:lnTo>
+                <a:close/>
+                <a:lnTo>
+                  <a:pt x="816538" y="555062"/>
+                </a:lnTo>
+                <a:close/>
+                <a:lnTo>
+                  <a:pt x="821125" y="550475"/>
+                </a:lnTo>
+                <a:close/>
+                <a:lnTo>
+                  <a:pt x="825712" y="545888"/>
+                </a:lnTo>
+                <a:close/>
+                <a:lnTo>
+                  <a:pt x="830300" y="541300"/>
+                </a:lnTo>
+                <a:close/>
+                <a:lnTo>
+                  <a:pt x="834887" y="536713"/>
+                </a:lnTo>
+                <a:close/>
+                <a:lnTo>
+                  <a:pt x="839474" y="532126"/>
+                </a:lnTo>
+                <a:close/>
+                <a:lnTo>
+                  <a:pt x="844062" y="527538"/>
+                </a:lnTo>
+                <a:close/>
+                <a:lnTo>
+                  <a:pt x="848649" y="522951"/>
+                </a:lnTo>
+                <a:close/>
+                <a:lnTo>
+                  <a:pt x="853236" y="518364"/>
+                </a:lnTo>
+                <a:close/>
+                <a:lnTo>
+                  <a:pt x="857823" y="513777"/>
+                </a:lnTo>
+                <a:close/>
+                <a:lnTo>
+                  <a:pt x="862411" y="509189"/>
+                </a:lnTo>
+                <a:close/>
+                <a:lnTo>
+                  <a:pt x="866998" y="504602"/>
+                </a:lnTo>
+                <a:close/>
+                <a:lnTo>
+                  <a:pt x="871585" y="500015"/>
+                </a:lnTo>
+                <a:close/>
+                <a:lnTo>
+                  <a:pt x="876173" y="495427"/>
+                </a:lnTo>
+                <a:close/>
+                <a:lnTo>
+                  <a:pt x="880760" y="490840"/>
+                </a:lnTo>
+                <a:close/>
+                <a:lnTo>
+                  <a:pt x="885347" y="486253"/>
+                </a:lnTo>
+                <a:close/>
+                <a:lnTo>
+                  <a:pt x="889934" y="481666"/>
+                </a:lnTo>
+                <a:close/>
+                <a:lnTo>
+                  <a:pt x="894522" y="477078"/>
+                </a:lnTo>
+                <a:close/>
+                <a:lnTo>
+                  <a:pt x="899109" y="472491"/>
+                </a:lnTo>
+                <a:close/>
+                <a:lnTo>
+                  <a:pt x="903696" y="467904"/>
+                </a:lnTo>
+                <a:close/>
+                <a:lnTo>
+                  <a:pt x="908284" y="463316"/>
+                </a:lnTo>
+                <a:close/>
+                <a:lnTo>
+                  <a:pt x="912871" y="458729"/>
+                </a:lnTo>
+                <a:close/>
+                <a:lnTo>
+                  <a:pt x="917458" y="454142"/>
+                </a:lnTo>
+                <a:close/>
+                <a:lnTo>
+                  <a:pt x="922045" y="449555"/>
+                </a:lnTo>
+                <a:close/>
+                <a:lnTo>
+                  <a:pt x="926633" y="444967"/>
+                </a:lnTo>
+                <a:close/>
+                <a:lnTo>
+                  <a:pt x="931220" y="440380"/>
+                </a:lnTo>
+                <a:close/>
+                <a:lnTo>
+                  <a:pt x="935807" y="435793"/>
+                </a:lnTo>
+                <a:close/>
+                <a:lnTo>
+                  <a:pt x="940395" y="431205"/>
+                </a:lnTo>
+                <a:close/>
+                <a:lnTo>
+                  <a:pt x="944982" y="426618"/>
+                </a:lnTo>
+                <a:close/>
+                <a:lnTo>
+                  <a:pt x="949569" y="422031"/>
+                </a:lnTo>
+                <a:close/>
+                <a:lnTo>
+                  <a:pt x="954157" y="417443"/>
+                </a:lnTo>
+                <a:close/>
+                <a:lnTo>
+                  <a:pt x="958744" y="412856"/>
+                </a:lnTo>
+                <a:close/>
+                <a:lnTo>
+                  <a:pt x="963331" y="408269"/>
+                </a:lnTo>
+                <a:close/>
+                <a:lnTo>
+                  <a:pt x="967918" y="403682"/>
+                </a:lnTo>
+                <a:close/>
+                <a:lnTo>
+                  <a:pt x="972506" y="399094"/>
+                </a:lnTo>
+                <a:close/>
+                <a:lnTo>
+                  <a:pt x="977093" y="394507"/>
+                </a:lnTo>
+                <a:close/>
+                <a:lnTo>
+                  <a:pt x="981680" y="389920"/>
+                </a:lnTo>
+                <a:close/>
+                <a:lnTo>
+                  <a:pt x="986268" y="385332"/>
+                </a:lnTo>
+                <a:close/>
+                <a:lnTo>
+                  <a:pt x="990855" y="380745"/>
+                </a:lnTo>
+                <a:close/>
+                <a:lnTo>
+                  <a:pt x="995442" y="376158"/>
+                </a:lnTo>
+                <a:close/>
+                <a:lnTo>
+                  <a:pt x="1000029" y="371571"/>
+                </a:lnTo>
+                <a:close/>
+                <a:lnTo>
+                  <a:pt x="1004617" y="366983"/>
+                </a:lnTo>
+                <a:close/>
+                <a:lnTo>
+                  <a:pt x="1009204" y="362396"/>
+                </a:lnTo>
+                <a:close/>
+                <a:lnTo>
+                  <a:pt x="1013791" y="357809"/>
+                </a:lnTo>
+                <a:close/>
+                <a:lnTo>
+                  <a:pt x="1018379" y="353221"/>
+                </a:lnTo>
+                <a:close/>
+                <a:lnTo>
+                  <a:pt x="1022966" y="348634"/>
+                </a:lnTo>
+                <a:close/>
+                <a:lnTo>
+                  <a:pt x="1027553" y="344047"/>
+                </a:lnTo>
+                <a:close/>
+                <a:lnTo>
+                  <a:pt x="1032140" y="339460"/>
+                </a:lnTo>
+                <a:close/>
+                <a:lnTo>
+                  <a:pt x="1036728" y="334872"/>
+                </a:lnTo>
+                <a:close/>
+                <a:lnTo>
+                  <a:pt x="1041315" y="330285"/>
+                </a:lnTo>
+                <a:close/>
+                <a:lnTo>
+                  <a:pt x="1045902" y="325698"/>
+                </a:lnTo>
+                <a:close/>
+                <a:lnTo>
+                  <a:pt x="1050490" y="321110"/>
+                </a:lnTo>
+                <a:close/>
+                <a:lnTo>
+                  <a:pt x="1055077" y="316523"/>
+                </a:lnTo>
+                <a:close/>
+                <a:lnTo>
+                  <a:pt x="1059664" y="311936"/>
+                </a:lnTo>
+                <a:close/>
+                <a:lnTo>
+                  <a:pt x="1064252" y="307348"/>
+                </a:lnTo>
+                <a:close/>
+                <a:lnTo>
+                  <a:pt x="1068839" y="302761"/>
+                </a:lnTo>
+                <a:close/>
+                <a:lnTo>
+                  <a:pt x="1073426" y="298174"/>
+                </a:lnTo>
+                <a:close/>
+                <a:lnTo>
+                  <a:pt x="1078013" y="293587"/>
+                </a:lnTo>
+                <a:close/>
+                <a:lnTo>
+                  <a:pt x="1082601" y="288999"/>
+                </a:lnTo>
+                <a:close/>
+                <a:lnTo>
+                  <a:pt x="1087188" y="284412"/>
+                </a:lnTo>
+                <a:close/>
+                <a:lnTo>
+                  <a:pt x="1091775" y="279825"/>
+                </a:lnTo>
+                <a:close/>
+                <a:lnTo>
+                  <a:pt x="1096363" y="275237"/>
+                </a:lnTo>
+                <a:close/>
+                <a:lnTo>
+                  <a:pt x="1100950" y="270650"/>
+                </a:lnTo>
+                <a:close/>
+                <a:lnTo>
+                  <a:pt x="1105537" y="266063"/>
+                </a:lnTo>
+                <a:close/>
+                <a:lnTo>
+                  <a:pt x="1110124" y="261476"/>
+                </a:lnTo>
+                <a:close/>
+                <a:lnTo>
+                  <a:pt x="1114712" y="256888"/>
+                </a:lnTo>
+                <a:close/>
+                <a:lnTo>
+                  <a:pt x="1119299" y="252301"/>
+                </a:lnTo>
+                <a:close/>
+                <a:lnTo>
+                  <a:pt x="1123886" y="247714"/>
+                </a:lnTo>
+                <a:close/>
+                <a:lnTo>
+                  <a:pt x="1128474" y="243126"/>
+                </a:lnTo>
+                <a:close/>
+                <a:lnTo>
+                  <a:pt x="1133061" y="238539"/>
+                </a:lnTo>
+                <a:close/>
+                <a:lnTo>
+                  <a:pt x="1137648" y="233952"/>
+                </a:lnTo>
+                <a:close/>
+                <a:lnTo>
+                  <a:pt x="1142235" y="229365"/>
+                </a:lnTo>
+                <a:close/>
+                <a:lnTo>
+                  <a:pt x="1146823" y="224777"/>
+                </a:lnTo>
+                <a:close/>
+                <a:lnTo>
+                  <a:pt x="1151410" y="220190"/>
+                </a:lnTo>
+                <a:close/>
+                <a:lnTo>
+                  <a:pt x="1155997" y="215603"/>
+                </a:lnTo>
+                <a:close/>
+                <a:lnTo>
+                  <a:pt x="1160585" y="211015"/>
+                </a:lnTo>
+                <a:close/>
+                <a:lnTo>
+                  <a:pt x="1165172" y="206428"/>
+                </a:lnTo>
+                <a:close/>
+                <a:lnTo>
+                  <a:pt x="1169759" y="201841"/>
+                </a:lnTo>
+                <a:close/>
+                <a:lnTo>
+                  <a:pt x="1174346" y="197254"/>
+                </a:lnTo>
+                <a:close/>
+                <a:lnTo>
+                  <a:pt x="1178934" y="192666"/>
+                </a:lnTo>
+                <a:close/>
+                <a:lnTo>
+                  <a:pt x="1183521" y="188079"/>
+                </a:lnTo>
+                <a:close/>
+                <a:lnTo>
+                  <a:pt x="1188108" y="183492"/>
+                </a:lnTo>
+                <a:close/>
+                <a:lnTo>
+                  <a:pt x="1192696" y="178904"/>
+                </a:lnTo>
+                <a:close/>
+                <a:lnTo>
+                  <a:pt x="1197283" y="174317"/>
+                </a:lnTo>
+                <a:close/>
+                <a:lnTo>
+                  <a:pt x="1201870" y="169730"/>
+                </a:lnTo>
+                <a:close/>
+                <a:lnTo>
+                  <a:pt x="1206458" y="165142"/>
+                </a:lnTo>
+                <a:close/>
+                <a:lnTo>
+                  <a:pt x="1211045" y="160555"/>
+                </a:lnTo>
+                <a:close/>
+                <a:lnTo>
+                  <a:pt x="1215632" y="155968"/>
+                </a:lnTo>
+                <a:close/>
+                <a:lnTo>
+                  <a:pt x="1220219" y="151381"/>
+                </a:lnTo>
+                <a:close/>
+                <a:lnTo>
+                  <a:pt x="1224807" y="146793"/>
+                </a:lnTo>
+                <a:close/>
+                <a:lnTo>
+                  <a:pt x="1229394" y="142206"/>
+                </a:lnTo>
+                <a:close/>
+                <a:lnTo>
+                  <a:pt x="1233981" y="137619"/>
+                </a:lnTo>
+                <a:close/>
+                <a:lnTo>
+                  <a:pt x="1238569" y="133031"/>
+                </a:lnTo>
+                <a:close/>
+                <a:lnTo>
+                  <a:pt x="1243156" y="128444"/>
+                </a:lnTo>
+                <a:close/>
+                <a:lnTo>
+                  <a:pt x="1247743" y="123857"/>
+                </a:lnTo>
+                <a:close/>
+                <a:lnTo>
+                  <a:pt x="1252330" y="119270"/>
+                </a:lnTo>
+                <a:close/>
+                <a:lnTo>
+                  <a:pt x="1256918" y="114682"/>
+                </a:lnTo>
+                <a:close/>
+                <a:lnTo>
+                  <a:pt x="1261505" y="110095"/>
+                </a:lnTo>
+                <a:close/>
+                <a:lnTo>
+                  <a:pt x="1266092" y="105508"/>
+                </a:lnTo>
+                <a:close/>
+                <a:lnTo>
+                  <a:pt x="1270680" y="100920"/>
+                </a:lnTo>
+                <a:close/>
+                <a:lnTo>
+                  <a:pt x="1275267" y="96333"/>
+                </a:lnTo>
+                <a:close/>
+                <a:lnTo>
+                  <a:pt x="1279854" y="91746"/>
+                </a:lnTo>
+                <a:close/>
+                <a:lnTo>
+                  <a:pt x="1284441" y="87159"/>
+                </a:lnTo>
+                <a:close/>
+                <a:lnTo>
+                  <a:pt x="1289029" y="82571"/>
+                </a:lnTo>
+                <a:close/>
+                <a:lnTo>
+                  <a:pt x="1293616" y="77984"/>
+                </a:lnTo>
+                <a:close/>
+                <a:lnTo>
+                  <a:pt x="1298203" y="73397"/>
+                </a:lnTo>
+                <a:close/>
+                <a:lnTo>
+                  <a:pt x="1302791" y="68809"/>
+                </a:lnTo>
+                <a:close/>
+                <a:lnTo>
+                  <a:pt x="1307378" y="64222"/>
+                </a:lnTo>
+                <a:close/>
+                <a:lnTo>
+                  <a:pt x="1311965" y="59635"/>
+                </a:lnTo>
+                <a:close/>
+                <a:lnTo>
+                  <a:pt x="1316553" y="55047"/>
+                </a:lnTo>
+                <a:close/>
+                <a:lnTo>
+                  <a:pt x="1321140" y="50460"/>
+                </a:lnTo>
+                <a:close/>
+                <a:lnTo>
+                  <a:pt x="1325727" y="45873"/>
+                </a:lnTo>
+                <a:close/>
+                <a:lnTo>
+                  <a:pt x="1330314" y="41286"/>
+                </a:lnTo>
+                <a:close/>
+                <a:lnTo>
+                  <a:pt x="1334902" y="36698"/>
+                </a:lnTo>
+                <a:close/>
+                <a:lnTo>
+                  <a:pt x="1339489" y="32111"/>
+                </a:lnTo>
+                <a:close/>
+                <a:lnTo>
+                  <a:pt x="1344076" y="27524"/>
+                </a:lnTo>
+                <a:close/>
+                <a:lnTo>
+                  <a:pt x="1348664" y="22936"/>
+                </a:lnTo>
+                <a:close/>
+                <a:lnTo>
+                  <a:pt x="1353251" y="18349"/>
+                </a:lnTo>
+                <a:close/>
+                <a:lnTo>
+                  <a:pt x="1357838" y="13762"/>
+                </a:lnTo>
+                <a:close/>
+                <a:lnTo>
+                  <a:pt x="1362425" y="9175"/>
+                </a:lnTo>
+                <a:close/>
+                <a:lnTo>
+                  <a:pt x="1367013" y="4587"/>
+                </a:lnTo>
+                <a:close/>
+                <a:lnTo>
+                  <a:pt x="1371600" y="0"/>
                 </a:lnTo>
                 <a:close/>
               </a:path>
@@ -4389,7 +4389,7 @@
           </a:custGeom>
           <a:ln w="31750">
             <a:solidFill>
-              <a:srgbClr val="00E5FF"/>
+              <a:srgbClr val="FFFFFF"/>
             </a:solidFill>
           </a:ln>
         </p:spPr>
@@ -4538,7 +4538,7 @@
             <a:avLst/>
           </a:prstGeom>
           <a:solidFill>
-            <a:srgbClr val="0A0A0A"/>
+            <a:srgbClr val="000000"/>
           </a:solidFill>
           <a:ln w="12700">
             <a:solidFill>
@@ -4621,8 +4621,8 @@
         </p:nvSpPr>
         <p:spPr>
           <a:xfrm>
-            <a:off x="4846320" y="1931670"/>
-            <a:ext cx="91440" cy="91440"/>
+            <a:off x="4800600" y="1885950"/>
+            <a:ext cx="137160" cy="137160"/>
           </a:xfrm>
           <a:custGeom>
             <a:avLst/>
@@ -4631,16 +4631,12 @@
             <a:cxnLst/>
             <a:rect l="l" t="t" r="r" b="b"/>
             <a:pathLst>
-              <a:path w="91440" h="91440">
+              <a:path w="137160" h="137160">
                 <a:moveTo>
                   <a:pt x="0" y="0"/>
                 </a:moveTo>
                 <a:lnTo>
-                  <a:pt x="924" y="924"/>
-                </a:lnTo>
-                <a:close/>
-                <a:lnTo>
-                  <a:pt x="1847" y="1847"/>
+                  <a:pt x="1385" y="1385"/>
                 </a:lnTo>
                 <a:close/>
                 <a:lnTo>
@@ -4648,11 +4644,7 @@
                 </a:lnTo>
                 <a:close/>
                 <a:lnTo>
-                  <a:pt x="3695" y="3695"/>
-                </a:lnTo>
-                <a:close/>
-                <a:lnTo>
-                  <a:pt x="4618" y="4618"/>
+                  <a:pt x="4156" y="4156"/>
                 </a:lnTo>
                 <a:close/>
                 <a:lnTo>
@@ -4660,11 +4652,7 @@
                 </a:lnTo>
                 <a:close/>
                 <a:lnTo>
-                  <a:pt x="6465" y="6465"/>
-                </a:lnTo>
-                <a:close/>
-                <a:lnTo>
-                  <a:pt x="7389" y="7389"/>
+                  <a:pt x="6927" y="6927"/>
                 </a:lnTo>
                 <a:close/>
                 <a:lnTo>
@@ -4672,11 +4660,7 @@
                 </a:lnTo>
                 <a:close/>
                 <a:lnTo>
-                  <a:pt x="9236" y="9236"/>
-                </a:lnTo>
-                <a:close/>
-                <a:lnTo>
-                  <a:pt x="10160" y="10160"/>
+                  <a:pt x="9698" y="9698"/>
                 </a:lnTo>
                 <a:close/>
                 <a:lnTo>
@@ -4684,11 +4668,7 @@
                 </a:lnTo>
                 <a:close/>
                 <a:lnTo>
-                  <a:pt x="12007" y="12007"/>
-                </a:lnTo>
-                <a:close/>
-                <a:lnTo>
-                  <a:pt x="12931" y="12931"/>
+                  <a:pt x="12469" y="12469"/>
                 </a:lnTo>
                 <a:close/>
                 <a:lnTo>
@@ -4696,11 +4676,7 @@
                 </a:lnTo>
                 <a:close/>
                 <a:lnTo>
-                  <a:pt x="14778" y="14778"/>
-                </a:lnTo>
-                <a:close/>
-                <a:lnTo>
-                  <a:pt x="15702" y="15702"/>
+                  <a:pt x="15240" y="15240"/>
                 </a:lnTo>
                 <a:close/>
                 <a:lnTo>
@@ -4708,11 +4684,7 @@
                 </a:lnTo>
                 <a:close/>
                 <a:lnTo>
-                  <a:pt x="17549" y="17549"/>
-                </a:lnTo>
-                <a:close/>
-                <a:lnTo>
-                  <a:pt x="18473" y="18473"/>
+                  <a:pt x="18011" y="18011"/>
                 </a:lnTo>
                 <a:close/>
                 <a:lnTo>
@@ -4720,11 +4692,7 @@
                 </a:lnTo>
                 <a:close/>
                 <a:lnTo>
-                  <a:pt x="20320" y="20320"/>
-                </a:lnTo>
-                <a:close/>
-                <a:lnTo>
-                  <a:pt x="21244" y="21244"/>
+                  <a:pt x="20782" y="20782"/>
                 </a:lnTo>
                 <a:close/>
                 <a:lnTo>
@@ -4732,11 +4700,7 @@
                 </a:lnTo>
                 <a:close/>
                 <a:lnTo>
-                  <a:pt x="23091" y="23091"/>
-                </a:lnTo>
-                <a:close/>
-                <a:lnTo>
-                  <a:pt x="24015" y="24015"/>
+                  <a:pt x="23553" y="23553"/>
                 </a:lnTo>
                 <a:close/>
                 <a:lnTo>
@@ -4744,11 +4708,7 @@
                 </a:lnTo>
                 <a:close/>
                 <a:lnTo>
-                  <a:pt x="25862" y="25862"/>
-                </a:lnTo>
-                <a:close/>
-                <a:lnTo>
-                  <a:pt x="26785" y="26785"/>
+                  <a:pt x="26324" y="26324"/>
                 </a:lnTo>
                 <a:close/>
                 <a:lnTo>
@@ -4756,11 +4716,7 @@
                 </a:lnTo>
                 <a:close/>
                 <a:lnTo>
-                  <a:pt x="28633" y="28633"/>
-                </a:lnTo>
-                <a:close/>
-                <a:lnTo>
-                  <a:pt x="29556" y="29556"/>
+                  <a:pt x="29095" y="29095"/>
                 </a:lnTo>
                 <a:close/>
                 <a:lnTo>
@@ -4768,11 +4724,7 @@
                 </a:lnTo>
                 <a:close/>
                 <a:lnTo>
-                  <a:pt x="31404" y="31404"/>
-                </a:lnTo>
-                <a:close/>
-                <a:lnTo>
-                  <a:pt x="32327" y="32327"/>
+                  <a:pt x="31865" y="31865"/>
                 </a:lnTo>
                 <a:close/>
                 <a:lnTo>
@@ -4780,11 +4732,7 @@
                 </a:lnTo>
                 <a:close/>
                 <a:lnTo>
-                  <a:pt x="34175" y="34175"/>
-                </a:lnTo>
-                <a:close/>
-                <a:lnTo>
-                  <a:pt x="35098" y="35098"/>
+                  <a:pt x="34636" y="34636"/>
                 </a:lnTo>
                 <a:close/>
                 <a:lnTo>
@@ -4792,11 +4740,7 @@
                 </a:lnTo>
                 <a:close/>
                 <a:lnTo>
-                  <a:pt x="36945" y="36945"/>
-                </a:lnTo>
-                <a:close/>
-                <a:lnTo>
-                  <a:pt x="37869" y="37869"/>
+                  <a:pt x="37407" y="37407"/>
                 </a:lnTo>
                 <a:close/>
                 <a:lnTo>
@@ -4804,11 +4748,7 @@
                 </a:lnTo>
                 <a:close/>
                 <a:lnTo>
-                  <a:pt x="39716" y="39716"/>
-                </a:lnTo>
-                <a:close/>
-                <a:lnTo>
-                  <a:pt x="40640" y="40640"/>
+                  <a:pt x="40178" y="40178"/>
                 </a:lnTo>
                 <a:close/>
                 <a:lnTo>
@@ -4816,11 +4756,7 @@
                 </a:lnTo>
                 <a:close/>
                 <a:lnTo>
-                  <a:pt x="42487" y="42487"/>
-                </a:lnTo>
-                <a:close/>
-                <a:lnTo>
-                  <a:pt x="43411" y="43411"/>
+                  <a:pt x="42949" y="42949"/>
                 </a:lnTo>
                 <a:close/>
                 <a:lnTo>
@@ -4828,11 +4764,7 @@
                 </a:lnTo>
                 <a:close/>
                 <a:lnTo>
-                  <a:pt x="45258" y="45258"/>
-                </a:lnTo>
-                <a:close/>
-                <a:lnTo>
-                  <a:pt x="46182" y="46182"/>
+                  <a:pt x="45720" y="45720"/>
                 </a:lnTo>
                 <a:close/>
                 <a:lnTo>
@@ -4840,11 +4772,7 @@
                 </a:lnTo>
                 <a:close/>
                 <a:lnTo>
-                  <a:pt x="48029" y="48029"/>
-                </a:lnTo>
-                <a:close/>
-                <a:lnTo>
-                  <a:pt x="48953" y="48953"/>
+                  <a:pt x="48491" y="48491"/>
                 </a:lnTo>
                 <a:close/>
                 <a:lnTo>
@@ -4852,11 +4780,7 @@
                 </a:lnTo>
                 <a:close/>
                 <a:lnTo>
-                  <a:pt x="50800" y="50800"/>
-                </a:lnTo>
-                <a:close/>
-                <a:lnTo>
-                  <a:pt x="51724" y="51724"/>
+                  <a:pt x="51262" y="51262"/>
                 </a:lnTo>
                 <a:close/>
                 <a:lnTo>
@@ -4864,11 +4788,7 @@
                 </a:lnTo>
                 <a:close/>
                 <a:lnTo>
-                  <a:pt x="53571" y="53571"/>
-                </a:lnTo>
-                <a:close/>
-                <a:lnTo>
-                  <a:pt x="54495" y="54495"/>
+                  <a:pt x="54033" y="54033"/>
                 </a:lnTo>
                 <a:close/>
                 <a:lnTo>
@@ -4876,11 +4796,7 @@
                 </a:lnTo>
                 <a:close/>
                 <a:lnTo>
-                  <a:pt x="56342" y="56342"/>
-                </a:lnTo>
-                <a:close/>
-                <a:lnTo>
-                  <a:pt x="57265" y="57265"/>
+                  <a:pt x="56804" y="56804"/>
                 </a:lnTo>
                 <a:close/>
                 <a:lnTo>
@@ -4888,11 +4804,7 @@
                 </a:lnTo>
                 <a:close/>
                 <a:lnTo>
-                  <a:pt x="59113" y="59113"/>
-                </a:lnTo>
-                <a:close/>
-                <a:lnTo>
-                  <a:pt x="60036" y="60036"/>
+                  <a:pt x="59575" y="59575"/>
                 </a:lnTo>
                 <a:close/>
                 <a:lnTo>
@@ -4900,11 +4812,7 @@
                 </a:lnTo>
                 <a:close/>
                 <a:lnTo>
-                  <a:pt x="61884" y="61884"/>
-                </a:lnTo>
-                <a:close/>
-                <a:lnTo>
-                  <a:pt x="62807" y="62807"/>
+                  <a:pt x="62345" y="62345"/>
                 </a:lnTo>
                 <a:close/>
                 <a:lnTo>
@@ -4912,11 +4820,7 @@
                 </a:lnTo>
                 <a:close/>
                 <a:lnTo>
-                  <a:pt x="64655" y="64655"/>
-                </a:lnTo>
-                <a:close/>
-                <a:lnTo>
-                  <a:pt x="65578" y="65578"/>
+                  <a:pt x="65116" y="65116"/>
                 </a:lnTo>
                 <a:close/>
                 <a:lnTo>
@@ -4924,11 +4828,7 @@
                 </a:lnTo>
                 <a:close/>
                 <a:lnTo>
-                  <a:pt x="67425" y="67425"/>
-                </a:lnTo>
-                <a:close/>
-                <a:lnTo>
-                  <a:pt x="68349" y="68349"/>
+                  <a:pt x="67887" y="67887"/>
                 </a:lnTo>
                 <a:close/>
                 <a:lnTo>
@@ -4936,11 +4836,7 @@
                 </a:lnTo>
                 <a:close/>
                 <a:lnTo>
-                  <a:pt x="70196" y="70196"/>
-                </a:lnTo>
-                <a:close/>
-                <a:lnTo>
-                  <a:pt x="71120" y="71120"/>
+                  <a:pt x="70658" y="70658"/>
                 </a:lnTo>
                 <a:close/>
                 <a:lnTo>
@@ -4948,11 +4844,7 @@
                 </a:lnTo>
                 <a:close/>
                 <a:lnTo>
-                  <a:pt x="72967" y="72967"/>
-                </a:lnTo>
-                <a:close/>
-                <a:lnTo>
-                  <a:pt x="73891" y="73891"/>
+                  <a:pt x="73429" y="73429"/>
                 </a:lnTo>
                 <a:close/>
                 <a:lnTo>
@@ -4960,11 +4852,7 @@
                 </a:lnTo>
                 <a:close/>
                 <a:lnTo>
-                  <a:pt x="75738" y="75738"/>
-                </a:lnTo>
-                <a:close/>
-                <a:lnTo>
-                  <a:pt x="76662" y="76662"/>
+                  <a:pt x="76200" y="76200"/>
                 </a:lnTo>
                 <a:close/>
                 <a:lnTo>
@@ -4972,11 +4860,7 @@
                 </a:lnTo>
                 <a:close/>
                 <a:lnTo>
-                  <a:pt x="78509" y="78509"/>
-                </a:lnTo>
-                <a:close/>
-                <a:lnTo>
-                  <a:pt x="79433" y="79433"/>
+                  <a:pt x="78971" y="78971"/>
                 </a:lnTo>
                 <a:close/>
                 <a:lnTo>
@@ -4984,11 +4868,7 @@
                 </a:lnTo>
                 <a:close/>
                 <a:lnTo>
-                  <a:pt x="81280" y="81280"/>
-                </a:lnTo>
-                <a:close/>
-                <a:lnTo>
-                  <a:pt x="82204" y="82204"/>
+                  <a:pt x="81742" y="81742"/>
                 </a:lnTo>
                 <a:close/>
                 <a:lnTo>
@@ -4996,11 +4876,7 @@
                 </a:lnTo>
                 <a:close/>
                 <a:lnTo>
-                  <a:pt x="84051" y="84051"/>
-                </a:lnTo>
-                <a:close/>
-                <a:lnTo>
-                  <a:pt x="84975" y="84975"/>
+                  <a:pt x="84513" y="84513"/>
                 </a:lnTo>
                 <a:close/>
                 <a:lnTo>
@@ -5008,11 +4884,7 @@
                 </a:lnTo>
                 <a:close/>
                 <a:lnTo>
-                  <a:pt x="86822" y="86822"/>
-                </a:lnTo>
-                <a:close/>
-                <a:lnTo>
-                  <a:pt x="87745" y="87745"/>
+                  <a:pt x="87284" y="87284"/>
                 </a:lnTo>
                 <a:close/>
                 <a:lnTo>
@@ -5020,15 +4892,143 @@
                 </a:lnTo>
                 <a:close/>
                 <a:lnTo>
-                  <a:pt x="89593" y="89593"/>
-                </a:lnTo>
-                <a:close/>
-                <a:lnTo>
-                  <a:pt x="90516" y="90516"/>
+                  <a:pt x="90055" y="90055"/>
                 </a:lnTo>
                 <a:close/>
                 <a:lnTo>
                   <a:pt x="91440" y="91440"/>
+                </a:lnTo>
+                <a:close/>
+                <a:lnTo>
+                  <a:pt x="92825" y="92825"/>
+                </a:lnTo>
+                <a:close/>
+                <a:lnTo>
+                  <a:pt x="94211" y="94211"/>
+                </a:lnTo>
+                <a:close/>
+                <a:lnTo>
+                  <a:pt x="95596" y="95596"/>
+                </a:lnTo>
+                <a:close/>
+                <a:lnTo>
+                  <a:pt x="96982" y="96982"/>
+                </a:lnTo>
+                <a:close/>
+                <a:lnTo>
+                  <a:pt x="98367" y="98367"/>
+                </a:lnTo>
+                <a:close/>
+                <a:lnTo>
+                  <a:pt x="99753" y="99753"/>
+                </a:lnTo>
+                <a:close/>
+                <a:lnTo>
+                  <a:pt x="101138" y="101138"/>
+                </a:lnTo>
+                <a:close/>
+                <a:lnTo>
+                  <a:pt x="102524" y="102524"/>
+                </a:lnTo>
+                <a:close/>
+                <a:lnTo>
+                  <a:pt x="103909" y="103909"/>
+                </a:lnTo>
+                <a:close/>
+                <a:lnTo>
+                  <a:pt x="105295" y="105295"/>
+                </a:lnTo>
+                <a:close/>
+                <a:lnTo>
+                  <a:pt x="106680" y="106680"/>
+                </a:lnTo>
+                <a:close/>
+                <a:lnTo>
+                  <a:pt x="108065" y="108065"/>
+                </a:lnTo>
+                <a:close/>
+                <a:lnTo>
+                  <a:pt x="109451" y="109451"/>
+                </a:lnTo>
+                <a:close/>
+                <a:lnTo>
+                  <a:pt x="110836" y="110836"/>
+                </a:lnTo>
+                <a:close/>
+                <a:lnTo>
+                  <a:pt x="112222" y="112222"/>
+                </a:lnTo>
+                <a:close/>
+                <a:lnTo>
+                  <a:pt x="113607" y="113607"/>
+                </a:lnTo>
+                <a:close/>
+                <a:lnTo>
+                  <a:pt x="114993" y="114993"/>
+                </a:lnTo>
+                <a:close/>
+                <a:lnTo>
+                  <a:pt x="116378" y="116378"/>
+                </a:lnTo>
+                <a:close/>
+                <a:lnTo>
+                  <a:pt x="117764" y="117764"/>
+                </a:lnTo>
+                <a:close/>
+                <a:lnTo>
+                  <a:pt x="119149" y="119149"/>
+                </a:lnTo>
+                <a:close/>
+                <a:lnTo>
+                  <a:pt x="120535" y="120535"/>
+                </a:lnTo>
+                <a:close/>
+                <a:lnTo>
+                  <a:pt x="121920" y="121920"/>
+                </a:lnTo>
+                <a:close/>
+                <a:lnTo>
+                  <a:pt x="123305" y="123305"/>
+                </a:lnTo>
+                <a:close/>
+                <a:lnTo>
+                  <a:pt x="124691" y="124691"/>
+                </a:lnTo>
+                <a:close/>
+                <a:lnTo>
+                  <a:pt x="126076" y="126076"/>
+                </a:lnTo>
+                <a:close/>
+                <a:lnTo>
+                  <a:pt x="127462" y="127462"/>
+                </a:lnTo>
+                <a:close/>
+                <a:lnTo>
+                  <a:pt x="128847" y="128847"/>
+                </a:lnTo>
+                <a:close/>
+                <a:lnTo>
+                  <a:pt x="130233" y="130233"/>
+                </a:lnTo>
+                <a:close/>
+                <a:lnTo>
+                  <a:pt x="131618" y="131618"/>
+                </a:lnTo>
+                <a:close/>
+                <a:lnTo>
+                  <a:pt x="133004" y="133004"/>
+                </a:lnTo>
+                <a:close/>
+                <a:lnTo>
+                  <a:pt x="134389" y="134389"/>
+                </a:lnTo>
+                <a:close/>
+                <a:lnTo>
+                  <a:pt x="135775" y="135775"/>
+                </a:lnTo>
+                <a:close/>
+                <a:lnTo>
+                  <a:pt x="137160" y="137160"/>
                 </a:lnTo>
                 <a:close/>
               </a:path>
@@ -5070,8 +5070,8 @@
         </p:nvSpPr>
         <p:spPr>
           <a:xfrm>
-            <a:off x="5166360" y="1291590"/>
-            <a:ext cx="228600" cy="228600"/>
+            <a:off x="5120640" y="1428750"/>
+            <a:ext cx="137160" cy="137160"/>
           </a:xfrm>
           <a:custGeom>
             <a:avLst/>
@@ -5080,404 +5080,404 @@
             <a:cxnLst/>
             <a:rect l="l" t="t" r="r" b="b"/>
             <a:pathLst>
-              <a:path w="228600" h="228600">
+              <a:path w="137160" h="137160">
                 <a:moveTo>
-                  <a:pt x="0" y="228600"/>
+                  <a:pt x="0" y="137160"/>
                 </a:moveTo>
                 <a:lnTo>
-                  <a:pt x="2309" y="226291"/>
-                </a:lnTo>
-                <a:close/>
-                <a:lnTo>
-                  <a:pt x="4618" y="223982"/>
-                </a:lnTo>
-                <a:close/>
-                <a:lnTo>
-                  <a:pt x="6927" y="221673"/>
-                </a:lnTo>
-                <a:close/>
-                <a:lnTo>
-                  <a:pt x="9236" y="219364"/>
-                </a:lnTo>
-                <a:close/>
-                <a:lnTo>
-                  <a:pt x="11545" y="217055"/>
-                </a:lnTo>
-                <a:close/>
-                <a:lnTo>
-                  <a:pt x="13855" y="214745"/>
-                </a:lnTo>
-                <a:close/>
-                <a:lnTo>
-                  <a:pt x="16164" y="212436"/>
-                </a:lnTo>
-                <a:close/>
-                <a:lnTo>
-                  <a:pt x="18473" y="210127"/>
-                </a:lnTo>
-                <a:close/>
-                <a:lnTo>
-                  <a:pt x="20782" y="207818"/>
-                </a:lnTo>
-                <a:close/>
-                <a:lnTo>
-                  <a:pt x="23091" y="205509"/>
-                </a:lnTo>
-                <a:close/>
-                <a:lnTo>
-                  <a:pt x="25400" y="203200"/>
-                </a:lnTo>
-                <a:close/>
-                <a:lnTo>
-                  <a:pt x="27709" y="200891"/>
-                </a:lnTo>
-                <a:close/>
-                <a:lnTo>
-                  <a:pt x="30018" y="198582"/>
-                </a:lnTo>
-                <a:close/>
-                <a:lnTo>
-                  <a:pt x="32327" y="196273"/>
-                </a:lnTo>
-                <a:close/>
-                <a:lnTo>
-                  <a:pt x="34636" y="193964"/>
-                </a:lnTo>
-                <a:close/>
-                <a:lnTo>
-                  <a:pt x="36945" y="191655"/>
-                </a:lnTo>
-                <a:close/>
-                <a:lnTo>
-                  <a:pt x="39255" y="189345"/>
-                </a:lnTo>
-                <a:close/>
-                <a:lnTo>
-                  <a:pt x="41564" y="187036"/>
-                </a:lnTo>
-                <a:close/>
-                <a:lnTo>
-                  <a:pt x="43873" y="184727"/>
-                </a:lnTo>
-                <a:close/>
-                <a:lnTo>
-                  <a:pt x="46182" y="182418"/>
-                </a:lnTo>
-                <a:close/>
-                <a:lnTo>
-                  <a:pt x="48491" y="180109"/>
-                </a:lnTo>
-                <a:close/>
-                <a:lnTo>
-                  <a:pt x="50800" y="177800"/>
-                </a:lnTo>
-                <a:close/>
-                <a:lnTo>
-                  <a:pt x="53109" y="175491"/>
-                </a:lnTo>
-                <a:close/>
-                <a:lnTo>
-                  <a:pt x="55418" y="173182"/>
-                </a:lnTo>
-                <a:close/>
-                <a:lnTo>
-                  <a:pt x="57727" y="170873"/>
-                </a:lnTo>
-                <a:close/>
-                <a:lnTo>
-                  <a:pt x="60036" y="168564"/>
-                </a:lnTo>
-                <a:close/>
-                <a:lnTo>
-                  <a:pt x="62345" y="166255"/>
-                </a:lnTo>
-                <a:close/>
-                <a:lnTo>
-                  <a:pt x="64655" y="163945"/>
-                </a:lnTo>
-                <a:close/>
-                <a:lnTo>
-                  <a:pt x="66964" y="161636"/>
-                </a:lnTo>
-                <a:close/>
-                <a:lnTo>
-                  <a:pt x="69273" y="159327"/>
-                </a:lnTo>
-                <a:close/>
-                <a:lnTo>
-                  <a:pt x="71582" y="157018"/>
-                </a:lnTo>
-                <a:close/>
-                <a:lnTo>
-                  <a:pt x="73891" y="154709"/>
-                </a:lnTo>
-                <a:close/>
-                <a:lnTo>
-                  <a:pt x="76200" y="152400"/>
-                </a:lnTo>
-                <a:close/>
-                <a:lnTo>
-                  <a:pt x="78509" y="150091"/>
-                </a:lnTo>
-                <a:close/>
-                <a:lnTo>
-                  <a:pt x="80818" y="147782"/>
-                </a:lnTo>
-                <a:close/>
-                <a:lnTo>
-                  <a:pt x="83127" y="145473"/>
-                </a:lnTo>
-                <a:close/>
-                <a:lnTo>
-                  <a:pt x="85436" y="143164"/>
-                </a:lnTo>
-                <a:close/>
-                <a:lnTo>
-                  <a:pt x="87745" y="140855"/>
-                </a:lnTo>
-                <a:close/>
-                <a:lnTo>
-                  <a:pt x="90055" y="138545"/>
-                </a:lnTo>
-                <a:close/>
-                <a:lnTo>
-                  <a:pt x="92364" y="136236"/>
-                </a:lnTo>
-                <a:close/>
-                <a:lnTo>
-                  <a:pt x="94673" y="133927"/>
-                </a:lnTo>
-                <a:close/>
-                <a:lnTo>
-                  <a:pt x="96982" y="131618"/>
-                </a:lnTo>
-                <a:close/>
-                <a:lnTo>
-                  <a:pt x="99291" y="129309"/>
-                </a:lnTo>
-                <a:close/>
-                <a:lnTo>
-                  <a:pt x="101600" y="127000"/>
-                </a:lnTo>
-                <a:close/>
-                <a:lnTo>
-                  <a:pt x="103909" y="124691"/>
-                </a:lnTo>
-                <a:close/>
-                <a:lnTo>
-                  <a:pt x="106218" y="122382"/>
-                </a:lnTo>
-                <a:close/>
-                <a:lnTo>
-                  <a:pt x="108527" y="120073"/>
-                </a:lnTo>
-                <a:close/>
-                <a:lnTo>
-                  <a:pt x="110836" y="117764"/>
-                </a:lnTo>
-                <a:close/>
-                <a:lnTo>
-                  <a:pt x="113145" y="115455"/>
-                </a:lnTo>
-                <a:close/>
-                <a:lnTo>
-                  <a:pt x="115455" y="113145"/>
-                </a:lnTo>
-                <a:close/>
-                <a:lnTo>
-                  <a:pt x="117764" y="110836"/>
-                </a:lnTo>
-                <a:close/>
-                <a:lnTo>
-                  <a:pt x="120073" y="108527"/>
-                </a:lnTo>
-                <a:close/>
-                <a:lnTo>
-                  <a:pt x="122382" y="106218"/>
-                </a:lnTo>
-                <a:close/>
-                <a:lnTo>
-                  <a:pt x="124691" y="103909"/>
-                </a:lnTo>
-                <a:close/>
-                <a:lnTo>
-                  <a:pt x="127000" y="101600"/>
-                </a:lnTo>
-                <a:close/>
-                <a:lnTo>
-                  <a:pt x="129309" y="99291"/>
-                </a:lnTo>
-                <a:close/>
-                <a:lnTo>
-                  <a:pt x="131618" y="96982"/>
-                </a:lnTo>
-                <a:close/>
-                <a:lnTo>
-                  <a:pt x="133927" y="94673"/>
-                </a:lnTo>
-                <a:close/>
-                <a:lnTo>
-                  <a:pt x="136236" y="92364"/>
-                </a:lnTo>
-                <a:close/>
-                <a:lnTo>
-                  <a:pt x="138545" y="90055"/>
-                </a:lnTo>
-                <a:close/>
-                <a:lnTo>
-                  <a:pt x="140855" y="87745"/>
-                </a:lnTo>
-                <a:close/>
-                <a:lnTo>
-                  <a:pt x="143164" y="85436"/>
-                </a:lnTo>
-                <a:close/>
-                <a:lnTo>
-                  <a:pt x="145473" y="83127"/>
-                </a:lnTo>
-                <a:close/>
-                <a:lnTo>
-                  <a:pt x="147782" y="80818"/>
-                </a:lnTo>
-                <a:close/>
-                <a:lnTo>
-                  <a:pt x="150091" y="78509"/>
-                </a:lnTo>
-                <a:close/>
-                <a:lnTo>
-                  <a:pt x="152400" y="76200"/>
-                </a:lnTo>
-                <a:close/>
-                <a:lnTo>
-                  <a:pt x="154709" y="73891"/>
-                </a:lnTo>
-                <a:close/>
-                <a:lnTo>
-                  <a:pt x="157018" y="71582"/>
-                </a:lnTo>
-                <a:close/>
-                <a:lnTo>
-                  <a:pt x="159327" y="69273"/>
-                </a:lnTo>
-                <a:close/>
-                <a:lnTo>
-                  <a:pt x="161636" y="66964"/>
-                </a:lnTo>
-                <a:close/>
-                <a:lnTo>
-                  <a:pt x="163945" y="64655"/>
-                </a:lnTo>
-                <a:close/>
-                <a:lnTo>
-                  <a:pt x="166255" y="62345"/>
-                </a:lnTo>
-                <a:close/>
-                <a:lnTo>
-                  <a:pt x="168564" y="60036"/>
-                </a:lnTo>
-                <a:close/>
-                <a:lnTo>
-                  <a:pt x="170873" y="57727"/>
-                </a:lnTo>
-                <a:close/>
-                <a:lnTo>
-                  <a:pt x="173182" y="55418"/>
-                </a:lnTo>
-                <a:close/>
-                <a:lnTo>
-                  <a:pt x="175491" y="53109"/>
-                </a:lnTo>
-                <a:close/>
-                <a:lnTo>
-                  <a:pt x="177800" y="50800"/>
-                </a:lnTo>
-                <a:close/>
-                <a:lnTo>
-                  <a:pt x="180109" y="48491"/>
-                </a:lnTo>
-                <a:close/>
-                <a:lnTo>
-                  <a:pt x="182418" y="46182"/>
-                </a:lnTo>
-                <a:close/>
-                <a:lnTo>
-                  <a:pt x="184727" y="43873"/>
-                </a:lnTo>
-                <a:close/>
-                <a:lnTo>
-                  <a:pt x="187036" y="41564"/>
-                </a:lnTo>
-                <a:close/>
-                <a:lnTo>
-                  <a:pt x="189345" y="39255"/>
-                </a:lnTo>
-                <a:close/>
-                <a:lnTo>
-                  <a:pt x="191655" y="36945"/>
-                </a:lnTo>
-                <a:close/>
-                <a:lnTo>
-                  <a:pt x="193964" y="34636"/>
-                </a:lnTo>
-                <a:close/>
-                <a:lnTo>
-                  <a:pt x="196273" y="32327"/>
-                </a:lnTo>
-                <a:close/>
-                <a:lnTo>
-                  <a:pt x="198582" y="30018"/>
-                </a:lnTo>
-                <a:close/>
-                <a:lnTo>
-                  <a:pt x="200891" y="27709"/>
-                </a:lnTo>
-                <a:close/>
-                <a:lnTo>
-                  <a:pt x="203200" y="25400"/>
-                </a:lnTo>
-                <a:close/>
-                <a:lnTo>
-                  <a:pt x="205509" y="23091"/>
-                </a:lnTo>
-                <a:close/>
-                <a:lnTo>
-                  <a:pt x="207818" y="20782"/>
-                </a:lnTo>
-                <a:close/>
-                <a:lnTo>
-                  <a:pt x="210127" y="18473"/>
-                </a:lnTo>
-                <a:close/>
-                <a:lnTo>
-                  <a:pt x="212436" y="16164"/>
-                </a:lnTo>
-                <a:close/>
-                <a:lnTo>
-                  <a:pt x="214745" y="13855"/>
-                </a:lnTo>
-                <a:close/>
-                <a:lnTo>
-                  <a:pt x="217055" y="11545"/>
-                </a:lnTo>
-                <a:close/>
-                <a:lnTo>
-                  <a:pt x="219364" y="9236"/>
-                </a:lnTo>
-                <a:close/>
-                <a:lnTo>
-                  <a:pt x="221673" y="6927"/>
-                </a:lnTo>
-                <a:close/>
-                <a:lnTo>
-                  <a:pt x="223982" y="4618"/>
-                </a:lnTo>
-                <a:close/>
-                <a:lnTo>
-                  <a:pt x="226291" y="2309"/>
-                </a:lnTo>
-                <a:close/>
-                <a:lnTo>
-                  <a:pt x="228600" y="0"/>
+                  <a:pt x="1385" y="135775"/>
+                </a:lnTo>
+                <a:close/>
+                <a:lnTo>
+                  <a:pt x="2771" y="134389"/>
+                </a:lnTo>
+                <a:close/>
+                <a:lnTo>
+                  <a:pt x="4156" y="133004"/>
+                </a:lnTo>
+                <a:close/>
+                <a:lnTo>
+                  <a:pt x="5542" y="131618"/>
+                </a:lnTo>
+                <a:close/>
+                <a:lnTo>
+                  <a:pt x="6927" y="130233"/>
+                </a:lnTo>
+                <a:close/>
+                <a:lnTo>
+                  <a:pt x="8313" y="128847"/>
+                </a:lnTo>
+                <a:close/>
+                <a:lnTo>
+                  <a:pt x="9698" y="127462"/>
+                </a:lnTo>
+                <a:close/>
+                <a:lnTo>
+                  <a:pt x="11084" y="126076"/>
+                </a:lnTo>
+                <a:close/>
+                <a:lnTo>
+                  <a:pt x="12469" y="124691"/>
+                </a:lnTo>
+                <a:close/>
+                <a:lnTo>
+                  <a:pt x="13855" y="123305"/>
+                </a:lnTo>
+                <a:close/>
+                <a:lnTo>
+                  <a:pt x="15240" y="121920"/>
+                </a:lnTo>
+                <a:close/>
+                <a:lnTo>
+                  <a:pt x="16625" y="120535"/>
+                </a:lnTo>
+                <a:close/>
+                <a:lnTo>
+                  <a:pt x="18011" y="119149"/>
+                </a:lnTo>
+                <a:close/>
+                <a:lnTo>
+                  <a:pt x="19396" y="117764"/>
+                </a:lnTo>
+                <a:close/>
+                <a:lnTo>
+                  <a:pt x="20782" y="116378"/>
+                </a:lnTo>
+                <a:close/>
+                <a:lnTo>
+                  <a:pt x="22167" y="114993"/>
+                </a:lnTo>
+                <a:close/>
+                <a:lnTo>
+                  <a:pt x="23553" y="113607"/>
+                </a:lnTo>
+                <a:close/>
+                <a:lnTo>
+                  <a:pt x="24938" y="112222"/>
+                </a:lnTo>
+                <a:close/>
+                <a:lnTo>
+                  <a:pt x="26324" y="110836"/>
+                </a:lnTo>
+                <a:close/>
+                <a:lnTo>
+                  <a:pt x="27709" y="109451"/>
+                </a:lnTo>
+                <a:close/>
+                <a:lnTo>
+                  <a:pt x="29095" y="108065"/>
+                </a:lnTo>
+                <a:close/>
+                <a:lnTo>
+                  <a:pt x="30480" y="106680"/>
+                </a:lnTo>
+                <a:close/>
+                <a:lnTo>
+                  <a:pt x="31865" y="105295"/>
+                </a:lnTo>
+                <a:close/>
+                <a:lnTo>
+                  <a:pt x="33251" y="103909"/>
+                </a:lnTo>
+                <a:close/>
+                <a:lnTo>
+                  <a:pt x="34636" y="102524"/>
+                </a:lnTo>
+                <a:close/>
+                <a:lnTo>
+                  <a:pt x="36022" y="101138"/>
+                </a:lnTo>
+                <a:close/>
+                <a:lnTo>
+                  <a:pt x="37407" y="99753"/>
+                </a:lnTo>
+                <a:close/>
+                <a:lnTo>
+                  <a:pt x="38793" y="98367"/>
+                </a:lnTo>
+                <a:close/>
+                <a:lnTo>
+                  <a:pt x="40178" y="96982"/>
+                </a:lnTo>
+                <a:close/>
+                <a:lnTo>
+                  <a:pt x="41564" y="95596"/>
+                </a:lnTo>
+                <a:close/>
+                <a:lnTo>
+                  <a:pt x="42949" y="94211"/>
+                </a:lnTo>
+                <a:close/>
+                <a:lnTo>
+                  <a:pt x="44335" y="92825"/>
+                </a:lnTo>
+                <a:close/>
+                <a:lnTo>
+                  <a:pt x="45720" y="91440"/>
+                </a:lnTo>
+                <a:close/>
+                <a:lnTo>
+                  <a:pt x="47105" y="90055"/>
+                </a:lnTo>
+                <a:close/>
+                <a:lnTo>
+                  <a:pt x="48491" y="88669"/>
+                </a:lnTo>
+                <a:close/>
+                <a:lnTo>
+                  <a:pt x="49876" y="87284"/>
+                </a:lnTo>
+                <a:close/>
+                <a:lnTo>
+                  <a:pt x="51262" y="85898"/>
+                </a:lnTo>
+                <a:close/>
+                <a:lnTo>
+                  <a:pt x="52647" y="84513"/>
+                </a:lnTo>
+                <a:close/>
+                <a:lnTo>
+                  <a:pt x="54033" y="83127"/>
+                </a:lnTo>
+                <a:close/>
+                <a:lnTo>
+                  <a:pt x="55418" y="81742"/>
+                </a:lnTo>
+                <a:close/>
+                <a:lnTo>
+                  <a:pt x="56804" y="80356"/>
+                </a:lnTo>
+                <a:close/>
+                <a:lnTo>
+                  <a:pt x="58189" y="78971"/>
+                </a:lnTo>
+                <a:close/>
+                <a:lnTo>
+                  <a:pt x="59575" y="77585"/>
+                </a:lnTo>
+                <a:close/>
+                <a:lnTo>
+                  <a:pt x="60960" y="76200"/>
+                </a:lnTo>
+                <a:close/>
+                <a:lnTo>
+                  <a:pt x="62345" y="74815"/>
+                </a:lnTo>
+                <a:close/>
+                <a:lnTo>
+                  <a:pt x="63731" y="73429"/>
+                </a:lnTo>
+                <a:close/>
+                <a:lnTo>
+                  <a:pt x="65116" y="72044"/>
+                </a:lnTo>
+                <a:close/>
+                <a:lnTo>
+                  <a:pt x="66502" y="70658"/>
+                </a:lnTo>
+                <a:close/>
+                <a:lnTo>
+                  <a:pt x="67887" y="69273"/>
+                </a:lnTo>
+                <a:close/>
+                <a:lnTo>
+                  <a:pt x="69273" y="67887"/>
+                </a:lnTo>
+                <a:close/>
+                <a:lnTo>
+                  <a:pt x="70658" y="66502"/>
+                </a:lnTo>
+                <a:close/>
+                <a:lnTo>
+                  <a:pt x="72044" y="65116"/>
+                </a:lnTo>
+                <a:close/>
+                <a:lnTo>
+                  <a:pt x="73429" y="63731"/>
+                </a:lnTo>
+                <a:close/>
+                <a:lnTo>
+                  <a:pt x="74815" y="62345"/>
+                </a:lnTo>
+                <a:close/>
+                <a:lnTo>
+                  <a:pt x="76200" y="60960"/>
+                </a:lnTo>
+                <a:close/>
+                <a:lnTo>
+                  <a:pt x="77585" y="59575"/>
+                </a:lnTo>
+                <a:close/>
+                <a:lnTo>
+                  <a:pt x="78971" y="58189"/>
+                </a:lnTo>
+                <a:close/>
+                <a:lnTo>
+                  <a:pt x="80356" y="56804"/>
+                </a:lnTo>
+                <a:close/>
+                <a:lnTo>
+                  <a:pt x="81742" y="55418"/>
+                </a:lnTo>
+                <a:close/>
+                <a:lnTo>
+                  <a:pt x="83127" y="54033"/>
+                </a:lnTo>
+                <a:close/>
+                <a:lnTo>
+                  <a:pt x="84513" y="52647"/>
+                </a:lnTo>
+                <a:close/>
+                <a:lnTo>
+                  <a:pt x="85898" y="51262"/>
+                </a:lnTo>
+                <a:close/>
+                <a:lnTo>
+                  <a:pt x="87284" y="49876"/>
+                </a:lnTo>
+                <a:close/>
+                <a:lnTo>
+                  <a:pt x="88669" y="48491"/>
+                </a:lnTo>
+                <a:close/>
+                <a:lnTo>
+                  <a:pt x="90055" y="47105"/>
+                </a:lnTo>
+                <a:close/>
+                <a:lnTo>
+                  <a:pt x="91440" y="45720"/>
+                </a:lnTo>
+                <a:close/>
+                <a:lnTo>
+                  <a:pt x="92825" y="44335"/>
+                </a:lnTo>
+                <a:close/>
+                <a:lnTo>
+                  <a:pt x="94211" y="42949"/>
+                </a:lnTo>
+                <a:close/>
+                <a:lnTo>
+                  <a:pt x="95596" y="41564"/>
+                </a:lnTo>
+                <a:close/>
+                <a:lnTo>
+                  <a:pt x="96982" y="40178"/>
+                </a:lnTo>
+                <a:close/>
+                <a:lnTo>
+                  <a:pt x="98367" y="38793"/>
+                </a:lnTo>
+                <a:close/>
+                <a:lnTo>
+                  <a:pt x="99753" y="37407"/>
+                </a:lnTo>
+                <a:close/>
+                <a:lnTo>
+                  <a:pt x="101138" y="36022"/>
+                </a:lnTo>
+                <a:close/>
+                <a:lnTo>
+                  <a:pt x="102524" y="34636"/>
+                </a:lnTo>
+                <a:close/>
+                <a:lnTo>
+                  <a:pt x="103909" y="33251"/>
+                </a:lnTo>
+                <a:close/>
+                <a:lnTo>
+                  <a:pt x="105295" y="31865"/>
+                </a:lnTo>
+                <a:close/>
+                <a:lnTo>
+                  <a:pt x="106680" y="30480"/>
+                </a:lnTo>
+                <a:close/>
+                <a:lnTo>
+                  <a:pt x="108065" y="29095"/>
+                </a:lnTo>
+                <a:close/>
+                <a:lnTo>
+                  <a:pt x="109451" y="27709"/>
+                </a:lnTo>
+                <a:close/>
+                <a:lnTo>
+                  <a:pt x="110836" y="26324"/>
+                </a:lnTo>
+                <a:close/>
+                <a:lnTo>
+                  <a:pt x="112222" y="24938"/>
+                </a:lnTo>
+                <a:close/>
+                <a:lnTo>
+                  <a:pt x="113607" y="23553"/>
+                </a:lnTo>
+                <a:close/>
+                <a:lnTo>
+                  <a:pt x="114993" y="22167"/>
+                </a:lnTo>
+                <a:close/>
+                <a:lnTo>
+                  <a:pt x="116378" y="20782"/>
+                </a:lnTo>
+                <a:close/>
+                <a:lnTo>
+                  <a:pt x="117764" y="19396"/>
+                </a:lnTo>
+                <a:close/>
+                <a:lnTo>
+                  <a:pt x="119149" y="18011"/>
+                </a:lnTo>
+                <a:close/>
+                <a:lnTo>
+                  <a:pt x="120535" y="16625"/>
+                </a:lnTo>
+                <a:close/>
+                <a:lnTo>
+                  <a:pt x="121920" y="15240"/>
+                </a:lnTo>
+                <a:close/>
+                <a:lnTo>
+                  <a:pt x="123305" y="13855"/>
+                </a:lnTo>
+                <a:close/>
+                <a:lnTo>
+                  <a:pt x="124691" y="12469"/>
+                </a:lnTo>
+                <a:close/>
+                <a:lnTo>
+                  <a:pt x="126076" y="11084"/>
+                </a:lnTo>
+                <a:close/>
+                <a:lnTo>
+                  <a:pt x="127462" y="9698"/>
+                </a:lnTo>
+                <a:close/>
+                <a:lnTo>
+                  <a:pt x="128847" y="8313"/>
+                </a:lnTo>
+                <a:close/>
+                <a:lnTo>
+                  <a:pt x="130233" y="6927"/>
+                </a:lnTo>
+                <a:close/>
+                <a:lnTo>
+                  <a:pt x="131618" y="5542"/>
+                </a:lnTo>
+                <a:close/>
+                <a:lnTo>
+                  <a:pt x="133004" y="4156"/>
+                </a:lnTo>
+                <a:close/>
+                <a:lnTo>
+                  <a:pt x="134389" y="2771"/>
+                </a:lnTo>
+                <a:close/>
+                <a:lnTo>
+                  <a:pt x="135775" y="1385"/>
+                </a:lnTo>
+                <a:close/>
+                <a:lnTo>
+                  <a:pt x="137160" y="0"/>
                 </a:lnTo>
                 <a:close/>
               </a:path>
@@ -5519,7 +5519,7 @@
         </p:nvSpPr>
         <p:spPr>
           <a:xfrm>
-            <a:off x="4775200" y="2345690"/>
+            <a:off x="4318000" y="2299970"/>
             <a:ext cx="1524000" cy="508000"/>
           </a:xfrm>
           <a:prstGeom prst="rect">
@@ -5542,6 +5542,114 @@
               </a:defRPr>
             </a:pPr>
             <a:r>
+              <a:t>O</a:t>
+            </a:r>
+          </a:p>
+        </p:txBody>
+      </p:sp>
+      <p:sp>
+        <p:nvSpPr>
+          <p:cNvPr id="13" name="TextBox 12"/>
+          <p:cNvSpPr txBox="1"/>
+          <p:nvPr/>
+        </p:nvSpPr>
+        <p:spPr>
+          <a:xfrm>
+            <a:off x="5506720" y="2299970"/>
+            <a:ext cx="1524000" cy="508000"/>
+          </a:xfrm>
+          <a:prstGeom prst="rect">
+            <a:avLst/>
+          </a:prstGeom>
+          <a:noFill/>
+        </p:spPr>
+        <p:txBody>
+          <a:bodyPr wrap="none">
+            <a:spAutoFit/>
+          </a:bodyPr>
+          <a:lstStyle/>
+          <a:p>
+            <a:pPr>
+              <a:defRPr sz="1400" b="1">
+                <a:solidFill>
+                  <a:srgbClr val="FFFFFF"/>
+                </a:solidFill>
+                <a:latin typeface="Inter"/>
+              </a:defRPr>
+            </a:pPr>
+            <a:r>
+              <a:t>x</a:t>
+            </a:r>
+          </a:p>
+        </p:txBody>
+      </p:sp>
+      <p:sp>
+        <p:nvSpPr>
+          <p:cNvPr id="14" name="TextBox 13"/>
+          <p:cNvSpPr txBox="1"/>
+          <p:nvPr/>
+        </p:nvSpPr>
+        <p:spPr>
+          <a:xfrm>
+            <a:off x="4272280" y="608330"/>
+            <a:ext cx="1524000" cy="508000"/>
+          </a:xfrm>
+          <a:prstGeom prst="rect">
+            <a:avLst/>
+          </a:prstGeom>
+          <a:noFill/>
+        </p:spPr>
+        <p:txBody>
+          <a:bodyPr wrap="none">
+            <a:spAutoFit/>
+          </a:bodyPr>
+          <a:lstStyle/>
+          <a:p>
+            <a:pPr>
+              <a:defRPr sz="1400" b="1">
+                <a:solidFill>
+                  <a:srgbClr val="FFFFFF"/>
+                </a:solidFill>
+                <a:latin typeface="Inter"/>
+              </a:defRPr>
+            </a:pPr>
+            <a:r>
+              <a:t>y</a:t>
+            </a:r>
+          </a:p>
+        </p:txBody>
+      </p:sp>
+      <p:sp>
+        <p:nvSpPr>
+          <p:cNvPr id="15" name="TextBox 14"/>
+          <p:cNvSpPr txBox="1"/>
+          <p:nvPr/>
+        </p:nvSpPr>
+        <p:spPr>
+          <a:xfrm>
+            <a:off x="4775200" y="2322830"/>
+            <a:ext cx="1524000" cy="508000"/>
+          </a:xfrm>
+          <a:prstGeom prst="rect">
+            <a:avLst/>
+          </a:prstGeom>
+          <a:noFill/>
+        </p:spPr>
+        <p:txBody>
+          <a:bodyPr wrap="none">
+            <a:spAutoFit/>
+          </a:bodyPr>
+          <a:lstStyle/>
+          <a:p>
+            <a:pPr>
+              <a:defRPr sz="1400" b="1">
+                <a:solidFill>
+                  <a:srgbClr val="FFFFFF"/>
+                </a:solidFill>
+                <a:latin typeface="Inter"/>
+              </a:defRPr>
+            </a:pPr>
+            <a:r>
               <a:t>1</a:t>
             </a:r>
           </a:p>
@@ -5549,7 +5657,7 @@
       </p:sp>
       <p:sp>
         <p:nvSpPr>
-          <p:cNvPr id="13" name="TextBox 12"/>
+          <p:cNvPr id="16" name="TextBox 15"/>
           <p:cNvSpPr txBox="1"/>
           <p:nvPr/>
         </p:nvSpPr>
@@ -5585,7 +5693,7 @@
       </p:sp>
       <p:sp>
         <p:nvSpPr>
-          <p:cNvPr id="14" name="TextBox 13"/>
+          <p:cNvPr id="17" name="TextBox 16"/>
           <p:cNvSpPr txBox="1"/>
           <p:nvPr/>
         </p:nvSpPr>

--- a/output/2.pptx
+++ b/output/2.pptx
@@ -3104,8 +3104,8 @@
         </p:nvCxnSpPr>
         <p:spPr>
           <a:xfrm>
-            <a:off x="4297680.0" y="2571750.0"/>
-            <a:ext cx="1554480.0" cy="0.0"/>
+            <a:off x="3886200.0" y="2571750.0"/>
+            <a:ext cx="2286000.0" cy="0.0"/>
           </a:xfrm>
           <a:prstGeom prst="line">
             <a:avLst/>
@@ -3139,8 +3139,8 @@
         </p:nvCxnSpPr>
         <p:spPr>
           <a:xfrm flipV="1">
-            <a:off x="4572000.0" y="834390.0"/>
-            <a:ext cx="0.0" cy="1874520.0"/>
+            <a:off x="4572000.0" y="514350.0"/>
+            <a:ext cx="0.0" cy="2514600.0"/>
           </a:xfrm>
           <a:prstGeom prst="line">
             <a:avLst/>
@@ -3174,8 +3174,8 @@
         </p:nvSpPr>
         <p:spPr>
           <a:xfrm>
-            <a:off x="4343400" y="971550"/>
-            <a:ext cx="1371600" cy="1141668"/>
+            <a:off x="4343400" y="1428750"/>
+            <a:ext cx="687053" cy="687053"/>
           </a:xfrm>
           <a:custGeom>
             <a:avLst/>
@@ -3184,1212 +3184,1212 @@
             <a:cxnLst/>
             <a:rect l="l" t="t" r="r" b="b"/>
             <a:pathLst>
-              <a:path w="1371600" h="1141668">
+              <a:path w="687053" h="687053">
                 <a:moveTo>
-                  <a:pt x="0" y="457200"/>
+                  <a:pt x="0" y="0"/>
                 </a:moveTo>
                 <a:lnTo>
-                  <a:pt x="4587" y="461787"/>
-                </a:lnTo>
-                <a:close/>
-                <a:lnTo>
-                  <a:pt x="9175" y="466375"/>
-                </a:lnTo>
-                <a:close/>
-                <a:lnTo>
-                  <a:pt x="13762" y="470962"/>
-                </a:lnTo>
-                <a:close/>
-                <a:lnTo>
-                  <a:pt x="18349" y="475549"/>
-                </a:lnTo>
-                <a:close/>
-                <a:lnTo>
-                  <a:pt x="22936" y="480136"/>
-                </a:lnTo>
-                <a:close/>
-                <a:lnTo>
-                  <a:pt x="27524" y="484724"/>
-                </a:lnTo>
-                <a:close/>
-                <a:lnTo>
-                  <a:pt x="32111" y="489311"/>
-                </a:lnTo>
-                <a:close/>
-                <a:lnTo>
-                  <a:pt x="36698" y="493898"/>
-                </a:lnTo>
-                <a:close/>
-                <a:lnTo>
-                  <a:pt x="41286" y="498486"/>
-                </a:lnTo>
-                <a:close/>
-                <a:lnTo>
-                  <a:pt x="45873" y="503073"/>
-                </a:lnTo>
-                <a:close/>
-                <a:lnTo>
-                  <a:pt x="50460" y="507660"/>
-                </a:lnTo>
-                <a:close/>
-                <a:lnTo>
-                  <a:pt x="55047" y="512247"/>
-                </a:lnTo>
-                <a:close/>
-                <a:lnTo>
-                  <a:pt x="59635" y="516835"/>
-                </a:lnTo>
-                <a:close/>
-                <a:lnTo>
-                  <a:pt x="64222" y="521422"/>
-                </a:lnTo>
-                <a:close/>
-                <a:lnTo>
-                  <a:pt x="68809" y="526009"/>
-                </a:lnTo>
-                <a:close/>
-                <a:lnTo>
-                  <a:pt x="73397" y="530597"/>
-                </a:lnTo>
-                <a:close/>
-                <a:lnTo>
-                  <a:pt x="77984" y="535184"/>
-                </a:lnTo>
-                <a:close/>
-                <a:lnTo>
-                  <a:pt x="82571" y="539771"/>
-                </a:lnTo>
-                <a:close/>
-                <a:lnTo>
-                  <a:pt x="87159" y="544359"/>
-                </a:lnTo>
-                <a:close/>
-                <a:lnTo>
-                  <a:pt x="91746" y="548946"/>
-                </a:lnTo>
-                <a:close/>
-                <a:lnTo>
-                  <a:pt x="96333" y="553533"/>
-                </a:lnTo>
-                <a:close/>
-                <a:lnTo>
-                  <a:pt x="100920" y="558120"/>
-                </a:lnTo>
-                <a:close/>
-                <a:lnTo>
-                  <a:pt x="105508" y="562708"/>
-                </a:lnTo>
-                <a:close/>
-                <a:lnTo>
-                  <a:pt x="110095" y="567295"/>
-                </a:lnTo>
-                <a:close/>
-                <a:lnTo>
-                  <a:pt x="114682" y="571882"/>
-                </a:lnTo>
-                <a:close/>
-                <a:lnTo>
-                  <a:pt x="119270" y="576470"/>
-                </a:lnTo>
-                <a:close/>
-                <a:lnTo>
-                  <a:pt x="123857" y="581057"/>
-                </a:lnTo>
-                <a:close/>
-                <a:lnTo>
-                  <a:pt x="128444" y="585644"/>
-                </a:lnTo>
-                <a:close/>
-                <a:lnTo>
-                  <a:pt x="133031" y="590231"/>
-                </a:lnTo>
-                <a:close/>
-                <a:lnTo>
-                  <a:pt x="137619" y="594819"/>
-                </a:lnTo>
-                <a:close/>
-                <a:lnTo>
-                  <a:pt x="142206" y="599406"/>
-                </a:lnTo>
-                <a:close/>
-                <a:lnTo>
-                  <a:pt x="146793" y="603993"/>
-                </a:lnTo>
-                <a:close/>
-                <a:lnTo>
-                  <a:pt x="151381" y="608581"/>
-                </a:lnTo>
-                <a:close/>
-                <a:lnTo>
-                  <a:pt x="155968" y="613168"/>
-                </a:lnTo>
-                <a:close/>
-                <a:lnTo>
-                  <a:pt x="160555" y="617755"/>
-                </a:lnTo>
-                <a:close/>
-                <a:lnTo>
-                  <a:pt x="165142" y="622342"/>
-                </a:lnTo>
-                <a:close/>
-                <a:lnTo>
-                  <a:pt x="169730" y="626930"/>
-                </a:lnTo>
-                <a:close/>
-                <a:lnTo>
-                  <a:pt x="174317" y="631517"/>
-                </a:lnTo>
-                <a:close/>
-                <a:lnTo>
-                  <a:pt x="178904" y="636104"/>
-                </a:lnTo>
-                <a:close/>
-                <a:lnTo>
-                  <a:pt x="183492" y="640692"/>
-                </a:lnTo>
-                <a:close/>
-                <a:lnTo>
-                  <a:pt x="188079" y="645279"/>
-                </a:lnTo>
-                <a:close/>
-                <a:lnTo>
-                  <a:pt x="192666" y="649866"/>
-                </a:lnTo>
-                <a:close/>
-                <a:lnTo>
-                  <a:pt x="197254" y="654454"/>
-                </a:lnTo>
-                <a:close/>
-                <a:lnTo>
-                  <a:pt x="201841" y="659041"/>
-                </a:lnTo>
-                <a:close/>
-                <a:lnTo>
-                  <a:pt x="206428" y="663628"/>
-                </a:lnTo>
-                <a:close/>
-                <a:lnTo>
-                  <a:pt x="211015" y="668215"/>
-                </a:lnTo>
-                <a:close/>
-                <a:lnTo>
-                  <a:pt x="215603" y="672803"/>
-                </a:lnTo>
-                <a:close/>
-                <a:lnTo>
-                  <a:pt x="220190" y="677390"/>
-                </a:lnTo>
-                <a:close/>
-                <a:lnTo>
-                  <a:pt x="224777" y="681977"/>
-                </a:lnTo>
-                <a:close/>
-                <a:lnTo>
-                  <a:pt x="229365" y="686565"/>
-                </a:lnTo>
-                <a:close/>
-                <a:lnTo>
-                  <a:pt x="233952" y="691152"/>
-                </a:lnTo>
-                <a:close/>
-                <a:lnTo>
-                  <a:pt x="238539" y="695739"/>
-                </a:lnTo>
-                <a:close/>
-                <a:lnTo>
-                  <a:pt x="243126" y="700326"/>
-                </a:lnTo>
-                <a:close/>
-                <a:lnTo>
-                  <a:pt x="247714" y="704914"/>
-                </a:lnTo>
-                <a:close/>
-                <a:lnTo>
-                  <a:pt x="252301" y="709501"/>
-                </a:lnTo>
-                <a:close/>
-                <a:lnTo>
-                  <a:pt x="256888" y="714088"/>
-                </a:lnTo>
-                <a:close/>
-                <a:lnTo>
-                  <a:pt x="261476" y="718676"/>
-                </a:lnTo>
-                <a:close/>
-                <a:lnTo>
-                  <a:pt x="266063" y="723263"/>
-                </a:lnTo>
-                <a:close/>
-                <a:lnTo>
-                  <a:pt x="270650" y="727850"/>
-                </a:lnTo>
-                <a:close/>
-                <a:lnTo>
-                  <a:pt x="275237" y="732437"/>
-                </a:lnTo>
-                <a:close/>
-                <a:lnTo>
-                  <a:pt x="279825" y="737025"/>
-                </a:lnTo>
-                <a:close/>
-                <a:lnTo>
-                  <a:pt x="284412" y="741612"/>
-                </a:lnTo>
-                <a:close/>
-                <a:lnTo>
-                  <a:pt x="288999" y="746199"/>
-                </a:lnTo>
-                <a:close/>
-                <a:lnTo>
-                  <a:pt x="293587" y="750787"/>
-                </a:lnTo>
-                <a:close/>
-                <a:lnTo>
-                  <a:pt x="298174" y="755374"/>
-                </a:lnTo>
-                <a:close/>
-                <a:lnTo>
-                  <a:pt x="302761" y="759961"/>
-                </a:lnTo>
-                <a:close/>
-                <a:lnTo>
-                  <a:pt x="307348" y="764548"/>
-                </a:lnTo>
-                <a:close/>
-                <a:lnTo>
-                  <a:pt x="311936" y="769136"/>
-                </a:lnTo>
-                <a:close/>
-                <a:lnTo>
-                  <a:pt x="316523" y="773723"/>
-                </a:lnTo>
-                <a:close/>
-                <a:lnTo>
-                  <a:pt x="321110" y="778310"/>
-                </a:lnTo>
-                <a:close/>
-                <a:lnTo>
-                  <a:pt x="325698" y="782898"/>
-                </a:lnTo>
-                <a:close/>
-                <a:lnTo>
-                  <a:pt x="330285" y="787485"/>
-                </a:lnTo>
-                <a:close/>
-                <a:lnTo>
-                  <a:pt x="334872" y="792072"/>
-                </a:lnTo>
-                <a:close/>
-                <a:lnTo>
-                  <a:pt x="339460" y="796660"/>
-                </a:lnTo>
-                <a:close/>
-                <a:lnTo>
-                  <a:pt x="344047" y="801247"/>
-                </a:lnTo>
-                <a:close/>
-                <a:lnTo>
-                  <a:pt x="348634" y="805834"/>
-                </a:lnTo>
-                <a:close/>
-                <a:lnTo>
-                  <a:pt x="353221" y="810421"/>
-                </a:lnTo>
-                <a:close/>
-                <a:lnTo>
-                  <a:pt x="357809" y="815009"/>
-                </a:lnTo>
-                <a:close/>
-                <a:lnTo>
-                  <a:pt x="362396" y="819596"/>
-                </a:lnTo>
-                <a:close/>
-                <a:lnTo>
-                  <a:pt x="366983" y="824183"/>
-                </a:lnTo>
-                <a:close/>
-                <a:lnTo>
-                  <a:pt x="371571" y="828771"/>
-                </a:lnTo>
-                <a:close/>
-                <a:lnTo>
-                  <a:pt x="376158" y="833358"/>
-                </a:lnTo>
-                <a:close/>
-                <a:lnTo>
-                  <a:pt x="380745" y="837945"/>
-                </a:lnTo>
-                <a:close/>
-                <a:lnTo>
-                  <a:pt x="385332" y="842532"/>
-                </a:lnTo>
-                <a:close/>
-                <a:lnTo>
-                  <a:pt x="389920" y="847120"/>
-                </a:lnTo>
-                <a:close/>
-                <a:lnTo>
-                  <a:pt x="394507" y="851707"/>
-                </a:lnTo>
-                <a:close/>
-                <a:lnTo>
-                  <a:pt x="399094" y="856294"/>
-                </a:lnTo>
-                <a:close/>
-                <a:lnTo>
-                  <a:pt x="403682" y="860882"/>
-                </a:lnTo>
-                <a:close/>
-                <a:lnTo>
-                  <a:pt x="408269" y="865469"/>
-                </a:lnTo>
-                <a:close/>
-                <a:lnTo>
-                  <a:pt x="412856" y="870056"/>
-                </a:lnTo>
-                <a:close/>
-                <a:lnTo>
-                  <a:pt x="417443" y="874643"/>
-                </a:lnTo>
-                <a:close/>
-                <a:lnTo>
-                  <a:pt x="422031" y="879231"/>
-                </a:lnTo>
-                <a:close/>
-                <a:lnTo>
-                  <a:pt x="426618" y="883818"/>
-                </a:lnTo>
-                <a:close/>
-                <a:lnTo>
-                  <a:pt x="431205" y="888405"/>
-                </a:lnTo>
-                <a:close/>
-                <a:lnTo>
-                  <a:pt x="435793" y="892993"/>
-                </a:lnTo>
-                <a:close/>
-                <a:lnTo>
-                  <a:pt x="440380" y="897580"/>
-                </a:lnTo>
-                <a:close/>
-                <a:lnTo>
-                  <a:pt x="444967" y="902167"/>
-                </a:lnTo>
-                <a:close/>
-                <a:lnTo>
-                  <a:pt x="449555" y="906755"/>
-                </a:lnTo>
-                <a:close/>
-                <a:lnTo>
-                  <a:pt x="454142" y="911342"/>
-                </a:lnTo>
-                <a:close/>
-                <a:lnTo>
-                  <a:pt x="458729" y="915929"/>
-                </a:lnTo>
-                <a:close/>
-                <a:lnTo>
-                  <a:pt x="463316" y="920516"/>
-                </a:lnTo>
-                <a:close/>
-                <a:lnTo>
-                  <a:pt x="467904" y="925104"/>
-                </a:lnTo>
-                <a:close/>
-                <a:lnTo>
-                  <a:pt x="472491" y="929691"/>
-                </a:lnTo>
-                <a:close/>
-                <a:lnTo>
-                  <a:pt x="477078" y="934278"/>
-                </a:lnTo>
-                <a:close/>
-                <a:lnTo>
-                  <a:pt x="481666" y="938866"/>
-                </a:lnTo>
-                <a:close/>
-                <a:lnTo>
-                  <a:pt x="486253" y="943453"/>
-                </a:lnTo>
-                <a:close/>
-                <a:lnTo>
-                  <a:pt x="490840" y="948040"/>
-                </a:lnTo>
-                <a:close/>
-                <a:lnTo>
-                  <a:pt x="495427" y="952627"/>
-                </a:lnTo>
-                <a:close/>
-                <a:lnTo>
-                  <a:pt x="500015" y="957215"/>
-                </a:lnTo>
-                <a:close/>
-                <a:lnTo>
-                  <a:pt x="504602" y="961802"/>
-                </a:lnTo>
-                <a:close/>
-                <a:lnTo>
-                  <a:pt x="509189" y="966389"/>
-                </a:lnTo>
-                <a:close/>
-                <a:lnTo>
-                  <a:pt x="513777" y="970977"/>
-                </a:lnTo>
-                <a:close/>
-                <a:lnTo>
-                  <a:pt x="518364" y="975564"/>
-                </a:lnTo>
-                <a:close/>
-                <a:lnTo>
-                  <a:pt x="522951" y="980151"/>
-                </a:lnTo>
-                <a:close/>
-                <a:lnTo>
-                  <a:pt x="527538" y="984738"/>
-                </a:lnTo>
-                <a:close/>
-                <a:lnTo>
-                  <a:pt x="532126" y="989326"/>
-                </a:lnTo>
-                <a:close/>
-                <a:lnTo>
-                  <a:pt x="536713" y="993913"/>
-                </a:lnTo>
-                <a:close/>
-                <a:lnTo>
-                  <a:pt x="541300" y="998500"/>
-                </a:lnTo>
-                <a:close/>
-                <a:lnTo>
-                  <a:pt x="545888" y="1003088"/>
-                </a:lnTo>
-                <a:close/>
-                <a:lnTo>
-                  <a:pt x="550475" y="1007675"/>
-                </a:lnTo>
-                <a:close/>
-                <a:lnTo>
-                  <a:pt x="555062" y="1012262"/>
-                </a:lnTo>
-                <a:close/>
-                <a:lnTo>
-                  <a:pt x="559649" y="1016849"/>
-                </a:lnTo>
-                <a:close/>
-                <a:lnTo>
-                  <a:pt x="564237" y="1021437"/>
-                </a:lnTo>
-                <a:close/>
-                <a:lnTo>
-                  <a:pt x="568824" y="1026024"/>
-                </a:lnTo>
-                <a:close/>
-                <a:lnTo>
-                  <a:pt x="573411" y="1030611"/>
-                </a:lnTo>
-                <a:close/>
-                <a:lnTo>
-                  <a:pt x="577999" y="1035199"/>
-                </a:lnTo>
-                <a:close/>
-                <a:lnTo>
-                  <a:pt x="582586" y="1039786"/>
-                </a:lnTo>
-                <a:close/>
-                <a:lnTo>
-                  <a:pt x="587173" y="1044373"/>
-                </a:lnTo>
-                <a:close/>
-                <a:lnTo>
-                  <a:pt x="591761" y="1048961"/>
-                </a:lnTo>
-                <a:close/>
-                <a:lnTo>
-                  <a:pt x="596348" y="1053548"/>
-                </a:lnTo>
-                <a:close/>
-                <a:lnTo>
-                  <a:pt x="600935" y="1058135"/>
-                </a:lnTo>
-                <a:close/>
-                <a:lnTo>
-                  <a:pt x="605522" y="1062722"/>
-                </a:lnTo>
-                <a:close/>
-                <a:lnTo>
-                  <a:pt x="610110" y="1067310"/>
-                </a:lnTo>
-                <a:close/>
-                <a:lnTo>
-                  <a:pt x="614697" y="1071897"/>
-                </a:lnTo>
-                <a:close/>
-                <a:lnTo>
-                  <a:pt x="619284" y="1076484"/>
-                </a:lnTo>
-                <a:close/>
-                <a:lnTo>
-                  <a:pt x="623872" y="1081072"/>
-                </a:lnTo>
-                <a:close/>
-                <a:lnTo>
-                  <a:pt x="628459" y="1085659"/>
-                </a:lnTo>
-                <a:close/>
-                <a:lnTo>
-                  <a:pt x="633046" y="1090246"/>
-                </a:lnTo>
-                <a:close/>
-                <a:lnTo>
-                  <a:pt x="637633" y="1094833"/>
-                </a:lnTo>
-                <a:close/>
-                <a:lnTo>
-                  <a:pt x="642221" y="1099421"/>
-                </a:lnTo>
-                <a:close/>
-                <a:lnTo>
-                  <a:pt x="646808" y="1104008"/>
-                </a:lnTo>
-                <a:close/>
-                <a:lnTo>
-                  <a:pt x="651395" y="1108595"/>
-                </a:lnTo>
-                <a:close/>
-                <a:lnTo>
-                  <a:pt x="655983" y="1113183"/>
-                </a:lnTo>
-                <a:close/>
-                <a:lnTo>
-                  <a:pt x="660570" y="1117770"/>
-                </a:lnTo>
-                <a:close/>
-                <a:lnTo>
-                  <a:pt x="665157" y="1122357"/>
-                </a:lnTo>
-                <a:close/>
-                <a:lnTo>
-                  <a:pt x="669744" y="1126947"/>
-                </a:lnTo>
-                <a:close/>
-                <a:lnTo>
-                  <a:pt x="674332" y="1131556"/>
-                </a:lnTo>
-                <a:close/>
-                <a:lnTo>
-                  <a:pt x="678919" y="1136324"/>
-                </a:lnTo>
-                <a:close/>
-                <a:lnTo>
-                  <a:pt x="683506" y="1141668"/>
-                </a:lnTo>
-                <a:close/>
-                <a:lnTo>
-                  <a:pt x="688094" y="683763"/>
-                </a:lnTo>
-                <a:close/>
-                <a:lnTo>
-                  <a:pt x="692681" y="678974"/>
-                </a:lnTo>
-                <a:close/>
-                <a:lnTo>
-                  <a:pt x="697268" y="674338"/>
-                </a:lnTo>
-                <a:close/>
-                <a:lnTo>
-                  <a:pt x="701856" y="669745"/>
-                </a:lnTo>
-                <a:close/>
-                <a:lnTo>
-                  <a:pt x="706443" y="665157"/>
-                </a:lnTo>
-                <a:close/>
-                <a:lnTo>
-                  <a:pt x="711030" y="660570"/>
-                </a:lnTo>
-                <a:close/>
-                <a:lnTo>
-                  <a:pt x="715617" y="655983"/>
-                </a:lnTo>
-                <a:close/>
-                <a:lnTo>
-                  <a:pt x="720205" y="651395"/>
-                </a:lnTo>
-                <a:close/>
-                <a:lnTo>
-                  <a:pt x="724792" y="646808"/>
-                </a:lnTo>
-                <a:close/>
-                <a:lnTo>
-                  <a:pt x="729379" y="642221"/>
-                </a:lnTo>
-                <a:close/>
-                <a:lnTo>
-                  <a:pt x="733967" y="637633"/>
-                </a:lnTo>
-                <a:close/>
-                <a:lnTo>
-                  <a:pt x="738554" y="633046"/>
-                </a:lnTo>
-                <a:close/>
-                <a:lnTo>
-                  <a:pt x="743141" y="628459"/>
-                </a:lnTo>
-                <a:close/>
-                <a:lnTo>
-                  <a:pt x="747728" y="623872"/>
-                </a:lnTo>
-                <a:close/>
-                <a:lnTo>
-                  <a:pt x="752316" y="619284"/>
-                </a:lnTo>
-                <a:close/>
-                <a:lnTo>
-                  <a:pt x="756903" y="614697"/>
-                </a:lnTo>
-                <a:close/>
-                <a:lnTo>
-                  <a:pt x="761490" y="610110"/>
-                </a:lnTo>
-                <a:close/>
-                <a:lnTo>
-                  <a:pt x="766078" y="605522"/>
-                </a:lnTo>
-                <a:close/>
-                <a:lnTo>
-                  <a:pt x="770665" y="600935"/>
-                </a:lnTo>
-                <a:close/>
-                <a:lnTo>
-                  <a:pt x="775252" y="596348"/>
-                </a:lnTo>
-                <a:close/>
-                <a:lnTo>
-                  <a:pt x="779839" y="591761"/>
-                </a:lnTo>
-                <a:close/>
-                <a:lnTo>
-                  <a:pt x="784427" y="587173"/>
-                </a:lnTo>
-                <a:close/>
-                <a:lnTo>
-                  <a:pt x="789014" y="582586"/>
-                </a:lnTo>
-                <a:close/>
-                <a:lnTo>
-                  <a:pt x="793601" y="577999"/>
-                </a:lnTo>
-                <a:close/>
-                <a:lnTo>
-                  <a:pt x="798189" y="573411"/>
-                </a:lnTo>
-                <a:close/>
-                <a:lnTo>
-                  <a:pt x="802776" y="568824"/>
-                </a:lnTo>
-                <a:close/>
-                <a:lnTo>
-                  <a:pt x="807363" y="564237"/>
-                </a:lnTo>
-                <a:close/>
-                <a:lnTo>
-                  <a:pt x="811951" y="559649"/>
-                </a:lnTo>
-                <a:close/>
-                <a:lnTo>
-                  <a:pt x="816538" y="555062"/>
-                </a:lnTo>
-                <a:close/>
-                <a:lnTo>
-                  <a:pt x="821125" y="550475"/>
-                </a:lnTo>
-                <a:close/>
-                <a:lnTo>
-                  <a:pt x="825712" y="545888"/>
-                </a:lnTo>
-                <a:close/>
-                <a:lnTo>
-                  <a:pt x="830300" y="541300"/>
-                </a:lnTo>
-                <a:close/>
-                <a:lnTo>
-                  <a:pt x="834887" y="536713"/>
-                </a:lnTo>
-                <a:close/>
-                <a:lnTo>
-                  <a:pt x="839474" y="532126"/>
-                </a:lnTo>
-                <a:close/>
-                <a:lnTo>
-                  <a:pt x="844062" y="527538"/>
-                </a:lnTo>
-                <a:close/>
-                <a:lnTo>
-                  <a:pt x="848649" y="522951"/>
-                </a:lnTo>
-                <a:close/>
-                <a:lnTo>
-                  <a:pt x="853236" y="518364"/>
-                </a:lnTo>
-                <a:close/>
-                <a:lnTo>
-                  <a:pt x="857823" y="513777"/>
-                </a:lnTo>
-                <a:close/>
-                <a:lnTo>
-                  <a:pt x="862411" y="509189"/>
-                </a:lnTo>
-                <a:close/>
-                <a:lnTo>
-                  <a:pt x="866998" y="504602"/>
-                </a:lnTo>
-                <a:close/>
-                <a:lnTo>
-                  <a:pt x="871585" y="500015"/>
-                </a:lnTo>
-                <a:close/>
-                <a:lnTo>
-                  <a:pt x="876173" y="495427"/>
-                </a:lnTo>
-                <a:close/>
-                <a:lnTo>
-                  <a:pt x="880760" y="490840"/>
-                </a:lnTo>
-                <a:close/>
-                <a:lnTo>
-                  <a:pt x="885347" y="486253"/>
-                </a:lnTo>
-                <a:close/>
-                <a:lnTo>
-                  <a:pt x="889934" y="481666"/>
-                </a:lnTo>
-                <a:close/>
-                <a:lnTo>
-                  <a:pt x="894522" y="477078"/>
-                </a:lnTo>
-                <a:close/>
-                <a:lnTo>
-                  <a:pt x="899109" y="472491"/>
-                </a:lnTo>
-                <a:close/>
-                <a:lnTo>
-                  <a:pt x="903696" y="467904"/>
-                </a:lnTo>
-                <a:close/>
-                <a:lnTo>
-                  <a:pt x="908284" y="463316"/>
-                </a:lnTo>
-                <a:close/>
-                <a:lnTo>
-                  <a:pt x="912871" y="458729"/>
-                </a:lnTo>
-                <a:close/>
-                <a:lnTo>
-                  <a:pt x="917458" y="454142"/>
-                </a:lnTo>
-                <a:close/>
-                <a:lnTo>
-                  <a:pt x="922045" y="449555"/>
-                </a:lnTo>
-                <a:close/>
-                <a:lnTo>
-                  <a:pt x="926633" y="444967"/>
-                </a:lnTo>
-                <a:close/>
-                <a:lnTo>
-                  <a:pt x="931220" y="440380"/>
-                </a:lnTo>
-                <a:close/>
-                <a:lnTo>
-                  <a:pt x="935807" y="435793"/>
-                </a:lnTo>
-                <a:close/>
-                <a:lnTo>
-                  <a:pt x="940395" y="431205"/>
-                </a:lnTo>
-                <a:close/>
-                <a:lnTo>
-                  <a:pt x="944982" y="426618"/>
-                </a:lnTo>
-                <a:close/>
-                <a:lnTo>
-                  <a:pt x="949569" y="422031"/>
-                </a:lnTo>
-                <a:close/>
-                <a:lnTo>
-                  <a:pt x="954157" y="417443"/>
-                </a:lnTo>
-                <a:close/>
-                <a:lnTo>
-                  <a:pt x="958744" y="412856"/>
-                </a:lnTo>
-                <a:close/>
-                <a:lnTo>
-                  <a:pt x="963331" y="408269"/>
-                </a:lnTo>
-                <a:close/>
-                <a:lnTo>
-                  <a:pt x="967918" y="403682"/>
-                </a:lnTo>
-                <a:close/>
-                <a:lnTo>
-                  <a:pt x="972506" y="399094"/>
-                </a:lnTo>
-                <a:close/>
-                <a:lnTo>
-                  <a:pt x="977093" y="394507"/>
-                </a:lnTo>
-                <a:close/>
-                <a:lnTo>
-                  <a:pt x="981680" y="389920"/>
-                </a:lnTo>
-                <a:close/>
-                <a:lnTo>
-                  <a:pt x="986268" y="385332"/>
-                </a:lnTo>
-                <a:close/>
-                <a:lnTo>
-                  <a:pt x="990855" y="380745"/>
-                </a:lnTo>
-                <a:close/>
-                <a:lnTo>
-                  <a:pt x="995442" y="376158"/>
-                </a:lnTo>
-                <a:close/>
-                <a:lnTo>
-                  <a:pt x="1000029" y="371571"/>
-                </a:lnTo>
-                <a:close/>
-                <a:lnTo>
-                  <a:pt x="1004617" y="366983"/>
-                </a:lnTo>
-                <a:close/>
-                <a:lnTo>
-                  <a:pt x="1009204" y="362396"/>
-                </a:lnTo>
-                <a:close/>
-                <a:lnTo>
-                  <a:pt x="1013791" y="357809"/>
-                </a:lnTo>
-                <a:close/>
-                <a:lnTo>
-                  <a:pt x="1018379" y="353221"/>
-                </a:lnTo>
-                <a:close/>
-                <a:lnTo>
-                  <a:pt x="1022966" y="348634"/>
-                </a:lnTo>
-                <a:close/>
-                <a:lnTo>
-                  <a:pt x="1027553" y="344047"/>
-                </a:lnTo>
-                <a:close/>
-                <a:lnTo>
-                  <a:pt x="1032140" y="339460"/>
-                </a:lnTo>
-                <a:close/>
-                <a:lnTo>
-                  <a:pt x="1036728" y="334872"/>
-                </a:lnTo>
-                <a:close/>
-                <a:lnTo>
-                  <a:pt x="1041315" y="330285"/>
-                </a:lnTo>
-                <a:close/>
-                <a:lnTo>
-                  <a:pt x="1045902" y="325698"/>
-                </a:lnTo>
-                <a:close/>
-                <a:lnTo>
-                  <a:pt x="1050490" y="321110"/>
-                </a:lnTo>
-                <a:close/>
-                <a:lnTo>
-                  <a:pt x="1055077" y="316523"/>
-                </a:lnTo>
-                <a:close/>
-                <a:lnTo>
-                  <a:pt x="1059664" y="311936"/>
-                </a:lnTo>
-                <a:close/>
-                <a:lnTo>
-                  <a:pt x="1064252" y="307348"/>
-                </a:lnTo>
-                <a:close/>
-                <a:lnTo>
-                  <a:pt x="1068839" y="302761"/>
-                </a:lnTo>
-                <a:close/>
-                <a:lnTo>
-                  <a:pt x="1073426" y="298174"/>
-                </a:lnTo>
-                <a:close/>
-                <a:lnTo>
-                  <a:pt x="1078013" y="293587"/>
-                </a:lnTo>
-                <a:close/>
-                <a:lnTo>
-                  <a:pt x="1082601" y="288999"/>
-                </a:lnTo>
-                <a:close/>
-                <a:lnTo>
-                  <a:pt x="1087188" y="284412"/>
-                </a:lnTo>
-                <a:close/>
-                <a:lnTo>
-                  <a:pt x="1091775" y="279825"/>
-                </a:lnTo>
-                <a:close/>
-                <a:lnTo>
-                  <a:pt x="1096363" y="275237"/>
-                </a:lnTo>
-                <a:close/>
-                <a:lnTo>
-                  <a:pt x="1100950" y="270650"/>
-                </a:lnTo>
-                <a:close/>
-                <a:lnTo>
-                  <a:pt x="1105537" y="266063"/>
-                </a:lnTo>
-                <a:close/>
-                <a:lnTo>
-                  <a:pt x="1110124" y="261476"/>
-                </a:lnTo>
-                <a:close/>
-                <a:lnTo>
-                  <a:pt x="1114712" y="256888"/>
-                </a:lnTo>
-                <a:close/>
-                <a:lnTo>
-                  <a:pt x="1119299" y="252301"/>
-                </a:lnTo>
-                <a:close/>
-                <a:lnTo>
-                  <a:pt x="1123886" y="247714"/>
-                </a:lnTo>
-                <a:close/>
-                <a:lnTo>
-                  <a:pt x="1128474" y="243126"/>
-                </a:lnTo>
-                <a:close/>
-                <a:lnTo>
-                  <a:pt x="1133061" y="238539"/>
-                </a:lnTo>
-                <a:close/>
-                <a:lnTo>
-                  <a:pt x="1137648" y="233952"/>
-                </a:lnTo>
-                <a:close/>
-                <a:lnTo>
-                  <a:pt x="1142235" y="229365"/>
-                </a:lnTo>
-                <a:close/>
-                <a:lnTo>
-                  <a:pt x="1146823" y="224777"/>
-                </a:lnTo>
-                <a:close/>
-                <a:lnTo>
-                  <a:pt x="1151410" y="220190"/>
-                </a:lnTo>
-                <a:close/>
-                <a:lnTo>
-                  <a:pt x="1155997" y="215603"/>
-                </a:lnTo>
-                <a:close/>
-                <a:lnTo>
-                  <a:pt x="1160585" y="211015"/>
-                </a:lnTo>
-                <a:close/>
-                <a:lnTo>
-                  <a:pt x="1165172" y="206428"/>
-                </a:lnTo>
-                <a:close/>
-                <a:lnTo>
-                  <a:pt x="1169759" y="201841"/>
-                </a:lnTo>
-                <a:close/>
-                <a:lnTo>
-                  <a:pt x="1174346" y="197254"/>
-                </a:lnTo>
-                <a:close/>
-                <a:lnTo>
-                  <a:pt x="1178934" y="192666"/>
-                </a:lnTo>
-                <a:close/>
-                <a:lnTo>
-                  <a:pt x="1183521" y="188079"/>
-                </a:lnTo>
-                <a:close/>
-                <a:lnTo>
-                  <a:pt x="1188108" y="183492"/>
-                </a:lnTo>
-                <a:close/>
-                <a:lnTo>
-                  <a:pt x="1192696" y="178904"/>
-                </a:lnTo>
-                <a:close/>
-                <a:lnTo>
-                  <a:pt x="1197283" y="174317"/>
-                </a:lnTo>
-                <a:close/>
-                <a:lnTo>
-                  <a:pt x="1201870" y="169730"/>
-                </a:lnTo>
-                <a:close/>
-                <a:lnTo>
-                  <a:pt x="1206458" y="165142"/>
-                </a:lnTo>
-                <a:close/>
-                <a:lnTo>
-                  <a:pt x="1211045" y="160555"/>
-                </a:lnTo>
-                <a:close/>
-                <a:lnTo>
-                  <a:pt x="1215632" y="155968"/>
-                </a:lnTo>
-                <a:close/>
-                <a:lnTo>
-                  <a:pt x="1220219" y="151381"/>
-                </a:lnTo>
-                <a:close/>
-                <a:lnTo>
-                  <a:pt x="1224807" y="146793"/>
-                </a:lnTo>
-                <a:close/>
-                <a:lnTo>
-                  <a:pt x="1229394" y="142206"/>
-                </a:lnTo>
-                <a:close/>
-                <a:lnTo>
-                  <a:pt x="1233981" y="137619"/>
-                </a:lnTo>
-                <a:close/>
-                <a:lnTo>
-                  <a:pt x="1238569" y="133031"/>
-                </a:lnTo>
-                <a:close/>
-                <a:lnTo>
-                  <a:pt x="1243156" y="128444"/>
-                </a:lnTo>
-                <a:close/>
-                <a:lnTo>
-                  <a:pt x="1247743" y="123857"/>
-                </a:lnTo>
-                <a:close/>
-                <a:lnTo>
-                  <a:pt x="1252330" y="119270"/>
-                </a:lnTo>
-                <a:close/>
-                <a:lnTo>
-                  <a:pt x="1256918" y="114682"/>
-                </a:lnTo>
-                <a:close/>
-                <a:lnTo>
-                  <a:pt x="1261505" y="110095"/>
-                </a:lnTo>
-                <a:close/>
-                <a:lnTo>
-                  <a:pt x="1266092" y="105508"/>
-                </a:lnTo>
-                <a:close/>
-                <a:lnTo>
-                  <a:pt x="1270680" y="100920"/>
-                </a:lnTo>
-                <a:close/>
-                <a:lnTo>
-                  <a:pt x="1275267" y="96333"/>
-                </a:lnTo>
-                <a:close/>
-                <a:lnTo>
-                  <a:pt x="1279854" y="91746"/>
-                </a:lnTo>
-                <a:close/>
-                <a:lnTo>
-                  <a:pt x="1284441" y="87159"/>
-                </a:lnTo>
-                <a:close/>
-                <a:lnTo>
-                  <a:pt x="1289029" y="82571"/>
-                </a:lnTo>
-                <a:close/>
-                <a:lnTo>
-                  <a:pt x="1293616" y="77984"/>
-                </a:lnTo>
-                <a:close/>
-                <a:lnTo>
-                  <a:pt x="1298203" y="73397"/>
-                </a:lnTo>
-                <a:close/>
-                <a:lnTo>
-                  <a:pt x="1302791" y="68809"/>
-                </a:lnTo>
-                <a:close/>
-                <a:lnTo>
-                  <a:pt x="1307378" y="64222"/>
-                </a:lnTo>
-                <a:close/>
-                <a:lnTo>
-                  <a:pt x="1311965" y="59635"/>
-                </a:lnTo>
-                <a:close/>
-                <a:lnTo>
-                  <a:pt x="1316553" y="55047"/>
-                </a:lnTo>
-                <a:close/>
-                <a:lnTo>
-                  <a:pt x="1321140" y="50460"/>
-                </a:lnTo>
-                <a:close/>
-                <a:lnTo>
-                  <a:pt x="1325727" y="45873"/>
-                </a:lnTo>
-                <a:close/>
-                <a:lnTo>
-                  <a:pt x="1330314" y="41286"/>
-                </a:lnTo>
-                <a:close/>
-                <a:lnTo>
-                  <a:pt x="1334902" y="36698"/>
-                </a:lnTo>
-                <a:close/>
-                <a:lnTo>
-                  <a:pt x="1339489" y="32111"/>
-                </a:lnTo>
-                <a:close/>
-                <a:lnTo>
-                  <a:pt x="1344076" y="27524"/>
-                </a:lnTo>
-                <a:close/>
-                <a:lnTo>
-                  <a:pt x="1348664" y="22936"/>
-                </a:lnTo>
-                <a:close/>
-                <a:lnTo>
-                  <a:pt x="1353251" y="18349"/>
-                </a:lnTo>
-                <a:close/>
-                <a:lnTo>
-                  <a:pt x="1357838" y="13762"/>
-                </a:lnTo>
-                <a:close/>
-                <a:lnTo>
-                  <a:pt x="1362425" y="9175"/>
-                </a:lnTo>
-                <a:close/>
-                <a:lnTo>
-                  <a:pt x="1367013" y="4587"/>
-                </a:lnTo>
-                <a:close/>
-                <a:lnTo>
-                  <a:pt x="1371600" y="0"/>
+                  <a:pt x="2599" y="2599"/>
+                </a:lnTo>
+                <a:close/>
+                <a:lnTo>
+                  <a:pt x="5199" y="5199"/>
+                </a:lnTo>
+                <a:close/>
+                <a:lnTo>
+                  <a:pt x="7798" y="7798"/>
+                </a:lnTo>
+                <a:close/>
+                <a:lnTo>
+                  <a:pt x="10398" y="10398"/>
+                </a:lnTo>
+                <a:close/>
+                <a:lnTo>
+                  <a:pt x="12997" y="12997"/>
+                </a:lnTo>
+                <a:close/>
+                <a:lnTo>
+                  <a:pt x="15597" y="15597"/>
+                </a:lnTo>
+                <a:close/>
+                <a:lnTo>
+                  <a:pt x="18196" y="18196"/>
+                </a:lnTo>
+                <a:close/>
+                <a:lnTo>
+                  <a:pt x="20796" y="20796"/>
+                </a:lnTo>
+                <a:close/>
+                <a:lnTo>
+                  <a:pt x="23395" y="23395"/>
+                </a:lnTo>
+                <a:close/>
+                <a:lnTo>
+                  <a:pt x="25995" y="25995"/>
+                </a:lnTo>
+                <a:close/>
+                <a:lnTo>
+                  <a:pt x="28594" y="28594"/>
+                </a:lnTo>
+                <a:close/>
+                <a:lnTo>
+                  <a:pt x="31194" y="31194"/>
+                </a:lnTo>
+                <a:close/>
+                <a:lnTo>
+                  <a:pt x="33793" y="33793"/>
+                </a:lnTo>
+                <a:close/>
+                <a:lnTo>
+                  <a:pt x="36393" y="36393"/>
+                </a:lnTo>
+                <a:close/>
+                <a:lnTo>
+                  <a:pt x="38992" y="38992"/>
+                </a:lnTo>
+                <a:close/>
+                <a:lnTo>
+                  <a:pt x="41591" y="41591"/>
+                </a:lnTo>
+                <a:close/>
+                <a:lnTo>
+                  <a:pt x="44191" y="44191"/>
+                </a:lnTo>
+                <a:close/>
+                <a:lnTo>
+                  <a:pt x="46790" y="46790"/>
+                </a:lnTo>
+                <a:close/>
+                <a:lnTo>
+                  <a:pt x="49390" y="49390"/>
+                </a:lnTo>
+                <a:close/>
+                <a:lnTo>
+                  <a:pt x="51989" y="51989"/>
+                </a:lnTo>
+                <a:close/>
+                <a:lnTo>
+                  <a:pt x="54589" y="54589"/>
+                </a:lnTo>
+                <a:close/>
+                <a:lnTo>
+                  <a:pt x="57188" y="57188"/>
+                </a:lnTo>
+                <a:close/>
+                <a:lnTo>
+                  <a:pt x="59788" y="59788"/>
+                </a:lnTo>
+                <a:close/>
+                <a:lnTo>
+                  <a:pt x="62387" y="62387"/>
+                </a:lnTo>
+                <a:close/>
+                <a:lnTo>
+                  <a:pt x="64987" y="64987"/>
+                </a:lnTo>
+                <a:close/>
+                <a:lnTo>
+                  <a:pt x="67586" y="67586"/>
+                </a:lnTo>
+                <a:close/>
+                <a:lnTo>
+                  <a:pt x="70186" y="70186"/>
+                </a:lnTo>
+                <a:close/>
+                <a:lnTo>
+                  <a:pt x="72785" y="72785"/>
+                </a:lnTo>
+                <a:close/>
+                <a:lnTo>
+                  <a:pt x="75384" y="75384"/>
+                </a:lnTo>
+                <a:close/>
+                <a:lnTo>
+                  <a:pt x="77984" y="77984"/>
+                </a:lnTo>
+                <a:close/>
+                <a:lnTo>
+                  <a:pt x="80583" y="80583"/>
+                </a:lnTo>
+                <a:close/>
+                <a:lnTo>
+                  <a:pt x="83183" y="83183"/>
+                </a:lnTo>
+                <a:close/>
+                <a:lnTo>
+                  <a:pt x="85782" y="85782"/>
+                </a:lnTo>
+                <a:close/>
+                <a:lnTo>
+                  <a:pt x="88382" y="88382"/>
+                </a:lnTo>
+                <a:close/>
+                <a:lnTo>
+                  <a:pt x="90981" y="90981"/>
+                </a:lnTo>
+                <a:close/>
+                <a:lnTo>
+                  <a:pt x="93581" y="93581"/>
+                </a:lnTo>
+                <a:close/>
+                <a:lnTo>
+                  <a:pt x="96180" y="96180"/>
+                </a:lnTo>
+                <a:close/>
+                <a:lnTo>
+                  <a:pt x="98780" y="98780"/>
+                </a:lnTo>
+                <a:close/>
+                <a:lnTo>
+                  <a:pt x="101379" y="101379"/>
+                </a:lnTo>
+                <a:close/>
+                <a:lnTo>
+                  <a:pt x="103979" y="103979"/>
+                </a:lnTo>
+                <a:close/>
+                <a:lnTo>
+                  <a:pt x="106578" y="106578"/>
+                </a:lnTo>
+                <a:close/>
+                <a:lnTo>
+                  <a:pt x="109178" y="109178"/>
+                </a:lnTo>
+                <a:close/>
+                <a:lnTo>
+                  <a:pt x="111777" y="111777"/>
+                </a:lnTo>
+                <a:close/>
+                <a:lnTo>
+                  <a:pt x="114376" y="114376"/>
+                </a:lnTo>
+                <a:close/>
+                <a:lnTo>
+                  <a:pt x="116976" y="116976"/>
+                </a:lnTo>
+                <a:close/>
+                <a:lnTo>
+                  <a:pt x="119575" y="119575"/>
+                </a:lnTo>
+                <a:close/>
+                <a:lnTo>
+                  <a:pt x="122175" y="122175"/>
+                </a:lnTo>
+                <a:close/>
+                <a:lnTo>
+                  <a:pt x="124774" y="124774"/>
+                </a:lnTo>
+                <a:close/>
+                <a:lnTo>
+                  <a:pt x="127374" y="127374"/>
+                </a:lnTo>
+                <a:close/>
+                <a:lnTo>
+                  <a:pt x="129973" y="129973"/>
+                </a:lnTo>
+                <a:close/>
+                <a:lnTo>
+                  <a:pt x="132573" y="132573"/>
+                </a:lnTo>
+                <a:close/>
+                <a:lnTo>
+                  <a:pt x="135172" y="135172"/>
+                </a:lnTo>
+                <a:close/>
+                <a:lnTo>
+                  <a:pt x="137772" y="137772"/>
+                </a:lnTo>
+                <a:close/>
+                <a:lnTo>
+                  <a:pt x="140371" y="140371"/>
+                </a:lnTo>
+                <a:close/>
+                <a:lnTo>
+                  <a:pt x="142971" y="142971"/>
+                </a:lnTo>
+                <a:close/>
+                <a:lnTo>
+                  <a:pt x="145570" y="145570"/>
+                </a:lnTo>
+                <a:close/>
+                <a:lnTo>
+                  <a:pt x="148170" y="148170"/>
+                </a:lnTo>
+                <a:close/>
+                <a:lnTo>
+                  <a:pt x="150769" y="150769"/>
+                </a:lnTo>
+                <a:close/>
+                <a:lnTo>
+                  <a:pt x="153368" y="153368"/>
+                </a:lnTo>
+                <a:close/>
+                <a:lnTo>
+                  <a:pt x="155968" y="155968"/>
+                </a:lnTo>
+                <a:close/>
+                <a:lnTo>
+                  <a:pt x="158567" y="158567"/>
+                </a:lnTo>
+                <a:close/>
+                <a:lnTo>
+                  <a:pt x="161167" y="161167"/>
+                </a:lnTo>
+                <a:close/>
+                <a:lnTo>
+                  <a:pt x="163766" y="163766"/>
+                </a:lnTo>
+                <a:close/>
+                <a:lnTo>
+                  <a:pt x="166366" y="166366"/>
+                </a:lnTo>
+                <a:close/>
+                <a:lnTo>
+                  <a:pt x="168965" y="168965"/>
+                </a:lnTo>
+                <a:close/>
+                <a:lnTo>
+                  <a:pt x="171565" y="171565"/>
+                </a:lnTo>
+                <a:close/>
+                <a:lnTo>
+                  <a:pt x="174164" y="174164"/>
+                </a:lnTo>
+                <a:close/>
+                <a:lnTo>
+                  <a:pt x="176764" y="176764"/>
+                </a:lnTo>
+                <a:close/>
+                <a:lnTo>
+                  <a:pt x="179363" y="179363"/>
+                </a:lnTo>
+                <a:close/>
+                <a:lnTo>
+                  <a:pt x="181963" y="181963"/>
+                </a:lnTo>
+                <a:close/>
+                <a:lnTo>
+                  <a:pt x="184562" y="184562"/>
+                </a:lnTo>
+                <a:close/>
+                <a:lnTo>
+                  <a:pt x="187161" y="187161"/>
+                </a:lnTo>
+                <a:close/>
+                <a:lnTo>
+                  <a:pt x="189761" y="189761"/>
+                </a:lnTo>
+                <a:close/>
+                <a:lnTo>
+                  <a:pt x="192360" y="192360"/>
+                </a:lnTo>
+                <a:close/>
+                <a:lnTo>
+                  <a:pt x="194960" y="194960"/>
+                </a:lnTo>
+                <a:close/>
+                <a:lnTo>
+                  <a:pt x="197559" y="197559"/>
+                </a:lnTo>
+                <a:close/>
+                <a:lnTo>
+                  <a:pt x="200159" y="200159"/>
+                </a:lnTo>
+                <a:close/>
+                <a:lnTo>
+                  <a:pt x="202758" y="202758"/>
+                </a:lnTo>
+                <a:close/>
+                <a:lnTo>
+                  <a:pt x="205358" y="205358"/>
+                </a:lnTo>
+                <a:close/>
+                <a:lnTo>
+                  <a:pt x="207957" y="207957"/>
+                </a:lnTo>
+                <a:close/>
+                <a:lnTo>
+                  <a:pt x="210557" y="210557"/>
+                </a:lnTo>
+                <a:close/>
+                <a:lnTo>
+                  <a:pt x="213156" y="213156"/>
+                </a:lnTo>
+                <a:close/>
+                <a:lnTo>
+                  <a:pt x="215756" y="215756"/>
+                </a:lnTo>
+                <a:close/>
+                <a:lnTo>
+                  <a:pt x="218355" y="218355"/>
+                </a:lnTo>
+                <a:close/>
+                <a:lnTo>
+                  <a:pt x="220955" y="220955"/>
+                </a:lnTo>
+                <a:close/>
+                <a:lnTo>
+                  <a:pt x="223554" y="223554"/>
+                </a:lnTo>
+                <a:close/>
+                <a:lnTo>
+                  <a:pt x="226153" y="226153"/>
+                </a:lnTo>
+                <a:close/>
+                <a:lnTo>
+                  <a:pt x="228753" y="228753"/>
+                </a:lnTo>
+                <a:close/>
+                <a:lnTo>
+                  <a:pt x="231352" y="231352"/>
+                </a:lnTo>
+                <a:close/>
+                <a:lnTo>
+                  <a:pt x="233952" y="233952"/>
+                </a:lnTo>
+                <a:close/>
+                <a:lnTo>
+                  <a:pt x="236551" y="236551"/>
+                </a:lnTo>
+                <a:close/>
+                <a:lnTo>
+                  <a:pt x="239151" y="239151"/>
+                </a:lnTo>
+                <a:close/>
+                <a:lnTo>
+                  <a:pt x="241750" y="241750"/>
+                </a:lnTo>
+                <a:close/>
+                <a:lnTo>
+                  <a:pt x="244350" y="244350"/>
+                </a:lnTo>
+                <a:close/>
+                <a:lnTo>
+                  <a:pt x="246949" y="246949"/>
+                </a:lnTo>
+                <a:close/>
+                <a:lnTo>
+                  <a:pt x="249549" y="249549"/>
+                </a:lnTo>
+                <a:close/>
+                <a:lnTo>
+                  <a:pt x="252148" y="252148"/>
+                </a:lnTo>
+                <a:close/>
+                <a:lnTo>
+                  <a:pt x="254748" y="254748"/>
+                </a:lnTo>
+                <a:close/>
+                <a:lnTo>
+                  <a:pt x="257347" y="257347"/>
+                </a:lnTo>
+                <a:close/>
+                <a:lnTo>
+                  <a:pt x="259947" y="259947"/>
+                </a:lnTo>
+                <a:close/>
+                <a:lnTo>
+                  <a:pt x="262546" y="262546"/>
+                </a:lnTo>
+                <a:close/>
+                <a:lnTo>
+                  <a:pt x="265145" y="265145"/>
+                </a:lnTo>
+                <a:close/>
+                <a:lnTo>
+                  <a:pt x="267745" y="267745"/>
+                </a:lnTo>
+                <a:close/>
+                <a:lnTo>
+                  <a:pt x="270344" y="270344"/>
+                </a:lnTo>
+                <a:close/>
+                <a:lnTo>
+                  <a:pt x="272944" y="272944"/>
+                </a:lnTo>
+                <a:close/>
+                <a:lnTo>
+                  <a:pt x="275543" y="275543"/>
+                </a:lnTo>
+                <a:close/>
+                <a:lnTo>
+                  <a:pt x="278143" y="278143"/>
+                </a:lnTo>
+                <a:close/>
+                <a:lnTo>
+                  <a:pt x="280742" y="280742"/>
+                </a:lnTo>
+                <a:close/>
+                <a:lnTo>
+                  <a:pt x="283342" y="283342"/>
+                </a:lnTo>
+                <a:close/>
+                <a:lnTo>
+                  <a:pt x="285941" y="285941"/>
+                </a:lnTo>
+                <a:close/>
+                <a:lnTo>
+                  <a:pt x="288540" y="288540"/>
+                </a:lnTo>
+                <a:close/>
+                <a:lnTo>
+                  <a:pt x="291140" y="291140"/>
+                </a:lnTo>
+                <a:close/>
+                <a:lnTo>
+                  <a:pt x="293739" y="293739"/>
+                </a:lnTo>
+                <a:close/>
+                <a:lnTo>
+                  <a:pt x="296339" y="296339"/>
+                </a:lnTo>
+                <a:close/>
+                <a:lnTo>
+                  <a:pt x="298938" y="298938"/>
+                </a:lnTo>
+                <a:close/>
+                <a:lnTo>
+                  <a:pt x="301538" y="301538"/>
+                </a:lnTo>
+                <a:close/>
+                <a:lnTo>
+                  <a:pt x="304137" y="304137"/>
+                </a:lnTo>
+                <a:close/>
+                <a:lnTo>
+                  <a:pt x="306737" y="306737"/>
+                </a:lnTo>
+                <a:close/>
+                <a:lnTo>
+                  <a:pt x="309336" y="309336"/>
+                </a:lnTo>
+                <a:close/>
+                <a:lnTo>
+                  <a:pt x="311936" y="311936"/>
+                </a:lnTo>
+                <a:close/>
+                <a:lnTo>
+                  <a:pt x="314535" y="314535"/>
+                </a:lnTo>
+                <a:close/>
+                <a:lnTo>
+                  <a:pt x="317135" y="317135"/>
+                </a:lnTo>
+                <a:close/>
+                <a:lnTo>
+                  <a:pt x="319734" y="319734"/>
+                </a:lnTo>
+                <a:close/>
+                <a:lnTo>
+                  <a:pt x="322334" y="322334"/>
+                </a:lnTo>
+                <a:close/>
+                <a:lnTo>
+                  <a:pt x="324933" y="324933"/>
+                </a:lnTo>
+                <a:close/>
+                <a:lnTo>
+                  <a:pt x="327533" y="327533"/>
+                </a:lnTo>
+                <a:close/>
+                <a:lnTo>
+                  <a:pt x="330132" y="330132"/>
+                </a:lnTo>
+                <a:close/>
+                <a:lnTo>
+                  <a:pt x="332732" y="332732"/>
+                </a:lnTo>
+                <a:close/>
+                <a:lnTo>
+                  <a:pt x="335331" y="335331"/>
+                </a:lnTo>
+                <a:close/>
+                <a:lnTo>
+                  <a:pt x="337931" y="337931"/>
+                </a:lnTo>
+                <a:close/>
+                <a:lnTo>
+                  <a:pt x="340531" y="340531"/>
+                </a:lnTo>
+                <a:close/>
+                <a:lnTo>
+                  <a:pt x="343130" y="343130"/>
+                </a:lnTo>
+                <a:close/>
+                <a:lnTo>
+                  <a:pt x="345730" y="345730"/>
+                </a:lnTo>
+                <a:close/>
+                <a:lnTo>
+                  <a:pt x="348329" y="348329"/>
+                </a:lnTo>
+                <a:close/>
+                <a:lnTo>
+                  <a:pt x="350928" y="350928"/>
+                </a:lnTo>
+                <a:close/>
+                <a:lnTo>
+                  <a:pt x="353528" y="353528"/>
+                </a:lnTo>
+                <a:close/>
+                <a:lnTo>
+                  <a:pt x="356127" y="356127"/>
+                </a:lnTo>
+                <a:close/>
+                <a:lnTo>
+                  <a:pt x="358727" y="358727"/>
+                </a:lnTo>
+                <a:close/>
+                <a:lnTo>
+                  <a:pt x="361326" y="361326"/>
+                </a:lnTo>
+                <a:close/>
+                <a:lnTo>
+                  <a:pt x="363925" y="363925"/>
+                </a:lnTo>
+                <a:close/>
+                <a:lnTo>
+                  <a:pt x="366524" y="366524"/>
+                </a:lnTo>
+                <a:close/>
+                <a:lnTo>
+                  <a:pt x="369124" y="369124"/>
+                </a:lnTo>
+                <a:close/>
+                <a:lnTo>
+                  <a:pt x="371723" y="371723"/>
+                </a:lnTo>
+                <a:close/>
+                <a:lnTo>
+                  <a:pt x="374322" y="374322"/>
+                </a:lnTo>
+                <a:close/>
+                <a:lnTo>
+                  <a:pt x="376921" y="376921"/>
+                </a:lnTo>
+                <a:close/>
+                <a:lnTo>
+                  <a:pt x="379520" y="379520"/>
+                </a:lnTo>
+                <a:close/>
+                <a:lnTo>
+                  <a:pt x="382119" y="382119"/>
+                </a:lnTo>
+                <a:close/>
+                <a:lnTo>
+                  <a:pt x="384719" y="384719"/>
+                </a:lnTo>
+                <a:close/>
+                <a:lnTo>
+                  <a:pt x="387318" y="387318"/>
+                </a:lnTo>
+                <a:close/>
+                <a:lnTo>
+                  <a:pt x="389917" y="389917"/>
+                </a:lnTo>
+                <a:close/>
+                <a:lnTo>
+                  <a:pt x="392517" y="392517"/>
+                </a:lnTo>
+                <a:close/>
+                <a:lnTo>
+                  <a:pt x="395116" y="395116"/>
+                </a:lnTo>
+                <a:close/>
+                <a:lnTo>
+                  <a:pt x="397716" y="397716"/>
+                </a:lnTo>
+                <a:close/>
+                <a:lnTo>
+                  <a:pt x="400315" y="400315"/>
+                </a:lnTo>
+                <a:close/>
+                <a:lnTo>
+                  <a:pt x="402915" y="402915"/>
+                </a:lnTo>
+                <a:close/>
+                <a:lnTo>
+                  <a:pt x="405515" y="405515"/>
+                </a:lnTo>
+                <a:close/>
+                <a:lnTo>
+                  <a:pt x="408115" y="408115"/>
+                </a:lnTo>
+                <a:close/>
+                <a:lnTo>
+                  <a:pt x="410715" y="410715"/>
+                </a:lnTo>
+                <a:close/>
+                <a:lnTo>
+                  <a:pt x="413316" y="413316"/>
+                </a:lnTo>
+                <a:close/>
+                <a:lnTo>
+                  <a:pt x="415916" y="415916"/>
+                </a:lnTo>
+                <a:close/>
+                <a:lnTo>
+                  <a:pt x="418517" y="418517"/>
+                </a:lnTo>
+                <a:close/>
+                <a:lnTo>
+                  <a:pt x="421117" y="421117"/>
+                </a:lnTo>
+                <a:close/>
+                <a:lnTo>
+                  <a:pt x="423718" y="423718"/>
+                </a:lnTo>
+                <a:close/>
+                <a:lnTo>
+                  <a:pt x="426319" y="426319"/>
+                </a:lnTo>
+                <a:close/>
+                <a:lnTo>
+                  <a:pt x="428919" y="428919"/>
+                </a:lnTo>
+                <a:close/>
+                <a:lnTo>
+                  <a:pt x="431519" y="431519"/>
+                </a:lnTo>
+                <a:close/>
+                <a:lnTo>
+                  <a:pt x="434120" y="434120"/>
+                </a:lnTo>
+                <a:close/>
+                <a:lnTo>
+                  <a:pt x="436720" y="436720"/>
+                </a:lnTo>
+                <a:close/>
+                <a:lnTo>
+                  <a:pt x="439319" y="439319"/>
+                </a:lnTo>
+                <a:close/>
+                <a:lnTo>
+                  <a:pt x="441919" y="441919"/>
+                </a:lnTo>
+                <a:close/>
+                <a:lnTo>
+                  <a:pt x="444518" y="444518"/>
+                </a:lnTo>
+                <a:close/>
+                <a:lnTo>
+                  <a:pt x="447116" y="447116"/>
+                </a:lnTo>
+                <a:close/>
+                <a:lnTo>
+                  <a:pt x="449714" y="449714"/>
+                </a:lnTo>
+                <a:close/>
+                <a:lnTo>
+                  <a:pt x="452312" y="452312"/>
+                </a:lnTo>
+                <a:close/>
+                <a:lnTo>
+                  <a:pt x="454909" y="454909"/>
+                </a:lnTo>
+                <a:close/>
+                <a:lnTo>
+                  <a:pt x="457505" y="457505"/>
+                </a:lnTo>
+                <a:close/>
+                <a:lnTo>
+                  <a:pt x="460101" y="460101"/>
+                </a:lnTo>
+                <a:close/>
+                <a:lnTo>
+                  <a:pt x="462697" y="462697"/>
+                </a:lnTo>
+                <a:close/>
+                <a:lnTo>
+                  <a:pt x="465292" y="465292"/>
+                </a:lnTo>
+                <a:close/>
+                <a:lnTo>
+                  <a:pt x="467887" y="467887"/>
+                </a:lnTo>
+                <a:close/>
+                <a:lnTo>
+                  <a:pt x="470482" y="470482"/>
+                </a:lnTo>
+                <a:close/>
+                <a:lnTo>
+                  <a:pt x="473077" y="473077"/>
+                </a:lnTo>
+                <a:close/>
+                <a:lnTo>
+                  <a:pt x="475673" y="475673"/>
+                </a:lnTo>
+                <a:close/>
+                <a:lnTo>
+                  <a:pt x="478269" y="478269"/>
+                </a:lnTo>
+                <a:close/>
+                <a:lnTo>
+                  <a:pt x="480867" y="480867"/>
+                </a:lnTo>
+                <a:close/>
+                <a:lnTo>
+                  <a:pt x="483465" y="483465"/>
+                </a:lnTo>
+                <a:close/>
+                <a:lnTo>
+                  <a:pt x="486064" y="486064"/>
+                </a:lnTo>
+                <a:close/>
+                <a:lnTo>
+                  <a:pt x="488664" y="488664"/>
+                </a:lnTo>
+                <a:close/>
+                <a:lnTo>
+                  <a:pt x="491266" y="491266"/>
+                </a:lnTo>
+                <a:close/>
+                <a:lnTo>
+                  <a:pt x="493869" y="493869"/>
+                </a:lnTo>
+                <a:close/>
+                <a:lnTo>
+                  <a:pt x="496475" y="496475"/>
+                </a:lnTo>
+                <a:close/>
+                <a:lnTo>
+                  <a:pt x="499082" y="499082"/>
+                </a:lnTo>
+                <a:close/>
+                <a:lnTo>
+                  <a:pt x="501691" y="501691"/>
+                </a:lnTo>
+                <a:close/>
+                <a:lnTo>
+                  <a:pt x="504303" y="504303"/>
+                </a:lnTo>
+                <a:close/>
+                <a:lnTo>
+                  <a:pt x="506917" y="506917"/>
+                </a:lnTo>
+                <a:close/>
+                <a:lnTo>
+                  <a:pt x="509532" y="509532"/>
+                </a:lnTo>
+                <a:close/>
+                <a:lnTo>
+                  <a:pt x="512148" y="512148"/>
+                </a:lnTo>
+                <a:close/>
+                <a:lnTo>
+                  <a:pt x="514764" y="514764"/>
+                </a:lnTo>
+                <a:close/>
+                <a:lnTo>
+                  <a:pt x="517379" y="517379"/>
+                </a:lnTo>
+                <a:close/>
+                <a:lnTo>
+                  <a:pt x="519993" y="519993"/>
+                </a:lnTo>
+                <a:close/>
+                <a:lnTo>
+                  <a:pt x="522606" y="522606"/>
+                </a:lnTo>
+                <a:close/>
+                <a:lnTo>
+                  <a:pt x="525216" y="525216"/>
+                </a:lnTo>
+                <a:close/>
+                <a:lnTo>
+                  <a:pt x="527823" y="527823"/>
+                </a:lnTo>
+                <a:close/>
+                <a:lnTo>
+                  <a:pt x="530426" y="530426"/>
+                </a:lnTo>
+                <a:close/>
+                <a:lnTo>
+                  <a:pt x="533025" y="533025"/>
+                </a:lnTo>
+                <a:close/>
+                <a:lnTo>
+                  <a:pt x="535619" y="535619"/>
+                </a:lnTo>
+                <a:close/>
+                <a:lnTo>
+                  <a:pt x="538207" y="538207"/>
+                </a:lnTo>
+                <a:close/>
+                <a:lnTo>
+                  <a:pt x="540788" y="540788"/>
+                </a:lnTo>
+                <a:close/>
+                <a:lnTo>
+                  <a:pt x="543363" y="543363"/>
+                </a:lnTo>
+                <a:close/>
+                <a:lnTo>
+                  <a:pt x="545931" y="545931"/>
+                </a:lnTo>
+                <a:close/>
+                <a:lnTo>
+                  <a:pt x="548490" y="548490"/>
+                </a:lnTo>
+                <a:close/>
+                <a:lnTo>
+                  <a:pt x="551040" y="551040"/>
+                </a:lnTo>
+                <a:close/>
+                <a:lnTo>
+                  <a:pt x="553584" y="553584"/>
+                </a:lnTo>
+                <a:close/>
+                <a:lnTo>
+                  <a:pt x="556124" y="556124"/>
+                </a:lnTo>
+                <a:close/>
+                <a:lnTo>
+                  <a:pt x="558662" y="558662"/>
+                </a:lnTo>
+                <a:close/>
+                <a:lnTo>
+                  <a:pt x="561200" y="561200"/>
+                </a:lnTo>
+                <a:close/>
+                <a:lnTo>
+                  <a:pt x="563742" y="563742"/>
+                </a:lnTo>
+                <a:close/>
+                <a:lnTo>
+                  <a:pt x="566288" y="566288"/>
+                </a:lnTo>
+                <a:close/>
+                <a:lnTo>
+                  <a:pt x="568843" y="568843"/>
+                </a:lnTo>
+                <a:close/>
+                <a:lnTo>
+                  <a:pt x="571407" y="571407"/>
+                </a:lnTo>
+                <a:close/>
+                <a:lnTo>
+                  <a:pt x="573984" y="573984"/>
+                </a:lnTo>
+                <a:close/>
+                <a:lnTo>
+                  <a:pt x="576576" y="576576"/>
+                </a:lnTo>
+                <a:close/>
+                <a:lnTo>
+                  <a:pt x="579185" y="579185"/>
+                </a:lnTo>
+                <a:close/>
+                <a:lnTo>
+                  <a:pt x="581814" y="581814"/>
+                </a:lnTo>
+                <a:close/>
+                <a:lnTo>
+                  <a:pt x="584465" y="584465"/>
+                </a:lnTo>
+                <a:close/>
+                <a:lnTo>
+                  <a:pt x="587141" y="587141"/>
+                </a:lnTo>
+                <a:close/>
+                <a:lnTo>
+                  <a:pt x="589844" y="589844"/>
+                </a:lnTo>
+                <a:close/>
+                <a:lnTo>
+                  <a:pt x="592576" y="592576"/>
+                </a:lnTo>
+                <a:close/>
+                <a:lnTo>
+                  <a:pt x="595339" y="595339"/>
+                </a:lnTo>
+                <a:close/>
+                <a:lnTo>
+                  <a:pt x="598132" y="598132"/>
+                </a:lnTo>
+                <a:close/>
+                <a:lnTo>
+                  <a:pt x="600946" y="600946"/>
+                </a:lnTo>
+                <a:close/>
+                <a:lnTo>
+                  <a:pt x="603773" y="603773"/>
+                </a:lnTo>
+                <a:close/>
+                <a:lnTo>
+                  <a:pt x="606603" y="606603"/>
+                </a:lnTo>
+                <a:close/>
+                <a:lnTo>
+                  <a:pt x="609427" y="609427"/>
+                </a:lnTo>
+                <a:close/>
+                <a:lnTo>
+                  <a:pt x="612236" y="612236"/>
+                </a:lnTo>
+                <a:close/>
+                <a:lnTo>
+                  <a:pt x="615022" y="615022"/>
+                </a:lnTo>
+                <a:close/>
+                <a:lnTo>
+                  <a:pt x="617775" y="617775"/>
+                </a:lnTo>
+                <a:close/>
+                <a:lnTo>
+                  <a:pt x="620487" y="620487"/>
+                </a:lnTo>
+                <a:close/>
+                <a:lnTo>
+                  <a:pt x="623148" y="623148"/>
+                </a:lnTo>
+                <a:close/>
+                <a:lnTo>
+                  <a:pt x="625750" y="625750"/>
+                </a:lnTo>
+                <a:close/>
+                <a:lnTo>
+                  <a:pt x="628284" y="628284"/>
+                </a:lnTo>
+                <a:close/>
+                <a:lnTo>
+                  <a:pt x="630740" y="630740"/>
+                </a:lnTo>
+                <a:close/>
+                <a:lnTo>
+                  <a:pt x="633110" y="633110"/>
+                </a:lnTo>
+                <a:close/>
+                <a:lnTo>
+                  <a:pt x="635385" y="635385"/>
+                </a:lnTo>
+                <a:close/>
+                <a:lnTo>
+                  <a:pt x="637556" y="637556"/>
+                </a:lnTo>
+                <a:close/>
+                <a:lnTo>
+                  <a:pt x="639613" y="639613"/>
+                </a:lnTo>
+                <a:close/>
+                <a:lnTo>
+                  <a:pt x="641550" y="641550"/>
+                </a:lnTo>
+                <a:close/>
+                <a:lnTo>
+                  <a:pt x="643369" y="643369"/>
+                </a:lnTo>
+                <a:close/>
+                <a:lnTo>
+                  <a:pt x="645078" y="645078"/>
+                </a:lnTo>
+                <a:close/>
+                <a:lnTo>
+                  <a:pt x="646686" y="646686"/>
+                </a:lnTo>
+                <a:close/>
+                <a:lnTo>
+                  <a:pt x="648201" y="648201"/>
+                </a:lnTo>
+                <a:close/>
+                <a:lnTo>
+                  <a:pt x="649630" y="649630"/>
+                </a:lnTo>
+                <a:close/>
+                <a:lnTo>
+                  <a:pt x="650983" y="650983"/>
+                </a:lnTo>
+                <a:close/>
+                <a:lnTo>
+                  <a:pt x="652266" y="652266"/>
+                </a:lnTo>
+                <a:close/>
+                <a:lnTo>
+                  <a:pt x="653489" y="653489"/>
+                </a:lnTo>
+                <a:close/>
+                <a:lnTo>
+                  <a:pt x="654660" y="654660"/>
+                </a:lnTo>
+                <a:close/>
+                <a:lnTo>
+                  <a:pt x="655787" y="655787"/>
+                </a:lnTo>
+                <a:close/>
+                <a:lnTo>
+                  <a:pt x="656878" y="656878"/>
+                </a:lnTo>
+                <a:close/>
+                <a:lnTo>
+                  <a:pt x="657941" y="657941"/>
+                </a:lnTo>
+                <a:close/>
+                <a:lnTo>
+                  <a:pt x="658984" y="658984"/>
+                </a:lnTo>
+                <a:close/>
+                <a:lnTo>
+                  <a:pt x="660016" y="660016"/>
+                </a:lnTo>
+                <a:close/>
+                <a:lnTo>
+                  <a:pt x="661045" y="661045"/>
+                </a:lnTo>
+                <a:close/>
+                <a:lnTo>
+                  <a:pt x="662079" y="662079"/>
+                </a:lnTo>
+                <a:close/>
+                <a:lnTo>
+                  <a:pt x="663126" y="663126"/>
+                </a:lnTo>
+                <a:close/>
+                <a:lnTo>
+                  <a:pt x="664191" y="664191"/>
+                </a:lnTo>
+                <a:close/>
+                <a:lnTo>
+                  <a:pt x="665272" y="665272"/>
+                </a:lnTo>
+                <a:close/>
+                <a:lnTo>
+                  <a:pt x="666365" y="666365"/>
+                </a:lnTo>
+                <a:close/>
+                <a:lnTo>
+                  <a:pt x="667467" y="667467"/>
+                </a:lnTo>
+                <a:close/>
+                <a:lnTo>
+                  <a:pt x="668573" y="668573"/>
+                </a:lnTo>
+                <a:close/>
+                <a:lnTo>
+                  <a:pt x="669680" y="669680"/>
+                </a:lnTo>
+                <a:close/>
+                <a:lnTo>
+                  <a:pt x="670784" y="670784"/>
+                </a:lnTo>
+                <a:close/>
+                <a:lnTo>
+                  <a:pt x="671882" y="671882"/>
+                </a:lnTo>
+                <a:close/>
+                <a:lnTo>
+                  <a:pt x="672970" y="672970"/>
+                </a:lnTo>
+                <a:close/>
+                <a:lnTo>
+                  <a:pt x="674045" y="674045"/>
+                </a:lnTo>
+                <a:close/>
+                <a:lnTo>
+                  <a:pt x="675102" y="675102"/>
+                </a:lnTo>
+                <a:close/>
+                <a:lnTo>
+                  <a:pt x="676138" y="676138"/>
+                </a:lnTo>
+                <a:close/>
+                <a:lnTo>
+                  <a:pt x="677150" y="677150"/>
+                </a:lnTo>
+                <a:close/>
+                <a:lnTo>
+                  <a:pt x="678134" y="678134"/>
+                </a:lnTo>
+                <a:close/>
+                <a:lnTo>
+                  <a:pt x="679086" y="679086"/>
+                </a:lnTo>
+                <a:close/>
+                <a:lnTo>
+                  <a:pt x="680002" y="680002"/>
+                </a:lnTo>
+                <a:close/>
+                <a:lnTo>
+                  <a:pt x="680879" y="680879"/>
+                </a:lnTo>
+                <a:close/>
+                <a:lnTo>
+                  <a:pt x="681713" y="681713"/>
+                </a:lnTo>
+                <a:close/>
+                <a:lnTo>
+                  <a:pt x="682501" y="682501"/>
+                </a:lnTo>
+                <a:close/>
+                <a:lnTo>
+                  <a:pt x="683239" y="683239"/>
+                </a:lnTo>
+                <a:close/>
+                <a:lnTo>
+                  <a:pt x="683923" y="683923"/>
+                </a:lnTo>
+                <a:close/>
+                <a:lnTo>
+                  <a:pt x="684549" y="684549"/>
+                </a:lnTo>
+                <a:close/>
+                <a:lnTo>
+                  <a:pt x="685114" y="685114"/>
+                </a:lnTo>
+                <a:close/>
+                <a:lnTo>
+                  <a:pt x="685615" y="685615"/>
+                </a:lnTo>
+                <a:close/>
+                <a:lnTo>
+                  <a:pt x="686047" y="686047"/>
+                </a:lnTo>
+                <a:close/>
+                <a:lnTo>
+                  <a:pt x="686407" y="686407"/>
+                </a:lnTo>
+                <a:close/>
+                <a:lnTo>
+                  <a:pt x="686691" y="686691"/>
+                </a:lnTo>
+                <a:close/>
+                <a:lnTo>
+                  <a:pt x="686896" y="686896"/>
+                </a:lnTo>
+                <a:close/>
+                <a:lnTo>
+                  <a:pt x="687018" y="687018"/>
+                </a:lnTo>
+                <a:close/>
+                <a:lnTo>
+                  <a:pt x="687053" y="687053"/>
+                </a:lnTo>
+                <a:close/>
+                <a:lnTo>
+                  <a:pt x="686998" y="686998"/>
+                </a:lnTo>
+                <a:close/>
+                <a:lnTo>
+                  <a:pt x="686848" y="686848"/>
+                </a:lnTo>
+                <a:close/>
+                <a:lnTo>
+                  <a:pt x="686601" y="686601"/>
+                </a:lnTo>
+                <a:close/>
+                <a:lnTo>
+                  <a:pt x="686253" y="686253"/>
+                </a:lnTo>
+                <a:close/>
+                <a:lnTo>
+                  <a:pt x="685800" y="685800"/>
                 </a:lnTo>
                 <a:close/>
               </a:path>
             </a:pathLst>
           </a:custGeom>
-          <a:ln w="31750">
+          <a:ln w="38100">
             <a:solidFill>
-              <a:srgbClr val="FFFFFF"/>
+              <a:srgbClr val="000000"/>
             </a:solidFill>
           </a:ln>
         </p:spPr>
@@ -4415,9 +4415,1258 @@
           </a:p>
         </p:txBody>
       </p:sp>
+      <p:sp>
+        <p:nvSpPr>
+          <p:cNvPr id="5" name="Freeform 4"/>
+          <p:cNvSpPr/>
+          <p:nvPr/>
+        </p:nvSpPr>
+        <p:spPr>
+          <a:xfrm>
+            <a:off x="5029200" y="971550"/>
+            <a:ext cx="685800" cy="685800"/>
+          </a:xfrm>
+          <a:custGeom>
+            <a:avLst/>
+            <a:gdLst/>
+            <a:ahLst/>
+            <a:cxnLst/>
+            <a:rect l="l" t="t" r="r" b="b"/>
+            <a:pathLst>
+              <a:path w="685800" h="685800">
+                <a:moveTo>
+                  <a:pt x="0" y="685800"/>
+                </a:moveTo>
+                <a:lnTo>
+                  <a:pt x="2294" y="683506"/>
+                </a:lnTo>
+                <a:close/>
+                <a:lnTo>
+                  <a:pt x="4587" y="681213"/>
+                </a:lnTo>
+                <a:close/>
+                <a:lnTo>
+                  <a:pt x="6881" y="678919"/>
+                </a:lnTo>
+                <a:close/>
+                <a:lnTo>
+                  <a:pt x="9175" y="676625"/>
+                </a:lnTo>
+                <a:close/>
+                <a:lnTo>
+                  <a:pt x="11468" y="674332"/>
+                </a:lnTo>
+                <a:close/>
+                <a:lnTo>
+                  <a:pt x="13762" y="672038"/>
+                </a:lnTo>
+                <a:close/>
+                <a:lnTo>
+                  <a:pt x="16056" y="669744"/>
+                </a:lnTo>
+                <a:close/>
+                <a:lnTo>
+                  <a:pt x="18349" y="667451"/>
+                </a:lnTo>
+                <a:close/>
+                <a:lnTo>
+                  <a:pt x="20643" y="665157"/>
+                </a:lnTo>
+                <a:close/>
+                <a:lnTo>
+                  <a:pt x="22936" y="662864"/>
+                </a:lnTo>
+                <a:close/>
+                <a:lnTo>
+                  <a:pt x="25230" y="660570"/>
+                </a:lnTo>
+                <a:close/>
+                <a:lnTo>
+                  <a:pt x="27524" y="658276"/>
+                </a:lnTo>
+                <a:close/>
+                <a:lnTo>
+                  <a:pt x="29817" y="655983"/>
+                </a:lnTo>
+                <a:close/>
+                <a:lnTo>
+                  <a:pt x="32111" y="653689"/>
+                </a:lnTo>
+                <a:close/>
+                <a:lnTo>
+                  <a:pt x="34405" y="651395"/>
+                </a:lnTo>
+                <a:close/>
+                <a:lnTo>
+                  <a:pt x="36698" y="649102"/>
+                </a:lnTo>
+                <a:close/>
+                <a:lnTo>
+                  <a:pt x="38992" y="646808"/>
+                </a:lnTo>
+                <a:close/>
+                <a:lnTo>
+                  <a:pt x="41286" y="644514"/>
+                </a:lnTo>
+                <a:close/>
+                <a:lnTo>
+                  <a:pt x="43579" y="642221"/>
+                </a:lnTo>
+                <a:close/>
+                <a:lnTo>
+                  <a:pt x="45873" y="639927"/>
+                </a:lnTo>
+                <a:close/>
+                <a:lnTo>
+                  <a:pt x="48167" y="637633"/>
+                </a:lnTo>
+                <a:close/>
+                <a:lnTo>
+                  <a:pt x="50460" y="635340"/>
+                </a:lnTo>
+                <a:close/>
+                <a:lnTo>
+                  <a:pt x="52754" y="633046"/>
+                </a:lnTo>
+                <a:close/>
+                <a:lnTo>
+                  <a:pt x="55047" y="630753"/>
+                </a:lnTo>
+                <a:close/>
+                <a:lnTo>
+                  <a:pt x="57341" y="628459"/>
+                </a:lnTo>
+                <a:close/>
+                <a:lnTo>
+                  <a:pt x="59635" y="626165"/>
+                </a:lnTo>
+                <a:close/>
+                <a:lnTo>
+                  <a:pt x="61928" y="623872"/>
+                </a:lnTo>
+                <a:close/>
+                <a:lnTo>
+                  <a:pt x="64222" y="621578"/>
+                </a:lnTo>
+                <a:close/>
+                <a:lnTo>
+                  <a:pt x="66516" y="619284"/>
+                </a:lnTo>
+                <a:close/>
+                <a:lnTo>
+                  <a:pt x="68809" y="616991"/>
+                </a:lnTo>
+                <a:close/>
+                <a:lnTo>
+                  <a:pt x="71103" y="614697"/>
+                </a:lnTo>
+                <a:close/>
+                <a:lnTo>
+                  <a:pt x="73397" y="612403"/>
+                </a:lnTo>
+                <a:close/>
+                <a:lnTo>
+                  <a:pt x="75690" y="610110"/>
+                </a:lnTo>
+                <a:close/>
+                <a:lnTo>
+                  <a:pt x="77984" y="607816"/>
+                </a:lnTo>
+                <a:close/>
+                <a:lnTo>
+                  <a:pt x="80278" y="605522"/>
+                </a:lnTo>
+                <a:close/>
+                <a:lnTo>
+                  <a:pt x="82571" y="603229"/>
+                </a:lnTo>
+                <a:close/>
+                <a:lnTo>
+                  <a:pt x="84865" y="600935"/>
+                </a:lnTo>
+                <a:close/>
+                <a:lnTo>
+                  <a:pt x="87159" y="598641"/>
+                </a:lnTo>
+                <a:close/>
+                <a:lnTo>
+                  <a:pt x="89452" y="596348"/>
+                </a:lnTo>
+                <a:close/>
+                <a:lnTo>
+                  <a:pt x="91746" y="594054"/>
+                </a:lnTo>
+                <a:close/>
+                <a:lnTo>
+                  <a:pt x="94039" y="591761"/>
+                </a:lnTo>
+                <a:close/>
+                <a:lnTo>
+                  <a:pt x="96333" y="589467"/>
+                </a:lnTo>
+                <a:close/>
+                <a:lnTo>
+                  <a:pt x="98627" y="587173"/>
+                </a:lnTo>
+                <a:close/>
+                <a:lnTo>
+                  <a:pt x="100920" y="584880"/>
+                </a:lnTo>
+                <a:close/>
+                <a:lnTo>
+                  <a:pt x="103214" y="582586"/>
+                </a:lnTo>
+                <a:close/>
+                <a:lnTo>
+                  <a:pt x="105508" y="580292"/>
+                </a:lnTo>
+                <a:close/>
+                <a:lnTo>
+                  <a:pt x="107801" y="577999"/>
+                </a:lnTo>
+                <a:close/>
+                <a:lnTo>
+                  <a:pt x="110095" y="575705"/>
+                </a:lnTo>
+                <a:close/>
+                <a:lnTo>
+                  <a:pt x="112389" y="573411"/>
+                </a:lnTo>
+                <a:close/>
+                <a:lnTo>
+                  <a:pt x="114682" y="571118"/>
+                </a:lnTo>
+                <a:close/>
+                <a:lnTo>
+                  <a:pt x="116976" y="568824"/>
+                </a:lnTo>
+                <a:close/>
+                <a:lnTo>
+                  <a:pt x="119270" y="566530"/>
+                </a:lnTo>
+                <a:close/>
+                <a:lnTo>
+                  <a:pt x="121563" y="564237"/>
+                </a:lnTo>
+                <a:close/>
+                <a:lnTo>
+                  <a:pt x="123857" y="561943"/>
+                </a:lnTo>
+                <a:close/>
+                <a:lnTo>
+                  <a:pt x="126151" y="559649"/>
+                </a:lnTo>
+                <a:close/>
+                <a:lnTo>
+                  <a:pt x="128444" y="557356"/>
+                </a:lnTo>
+                <a:close/>
+                <a:lnTo>
+                  <a:pt x="130738" y="555062"/>
+                </a:lnTo>
+                <a:close/>
+                <a:lnTo>
+                  <a:pt x="133031" y="552769"/>
+                </a:lnTo>
+                <a:close/>
+                <a:lnTo>
+                  <a:pt x="135325" y="550475"/>
+                </a:lnTo>
+                <a:close/>
+                <a:lnTo>
+                  <a:pt x="137619" y="548181"/>
+                </a:lnTo>
+                <a:close/>
+                <a:lnTo>
+                  <a:pt x="139912" y="545888"/>
+                </a:lnTo>
+                <a:close/>
+                <a:lnTo>
+                  <a:pt x="142206" y="543594"/>
+                </a:lnTo>
+                <a:close/>
+                <a:lnTo>
+                  <a:pt x="144500" y="541300"/>
+                </a:lnTo>
+                <a:close/>
+                <a:lnTo>
+                  <a:pt x="146793" y="539007"/>
+                </a:lnTo>
+                <a:close/>
+                <a:lnTo>
+                  <a:pt x="149087" y="536713"/>
+                </a:lnTo>
+                <a:close/>
+                <a:lnTo>
+                  <a:pt x="151381" y="534419"/>
+                </a:lnTo>
+                <a:close/>
+                <a:lnTo>
+                  <a:pt x="153674" y="532126"/>
+                </a:lnTo>
+                <a:close/>
+                <a:lnTo>
+                  <a:pt x="155968" y="529832"/>
+                </a:lnTo>
+                <a:close/>
+                <a:lnTo>
+                  <a:pt x="158262" y="527538"/>
+                </a:lnTo>
+                <a:close/>
+                <a:lnTo>
+                  <a:pt x="160555" y="525245"/>
+                </a:lnTo>
+                <a:close/>
+                <a:lnTo>
+                  <a:pt x="162849" y="522951"/>
+                </a:lnTo>
+                <a:close/>
+                <a:lnTo>
+                  <a:pt x="165142" y="520658"/>
+                </a:lnTo>
+                <a:close/>
+                <a:lnTo>
+                  <a:pt x="167436" y="518364"/>
+                </a:lnTo>
+                <a:close/>
+                <a:lnTo>
+                  <a:pt x="169730" y="516070"/>
+                </a:lnTo>
+                <a:close/>
+                <a:lnTo>
+                  <a:pt x="172023" y="513777"/>
+                </a:lnTo>
+                <a:close/>
+                <a:lnTo>
+                  <a:pt x="174317" y="511483"/>
+                </a:lnTo>
+                <a:close/>
+                <a:lnTo>
+                  <a:pt x="176611" y="509189"/>
+                </a:lnTo>
+                <a:close/>
+                <a:lnTo>
+                  <a:pt x="178904" y="506896"/>
+                </a:lnTo>
+                <a:close/>
+                <a:lnTo>
+                  <a:pt x="181198" y="504602"/>
+                </a:lnTo>
+                <a:close/>
+                <a:lnTo>
+                  <a:pt x="183492" y="502308"/>
+                </a:lnTo>
+                <a:close/>
+                <a:lnTo>
+                  <a:pt x="185785" y="500015"/>
+                </a:lnTo>
+                <a:close/>
+                <a:lnTo>
+                  <a:pt x="188079" y="497721"/>
+                </a:lnTo>
+                <a:close/>
+                <a:lnTo>
+                  <a:pt x="190373" y="495427"/>
+                </a:lnTo>
+                <a:close/>
+                <a:lnTo>
+                  <a:pt x="192666" y="493134"/>
+                </a:lnTo>
+                <a:close/>
+                <a:lnTo>
+                  <a:pt x="194960" y="490840"/>
+                </a:lnTo>
+                <a:close/>
+                <a:lnTo>
+                  <a:pt x="197254" y="488546"/>
+                </a:lnTo>
+                <a:close/>
+                <a:lnTo>
+                  <a:pt x="199547" y="486253"/>
+                </a:lnTo>
+                <a:close/>
+                <a:lnTo>
+                  <a:pt x="201841" y="483959"/>
+                </a:lnTo>
+                <a:close/>
+                <a:lnTo>
+                  <a:pt x="204134" y="481666"/>
+                </a:lnTo>
+                <a:close/>
+                <a:lnTo>
+                  <a:pt x="206428" y="479372"/>
+                </a:lnTo>
+                <a:close/>
+                <a:lnTo>
+                  <a:pt x="208722" y="477078"/>
+                </a:lnTo>
+                <a:close/>
+                <a:lnTo>
+                  <a:pt x="211015" y="474785"/>
+                </a:lnTo>
+                <a:close/>
+                <a:lnTo>
+                  <a:pt x="213309" y="472491"/>
+                </a:lnTo>
+                <a:close/>
+                <a:lnTo>
+                  <a:pt x="215603" y="470197"/>
+                </a:lnTo>
+                <a:close/>
+                <a:lnTo>
+                  <a:pt x="217896" y="467904"/>
+                </a:lnTo>
+                <a:close/>
+                <a:lnTo>
+                  <a:pt x="220190" y="465610"/>
+                </a:lnTo>
+                <a:close/>
+                <a:lnTo>
+                  <a:pt x="222484" y="463316"/>
+                </a:lnTo>
+                <a:close/>
+                <a:lnTo>
+                  <a:pt x="224777" y="461023"/>
+                </a:lnTo>
+                <a:close/>
+                <a:lnTo>
+                  <a:pt x="227071" y="458729"/>
+                </a:lnTo>
+                <a:close/>
+                <a:lnTo>
+                  <a:pt x="229365" y="456435"/>
+                </a:lnTo>
+                <a:close/>
+                <a:lnTo>
+                  <a:pt x="231658" y="454142"/>
+                </a:lnTo>
+                <a:close/>
+                <a:lnTo>
+                  <a:pt x="233952" y="451848"/>
+                </a:lnTo>
+                <a:close/>
+                <a:lnTo>
+                  <a:pt x="236245" y="449555"/>
+                </a:lnTo>
+                <a:close/>
+                <a:lnTo>
+                  <a:pt x="238539" y="447261"/>
+                </a:lnTo>
+                <a:close/>
+                <a:lnTo>
+                  <a:pt x="240833" y="444967"/>
+                </a:lnTo>
+                <a:close/>
+                <a:lnTo>
+                  <a:pt x="243126" y="442674"/>
+                </a:lnTo>
+                <a:close/>
+                <a:lnTo>
+                  <a:pt x="245420" y="440380"/>
+                </a:lnTo>
+                <a:close/>
+                <a:lnTo>
+                  <a:pt x="247714" y="438086"/>
+                </a:lnTo>
+                <a:close/>
+                <a:lnTo>
+                  <a:pt x="250007" y="435793"/>
+                </a:lnTo>
+                <a:close/>
+                <a:lnTo>
+                  <a:pt x="252301" y="433499"/>
+                </a:lnTo>
+                <a:close/>
+                <a:lnTo>
+                  <a:pt x="254595" y="431205"/>
+                </a:lnTo>
+                <a:close/>
+                <a:lnTo>
+                  <a:pt x="256888" y="428912"/>
+                </a:lnTo>
+                <a:close/>
+                <a:lnTo>
+                  <a:pt x="259182" y="426618"/>
+                </a:lnTo>
+                <a:close/>
+                <a:lnTo>
+                  <a:pt x="261476" y="424324"/>
+                </a:lnTo>
+                <a:close/>
+                <a:lnTo>
+                  <a:pt x="263769" y="422031"/>
+                </a:lnTo>
+                <a:close/>
+                <a:lnTo>
+                  <a:pt x="266063" y="419737"/>
+                </a:lnTo>
+                <a:close/>
+                <a:lnTo>
+                  <a:pt x="268357" y="417443"/>
+                </a:lnTo>
+                <a:close/>
+                <a:lnTo>
+                  <a:pt x="270650" y="415150"/>
+                </a:lnTo>
+                <a:close/>
+                <a:lnTo>
+                  <a:pt x="272944" y="412856"/>
+                </a:lnTo>
+                <a:close/>
+                <a:lnTo>
+                  <a:pt x="275237" y="410563"/>
+                </a:lnTo>
+                <a:close/>
+                <a:lnTo>
+                  <a:pt x="277531" y="408269"/>
+                </a:lnTo>
+                <a:close/>
+                <a:lnTo>
+                  <a:pt x="279825" y="405975"/>
+                </a:lnTo>
+                <a:close/>
+                <a:lnTo>
+                  <a:pt x="282118" y="403682"/>
+                </a:lnTo>
+                <a:close/>
+                <a:lnTo>
+                  <a:pt x="284412" y="401388"/>
+                </a:lnTo>
+                <a:close/>
+                <a:lnTo>
+                  <a:pt x="286706" y="399094"/>
+                </a:lnTo>
+                <a:close/>
+                <a:lnTo>
+                  <a:pt x="288999" y="396801"/>
+                </a:lnTo>
+                <a:close/>
+                <a:lnTo>
+                  <a:pt x="291293" y="394507"/>
+                </a:lnTo>
+                <a:close/>
+                <a:lnTo>
+                  <a:pt x="293587" y="392213"/>
+                </a:lnTo>
+                <a:close/>
+                <a:lnTo>
+                  <a:pt x="295880" y="389920"/>
+                </a:lnTo>
+                <a:close/>
+                <a:lnTo>
+                  <a:pt x="298174" y="387626"/>
+                </a:lnTo>
+                <a:close/>
+                <a:lnTo>
+                  <a:pt x="300468" y="385332"/>
+                </a:lnTo>
+                <a:close/>
+                <a:lnTo>
+                  <a:pt x="302761" y="383039"/>
+                </a:lnTo>
+                <a:close/>
+                <a:lnTo>
+                  <a:pt x="305055" y="380745"/>
+                </a:lnTo>
+                <a:close/>
+                <a:lnTo>
+                  <a:pt x="307348" y="378452"/>
+                </a:lnTo>
+                <a:close/>
+                <a:lnTo>
+                  <a:pt x="309642" y="376158"/>
+                </a:lnTo>
+                <a:close/>
+                <a:lnTo>
+                  <a:pt x="311936" y="373864"/>
+                </a:lnTo>
+                <a:close/>
+                <a:lnTo>
+                  <a:pt x="314229" y="371571"/>
+                </a:lnTo>
+                <a:close/>
+                <a:lnTo>
+                  <a:pt x="316523" y="369277"/>
+                </a:lnTo>
+                <a:close/>
+                <a:lnTo>
+                  <a:pt x="318817" y="366983"/>
+                </a:lnTo>
+                <a:close/>
+                <a:lnTo>
+                  <a:pt x="321110" y="364690"/>
+                </a:lnTo>
+                <a:close/>
+                <a:lnTo>
+                  <a:pt x="323404" y="362396"/>
+                </a:lnTo>
+                <a:close/>
+                <a:lnTo>
+                  <a:pt x="325698" y="360102"/>
+                </a:lnTo>
+                <a:close/>
+                <a:lnTo>
+                  <a:pt x="327991" y="357809"/>
+                </a:lnTo>
+                <a:close/>
+                <a:lnTo>
+                  <a:pt x="330285" y="355515"/>
+                </a:lnTo>
+                <a:close/>
+                <a:lnTo>
+                  <a:pt x="332579" y="353221"/>
+                </a:lnTo>
+                <a:close/>
+                <a:lnTo>
+                  <a:pt x="334872" y="350928"/>
+                </a:lnTo>
+                <a:close/>
+                <a:lnTo>
+                  <a:pt x="337166" y="348634"/>
+                </a:lnTo>
+                <a:close/>
+                <a:lnTo>
+                  <a:pt x="339460" y="346340"/>
+                </a:lnTo>
+                <a:close/>
+                <a:lnTo>
+                  <a:pt x="341753" y="344047"/>
+                </a:lnTo>
+                <a:close/>
+                <a:lnTo>
+                  <a:pt x="344047" y="341753"/>
+                </a:lnTo>
+                <a:close/>
+                <a:lnTo>
+                  <a:pt x="346340" y="339460"/>
+                </a:lnTo>
+                <a:close/>
+                <a:lnTo>
+                  <a:pt x="348634" y="337166"/>
+                </a:lnTo>
+                <a:close/>
+                <a:lnTo>
+                  <a:pt x="350928" y="334872"/>
+                </a:lnTo>
+                <a:close/>
+                <a:lnTo>
+                  <a:pt x="353221" y="332579"/>
+                </a:lnTo>
+                <a:close/>
+                <a:lnTo>
+                  <a:pt x="355515" y="330285"/>
+                </a:lnTo>
+                <a:close/>
+                <a:lnTo>
+                  <a:pt x="357809" y="327991"/>
+                </a:lnTo>
+                <a:close/>
+                <a:lnTo>
+                  <a:pt x="360102" y="325698"/>
+                </a:lnTo>
+                <a:close/>
+                <a:lnTo>
+                  <a:pt x="362396" y="323404"/>
+                </a:lnTo>
+                <a:close/>
+                <a:lnTo>
+                  <a:pt x="364690" y="321110"/>
+                </a:lnTo>
+                <a:close/>
+                <a:lnTo>
+                  <a:pt x="366983" y="318817"/>
+                </a:lnTo>
+                <a:close/>
+                <a:lnTo>
+                  <a:pt x="369277" y="316523"/>
+                </a:lnTo>
+                <a:close/>
+                <a:lnTo>
+                  <a:pt x="371571" y="314229"/>
+                </a:lnTo>
+                <a:close/>
+                <a:lnTo>
+                  <a:pt x="373864" y="311936"/>
+                </a:lnTo>
+                <a:close/>
+                <a:lnTo>
+                  <a:pt x="376158" y="309642"/>
+                </a:lnTo>
+                <a:close/>
+                <a:lnTo>
+                  <a:pt x="378452" y="307348"/>
+                </a:lnTo>
+                <a:close/>
+                <a:lnTo>
+                  <a:pt x="380745" y="305055"/>
+                </a:lnTo>
+                <a:close/>
+                <a:lnTo>
+                  <a:pt x="383039" y="302761"/>
+                </a:lnTo>
+                <a:close/>
+                <a:lnTo>
+                  <a:pt x="385332" y="300468"/>
+                </a:lnTo>
+                <a:close/>
+                <a:lnTo>
+                  <a:pt x="387626" y="298174"/>
+                </a:lnTo>
+                <a:close/>
+                <a:lnTo>
+                  <a:pt x="389920" y="295880"/>
+                </a:lnTo>
+                <a:close/>
+                <a:lnTo>
+                  <a:pt x="392213" y="293587"/>
+                </a:lnTo>
+                <a:close/>
+                <a:lnTo>
+                  <a:pt x="394507" y="291293"/>
+                </a:lnTo>
+                <a:close/>
+                <a:lnTo>
+                  <a:pt x="396801" y="288999"/>
+                </a:lnTo>
+                <a:close/>
+                <a:lnTo>
+                  <a:pt x="399094" y="286706"/>
+                </a:lnTo>
+                <a:close/>
+                <a:lnTo>
+                  <a:pt x="401388" y="284412"/>
+                </a:lnTo>
+                <a:close/>
+                <a:lnTo>
+                  <a:pt x="403682" y="282118"/>
+                </a:lnTo>
+                <a:close/>
+                <a:lnTo>
+                  <a:pt x="405975" y="279825"/>
+                </a:lnTo>
+                <a:close/>
+                <a:lnTo>
+                  <a:pt x="408269" y="277531"/>
+                </a:lnTo>
+                <a:close/>
+                <a:lnTo>
+                  <a:pt x="410563" y="275237"/>
+                </a:lnTo>
+                <a:close/>
+                <a:lnTo>
+                  <a:pt x="412856" y="272944"/>
+                </a:lnTo>
+                <a:close/>
+                <a:lnTo>
+                  <a:pt x="415150" y="270650"/>
+                </a:lnTo>
+                <a:close/>
+                <a:lnTo>
+                  <a:pt x="417443" y="268357"/>
+                </a:lnTo>
+                <a:close/>
+                <a:lnTo>
+                  <a:pt x="419737" y="266063"/>
+                </a:lnTo>
+                <a:close/>
+                <a:lnTo>
+                  <a:pt x="422031" y="263769"/>
+                </a:lnTo>
+                <a:close/>
+                <a:lnTo>
+                  <a:pt x="424324" y="261476"/>
+                </a:lnTo>
+                <a:close/>
+                <a:lnTo>
+                  <a:pt x="426618" y="259182"/>
+                </a:lnTo>
+                <a:close/>
+                <a:lnTo>
+                  <a:pt x="428912" y="256888"/>
+                </a:lnTo>
+                <a:close/>
+                <a:lnTo>
+                  <a:pt x="431205" y="254595"/>
+                </a:lnTo>
+                <a:close/>
+                <a:lnTo>
+                  <a:pt x="433499" y="252301"/>
+                </a:lnTo>
+                <a:close/>
+                <a:lnTo>
+                  <a:pt x="435793" y="250007"/>
+                </a:lnTo>
+                <a:close/>
+                <a:lnTo>
+                  <a:pt x="438086" y="247714"/>
+                </a:lnTo>
+                <a:close/>
+                <a:lnTo>
+                  <a:pt x="440380" y="245420"/>
+                </a:lnTo>
+                <a:close/>
+                <a:lnTo>
+                  <a:pt x="442674" y="243126"/>
+                </a:lnTo>
+                <a:close/>
+                <a:lnTo>
+                  <a:pt x="444967" y="240833"/>
+                </a:lnTo>
+                <a:close/>
+                <a:lnTo>
+                  <a:pt x="447261" y="238539"/>
+                </a:lnTo>
+                <a:close/>
+                <a:lnTo>
+                  <a:pt x="449555" y="236245"/>
+                </a:lnTo>
+                <a:close/>
+                <a:lnTo>
+                  <a:pt x="451848" y="233952"/>
+                </a:lnTo>
+                <a:close/>
+                <a:lnTo>
+                  <a:pt x="454142" y="231658"/>
+                </a:lnTo>
+                <a:close/>
+                <a:lnTo>
+                  <a:pt x="456435" y="229365"/>
+                </a:lnTo>
+                <a:close/>
+                <a:lnTo>
+                  <a:pt x="458729" y="227071"/>
+                </a:lnTo>
+                <a:close/>
+                <a:lnTo>
+                  <a:pt x="461023" y="224777"/>
+                </a:lnTo>
+                <a:close/>
+                <a:lnTo>
+                  <a:pt x="463316" y="222484"/>
+                </a:lnTo>
+                <a:close/>
+                <a:lnTo>
+                  <a:pt x="465610" y="220190"/>
+                </a:lnTo>
+                <a:close/>
+                <a:lnTo>
+                  <a:pt x="467904" y="217896"/>
+                </a:lnTo>
+                <a:close/>
+                <a:lnTo>
+                  <a:pt x="470197" y="215603"/>
+                </a:lnTo>
+                <a:close/>
+                <a:lnTo>
+                  <a:pt x="472491" y="213309"/>
+                </a:lnTo>
+                <a:close/>
+                <a:lnTo>
+                  <a:pt x="474785" y="211015"/>
+                </a:lnTo>
+                <a:close/>
+                <a:lnTo>
+                  <a:pt x="477078" y="208722"/>
+                </a:lnTo>
+                <a:close/>
+                <a:lnTo>
+                  <a:pt x="479372" y="206428"/>
+                </a:lnTo>
+                <a:close/>
+                <a:lnTo>
+                  <a:pt x="481666" y="204134"/>
+                </a:lnTo>
+                <a:close/>
+                <a:lnTo>
+                  <a:pt x="483959" y="201841"/>
+                </a:lnTo>
+                <a:close/>
+                <a:lnTo>
+                  <a:pt x="486253" y="199547"/>
+                </a:lnTo>
+                <a:close/>
+                <a:lnTo>
+                  <a:pt x="488546" y="197254"/>
+                </a:lnTo>
+                <a:close/>
+                <a:lnTo>
+                  <a:pt x="490840" y="194960"/>
+                </a:lnTo>
+                <a:close/>
+                <a:lnTo>
+                  <a:pt x="493134" y="192666"/>
+                </a:lnTo>
+                <a:close/>
+                <a:lnTo>
+                  <a:pt x="495427" y="190373"/>
+                </a:lnTo>
+                <a:close/>
+                <a:lnTo>
+                  <a:pt x="497721" y="188079"/>
+                </a:lnTo>
+                <a:close/>
+                <a:lnTo>
+                  <a:pt x="500015" y="185785"/>
+                </a:lnTo>
+                <a:close/>
+                <a:lnTo>
+                  <a:pt x="502308" y="183492"/>
+                </a:lnTo>
+                <a:close/>
+                <a:lnTo>
+                  <a:pt x="504602" y="181198"/>
+                </a:lnTo>
+                <a:close/>
+                <a:lnTo>
+                  <a:pt x="506896" y="178904"/>
+                </a:lnTo>
+                <a:close/>
+                <a:lnTo>
+                  <a:pt x="509189" y="176611"/>
+                </a:lnTo>
+                <a:close/>
+                <a:lnTo>
+                  <a:pt x="511483" y="174317"/>
+                </a:lnTo>
+                <a:close/>
+                <a:lnTo>
+                  <a:pt x="513777" y="172023"/>
+                </a:lnTo>
+                <a:close/>
+                <a:lnTo>
+                  <a:pt x="516070" y="169730"/>
+                </a:lnTo>
+                <a:close/>
+                <a:lnTo>
+                  <a:pt x="518364" y="167436"/>
+                </a:lnTo>
+                <a:close/>
+                <a:lnTo>
+                  <a:pt x="520658" y="165142"/>
+                </a:lnTo>
+                <a:close/>
+                <a:lnTo>
+                  <a:pt x="522951" y="162849"/>
+                </a:lnTo>
+                <a:close/>
+                <a:lnTo>
+                  <a:pt x="525245" y="160555"/>
+                </a:lnTo>
+                <a:close/>
+                <a:lnTo>
+                  <a:pt x="527538" y="158262"/>
+                </a:lnTo>
+                <a:close/>
+                <a:lnTo>
+                  <a:pt x="529832" y="155968"/>
+                </a:lnTo>
+                <a:close/>
+                <a:lnTo>
+                  <a:pt x="532126" y="153674"/>
+                </a:lnTo>
+                <a:close/>
+                <a:lnTo>
+                  <a:pt x="534419" y="151381"/>
+                </a:lnTo>
+                <a:close/>
+                <a:lnTo>
+                  <a:pt x="536713" y="149087"/>
+                </a:lnTo>
+                <a:close/>
+                <a:lnTo>
+                  <a:pt x="539007" y="146793"/>
+                </a:lnTo>
+                <a:close/>
+                <a:lnTo>
+                  <a:pt x="541300" y="144500"/>
+                </a:lnTo>
+                <a:close/>
+                <a:lnTo>
+                  <a:pt x="543594" y="142206"/>
+                </a:lnTo>
+                <a:close/>
+                <a:lnTo>
+                  <a:pt x="545888" y="139912"/>
+                </a:lnTo>
+                <a:close/>
+                <a:lnTo>
+                  <a:pt x="548181" y="137619"/>
+                </a:lnTo>
+                <a:close/>
+                <a:lnTo>
+                  <a:pt x="550475" y="135325"/>
+                </a:lnTo>
+                <a:close/>
+                <a:lnTo>
+                  <a:pt x="552769" y="133031"/>
+                </a:lnTo>
+                <a:close/>
+                <a:lnTo>
+                  <a:pt x="555062" y="130738"/>
+                </a:lnTo>
+                <a:close/>
+                <a:lnTo>
+                  <a:pt x="557356" y="128444"/>
+                </a:lnTo>
+                <a:close/>
+                <a:lnTo>
+                  <a:pt x="559649" y="126151"/>
+                </a:lnTo>
+                <a:close/>
+                <a:lnTo>
+                  <a:pt x="561943" y="123857"/>
+                </a:lnTo>
+                <a:close/>
+                <a:lnTo>
+                  <a:pt x="564237" y="121563"/>
+                </a:lnTo>
+                <a:close/>
+                <a:lnTo>
+                  <a:pt x="566530" y="119270"/>
+                </a:lnTo>
+                <a:close/>
+                <a:lnTo>
+                  <a:pt x="568824" y="116976"/>
+                </a:lnTo>
+                <a:close/>
+                <a:lnTo>
+                  <a:pt x="571118" y="114682"/>
+                </a:lnTo>
+                <a:close/>
+                <a:lnTo>
+                  <a:pt x="573411" y="112389"/>
+                </a:lnTo>
+                <a:close/>
+                <a:lnTo>
+                  <a:pt x="575705" y="110095"/>
+                </a:lnTo>
+                <a:close/>
+                <a:lnTo>
+                  <a:pt x="577999" y="107801"/>
+                </a:lnTo>
+                <a:close/>
+                <a:lnTo>
+                  <a:pt x="580292" y="105508"/>
+                </a:lnTo>
+                <a:close/>
+                <a:lnTo>
+                  <a:pt x="582586" y="103214"/>
+                </a:lnTo>
+                <a:close/>
+                <a:lnTo>
+                  <a:pt x="584880" y="100920"/>
+                </a:lnTo>
+                <a:close/>
+                <a:lnTo>
+                  <a:pt x="587173" y="98627"/>
+                </a:lnTo>
+                <a:close/>
+                <a:lnTo>
+                  <a:pt x="589467" y="96333"/>
+                </a:lnTo>
+                <a:close/>
+                <a:lnTo>
+                  <a:pt x="591761" y="94039"/>
+                </a:lnTo>
+                <a:close/>
+                <a:lnTo>
+                  <a:pt x="594054" y="91746"/>
+                </a:lnTo>
+                <a:close/>
+                <a:lnTo>
+                  <a:pt x="596348" y="89452"/>
+                </a:lnTo>
+                <a:close/>
+                <a:lnTo>
+                  <a:pt x="598641" y="87159"/>
+                </a:lnTo>
+                <a:close/>
+                <a:lnTo>
+                  <a:pt x="600935" y="84865"/>
+                </a:lnTo>
+                <a:close/>
+                <a:lnTo>
+                  <a:pt x="603229" y="82571"/>
+                </a:lnTo>
+                <a:close/>
+                <a:lnTo>
+                  <a:pt x="605522" y="80278"/>
+                </a:lnTo>
+                <a:close/>
+                <a:lnTo>
+                  <a:pt x="607816" y="77984"/>
+                </a:lnTo>
+                <a:close/>
+                <a:lnTo>
+                  <a:pt x="610110" y="75690"/>
+                </a:lnTo>
+                <a:close/>
+                <a:lnTo>
+                  <a:pt x="612403" y="73397"/>
+                </a:lnTo>
+                <a:close/>
+                <a:lnTo>
+                  <a:pt x="614697" y="71103"/>
+                </a:lnTo>
+                <a:close/>
+                <a:lnTo>
+                  <a:pt x="616991" y="68809"/>
+                </a:lnTo>
+                <a:close/>
+                <a:lnTo>
+                  <a:pt x="619284" y="66516"/>
+                </a:lnTo>
+                <a:close/>
+                <a:lnTo>
+                  <a:pt x="621578" y="64222"/>
+                </a:lnTo>
+                <a:close/>
+                <a:lnTo>
+                  <a:pt x="623872" y="61928"/>
+                </a:lnTo>
+                <a:close/>
+                <a:lnTo>
+                  <a:pt x="626165" y="59635"/>
+                </a:lnTo>
+                <a:close/>
+                <a:lnTo>
+                  <a:pt x="628459" y="57341"/>
+                </a:lnTo>
+                <a:close/>
+                <a:lnTo>
+                  <a:pt x="630753" y="55047"/>
+                </a:lnTo>
+                <a:close/>
+                <a:lnTo>
+                  <a:pt x="633046" y="52754"/>
+                </a:lnTo>
+                <a:close/>
+                <a:lnTo>
+                  <a:pt x="635340" y="50460"/>
+                </a:lnTo>
+                <a:close/>
+                <a:lnTo>
+                  <a:pt x="637633" y="48167"/>
+                </a:lnTo>
+                <a:close/>
+                <a:lnTo>
+                  <a:pt x="639927" y="45873"/>
+                </a:lnTo>
+                <a:close/>
+                <a:lnTo>
+                  <a:pt x="642221" y="43579"/>
+                </a:lnTo>
+                <a:close/>
+                <a:lnTo>
+                  <a:pt x="644514" y="41286"/>
+                </a:lnTo>
+                <a:close/>
+                <a:lnTo>
+                  <a:pt x="646808" y="38992"/>
+                </a:lnTo>
+                <a:close/>
+                <a:lnTo>
+                  <a:pt x="649102" y="36698"/>
+                </a:lnTo>
+                <a:close/>
+                <a:lnTo>
+                  <a:pt x="651395" y="34405"/>
+                </a:lnTo>
+                <a:close/>
+                <a:lnTo>
+                  <a:pt x="653689" y="32111"/>
+                </a:lnTo>
+                <a:close/>
+                <a:lnTo>
+                  <a:pt x="655983" y="29817"/>
+                </a:lnTo>
+                <a:close/>
+                <a:lnTo>
+                  <a:pt x="658276" y="27524"/>
+                </a:lnTo>
+                <a:close/>
+                <a:lnTo>
+                  <a:pt x="660570" y="25230"/>
+                </a:lnTo>
+                <a:close/>
+                <a:lnTo>
+                  <a:pt x="662864" y="22936"/>
+                </a:lnTo>
+                <a:close/>
+                <a:lnTo>
+                  <a:pt x="665157" y="20643"/>
+                </a:lnTo>
+                <a:close/>
+                <a:lnTo>
+                  <a:pt x="667451" y="18349"/>
+                </a:lnTo>
+                <a:close/>
+                <a:lnTo>
+                  <a:pt x="669744" y="16056"/>
+                </a:lnTo>
+                <a:close/>
+                <a:lnTo>
+                  <a:pt x="672038" y="13762"/>
+                </a:lnTo>
+                <a:close/>
+                <a:lnTo>
+                  <a:pt x="674332" y="11468"/>
+                </a:lnTo>
+                <a:close/>
+                <a:lnTo>
+                  <a:pt x="676625" y="9175"/>
+                </a:lnTo>
+                <a:close/>
+                <a:lnTo>
+                  <a:pt x="678919" y="6881"/>
+                </a:lnTo>
+                <a:close/>
+                <a:lnTo>
+                  <a:pt x="681213" y="4587"/>
+                </a:lnTo>
+                <a:close/>
+                <a:lnTo>
+                  <a:pt x="683506" y="2294"/>
+                </a:lnTo>
+                <a:close/>
+                <a:lnTo>
+                  <a:pt x="685800" y="0"/>
+                </a:lnTo>
+                <a:close/>
+              </a:path>
+            </a:pathLst>
+          </a:custGeom>
+          <a:ln w="38100">
+            <a:solidFill>
+              <a:srgbClr val="000000"/>
+            </a:solidFill>
+          </a:ln>
+        </p:spPr>
+        <p:style>
+          <a:lnRef idx="1">
+            <a:schemeClr val="accent1"/>
+          </a:lnRef>
+          <a:fillRef idx="3">
+            <a:schemeClr val="accent1"/>
+          </a:fillRef>
+          <a:effectRef idx="2">
+            <a:schemeClr val="accent1"/>
+          </a:effectRef>
+          <a:fontRef idx="minor">
+            <a:schemeClr val="lt1"/>
+          </a:fontRef>
+        </p:style>
+        <p:txBody>
+          <a:bodyPr rtlCol="0" anchor="ctr"/>
+          <a:lstStyle/>
+          <a:p>
+            <a:pPr algn="ctr"/>
+          </a:p>
+        </p:txBody>
+      </p:sp>
       <p:cxnSp>
         <p:nvCxnSpPr>
-          <p:cNvPr id="5" name="Connector 4"/>
+          <p:cNvPr id="6" name="Connector 5"/>
           <p:cNvCxnSpPr/>
           <p:nvPr/>
         </p:nvCxnSpPr>
@@ -4453,7 +5702,7 @@
       </p:cxnSp>
       <p:cxnSp>
         <p:nvCxnSpPr>
-          <p:cNvPr id="6" name="Connector 5"/>
+          <p:cNvPr id="7" name="Connector 6"/>
           <p:cNvCxnSpPr/>
           <p:nvPr/>
         </p:nvCxnSpPr>
@@ -4489,7 +5738,7 @@
       </p:cxnSp>
       <p:cxnSp>
         <p:nvCxnSpPr>
-          <p:cNvPr id="7" name="Connector 6"/>
+          <p:cNvPr id="8" name="Connector 7"/>
           <p:cNvCxnSpPr/>
           <p:nvPr/>
         </p:nvCxnSpPr>
@@ -4525,14 +5774,14 @@
       </p:cxnSp>
       <p:sp>
         <p:nvSpPr>
-          <p:cNvPr id="8" name="Oval 7"/>
+          <p:cNvPr id="9" name="Oval 8"/>
           <p:cNvSpPr/>
           <p:nvPr/>
         </p:nvSpPr>
         <p:spPr>
           <a:xfrm>
-            <a:off x="4978400" y="2063750"/>
-            <a:ext cx="101600" cy="101600"/>
+            <a:off x="4953000" y="2038350"/>
+            <a:ext cx="152400" cy="152400"/>
           </a:xfrm>
           <a:prstGeom prst="ellipse">
             <a:avLst/>
@@ -4570,14 +5819,14 @@
       </p:sp>
       <p:sp>
         <p:nvSpPr>
-          <p:cNvPr id="9" name="Oval 8"/>
+          <p:cNvPr id="10" name="Oval 9"/>
           <p:cNvSpPr/>
           <p:nvPr/>
         </p:nvSpPr>
         <p:spPr>
           <a:xfrm>
-            <a:off x="4978400" y="1606550"/>
-            <a:ext cx="101600" cy="101600"/>
+            <a:off x="4953000" y="1581150"/>
+            <a:ext cx="152400" cy="152400"/>
           </a:xfrm>
           <a:prstGeom prst="ellipse">
             <a:avLst/>
@@ -4615,14 +5864,14 @@
       </p:sp>
       <p:sp>
         <p:nvSpPr>
-          <p:cNvPr id="10" name="Freeform 9"/>
+          <p:cNvPr id="11" name="Freeform 10"/>
           <p:cNvSpPr/>
           <p:nvPr/>
         </p:nvSpPr>
         <p:spPr>
           <a:xfrm>
-            <a:off x="4800600" y="1885950"/>
-            <a:ext cx="137160" cy="137160"/>
+            <a:off x="4663440" y="1748790"/>
+            <a:ext cx="228600" cy="228600"/>
           </a:xfrm>
           <a:custGeom>
             <a:avLst/>
@@ -4631,24 +5880,16 @@
             <a:cxnLst/>
             <a:rect l="l" t="t" r="r" b="b"/>
             <a:pathLst>
-              <a:path w="137160" h="137160">
+              <a:path w="228600" h="228600">
                 <a:moveTo>
                   <a:pt x="0" y="0"/>
                 </a:moveTo>
                 <a:lnTo>
-                  <a:pt x="1385" y="1385"/>
-                </a:lnTo>
-                <a:close/>
-                <a:lnTo>
-                  <a:pt x="2771" y="2771"/>
-                </a:lnTo>
-                <a:close/>
-                <a:lnTo>
-                  <a:pt x="4156" y="4156"/>
-                </a:lnTo>
-                <a:close/>
-                <a:lnTo>
-                  <a:pt x="5542" y="5542"/>
+                  <a:pt x="2309" y="2309"/>
+                </a:lnTo>
+                <a:close/>
+                <a:lnTo>
+                  <a:pt x="4618" y="4618"/>
                 </a:lnTo>
                 <a:close/>
                 <a:lnTo>
@@ -4656,19 +5897,11 @@
                 </a:lnTo>
                 <a:close/>
                 <a:lnTo>
-                  <a:pt x="8313" y="8313"/>
-                </a:lnTo>
-                <a:close/>
-                <a:lnTo>
-                  <a:pt x="9698" y="9698"/>
-                </a:lnTo>
-                <a:close/>
-                <a:lnTo>
-                  <a:pt x="11084" y="11084"/>
-                </a:lnTo>
-                <a:close/>
-                <a:lnTo>
-                  <a:pt x="12469" y="12469"/>
+                  <a:pt x="9236" y="9236"/>
+                </a:lnTo>
+                <a:close/>
+                <a:lnTo>
+                  <a:pt x="11545" y="11545"/>
                 </a:lnTo>
                 <a:close/>
                 <a:lnTo>
@@ -4676,19 +5909,11 @@
                 </a:lnTo>
                 <a:close/>
                 <a:lnTo>
-                  <a:pt x="15240" y="15240"/>
-                </a:lnTo>
-                <a:close/>
-                <a:lnTo>
-                  <a:pt x="16625" y="16625"/>
-                </a:lnTo>
-                <a:close/>
-                <a:lnTo>
-                  <a:pt x="18011" y="18011"/>
-                </a:lnTo>
-                <a:close/>
-                <a:lnTo>
-                  <a:pt x="19396" y="19396"/>
+                  <a:pt x="16164" y="16164"/>
+                </a:lnTo>
+                <a:close/>
+                <a:lnTo>
+                  <a:pt x="18473" y="18473"/>
                 </a:lnTo>
                 <a:close/>
                 <a:lnTo>
@@ -4696,19 +5921,11 @@
                 </a:lnTo>
                 <a:close/>
                 <a:lnTo>
-                  <a:pt x="22167" y="22167"/>
-                </a:lnTo>
-                <a:close/>
-                <a:lnTo>
-                  <a:pt x="23553" y="23553"/>
-                </a:lnTo>
-                <a:close/>
-                <a:lnTo>
-                  <a:pt x="24938" y="24938"/>
-                </a:lnTo>
-                <a:close/>
-                <a:lnTo>
-                  <a:pt x="26324" y="26324"/>
+                  <a:pt x="23091" y="23091"/>
+                </a:lnTo>
+                <a:close/>
+                <a:lnTo>
+                  <a:pt x="25400" y="25400"/>
                 </a:lnTo>
                 <a:close/>
                 <a:lnTo>
@@ -4716,19 +5933,11 @@
                 </a:lnTo>
                 <a:close/>
                 <a:lnTo>
-                  <a:pt x="29095" y="29095"/>
-                </a:lnTo>
-                <a:close/>
-                <a:lnTo>
-                  <a:pt x="30480" y="30480"/>
-                </a:lnTo>
-                <a:close/>
-                <a:lnTo>
-                  <a:pt x="31865" y="31865"/>
-                </a:lnTo>
-                <a:close/>
-                <a:lnTo>
-                  <a:pt x="33251" y="33251"/>
+                  <a:pt x="30018" y="30018"/>
+                </a:lnTo>
+                <a:close/>
+                <a:lnTo>
+                  <a:pt x="32327" y="32327"/>
                 </a:lnTo>
                 <a:close/>
                 <a:lnTo>
@@ -4736,19 +5945,11 @@
                 </a:lnTo>
                 <a:close/>
                 <a:lnTo>
-                  <a:pt x="36022" y="36022"/>
-                </a:lnTo>
-                <a:close/>
-                <a:lnTo>
-                  <a:pt x="37407" y="37407"/>
-                </a:lnTo>
-                <a:close/>
-                <a:lnTo>
-                  <a:pt x="38793" y="38793"/>
-                </a:lnTo>
-                <a:close/>
-                <a:lnTo>
-                  <a:pt x="40178" y="40178"/>
+                  <a:pt x="36945" y="36945"/>
+                </a:lnTo>
+                <a:close/>
+                <a:lnTo>
+                  <a:pt x="39255" y="39255"/>
                 </a:lnTo>
                 <a:close/>
                 <a:lnTo>
@@ -4756,19 +5957,11 @@
                 </a:lnTo>
                 <a:close/>
                 <a:lnTo>
-                  <a:pt x="42949" y="42949"/>
-                </a:lnTo>
-                <a:close/>
-                <a:lnTo>
-                  <a:pt x="44335" y="44335"/>
-                </a:lnTo>
-                <a:close/>
-                <a:lnTo>
-                  <a:pt x="45720" y="45720"/>
-                </a:lnTo>
-                <a:close/>
-                <a:lnTo>
-                  <a:pt x="47105" y="47105"/>
+                  <a:pt x="43873" y="43873"/>
+                </a:lnTo>
+                <a:close/>
+                <a:lnTo>
+                  <a:pt x="46182" y="46182"/>
                 </a:lnTo>
                 <a:close/>
                 <a:lnTo>
@@ -4776,19 +5969,11 @@
                 </a:lnTo>
                 <a:close/>
                 <a:lnTo>
-                  <a:pt x="49876" y="49876"/>
-                </a:lnTo>
-                <a:close/>
-                <a:lnTo>
-                  <a:pt x="51262" y="51262"/>
-                </a:lnTo>
-                <a:close/>
-                <a:lnTo>
-                  <a:pt x="52647" y="52647"/>
-                </a:lnTo>
-                <a:close/>
-                <a:lnTo>
-                  <a:pt x="54033" y="54033"/>
+                  <a:pt x="50800" y="50800"/>
+                </a:lnTo>
+                <a:close/>
+                <a:lnTo>
+                  <a:pt x="53109" y="53109"/>
                 </a:lnTo>
                 <a:close/>
                 <a:lnTo>
@@ -4796,19 +5981,11 @@
                 </a:lnTo>
                 <a:close/>
                 <a:lnTo>
-                  <a:pt x="56804" y="56804"/>
-                </a:lnTo>
-                <a:close/>
-                <a:lnTo>
-                  <a:pt x="58189" y="58189"/>
-                </a:lnTo>
-                <a:close/>
-                <a:lnTo>
-                  <a:pt x="59575" y="59575"/>
-                </a:lnTo>
-                <a:close/>
-                <a:lnTo>
-                  <a:pt x="60960" y="60960"/>
+                  <a:pt x="57727" y="57727"/>
+                </a:lnTo>
+                <a:close/>
+                <a:lnTo>
+                  <a:pt x="60036" y="60036"/>
                 </a:lnTo>
                 <a:close/>
                 <a:lnTo>
@@ -4816,19 +5993,11 @@
                 </a:lnTo>
                 <a:close/>
                 <a:lnTo>
-                  <a:pt x="63731" y="63731"/>
-                </a:lnTo>
-                <a:close/>
-                <a:lnTo>
-                  <a:pt x="65116" y="65116"/>
-                </a:lnTo>
-                <a:close/>
-                <a:lnTo>
-                  <a:pt x="66502" y="66502"/>
-                </a:lnTo>
-                <a:close/>
-                <a:lnTo>
-                  <a:pt x="67887" y="67887"/>
+                  <a:pt x="64655" y="64655"/>
+                </a:lnTo>
+                <a:close/>
+                <a:lnTo>
+                  <a:pt x="66964" y="66964"/>
                 </a:lnTo>
                 <a:close/>
                 <a:lnTo>
@@ -4836,19 +6005,11 @@
                 </a:lnTo>
                 <a:close/>
                 <a:lnTo>
-                  <a:pt x="70658" y="70658"/>
-                </a:lnTo>
-                <a:close/>
-                <a:lnTo>
-                  <a:pt x="72044" y="72044"/>
-                </a:lnTo>
-                <a:close/>
-                <a:lnTo>
-                  <a:pt x="73429" y="73429"/>
-                </a:lnTo>
-                <a:close/>
-                <a:lnTo>
-                  <a:pt x="74815" y="74815"/>
+                  <a:pt x="71582" y="71582"/>
+                </a:lnTo>
+                <a:close/>
+                <a:lnTo>
+                  <a:pt x="73891" y="73891"/>
                 </a:lnTo>
                 <a:close/>
                 <a:lnTo>
@@ -4856,19 +6017,11 @@
                 </a:lnTo>
                 <a:close/>
                 <a:lnTo>
-                  <a:pt x="77585" y="77585"/>
-                </a:lnTo>
-                <a:close/>
-                <a:lnTo>
-                  <a:pt x="78971" y="78971"/>
-                </a:lnTo>
-                <a:close/>
-                <a:lnTo>
-                  <a:pt x="80356" y="80356"/>
-                </a:lnTo>
-                <a:close/>
-                <a:lnTo>
-                  <a:pt x="81742" y="81742"/>
+                  <a:pt x="78509" y="78509"/>
+                </a:lnTo>
+                <a:close/>
+                <a:lnTo>
+                  <a:pt x="80818" y="80818"/>
                 </a:lnTo>
                 <a:close/>
                 <a:lnTo>
@@ -4876,19 +6029,11 @@
                 </a:lnTo>
                 <a:close/>
                 <a:lnTo>
-                  <a:pt x="84513" y="84513"/>
-                </a:lnTo>
-                <a:close/>
-                <a:lnTo>
-                  <a:pt x="85898" y="85898"/>
-                </a:lnTo>
-                <a:close/>
-                <a:lnTo>
-                  <a:pt x="87284" y="87284"/>
-                </a:lnTo>
-                <a:close/>
-                <a:lnTo>
-                  <a:pt x="88669" y="88669"/>
+                  <a:pt x="85436" y="85436"/>
+                </a:lnTo>
+                <a:close/>
+                <a:lnTo>
+                  <a:pt x="87745" y="87745"/>
                 </a:lnTo>
                 <a:close/>
                 <a:lnTo>
@@ -4896,19 +6041,11 @@
                 </a:lnTo>
                 <a:close/>
                 <a:lnTo>
-                  <a:pt x="91440" y="91440"/>
-                </a:lnTo>
-                <a:close/>
-                <a:lnTo>
-                  <a:pt x="92825" y="92825"/>
-                </a:lnTo>
-                <a:close/>
-                <a:lnTo>
-                  <a:pt x="94211" y="94211"/>
-                </a:lnTo>
-                <a:close/>
-                <a:lnTo>
-                  <a:pt x="95596" y="95596"/>
+                  <a:pt x="92364" y="92364"/>
+                </a:lnTo>
+                <a:close/>
+                <a:lnTo>
+                  <a:pt x="94673" y="94673"/>
                 </a:lnTo>
                 <a:close/>
                 <a:lnTo>
@@ -4916,19 +6053,11 @@
                 </a:lnTo>
                 <a:close/>
                 <a:lnTo>
-                  <a:pt x="98367" y="98367"/>
-                </a:lnTo>
-                <a:close/>
-                <a:lnTo>
-                  <a:pt x="99753" y="99753"/>
-                </a:lnTo>
-                <a:close/>
-                <a:lnTo>
-                  <a:pt x="101138" y="101138"/>
-                </a:lnTo>
-                <a:close/>
-                <a:lnTo>
-                  <a:pt x="102524" y="102524"/>
+                  <a:pt x="99291" y="99291"/>
+                </a:lnTo>
+                <a:close/>
+                <a:lnTo>
+                  <a:pt x="101600" y="101600"/>
                 </a:lnTo>
                 <a:close/>
                 <a:lnTo>
@@ -4936,19 +6065,11 @@
                 </a:lnTo>
                 <a:close/>
                 <a:lnTo>
-                  <a:pt x="105295" y="105295"/>
-                </a:lnTo>
-                <a:close/>
-                <a:lnTo>
-                  <a:pt x="106680" y="106680"/>
-                </a:lnTo>
-                <a:close/>
-                <a:lnTo>
-                  <a:pt x="108065" y="108065"/>
-                </a:lnTo>
-                <a:close/>
-                <a:lnTo>
-                  <a:pt x="109451" y="109451"/>
+                  <a:pt x="106218" y="106218"/>
+                </a:lnTo>
+                <a:close/>
+                <a:lnTo>
+                  <a:pt x="108527" y="108527"/>
                 </a:lnTo>
                 <a:close/>
                 <a:lnTo>
@@ -4956,19 +6077,11 @@
                 </a:lnTo>
                 <a:close/>
                 <a:lnTo>
-                  <a:pt x="112222" y="112222"/>
-                </a:lnTo>
-                <a:close/>
-                <a:lnTo>
-                  <a:pt x="113607" y="113607"/>
-                </a:lnTo>
-                <a:close/>
-                <a:lnTo>
-                  <a:pt x="114993" y="114993"/>
-                </a:lnTo>
-                <a:close/>
-                <a:lnTo>
-                  <a:pt x="116378" y="116378"/>
+                  <a:pt x="113145" y="113145"/>
+                </a:lnTo>
+                <a:close/>
+                <a:lnTo>
+                  <a:pt x="115455" y="115455"/>
                 </a:lnTo>
                 <a:close/>
                 <a:lnTo>
@@ -4976,19 +6089,11 @@
                 </a:lnTo>
                 <a:close/>
                 <a:lnTo>
-                  <a:pt x="119149" y="119149"/>
-                </a:lnTo>
-                <a:close/>
-                <a:lnTo>
-                  <a:pt x="120535" y="120535"/>
-                </a:lnTo>
-                <a:close/>
-                <a:lnTo>
-                  <a:pt x="121920" y="121920"/>
-                </a:lnTo>
-                <a:close/>
-                <a:lnTo>
-                  <a:pt x="123305" y="123305"/>
+                  <a:pt x="120073" y="120073"/>
+                </a:lnTo>
+                <a:close/>
+                <a:lnTo>
+                  <a:pt x="122382" y="122382"/>
                 </a:lnTo>
                 <a:close/>
                 <a:lnTo>
@@ -4996,19 +6101,11 @@
                 </a:lnTo>
                 <a:close/>
                 <a:lnTo>
-                  <a:pt x="126076" y="126076"/>
-                </a:lnTo>
-                <a:close/>
-                <a:lnTo>
-                  <a:pt x="127462" y="127462"/>
-                </a:lnTo>
-                <a:close/>
-                <a:lnTo>
-                  <a:pt x="128847" y="128847"/>
-                </a:lnTo>
-                <a:close/>
-                <a:lnTo>
-                  <a:pt x="130233" y="130233"/>
+                  <a:pt x="127000" y="127000"/>
+                </a:lnTo>
+                <a:close/>
+                <a:lnTo>
+                  <a:pt x="129309" y="129309"/>
                 </a:lnTo>
                 <a:close/>
                 <a:lnTo>
@@ -5016,19 +6113,171 @@
                 </a:lnTo>
                 <a:close/>
                 <a:lnTo>
-                  <a:pt x="133004" y="133004"/>
-                </a:lnTo>
-                <a:close/>
-                <a:lnTo>
-                  <a:pt x="134389" y="134389"/>
-                </a:lnTo>
-                <a:close/>
-                <a:lnTo>
-                  <a:pt x="135775" y="135775"/>
-                </a:lnTo>
-                <a:close/>
-                <a:lnTo>
-                  <a:pt x="137160" y="137160"/>
+                  <a:pt x="133927" y="133927"/>
+                </a:lnTo>
+                <a:close/>
+                <a:lnTo>
+                  <a:pt x="136236" y="136236"/>
+                </a:lnTo>
+                <a:close/>
+                <a:lnTo>
+                  <a:pt x="138545" y="138545"/>
+                </a:lnTo>
+                <a:close/>
+                <a:lnTo>
+                  <a:pt x="140855" y="140855"/>
+                </a:lnTo>
+                <a:close/>
+                <a:lnTo>
+                  <a:pt x="143164" y="143164"/>
+                </a:lnTo>
+                <a:close/>
+                <a:lnTo>
+                  <a:pt x="145473" y="145473"/>
+                </a:lnTo>
+                <a:close/>
+                <a:lnTo>
+                  <a:pt x="147782" y="147782"/>
+                </a:lnTo>
+                <a:close/>
+                <a:lnTo>
+                  <a:pt x="150091" y="150091"/>
+                </a:lnTo>
+                <a:close/>
+                <a:lnTo>
+                  <a:pt x="152400" y="152400"/>
+                </a:lnTo>
+                <a:close/>
+                <a:lnTo>
+                  <a:pt x="154709" y="154709"/>
+                </a:lnTo>
+                <a:close/>
+                <a:lnTo>
+                  <a:pt x="157018" y="157018"/>
+                </a:lnTo>
+                <a:close/>
+                <a:lnTo>
+                  <a:pt x="159327" y="159327"/>
+                </a:lnTo>
+                <a:close/>
+                <a:lnTo>
+                  <a:pt x="161636" y="161636"/>
+                </a:lnTo>
+                <a:close/>
+                <a:lnTo>
+                  <a:pt x="163945" y="163945"/>
+                </a:lnTo>
+                <a:close/>
+                <a:lnTo>
+                  <a:pt x="166255" y="166255"/>
+                </a:lnTo>
+                <a:close/>
+                <a:lnTo>
+                  <a:pt x="168564" y="168564"/>
+                </a:lnTo>
+                <a:close/>
+                <a:lnTo>
+                  <a:pt x="170873" y="170873"/>
+                </a:lnTo>
+                <a:close/>
+                <a:lnTo>
+                  <a:pt x="173182" y="173182"/>
+                </a:lnTo>
+                <a:close/>
+                <a:lnTo>
+                  <a:pt x="175491" y="175491"/>
+                </a:lnTo>
+                <a:close/>
+                <a:lnTo>
+                  <a:pt x="177800" y="177800"/>
+                </a:lnTo>
+                <a:close/>
+                <a:lnTo>
+                  <a:pt x="180109" y="180109"/>
+                </a:lnTo>
+                <a:close/>
+                <a:lnTo>
+                  <a:pt x="182418" y="182418"/>
+                </a:lnTo>
+                <a:close/>
+                <a:lnTo>
+                  <a:pt x="184727" y="184727"/>
+                </a:lnTo>
+                <a:close/>
+                <a:lnTo>
+                  <a:pt x="187036" y="187036"/>
+                </a:lnTo>
+                <a:close/>
+                <a:lnTo>
+                  <a:pt x="189345" y="189345"/>
+                </a:lnTo>
+                <a:close/>
+                <a:lnTo>
+                  <a:pt x="191655" y="191655"/>
+                </a:lnTo>
+                <a:close/>
+                <a:lnTo>
+                  <a:pt x="193964" y="193964"/>
+                </a:lnTo>
+                <a:close/>
+                <a:lnTo>
+                  <a:pt x="196273" y="196273"/>
+                </a:lnTo>
+                <a:close/>
+                <a:lnTo>
+                  <a:pt x="198582" y="198582"/>
+                </a:lnTo>
+                <a:close/>
+                <a:lnTo>
+                  <a:pt x="200891" y="200891"/>
+                </a:lnTo>
+                <a:close/>
+                <a:lnTo>
+                  <a:pt x="203200" y="203200"/>
+                </a:lnTo>
+                <a:close/>
+                <a:lnTo>
+                  <a:pt x="205509" y="205509"/>
+                </a:lnTo>
+                <a:close/>
+                <a:lnTo>
+                  <a:pt x="207818" y="207818"/>
+                </a:lnTo>
+                <a:close/>
+                <a:lnTo>
+                  <a:pt x="210127" y="210127"/>
+                </a:lnTo>
+                <a:close/>
+                <a:lnTo>
+                  <a:pt x="212436" y="212436"/>
+                </a:lnTo>
+                <a:close/>
+                <a:lnTo>
+                  <a:pt x="214745" y="214745"/>
+                </a:lnTo>
+                <a:close/>
+                <a:lnTo>
+                  <a:pt x="217055" y="217055"/>
+                </a:lnTo>
+                <a:close/>
+                <a:lnTo>
+                  <a:pt x="219364" y="219364"/>
+                </a:lnTo>
+                <a:close/>
+                <a:lnTo>
+                  <a:pt x="221673" y="221673"/>
+                </a:lnTo>
+                <a:close/>
+                <a:lnTo>
+                  <a:pt x="223982" y="223982"/>
+                </a:lnTo>
+                <a:close/>
+                <a:lnTo>
+                  <a:pt x="226291" y="226291"/>
+                </a:lnTo>
+                <a:close/>
+                <a:lnTo>
+                  <a:pt x="228600" y="228600"/>
                 </a:lnTo>
                 <a:close/>
               </a:path>
@@ -5036,7 +6285,7 @@
           </a:custGeom>
           <a:ln w="19050">
             <a:solidFill>
-              <a:srgbClr val="B4B4B4"/>
+              <a:srgbClr val="FFFFFF"/>
             </a:solidFill>
           </a:ln>
         </p:spPr>
@@ -5064,14 +6313,14 @@
       </p:sp>
       <p:sp>
         <p:nvSpPr>
-          <p:cNvPr id="11" name="Freeform 10"/>
+          <p:cNvPr id="12" name="Freeform 11"/>
           <p:cNvSpPr/>
           <p:nvPr/>
         </p:nvSpPr>
         <p:spPr>
           <a:xfrm>
-            <a:off x="5120640" y="1428750"/>
-            <a:ext cx="137160" cy="137160"/>
+            <a:off x="5120640" y="1383030"/>
+            <a:ext cx="182880" cy="182880"/>
           </a:xfrm>
           <a:custGeom>
             <a:avLst/>
@@ -5080,404 +6329,404 @@
             <a:cxnLst/>
             <a:rect l="l" t="t" r="r" b="b"/>
             <a:pathLst>
-              <a:path w="137160" h="137160">
+              <a:path w="182880" h="182880">
                 <a:moveTo>
-                  <a:pt x="0" y="137160"/>
+                  <a:pt x="0" y="182880"/>
                 </a:moveTo>
                 <a:lnTo>
-                  <a:pt x="1385" y="135775"/>
-                </a:lnTo>
-                <a:close/>
-                <a:lnTo>
-                  <a:pt x="2771" y="134389"/>
-                </a:lnTo>
-                <a:close/>
-                <a:lnTo>
-                  <a:pt x="4156" y="133004"/>
-                </a:lnTo>
-                <a:close/>
-                <a:lnTo>
-                  <a:pt x="5542" y="131618"/>
-                </a:lnTo>
-                <a:close/>
-                <a:lnTo>
-                  <a:pt x="6927" y="130233"/>
-                </a:lnTo>
-                <a:close/>
-                <a:lnTo>
-                  <a:pt x="8313" y="128847"/>
-                </a:lnTo>
-                <a:close/>
-                <a:lnTo>
-                  <a:pt x="9698" y="127462"/>
-                </a:lnTo>
-                <a:close/>
-                <a:lnTo>
-                  <a:pt x="11084" y="126076"/>
-                </a:lnTo>
-                <a:close/>
-                <a:lnTo>
-                  <a:pt x="12469" y="124691"/>
-                </a:lnTo>
-                <a:close/>
-                <a:lnTo>
-                  <a:pt x="13855" y="123305"/>
-                </a:lnTo>
-                <a:close/>
-                <a:lnTo>
-                  <a:pt x="15240" y="121920"/>
-                </a:lnTo>
-                <a:close/>
-                <a:lnTo>
-                  <a:pt x="16625" y="120535"/>
-                </a:lnTo>
-                <a:close/>
-                <a:lnTo>
-                  <a:pt x="18011" y="119149"/>
-                </a:lnTo>
-                <a:close/>
-                <a:lnTo>
-                  <a:pt x="19396" y="117764"/>
-                </a:lnTo>
-                <a:close/>
-                <a:lnTo>
-                  <a:pt x="20782" y="116378"/>
-                </a:lnTo>
-                <a:close/>
-                <a:lnTo>
-                  <a:pt x="22167" y="114993"/>
-                </a:lnTo>
-                <a:close/>
-                <a:lnTo>
-                  <a:pt x="23553" y="113607"/>
-                </a:lnTo>
-                <a:close/>
-                <a:lnTo>
-                  <a:pt x="24938" y="112222"/>
-                </a:lnTo>
-                <a:close/>
-                <a:lnTo>
-                  <a:pt x="26324" y="110836"/>
-                </a:lnTo>
-                <a:close/>
-                <a:lnTo>
-                  <a:pt x="27709" y="109451"/>
-                </a:lnTo>
-                <a:close/>
-                <a:lnTo>
-                  <a:pt x="29095" y="108065"/>
-                </a:lnTo>
-                <a:close/>
-                <a:lnTo>
-                  <a:pt x="30480" y="106680"/>
-                </a:lnTo>
-                <a:close/>
-                <a:lnTo>
-                  <a:pt x="31865" y="105295"/>
-                </a:lnTo>
-                <a:close/>
-                <a:lnTo>
-                  <a:pt x="33251" y="103909"/>
-                </a:lnTo>
-                <a:close/>
-                <a:lnTo>
-                  <a:pt x="34636" y="102524"/>
-                </a:lnTo>
-                <a:close/>
-                <a:lnTo>
-                  <a:pt x="36022" y="101138"/>
-                </a:lnTo>
-                <a:close/>
-                <a:lnTo>
-                  <a:pt x="37407" y="99753"/>
-                </a:lnTo>
-                <a:close/>
-                <a:lnTo>
-                  <a:pt x="38793" y="98367"/>
-                </a:lnTo>
-                <a:close/>
-                <a:lnTo>
-                  <a:pt x="40178" y="96982"/>
-                </a:lnTo>
-                <a:close/>
-                <a:lnTo>
-                  <a:pt x="41564" y="95596"/>
-                </a:lnTo>
-                <a:close/>
-                <a:lnTo>
-                  <a:pt x="42949" y="94211"/>
-                </a:lnTo>
-                <a:close/>
-                <a:lnTo>
-                  <a:pt x="44335" y="92825"/>
-                </a:lnTo>
-                <a:close/>
-                <a:lnTo>
-                  <a:pt x="45720" y="91440"/>
-                </a:lnTo>
-                <a:close/>
-                <a:lnTo>
-                  <a:pt x="47105" y="90055"/>
-                </a:lnTo>
-                <a:close/>
-                <a:lnTo>
-                  <a:pt x="48491" y="88669"/>
-                </a:lnTo>
-                <a:close/>
-                <a:lnTo>
-                  <a:pt x="49876" y="87284"/>
-                </a:lnTo>
-                <a:close/>
-                <a:lnTo>
-                  <a:pt x="51262" y="85898"/>
-                </a:lnTo>
-                <a:close/>
-                <a:lnTo>
-                  <a:pt x="52647" y="84513"/>
-                </a:lnTo>
-                <a:close/>
-                <a:lnTo>
-                  <a:pt x="54033" y="83127"/>
-                </a:lnTo>
-                <a:close/>
-                <a:lnTo>
-                  <a:pt x="55418" y="81742"/>
-                </a:lnTo>
-                <a:close/>
-                <a:lnTo>
-                  <a:pt x="56804" y="80356"/>
-                </a:lnTo>
-                <a:close/>
-                <a:lnTo>
-                  <a:pt x="58189" y="78971"/>
-                </a:lnTo>
-                <a:close/>
-                <a:lnTo>
-                  <a:pt x="59575" y="77585"/>
-                </a:lnTo>
-                <a:close/>
-                <a:lnTo>
-                  <a:pt x="60960" y="76200"/>
-                </a:lnTo>
-                <a:close/>
-                <a:lnTo>
-                  <a:pt x="62345" y="74815"/>
-                </a:lnTo>
-                <a:close/>
-                <a:lnTo>
-                  <a:pt x="63731" y="73429"/>
-                </a:lnTo>
-                <a:close/>
-                <a:lnTo>
-                  <a:pt x="65116" y="72044"/>
-                </a:lnTo>
-                <a:close/>
-                <a:lnTo>
-                  <a:pt x="66502" y="70658"/>
-                </a:lnTo>
-                <a:close/>
-                <a:lnTo>
-                  <a:pt x="67887" y="69273"/>
-                </a:lnTo>
-                <a:close/>
-                <a:lnTo>
-                  <a:pt x="69273" y="67887"/>
-                </a:lnTo>
-                <a:close/>
-                <a:lnTo>
-                  <a:pt x="70658" y="66502"/>
-                </a:lnTo>
-                <a:close/>
-                <a:lnTo>
-                  <a:pt x="72044" y="65116"/>
-                </a:lnTo>
-                <a:close/>
-                <a:lnTo>
-                  <a:pt x="73429" y="63731"/>
-                </a:lnTo>
-                <a:close/>
-                <a:lnTo>
-                  <a:pt x="74815" y="62345"/>
-                </a:lnTo>
-                <a:close/>
-                <a:lnTo>
-                  <a:pt x="76200" y="60960"/>
-                </a:lnTo>
-                <a:close/>
-                <a:lnTo>
-                  <a:pt x="77585" y="59575"/>
-                </a:lnTo>
-                <a:close/>
-                <a:lnTo>
-                  <a:pt x="78971" y="58189"/>
-                </a:lnTo>
-                <a:close/>
-                <a:lnTo>
-                  <a:pt x="80356" y="56804"/>
-                </a:lnTo>
-                <a:close/>
-                <a:lnTo>
-                  <a:pt x="81742" y="55418"/>
-                </a:lnTo>
-                <a:close/>
-                <a:lnTo>
-                  <a:pt x="83127" y="54033"/>
-                </a:lnTo>
-                <a:close/>
-                <a:lnTo>
-                  <a:pt x="84513" y="52647"/>
-                </a:lnTo>
-                <a:close/>
-                <a:lnTo>
-                  <a:pt x="85898" y="51262"/>
-                </a:lnTo>
-                <a:close/>
-                <a:lnTo>
-                  <a:pt x="87284" y="49876"/>
-                </a:lnTo>
-                <a:close/>
-                <a:lnTo>
-                  <a:pt x="88669" y="48491"/>
-                </a:lnTo>
-                <a:close/>
-                <a:lnTo>
-                  <a:pt x="90055" y="47105"/>
-                </a:lnTo>
-                <a:close/>
-                <a:lnTo>
-                  <a:pt x="91440" y="45720"/>
-                </a:lnTo>
-                <a:close/>
-                <a:lnTo>
-                  <a:pt x="92825" y="44335"/>
-                </a:lnTo>
-                <a:close/>
-                <a:lnTo>
-                  <a:pt x="94211" y="42949"/>
-                </a:lnTo>
-                <a:close/>
-                <a:lnTo>
-                  <a:pt x="95596" y="41564"/>
-                </a:lnTo>
-                <a:close/>
-                <a:lnTo>
-                  <a:pt x="96982" y="40178"/>
-                </a:lnTo>
-                <a:close/>
-                <a:lnTo>
-                  <a:pt x="98367" y="38793"/>
-                </a:lnTo>
-                <a:close/>
-                <a:lnTo>
-                  <a:pt x="99753" y="37407"/>
-                </a:lnTo>
-                <a:close/>
-                <a:lnTo>
-                  <a:pt x="101138" y="36022"/>
-                </a:lnTo>
-                <a:close/>
-                <a:lnTo>
-                  <a:pt x="102524" y="34636"/>
-                </a:lnTo>
-                <a:close/>
-                <a:lnTo>
-                  <a:pt x="103909" y="33251"/>
-                </a:lnTo>
-                <a:close/>
-                <a:lnTo>
-                  <a:pt x="105295" y="31865"/>
-                </a:lnTo>
-                <a:close/>
-                <a:lnTo>
-                  <a:pt x="106680" y="30480"/>
-                </a:lnTo>
-                <a:close/>
-                <a:lnTo>
-                  <a:pt x="108065" y="29095"/>
-                </a:lnTo>
-                <a:close/>
-                <a:lnTo>
-                  <a:pt x="109451" y="27709"/>
-                </a:lnTo>
-                <a:close/>
-                <a:lnTo>
-                  <a:pt x="110836" y="26324"/>
-                </a:lnTo>
-                <a:close/>
-                <a:lnTo>
-                  <a:pt x="112222" y="24938"/>
-                </a:lnTo>
-                <a:close/>
-                <a:lnTo>
-                  <a:pt x="113607" y="23553"/>
-                </a:lnTo>
-                <a:close/>
-                <a:lnTo>
-                  <a:pt x="114993" y="22167"/>
-                </a:lnTo>
-                <a:close/>
-                <a:lnTo>
-                  <a:pt x="116378" y="20782"/>
-                </a:lnTo>
-                <a:close/>
-                <a:lnTo>
-                  <a:pt x="117764" y="19396"/>
-                </a:lnTo>
-                <a:close/>
-                <a:lnTo>
-                  <a:pt x="119149" y="18011"/>
-                </a:lnTo>
-                <a:close/>
-                <a:lnTo>
-                  <a:pt x="120535" y="16625"/>
-                </a:lnTo>
-                <a:close/>
-                <a:lnTo>
-                  <a:pt x="121920" y="15240"/>
-                </a:lnTo>
-                <a:close/>
-                <a:lnTo>
-                  <a:pt x="123305" y="13855"/>
-                </a:lnTo>
-                <a:close/>
-                <a:lnTo>
-                  <a:pt x="124691" y="12469"/>
-                </a:lnTo>
-                <a:close/>
-                <a:lnTo>
-                  <a:pt x="126076" y="11084"/>
-                </a:lnTo>
-                <a:close/>
-                <a:lnTo>
-                  <a:pt x="127462" y="9698"/>
-                </a:lnTo>
-                <a:close/>
-                <a:lnTo>
-                  <a:pt x="128847" y="8313"/>
-                </a:lnTo>
-                <a:close/>
-                <a:lnTo>
-                  <a:pt x="130233" y="6927"/>
-                </a:lnTo>
-                <a:close/>
-                <a:lnTo>
-                  <a:pt x="131618" y="5542"/>
-                </a:lnTo>
-                <a:close/>
-                <a:lnTo>
-                  <a:pt x="133004" y="4156"/>
-                </a:lnTo>
-                <a:close/>
-                <a:lnTo>
-                  <a:pt x="134389" y="2771"/>
-                </a:lnTo>
-                <a:close/>
-                <a:lnTo>
-                  <a:pt x="135775" y="1385"/>
-                </a:lnTo>
-                <a:close/>
-                <a:lnTo>
-                  <a:pt x="137160" y="0"/>
+                  <a:pt x="1847" y="181033"/>
+                </a:lnTo>
+                <a:close/>
+                <a:lnTo>
+                  <a:pt x="3695" y="179185"/>
+                </a:lnTo>
+                <a:close/>
+                <a:lnTo>
+                  <a:pt x="5542" y="177338"/>
+                </a:lnTo>
+                <a:close/>
+                <a:lnTo>
+                  <a:pt x="7389" y="175491"/>
+                </a:lnTo>
+                <a:close/>
+                <a:lnTo>
+                  <a:pt x="9236" y="173644"/>
+                </a:lnTo>
+                <a:close/>
+                <a:lnTo>
+                  <a:pt x="11084" y="171796"/>
+                </a:lnTo>
+                <a:close/>
+                <a:lnTo>
+                  <a:pt x="12931" y="169949"/>
+                </a:lnTo>
+                <a:close/>
+                <a:lnTo>
+                  <a:pt x="14778" y="168102"/>
+                </a:lnTo>
+                <a:close/>
+                <a:lnTo>
+                  <a:pt x="16625" y="166255"/>
+                </a:lnTo>
+                <a:close/>
+                <a:lnTo>
+                  <a:pt x="18473" y="164407"/>
+                </a:lnTo>
+                <a:close/>
+                <a:lnTo>
+                  <a:pt x="20320" y="162560"/>
+                </a:lnTo>
+                <a:close/>
+                <a:lnTo>
+                  <a:pt x="22167" y="160713"/>
+                </a:lnTo>
+                <a:close/>
+                <a:lnTo>
+                  <a:pt x="24015" y="158865"/>
+                </a:lnTo>
+                <a:close/>
+                <a:lnTo>
+                  <a:pt x="25862" y="157018"/>
+                </a:lnTo>
+                <a:close/>
+                <a:lnTo>
+                  <a:pt x="27709" y="155171"/>
+                </a:lnTo>
+                <a:close/>
+                <a:lnTo>
+                  <a:pt x="29556" y="153324"/>
+                </a:lnTo>
+                <a:close/>
+                <a:lnTo>
+                  <a:pt x="31404" y="151476"/>
+                </a:lnTo>
+                <a:close/>
+                <a:lnTo>
+                  <a:pt x="33251" y="149629"/>
+                </a:lnTo>
+                <a:close/>
+                <a:lnTo>
+                  <a:pt x="35098" y="147782"/>
+                </a:lnTo>
+                <a:close/>
+                <a:lnTo>
+                  <a:pt x="36945" y="145935"/>
+                </a:lnTo>
+                <a:close/>
+                <a:lnTo>
+                  <a:pt x="38793" y="144087"/>
+                </a:lnTo>
+                <a:close/>
+                <a:lnTo>
+                  <a:pt x="40640" y="142240"/>
+                </a:lnTo>
+                <a:close/>
+                <a:lnTo>
+                  <a:pt x="42487" y="140393"/>
+                </a:lnTo>
+                <a:close/>
+                <a:lnTo>
+                  <a:pt x="44335" y="138545"/>
+                </a:lnTo>
+                <a:close/>
+                <a:lnTo>
+                  <a:pt x="46182" y="136698"/>
+                </a:lnTo>
+                <a:close/>
+                <a:lnTo>
+                  <a:pt x="48029" y="134851"/>
+                </a:lnTo>
+                <a:close/>
+                <a:lnTo>
+                  <a:pt x="49876" y="133004"/>
+                </a:lnTo>
+                <a:close/>
+                <a:lnTo>
+                  <a:pt x="51724" y="131156"/>
+                </a:lnTo>
+                <a:close/>
+                <a:lnTo>
+                  <a:pt x="53571" y="129309"/>
+                </a:lnTo>
+                <a:close/>
+                <a:lnTo>
+                  <a:pt x="55418" y="127462"/>
+                </a:lnTo>
+                <a:close/>
+                <a:lnTo>
+                  <a:pt x="57265" y="125615"/>
+                </a:lnTo>
+                <a:close/>
+                <a:lnTo>
+                  <a:pt x="59113" y="123767"/>
+                </a:lnTo>
+                <a:close/>
+                <a:lnTo>
+                  <a:pt x="60960" y="121920"/>
+                </a:lnTo>
+                <a:close/>
+                <a:lnTo>
+                  <a:pt x="62807" y="120073"/>
+                </a:lnTo>
+                <a:close/>
+                <a:lnTo>
+                  <a:pt x="64655" y="118225"/>
+                </a:lnTo>
+                <a:close/>
+                <a:lnTo>
+                  <a:pt x="66502" y="116378"/>
+                </a:lnTo>
+                <a:close/>
+                <a:lnTo>
+                  <a:pt x="68349" y="114531"/>
+                </a:lnTo>
+                <a:close/>
+                <a:lnTo>
+                  <a:pt x="70196" y="112684"/>
+                </a:lnTo>
+                <a:close/>
+                <a:lnTo>
+                  <a:pt x="72044" y="110836"/>
+                </a:lnTo>
+                <a:close/>
+                <a:lnTo>
+                  <a:pt x="73891" y="108989"/>
+                </a:lnTo>
+                <a:close/>
+                <a:lnTo>
+                  <a:pt x="75738" y="107142"/>
+                </a:lnTo>
+                <a:close/>
+                <a:lnTo>
+                  <a:pt x="77585" y="105295"/>
+                </a:lnTo>
+                <a:close/>
+                <a:lnTo>
+                  <a:pt x="79433" y="103447"/>
+                </a:lnTo>
+                <a:close/>
+                <a:lnTo>
+                  <a:pt x="81280" y="101600"/>
+                </a:lnTo>
+                <a:close/>
+                <a:lnTo>
+                  <a:pt x="83127" y="99753"/>
+                </a:lnTo>
+                <a:close/>
+                <a:lnTo>
+                  <a:pt x="84975" y="97905"/>
+                </a:lnTo>
+                <a:close/>
+                <a:lnTo>
+                  <a:pt x="86822" y="96058"/>
+                </a:lnTo>
+                <a:close/>
+                <a:lnTo>
+                  <a:pt x="88669" y="94211"/>
+                </a:lnTo>
+                <a:close/>
+                <a:lnTo>
+                  <a:pt x="90516" y="92364"/>
+                </a:lnTo>
+                <a:close/>
+                <a:lnTo>
+                  <a:pt x="92364" y="90516"/>
+                </a:lnTo>
+                <a:close/>
+                <a:lnTo>
+                  <a:pt x="94211" y="88669"/>
+                </a:lnTo>
+                <a:close/>
+                <a:lnTo>
+                  <a:pt x="96058" y="86822"/>
+                </a:lnTo>
+                <a:close/>
+                <a:lnTo>
+                  <a:pt x="97905" y="84975"/>
+                </a:lnTo>
+                <a:close/>
+                <a:lnTo>
+                  <a:pt x="99753" y="83127"/>
+                </a:lnTo>
+                <a:close/>
+                <a:lnTo>
+                  <a:pt x="101600" y="81280"/>
+                </a:lnTo>
+                <a:close/>
+                <a:lnTo>
+                  <a:pt x="103447" y="79433"/>
+                </a:lnTo>
+                <a:close/>
+                <a:lnTo>
+                  <a:pt x="105295" y="77585"/>
+                </a:lnTo>
+                <a:close/>
+                <a:lnTo>
+                  <a:pt x="107142" y="75738"/>
+                </a:lnTo>
+                <a:close/>
+                <a:lnTo>
+                  <a:pt x="108989" y="73891"/>
+                </a:lnTo>
+                <a:close/>
+                <a:lnTo>
+                  <a:pt x="110836" y="72044"/>
+                </a:lnTo>
+                <a:close/>
+                <a:lnTo>
+                  <a:pt x="112684" y="70196"/>
+                </a:lnTo>
+                <a:close/>
+                <a:lnTo>
+                  <a:pt x="114531" y="68349"/>
+                </a:lnTo>
+                <a:close/>
+                <a:lnTo>
+                  <a:pt x="116378" y="66502"/>
+                </a:lnTo>
+                <a:close/>
+                <a:lnTo>
+                  <a:pt x="118225" y="64655"/>
+                </a:lnTo>
+                <a:close/>
+                <a:lnTo>
+                  <a:pt x="120073" y="62807"/>
+                </a:lnTo>
+                <a:close/>
+                <a:lnTo>
+                  <a:pt x="121920" y="60960"/>
+                </a:lnTo>
+                <a:close/>
+                <a:lnTo>
+                  <a:pt x="123767" y="59113"/>
+                </a:lnTo>
+                <a:close/>
+                <a:lnTo>
+                  <a:pt x="125615" y="57265"/>
+                </a:lnTo>
+                <a:close/>
+                <a:lnTo>
+                  <a:pt x="127462" y="55418"/>
+                </a:lnTo>
+                <a:close/>
+                <a:lnTo>
+                  <a:pt x="129309" y="53571"/>
+                </a:lnTo>
+                <a:close/>
+                <a:lnTo>
+                  <a:pt x="131156" y="51724"/>
+                </a:lnTo>
+                <a:close/>
+                <a:lnTo>
+                  <a:pt x="133004" y="49876"/>
+                </a:lnTo>
+                <a:close/>
+                <a:lnTo>
+                  <a:pt x="134851" y="48029"/>
+                </a:lnTo>
+                <a:close/>
+                <a:lnTo>
+                  <a:pt x="136698" y="46182"/>
+                </a:lnTo>
+                <a:close/>
+                <a:lnTo>
+                  <a:pt x="138545" y="44335"/>
+                </a:lnTo>
+                <a:close/>
+                <a:lnTo>
+                  <a:pt x="140393" y="42487"/>
+                </a:lnTo>
+                <a:close/>
+                <a:lnTo>
+                  <a:pt x="142240" y="40640"/>
+                </a:lnTo>
+                <a:close/>
+                <a:lnTo>
+                  <a:pt x="144087" y="38793"/>
+                </a:lnTo>
+                <a:close/>
+                <a:lnTo>
+                  <a:pt x="145935" y="36945"/>
+                </a:lnTo>
+                <a:close/>
+                <a:lnTo>
+                  <a:pt x="147782" y="35098"/>
+                </a:lnTo>
+                <a:close/>
+                <a:lnTo>
+                  <a:pt x="149629" y="33251"/>
+                </a:lnTo>
+                <a:close/>
+                <a:lnTo>
+                  <a:pt x="151476" y="31404"/>
+                </a:lnTo>
+                <a:close/>
+                <a:lnTo>
+                  <a:pt x="153324" y="29556"/>
+                </a:lnTo>
+                <a:close/>
+                <a:lnTo>
+                  <a:pt x="155171" y="27709"/>
+                </a:lnTo>
+                <a:close/>
+                <a:lnTo>
+                  <a:pt x="157018" y="25862"/>
+                </a:lnTo>
+                <a:close/>
+                <a:lnTo>
+                  <a:pt x="158865" y="24015"/>
+                </a:lnTo>
+                <a:close/>
+                <a:lnTo>
+                  <a:pt x="160713" y="22167"/>
+                </a:lnTo>
+                <a:close/>
+                <a:lnTo>
+                  <a:pt x="162560" y="20320"/>
+                </a:lnTo>
+                <a:close/>
+                <a:lnTo>
+                  <a:pt x="164407" y="18473"/>
+                </a:lnTo>
+                <a:close/>
+                <a:lnTo>
+                  <a:pt x="166255" y="16625"/>
+                </a:lnTo>
+                <a:close/>
+                <a:lnTo>
+                  <a:pt x="168102" y="14778"/>
+                </a:lnTo>
+                <a:close/>
+                <a:lnTo>
+                  <a:pt x="169949" y="12931"/>
+                </a:lnTo>
+                <a:close/>
+                <a:lnTo>
+                  <a:pt x="171796" y="11084"/>
+                </a:lnTo>
+                <a:close/>
+                <a:lnTo>
+                  <a:pt x="173644" y="9236"/>
+                </a:lnTo>
+                <a:close/>
+                <a:lnTo>
+                  <a:pt x="175491" y="7389"/>
+                </a:lnTo>
+                <a:close/>
+                <a:lnTo>
+                  <a:pt x="177338" y="5542"/>
+                </a:lnTo>
+                <a:close/>
+                <a:lnTo>
+                  <a:pt x="179185" y="3695"/>
+                </a:lnTo>
+                <a:close/>
+                <a:lnTo>
+                  <a:pt x="181033" y="1847"/>
+                </a:lnTo>
+                <a:close/>
+                <a:lnTo>
+                  <a:pt x="182880" y="0"/>
                 </a:lnTo>
                 <a:close/>
               </a:path>
@@ -5485,7 +6734,7 @@
           </a:custGeom>
           <a:ln w="19050">
             <a:solidFill>
-              <a:srgbClr val="B4B4B4"/>
+              <a:srgbClr val="FFFFFF"/>
             </a:solidFill>
           </a:ln>
         </p:spPr>
@@ -5511,15 +6760,85 @@
           </a:p>
         </p:txBody>
       </p:sp>
+      <p:cxnSp>
+        <p:nvCxnSpPr>
+          <p:cNvPr id="13" name="Connector 12"/>
+          <p:cNvCxnSpPr/>
+          <p:nvPr/>
+        </p:nvCxnSpPr>
+        <p:spPr>
+          <a:xfrm>
+            <a:off x="4846320.0" y="2663190.0"/>
+            <a:ext cx="137160.0" cy="0.0"/>
+          </a:xfrm>
+          <a:prstGeom prst="line">
+            <a:avLst/>
+          </a:prstGeom>
+          <a:ln w="15240">
+            <a:solidFill>
+              <a:srgbClr val="FFFFFF"/>
+            </a:solidFill>
+          </a:ln>
+        </p:spPr>
+        <p:style>
+          <a:lnRef idx="2">
+            <a:schemeClr val="accent1"/>
+          </a:lnRef>
+          <a:fillRef idx="0">
+            <a:schemeClr val="accent1"/>
+          </a:fillRef>
+          <a:effectRef idx="1">
+            <a:schemeClr val="accent1"/>
+          </a:effectRef>
+          <a:fontRef idx="minor">
+            <a:schemeClr val="tx1"/>
+          </a:fontRef>
+        </p:style>
+      </p:cxnSp>
+      <p:cxnSp>
+        <p:nvCxnSpPr>
+          <p:cNvPr id="14" name="Connector 13"/>
+          <p:cNvCxnSpPr/>
+          <p:nvPr/>
+        </p:nvCxnSpPr>
+        <p:spPr>
+          <a:xfrm flipH="1">
+            <a:off x="5074920.0" y="2663190.0"/>
+            <a:ext cx="137160.0" cy="0.0"/>
+          </a:xfrm>
+          <a:prstGeom prst="line">
+            <a:avLst/>
+          </a:prstGeom>
+          <a:ln w="15240">
+            <a:solidFill>
+              <a:srgbClr val="FFFFFF"/>
+            </a:solidFill>
+          </a:ln>
+        </p:spPr>
+        <p:style>
+          <a:lnRef idx="2">
+            <a:schemeClr val="accent1"/>
+          </a:lnRef>
+          <a:fillRef idx="0">
+            <a:schemeClr val="accent1"/>
+          </a:fillRef>
+          <a:effectRef idx="1">
+            <a:schemeClr val="accent1"/>
+          </a:effectRef>
+          <a:fontRef idx="minor">
+            <a:schemeClr val="tx1"/>
+          </a:fontRef>
+        </p:style>
+      </p:cxnSp>
       <p:sp>
         <p:nvSpPr>
-          <p:cNvPr id="12" name="TextBox 11"/>
+          <p:cNvPr id="15" name="TextBox 14"/>
           <p:cNvSpPr txBox="1"/>
           <p:nvPr/>
         </p:nvSpPr>
         <p:spPr>
           <a:xfrm>
-            <a:off x="4318000" y="2299970"/>
+            <a:off x="4775200" y="2414270"/>
             <a:ext cx="1524000" cy="508000"/>
           </a:xfrm>
           <a:prstGeom prst="rect">
@@ -5534,7 +6853,7 @@
           <a:lstStyle/>
           <a:p>
             <a:pPr>
-              <a:defRPr sz="1400" b="1">
+              <a:defRPr sz="1800" b="1">
                 <a:solidFill>
                   <a:srgbClr val="FFFFFF"/>
                 </a:solidFill>
@@ -5542,20 +6861,20 @@
               </a:defRPr>
             </a:pPr>
             <a:r>
-              <a:t>O</a:t>
+              <a:t>1</a:t>
             </a:r>
           </a:p>
         </p:txBody>
       </p:sp>
       <p:sp>
         <p:nvSpPr>
-          <p:cNvPr id="13" name="TextBox 12"/>
+          <p:cNvPr id="16" name="TextBox 15"/>
           <p:cNvSpPr txBox="1"/>
           <p:nvPr/>
         </p:nvSpPr>
         <p:spPr>
           <a:xfrm>
-            <a:off x="5506720" y="2299970"/>
+            <a:off x="4180840" y="1797050"/>
             <a:ext cx="1524000" cy="508000"/>
           </a:xfrm>
           <a:prstGeom prst="rect">
@@ -5570,7 +6889,7 @@
           <a:lstStyle/>
           <a:p>
             <a:pPr>
-              <a:defRPr sz="1400" b="1">
+              <a:defRPr sz="1800" b="1">
                 <a:solidFill>
                   <a:srgbClr val="FFFFFF"/>
                 </a:solidFill>
@@ -5578,20 +6897,20 @@
               </a:defRPr>
             </a:pPr>
             <a:r>
-              <a:t>x</a:t>
+              <a:t>1</a:t>
             </a:r>
           </a:p>
         </p:txBody>
       </p:sp>
       <p:sp>
         <p:nvSpPr>
-          <p:cNvPr id="14" name="TextBox 13"/>
+          <p:cNvPr id="17" name="TextBox 16"/>
           <p:cNvSpPr txBox="1"/>
           <p:nvPr/>
         </p:nvSpPr>
         <p:spPr>
           <a:xfrm>
-            <a:off x="4272280" y="608330"/>
+            <a:off x="4180840" y="1339850"/>
             <a:ext cx="1524000" cy="508000"/>
           </a:xfrm>
           <a:prstGeom prst="rect">
@@ -5606,115 +6925,7 @@
           <a:lstStyle/>
           <a:p>
             <a:pPr>
-              <a:defRPr sz="1400" b="1">
-                <a:solidFill>
-                  <a:srgbClr val="FFFFFF"/>
-                </a:solidFill>
-                <a:latin typeface="Inter"/>
-              </a:defRPr>
-            </a:pPr>
-            <a:r>
-              <a:t>y</a:t>
-            </a:r>
-          </a:p>
-        </p:txBody>
-      </p:sp>
-      <p:sp>
-        <p:nvSpPr>
-          <p:cNvPr id="15" name="TextBox 14"/>
-          <p:cNvSpPr txBox="1"/>
-          <p:nvPr/>
-        </p:nvSpPr>
-        <p:spPr>
-          <a:xfrm>
-            <a:off x="4775200" y="2322830"/>
-            <a:ext cx="1524000" cy="508000"/>
-          </a:xfrm>
-          <a:prstGeom prst="rect">
-            <a:avLst/>
-          </a:prstGeom>
-          <a:noFill/>
-        </p:spPr>
-        <p:txBody>
-          <a:bodyPr wrap="none">
-            <a:spAutoFit/>
-          </a:bodyPr>
-          <a:lstStyle/>
-          <a:p>
-            <a:pPr>
-              <a:defRPr sz="1400" b="1">
-                <a:solidFill>
-                  <a:srgbClr val="FFFFFF"/>
-                </a:solidFill>
-                <a:latin typeface="Inter"/>
-              </a:defRPr>
-            </a:pPr>
-            <a:r>
-              <a:t>1</a:t>
-            </a:r>
-          </a:p>
-        </p:txBody>
-      </p:sp>
-      <p:sp>
-        <p:nvSpPr>
-          <p:cNvPr id="16" name="TextBox 15"/>
-          <p:cNvSpPr txBox="1"/>
-          <p:nvPr/>
-        </p:nvSpPr>
-        <p:spPr>
-          <a:xfrm>
-            <a:off x="4226560" y="1797050"/>
-            <a:ext cx="1524000" cy="508000"/>
-          </a:xfrm>
-          <a:prstGeom prst="rect">
-            <a:avLst/>
-          </a:prstGeom>
-          <a:noFill/>
-        </p:spPr>
-        <p:txBody>
-          <a:bodyPr wrap="none">
-            <a:spAutoFit/>
-          </a:bodyPr>
-          <a:lstStyle/>
-          <a:p>
-            <a:pPr>
-              <a:defRPr sz="1400" b="1">
-                <a:solidFill>
-                  <a:srgbClr val="FFFFFF"/>
-                </a:solidFill>
-                <a:latin typeface="Inter"/>
-              </a:defRPr>
-            </a:pPr>
-            <a:r>
-              <a:t>1</a:t>
-            </a:r>
-          </a:p>
-        </p:txBody>
-      </p:sp>
-      <p:sp>
-        <p:nvSpPr>
-          <p:cNvPr id="17" name="TextBox 16"/>
-          <p:cNvSpPr txBox="1"/>
-          <p:nvPr/>
-        </p:nvSpPr>
-        <p:spPr>
-          <a:xfrm>
-            <a:off x="4226560" y="1339850"/>
-            <a:ext cx="1524000" cy="508000"/>
-          </a:xfrm>
-          <a:prstGeom prst="rect">
-            <a:avLst/>
-          </a:prstGeom>
-          <a:noFill/>
-        </p:spPr>
-        <p:txBody>
-          <a:bodyPr wrap="none">
-            <a:spAutoFit/>
-          </a:bodyPr>
-          <a:lstStyle/>
-          <a:p>
-            <a:pPr>
-              <a:defRPr sz="1400" b="1">
+              <a:defRPr sz="1800" b="1">
                 <a:solidFill>
                   <a:srgbClr val="FFFFFF"/>
                 </a:solidFill>

--- a/output/2.pptx
+++ b/output/2.pptx
@@ -3105,7 +3105,7 @@
         <p:spPr>
           <a:xfrm>
             <a:off x="3886200.0" y="2571750.0"/>
-            <a:ext cx="2286000.0" cy="0.0"/>
+            <a:ext cx="1828800.0" cy="0.0"/>
           </a:xfrm>
           <a:prstGeom prst="line">
             <a:avLst/>
@@ -3139,8 +3139,8 @@
         </p:nvCxnSpPr>
         <p:spPr>
           <a:xfrm flipV="1">
-            <a:off x="4572000.0" y="514350.0"/>
-            <a:ext cx="0.0" cy="2514600.0"/>
+            <a:off x="4572000.0" y="742950.0"/>
+            <a:ext cx="0.0" cy="2286000.0"/>
           </a:xfrm>
           <a:prstGeom prst="line">
             <a:avLst/>
@@ -3174,8 +3174,8 @@
         </p:nvSpPr>
         <p:spPr>
           <a:xfrm>
-            <a:off x="4343400" y="1428750"/>
-            <a:ext cx="687053" cy="687053"/>
+            <a:off x="3886200" y="971550"/>
+            <a:ext cx="1143000" cy="1143000"/>
           </a:xfrm>
           <a:custGeom>
             <a:avLst/>
@@ -3184,1204 +3184,2404 @@
             <a:cxnLst/>
             <a:rect l="l" t="t" r="r" b="b"/>
             <a:pathLst>
-              <a:path w="687053" h="687053">
+              <a:path w="1143000" h="1143000">
                 <a:moveTo>
                   <a:pt x="0" y="0"/>
                 </a:moveTo>
                 <a:lnTo>
-                  <a:pt x="2599" y="2599"/>
-                </a:lnTo>
-                <a:close/>
-                <a:lnTo>
-                  <a:pt x="5199" y="5199"/>
-                </a:lnTo>
-                <a:close/>
-                <a:lnTo>
-                  <a:pt x="7798" y="7798"/>
-                </a:lnTo>
-                <a:close/>
-                <a:lnTo>
-                  <a:pt x="10398" y="10398"/>
-                </a:lnTo>
-                <a:close/>
-                <a:lnTo>
-                  <a:pt x="12997" y="12997"/>
-                </a:lnTo>
-                <a:close/>
-                <a:lnTo>
-                  <a:pt x="15597" y="15597"/>
-                </a:lnTo>
-                <a:close/>
-                <a:lnTo>
-                  <a:pt x="18196" y="18196"/>
-                </a:lnTo>
-                <a:close/>
-                <a:lnTo>
-                  <a:pt x="20796" y="20796"/>
-                </a:lnTo>
-                <a:close/>
-                <a:lnTo>
-                  <a:pt x="23395" y="23395"/>
-                </a:lnTo>
-                <a:close/>
-                <a:lnTo>
-                  <a:pt x="25995" y="25995"/>
-                </a:lnTo>
-                <a:close/>
-                <a:lnTo>
-                  <a:pt x="28594" y="28594"/>
-                </a:lnTo>
-                <a:close/>
-                <a:lnTo>
-                  <a:pt x="31194" y="31194"/>
-                </a:lnTo>
-                <a:close/>
-                <a:lnTo>
-                  <a:pt x="33793" y="33793"/>
-                </a:lnTo>
-                <a:close/>
-                <a:lnTo>
-                  <a:pt x="36393" y="36393"/>
-                </a:lnTo>
-                <a:close/>
-                <a:lnTo>
-                  <a:pt x="38992" y="38992"/>
-                </a:lnTo>
-                <a:close/>
-                <a:lnTo>
-                  <a:pt x="41591" y="41591"/>
-                </a:lnTo>
-                <a:close/>
-                <a:lnTo>
-                  <a:pt x="44191" y="44191"/>
-                </a:lnTo>
-                <a:close/>
-                <a:lnTo>
-                  <a:pt x="46790" y="46790"/>
-                </a:lnTo>
-                <a:close/>
-                <a:lnTo>
-                  <a:pt x="49390" y="49390"/>
-                </a:lnTo>
-                <a:close/>
-                <a:lnTo>
-                  <a:pt x="51989" y="51989"/>
-                </a:lnTo>
-                <a:close/>
-                <a:lnTo>
-                  <a:pt x="54589" y="54589"/>
-                </a:lnTo>
-                <a:close/>
-                <a:lnTo>
-                  <a:pt x="57188" y="57188"/>
-                </a:lnTo>
-                <a:close/>
-                <a:lnTo>
-                  <a:pt x="59788" y="59788"/>
-                </a:lnTo>
-                <a:close/>
-                <a:lnTo>
-                  <a:pt x="62387" y="62387"/>
-                </a:lnTo>
-                <a:close/>
-                <a:lnTo>
-                  <a:pt x="64987" y="64987"/>
-                </a:lnTo>
-                <a:close/>
-                <a:lnTo>
-                  <a:pt x="67586" y="67586"/>
-                </a:lnTo>
-                <a:close/>
-                <a:lnTo>
-                  <a:pt x="70186" y="70186"/>
-                </a:lnTo>
-                <a:close/>
-                <a:lnTo>
-                  <a:pt x="72785" y="72785"/>
-                </a:lnTo>
-                <a:close/>
-                <a:lnTo>
-                  <a:pt x="75384" y="75384"/>
-                </a:lnTo>
-                <a:close/>
-                <a:lnTo>
-                  <a:pt x="77984" y="77984"/>
-                </a:lnTo>
-                <a:close/>
-                <a:lnTo>
-                  <a:pt x="80583" y="80583"/>
-                </a:lnTo>
-                <a:close/>
-                <a:lnTo>
-                  <a:pt x="83183" y="83183"/>
-                </a:lnTo>
-                <a:close/>
-                <a:lnTo>
-                  <a:pt x="85782" y="85782"/>
-                </a:lnTo>
-                <a:close/>
-                <a:lnTo>
-                  <a:pt x="88382" y="88382"/>
-                </a:lnTo>
-                <a:close/>
-                <a:lnTo>
-                  <a:pt x="90981" y="90981"/>
-                </a:lnTo>
-                <a:close/>
-                <a:lnTo>
-                  <a:pt x="93581" y="93581"/>
-                </a:lnTo>
-                <a:close/>
-                <a:lnTo>
-                  <a:pt x="96180" y="96180"/>
-                </a:lnTo>
-                <a:close/>
-                <a:lnTo>
-                  <a:pt x="98780" y="98780"/>
-                </a:lnTo>
-                <a:close/>
-                <a:lnTo>
-                  <a:pt x="101379" y="101379"/>
-                </a:lnTo>
-                <a:close/>
-                <a:lnTo>
-                  <a:pt x="103979" y="103979"/>
-                </a:lnTo>
-                <a:close/>
-                <a:lnTo>
-                  <a:pt x="106578" y="106578"/>
-                </a:lnTo>
-                <a:close/>
-                <a:lnTo>
-                  <a:pt x="109178" y="109178"/>
-                </a:lnTo>
-                <a:close/>
-                <a:lnTo>
-                  <a:pt x="111777" y="111777"/>
-                </a:lnTo>
-                <a:close/>
-                <a:lnTo>
-                  <a:pt x="114376" y="114376"/>
-                </a:lnTo>
-                <a:close/>
-                <a:lnTo>
-                  <a:pt x="116976" y="116976"/>
-                </a:lnTo>
-                <a:close/>
-                <a:lnTo>
-                  <a:pt x="119575" y="119575"/>
-                </a:lnTo>
-                <a:close/>
-                <a:lnTo>
-                  <a:pt x="122175" y="122175"/>
-                </a:lnTo>
-                <a:close/>
-                <a:lnTo>
-                  <a:pt x="124774" y="124774"/>
-                </a:lnTo>
-                <a:close/>
-                <a:lnTo>
-                  <a:pt x="127374" y="127374"/>
-                </a:lnTo>
-                <a:close/>
-                <a:lnTo>
-                  <a:pt x="129973" y="129973"/>
-                </a:lnTo>
-                <a:close/>
-                <a:lnTo>
-                  <a:pt x="132573" y="132573"/>
-                </a:lnTo>
-                <a:close/>
-                <a:lnTo>
-                  <a:pt x="135172" y="135172"/>
-                </a:lnTo>
-                <a:close/>
-                <a:lnTo>
-                  <a:pt x="137772" y="137772"/>
-                </a:lnTo>
-                <a:close/>
-                <a:lnTo>
-                  <a:pt x="140371" y="140371"/>
-                </a:lnTo>
-                <a:close/>
-                <a:lnTo>
-                  <a:pt x="142971" y="142971"/>
-                </a:lnTo>
-                <a:close/>
-                <a:lnTo>
-                  <a:pt x="145570" y="145570"/>
-                </a:lnTo>
-                <a:close/>
-                <a:lnTo>
-                  <a:pt x="148170" y="148170"/>
-                </a:lnTo>
-                <a:close/>
-                <a:lnTo>
-                  <a:pt x="150769" y="150769"/>
-                </a:lnTo>
-                <a:close/>
-                <a:lnTo>
-                  <a:pt x="153368" y="153368"/>
-                </a:lnTo>
-                <a:close/>
-                <a:lnTo>
-                  <a:pt x="155968" y="155968"/>
-                </a:lnTo>
-                <a:close/>
-                <a:lnTo>
-                  <a:pt x="158567" y="158567"/>
-                </a:lnTo>
-                <a:close/>
-                <a:lnTo>
-                  <a:pt x="161167" y="161167"/>
-                </a:lnTo>
-                <a:close/>
-                <a:lnTo>
-                  <a:pt x="163766" y="163766"/>
-                </a:lnTo>
-                <a:close/>
-                <a:lnTo>
-                  <a:pt x="166366" y="166366"/>
-                </a:lnTo>
-                <a:close/>
-                <a:lnTo>
-                  <a:pt x="168965" y="168965"/>
-                </a:lnTo>
-                <a:close/>
-                <a:lnTo>
-                  <a:pt x="171565" y="171565"/>
-                </a:lnTo>
-                <a:close/>
-                <a:lnTo>
-                  <a:pt x="174164" y="174164"/>
-                </a:lnTo>
-                <a:close/>
-                <a:lnTo>
-                  <a:pt x="176764" y="176764"/>
-                </a:lnTo>
-                <a:close/>
-                <a:lnTo>
-                  <a:pt x="179363" y="179363"/>
-                </a:lnTo>
-                <a:close/>
-                <a:lnTo>
-                  <a:pt x="181963" y="181963"/>
-                </a:lnTo>
-                <a:close/>
-                <a:lnTo>
-                  <a:pt x="184562" y="184562"/>
-                </a:lnTo>
-                <a:close/>
-                <a:lnTo>
-                  <a:pt x="187161" y="187161"/>
-                </a:lnTo>
-                <a:close/>
-                <a:lnTo>
-                  <a:pt x="189761" y="189761"/>
-                </a:lnTo>
-                <a:close/>
-                <a:lnTo>
-                  <a:pt x="192360" y="192360"/>
-                </a:lnTo>
-                <a:close/>
-                <a:lnTo>
-                  <a:pt x="194960" y="194960"/>
-                </a:lnTo>
-                <a:close/>
-                <a:lnTo>
-                  <a:pt x="197559" y="197559"/>
-                </a:lnTo>
-                <a:close/>
-                <a:lnTo>
-                  <a:pt x="200159" y="200159"/>
-                </a:lnTo>
-                <a:close/>
-                <a:lnTo>
-                  <a:pt x="202758" y="202758"/>
-                </a:lnTo>
-                <a:close/>
-                <a:lnTo>
-                  <a:pt x="205358" y="205358"/>
-                </a:lnTo>
-                <a:close/>
-                <a:lnTo>
-                  <a:pt x="207957" y="207957"/>
-                </a:lnTo>
-                <a:close/>
-                <a:lnTo>
-                  <a:pt x="210557" y="210557"/>
-                </a:lnTo>
-                <a:close/>
-                <a:lnTo>
-                  <a:pt x="213156" y="213156"/>
-                </a:lnTo>
-                <a:close/>
-                <a:lnTo>
-                  <a:pt x="215756" y="215756"/>
-                </a:lnTo>
-                <a:close/>
-                <a:lnTo>
-                  <a:pt x="218355" y="218355"/>
-                </a:lnTo>
-                <a:close/>
-                <a:lnTo>
-                  <a:pt x="220955" y="220955"/>
-                </a:lnTo>
-                <a:close/>
-                <a:lnTo>
-                  <a:pt x="223554" y="223554"/>
-                </a:lnTo>
-                <a:close/>
-                <a:lnTo>
-                  <a:pt x="226153" y="226153"/>
-                </a:lnTo>
-                <a:close/>
-                <a:lnTo>
-                  <a:pt x="228753" y="228753"/>
-                </a:lnTo>
-                <a:close/>
-                <a:lnTo>
-                  <a:pt x="231352" y="231352"/>
-                </a:lnTo>
-                <a:close/>
-                <a:lnTo>
-                  <a:pt x="233952" y="233952"/>
-                </a:lnTo>
-                <a:close/>
-                <a:lnTo>
-                  <a:pt x="236551" y="236551"/>
-                </a:lnTo>
-                <a:close/>
-                <a:lnTo>
-                  <a:pt x="239151" y="239151"/>
-                </a:lnTo>
-                <a:close/>
-                <a:lnTo>
-                  <a:pt x="241750" y="241750"/>
-                </a:lnTo>
-                <a:close/>
-                <a:lnTo>
-                  <a:pt x="244350" y="244350"/>
-                </a:lnTo>
-                <a:close/>
-                <a:lnTo>
-                  <a:pt x="246949" y="246949"/>
-                </a:lnTo>
-                <a:close/>
-                <a:lnTo>
-                  <a:pt x="249549" y="249549"/>
-                </a:lnTo>
-                <a:close/>
-                <a:lnTo>
-                  <a:pt x="252148" y="252148"/>
-                </a:lnTo>
-                <a:close/>
-                <a:lnTo>
-                  <a:pt x="254748" y="254748"/>
-                </a:lnTo>
-                <a:close/>
-                <a:lnTo>
-                  <a:pt x="257347" y="257347"/>
-                </a:lnTo>
-                <a:close/>
-                <a:lnTo>
-                  <a:pt x="259947" y="259947"/>
-                </a:lnTo>
-                <a:close/>
-                <a:lnTo>
-                  <a:pt x="262546" y="262546"/>
-                </a:lnTo>
-                <a:close/>
-                <a:lnTo>
-                  <a:pt x="265145" y="265145"/>
-                </a:lnTo>
-                <a:close/>
-                <a:lnTo>
-                  <a:pt x="267745" y="267745"/>
-                </a:lnTo>
-                <a:close/>
-                <a:lnTo>
-                  <a:pt x="270344" y="270344"/>
-                </a:lnTo>
-                <a:close/>
-                <a:lnTo>
-                  <a:pt x="272944" y="272944"/>
-                </a:lnTo>
-                <a:close/>
-                <a:lnTo>
-                  <a:pt x="275543" y="275543"/>
-                </a:lnTo>
-                <a:close/>
-                <a:lnTo>
-                  <a:pt x="278143" y="278143"/>
-                </a:lnTo>
-                <a:close/>
-                <a:lnTo>
-                  <a:pt x="280742" y="280742"/>
-                </a:lnTo>
-                <a:close/>
-                <a:lnTo>
-                  <a:pt x="283342" y="283342"/>
-                </a:lnTo>
-                <a:close/>
-                <a:lnTo>
-                  <a:pt x="285941" y="285941"/>
-                </a:lnTo>
-                <a:close/>
-                <a:lnTo>
-                  <a:pt x="288540" y="288540"/>
-                </a:lnTo>
-                <a:close/>
-                <a:lnTo>
-                  <a:pt x="291140" y="291140"/>
-                </a:lnTo>
-                <a:close/>
-                <a:lnTo>
-                  <a:pt x="293739" y="293739"/>
-                </a:lnTo>
-                <a:close/>
-                <a:lnTo>
-                  <a:pt x="296339" y="296339"/>
-                </a:lnTo>
-                <a:close/>
-                <a:lnTo>
-                  <a:pt x="298938" y="298938"/>
-                </a:lnTo>
-                <a:close/>
-                <a:lnTo>
-                  <a:pt x="301538" y="301538"/>
-                </a:lnTo>
-                <a:close/>
-                <a:lnTo>
-                  <a:pt x="304137" y="304137"/>
-                </a:lnTo>
-                <a:close/>
-                <a:lnTo>
-                  <a:pt x="306737" y="306737"/>
-                </a:lnTo>
-                <a:close/>
-                <a:lnTo>
-                  <a:pt x="309336" y="309336"/>
-                </a:lnTo>
-                <a:close/>
-                <a:lnTo>
-                  <a:pt x="311936" y="311936"/>
-                </a:lnTo>
-                <a:close/>
-                <a:lnTo>
-                  <a:pt x="314535" y="314535"/>
-                </a:lnTo>
-                <a:close/>
-                <a:lnTo>
-                  <a:pt x="317135" y="317135"/>
-                </a:lnTo>
-                <a:close/>
-                <a:lnTo>
-                  <a:pt x="319734" y="319734"/>
-                </a:lnTo>
-                <a:close/>
-                <a:lnTo>
-                  <a:pt x="322334" y="322334"/>
-                </a:lnTo>
-                <a:close/>
-                <a:lnTo>
-                  <a:pt x="324933" y="324933"/>
-                </a:lnTo>
-                <a:close/>
-                <a:lnTo>
-                  <a:pt x="327533" y="327533"/>
-                </a:lnTo>
-                <a:close/>
-                <a:lnTo>
-                  <a:pt x="330132" y="330132"/>
-                </a:lnTo>
-                <a:close/>
-                <a:lnTo>
-                  <a:pt x="332732" y="332732"/>
-                </a:lnTo>
-                <a:close/>
-                <a:lnTo>
-                  <a:pt x="335331" y="335331"/>
-                </a:lnTo>
-                <a:close/>
-                <a:lnTo>
-                  <a:pt x="337931" y="337931"/>
-                </a:lnTo>
-                <a:close/>
-                <a:lnTo>
-                  <a:pt x="340531" y="340531"/>
-                </a:lnTo>
-                <a:close/>
-                <a:lnTo>
-                  <a:pt x="343130" y="343130"/>
-                </a:lnTo>
-                <a:close/>
-                <a:lnTo>
-                  <a:pt x="345730" y="345730"/>
-                </a:lnTo>
-                <a:close/>
-                <a:lnTo>
-                  <a:pt x="348329" y="348329"/>
-                </a:lnTo>
-                <a:close/>
-                <a:lnTo>
-                  <a:pt x="350928" y="350928"/>
-                </a:lnTo>
-                <a:close/>
-                <a:lnTo>
-                  <a:pt x="353528" y="353528"/>
-                </a:lnTo>
-                <a:close/>
-                <a:lnTo>
-                  <a:pt x="356127" y="356127"/>
-                </a:lnTo>
-                <a:close/>
-                <a:lnTo>
-                  <a:pt x="358727" y="358727"/>
-                </a:lnTo>
-                <a:close/>
-                <a:lnTo>
-                  <a:pt x="361326" y="361326"/>
-                </a:lnTo>
-                <a:close/>
-                <a:lnTo>
-                  <a:pt x="363925" y="363925"/>
-                </a:lnTo>
-                <a:close/>
-                <a:lnTo>
-                  <a:pt x="366524" y="366524"/>
-                </a:lnTo>
-                <a:close/>
-                <a:lnTo>
-                  <a:pt x="369124" y="369124"/>
-                </a:lnTo>
-                <a:close/>
-                <a:lnTo>
-                  <a:pt x="371723" y="371723"/>
-                </a:lnTo>
-                <a:close/>
-                <a:lnTo>
-                  <a:pt x="374322" y="374322"/>
-                </a:lnTo>
-                <a:close/>
-                <a:lnTo>
-                  <a:pt x="376921" y="376921"/>
-                </a:lnTo>
-                <a:close/>
-                <a:lnTo>
-                  <a:pt x="379520" y="379520"/>
-                </a:lnTo>
-                <a:close/>
-                <a:lnTo>
-                  <a:pt x="382119" y="382119"/>
-                </a:lnTo>
-                <a:close/>
-                <a:lnTo>
-                  <a:pt x="384719" y="384719"/>
-                </a:lnTo>
-                <a:close/>
-                <a:lnTo>
-                  <a:pt x="387318" y="387318"/>
-                </a:lnTo>
-                <a:close/>
-                <a:lnTo>
-                  <a:pt x="389917" y="389917"/>
-                </a:lnTo>
-                <a:close/>
-                <a:lnTo>
-                  <a:pt x="392517" y="392517"/>
-                </a:lnTo>
-                <a:close/>
-                <a:lnTo>
-                  <a:pt x="395116" y="395116"/>
-                </a:lnTo>
-                <a:close/>
-                <a:lnTo>
-                  <a:pt x="397716" y="397716"/>
-                </a:lnTo>
-                <a:close/>
-                <a:lnTo>
-                  <a:pt x="400315" y="400315"/>
-                </a:lnTo>
-                <a:close/>
-                <a:lnTo>
-                  <a:pt x="402915" y="402915"/>
-                </a:lnTo>
-                <a:close/>
-                <a:lnTo>
-                  <a:pt x="405515" y="405515"/>
-                </a:lnTo>
-                <a:close/>
-                <a:lnTo>
-                  <a:pt x="408115" y="408115"/>
-                </a:lnTo>
-                <a:close/>
-                <a:lnTo>
-                  <a:pt x="410715" y="410715"/>
-                </a:lnTo>
-                <a:close/>
-                <a:lnTo>
-                  <a:pt x="413316" y="413316"/>
-                </a:lnTo>
-                <a:close/>
-                <a:lnTo>
-                  <a:pt x="415916" y="415916"/>
-                </a:lnTo>
-                <a:close/>
-                <a:lnTo>
-                  <a:pt x="418517" y="418517"/>
-                </a:lnTo>
-                <a:close/>
-                <a:lnTo>
-                  <a:pt x="421117" y="421117"/>
-                </a:lnTo>
-                <a:close/>
-                <a:lnTo>
-                  <a:pt x="423718" y="423718"/>
-                </a:lnTo>
-                <a:close/>
-                <a:lnTo>
-                  <a:pt x="426319" y="426319"/>
-                </a:lnTo>
-                <a:close/>
-                <a:lnTo>
-                  <a:pt x="428919" y="428919"/>
-                </a:lnTo>
-                <a:close/>
-                <a:lnTo>
-                  <a:pt x="431519" y="431519"/>
-                </a:lnTo>
-                <a:close/>
-                <a:lnTo>
-                  <a:pt x="434120" y="434120"/>
-                </a:lnTo>
-                <a:close/>
-                <a:lnTo>
-                  <a:pt x="436720" y="436720"/>
-                </a:lnTo>
-                <a:close/>
-                <a:lnTo>
-                  <a:pt x="439319" y="439319"/>
-                </a:lnTo>
-                <a:close/>
-                <a:lnTo>
-                  <a:pt x="441919" y="441919"/>
-                </a:lnTo>
-                <a:close/>
-                <a:lnTo>
-                  <a:pt x="444518" y="444518"/>
-                </a:lnTo>
-                <a:close/>
-                <a:lnTo>
-                  <a:pt x="447116" y="447116"/>
-                </a:lnTo>
-                <a:close/>
-                <a:lnTo>
-                  <a:pt x="449714" y="449714"/>
-                </a:lnTo>
-                <a:close/>
-                <a:lnTo>
-                  <a:pt x="452312" y="452312"/>
-                </a:lnTo>
-                <a:close/>
-                <a:lnTo>
-                  <a:pt x="454909" y="454909"/>
-                </a:lnTo>
-                <a:close/>
-                <a:lnTo>
-                  <a:pt x="457505" y="457505"/>
-                </a:lnTo>
-                <a:close/>
-                <a:lnTo>
-                  <a:pt x="460101" y="460101"/>
-                </a:lnTo>
-                <a:close/>
-                <a:lnTo>
-                  <a:pt x="462697" y="462697"/>
-                </a:lnTo>
-                <a:close/>
-                <a:lnTo>
-                  <a:pt x="465292" y="465292"/>
-                </a:lnTo>
-                <a:close/>
-                <a:lnTo>
-                  <a:pt x="467887" y="467887"/>
-                </a:lnTo>
-                <a:close/>
-                <a:lnTo>
-                  <a:pt x="470482" y="470482"/>
-                </a:lnTo>
-                <a:close/>
-                <a:lnTo>
-                  <a:pt x="473077" y="473077"/>
-                </a:lnTo>
-                <a:close/>
-                <a:lnTo>
-                  <a:pt x="475673" y="475673"/>
-                </a:lnTo>
-                <a:close/>
-                <a:lnTo>
-                  <a:pt x="478269" y="478269"/>
-                </a:lnTo>
-                <a:close/>
-                <a:lnTo>
-                  <a:pt x="480867" y="480867"/>
-                </a:lnTo>
-                <a:close/>
-                <a:lnTo>
-                  <a:pt x="483465" y="483465"/>
-                </a:lnTo>
-                <a:close/>
-                <a:lnTo>
-                  <a:pt x="486064" y="486064"/>
-                </a:lnTo>
-                <a:close/>
-                <a:lnTo>
-                  <a:pt x="488664" y="488664"/>
-                </a:lnTo>
-                <a:close/>
-                <a:lnTo>
-                  <a:pt x="491266" y="491266"/>
-                </a:lnTo>
-                <a:close/>
-                <a:lnTo>
-                  <a:pt x="493869" y="493869"/>
-                </a:lnTo>
-                <a:close/>
-                <a:lnTo>
-                  <a:pt x="496475" y="496475"/>
-                </a:lnTo>
-                <a:close/>
-                <a:lnTo>
-                  <a:pt x="499082" y="499082"/>
-                </a:lnTo>
-                <a:close/>
-                <a:lnTo>
-                  <a:pt x="501691" y="501691"/>
-                </a:lnTo>
-                <a:close/>
-                <a:lnTo>
-                  <a:pt x="504303" y="504303"/>
-                </a:lnTo>
-                <a:close/>
-                <a:lnTo>
-                  <a:pt x="506917" y="506917"/>
-                </a:lnTo>
-                <a:close/>
-                <a:lnTo>
-                  <a:pt x="509532" y="509532"/>
-                </a:lnTo>
-                <a:close/>
-                <a:lnTo>
-                  <a:pt x="512148" y="512148"/>
-                </a:lnTo>
-                <a:close/>
-                <a:lnTo>
-                  <a:pt x="514764" y="514764"/>
-                </a:lnTo>
-                <a:close/>
-                <a:lnTo>
-                  <a:pt x="517379" y="517379"/>
-                </a:lnTo>
-                <a:close/>
-                <a:lnTo>
-                  <a:pt x="519993" y="519993"/>
-                </a:lnTo>
-                <a:close/>
-                <a:lnTo>
-                  <a:pt x="522606" y="522606"/>
-                </a:lnTo>
-                <a:close/>
-                <a:lnTo>
-                  <a:pt x="525216" y="525216"/>
-                </a:lnTo>
-                <a:close/>
-                <a:lnTo>
-                  <a:pt x="527823" y="527823"/>
-                </a:lnTo>
-                <a:close/>
-                <a:lnTo>
-                  <a:pt x="530426" y="530426"/>
-                </a:lnTo>
-                <a:close/>
-                <a:lnTo>
-                  <a:pt x="533025" y="533025"/>
-                </a:lnTo>
-                <a:close/>
-                <a:lnTo>
-                  <a:pt x="535619" y="535619"/>
-                </a:lnTo>
-                <a:close/>
-                <a:lnTo>
-                  <a:pt x="538207" y="538207"/>
-                </a:lnTo>
-                <a:close/>
-                <a:lnTo>
-                  <a:pt x="540788" y="540788"/>
-                </a:lnTo>
-                <a:close/>
-                <a:lnTo>
-                  <a:pt x="543363" y="543363"/>
-                </a:lnTo>
-                <a:close/>
-                <a:lnTo>
-                  <a:pt x="545931" y="545931"/>
-                </a:lnTo>
-                <a:close/>
-                <a:lnTo>
-                  <a:pt x="548490" y="548490"/>
-                </a:lnTo>
-                <a:close/>
-                <a:lnTo>
-                  <a:pt x="551040" y="551040"/>
-                </a:lnTo>
-                <a:close/>
-                <a:lnTo>
-                  <a:pt x="553584" y="553584"/>
-                </a:lnTo>
-                <a:close/>
-                <a:lnTo>
-                  <a:pt x="556124" y="556124"/>
-                </a:lnTo>
-                <a:close/>
-                <a:lnTo>
-                  <a:pt x="558662" y="558662"/>
-                </a:lnTo>
-                <a:close/>
-                <a:lnTo>
-                  <a:pt x="561200" y="561200"/>
-                </a:lnTo>
-                <a:close/>
-                <a:lnTo>
-                  <a:pt x="563742" y="563742"/>
-                </a:lnTo>
-                <a:close/>
-                <a:lnTo>
-                  <a:pt x="566288" y="566288"/>
-                </a:lnTo>
-                <a:close/>
-                <a:lnTo>
-                  <a:pt x="568843" y="568843"/>
-                </a:lnTo>
-                <a:close/>
-                <a:lnTo>
-                  <a:pt x="571407" y="571407"/>
-                </a:lnTo>
-                <a:close/>
-                <a:lnTo>
-                  <a:pt x="573984" y="573984"/>
-                </a:lnTo>
-                <a:close/>
-                <a:lnTo>
-                  <a:pt x="576576" y="576576"/>
-                </a:lnTo>
-                <a:close/>
-                <a:lnTo>
-                  <a:pt x="579185" y="579185"/>
-                </a:lnTo>
-                <a:close/>
-                <a:lnTo>
-                  <a:pt x="581814" y="581814"/>
-                </a:lnTo>
-                <a:close/>
-                <a:lnTo>
-                  <a:pt x="584465" y="584465"/>
-                </a:lnTo>
-                <a:close/>
-                <a:lnTo>
-                  <a:pt x="587141" y="587141"/>
-                </a:lnTo>
-                <a:close/>
-                <a:lnTo>
-                  <a:pt x="589844" y="589844"/>
-                </a:lnTo>
-                <a:close/>
-                <a:lnTo>
-                  <a:pt x="592576" y="592576"/>
-                </a:lnTo>
-                <a:close/>
-                <a:lnTo>
-                  <a:pt x="595339" y="595339"/>
-                </a:lnTo>
-                <a:close/>
-                <a:lnTo>
-                  <a:pt x="598132" y="598132"/>
-                </a:lnTo>
-                <a:close/>
-                <a:lnTo>
-                  <a:pt x="600946" y="600946"/>
-                </a:lnTo>
-                <a:close/>
-                <a:lnTo>
-                  <a:pt x="603773" y="603773"/>
-                </a:lnTo>
-                <a:close/>
-                <a:lnTo>
-                  <a:pt x="606603" y="606603"/>
-                </a:lnTo>
-                <a:close/>
-                <a:lnTo>
-                  <a:pt x="609427" y="609427"/>
-                </a:lnTo>
-                <a:close/>
-                <a:lnTo>
-                  <a:pt x="612236" y="612236"/>
-                </a:lnTo>
-                <a:close/>
-                <a:lnTo>
-                  <a:pt x="615022" y="615022"/>
-                </a:lnTo>
-                <a:close/>
-                <a:lnTo>
-                  <a:pt x="617775" y="617775"/>
-                </a:lnTo>
-                <a:close/>
-                <a:lnTo>
-                  <a:pt x="620487" y="620487"/>
-                </a:lnTo>
-                <a:close/>
-                <a:lnTo>
-                  <a:pt x="623148" y="623148"/>
-                </a:lnTo>
-                <a:close/>
-                <a:lnTo>
-                  <a:pt x="625750" y="625750"/>
-                </a:lnTo>
-                <a:close/>
-                <a:lnTo>
-                  <a:pt x="628284" y="628284"/>
-                </a:lnTo>
-                <a:close/>
-                <a:lnTo>
-                  <a:pt x="630740" y="630740"/>
-                </a:lnTo>
-                <a:close/>
-                <a:lnTo>
-                  <a:pt x="633110" y="633110"/>
-                </a:lnTo>
-                <a:close/>
-                <a:lnTo>
-                  <a:pt x="635385" y="635385"/>
-                </a:lnTo>
-                <a:close/>
-                <a:lnTo>
-                  <a:pt x="637556" y="637556"/>
-                </a:lnTo>
-                <a:close/>
-                <a:lnTo>
-                  <a:pt x="639613" y="639613"/>
-                </a:lnTo>
-                <a:close/>
-                <a:lnTo>
-                  <a:pt x="641550" y="641550"/>
-                </a:lnTo>
-                <a:close/>
-                <a:lnTo>
-                  <a:pt x="643369" y="643369"/>
-                </a:lnTo>
-                <a:close/>
-                <a:lnTo>
-                  <a:pt x="645078" y="645078"/>
-                </a:lnTo>
-                <a:close/>
-                <a:lnTo>
-                  <a:pt x="646686" y="646686"/>
-                </a:lnTo>
-                <a:close/>
-                <a:lnTo>
-                  <a:pt x="648201" y="648201"/>
-                </a:lnTo>
-                <a:close/>
-                <a:lnTo>
-                  <a:pt x="649630" y="649630"/>
-                </a:lnTo>
-                <a:close/>
-                <a:lnTo>
-                  <a:pt x="650983" y="650983"/>
-                </a:lnTo>
-                <a:close/>
-                <a:lnTo>
-                  <a:pt x="652266" y="652266"/>
-                </a:lnTo>
-                <a:close/>
-                <a:lnTo>
-                  <a:pt x="653489" y="653489"/>
-                </a:lnTo>
-                <a:close/>
-                <a:lnTo>
-                  <a:pt x="654660" y="654660"/>
-                </a:lnTo>
-                <a:close/>
-                <a:lnTo>
-                  <a:pt x="655787" y="655787"/>
-                </a:lnTo>
-                <a:close/>
-                <a:lnTo>
-                  <a:pt x="656878" y="656878"/>
-                </a:lnTo>
-                <a:close/>
-                <a:lnTo>
-                  <a:pt x="657941" y="657941"/>
-                </a:lnTo>
-                <a:close/>
-                <a:lnTo>
-                  <a:pt x="658984" y="658984"/>
-                </a:lnTo>
-                <a:close/>
-                <a:lnTo>
-                  <a:pt x="660016" y="660016"/>
-                </a:lnTo>
-                <a:close/>
-                <a:lnTo>
-                  <a:pt x="661045" y="661045"/>
-                </a:lnTo>
-                <a:close/>
-                <a:lnTo>
-                  <a:pt x="662079" y="662079"/>
-                </a:lnTo>
-                <a:close/>
-                <a:lnTo>
-                  <a:pt x="663126" y="663126"/>
-                </a:lnTo>
-                <a:close/>
-                <a:lnTo>
-                  <a:pt x="664191" y="664191"/>
-                </a:lnTo>
-                <a:close/>
-                <a:lnTo>
-                  <a:pt x="665272" y="665272"/>
-                </a:lnTo>
-                <a:close/>
-                <a:lnTo>
-                  <a:pt x="666365" y="666365"/>
-                </a:lnTo>
-                <a:close/>
-                <a:lnTo>
-                  <a:pt x="667467" y="667467"/>
-                </a:lnTo>
-                <a:close/>
-                <a:lnTo>
-                  <a:pt x="668573" y="668573"/>
-                </a:lnTo>
-                <a:close/>
-                <a:lnTo>
-                  <a:pt x="669680" y="669680"/>
-                </a:lnTo>
-                <a:close/>
-                <a:lnTo>
-                  <a:pt x="670784" y="670784"/>
-                </a:lnTo>
-                <a:close/>
-                <a:lnTo>
-                  <a:pt x="671882" y="671882"/>
-                </a:lnTo>
-                <a:close/>
-                <a:lnTo>
-                  <a:pt x="672970" y="672970"/>
-                </a:lnTo>
-                <a:close/>
-                <a:lnTo>
-                  <a:pt x="674045" y="674045"/>
-                </a:lnTo>
-                <a:close/>
-                <a:lnTo>
-                  <a:pt x="675102" y="675102"/>
-                </a:lnTo>
-                <a:close/>
-                <a:lnTo>
-                  <a:pt x="676138" y="676138"/>
-                </a:lnTo>
-                <a:close/>
-                <a:lnTo>
-                  <a:pt x="677150" y="677150"/>
-                </a:lnTo>
-                <a:close/>
-                <a:lnTo>
-                  <a:pt x="678134" y="678134"/>
-                </a:lnTo>
-                <a:close/>
-                <a:lnTo>
-                  <a:pt x="679086" y="679086"/>
-                </a:lnTo>
-                <a:close/>
-                <a:lnTo>
-                  <a:pt x="680002" y="680002"/>
-                </a:lnTo>
-                <a:close/>
-                <a:lnTo>
-                  <a:pt x="680879" y="680879"/>
-                </a:lnTo>
-                <a:close/>
-                <a:lnTo>
-                  <a:pt x="681713" y="681713"/>
-                </a:lnTo>
-                <a:close/>
-                <a:lnTo>
-                  <a:pt x="682501" y="682501"/>
-                </a:lnTo>
-                <a:close/>
-                <a:lnTo>
-                  <a:pt x="683239" y="683239"/>
-                </a:lnTo>
-                <a:close/>
-                <a:lnTo>
-                  <a:pt x="683923" y="683923"/>
-                </a:lnTo>
-                <a:close/>
-                <a:lnTo>
-                  <a:pt x="684549" y="684549"/>
-                </a:lnTo>
-                <a:close/>
-                <a:lnTo>
-                  <a:pt x="685114" y="685114"/>
-                </a:lnTo>
-                <a:close/>
-                <a:lnTo>
-                  <a:pt x="685615" y="685615"/>
-                </a:lnTo>
-                <a:close/>
-                <a:lnTo>
-                  <a:pt x="686047" y="686047"/>
-                </a:lnTo>
-                <a:close/>
-                <a:lnTo>
-                  <a:pt x="686407" y="686407"/>
-                </a:lnTo>
-                <a:close/>
-                <a:lnTo>
-                  <a:pt x="686691" y="686691"/>
-                </a:lnTo>
-                <a:close/>
-                <a:lnTo>
-                  <a:pt x="686896" y="686896"/>
-                </a:lnTo>
-                <a:close/>
-                <a:lnTo>
-                  <a:pt x="687018" y="687018"/>
-                </a:lnTo>
-                <a:close/>
-                <a:lnTo>
-                  <a:pt x="687053" y="687053"/>
-                </a:lnTo>
-                <a:close/>
-                <a:lnTo>
-                  <a:pt x="686998" y="686998"/>
-                </a:lnTo>
-                <a:close/>
-                <a:lnTo>
-                  <a:pt x="686848" y="686848"/>
-                </a:lnTo>
-                <a:close/>
-                <a:lnTo>
-                  <a:pt x="686601" y="686601"/>
-                </a:lnTo>
-                <a:close/>
-                <a:lnTo>
-                  <a:pt x="686253" y="686253"/>
-                </a:lnTo>
-                <a:close/>
-                <a:lnTo>
-                  <a:pt x="685800" y="685800"/>
+                  <a:pt x="1915" y="1915"/>
+                </a:lnTo>
+                <a:close/>
+                <a:lnTo>
+                  <a:pt x="3829" y="3829"/>
+                </a:lnTo>
+                <a:close/>
+                <a:lnTo>
+                  <a:pt x="5741" y="5741"/>
+                </a:lnTo>
+                <a:close/>
+                <a:lnTo>
+                  <a:pt x="7652" y="7652"/>
+                </a:lnTo>
+                <a:close/>
+                <a:lnTo>
+                  <a:pt x="9562" y="9562"/>
+                </a:lnTo>
+                <a:close/>
+                <a:lnTo>
+                  <a:pt x="11471" y="11471"/>
+                </a:lnTo>
+                <a:close/>
+                <a:lnTo>
+                  <a:pt x="13378" y="13378"/>
+                </a:lnTo>
+                <a:close/>
+                <a:lnTo>
+                  <a:pt x="15285" y="15285"/>
+                </a:lnTo>
+                <a:close/>
+                <a:lnTo>
+                  <a:pt x="17191" y="17191"/>
+                </a:lnTo>
+                <a:close/>
+                <a:lnTo>
+                  <a:pt x="19097" y="19097"/>
+                </a:lnTo>
+                <a:close/>
+                <a:lnTo>
+                  <a:pt x="21002" y="21002"/>
+                </a:lnTo>
+                <a:close/>
+                <a:lnTo>
+                  <a:pt x="22907" y="22907"/>
+                </a:lnTo>
+                <a:close/>
+                <a:lnTo>
+                  <a:pt x="24811" y="24811"/>
+                </a:lnTo>
+                <a:close/>
+                <a:lnTo>
+                  <a:pt x="26716" y="26716"/>
+                </a:lnTo>
+                <a:close/>
+                <a:lnTo>
+                  <a:pt x="28621" y="28621"/>
+                </a:lnTo>
+                <a:close/>
+                <a:lnTo>
+                  <a:pt x="30525" y="30525"/>
+                </a:lnTo>
+                <a:close/>
+                <a:lnTo>
+                  <a:pt x="32430" y="32430"/>
+                </a:lnTo>
+                <a:close/>
+                <a:lnTo>
+                  <a:pt x="34336" y="34336"/>
+                </a:lnTo>
+                <a:close/>
+                <a:lnTo>
+                  <a:pt x="36242" y="36242"/>
+                </a:lnTo>
+                <a:close/>
+                <a:lnTo>
+                  <a:pt x="38148" y="38148"/>
+                </a:lnTo>
+                <a:close/>
+                <a:lnTo>
+                  <a:pt x="40056" y="40056"/>
+                </a:lnTo>
+                <a:close/>
+                <a:lnTo>
+                  <a:pt x="41964" y="41964"/>
+                </a:lnTo>
+                <a:close/>
+                <a:lnTo>
+                  <a:pt x="43873" y="43873"/>
+                </a:lnTo>
+                <a:close/>
+                <a:lnTo>
+                  <a:pt x="45782" y="45782"/>
+                </a:lnTo>
+                <a:close/>
+                <a:lnTo>
+                  <a:pt x="47692" y="47692"/>
+                </a:lnTo>
+                <a:close/>
+                <a:lnTo>
+                  <a:pt x="49602" y="49602"/>
+                </a:lnTo>
+                <a:close/>
+                <a:lnTo>
+                  <a:pt x="51513" y="51513"/>
+                </a:lnTo>
+                <a:close/>
+                <a:lnTo>
+                  <a:pt x="53423" y="53423"/>
+                </a:lnTo>
+                <a:close/>
+                <a:lnTo>
+                  <a:pt x="55334" y="55334"/>
+                </a:lnTo>
+                <a:close/>
+                <a:lnTo>
+                  <a:pt x="57246" y="57246"/>
+                </a:lnTo>
+                <a:close/>
+                <a:lnTo>
+                  <a:pt x="59157" y="59157"/>
+                </a:lnTo>
+                <a:close/>
+                <a:lnTo>
+                  <a:pt x="61068" y="61068"/>
+                </a:lnTo>
+                <a:close/>
+                <a:lnTo>
+                  <a:pt x="62979" y="62979"/>
+                </a:lnTo>
+                <a:close/>
+                <a:lnTo>
+                  <a:pt x="64889" y="64889"/>
+                </a:lnTo>
+                <a:close/>
+                <a:lnTo>
+                  <a:pt x="66800" y="66800"/>
+                </a:lnTo>
+                <a:close/>
+                <a:lnTo>
+                  <a:pt x="68709" y="68709"/>
+                </a:lnTo>
+                <a:close/>
+                <a:lnTo>
+                  <a:pt x="70619" y="70619"/>
+                </a:lnTo>
+                <a:close/>
+                <a:lnTo>
+                  <a:pt x="72527" y="72527"/>
+                </a:lnTo>
+                <a:close/>
+                <a:lnTo>
+                  <a:pt x="74435" y="74435"/>
+                </a:lnTo>
+                <a:close/>
+                <a:lnTo>
+                  <a:pt x="76342" y="76342"/>
+                </a:lnTo>
+                <a:close/>
+                <a:lnTo>
+                  <a:pt x="78249" y="78249"/>
+                </a:lnTo>
+                <a:close/>
+                <a:lnTo>
+                  <a:pt x="80154" y="80154"/>
+                </a:lnTo>
+                <a:close/>
+                <a:lnTo>
+                  <a:pt x="82059" y="82059"/>
+                </a:lnTo>
+                <a:close/>
+                <a:lnTo>
+                  <a:pt x="83963" y="83963"/>
+                </a:lnTo>
+                <a:close/>
+                <a:lnTo>
+                  <a:pt x="85868" y="85868"/>
+                </a:lnTo>
+                <a:close/>
+                <a:lnTo>
+                  <a:pt x="87772" y="87772"/>
+                </a:lnTo>
+                <a:close/>
+                <a:lnTo>
+                  <a:pt x="89677" y="89677"/>
+                </a:lnTo>
+                <a:close/>
+                <a:lnTo>
+                  <a:pt x="91582" y="91582"/>
+                </a:lnTo>
+                <a:close/>
+                <a:lnTo>
+                  <a:pt x="93487" y="93487"/>
+                </a:lnTo>
+                <a:close/>
+                <a:lnTo>
+                  <a:pt x="95394" y="95394"/>
+                </a:lnTo>
+                <a:close/>
+                <a:lnTo>
+                  <a:pt x="97301" y="97301"/>
+                </a:lnTo>
+                <a:close/>
+                <a:lnTo>
+                  <a:pt x="99209" y="99209"/>
+                </a:lnTo>
+                <a:close/>
+                <a:lnTo>
+                  <a:pt x="101118" y="101118"/>
+                </a:lnTo>
+                <a:close/>
+                <a:lnTo>
+                  <a:pt x="103027" y="103027"/>
+                </a:lnTo>
+                <a:close/>
+                <a:lnTo>
+                  <a:pt x="104937" y="104937"/>
+                </a:lnTo>
+                <a:close/>
+                <a:lnTo>
+                  <a:pt x="106847" y="106847"/>
+                </a:lnTo>
+                <a:close/>
+                <a:lnTo>
+                  <a:pt x="108758" y="108758"/>
+                </a:lnTo>
+                <a:close/>
+                <a:lnTo>
+                  <a:pt x="110669" y="110669"/>
+                </a:lnTo>
+                <a:close/>
+                <a:lnTo>
+                  <a:pt x="112580" y="112580"/>
+                </a:lnTo>
+                <a:close/>
+                <a:lnTo>
+                  <a:pt x="114491" y="114491"/>
+                </a:lnTo>
+                <a:close/>
+                <a:lnTo>
+                  <a:pt x="116402" y="116402"/>
+                </a:lnTo>
+                <a:close/>
+                <a:lnTo>
+                  <a:pt x="118313" y="118313"/>
+                </a:lnTo>
+                <a:close/>
+                <a:lnTo>
+                  <a:pt x="120224" y="120224"/>
+                </a:lnTo>
+                <a:close/>
+                <a:lnTo>
+                  <a:pt x="122135" y="122135"/>
+                </a:lnTo>
+                <a:close/>
+                <a:lnTo>
+                  <a:pt x="124045" y="124045"/>
+                </a:lnTo>
+                <a:close/>
+                <a:lnTo>
+                  <a:pt x="125955" y="125955"/>
+                </a:lnTo>
+                <a:close/>
+                <a:lnTo>
+                  <a:pt x="127864" y="127864"/>
+                </a:lnTo>
+                <a:close/>
+                <a:lnTo>
+                  <a:pt x="129773" y="129773"/>
+                </a:lnTo>
+                <a:close/>
+                <a:lnTo>
+                  <a:pt x="131681" y="131681"/>
+                </a:lnTo>
+                <a:close/>
+                <a:lnTo>
+                  <a:pt x="133588" y="133588"/>
+                </a:lnTo>
+                <a:close/>
+                <a:lnTo>
+                  <a:pt x="135494" y="135494"/>
+                </a:lnTo>
+                <a:close/>
+                <a:lnTo>
+                  <a:pt x="137399" y="137399"/>
+                </a:lnTo>
+                <a:close/>
+                <a:lnTo>
+                  <a:pt x="139304" y="139304"/>
+                </a:lnTo>
+                <a:close/>
+                <a:lnTo>
+                  <a:pt x="141209" y="141209"/>
+                </a:lnTo>
+                <a:close/>
+                <a:lnTo>
+                  <a:pt x="143113" y="143113"/>
+                </a:lnTo>
+                <a:close/>
+                <a:lnTo>
+                  <a:pt x="145017" y="145017"/>
+                </a:lnTo>
+                <a:close/>
+                <a:lnTo>
+                  <a:pt x="146922" y="146922"/>
+                </a:lnTo>
+                <a:close/>
+                <a:lnTo>
+                  <a:pt x="148827" y="148827"/>
+                </a:lnTo>
+                <a:close/>
+                <a:lnTo>
+                  <a:pt x="150733" y="150733"/>
+                </a:lnTo>
+                <a:close/>
+                <a:lnTo>
+                  <a:pt x="152639" y="152639"/>
+                </a:lnTo>
+                <a:close/>
+                <a:lnTo>
+                  <a:pt x="154546" y="154546"/>
+                </a:lnTo>
+                <a:close/>
+                <a:lnTo>
+                  <a:pt x="156454" y="156454"/>
+                </a:lnTo>
+                <a:close/>
+                <a:lnTo>
+                  <a:pt x="158363" y="158363"/>
+                </a:lnTo>
+                <a:close/>
+                <a:lnTo>
+                  <a:pt x="160272" y="160272"/>
+                </a:lnTo>
+                <a:close/>
+                <a:lnTo>
+                  <a:pt x="162182" y="162182"/>
+                </a:lnTo>
+                <a:close/>
+                <a:lnTo>
+                  <a:pt x="164093" y="164093"/>
+                </a:lnTo>
+                <a:close/>
+                <a:lnTo>
+                  <a:pt x="166003" y="166003"/>
+                </a:lnTo>
+                <a:close/>
+                <a:lnTo>
+                  <a:pt x="167914" y="167914"/>
+                </a:lnTo>
+                <a:close/>
+                <a:lnTo>
+                  <a:pt x="169825" y="169825"/>
+                </a:lnTo>
+                <a:close/>
+                <a:lnTo>
+                  <a:pt x="171737" y="171737"/>
+                </a:lnTo>
+                <a:close/>
+                <a:lnTo>
+                  <a:pt x="173648" y="173648"/>
+                </a:lnTo>
+                <a:close/>
+                <a:lnTo>
+                  <a:pt x="175559" y="175559"/>
+                </a:lnTo>
+                <a:close/>
+                <a:lnTo>
+                  <a:pt x="177470" y="177470"/>
+                </a:lnTo>
+                <a:close/>
+                <a:lnTo>
+                  <a:pt x="179381" y="179381"/>
+                </a:lnTo>
+                <a:close/>
+                <a:lnTo>
+                  <a:pt x="181291" y="181291"/>
+                </a:lnTo>
+                <a:close/>
+                <a:lnTo>
+                  <a:pt x="183201" y="183201"/>
+                </a:lnTo>
+                <a:close/>
+                <a:lnTo>
+                  <a:pt x="185110" y="185110"/>
+                </a:lnTo>
+                <a:close/>
+                <a:lnTo>
+                  <a:pt x="187018" y="187018"/>
+                </a:lnTo>
+                <a:close/>
+                <a:lnTo>
+                  <a:pt x="188926" y="188926"/>
+                </a:lnTo>
+                <a:close/>
+                <a:lnTo>
+                  <a:pt x="190833" y="190833"/>
+                </a:lnTo>
+                <a:close/>
+                <a:lnTo>
+                  <a:pt x="192739" y="192739"/>
+                </a:lnTo>
+                <a:close/>
+                <a:lnTo>
+                  <a:pt x="194644" y="194644"/>
+                </a:lnTo>
+                <a:close/>
+                <a:lnTo>
+                  <a:pt x="196549" y="196549"/>
+                </a:lnTo>
+                <a:close/>
+                <a:lnTo>
+                  <a:pt x="198454" y="198454"/>
+                </a:lnTo>
+                <a:close/>
+                <a:lnTo>
+                  <a:pt x="200358" y="200358"/>
+                </a:lnTo>
+                <a:close/>
+                <a:lnTo>
+                  <a:pt x="202263" y="202263"/>
+                </a:lnTo>
+                <a:close/>
+                <a:lnTo>
+                  <a:pt x="204167" y="204167"/>
+                </a:lnTo>
+                <a:close/>
+                <a:lnTo>
+                  <a:pt x="206072" y="206072"/>
+                </a:lnTo>
+                <a:close/>
+                <a:lnTo>
+                  <a:pt x="207978" y="207978"/>
+                </a:lnTo>
+                <a:close/>
+                <a:lnTo>
+                  <a:pt x="209884" y="209884"/>
+                </a:lnTo>
+                <a:close/>
+                <a:lnTo>
+                  <a:pt x="211792" y="211792"/>
+                </a:lnTo>
+                <a:close/>
+                <a:lnTo>
+                  <a:pt x="213700" y="213700"/>
+                </a:lnTo>
+                <a:close/>
+                <a:lnTo>
+                  <a:pt x="215608" y="215608"/>
+                </a:lnTo>
+                <a:close/>
+                <a:lnTo>
+                  <a:pt x="217518" y="217518"/>
+                </a:lnTo>
+                <a:close/>
+                <a:lnTo>
+                  <a:pt x="219428" y="219428"/>
+                </a:lnTo>
+                <a:close/>
+                <a:lnTo>
+                  <a:pt x="221338" y="221338"/>
+                </a:lnTo>
+                <a:close/>
+                <a:lnTo>
+                  <a:pt x="223249" y="223249"/>
+                </a:lnTo>
+                <a:close/>
+                <a:lnTo>
+                  <a:pt x="225160" y="225160"/>
+                </a:lnTo>
+                <a:close/>
+                <a:lnTo>
+                  <a:pt x="227071" y="227071"/>
+                </a:lnTo>
+                <a:close/>
+                <a:lnTo>
+                  <a:pt x="228982" y="228982"/>
+                </a:lnTo>
+                <a:close/>
+                <a:lnTo>
+                  <a:pt x="230893" y="230893"/>
+                </a:lnTo>
+                <a:close/>
+                <a:lnTo>
+                  <a:pt x="232805" y="232805"/>
+                </a:lnTo>
+                <a:close/>
+                <a:lnTo>
+                  <a:pt x="234715" y="234715"/>
+                </a:lnTo>
+                <a:close/>
+                <a:lnTo>
+                  <a:pt x="236626" y="236626"/>
+                </a:lnTo>
+                <a:close/>
+                <a:lnTo>
+                  <a:pt x="238536" y="238536"/>
+                </a:lnTo>
+                <a:close/>
+                <a:lnTo>
+                  <a:pt x="240446" y="240446"/>
+                </a:lnTo>
+                <a:close/>
+                <a:lnTo>
+                  <a:pt x="242355" y="242355"/>
+                </a:lnTo>
+                <a:close/>
+                <a:lnTo>
+                  <a:pt x="244264" y="244264"/>
+                </a:lnTo>
+                <a:close/>
+                <a:lnTo>
+                  <a:pt x="246171" y="246171"/>
+                </a:lnTo>
+                <a:close/>
+                <a:lnTo>
+                  <a:pt x="248078" y="248078"/>
+                </a:lnTo>
+                <a:close/>
+                <a:lnTo>
+                  <a:pt x="249984" y="249984"/>
+                </a:lnTo>
+                <a:close/>
+                <a:lnTo>
+                  <a:pt x="251890" y="251890"/>
+                </a:lnTo>
+                <a:close/>
+                <a:lnTo>
+                  <a:pt x="253795" y="253795"/>
+                </a:lnTo>
+                <a:close/>
+                <a:lnTo>
+                  <a:pt x="255699" y="255699"/>
+                </a:lnTo>
+                <a:close/>
+                <a:lnTo>
+                  <a:pt x="257603" y="257603"/>
+                </a:lnTo>
+                <a:close/>
+                <a:lnTo>
+                  <a:pt x="259508" y="259508"/>
+                </a:lnTo>
+                <a:close/>
+                <a:lnTo>
+                  <a:pt x="261413" y="261413"/>
+                </a:lnTo>
+                <a:close/>
+                <a:lnTo>
+                  <a:pt x="263318" y="263318"/>
+                </a:lnTo>
+                <a:close/>
+                <a:lnTo>
+                  <a:pt x="265223" y="265223"/>
+                </a:lnTo>
+                <a:close/>
+                <a:lnTo>
+                  <a:pt x="267130" y="267130"/>
+                </a:lnTo>
+                <a:close/>
+                <a:lnTo>
+                  <a:pt x="269037" y="269037"/>
+                </a:lnTo>
+                <a:close/>
+                <a:lnTo>
+                  <a:pt x="270945" y="270945"/>
+                </a:lnTo>
+                <a:close/>
+                <a:lnTo>
+                  <a:pt x="272854" y="272854"/>
+                </a:lnTo>
+                <a:close/>
+                <a:lnTo>
+                  <a:pt x="274763" y="274763"/>
+                </a:lnTo>
+                <a:close/>
+                <a:lnTo>
+                  <a:pt x="276673" y="276673"/>
+                </a:lnTo>
+                <a:close/>
+                <a:lnTo>
+                  <a:pt x="278584" y="278584"/>
+                </a:lnTo>
+                <a:close/>
+                <a:lnTo>
+                  <a:pt x="280494" y="280494"/>
+                </a:lnTo>
+                <a:close/>
+                <a:lnTo>
+                  <a:pt x="282405" y="282405"/>
+                </a:lnTo>
+                <a:close/>
+                <a:lnTo>
+                  <a:pt x="284317" y="284317"/>
+                </a:lnTo>
+                <a:close/>
+                <a:lnTo>
+                  <a:pt x="286228" y="286228"/>
+                </a:lnTo>
+                <a:close/>
+                <a:lnTo>
+                  <a:pt x="288139" y="288139"/>
+                </a:lnTo>
+                <a:close/>
+                <a:lnTo>
+                  <a:pt x="290050" y="290050"/>
+                </a:lnTo>
+                <a:close/>
+                <a:lnTo>
+                  <a:pt x="291961" y="291961"/>
+                </a:lnTo>
+                <a:close/>
+                <a:lnTo>
+                  <a:pt x="293872" y="293872"/>
+                </a:lnTo>
+                <a:close/>
+                <a:lnTo>
+                  <a:pt x="295782" y="295782"/>
+                </a:lnTo>
+                <a:close/>
+                <a:lnTo>
+                  <a:pt x="297691" y="297691"/>
+                </a:lnTo>
+                <a:close/>
+                <a:lnTo>
+                  <a:pt x="299601" y="299601"/>
+                </a:lnTo>
+                <a:close/>
+                <a:lnTo>
+                  <a:pt x="301509" y="301509"/>
+                </a:lnTo>
+                <a:close/>
+                <a:lnTo>
+                  <a:pt x="303417" y="303417"/>
+                </a:lnTo>
+                <a:close/>
+                <a:lnTo>
+                  <a:pt x="305324" y="305324"/>
+                </a:lnTo>
+                <a:close/>
+                <a:lnTo>
+                  <a:pt x="307230" y="307230"/>
+                </a:lnTo>
+                <a:close/>
+                <a:lnTo>
+                  <a:pt x="309135" y="309135"/>
+                </a:lnTo>
+                <a:close/>
+                <a:lnTo>
+                  <a:pt x="311040" y="311040"/>
+                </a:lnTo>
+                <a:close/>
+                <a:lnTo>
+                  <a:pt x="312944" y="312944"/>
+                </a:lnTo>
+                <a:close/>
+                <a:lnTo>
+                  <a:pt x="314849" y="314849"/>
+                </a:lnTo>
+                <a:close/>
+                <a:lnTo>
+                  <a:pt x="316753" y="316753"/>
+                </a:lnTo>
+                <a:close/>
+                <a:lnTo>
+                  <a:pt x="318658" y="318658"/>
+                </a:lnTo>
+                <a:close/>
+                <a:lnTo>
+                  <a:pt x="320563" y="320563"/>
+                </a:lnTo>
+                <a:close/>
+                <a:lnTo>
+                  <a:pt x="322469" y="322469"/>
+                </a:lnTo>
+                <a:close/>
+                <a:lnTo>
+                  <a:pt x="324375" y="324375"/>
+                </a:lnTo>
+                <a:close/>
+                <a:lnTo>
+                  <a:pt x="326282" y="326282"/>
+                </a:lnTo>
+                <a:close/>
+                <a:lnTo>
+                  <a:pt x="328190" y="328190"/>
+                </a:lnTo>
+                <a:close/>
+                <a:lnTo>
+                  <a:pt x="330099" y="330099"/>
+                </a:lnTo>
+                <a:close/>
+                <a:lnTo>
+                  <a:pt x="332009" y="332009"/>
+                </a:lnTo>
+                <a:close/>
+                <a:lnTo>
+                  <a:pt x="333919" y="333919"/>
+                </a:lnTo>
+                <a:close/>
+                <a:lnTo>
+                  <a:pt x="335829" y="335829"/>
+                </a:lnTo>
+                <a:close/>
+                <a:lnTo>
+                  <a:pt x="337740" y="337740"/>
+                </a:lnTo>
+                <a:close/>
+                <a:lnTo>
+                  <a:pt x="339651" y="339651"/>
+                </a:lnTo>
+                <a:close/>
+                <a:lnTo>
+                  <a:pt x="341562" y="341562"/>
+                </a:lnTo>
+                <a:close/>
+                <a:lnTo>
+                  <a:pt x="343473" y="343473"/>
+                </a:lnTo>
+                <a:close/>
+                <a:lnTo>
+                  <a:pt x="345385" y="345385"/>
+                </a:lnTo>
+                <a:close/>
+                <a:lnTo>
+                  <a:pt x="347296" y="347296"/>
+                </a:lnTo>
+                <a:close/>
+                <a:lnTo>
+                  <a:pt x="349207" y="349207"/>
+                </a:lnTo>
+                <a:close/>
+                <a:lnTo>
+                  <a:pt x="351117" y="351117"/>
+                </a:lnTo>
+                <a:close/>
+                <a:lnTo>
+                  <a:pt x="353027" y="353027"/>
+                </a:lnTo>
+                <a:close/>
+                <a:lnTo>
+                  <a:pt x="354937" y="354937"/>
+                </a:lnTo>
+                <a:close/>
+                <a:lnTo>
+                  <a:pt x="356846" y="356846"/>
+                </a:lnTo>
+                <a:close/>
+                <a:lnTo>
+                  <a:pt x="358754" y="358754"/>
+                </a:lnTo>
+                <a:close/>
+                <a:lnTo>
+                  <a:pt x="360662" y="360662"/>
+                </a:lnTo>
+                <a:close/>
+                <a:lnTo>
+                  <a:pt x="362569" y="362569"/>
+                </a:lnTo>
+                <a:close/>
+                <a:lnTo>
+                  <a:pt x="364475" y="364475"/>
+                </a:lnTo>
+                <a:close/>
+                <a:lnTo>
+                  <a:pt x="366380" y="366380"/>
+                </a:lnTo>
+                <a:close/>
+                <a:lnTo>
+                  <a:pt x="368285" y="368285"/>
+                </a:lnTo>
+                <a:close/>
+                <a:lnTo>
+                  <a:pt x="370190" y="370190"/>
+                </a:lnTo>
+                <a:close/>
+                <a:lnTo>
+                  <a:pt x="372094" y="372094"/>
+                </a:lnTo>
+                <a:close/>
+                <a:lnTo>
+                  <a:pt x="373998" y="373998"/>
+                </a:lnTo>
+                <a:close/>
+                <a:lnTo>
+                  <a:pt x="375903" y="375903"/>
+                </a:lnTo>
+                <a:close/>
+                <a:lnTo>
+                  <a:pt x="377808" y="377808"/>
+                </a:lnTo>
+                <a:close/>
+                <a:lnTo>
+                  <a:pt x="379714" y="379714"/>
+                </a:lnTo>
+                <a:close/>
+                <a:lnTo>
+                  <a:pt x="381620" y="381620"/>
+                </a:lnTo>
+                <a:close/>
+                <a:lnTo>
+                  <a:pt x="383528" y="383528"/>
+                </a:lnTo>
+                <a:close/>
+                <a:lnTo>
+                  <a:pt x="385436" y="385436"/>
+                </a:lnTo>
+                <a:close/>
+                <a:lnTo>
+                  <a:pt x="387345" y="387345"/>
+                </a:lnTo>
+                <a:close/>
+                <a:lnTo>
+                  <a:pt x="389254" y="389254"/>
+                </a:lnTo>
+                <a:close/>
+                <a:lnTo>
+                  <a:pt x="391164" y="391164"/>
+                </a:lnTo>
+                <a:close/>
+                <a:lnTo>
+                  <a:pt x="393075" y="393075"/>
+                </a:lnTo>
+                <a:close/>
+                <a:lnTo>
+                  <a:pt x="394986" y="394986"/>
+                </a:lnTo>
+                <a:close/>
+                <a:lnTo>
+                  <a:pt x="396897" y="396897"/>
+                </a:lnTo>
+                <a:close/>
+                <a:lnTo>
+                  <a:pt x="398808" y="398808"/>
+                </a:lnTo>
+                <a:close/>
+                <a:lnTo>
+                  <a:pt x="400719" y="400719"/>
+                </a:lnTo>
+                <a:close/>
+                <a:lnTo>
+                  <a:pt x="402630" y="402630"/>
+                </a:lnTo>
+                <a:close/>
+                <a:lnTo>
+                  <a:pt x="404541" y="404541"/>
+                </a:lnTo>
+                <a:close/>
+                <a:lnTo>
+                  <a:pt x="406452" y="406452"/>
+                </a:lnTo>
+                <a:close/>
+                <a:lnTo>
+                  <a:pt x="408363" y="408363"/>
+                </a:lnTo>
+                <a:close/>
+                <a:lnTo>
+                  <a:pt x="410273" y="410273"/>
+                </a:lnTo>
+                <a:close/>
+                <a:lnTo>
+                  <a:pt x="412182" y="412182"/>
+                </a:lnTo>
+                <a:close/>
+                <a:lnTo>
+                  <a:pt x="414091" y="414091"/>
+                </a:lnTo>
+                <a:close/>
+                <a:lnTo>
+                  <a:pt x="416000" y="416000"/>
+                </a:lnTo>
+                <a:close/>
+                <a:lnTo>
+                  <a:pt x="417908" y="417908"/>
+                </a:lnTo>
+                <a:close/>
+                <a:lnTo>
+                  <a:pt x="419814" y="419814"/>
+                </a:lnTo>
+                <a:close/>
+                <a:lnTo>
+                  <a:pt x="421720" y="421720"/>
+                </a:lnTo>
+                <a:close/>
+                <a:lnTo>
+                  <a:pt x="423625" y="423625"/>
+                </a:lnTo>
+                <a:close/>
+                <a:lnTo>
+                  <a:pt x="425530" y="425530"/>
+                </a:lnTo>
+                <a:close/>
+                <a:lnTo>
+                  <a:pt x="427435" y="427435"/>
+                </a:lnTo>
+                <a:close/>
+                <a:lnTo>
+                  <a:pt x="429339" y="429339"/>
+                </a:lnTo>
+                <a:close/>
+                <a:lnTo>
+                  <a:pt x="431244" y="431244"/>
+                </a:lnTo>
+                <a:close/>
+                <a:lnTo>
+                  <a:pt x="433148" y="433148"/>
+                </a:lnTo>
+                <a:close/>
+                <a:lnTo>
+                  <a:pt x="435053" y="435053"/>
+                </a:lnTo>
+                <a:close/>
+                <a:lnTo>
+                  <a:pt x="436959" y="436959"/>
+                </a:lnTo>
+                <a:close/>
+                <a:lnTo>
+                  <a:pt x="438866" y="438866"/>
+                </a:lnTo>
+                <a:close/>
+                <a:lnTo>
+                  <a:pt x="440773" y="440773"/>
+                </a:lnTo>
+                <a:close/>
+                <a:lnTo>
+                  <a:pt x="442681" y="442681"/>
+                </a:lnTo>
+                <a:close/>
+                <a:lnTo>
+                  <a:pt x="444590" y="444590"/>
+                </a:lnTo>
+                <a:close/>
+                <a:lnTo>
+                  <a:pt x="446500" y="446500"/>
+                </a:lnTo>
+                <a:close/>
+                <a:lnTo>
+                  <a:pt x="448410" y="448410"/>
+                </a:lnTo>
+                <a:close/>
+                <a:lnTo>
+                  <a:pt x="450320" y="450320"/>
+                </a:lnTo>
+                <a:close/>
+                <a:lnTo>
+                  <a:pt x="452231" y="452231"/>
+                </a:lnTo>
+                <a:close/>
+                <a:lnTo>
+                  <a:pt x="454142" y="454142"/>
+                </a:lnTo>
+                <a:close/>
+                <a:lnTo>
+                  <a:pt x="456053" y="456053"/>
+                </a:lnTo>
+                <a:close/>
+                <a:lnTo>
+                  <a:pt x="457964" y="457964"/>
+                </a:lnTo>
+                <a:close/>
+                <a:lnTo>
+                  <a:pt x="459876" y="459876"/>
+                </a:lnTo>
+                <a:close/>
+                <a:lnTo>
+                  <a:pt x="461787" y="461787"/>
+                </a:lnTo>
+                <a:close/>
+                <a:lnTo>
+                  <a:pt x="463698" y="463698"/>
+                </a:lnTo>
+                <a:close/>
+                <a:lnTo>
+                  <a:pt x="465608" y="465608"/>
+                </a:lnTo>
+                <a:close/>
+                <a:lnTo>
+                  <a:pt x="467518" y="467518"/>
+                </a:lnTo>
+                <a:close/>
+                <a:lnTo>
+                  <a:pt x="469428" y="469428"/>
+                </a:lnTo>
+                <a:close/>
+                <a:lnTo>
+                  <a:pt x="471337" y="471337"/>
+                </a:lnTo>
+                <a:close/>
+                <a:lnTo>
+                  <a:pt x="473245" y="473245"/>
+                </a:lnTo>
+                <a:close/>
+                <a:lnTo>
+                  <a:pt x="475153" y="475153"/>
+                </a:lnTo>
+                <a:close/>
+                <a:lnTo>
+                  <a:pt x="477060" y="477060"/>
+                </a:lnTo>
+                <a:close/>
+                <a:lnTo>
+                  <a:pt x="478965" y="478965"/>
+                </a:lnTo>
+                <a:close/>
+                <a:lnTo>
+                  <a:pt x="480871" y="480871"/>
+                </a:lnTo>
+                <a:close/>
+                <a:lnTo>
+                  <a:pt x="482776" y="482776"/>
+                </a:lnTo>
+                <a:close/>
+                <a:lnTo>
+                  <a:pt x="484680" y="484680"/>
+                </a:lnTo>
+                <a:close/>
+                <a:lnTo>
+                  <a:pt x="486584" y="486584"/>
+                </a:lnTo>
+                <a:close/>
+                <a:lnTo>
+                  <a:pt x="488489" y="488489"/>
+                </a:lnTo>
+                <a:close/>
+                <a:lnTo>
+                  <a:pt x="490394" y="490394"/>
+                </a:lnTo>
+                <a:close/>
+                <a:lnTo>
+                  <a:pt x="492299" y="492299"/>
+                </a:lnTo>
+                <a:close/>
+                <a:lnTo>
+                  <a:pt x="494204" y="494204"/>
+                </a:lnTo>
+                <a:close/>
+                <a:lnTo>
+                  <a:pt x="496111" y="496111"/>
+                </a:lnTo>
+                <a:close/>
+                <a:lnTo>
+                  <a:pt x="498019" y="498019"/>
+                </a:lnTo>
+                <a:close/>
+                <a:lnTo>
+                  <a:pt x="499927" y="499927"/>
+                </a:lnTo>
+                <a:close/>
+                <a:lnTo>
+                  <a:pt x="501836" y="501836"/>
+                </a:lnTo>
+                <a:close/>
+                <a:lnTo>
+                  <a:pt x="503745" y="503745"/>
+                </a:lnTo>
+                <a:close/>
+                <a:lnTo>
+                  <a:pt x="505655" y="505655"/>
+                </a:lnTo>
+                <a:close/>
+                <a:lnTo>
+                  <a:pt x="507566" y="507566"/>
+                </a:lnTo>
+                <a:close/>
+                <a:lnTo>
+                  <a:pt x="509477" y="509477"/>
+                </a:lnTo>
+                <a:close/>
+                <a:lnTo>
+                  <a:pt x="511388" y="511388"/>
+                </a:lnTo>
+                <a:close/>
+                <a:lnTo>
+                  <a:pt x="513299" y="513299"/>
+                </a:lnTo>
+                <a:close/>
+                <a:lnTo>
+                  <a:pt x="515210" y="515210"/>
+                </a:lnTo>
+                <a:close/>
+                <a:lnTo>
+                  <a:pt x="517121" y="517121"/>
+                </a:lnTo>
+                <a:close/>
+                <a:lnTo>
+                  <a:pt x="519032" y="519032"/>
+                </a:lnTo>
+                <a:close/>
+                <a:lnTo>
+                  <a:pt x="520943" y="520943"/>
+                </a:lnTo>
+                <a:close/>
+                <a:lnTo>
+                  <a:pt x="522854" y="522854"/>
+                </a:lnTo>
+                <a:close/>
+                <a:lnTo>
+                  <a:pt x="524764" y="524764"/>
+                </a:lnTo>
+                <a:close/>
+                <a:lnTo>
+                  <a:pt x="526673" y="526673"/>
+                </a:lnTo>
+                <a:close/>
+                <a:lnTo>
+                  <a:pt x="528582" y="528582"/>
+                </a:lnTo>
+                <a:close/>
+                <a:lnTo>
+                  <a:pt x="530491" y="530491"/>
+                </a:lnTo>
+                <a:close/>
+                <a:lnTo>
+                  <a:pt x="532398" y="532398"/>
+                </a:lnTo>
+                <a:close/>
+                <a:lnTo>
+                  <a:pt x="534305" y="534305"/>
+                </a:lnTo>
+                <a:close/>
+                <a:lnTo>
+                  <a:pt x="536211" y="536211"/>
+                </a:lnTo>
+                <a:close/>
+                <a:lnTo>
+                  <a:pt x="538116" y="538116"/>
+                </a:lnTo>
+                <a:close/>
+                <a:lnTo>
+                  <a:pt x="540021" y="540021"/>
+                </a:lnTo>
+                <a:close/>
+                <a:lnTo>
+                  <a:pt x="541925" y="541925"/>
+                </a:lnTo>
+                <a:close/>
+                <a:lnTo>
+                  <a:pt x="543830" y="543830"/>
+                </a:lnTo>
+                <a:close/>
+                <a:lnTo>
+                  <a:pt x="545734" y="545734"/>
+                </a:lnTo>
+                <a:close/>
+                <a:lnTo>
+                  <a:pt x="547639" y="547639"/>
+                </a:lnTo>
+                <a:close/>
+                <a:lnTo>
+                  <a:pt x="549544" y="549544"/>
+                </a:lnTo>
+                <a:close/>
+                <a:lnTo>
+                  <a:pt x="551450" y="551450"/>
+                </a:lnTo>
+                <a:close/>
+                <a:lnTo>
+                  <a:pt x="553356" y="553356"/>
+                </a:lnTo>
+                <a:close/>
+                <a:lnTo>
+                  <a:pt x="555264" y="555264"/>
+                </a:lnTo>
+                <a:close/>
+                <a:lnTo>
+                  <a:pt x="557172" y="557172"/>
+                </a:lnTo>
+                <a:close/>
+                <a:lnTo>
+                  <a:pt x="559081" y="559081"/>
+                </a:lnTo>
+                <a:close/>
+                <a:lnTo>
+                  <a:pt x="560991" y="560991"/>
+                </a:lnTo>
+                <a:close/>
+                <a:lnTo>
+                  <a:pt x="562901" y="562901"/>
+                </a:lnTo>
+                <a:close/>
+                <a:lnTo>
+                  <a:pt x="564811" y="564811"/>
+                </a:lnTo>
+                <a:close/>
+                <a:lnTo>
+                  <a:pt x="566722" y="566722"/>
+                </a:lnTo>
+                <a:close/>
+                <a:lnTo>
+                  <a:pt x="568633" y="568633"/>
+                </a:lnTo>
+                <a:close/>
+                <a:lnTo>
+                  <a:pt x="570544" y="570544"/>
+                </a:lnTo>
+                <a:close/>
+                <a:lnTo>
+                  <a:pt x="572456" y="572456"/>
+                </a:lnTo>
+                <a:close/>
+                <a:lnTo>
+                  <a:pt x="574367" y="574367"/>
+                </a:lnTo>
+                <a:close/>
+                <a:lnTo>
+                  <a:pt x="576278" y="576278"/>
+                </a:lnTo>
+                <a:close/>
+                <a:lnTo>
+                  <a:pt x="578189" y="578189"/>
+                </a:lnTo>
+                <a:close/>
+                <a:lnTo>
+                  <a:pt x="580099" y="580099"/>
+                </a:lnTo>
+                <a:close/>
+                <a:lnTo>
+                  <a:pt x="582009" y="582009"/>
+                </a:lnTo>
+                <a:close/>
+                <a:lnTo>
+                  <a:pt x="583919" y="583919"/>
+                </a:lnTo>
+                <a:close/>
+                <a:lnTo>
+                  <a:pt x="585828" y="585828"/>
+                </a:lnTo>
+                <a:close/>
+                <a:lnTo>
+                  <a:pt x="587736" y="587736"/>
+                </a:lnTo>
+                <a:close/>
+                <a:lnTo>
+                  <a:pt x="589644" y="589644"/>
+                </a:lnTo>
+                <a:close/>
+                <a:lnTo>
+                  <a:pt x="591550" y="591550"/>
+                </a:lnTo>
+                <a:close/>
+                <a:lnTo>
+                  <a:pt x="593456" y="593456"/>
+                </a:lnTo>
+                <a:close/>
+                <a:lnTo>
+                  <a:pt x="595361" y="595361"/>
+                </a:lnTo>
+                <a:close/>
+                <a:lnTo>
+                  <a:pt x="597266" y="597266"/>
+                </a:lnTo>
+                <a:close/>
+                <a:lnTo>
+                  <a:pt x="599170" y="599170"/>
+                </a:lnTo>
+                <a:close/>
+                <a:lnTo>
+                  <a:pt x="601075" y="601075"/>
+                </a:lnTo>
+                <a:close/>
+                <a:lnTo>
+                  <a:pt x="602979" y="602979"/>
+                </a:lnTo>
+                <a:close/>
+                <a:lnTo>
+                  <a:pt x="604884" y="604884"/>
+                </a:lnTo>
+                <a:close/>
+                <a:lnTo>
+                  <a:pt x="606789" y="606789"/>
+                </a:lnTo>
+                <a:close/>
+                <a:lnTo>
+                  <a:pt x="608695" y="608695"/>
+                </a:lnTo>
+                <a:close/>
+                <a:lnTo>
+                  <a:pt x="610602" y="610602"/>
+                </a:lnTo>
+                <a:close/>
+                <a:lnTo>
+                  <a:pt x="612509" y="612509"/>
+                </a:lnTo>
+                <a:close/>
+                <a:lnTo>
+                  <a:pt x="614418" y="614418"/>
+                </a:lnTo>
+                <a:close/>
+                <a:lnTo>
+                  <a:pt x="616327" y="616327"/>
+                </a:lnTo>
+                <a:close/>
+                <a:lnTo>
+                  <a:pt x="618236" y="618236"/>
+                </a:lnTo>
+                <a:close/>
+                <a:lnTo>
+                  <a:pt x="620146" y="620146"/>
+                </a:lnTo>
+                <a:close/>
+                <a:lnTo>
+                  <a:pt x="622057" y="622057"/>
+                </a:lnTo>
+                <a:close/>
+                <a:lnTo>
+                  <a:pt x="623968" y="623968"/>
+                </a:lnTo>
+                <a:close/>
+                <a:lnTo>
+                  <a:pt x="625879" y="625879"/>
+                </a:lnTo>
+                <a:close/>
+                <a:lnTo>
+                  <a:pt x="627790" y="627790"/>
+                </a:lnTo>
+                <a:close/>
+                <a:lnTo>
+                  <a:pt x="629701" y="629701"/>
+                </a:lnTo>
+                <a:close/>
+                <a:lnTo>
+                  <a:pt x="631612" y="631612"/>
+                </a:lnTo>
+                <a:close/>
+                <a:lnTo>
+                  <a:pt x="633523" y="633523"/>
+                </a:lnTo>
+                <a:close/>
+                <a:lnTo>
+                  <a:pt x="635434" y="635434"/>
+                </a:lnTo>
+                <a:close/>
+                <a:lnTo>
+                  <a:pt x="637345" y="637345"/>
+                </a:lnTo>
+                <a:close/>
+                <a:lnTo>
+                  <a:pt x="639255" y="639255"/>
+                </a:lnTo>
+                <a:close/>
+                <a:lnTo>
+                  <a:pt x="641164" y="641164"/>
+                </a:lnTo>
+                <a:close/>
+                <a:lnTo>
+                  <a:pt x="643073" y="643073"/>
+                </a:lnTo>
+                <a:close/>
+                <a:lnTo>
+                  <a:pt x="644981" y="644981"/>
+                </a:lnTo>
+                <a:close/>
+                <a:lnTo>
+                  <a:pt x="646889" y="646889"/>
+                </a:lnTo>
+                <a:close/>
+                <a:lnTo>
+                  <a:pt x="648796" y="648796"/>
+                </a:lnTo>
+                <a:close/>
+                <a:lnTo>
+                  <a:pt x="650701" y="650701"/>
+                </a:lnTo>
+                <a:close/>
+                <a:lnTo>
+                  <a:pt x="652606" y="652606"/>
+                </a:lnTo>
+                <a:close/>
+                <a:lnTo>
+                  <a:pt x="654511" y="654511"/>
+                </a:lnTo>
+                <a:close/>
+                <a:lnTo>
+                  <a:pt x="656416" y="656416"/>
+                </a:lnTo>
+                <a:close/>
+                <a:lnTo>
+                  <a:pt x="658320" y="658320"/>
+                </a:lnTo>
+                <a:close/>
+                <a:lnTo>
+                  <a:pt x="660224" y="660224"/>
+                </a:lnTo>
+                <a:close/>
+                <a:lnTo>
+                  <a:pt x="662129" y="662129"/>
+                </a:lnTo>
+                <a:close/>
+                <a:lnTo>
+                  <a:pt x="664035" y="664035"/>
+                </a:lnTo>
+                <a:close/>
+                <a:lnTo>
+                  <a:pt x="665940" y="665940"/>
+                </a:lnTo>
+                <a:close/>
+                <a:lnTo>
+                  <a:pt x="667847" y="667847"/>
+                </a:lnTo>
+                <a:close/>
+                <a:lnTo>
+                  <a:pt x="669755" y="669755"/>
+                </a:lnTo>
+                <a:close/>
+                <a:lnTo>
+                  <a:pt x="671663" y="671663"/>
+                </a:lnTo>
+                <a:close/>
+                <a:lnTo>
+                  <a:pt x="673572" y="673572"/>
+                </a:lnTo>
+                <a:close/>
+                <a:lnTo>
+                  <a:pt x="675482" y="675482"/>
+                </a:lnTo>
+                <a:close/>
+                <a:lnTo>
+                  <a:pt x="677392" y="677392"/>
+                </a:lnTo>
+                <a:close/>
+                <a:lnTo>
+                  <a:pt x="679302" y="679302"/>
+                </a:lnTo>
+                <a:close/>
+                <a:lnTo>
+                  <a:pt x="681213" y="681213"/>
+                </a:lnTo>
+                <a:close/>
+                <a:lnTo>
+                  <a:pt x="683124" y="683124"/>
+                </a:lnTo>
+                <a:close/>
+                <a:lnTo>
+                  <a:pt x="685036" y="685036"/>
+                </a:lnTo>
+                <a:close/>
+                <a:lnTo>
+                  <a:pt x="686947" y="686947"/>
+                </a:lnTo>
+                <a:close/>
+                <a:lnTo>
+                  <a:pt x="688858" y="688858"/>
+                </a:lnTo>
+                <a:close/>
+                <a:lnTo>
+                  <a:pt x="690769" y="690769"/>
+                </a:lnTo>
+                <a:close/>
+                <a:lnTo>
+                  <a:pt x="692680" y="692680"/>
+                </a:lnTo>
+                <a:close/>
+                <a:lnTo>
+                  <a:pt x="694590" y="694590"/>
+                </a:lnTo>
+                <a:close/>
+                <a:lnTo>
+                  <a:pt x="696500" y="696500"/>
+                </a:lnTo>
+                <a:close/>
+                <a:lnTo>
+                  <a:pt x="698410" y="698410"/>
+                </a:lnTo>
+                <a:close/>
+                <a:lnTo>
+                  <a:pt x="700319" y="700319"/>
+                </a:lnTo>
+                <a:close/>
+                <a:lnTo>
+                  <a:pt x="702227" y="702227"/>
+                </a:lnTo>
+                <a:close/>
+                <a:lnTo>
+                  <a:pt x="704134" y="704134"/>
+                </a:lnTo>
+                <a:close/>
+                <a:lnTo>
+                  <a:pt x="706041" y="706041"/>
+                </a:lnTo>
+                <a:close/>
+                <a:lnTo>
+                  <a:pt x="707947" y="707947"/>
+                </a:lnTo>
+                <a:close/>
+                <a:lnTo>
+                  <a:pt x="709852" y="709852"/>
+                </a:lnTo>
+                <a:close/>
+                <a:lnTo>
+                  <a:pt x="711756" y="711756"/>
+                </a:lnTo>
+                <a:close/>
+                <a:lnTo>
+                  <a:pt x="713661" y="713661"/>
+                </a:lnTo>
+                <a:close/>
+                <a:lnTo>
+                  <a:pt x="715565" y="715565"/>
+                </a:lnTo>
+                <a:close/>
+                <a:lnTo>
+                  <a:pt x="717470" y="717470"/>
+                </a:lnTo>
+                <a:close/>
+                <a:lnTo>
+                  <a:pt x="719375" y="719375"/>
+                </a:lnTo>
+                <a:close/>
+                <a:lnTo>
+                  <a:pt x="721280" y="721280"/>
+                </a:lnTo>
+                <a:close/>
+                <a:lnTo>
+                  <a:pt x="723186" y="723186"/>
+                </a:lnTo>
+                <a:close/>
+                <a:lnTo>
+                  <a:pt x="725092" y="725092"/>
+                </a:lnTo>
+                <a:close/>
+                <a:lnTo>
+                  <a:pt x="727000" y="727000"/>
+                </a:lnTo>
+                <a:close/>
+                <a:lnTo>
+                  <a:pt x="728909" y="728909"/>
+                </a:lnTo>
+                <a:close/>
+                <a:lnTo>
+                  <a:pt x="730818" y="730818"/>
+                </a:lnTo>
+                <a:close/>
+                <a:lnTo>
+                  <a:pt x="732727" y="732727"/>
+                </a:lnTo>
+                <a:close/>
+                <a:lnTo>
+                  <a:pt x="734637" y="734637"/>
+                </a:lnTo>
+                <a:close/>
+                <a:lnTo>
+                  <a:pt x="736548" y="736548"/>
+                </a:lnTo>
+                <a:close/>
+                <a:lnTo>
+                  <a:pt x="738459" y="738459"/>
+                </a:lnTo>
+                <a:close/>
+                <a:lnTo>
+                  <a:pt x="740370" y="740370"/>
+                </a:lnTo>
+                <a:close/>
+                <a:lnTo>
+                  <a:pt x="742281" y="742281"/>
+                </a:lnTo>
+                <a:close/>
+                <a:lnTo>
+                  <a:pt x="744192" y="744192"/>
+                </a:lnTo>
+                <a:close/>
+                <a:lnTo>
+                  <a:pt x="746103" y="746103"/>
+                </a:lnTo>
+                <a:close/>
+                <a:lnTo>
+                  <a:pt x="748014" y="748014"/>
+                </a:lnTo>
+                <a:close/>
+                <a:lnTo>
+                  <a:pt x="749925" y="749925"/>
+                </a:lnTo>
+                <a:close/>
+                <a:lnTo>
+                  <a:pt x="751836" y="751836"/>
+                </a:lnTo>
+                <a:close/>
+                <a:lnTo>
+                  <a:pt x="753746" y="753746"/>
+                </a:lnTo>
+                <a:close/>
+                <a:lnTo>
+                  <a:pt x="755655" y="755655"/>
+                </a:lnTo>
+                <a:close/>
+                <a:lnTo>
+                  <a:pt x="757564" y="757564"/>
+                </a:lnTo>
+                <a:close/>
+                <a:lnTo>
+                  <a:pt x="759472" y="759472"/>
+                </a:lnTo>
+                <a:close/>
+                <a:lnTo>
+                  <a:pt x="761380" y="761380"/>
+                </a:lnTo>
+                <a:close/>
+                <a:lnTo>
+                  <a:pt x="763286" y="763286"/>
+                </a:lnTo>
+                <a:close/>
+                <a:lnTo>
+                  <a:pt x="765192" y="765192"/>
+                </a:lnTo>
+                <a:close/>
+                <a:lnTo>
+                  <a:pt x="767097" y="767097"/>
+                </a:lnTo>
+                <a:close/>
+                <a:lnTo>
+                  <a:pt x="769002" y="769002"/>
+                </a:lnTo>
+                <a:close/>
+                <a:lnTo>
+                  <a:pt x="770906" y="770906"/>
+                </a:lnTo>
+                <a:close/>
+                <a:lnTo>
+                  <a:pt x="772810" y="772810"/>
+                </a:lnTo>
+                <a:close/>
+                <a:lnTo>
+                  <a:pt x="774715" y="774715"/>
+                </a:lnTo>
+                <a:close/>
+                <a:lnTo>
+                  <a:pt x="776620" y="776620"/>
+                </a:lnTo>
+                <a:close/>
+                <a:lnTo>
+                  <a:pt x="778525" y="778525"/>
+                </a:lnTo>
+                <a:close/>
+                <a:lnTo>
+                  <a:pt x="780431" y="780431"/>
+                </a:lnTo>
+                <a:close/>
+                <a:lnTo>
+                  <a:pt x="782338" y="782338"/>
+                </a:lnTo>
+                <a:close/>
+                <a:lnTo>
+                  <a:pt x="784246" y="784246"/>
+                </a:lnTo>
+                <a:close/>
+                <a:lnTo>
+                  <a:pt x="786154" y="786154"/>
+                </a:lnTo>
+                <a:close/>
+                <a:lnTo>
+                  <a:pt x="788063" y="788063"/>
+                </a:lnTo>
+                <a:close/>
+                <a:lnTo>
+                  <a:pt x="789973" y="789973"/>
+                </a:lnTo>
+                <a:close/>
+                <a:lnTo>
+                  <a:pt x="791883" y="791883"/>
+                </a:lnTo>
+                <a:close/>
+                <a:lnTo>
+                  <a:pt x="793793" y="793793"/>
+                </a:lnTo>
+                <a:close/>
+                <a:lnTo>
+                  <a:pt x="795704" y="795704"/>
+                </a:lnTo>
+                <a:close/>
+                <a:lnTo>
+                  <a:pt x="797615" y="797615"/>
+                </a:lnTo>
+                <a:close/>
+                <a:lnTo>
+                  <a:pt x="799527" y="799527"/>
+                </a:lnTo>
+                <a:close/>
+                <a:lnTo>
+                  <a:pt x="801438" y="801438"/>
+                </a:lnTo>
+                <a:close/>
+                <a:lnTo>
+                  <a:pt x="803349" y="803349"/>
+                </a:lnTo>
+                <a:close/>
+                <a:lnTo>
+                  <a:pt x="805260" y="805260"/>
+                </a:lnTo>
+                <a:close/>
+                <a:lnTo>
+                  <a:pt x="807171" y="807171"/>
+                </a:lnTo>
+                <a:close/>
+                <a:lnTo>
+                  <a:pt x="809081" y="809081"/>
+                </a:lnTo>
+                <a:close/>
+                <a:lnTo>
+                  <a:pt x="810991" y="810991"/>
+                </a:lnTo>
+                <a:close/>
+                <a:lnTo>
+                  <a:pt x="812901" y="812901"/>
+                </a:lnTo>
+                <a:close/>
+                <a:lnTo>
+                  <a:pt x="814810" y="814810"/>
+                </a:lnTo>
+                <a:close/>
+                <a:lnTo>
+                  <a:pt x="816718" y="816718"/>
+                </a:lnTo>
+                <a:close/>
+                <a:lnTo>
+                  <a:pt x="818625" y="818625"/>
+                </a:lnTo>
+                <a:close/>
+                <a:lnTo>
+                  <a:pt x="820531" y="820531"/>
+                </a:lnTo>
+                <a:close/>
+                <a:lnTo>
+                  <a:pt x="822437" y="822437"/>
+                </a:lnTo>
+                <a:close/>
+                <a:lnTo>
+                  <a:pt x="824342" y="824342"/>
+                </a:lnTo>
+                <a:close/>
+                <a:lnTo>
+                  <a:pt x="826247" y="826247"/>
+                </a:lnTo>
+                <a:close/>
+                <a:lnTo>
+                  <a:pt x="828151" y="828151"/>
+                </a:lnTo>
+                <a:close/>
+                <a:lnTo>
+                  <a:pt x="830056" y="830056"/>
+                </a:lnTo>
+                <a:close/>
+                <a:lnTo>
+                  <a:pt x="831960" y="831960"/>
+                </a:lnTo>
+                <a:close/>
+                <a:lnTo>
+                  <a:pt x="833865" y="833865"/>
+                </a:lnTo>
+                <a:close/>
+                <a:lnTo>
+                  <a:pt x="835770" y="835770"/>
+                </a:lnTo>
+                <a:close/>
+                <a:lnTo>
+                  <a:pt x="837676" y="837676"/>
+                </a:lnTo>
+                <a:close/>
+                <a:lnTo>
+                  <a:pt x="839583" y="839583"/>
+                </a:lnTo>
+                <a:close/>
+                <a:lnTo>
+                  <a:pt x="841491" y="841491"/>
+                </a:lnTo>
+                <a:close/>
+                <a:lnTo>
+                  <a:pt x="843399" y="843399"/>
+                </a:lnTo>
+                <a:close/>
+                <a:lnTo>
+                  <a:pt x="845309" y="845309"/>
+                </a:lnTo>
+                <a:close/>
+                <a:lnTo>
+                  <a:pt x="847218" y="847218"/>
+                </a:lnTo>
+                <a:close/>
+                <a:lnTo>
+                  <a:pt x="849128" y="849128"/>
+                </a:lnTo>
+                <a:close/>
+                <a:lnTo>
+                  <a:pt x="851039" y="851039"/>
+                </a:lnTo>
+                <a:close/>
+                <a:lnTo>
+                  <a:pt x="852950" y="852950"/>
+                </a:lnTo>
+                <a:close/>
+                <a:lnTo>
+                  <a:pt x="854861" y="854861"/>
+                </a:lnTo>
+                <a:close/>
+                <a:lnTo>
+                  <a:pt x="856772" y="856772"/>
+                </a:lnTo>
+                <a:close/>
+                <a:lnTo>
+                  <a:pt x="858683" y="858683"/>
+                </a:lnTo>
+                <a:close/>
+                <a:lnTo>
+                  <a:pt x="860595" y="860595"/>
+                </a:lnTo>
+                <a:close/>
+                <a:lnTo>
+                  <a:pt x="862506" y="862506"/>
+                </a:lnTo>
+                <a:close/>
+                <a:lnTo>
+                  <a:pt x="864416" y="864416"/>
+                </a:lnTo>
+                <a:close/>
+                <a:lnTo>
+                  <a:pt x="866327" y="866327"/>
+                </a:lnTo>
+                <a:close/>
+                <a:lnTo>
+                  <a:pt x="868237" y="868237"/>
+                </a:lnTo>
+                <a:close/>
+                <a:lnTo>
+                  <a:pt x="870146" y="870146"/>
+                </a:lnTo>
+                <a:close/>
+                <a:lnTo>
+                  <a:pt x="872055" y="872055"/>
+                </a:lnTo>
+                <a:close/>
+                <a:lnTo>
+                  <a:pt x="873963" y="873963"/>
+                </a:lnTo>
+                <a:close/>
+                <a:lnTo>
+                  <a:pt x="875870" y="875870"/>
+                </a:lnTo>
+                <a:close/>
+                <a:lnTo>
+                  <a:pt x="877777" y="877777"/>
+                </a:lnTo>
+                <a:close/>
+                <a:lnTo>
+                  <a:pt x="879682" y="879682"/>
+                </a:lnTo>
+                <a:close/>
+                <a:lnTo>
+                  <a:pt x="881587" y="881587"/>
+                </a:lnTo>
+                <a:close/>
+                <a:lnTo>
+                  <a:pt x="883492" y="883492"/>
+                </a:lnTo>
+                <a:close/>
+                <a:lnTo>
+                  <a:pt x="885397" y="885397"/>
+                </a:lnTo>
+                <a:close/>
+                <a:lnTo>
+                  <a:pt x="887301" y="887301"/>
+                </a:lnTo>
+                <a:close/>
+                <a:lnTo>
+                  <a:pt x="889205" y="889205"/>
+                </a:lnTo>
+                <a:close/>
+                <a:lnTo>
+                  <a:pt x="891110" y="891110"/>
+                </a:lnTo>
+                <a:close/>
+                <a:lnTo>
+                  <a:pt x="893016" y="893016"/>
+                </a:lnTo>
+                <a:close/>
+                <a:lnTo>
+                  <a:pt x="894922" y="894922"/>
+                </a:lnTo>
+                <a:close/>
+                <a:lnTo>
+                  <a:pt x="896829" y="896829"/>
+                </a:lnTo>
+                <a:close/>
+                <a:lnTo>
+                  <a:pt x="898736" y="898736"/>
+                </a:lnTo>
+                <a:close/>
+                <a:lnTo>
+                  <a:pt x="900645" y="900645"/>
+                </a:lnTo>
+                <a:close/>
+                <a:lnTo>
+                  <a:pt x="902554" y="902554"/>
+                </a:lnTo>
+                <a:close/>
+                <a:lnTo>
+                  <a:pt x="904464" y="904464"/>
+                </a:lnTo>
+                <a:close/>
+                <a:lnTo>
+                  <a:pt x="906374" y="906374"/>
+                </a:lnTo>
+                <a:close/>
+                <a:lnTo>
+                  <a:pt x="908285" y="908285"/>
+                </a:lnTo>
+                <a:close/>
+                <a:lnTo>
+                  <a:pt x="910195" y="910195"/>
+                </a:lnTo>
+                <a:close/>
+                <a:lnTo>
+                  <a:pt x="912107" y="912107"/>
+                </a:lnTo>
+                <a:close/>
+                <a:lnTo>
+                  <a:pt x="914018" y="914018"/>
+                </a:lnTo>
+                <a:close/>
+                <a:lnTo>
+                  <a:pt x="915929" y="915929"/>
+                </a:lnTo>
+                <a:close/>
+                <a:lnTo>
+                  <a:pt x="917840" y="917840"/>
+                </a:lnTo>
+                <a:close/>
+                <a:lnTo>
+                  <a:pt x="919751" y="919751"/>
+                </a:lnTo>
+                <a:close/>
+                <a:lnTo>
+                  <a:pt x="921662" y="921662"/>
+                </a:lnTo>
+                <a:close/>
+                <a:lnTo>
+                  <a:pt x="923572" y="923572"/>
+                </a:lnTo>
+                <a:close/>
+                <a:lnTo>
+                  <a:pt x="925482" y="925482"/>
+                </a:lnTo>
+                <a:close/>
+                <a:lnTo>
+                  <a:pt x="927392" y="927392"/>
+                </a:lnTo>
+                <a:close/>
+                <a:lnTo>
+                  <a:pt x="929300" y="929300"/>
+                </a:lnTo>
+                <a:close/>
+                <a:lnTo>
+                  <a:pt x="931208" y="931208"/>
+                </a:lnTo>
+                <a:close/>
+                <a:lnTo>
+                  <a:pt x="933116" y="933116"/>
+                </a:lnTo>
+                <a:close/>
+                <a:lnTo>
+                  <a:pt x="935022" y="935022"/>
+                </a:lnTo>
+                <a:close/>
+                <a:lnTo>
+                  <a:pt x="936928" y="936928"/>
+                </a:lnTo>
+                <a:close/>
+                <a:lnTo>
+                  <a:pt x="938833" y="938833"/>
+                </a:lnTo>
+                <a:close/>
+                <a:lnTo>
+                  <a:pt x="940737" y="940737"/>
+                </a:lnTo>
+                <a:close/>
+                <a:lnTo>
+                  <a:pt x="942642" y="942642"/>
+                </a:lnTo>
+                <a:close/>
+                <a:lnTo>
+                  <a:pt x="944546" y="944546"/>
+                </a:lnTo>
+                <a:close/>
+                <a:lnTo>
+                  <a:pt x="946451" y="946451"/>
+                </a:lnTo>
+                <a:close/>
+                <a:lnTo>
+                  <a:pt x="948356" y="948356"/>
+                </a:lnTo>
+                <a:close/>
+                <a:lnTo>
+                  <a:pt x="950261" y="950261"/>
+                </a:lnTo>
+                <a:close/>
+                <a:lnTo>
+                  <a:pt x="952167" y="952167"/>
+                </a:lnTo>
+                <a:close/>
+                <a:lnTo>
+                  <a:pt x="954074" y="954074"/>
+                </a:lnTo>
+                <a:close/>
+                <a:lnTo>
+                  <a:pt x="955982" y="955982"/>
+                </a:lnTo>
+                <a:close/>
+                <a:lnTo>
+                  <a:pt x="957890" y="957890"/>
+                </a:lnTo>
+                <a:close/>
+                <a:lnTo>
+                  <a:pt x="959799" y="959799"/>
+                </a:lnTo>
+                <a:close/>
+                <a:lnTo>
+                  <a:pt x="961709" y="961709"/>
+                </a:lnTo>
+                <a:close/>
+                <a:lnTo>
+                  <a:pt x="963619" y="963619"/>
+                </a:lnTo>
+                <a:close/>
+                <a:lnTo>
+                  <a:pt x="965530" y="965530"/>
+                </a:lnTo>
+                <a:close/>
+                <a:lnTo>
+                  <a:pt x="967441" y="967441"/>
+                </a:lnTo>
+                <a:close/>
+                <a:lnTo>
+                  <a:pt x="969352" y="969352"/>
+                </a:lnTo>
+                <a:close/>
+                <a:lnTo>
+                  <a:pt x="971263" y="971263"/>
+                </a:lnTo>
+                <a:close/>
+                <a:lnTo>
+                  <a:pt x="973175" y="973175"/>
+                </a:lnTo>
+                <a:close/>
+                <a:lnTo>
+                  <a:pt x="975086" y="975086"/>
+                </a:lnTo>
+                <a:close/>
+                <a:lnTo>
+                  <a:pt x="976997" y="976997"/>
+                </a:lnTo>
+                <a:close/>
+                <a:lnTo>
+                  <a:pt x="978907" y="978907"/>
+                </a:lnTo>
+                <a:close/>
+                <a:lnTo>
+                  <a:pt x="980818" y="980818"/>
+                </a:lnTo>
+                <a:close/>
+                <a:lnTo>
+                  <a:pt x="982728" y="982728"/>
+                </a:lnTo>
+                <a:close/>
+                <a:lnTo>
+                  <a:pt x="984637" y="984637"/>
+                </a:lnTo>
+                <a:close/>
+                <a:lnTo>
+                  <a:pt x="986546" y="986546"/>
+                </a:lnTo>
+                <a:close/>
+                <a:lnTo>
+                  <a:pt x="988454" y="988454"/>
+                </a:lnTo>
+                <a:close/>
+                <a:lnTo>
+                  <a:pt x="990361" y="990361"/>
+                </a:lnTo>
+                <a:close/>
+                <a:lnTo>
+                  <a:pt x="992267" y="992267"/>
+                </a:lnTo>
+                <a:close/>
+                <a:lnTo>
+                  <a:pt x="994173" y="994173"/>
+                </a:lnTo>
+                <a:close/>
+                <a:lnTo>
+                  <a:pt x="996078" y="996078"/>
+                </a:lnTo>
+                <a:close/>
+                <a:lnTo>
+                  <a:pt x="997983" y="997983"/>
+                </a:lnTo>
+                <a:close/>
+                <a:lnTo>
+                  <a:pt x="999887" y="999887"/>
+                </a:lnTo>
+                <a:close/>
+                <a:lnTo>
+                  <a:pt x="1001791" y="1001791"/>
+                </a:lnTo>
+                <a:close/>
+                <a:lnTo>
+                  <a:pt x="1003696" y="1003696"/>
+                </a:lnTo>
+                <a:close/>
+                <a:lnTo>
+                  <a:pt x="1005601" y="1005601"/>
+                </a:lnTo>
+                <a:close/>
+                <a:lnTo>
+                  <a:pt x="1007506" y="1007506"/>
+                </a:lnTo>
+                <a:close/>
+                <a:lnTo>
+                  <a:pt x="1009412" y="1009412"/>
+                </a:lnTo>
+                <a:close/>
+                <a:lnTo>
+                  <a:pt x="1011319" y="1011319"/>
+                </a:lnTo>
+                <a:close/>
+                <a:lnTo>
+                  <a:pt x="1013227" y="1013227"/>
+                </a:lnTo>
+                <a:close/>
+                <a:lnTo>
+                  <a:pt x="1015136" y="1015136"/>
+                </a:lnTo>
+                <a:close/>
+                <a:lnTo>
+                  <a:pt x="1017045" y="1017045"/>
+                </a:lnTo>
+                <a:close/>
+                <a:lnTo>
+                  <a:pt x="1018955" y="1018955"/>
+                </a:lnTo>
+                <a:close/>
+                <a:lnTo>
+                  <a:pt x="1020865" y="1020865"/>
+                </a:lnTo>
+                <a:close/>
+                <a:lnTo>
+                  <a:pt x="1022776" y="1022776"/>
+                </a:lnTo>
+                <a:close/>
+                <a:lnTo>
+                  <a:pt x="1024687" y="1024687"/>
+                </a:lnTo>
+                <a:close/>
+                <a:lnTo>
+                  <a:pt x="1026598" y="1026598"/>
+                </a:lnTo>
+                <a:close/>
+                <a:lnTo>
+                  <a:pt x="1028509" y="1028509"/>
+                </a:lnTo>
+                <a:close/>
+                <a:lnTo>
+                  <a:pt x="1030420" y="1030420"/>
+                </a:lnTo>
+                <a:close/>
+                <a:lnTo>
+                  <a:pt x="1032331" y="1032331"/>
+                </a:lnTo>
+                <a:close/>
+                <a:lnTo>
+                  <a:pt x="1034242" y="1034242"/>
+                </a:lnTo>
+                <a:close/>
+                <a:lnTo>
+                  <a:pt x="1036153" y="1036153"/>
+                </a:lnTo>
+                <a:close/>
+                <a:lnTo>
+                  <a:pt x="1038063" y="1038063"/>
+                </a:lnTo>
+                <a:close/>
+                <a:lnTo>
+                  <a:pt x="1039973" y="1039973"/>
+                </a:lnTo>
+                <a:close/>
+                <a:lnTo>
+                  <a:pt x="1041882" y="1041882"/>
+                </a:lnTo>
+                <a:close/>
+                <a:lnTo>
+                  <a:pt x="1043791" y="1043791"/>
+                </a:lnTo>
+                <a:close/>
+                <a:lnTo>
+                  <a:pt x="1045699" y="1045699"/>
+                </a:lnTo>
+                <a:close/>
+                <a:lnTo>
+                  <a:pt x="1047606" y="1047606"/>
+                </a:lnTo>
+                <a:close/>
+                <a:lnTo>
+                  <a:pt x="1049513" y="1049513"/>
+                </a:lnTo>
+                <a:close/>
+                <a:lnTo>
+                  <a:pt x="1051418" y="1051418"/>
+                </a:lnTo>
+                <a:close/>
+                <a:lnTo>
+                  <a:pt x="1053323" y="1053323"/>
+                </a:lnTo>
+                <a:close/>
+                <a:lnTo>
+                  <a:pt x="1055228" y="1055228"/>
+                </a:lnTo>
+                <a:close/>
+                <a:lnTo>
+                  <a:pt x="1057132" y="1057132"/>
+                </a:lnTo>
+                <a:close/>
+                <a:lnTo>
+                  <a:pt x="1059037" y="1059037"/>
+                </a:lnTo>
+                <a:close/>
+                <a:lnTo>
+                  <a:pt x="1060941" y="1060941"/>
+                </a:lnTo>
+                <a:close/>
+                <a:lnTo>
+                  <a:pt x="1062846" y="1062846"/>
+                </a:lnTo>
+                <a:close/>
+                <a:lnTo>
+                  <a:pt x="1064751" y="1064751"/>
+                </a:lnTo>
+                <a:close/>
+                <a:lnTo>
+                  <a:pt x="1066658" y="1066658"/>
+                </a:lnTo>
+                <a:close/>
+                <a:lnTo>
+                  <a:pt x="1068565" y="1068565"/>
+                </a:lnTo>
+                <a:close/>
+                <a:lnTo>
+                  <a:pt x="1070473" y="1070473"/>
+                </a:lnTo>
+                <a:close/>
+                <a:lnTo>
+                  <a:pt x="1072381" y="1072381"/>
+                </a:lnTo>
+                <a:close/>
+                <a:lnTo>
+                  <a:pt x="1074291" y="1074291"/>
+                </a:lnTo>
+                <a:close/>
+                <a:lnTo>
+                  <a:pt x="1076200" y="1076200"/>
+                </a:lnTo>
+                <a:close/>
+                <a:lnTo>
+                  <a:pt x="1078111" y="1078111"/>
+                </a:lnTo>
+                <a:close/>
+                <a:lnTo>
+                  <a:pt x="1080021" y="1080021"/>
+                </a:lnTo>
+                <a:close/>
+                <a:lnTo>
+                  <a:pt x="1081932" y="1081932"/>
+                </a:lnTo>
+                <a:close/>
+                <a:lnTo>
+                  <a:pt x="1083843" y="1083843"/>
+                </a:lnTo>
+                <a:close/>
+                <a:lnTo>
+                  <a:pt x="1085754" y="1085754"/>
+                </a:lnTo>
+                <a:close/>
+                <a:lnTo>
+                  <a:pt x="1087666" y="1087666"/>
+                </a:lnTo>
+                <a:close/>
+                <a:lnTo>
+                  <a:pt x="1089577" y="1089577"/>
+                </a:lnTo>
+                <a:close/>
+                <a:lnTo>
+                  <a:pt x="1091487" y="1091487"/>
+                </a:lnTo>
+                <a:close/>
+                <a:lnTo>
+                  <a:pt x="1093398" y="1093398"/>
+                </a:lnTo>
+                <a:close/>
+                <a:lnTo>
+                  <a:pt x="1095308" y="1095308"/>
+                </a:lnTo>
+                <a:close/>
+                <a:lnTo>
+                  <a:pt x="1097218" y="1097218"/>
+                </a:lnTo>
+                <a:close/>
+                <a:lnTo>
+                  <a:pt x="1099127" y="1099127"/>
+                </a:lnTo>
+                <a:close/>
+                <a:lnTo>
+                  <a:pt x="1101036" y="1101036"/>
+                </a:lnTo>
+                <a:close/>
+                <a:lnTo>
+                  <a:pt x="1102944" y="1102944"/>
+                </a:lnTo>
+                <a:close/>
+                <a:lnTo>
+                  <a:pt x="1104852" y="1104852"/>
+                </a:lnTo>
+                <a:close/>
+                <a:lnTo>
+                  <a:pt x="1106758" y="1106758"/>
+                </a:lnTo>
+                <a:close/>
+                <a:lnTo>
+                  <a:pt x="1108664" y="1108664"/>
+                </a:lnTo>
+                <a:close/>
+                <a:lnTo>
+                  <a:pt x="1110570" y="1110570"/>
+                </a:lnTo>
+                <a:close/>
+                <a:lnTo>
+                  <a:pt x="1112475" y="1112475"/>
+                </a:lnTo>
+                <a:close/>
+                <a:lnTo>
+                  <a:pt x="1114379" y="1114379"/>
+                </a:lnTo>
+                <a:close/>
+                <a:lnTo>
+                  <a:pt x="1116284" y="1116284"/>
+                </a:lnTo>
+                <a:close/>
+                <a:lnTo>
+                  <a:pt x="1118189" y="1118189"/>
+                </a:lnTo>
+                <a:close/>
+                <a:lnTo>
+                  <a:pt x="1120093" y="1120093"/>
+                </a:lnTo>
+                <a:close/>
+                <a:lnTo>
+                  <a:pt x="1121998" y="1121998"/>
+                </a:lnTo>
+                <a:close/>
+                <a:lnTo>
+                  <a:pt x="1123903" y="1123903"/>
+                </a:lnTo>
+                <a:close/>
+                <a:lnTo>
+                  <a:pt x="1125809" y="1125809"/>
+                </a:lnTo>
+                <a:close/>
+                <a:lnTo>
+                  <a:pt x="1127715" y="1127715"/>
+                </a:lnTo>
+                <a:close/>
+                <a:lnTo>
+                  <a:pt x="1129622" y="1129622"/>
+                </a:lnTo>
+                <a:close/>
+                <a:lnTo>
+                  <a:pt x="1131529" y="1131529"/>
+                </a:lnTo>
+                <a:close/>
+                <a:lnTo>
+                  <a:pt x="1133438" y="1133438"/>
+                </a:lnTo>
+                <a:close/>
+                <a:lnTo>
+                  <a:pt x="1135348" y="1135348"/>
+                </a:lnTo>
+                <a:close/>
+                <a:lnTo>
+                  <a:pt x="1137259" y="1137259"/>
+                </a:lnTo>
+                <a:close/>
+                <a:lnTo>
+                  <a:pt x="1139171" y="1139171"/>
+                </a:lnTo>
+                <a:close/>
+                <a:lnTo>
+                  <a:pt x="1141085" y="1141085"/>
+                </a:lnTo>
+                <a:close/>
+                <a:lnTo>
+                  <a:pt x="1143000" y="1143000"/>
                 </a:lnTo>
                 <a:close/>
               </a:path>
@@ -4438,1195 +5638,2395 @@
                   <a:pt x="0" y="685800"/>
                 </a:moveTo>
                 <a:lnTo>
-                  <a:pt x="2294" y="683506"/>
-                </a:lnTo>
-                <a:close/>
-                <a:lnTo>
-                  <a:pt x="4587" y="681213"/>
-                </a:lnTo>
-                <a:close/>
-                <a:lnTo>
-                  <a:pt x="6881" y="678919"/>
-                </a:lnTo>
-                <a:close/>
-                <a:lnTo>
-                  <a:pt x="9175" y="676625"/>
-                </a:lnTo>
-                <a:close/>
-                <a:lnTo>
-                  <a:pt x="11468" y="674332"/>
-                </a:lnTo>
-                <a:close/>
-                <a:lnTo>
-                  <a:pt x="13762" y="672038"/>
-                </a:lnTo>
-                <a:close/>
-                <a:lnTo>
-                  <a:pt x="16056" y="669744"/>
-                </a:lnTo>
-                <a:close/>
-                <a:lnTo>
-                  <a:pt x="18349" y="667451"/>
-                </a:lnTo>
-                <a:close/>
-                <a:lnTo>
-                  <a:pt x="20643" y="665157"/>
-                </a:lnTo>
-                <a:close/>
-                <a:lnTo>
-                  <a:pt x="22936" y="662864"/>
-                </a:lnTo>
-                <a:close/>
-                <a:lnTo>
-                  <a:pt x="25230" y="660570"/>
-                </a:lnTo>
-                <a:close/>
-                <a:lnTo>
-                  <a:pt x="27524" y="658276"/>
-                </a:lnTo>
-                <a:close/>
-                <a:lnTo>
-                  <a:pt x="29817" y="655983"/>
-                </a:lnTo>
-                <a:close/>
-                <a:lnTo>
-                  <a:pt x="32111" y="653689"/>
-                </a:lnTo>
-                <a:close/>
-                <a:lnTo>
-                  <a:pt x="34405" y="651395"/>
-                </a:lnTo>
-                <a:close/>
-                <a:lnTo>
-                  <a:pt x="36698" y="649102"/>
-                </a:lnTo>
-                <a:close/>
-                <a:lnTo>
-                  <a:pt x="38992" y="646808"/>
-                </a:lnTo>
-                <a:close/>
-                <a:lnTo>
-                  <a:pt x="41286" y="644514"/>
-                </a:lnTo>
-                <a:close/>
-                <a:lnTo>
-                  <a:pt x="43579" y="642221"/>
-                </a:lnTo>
-                <a:close/>
-                <a:lnTo>
-                  <a:pt x="45873" y="639927"/>
-                </a:lnTo>
-                <a:close/>
-                <a:lnTo>
-                  <a:pt x="48167" y="637633"/>
-                </a:lnTo>
-                <a:close/>
-                <a:lnTo>
-                  <a:pt x="50460" y="635340"/>
-                </a:lnTo>
-                <a:close/>
-                <a:lnTo>
-                  <a:pt x="52754" y="633046"/>
-                </a:lnTo>
-                <a:close/>
-                <a:lnTo>
-                  <a:pt x="55047" y="630753"/>
-                </a:lnTo>
-                <a:close/>
-                <a:lnTo>
-                  <a:pt x="57341" y="628459"/>
-                </a:lnTo>
-                <a:close/>
-                <a:lnTo>
-                  <a:pt x="59635" y="626165"/>
-                </a:lnTo>
-                <a:close/>
-                <a:lnTo>
-                  <a:pt x="61928" y="623872"/>
-                </a:lnTo>
-                <a:close/>
-                <a:lnTo>
-                  <a:pt x="64222" y="621578"/>
-                </a:lnTo>
-                <a:close/>
-                <a:lnTo>
-                  <a:pt x="66516" y="619284"/>
-                </a:lnTo>
-                <a:close/>
-                <a:lnTo>
-                  <a:pt x="68809" y="616991"/>
-                </a:lnTo>
-                <a:close/>
-                <a:lnTo>
-                  <a:pt x="71103" y="614697"/>
-                </a:lnTo>
-                <a:close/>
-                <a:lnTo>
-                  <a:pt x="73397" y="612403"/>
-                </a:lnTo>
-                <a:close/>
-                <a:lnTo>
-                  <a:pt x="75690" y="610110"/>
-                </a:lnTo>
-                <a:close/>
-                <a:lnTo>
-                  <a:pt x="77984" y="607816"/>
-                </a:lnTo>
-                <a:close/>
-                <a:lnTo>
-                  <a:pt x="80278" y="605522"/>
-                </a:lnTo>
-                <a:close/>
-                <a:lnTo>
-                  <a:pt x="82571" y="603229"/>
-                </a:lnTo>
-                <a:close/>
-                <a:lnTo>
-                  <a:pt x="84865" y="600935"/>
-                </a:lnTo>
-                <a:close/>
-                <a:lnTo>
-                  <a:pt x="87159" y="598641"/>
-                </a:lnTo>
-                <a:close/>
-                <a:lnTo>
-                  <a:pt x="89452" y="596348"/>
-                </a:lnTo>
-                <a:close/>
-                <a:lnTo>
-                  <a:pt x="91746" y="594054"/>
-                </a:lnTo>
-                <a:close/>
-                <a:lnTo>
-                  <a:pt x="94039" y="591761"/>
-                </a:lnTo>
-                <a:close/>
-                <a:lnTo>
-                  <a:pt x="96333" y="589467"/>
-                </a:lnTo>
-                <a:close/>
-                <a:lnTo>
-                  <a:pt x="98627" y="587173"/>
-                </a:lnTo>
-                <a:close/>
-                <a:lnTo>
-                  <a:pt x="100920" y="584880"/>
-                </a:lnTo>
-                <a:close/>
-                <a:lnTo>
-                  <a:pt x="103214" y="582586"/>
-                </a:lnTo>
-                <a:close/>
-                <a:lnTo>
-                  <a:pt x="105508" y="580292"/>
-                </a:lnTo>
-                <a:close/>
-                <a:lnTo>
-                  <a:pt x="107801" y="577999"/>
-                </a:lnTo>
-                <a:close/>
-                <a:lnTo>
-                  <a:pt x="110095" y="575705"/>
-                </a:lnTo>
-                <a:close/>
-                <a:lnTo>
-                  <a:pt x="112389" y="573411"/>
-                </a:lnTo>
-                <a:close/>
-                <a:lnTo>
-                  <a:pt x="114682" y="571118"/>
-                </a:lnTo>
-                <a:close/>
-                <a:lnTo>
-                  <a:pt x="116976" y="568824"/>
-                </a:lnTo>
-                <a:close/>
-                <a:lnTo>
-                  <a:pt x="119270" y="566530"/>
-                </a:lnTo>
-                <a:close/>
-                <a:lnTo>
-                  <a:pt x="121563" y="564237"/>
-                </a:lnTo>
-                <a:close/>
-                <a:lnTo>
-                  <a:pt x="123857" y="561943"/>
-                </a:lnTo>
-                <a:close/>
-                <a:lnTo>
-                  <a:pt x="126151" y="559649"/>
-                </a:lnTo>
-                <a:close/>
-                <a:lnTo>
-                  <a:pt x="128444" y="557356"/>
-                </a:lnTo>
-                <a:close/>
-                <a:lnTo>
-                  <a:pt x="130738" y="555062"/>
-                </a:lnTo>
-                <a:close/>
-                <a:lnTo>
-                  <a:pt x="133031" y="552769"/>
-                </a:lnTo>
-                <a:close/>
-                <a:lnTo>
-                  <a:pt x="135325" y="550475"/>
-                </a:lnTo>
-                <a:close/>
-                <a:lnTo>
-                  <a:pt x="137619" y="548181"/>
-                </a:lnTo>
-                <a:close/>
-                <a:lnTo>
-                  <a:pt x="139912" y="545888"/>
-                </a:lnTo>
-                <a:close/>
-                <a:lnTo>
-                  <a:pt x="142206" y="543594"/>
-                </a:lnTo>
-                <a:close/>
-                <a:lnTo>
-                  <a:pt x="144500" y="541300"/>
-                </a:lnTo>
-                <a:close/>
-                <a:lnTo>
-                  <a:pt x="146793" y="539007"/>
-                </a:lnTo>
-                <a:close/>
-                <a:lnTo>
-                  <a:pt x="149087" y="536713"/>
-                </a:lnTo>
-                <a:close/>
-                <a:lnTo>
-                  <a:pt x="151381" y="534419"/>
-                </a:lnTo>
-                <a:close/>
-                <a:lnTo>
-                  <a:pt x="153674" y="532126"/>
-                </a:lnTo>
-                <a:close/>
-                <a:lnTo>
-                  <a:pt x="155968" y="529832"/>
-                </a:lnTo>
-                <a:close/>
-                <a:lnTo>
-                  <a:pt x="158262" y="527538"/>
-                </a:lnTo>
-                <a:close/>
-                <a:lnTo>
-                  <a:pt x="160555" y="525245"/>
-                </a:lnTo>
-                <a:close/>
-                <a:lnTo>
-                  <a:pt x="162849" y="522951"/>
-                </a:lnTo>
-                <a:close/>
-                <a:lnTo>
-                  <a:pt x="165142" y="520658"/>
-                </a:lnTo>
-                <a:close/>
-                <a:lnTo>
-                  <a:pt x="167436" y="518364"/>
-                </a:lnTo>
-                <a:close/>
-                <a:lnTo>
-                  <a:pt x="169730" y="516070"/>
-                </a:lnTo>
-                <a:close/>
-                <a:lnTo>
-                  <a:pt x="172023" y="513777"/>
-                </a:lnTo>
-                <a:close/>
-                <a:lnTo>
-                  <a:pt x="174317" y="511483"/>
-                </a:lnTo>
-                <a:close/>
-                <a:lnTo>
-                  <a:pt x="176611" y="509189"/>
-                </a:lnTo>
-                <a:close/>
-                <a:lnTo>
-                  <a:pt x="178904" y="506896"/>
-                </a:lnTo>
-                <a:close/>
-                <a:lnTo>
-                  <a:pt x="181198" y="504602"/>
-                </a:lnTo>
-                <a:close/>
-                <a:lnTo>
-                  <a:pt x="183492" y="502308"/>
-                </a:lnTo>
-                <a:close/>
-                <a:lnTo>
-                  <a:pt x="185785" y="500015"/>
-                </a:lnTo>
-                <a:close/>
-                <a:lnTo>
-                  <a:pt x="188079" y="497721"/>
-                </a:lnTo>
-                <a:close/>
-                <a:lnTo>
-                  <a:pt x="190373" y="495427"/>
-                </a:lnTo>
-                <a:close/>
-                <a:lnTo>
-                  <a:pt x="192666" y="493134"/>
-                </a:lnTo>
-                <a:close/>
-                <a:lnTo>
-                  <a:pt x="194960" y="490840"/>
-                </a:lnTo>
-                <a:close/>
-                <a:lnTo>
-                  <a:pt x="197254" y="488546"/>
-                </a:lnTo>
-                <a:close/>
-                <a:lnTo>
-                  <a:pt x="199547" y="486253"/>
-                </a:lnTo>
-                <a:close/>
-                <a:lnTo>
-                  <a:pt x="201841" y="483959"/>
-                </a:lnTo>
-                <a:close/>
-                <a:lnTo>
-                  <a:pt x="204134" y="481666"/>
-                </a:lnTo>
-                <a:close/>
-                <a:lnTo>
-                  <a:pt x="206428" y="479372"/>
-                </a:lnTo>
-                <a:close/>
-                <a:lnTo>
-                  <a:pt x="208722" y="477078"/>
-                </a:lnTo>
-                <a:close/>
-                <a:lnTo>
-                  <a:pt x="211015" y="474785"/>
-                </a:lnTo>
-                <a:close/>
-                <a:lnTo>
-                  <a:pt x="213309" y="472491"/>
-                </a:lnTo>
-                <a:close/>
-                <a:lnTo>
-                  <a:pt x="215603" y="470197"/>
-                </a:lnTo>
-                <a:close/>
-                <a:lnTo>
-                  <a:pt x="217896" y="467904"/>
-                </a:lnTo>
-                <a:close/>
-                <a:lnTo>
-                  <a:pt x="220190" y="465610"/>
-                </a:lnTo>
-                <a:close/>
-                <a:lnTo>
-                  <a:pt x="222484" y="463316"/>
-                </a:lnTo>
-                <a:close/>
-                <a:lnTo>
-                  <a:pt x="224777" y="461023"/>
-                </a:lnTo>
-                <a:close/>
-                <a:lnTo>
-                  <a:pt x="227071" y="458729"/>
-                </a:lnTo>
-                <a:close/>
-                <a:lnTo>
-                  <a:pt x="229365" y="456435"/>
-                </a:lnTo>
-                <a:close/>
-                <a:lnTo>
-                  <a:pt x="231658" y="454142"/>
-                </a:lnTo>
-                <a:close/>
-                <a:lnTo>
-                  <a:pt x="233952" y="451848"/>
-                </a:lnTo>
-                <a:close/>
-                <a:lnTo>
-                  <a:pt x="236245" y="449555"/>
-                </a:lnTo>
-                <a:close/>
-                <a:lnTo>
-                  <a:pt x="238539" y="447261"/>
-                </a:lnTo>
-                <a:close/>
-                <a:lnTo>
-                  <a:pt x="240833" y="444967"/>
-                </a:lnTo>
-                <a:close/>
-                <a:lnTo>
-                  <a:pt x="243126" y="442674"/>
-                </a:lnTo>
-                <a:close/>
-                <a:lnTo>
-                  <a:pt x="245420" y="440380"/>
-                </a:lnTo>
-                <a:close/>
-                <a:lnTo>
-                  <a:pt x="247714" y="438086"/>
-                </a:lnTo>
-                <a:close/>
-                <a:lnTo>
-                  <a:pt x="250007" y="435793"/>
-                </a:lnTo>
-                <a:close/>
-                <a:lnTo>
-                  <a:pt x="252301" y="433499"/>
-                </a:lnTo>
-                <a:close/>
-                <a:lnTo>
-                  <a:pt x="254595" y="431205"/>
-                </a:lnTo>
-                <a:close/>
-                <a:lnTo>
-                  <a:pt x="256888" y="428912"/>
-                </a:lnTo>
-                <a:close/>
-                <a:lnTo>
-                  <a:pt x="259182" y="426618"/>
-                </a:lnTo>
-                <a:close/>
-                <a:lnTo>
-                  <a:pt x="261476" y="424324"/>
-                </a:lnTo>
-                <a:close/>
-                <a:lnTo>
-                  <a:pt x="263769" y="422031"/>
-                </a:lnTo>
-                <a:close/>
-                <a:lnTo>
-                  <a:pt x="266063" y="419737"/>
-                </a:lnTo>
-                <a:close/>
-                <a:lnTo>
-                  <a:pt x="268357" y="417443"/>
-                </a:lnTo>
-                <a:close/>
-                <a:lnTo>
-                  <a:pt x="270650" y="415150"/>
-                </a:lnTo>
-                <a:close/>
-                <a:lnTo>
-                  <a:pt x="272944" y="412856"/>
-                </a:lnTo>
-                <a:close/>
-                <a:lnTo>
-                  <a:pt x="275237" y="410563"/>
-                </a:lnTo>
-                <a:close/>
-                <a:lnTo>
-                  <a:pt x="277531" y="408269"/>
-                </a:lnTo>
-                <a:close/>
-                <a:lnTo>
-                  <a:pt x="279825" y="405975"/>
-                </a:lnTo>
-                <a:close/>
-                <a:lnTo>
-                  <a:pt x="282118" y="403682"/>
-                </a:lnTo>
-                <a:close/>
-                <a:lnTo>
-                  <a:pt x="284412" y="401388"/>
-                </a:lnTo>
-                <a:close/>
-                <a:lnTo>
-                  <a:pt x="286706" y="399094"/>
-                </a:lnTo>
-                <a:close/>
-                <a:lnTo>
-                  <a:pt x="288999" y="396801"/>
-                </a:lnTo>
-                <a:close/>
-                <a:lnTo>
-                  <a:pt x="291293" y="394507"/>
-                </a:lnTo>
-                <a:close/>
-                <a:lnTo>
-                  <a:pt x="293587" y="392213"/>
-                </a:lnTo>
-                <a:close/>
-                <a:lnTo>
-                  <a:pt x="295880" y="389920"/>
-                </a:lnTo>
-                <a:close/>
-                <a:lnTo>
-                  <a:pt x="298174" y="387626"/>
-                </a:lnTo>
-                <a:close/>
-                <a:lnTo>
-                  <a:pt x="300468" y="385332"/>
-                </a:lnTo>
-                <a:close/>
-                <a:lnTo>
-                  <a:pt x="302761" y="383039"/>
-                </a:lnTo>
-                <a:close/>
-                <a:lnTo>
-                  <a:pt x="305055" y="380745"/>
-                </a:lnTo>
-                <a:close/>
-                <a:lnTo>
-                  <a:pt x="307348" y="378452"/>
-                </a:lnTo>
-                <a:close/>
-                <a:lnTo>
-                  <a:pt x="309642" y="376158"/>
-                </a:lnTo>
-                <a:close/>
-                <a:lnTo>
-                  <a:pt x="311936" y="373864"/>
-                </a:lnTo>
-                <a:close/>
-                <a:lnTo>
-                  <a:pt x="314229" y="371571"/>
-                </a:lnTo>
-                <a:close/>
-                <a:lnTo>
-                  <a:pt x="316523" y="369277"/>
-                </a:lnTo>
-                <a:close/>
-                <a:lnTo>
-                  <a:pt x="318817" y="366983"/>
-                </a:lnTo>
-                <a:close/>
-                <a:lnTo>
-                  <a:pt x="321110" y="364690"/>
-                </a:lnTo>
-                <a:close/>
-                <a:lnTo>
-                  <a:pt x="323404" y="362396"/>
-                </a:lnTo>
-                <a:close/>
-                <a:lnTo>
-                  <a:pt x="325698" y="360102"/>
-                </a:lnTo>
-                <a:close/>
-                <a:lnTo>
-                  <a:pt x="327991" y="357809"/>
-                </a:lnTo>
-                <a:close/>
-                <a:lnTo>
-                  <a:pt x="330285" y="355515"/>
-                </a:lnTo>
-                <a:close/>
-                <a:lnTo>
-                  <a:pt x="332579" y="353221"/>
-                </a:lnTo>
-                <a:close/>
-                <a:lnTo>
-                  <a:pt x="334872" y="350928"/>
-                </a:lnTo>
-                <a:close/>
-                <a:lnTo>
-                  <a:pt x="337166" y="348634"/>
-                </a:lnTo>
-                <a:close/>
-                <a:lnTo>
-                  <a:pt x="339460" y="346340"/>
-                </a:lnTo>
-                <a:close/>
-                <a:lnTo>
-                  <a:pt x="341753" y="344047"/>
-                </a:lnTo>
-                <a:close/>
-                <a:lnTo>
-                  <a:pt x="344047" y="341753"/>
-                </a:lnTo>
-                <a:close/>
-                <a:lnTo>
-                  <a:pt x="346340" y="339460"/>
-                </a:lnTo>
-                <a:close/>
-                <a:lnTo>
-                  <a:pt x="348634" y="337166"/>
-                </a:lnTo>
-                <a:close/>
-                <a:lnTo>
-                  <a:pt x="350928" y="334872"/>
-                </a:lnTo>
-                <a:close/>
-                <a:lnTo>
-                  <a:pt x="353221" y="332579"/>
-                </a:lnTo>
-                <a:close/>
-                <a:lnTo>
-                  <a:pt x="355515" y="330285"/>
-                </a:lnTo>
-                <a:close/>
-                <a:lnTo>
-                  <a:pt x="357809" y="327991"/>
-                </a:lnTo>
-                <a:close/>
-                <a:lnTo>
-                  <a:pt x="360102" y="325698"/>
-                </a:lnTo>
-                <a:close/>
-                <a:lnTo>
-                  <a:pt x="362396" y="323404"/>
-                </a:lnTo>
-                <a:close/>
-                <a:lnTo>
-                  <a:pt x="364690" y="321110"/>
-                </a:lnTo>
-                <a:close/>
-                <a:lnTo>
-                  <a:pt x="366983" y="318817"/>
-                </a:lnTo>
-                <a:close/>
-                <a:lnTo>
-                  <a:pt x="369277" y="316523"/>
-                </a:lnTo>
-                <a:close/>
-                <a:lnTo>
-                  <a:pt x="371571" y="314229"/>
-                </a:lnTo>
-                <a:close/>
-                <a:lnTo>
-                  <a:pt x="373864" y="311936"/>
-                </a:lnTo>
-                <a:close/>
-                <a:lnTo>
-                  <a:pt x="376158" y="309642"/>
-                </a:lnTo>
-                <a:close/>
-                <a:lnTo>
-                  <a:pt x="378452" y="307348"/>
-                </a:lnTo>
-                <a:close/>
-                <a:lnTo>
-                  <a:pt x="380745" y="305055"/>
-                </a:lnTo>
-                <a:close/>
-                <a:lnTo>
-                  <a:pt x="383039" y="302761"/>
-                </a:lnTo>
-                <a:close/>
-                <a:lnTo>
-                  <a:pt x="385332" y="300468"/>
-                </a:lnTo>
-                <a:close/>
-                <a:lnTo>
-                  <a:pt x="387626" y="298174"/>
-                </a:lnTo>
-                <a:close/>
-                <a:lnTo>
-                  <a:pt x="389920" y="295880"/>
-                </a:lnTo>
-                <a:close/>
-                <a:lnTo>
-                  <a:pt x="392213" y="293587"/>
-                </a:lnTo>
-                <a:close/>
-                <a:lnTo>
-                  <a:pt x="394507" y="291293"/>
-                </a:lnTo>
-                <a:close/>
-                <a:lnTo>
-                  <a:pt x="396801" y="288999"/>
-                </a:lnTo>
-                <a:close/>
-                <a:lnTo>
-                  <a:pt x="399094" y="286706"/>
-                </a:lnTo>
-                <a:close/>
-                <a:lnTo>
-                  <a:pt x="401388" y="284412"/>
-                </a:lnTo>
-                <a:close/>
-                <a:lnTo>
-                  <a:pt x="403682" y="282118"/>
-                </a:lnTo>
-                <a:close/>
-                <a:lnTo>
-                  <a:pt x="405975" y="279825"/>
-                </a:lnTo>
-                <a:close/>
-                <a:lnTo>
-                  <a:pt x="408269" y="277531"/>
-                </a:lnTo>
-                <a:close/>
-                <a:lnTo>
-                  <a:pt x="410563" y="275237"/>
-                </a:lnTo>
-                <a:close/>
-                <a:lnTo>
-                  <a:pt x="412856" y="272944"/>
-                </a:lnTo>
-                <a:close/>
-                <a:lnTo>
-                  <a:pt x="415150" y="270650"/>
-                </a:lnTo>
-                <a:close/>
-                <a:lnTo>
-                  <a:pt x="417443" y="268357"/>
-                </a:lnTo>
-                <a:close/>
-                <a:lnTo>
-                  <a:pt x="419737" y="266063"/>
-                </a:lnTo>
-                <a:close/>
-                <a:lnTo>
-                  <a:pt x="422031" y="263769"/>
-                </a:lnTo>
-                <a:close/>
-                <a:lnTo>
-                  <a:pt x="424324" y="261476"/>
-                </a:lnTo>
-                <a:close/>
-                <a:lnTo>
-                  <a:pt x="426618" y="259182"/>
-                </a:lnTo>
-                <a:close/>
-                <a:lnTo>
-                  <a:pt x="428912" y="256888"/>
-                </a:lnTo>
-                <a:close/>
-                <a:lnTo>
-                  <a:pt x="431205" y="254595"/>
-                </a:lnTo>
-                <a:close/>
-                <a:lnTo>
-                  <a:pt x="433499" y="252301"/>
-                </a:lnTo>
-                <a:close/>
-                <a:lnTo>
-                  <a:pt x="435793" y="250007"/>
-                </a:lnTo>
-                <a:close/>
-                <a:lnTo>
-                  <a:pt x="438086" y="247714"/>
-                </a:lnTo>
-                <a:close/>
-                <a:lnTo>
-                  <a:pt x="440380" y="245420"/>
-                </a:lnTo>
-                <a:close/>
-                <a:lnTo>
-                  <a:pt x="442674" y="243126"/>
-                </a:lnTo>
-                <a:close/>
-                <a:lnTo>
-                  <a:pt x="444967" y="240833"/>
-                </a:lnTo>
-                <a:close/>
-                <a:lnTo>
-                  <a:pt x="447261" y="238539"/>
-                </a:lnTo>
-                <a:close/>
-                <a:lnTo>
-                  <a:pt x="449555" y="236245"/>
-                </a:lnTo>
-                <a:close/>
-                <a:lnTo>
-                  <a:pt x="451848" y="233952"/>
-                </a:lnTo>
-                <a:close/>
-                <a:lnTo>
-                  <a:pt x="454142" y="231658"/>
-                </a:lnTo>
-                <a:close/>
-                <a:lnTo>
-                  <a:pt x="456435" y="229365"/>
-                </a:lnTo>
-                <a:close/>
-                <a:lnTo>
-                  <a:pt x="458729" y="227071"/>
-                </a:lnTo>
-                <a:close/>
-                <a:lnTo>
-                  <a:pt x="461023" y="224777"/>
-                </a:lnTo>
-                <a:close/>
-                <a:lnTo>
-                  <a:pt x="463316" y="222484"/>
-                </a:lnTo>
-                <a:close/>
-                <a:lnTo>
-                  <a:pt x="465610" y="220190"/>
-                </a:lnTo>
-                <a:close/>
-                <a:lnTo>
-                  <a:pt x="467904" y="217896"/>
-                </a:lnTo>
-                <a:close/>
-                <a:lnTo>
-                  <a:pt x="470197" y="215603"/>
-                </a:lnTo>
-                <a:close/>
-                <a:lnTo>
-                  <a:pt x="472491" y="213309"/>
-                </a:lnTo>
-                <a:close/>
-                <a:lnTo>
-                  <a:pt x="474785" y="211015"/>
-                </a:lnTo>
-                <a:close/>
-                <a:lnTo>
-                  <a:pt x="477078" y="208722"/>
-                </a:lnTo>
-                <a:close/>
-                <a:lnTo>
-                  <a:pt x="479372" y="206428"/>
-                </a:lnTo>
-                <a:close/>
-                <a:lnTo>
-                  <a:pt x="481666" y="204134"/>
-                </a:lnTo>
-                <a:close/>
-                <a:lnTo>
-                  <a:pt x="483959" y="201841"/>
-                </a:lnTo>
-                <a:close/>
-                <a:lnTo>
-                  <a:pt x="486253" y="199547"/>
-                </a:lnTo>
-                <a:close/>
-                <a:lnTo>
-                  <a:pt x="488546" y="197254"/>
-                </a:lnTo>
-                <a:close/>
-                <a:lnTo>
-                  <a:pt x="490840" y="194960"/>
-                </a:lnTo>
-                <a:close/>
-                <a:lnTo>
-                  <a:pt x="493134" y="192666"/>
-                </a:lnTo>
-                <a:close/>
-                <a:lnTo>
-                  <a:pt x="495427" y="190373"/>
-                </a:lnTo>
-                <a:close/>
-                <a:lnTo>
-                  <a:pt x="497721" y="188079"/>
-                </a:lnTo>
-                <a:close/>
-                <a:lnTo>
-                  <a:pt x="500015" y="185785"/>
-                </a:lnTo>
-                <a:close/>
-                <a:lnTo>
-                  <a:pt x="502308" y="183492"/>
-                </a:lnTo>
-                <a:close/>
-                <a:lnTo>
-                  <a:pt x="504602" y="181198"/>
-                </a:lnTo>
-                <a:close/>
-                <a:lnTo>
-                  <a:pt x="506896" y="178904"/>
-                </a:lnTo>
-                <a:close/>
-                <a:lnTo>
-                  <a:pt x="509189" y="176611"/>
-                </a:lnTo>
-                <a:close/>
-                <a:lnTo>
-                  <a:pt x="511483" y="174317"/>
-                </a:lnTo>
-                <a:close/>
-                <a:lnTo>
-                  <a:pt x="513777" y="172023"/>
-                </a:lnTo>
-                <a:close/>
-                <a:lnTo>
-                  <a:pt x="516070" y="169730"/>
-                </a:lnTo>
-                <a:close/>
-                <a:lnTo>
-                  <a:pt x="518364" y="167436"/>
-                </a:lnTo>
-                <a:close/>
-                <a:lnTo>
-                  <a:pt x="520658" y="165142"/>
-                </a:lnTo>
-                <a:close/>
-                <a:lnTo>
-                  <a:pt x="522951" y="162849"/>
-                </a:lnTo>
-                <a:close/>
-                <a:lnTo>
-                  <a:pt x="525245" y="160555"/>
-                </a:lnTo>
-                <a:close/>
-                <a:lnTo>
-                  <a:pt x="527538" y="158262"/>
-                </a:lnTo>
-                <a:close/>
-                <a:lnTo>
-                  <a:pt x="529832" y="155968"/>
-                </a:lnTo>
-                <a:close/>
-                <a:lnTo>
-                  <a:pt x="532126" y="153674"/>
-                </a:lnTo>
-                <a:close/>
-                <a:lnTo>
-                  <a:pt x="534419" y="151381"/>
-                </a:lnTo>
-                <a:close/>
-                <a:lnTo>
-                  <a:pt x="536713" y="149087"/>
-                </a:lnTo>
-                <a:close/>
-                <a:lnTo>
-                  <a:pt x="539007" y="146793"/>
-                </a:lnTo>
-                <a:close/>
-                <a:lnTo>
-                  <a:pt x="541300" y="144500"/>
-                </a:lnTo>
-                <a:close/>
-                <a:lnTo>
-                  <a:pt x="543594" y="142206"/>
-                </a:lnTo>
-                <a:close/>
-                <a:lnTo>
-                  <a:pt x="545888" y="139912"/>
-                </a:lnTo>
-                <a:close/>
-                <a:lnTo>
-                  <a:pt x="548181" y="137619"/>
-                </a:lnTo>
-                <a:close/>
-                <a:lnTo>
-                  <a:pt x="550475" y="135325"/>
-                </a:lnTo>
-                <a:close/>
-                <a:lnTo>
-                  <a:pt x="552769" y="133031"/>
-                </a:lnTo>
-                <a:close/>
-                <a:lnTo>
-                  <a:pt x="555062" y="130738"/>
-                </a:lnTo>
-                <a:close/>
-                <a:lnTo>
-                  <a:pt x="557356" y="128444"/>
-                </a:lnTo>
-                <a:close/>
-                <a:lnTo>
-                  <a:pt x="559649" y="126151"/>
-                </a:lnTo>
-                <a:close/>
-                <a:lnTo>
-                  <a:pt x="561943" y="123857"/>
-                </a:lnTo>
-                <a:close/>
-                <a:lnTo>
-                  <a:pt x="564237" y="121563"/>
-                </a:lnTo>
-                <a:close/>
-                <a:lnTo>
-                  <a:pt x="566530" y="119270"/>
-                </a:lnTo>
-                <a:close/>
-                <a:lnTo>
-                  <a:pt x="568824" y="116976"/>
-                </a:lnTo>
-                <a:close/>
-                <a:lnTo>
-                  <a:pt x="571118" y="114682"/>
-                </a:lnTo>
-                <a:close/>
-                <a:lnTo>
-                  <a:pt x="573411" y="112389"/>
-                </a:lnTo>
-                <a:close/>
-                <a:lnTo>
-                  <a:pt x="575705" y="110095"/>
-                </a:lnTo>
-                <a:close/>
-                <a:lnTo>
-                  <a:pt x="577999" y="107801"/>
-                </a:lnTo>
-                <a:close/>
-                <a:lnTo>
-                  <a:pt x="580292" y="105508"/>
-                </a:lnTo>
-                <a:close/>
-                <a:lnTo>
-                  <a:pt x="582586" y="103214"/>
-                </a:lnTo>
-                <a:close/>
-                <a:lnTo>
-                  <a:pt x="584880" y="100920"/>
-                </a:lnTo>
-                <a:close/>
-                <a:lnTo>
-                  <a:pt x="587173" y="98627"/>
-                </a:lnTo>
-                <a:close/>
-                <a:lnTo>
-                  <a:pt x="589467" y="96333"/>
-                </a:lnTo>
-                <a:close/>
-                <a:lnTo>
-                  <a:pt x="591761" y="94039"/>
-                </a:lnTo>
-                <a:close/>
-                <a:lnTo>
-                  <a:pt x="594054" y="91746"/>
-                </a:lnTo>
-                <a:close/>
-                <a:lnTo>
-                  <a:pt x="596348" y="89452"/>
-                </a:lnTo>
-                <a:close/>
-                <a:lnTo>
-                  <a:pt x="598641" y="87159"/>
-                </a:lnTo>
-                <a:close/>
-                <a:lnTo>
-                  <a:pt x="600935" y="84865"/>
-                </a:lnTo>
-                <a:close/>
-                <a:lnTo>
-                  <a:pt x="603229" y="82571"/>
-                </a:lnTo>
-                <a:close/>
-                <a:lnTo>
-                  <a:pt x="605522" y="80278"/>
-                </a:lnTo>
-                <a:close/>
-                <a:lnTo>
-                  <a:pt x="607816" y="77984"/>
-                </a:lnTo>
-                <a:close/>
-                <a:lnTo>
-                  <a:pt x="610110" y="75690"/>
-                </a:lnTo>
-                <a:close/>
-                <a:lnTo>
-                  <a:pt x="612403" y="73397"/>
-                </a:lnTo>
-                <a:close/>
-                <a:lnTo>
-                  <a:pt x="614697" y="71103"/>
-                </a:lnTo>
-                <a:close/>
-                <a:lnTo>
-                  <a:pt x="616991" y="68809"/>
-                </a:lnTo>
-                <a:close/>
-                <a:lnTo>
-                  <a:pt x="619284" y="66516"/>
-                </a:lnTo>
-                <a:close/>
-                <a:lnTo>
-                  <a:pt x="621578" y="64222"/>
-                </a:lnTo>
-                <a:close/>
-                <a:lnTo>
-                  <a:pt x="623872" y="61928"/>
-                </a:lnTo>
-                <a:close/>
-                <a:lnTo>
-                  <a:pt x="626165" y="59635"/>
-                </a:lnTo>
-                <a:close/>
-                <a:lnTo>
-                  <a:pt x="628459" y="57341"/>
-                </a:lnTo>
-                <a:close/>
-                <a:lnTo>
-                  <a:pt x="630753" y="55047"/>
-                </a:lnTo>
-                <a:close/>
-                <a:lnTo>
-                  <a:pt x="633046" y="52754"/>
-                </a:lnTo>
-                <a:close/>
-                <a:lnTo>
-                  <a:pt x="635340" y="50460"/>
-                </a:lnTo>
-                <a:close/>
-                <a:lnTo>
-                  <a:pt x="637633" y="48167"/>
-                </a:lnTo>
-                <a:close/>
-                <a:lnTo>
-                  <a:pt x="639927" y="45873"/>
-                </a:lnTo>
-                <a:close/>
-                <a:lnTo>
-                  <a:pt x="642221" y="43579"/>
-                </a:lnTo>
-                <a:close/>
-                <a:lnTo>
-                  <a:pt x="644514" y="41286"/>
-                </a:lnTo>
-                <a:close/>
-                <a:lnTo>
-                  <a:pt x="646808" y="38992"/>
-                </a:lnTo>
-                <a:close/>
-                <a:lnTo>
-                  <a:pt x="649102" y="36698"/>
-                </a:lnTo>
-                <a:close/>
-                <a:lnTo>
-                  <a:pt x="651395" y="34405"/>
-                </a:lnTo>
-                <a:close/>
-                <a:lnTo>
-                  <a:pt x="653689" y="32111"/>
-                </a:lnTo>
-                <a:close/>
-                <a:lnTo>
-                  <a:pt x="655983" y="29817"/>
-                </a:lnTo>
-                <a:close/>
-                <a:lnTo>
-                  <a:pt x="658276" y="27524"/>
-                </a:lnTo>
-                <a:close/>
-                <a:lnTo>
-                  <a:pt x="660570" y="25230"/>
-                </a:lnTo>
-                <a:close/>
-                <a:lnTo>
-                  <a:pt x="662864" y="22936"/>
-                </a:lnTo>
-                <a:close/>
-                <a:lnTo>
-                  <a:pt x="665157" y="20643"/>
-                </a:lnTo>
-                <a:close/>
-                <a:lnTo>
-                  <a:pt x="667451" y="18349"/>
-                </a:lnTo>
-                <a:close/>
-                <a:lnTo>
-                  <a:pt x="669744" y="16056"/>
-                </a:lnTo>
-                <a:close/>
-                <a:lnTo>
-                  <a:pt x="672038" y="13762"/>
-                </a:lnTo>
-                <a:close/>
-                <a:lnTo>
-                  <a:pt x="674332" y="11468"/>
-                </a:lnTo>
-                <a:close/>
-                <a:lnTo>
-                  <a:pt x="676625" y="9175"/>
-                </a:lnTo>
-                <a:close/>
-                <a:lnTo>
-                  <a:pt x="678919" y="6881"/>
-                </a:lnTo>
-                <a:close/>
-                <a:lnTo>
-                  <a:pt x="681213" y="4587"/>
-                </a:lnTo>
-                <a:close/>
-                <a:lnTo>
-                  <a:pt x="683506" y="2294"/>
+                  <a:pt x="1145" y="684655"/>
+                </a:lnTo>
+                <a:close/>
+                <a:lnTo>
+                  <a:pt x="2290" y="683510"/>
+                </a:lnTo>
+                <a:close/>
+                <a:lnTo>
+                  <a:pt x="3435" y="682365"/>
+                </a:lnTo>
+                <a:close/>
+                <a:lnTo>
+                  <a:pt x="4580" y="681220"/>
+                </a:lnTo>
+                <a:close/>
+                <a:lnTo>
+                  <a:pt x="5725" y="680075"/>
+                </a:lnTo>
+                <a:close/>
+                <a:lnTo>
+                  <a:pt x="6869" y="678931"/>
+                </a:lnTo>
+                <a:close/>
+                <a:lnTo>
+                  <a:pt x="8014" y="677786"/>
+                </a:lnTo>
+                <a:close/>
+                <a:lnTo>
+                  <a:pt x="9159" y="676641"/>
+                </a:lnTo>
+                <a:close/>
+                <a:lnTo>
+                  <a:pt x="10304" y="675496"/>
+                </a:lnTo>
+                <a:close/>
+                <a:lnTo>
+                  <a:pt x="11449" y="674351"/>
+                </a:lnTo>
+                <a:close/>
+                <a:lnTo>
+                  <a:pt x="12594" y="673206"/>
+                </a:lnTo>
+                <a:close/>
+                <a:lnTo>
+                  <a:pt x="13739" y="672061"/>
+                </a:lnTo>
+                <a:close/>
+                <a:lnTo>
+                  <a:pt x="14884" y="670916"/>
+                </a:lnTo>
+                <a:close/>
+                <a:lnTo>
+                  <a:pt x="16029" y="669771"/>
+                </a:lnTo>
+                <a:close/>
+                <a:lnTo>
+                  <a:pt x="17174" y="668626"/>
+                </a:lnTo>
+                <a:close/>
+                <a:lnTo>
+                  <a:pt x="18319" y="667481"/>
+                </a:lnTo>
+                <a:close/>
+                <a:lnTo>
+                  <a:pt x="19463" y="666337"/>
+                </a:lnTo>
+                <a:close/>
+                <a:lnTo>
+                  <a:pt x="20608" y="665192"/>
+                </a:lnTo>
+                <a:close/>
+                <a:lnTo>
+                  <a:pt x="21753" y="664047"/>
+                </a:lnTo>
+                <a:close/>
+                <a:lnTo>
+                  <a:pt x="22898" y="662902"/>
+                </a:lnTo>
+                <a:close/>
+                <a:lnTo>
+                  <a:pt x="24043" y="661757"/>
+                </a:lnTo>
+                <a:close/>
+                <a:lnTo>
+                  <a:pt x="25188" y="660612"/>
+                </a:lnTo>
+                <a:close/>
+                <a:lnTo>
+                  <a:pt x="26333" y="659467"/>
+                </a:lnTo>
+                <a:close/>
+                <a:lnTo>
+                  <a:pt x="27478" y="658322"/>
+                </a:lnTo>
+                <a:close/>
+                <a:lnTo>
+                  <a:pt x="28623" y="657177"/>
+                </a:lnTo>
+                <a:close/>
+                <a:lnTo>
+                  <a:pt x="29768" y="656032"/>
+                </a:lnTo>
+                <a:close/>
+                <a:lnTo>
+                  <a:pt x="30913" y="654887"/>
+                </a:lnTo>
+                <a:close/>
+                <a:lnTo>
+                  <a:pt x="32057" y="653743"/>
+                </a:lnTo>
+                <a:close/>
+                <a:lnTo>
+                  <a:pt x="33202" y="652598"/>
+                </a:lnTo>
+                <a:close/>
+                <a:lnTo>
+                  <a:pt x="34347" y="651453"/>
+                </a:lnTo>
+                <a:close/>
+                <a:lnTo>
+                  <a:pt x="35492" y="650308"/>
+                </a:lnTo>
+                <a:close/>
+                <a:lnTo>
+                  <a:pt x="36637" y="649163"/>
+                </a:lnTo>
+                <a:close/>
+                <a:lnTo>
+                  <a:pt x="37782" y="648018"/>
+                </a:lnTo>
+                <a:close/>
+                <a:lnTo>
+                  <a:pt x="38927" y="646873"/>
+                </a:lnTo>
+                <a:close/>
+                <a:lnTo>
+                  <a:pt x="40072" y="645728"/>
+                </a:lnTo>
+                <a:close/>
+                <a:lnTo>
+                  <a:pt x="41217" y="644583"/>
+                </a:lnTo>
+                <a:close/>
+                <a:lnTo>
+                  <a:pt x="42362" y="643438"/>
+                </a:lnTo>
+                <a:close/>
+                <a:lnTo>
+                  <a:pt x="43507" y="642293"/>
+                </a:lnTo>
+                <a:close/>
+                <a:lnTo>
+                  <a:pt x="44651" y="641149"/>
+                </a:lnTo>
+                <a:close/>
+                <a:lnTo>
+                  <a:pt x="45796" y="640004"/>
+                </a:lnTo>
+                <a:close/>
+                <a:lnTo>
+                  <a:pt x="46941" y="638859"/>
+                </a:lnTo>
+                <a:close/>
+                <a:lnTo>
+                  <a:pt x="48086" y="637714"/>
+                </a:lnTo>
+                <a:close/>
+                <a:lnTo>
+                  <a:pt x="49231" y="636569"/>
+                </a:lnTo>
+                <a:close/>
+                <a:lnTo>
+                  <a:pt x="50376" y="635424"/>
+                </a:lnTo>
+                <a:close/>
+                <a:lnTo>
+                  <a:pt x="51521" y="634279"/>
+                </a:lnTo>
+                <a:close/>
+                <a:lnTo>
+                  <a:pt x="52666" y="633134"/>
+                </a:lnTo>
+                <a:close/>
+                <a:lnTo>
+                  <a:pt x="53811" y="631989"/>
+                </a:lnTo>
+                <a:close/>
+                <a:lnTo>
+                  <a:pt x="54956" y="630844"/>
+                </a:lnTo>
+                <a:close/>
+                <a:lnTo>
+                  <a:pt x="56101" y="629699"/>
+                </a:lnTo>
+                <a:close/>
+                <a:lnTo>
+                  <a:pt x="57245" y="628555"/>
+                </a:lnTo>
+                <a:close/>
+                <a:lnTo>
+                  <a:pt x="58390" y="627410"/>
+                </a:lnTo>
+                <a:close/>
+                <a:lnTo>
+                  <a:pt x="59535" y="626265"/>
+                </a:lnTo>
+                <a:close/>
+                <a:lnTo>
+                  <a:pt x="60680" y="625120"/>
+                </a:lnTo>
+                <a:close/>
+                <a:lnTo>
+                  <a:pt x="61825" y="623975"/>
+                </a:lnTo>
+                <a:close/>
+                <a:lnTo>
+                  <a:pt x="62970" y="622830"/>
+                </a:lnTo>
+                <a:close/>
+                <a:lnTo>
+                  <a:pt x="64115" y="621685"/>
+                </a:lnTo>
+                <a:close/>
+                <a:lnTo>
+                  <a:pt x="65260" y="620540"/>
+                </a:lnTo>
+                <a:close/>
+                <a:lnTo>
+                  <a:pt x="66405" y="619395"/>
+                </a:lnTo>
+                <a:close/>
+                <a:lnTo>
+                  <a:pt x="67550" y="618250"/>
+                </a:lnTo>
+                <a:close/>
+                <a:lnTo>
+                  <a:pt x="68694" y="617106"/>
+                </a:lnTo>
+                <a:close/>
+                <a:lnTo>
+                  <a:pt x="69839" y="615961"/>
+                </a:lnTo>
+                <a:close/>
+                <a:lnTo>
+                  <a:pt x="70984" y="614816"/>
+                </a:lnTo>
+                <a:close/>
+                <a:lnTo>
+                  <a:pt x="72129" y="613671"/>
+                </a:lnTo>
+                <a:close/>
+                <a:lnTo>
+                  <a:pt x="73274" y="612526"/>
+                </a:lnTo>
+                <a:close/>
+                <a:lnTo>
+                  <a:pt x="74419" y="611381"/>
+                </a:lnTo>
+                <a:close/>
+                <a:lnTo>
+                  <a:pt x="75564" y="610236"/>
+                </a:lnTo>
+                <a:close/>
+                <a:lnTo>
+                  <a:pt x="76709" y="609091"/>
+                </a:lnTo>
+                <a:close/>
+                <a:lnTo>
+                  <a:pt x="77854" y="607946"/>
+                </a:lnTo>
+                <a:close/>
+                <a:lnTo>
+                  <a:pt x="78999" y="606801"/>
+                </a:lnTo>
+                <a:close/>
+                <a:lnTo>
+                  <a:pt x="80144" y="605656"/>
+                </a:lnTo>
+                <a:close/>
+                <a:lnTo>
+                  <a:pt x="81288" y="604512"/>
+                </a:lnTo>
+                <a:close/>
+                <a:lnTo>
+                  <a:pt x="82433" y="603367"/>
+                </a:lnTo>
+                <a:close/>
+                <a:lnTo>
+                  <a:pt x="83578" y="602222"/>
+                </a:lnTo>
+                <a:close/>
+                <a:lnTo>
+                  <a:pt x="84723" y="601077"/>
+                </a:lnTo>
+                <a:close/>
+                <a:lnTo>
+                  <a:pt x="85868" y="599932"/>
+                </a:lnTo>
+                <a:close/>
+                <a:lnTo>
+                  <a:pt x="87013" y="598787"/>
+                </a:lnTo>
+                <a:close/>
+                <a:lnTo>
+                  <a:pt x="88158" y="597642"/>
+                </a:lnTo>
+                <a:close/>
+                <a:lnTo>
+                  <a:pt x="89303" y="596497"/>
+                </a:lnTo>
+                <a:close/>
+                <a:lnTo>
+                  <a:pt x="90448" y="595352"/>
+                </a:lnTo>
+                <a:close/>
+                <a:lnTo>
+                  <a:pt x="91593" y="594207"/>
+                </a:lnTo>
+                <a:close/>
+                <a:lnTo>
+                  <a:pt x="92738" y="593062"/>
+                </a:lnTo>
+                <a:close/>
+                <a:lnTo>
+                  <a:pt x="93882" y="591918"/>
+                </a:lnTo>
+                <a:close/>
+                <a:lnTo>
+                  <a:pt x="95027" y="590773"/>
+                </a:lnTo>
+                <a:close/>
+                <a:lnTo>
+                  <a:pt x="96172" y="589628"/>
+                </a:lnTo>
+                <a:close/>
+                <a:lnTo>
+                  <a:pt x="97317" y="588483"/>
+                </a:lnTo>
+                <a:close/>
+                <a:lnTo>
+                  <a:pt x="98462" y="587338"/>
+                </a:lnTo>
+                <a:close/>
+                <a:lnTo>
+                  <a:pt x="99607" y="586193"/>
+                </a:lnTo>
+                <a:close/>
+                <a:lnTo>
+                  <a:pt x="100752" y="585048"/>
+                </a:lnTo>
+                <a:close/>
+                <a:lnTo>
+                  <a:pt x="101897" y="583903"/>
+                </a:lnTo>
+                <a:close/>
+                <a:lnTo>
+                  <a:pt x="103042" y="582758"/>
+                </a:lnTo>
+                <a:close/>
+                <a:lnTo>
+                  <a:pt x="104187" y="581613"/>
+                </a:lnTo>
+                <a:close/>
+                <a:lnTo>
+                  <a:pt x="105332" y="580468"/>
+                </a:lnTo>
+                <a:close/>
+                <a:lnTo>
+                  <a:pt x="106476" y="579324"/>
+                </a:lnTo>
+                <a:close/>
+                <a:lnTo>
+                  <a:pt x="107621" y="578179"/>
+                </a:lnTo>
+                <a:close/>
+                <a:lnTo>
+                  <a:pt x="108766" y="577034"/>
+                </a:lnTo>
+                <a:close/>
+                <a:lnTo>
+                  <a:pt x="109911" y="575889"/>
+                </a:lnTo>
+                <a:close/>
+                <a:lnTo>
+                  <a:pt x="111056" y="574744"/>
+                </a:lnTo>
+                <a:close/>
+                <a:lnTo>
+                  <a:pt x="112201" y="573599"/>
+                </a:lnTo>
+                <a:close/>
+                <a:lnTo>
+                  <a:pt x="113346" y="572454"/>
+                </a:lnTo>
+                <a:close/>
+                <a:lnTo>
+                  <a:pt x="114491" y="571309"/>
+                </a:lnTo>
+                <a:close/>
+                <a:lnTo>
+                  <a:pt x="115636" y="570164"/>
+                </a:lnTo>
+                <a:close/>
+                <a:lnTo>
+                  <a:pt x="116781" y="569019"/>
+                </a:lnTo>
+                <a:close/>
+                <a:lnTo>
+                  <a:pt x="117926" y="567874"/>
+                </a:lnTo>
+                <a:close/>
+                <a:lnTo>
+                  <a:pt x="119070" y="566730"/>
+                </a:lnTo>
+                <a:close/>
+                <a:lnTo>
+                  <a:pt x="120215" y="565585"/>
+                </a:lnTo>
+                <a:close/>
+                <a:lnTo>
+                  <a:pt x="121360" y="564440"/>
+                </a:lnTo>
+                <a:close/>
+                <a:lnTo>
+                  <a:pt x="122505" y="563295"/>
+                </a:lnTo>
+                <a:close/>
+                <a:lnTo>
+                  <a:pt x="123650" y="562150"/>
+                </a:lnTo>
+                <a:close/>
+                <a:lnTo>
+                  <a:pt x="124795" y="561005"/>
+                </a:lnTo>
+                <a:close/>
+                <a:lnTo>
+                  <a:pt x="125940" y="559860"/>
+                </a:lnTo>
+                <a:close/>
+                <a:lnTo>
+                  <a:pt x="127085" y="558715"/>
+                </a:lnTo>
+                <a:close/>
+                <a:lnTo>
+                  <a:pt x="128230" y="557570"/>
+                </a:lnTo>
+                <a:close/>
+                <a:lnTo>
+                  <a:pt x="129375" y="556425"/>
+                </a:lnTo>
+                <a:close/>
+                <a:lnTo>
+                  <a:pt x="130520" y="555280"/>
+                </a:lnTo>
+                <a:close/>
+                <a:lnTo>
+                  <a:pt x="131664" y="554136"/>
+                </a:lnTo>
+                <a:close/>
+                <a:lnTo>
+                  <a:pt x="132809" y="552991"/>
+                </a:lnTo>
+                <a:close/>
+                <a:lnTo>
+                  <a:pt x="133954" y="551846"/>
+                </a:lnTo>
+                <a:close/>
+                <a:lnTo>
+                  <a:pt x="135099" y="550701"/>
+                </a:lnTo>
+                <a:close/>
+                <a:lnTo>
+                  <a:pt x="136244" y="549556"/>
+                </a:lnTo>
+                <a:close/>
+                <a:lnTo>
+                  <a:pt x="137389" y="548411"/>
+                </a:lnTo>
+                <a:close/>
+                <a:lnTo>
+                  <a:pt x="138534" y="547266"/>
+                </a:lnTo>
+                <a:close/>
+                <a:lnTo>
+                  <a:pt x="139679" y="546121"/>
+                </a:lnTo>
+                <a:close/>
+                <a:lnTo>
+                  <a:pt x="140824" y="544976"/>
+                </a:lnTo>
+                <a:close/>
+                <a:lnTo>
+                  <a:pt x="141969" y="543831"/>
+                </a:lnTo>
+                <a:close/>
+                <a:lnTo>
+                  <a:pt x="143114" y="542686"/>
+                </a:lnTo>
+                <a:close/>
+                <a:lnTo>
+                  <a:pt x="144258" y="541542"/>
+                </a:lnTo>
+                <a:close/>
+                <a:lnTo>
+                  <a:pt x="145403" y="540397"/>
+                </a:lnTo>
+                <a:close/>
+                <a:lnTo>
+                  <a:pt x="146548" y="539252"/>
+                </a:lnTo>
+                <a:close/>
+                <a:lnTo>
+                  <a:pt x="147693" y="538107"/>
+                </a:lnTo>
+                <a:close/>
+                <a:lnTo>
+                  <a:pt x="148838" y="536962"/>
+                </a:lnTo>
+                <a:close/>
+                <a:lnTo>
+                  <a:pt x="149983" y="535817"/>
+                </a:lnTo>
+                <a:close/>
+                <a:lnTo>
+                  <a:pt x="151128" y="534672"/>
+                </a:lnTo>
+                <a:close/>
+                <a:lnTo>
+                  <a:pt x="152273" y="533527"/>
+                </a:lnTo>
+                <a:close/>
+                <a:lnTo>
+                  <a:pt x="153418" y="532382"/>
+                </a:lnTo>
+                <a:close/>
+                <a:lnTo>
+                  <a:pt x="154563" y="531237"/>
+                </a:lnTo>
+                <a:close/>
+                <a:lnTo>
+                  <a:pt x="155708" y="530092"/>
+                </a:lnTo>
+                <a:close/>
+                <a:lnTo>
+                  <a:pt x="156852" y="528948"/>
+                </a:lnTo>
+                <a:close/>
+                <a:lnTo>
+                  <a:pt x="157997" y="527803"/>
+                </a:lnTo>
+                <a:close/>
+                <a:lnTo>
+                  <a:pt x="159142" y="526658"/>
+                </a:lnTo>
+                <a:close/>
+                <a:lnTo>
+                  <a:pt x="160287" y="525513"/>
+                </a:lnTo>
+                <a:close/>
+                <a:lnTo>
+                  <a:pt x="161432" y="524368"/>
+                </a:lnTo>
+                <a:close/>
+                <a:lnTo>
+                  <a:pt x="162577" y="523223"/>
+                </a:lnTo>
+                <a:close/>
+                <a:lnTo>
+                  <a:pt x="163722" y="522078"/>
+                </a:lnTo>
+                <a:close/>
+                <a:lnTo>
+                  <a:pt x="164867" y="520933"/>
+                </a:lnTo>
+                <a:close/>
+                <a:lnTo>
+                  <a:pt x="166012" y="519788"/>
+                </a:lnTo>
+                <a:close/>
+                <a:lnTo>
+                  <a:pt x="167157" y="518643"/>
+                </a:lnTo>
+                <a:close/>
+                <a:lnTo>
+                  <a:pt x="168302" y="517498"/>
+                </a:lnTo>
+                <a:close/>
+                <a:lnTo>
+                  <a:pt x="169446" y="516354"/>
+                </a:lnTo>
+                <a:close/>
+                <a:lnTo>
+                  <a:pt x="170591" y="515209"/>
+                </a:lnTo>
+                <a:close/>
+                <a:lnTo>
+                  <a:pt x="171736" y="514064"/>
+                </a:lnTo>
+                <a:close/>
+                <a:lnTo>
+                  <a:pt x="172881" y="512919"/>
+                </a:lnTo>
+                <a:close/>
+                <a:lnTo>
+                  <a:pt x="174026" y="511774"/>
+                </a:lnTo>
+                <a:close/>
+                <a:lnTo>
+                  <a:pt x="175171" y="510629"/>
+                </a:lnTo>
+                <a:close/>
+                <a:lnTo>
+                  <a:pt x="176316" y="509484"/>
+                </a:lnTo>
+                <a:close/>
+                <a:lnTo>
+                  <a:pt x="177461" y="508339"/>
+                </a:lnTo>
+                <a:close/>
+                <a:lnTo>
+                  <a:pt x="178606" y="507194"/>
+                </a:lnTo>
+                <a:close/>
+                <a:lnTo>
+                  <a:pt x="179751" y="506049"/>
+                </a:lnTo>
+                <a:close/>
+                <a:lnTo>
+                  <a:pt x="180895" y="504905"/>
+                </a:lnTo>
+                <a:close/>
+                <a:lnTo>
+                  <a:pt x="182040" y="503760"/>
+                </a:lnTo>
+                <a:close/>
+                <a:lnTo>
+                  <a:pt x="183185" y="502615"/>
+                </a:lnTo>
+                <a:close/>
+                <a:lnTo>
+                  <a:pt x="184330" y="501470"/>
+                </a:lnTo>
+                <a:close/>
+                <a:lnTo>
+                  <a:pt x="185475" y="500325"/>
+                </a:lnTo>
+                <a:close/>
+                <a:lnTo>
+                  <a:pt x="186620" y="499180"/>
+                </a:lnTo>
+                <a:close/>
+                <a:lnTo>
+                  <a:pt x="187765" y="498035"/>
+                </a:lnTo>
+                <a:close/>
+                <a:lnTo>
+                  <a:pt x="188910" y="496890"/>
+                </a:lnTo>
+                <a:close/>
+                <a:lnTo>
+                  <a:pt x="190055" y="495745"/>
+                </a:lnTo>
+                <a:close/>
+                <a:lnTo>
+                  <a:pt x="191200" y="494600"/>
+                </a:lnTo>
+                <a:close/>
+                <a:lnTo>
+                  <a:pt x="192345" y="493455"/>
+                </a:lnTo>
+                <a:close/>
+                <a:lnTo>
+                  <a:pt x="193489" y="492311"/>
+                </a:lnTo>
+                <a:close/>
+                <a:lnTo>
+                  <a:pt x="194634" y="491166"/>
+                </a:lnTo>
+                <a:close/>
+                <a:lnTo>
+                  <a:pt x="195779" y="490021"/>
+                </a:lnTo>
+                <a:close/>
+                <a:lnTo>
+                  <a:pt x="196924" y="488876"/>
+                </a:lnTo>
+                <a:close/>
+                <a:lnTo>
+                  <a:pt x="198069" y="487731"/>
+                </a:lnTo>
+                <a:close/>
+                <a:lnTo>
+                  <a:pt x="199214" y="486586"/>
+                </a:lnTo>
+                <a:close/>
+                <a:lnTo>
+                  <a:pt x="200359" y="485441"/>
+                </a:lnTo>
+                <a:close/>
+                <a:lnTo>
+                  <a:pt x="201504" y="484296"/>
+                </a:lnTo>
+                <a:close/>
+                <a:lnTo>
+                  <a:pt x="202649" y="483151"/>
+                </a:lnTo>
+                <a:close/>
+                <a:lnTo>
+                  <a:pt x="203794" y="482006"/>
+                </a:lnTo>
+                <a:close/>
+                <a:lnTo>
+                  <a:pt x="204939" y="480861"/>
+                </a:lnTo>
+                <a:close/>
+                <a:lnTo>
+                  <a:pt x="206083" y="479717"/>
+                </a:lnTo>
+                <a:close/>
+                <a:lnTo>
+                  <a:pt x="207228" y="478572"/>
+                </a:lnTo>
+                <a:close/>
+                <a:lnTo>
+                  <a:pt x="208373" y="477427"/>
+                </a:lnTo>
+                <a:close/>
+                <a:lnTo>
+                  <a:pt x="209518" y="476282"/>
+                </a:lnTo>
+                <a:close/>
+                <a:lnTo>
+                  <a:pt x="210663" y="475137"/>
+                </a:lnTo>
+                <a:close/>
+                <a:lnTo>
+                  <a:pt x="211808" y="473992"/>
+                </a:lnTo>
+                <a:close/>
+                <a:lnTo>
+                  <a:pt x="212953" y="472847"/>
+                </a:lnTo>
+                <a:close/>
+                <a:lnTo>
+                  <a:pt x="214098" y="471702"/>
+                </a:lnTo>
+                <a:close/>
+                <a:lnTo>
+                  <a:pt x="215243" y="470557"/>
+                </a:lnTo>
+                <a:close/>
+                <a:lnTo>
+                  <a:pt x="216388" y="469412"/>
+                </a:lnTo>
+                <a:close/>
+                <a:lnTo>
+                  <a:pt x="217533" y="468267"/>
+                </a:lnTo>
+                <a:close/>
+                <a:lnTo>
+                  <a:pt x="218677" y="467123"/>
+                </a:lnTo>
+                <a:close/>
+                <a:lnTo>
+                  <a:pt x="219822" y="465978"/>
+                </a:lnTo>
+                <a:close/>
+                <a:lnTo>
+                  <a:pt x="220967" y="464833"/>
+                </a:lnTo>
+                <a:close/>
+                <a:lnTo>
+                  <a:pt x="222112" y="463688"/>
+                </a:lnTo>
+                <a:close/>
+                <a:lnTo>
+                  <a:pt x="223257" y="462543"/>
+                </a:lnTo>
+                <a:close/>
+                <a:lnTo>
+                  <a:pt x="224402" y="461398"/>
+                </a:lnTo>
+                <a:close/>
+                <a:lnTo>
+                  <a:pt x="225547" y="460253"/>
+                </a:lnTo>
+                <a:close/>
+                <a:lnTo>
+                  <a:pt x="226692" y="459108"/>
+                </a:lnTo>
+                <a:close/>
+                <a:lnTo>
+                  <a:pt x="227837" y="457963"/>
+                </a:lnTo>
+                <a:close/>
+                <a:lnTo>
+                  <a:pt x="228982" y="456818"/>
+                </a:lnTo>
+                <a:close/>
+                <a:lnTo>
+                  <a:pt x="230127" y="455673"/>
+                </a:lnTo>
+                <a:close/>
+                <a:lnTo>
+                  <a:pt x="231271" y="454529"/>
+                </a:lnTo>
+                <a:close/>
+                <a:lnTo>
+                  <a:pt x="232416" y="453384"/>
+                </a:lnTo>
+                <a:close/>
+                <a:lnTo>
+                  <a:pt x="233561" y="452239"/>
+                </a:lnTo>
+                <a:close/>
+                <a:lnTo>
+                  <a:pt x="234706" y="451094"/>
+                </a:lnTo>
+                <a:close/>
+                <a:lnTo>
+                  <a:pt x="235851" y="449949"/>
+                </a:lnTo>
+                <a:close/>
+                <a:lnTo>
+                  <a:pt x="236996" y="448804"/>
+                </a:lnTo>
+                <a:close/>
+                <a:lnTo>
+                  <a:pt x="238141" y="447659"/>
+                </a:lnTo>
+                <a:close/>
+                <a:lnTo>
+                  <a:pt x="239286" y="446514"/>
+                </a:lnTo>
+                <a:close/>
+                <a:lnTo>
+                  <a:pt x="240431" y="445369"/>
+                </a:lnTo>
+                <a:close/>
+                <a:lnTo>
+                  <a:pt x="241576" y="444224"/>
+                </a:lnTo>
+                <a:close/>
+                <a:lnTo>
+                  <a:pt x="242721" y="443079"/>
+                </a:lnTo>
+                <a:close/>
+                <a:lnTo>
+                  <a:pt x="243865" y="441935"/>
+                </a:lnTo>
+                <a:close/>
+                <a:lnTo>
+                  <a:pt x="245010" y="440790"/>
+                </a:lnTo>
+                <a:close/>
+                <a:lnTo>
+                  <a:pt x="246155" y="439645"/>
+                </a:lnTo>
+                <a:close/>
+                <a:lnTo>
+                  <a:pt x="247300" y="438500"/>
+                </a:lnTo>
+                <a:close/>
+                <a:lnTo>
+                  <a:pt x="248445" y="437355"/>
+                </a:lnTo>
+                <a:close/>
+                <a:lnTo>
+                  <a:pt x="249590" y="436210"/>
+                </a:lnTo>
+                <a:close/>
+                <a:lnTo>
+                  <a:pt x="250735" y="435065"/>
+                </a:lnTo>
+                <a:close/>
+                <a:lnTo>
+                  <a:pt x="251880" y="433920"/>
+                </a:lnTo>
+                <a:close/>
+                <a:lnTo>
+                  <a:pt x="253025" y="432775"/>
+                </a:lnTo>
+                <a:close/>
+                <a:lnTo>
+                  <a:pt x="254170" y="431630"/>
+                </a:lnTo>
+                <a:close/>
+                <a:lnTo>
+                  <a:pt x="255315" y="430485"/>
+                </a:lnTo>
+                <a:close/>
+                <a:lnTo>
+                  <a:pt x="256459" y="429341"/>
+                </a:lnTo>
+                <a:close/>
+                <a:lnTo>
+                  <a:pt x="257604" y="428196"/>
+                </a:lnTo>
+                <a:close/>
+                <a:lnTo>
+                  <a:pt x="258749" y="427051"/>
+                </a:lnTo>
+                <a:close/>
+                <a:lnTo>
+                  <a:pt x="259894" y="425906"/>
+                </a:lnTo>
+                <a:close/>
+                <a:lnTo>
+                  <a:pt x="261039" y="424761"/>
+                </a:lnTo>
+                <a:close/>
+                <a:lnTo>
+                  <a:pt x="262184" y="423616"/>
+                </a:lnTo>
+                <a:close/>
+                <a:lnTo>
+                  <a:pt x="263329" y="422471"/>
+                </a:lnTo>
+                <a:close/>
+                <a:lnTo>
+                  <a:pt x="264474" y="421326"/>
+                </a:lnTo>
+                <a:close/>
+                <a:lnTo>
+                  <a:pt x="265619" y="420181"/>
+                </a:lnTo>
+                <a:close/>
+                <a:lnTo>
+                  <a:pt x="266764" y="419036"/>
+                </a:lnTo>
+                <a:close/>
+                <a:lnTo>
+                  <a:pt x="267909" y="417891"/>
+                </a:lnTo>
+                <a:close/>
+                <a:lnTo>
+                  <a:pt x="269053" y="416747"/>
+                </a:lnTo>
+                <a:close/>
+                <a:lnTo>
+                  <a:pt x="270198" y="415602"/>
+                </a:lnTo>
+                <a:close/>
+                <a:lnTo>
+                  <a:pt x="271343" y="414457"/>
+                </a:lnTo>
+                <a:close/>
+                <a:lnTo>
+                  <a:pt x="272488" y="413312"/>
+                </a:lnTo>
+                <a:close/>
+                <a:lnTo>
+                  <a:pt x="273633" y="412167"/>
+                </a:lnTo>
+                <a:close/>
+                <a:lnTo>
+                  <a:pt x="274778" y="411022"/>
+                </a:lnTo>
+                <a:close/>
+                <a:lnTo>
+                  <a:pt x="275923" y="409877"/>
+                </a:lnTo>
+                <a:close/>
+                <a:lnTo>
+                  <a:pt x="277068" y="408732"/>
+                </a:lnTo>
+                <a:close/>
+                <a:lnTo>
+                  <a:pt x="278213" y="407587"/>
+                </a:lnTo>
+                <a:close/>
+                <a:lnTo>
+                  <a:pt x="279358" y="406442"/>
+                </a:lnTo>
+                <a:close/>
+                <a:lnTo>
+                  <a:pt x="280503" y="405297"/>
+                </a:lnTo>
+                <a:close/>
+                <a:lnTo>
+                  <a:pt x="281647" y="404153"/>
+                </a:lnTo>
+                <a:close/>
+                <a:lnTo>
+                  <a:pt x="282792" y="403008"/>
+                </a:lnTo>
+                <a:close/>
+                <a:lnTo>
+                  <a:pt x="283937" y="401863"/>
+                </a:lnTo>
+                <a:close/>
+                <a:lnTo>
+                  <a:pt x="285082" y="400718"/>
+                </a:lnTo>
+                <a:close/>
+                <a:lnTo>
+                  <a:pt x="286227" y="399573"/>
+                </a:lnTo>
+                <a:close/>
+                <a:lnTo>
+                  <a:pt x="287372" y="398428"/>
+                </a:lnTo>
+                <a:close/>
+                <a:lnTo>
+                  <a:pt x="288517" y="397283"/>
+                </a:lnTo>
+                <a:close/>
+                <a:lnTo>
+                  <a:pt x="289662" y="396138"/>
+                </a:lnTo>
+                <a:close/>
+                <a:lnTo>
+                  <a:pt x="290807" y="394993"/>
+                </a:lnTo>
+                <a:close/>
+                <a:lnTo>
+                  <a:pt x="291952" y="393848"/>
+                </a:lnTo>
+                <a:close/>
+                <a:lnTo>
+                  <a:pt x="293096" y="392704"/>
+                </a:lnTo>
+                <a:close/>
+                <a:lnTo>
+                  <a:pt x="294241" y="391559"/>
+                </a:lnTo>
+                <a:close/>
+                <a:lnTo>
+                  <a:pt x="295386" y="390414"/>
+                </a:lnTo>
+                <a:close/>
+                <a:lnTo>
+                  <a:pt x="296531" y="389269"/>
+                </a:lnTo>
+                <a:close/>
+                <a:lnTo>
+                  <a:pt x="297676" y="388124"/>
+                </a:lnTo>
+                <a:close/>
+                <a:lnTo>
+                  <a:pt x="298821" y="386979"/>
+                </a:lnTo>
+                <a:close/>
+                <a:lnTo>
+                  <a:pt x="299966" y="385834"/>
+                </a:lnTo>
+                <a:close/>
+                <a:lnTo>
+                  <a:pt x="301111" y="384689"/>
+                </a:lnTo>
+                <a:close/>
+                <a:lnTo>
+                  <a:pt x="302256" y="383544"/>
+                </a:lnTo>
+                <a:close/>
+                <a:lnTo>
+                  <a:pt x="303401" y="382399"/>
+                </a:lnTo>
+                <a:close/>
+                <a:lnTo>
+                  <a:pt x="304546" y="381254"/>
+                </a:lnTo>
+                <a:close/>
+                <a:lnTo>
+                  <a:pt x="305690" y="380110"/>
+                </a:lnTo>
+                <a:close/>
+                <a:lnTo>
+                  <a:pt x="306835" y="378965"/>
+                </a:lnTo>
+                <a:close/>
+                <a:lnTo>
+                  <a:pt x="307980" y="377820"/>
+                </a:lnTo>
+                <a:close/>
+                <a:lnTo>
+                  <a:pt x="309125" y="376675"/>
+                </a:lnTo>
+                <a:close/>
+                <a:lnTo>
+                  <a:pt x="310270" y="375530"/>
+                </a:lnTo>
+                <a:close/>
+                <a:lnTo>
+                  <a:pt x="311415" y="374385"/>
+                </a:lnTo>
+                <a:close/>
+                <a:lnTo>
+                  <a:pt x="312560" y="373240"/>
+                </a:lnTo>
+                <a:close/>
+                <a:lnTo>
+                  <a:pt x="313705" y="372095"/>
+                </a:lnTo>
+                <a:close/>
+                <a:lnTo>
+                  <a:pt x="314850" y="370950"/>
+                </a:lnTo>
+                <a:close/>
+                <a:lnTo>
+                  <a:pt x="315995" y="369805"/>
+                </a:lnTo>
+                <a:close/>
+                <a:lnTo>
+                  <a:pt x="317140" y="368660"/>
+                </a:lnTo>
+                <a:close/>
+                <a:lnTo>
+                  <a:pt x="318284" y="367516"/>
+                </a:lnTo>
+                <a:close/>
+                <a:lnTo>
+                  <a:pt x="319429" y="366371"/>
+                </a:lnTo>
+                <a:close/>
+                <a:lnTo>
+                  <a:pt x="320574" y="365226"/>
+                </a:lnTo>
+                <a:close/>
+                <a:lnTo>
+                  <a:pt x="321719" y="364081"/>
+                </a:lnTo>
+                <a:close/>
+                <a:lnTo>
+                  <a:pt x="322864" y="362936"/>
+                </a:lnTo>
+                <a:close/>
+                <a:lnTo>
+                  <a:pt x="324009" y="361791"/>
+                </a:lnTo>
+                <a:close/>
+                <a:lnTo>
+                  <a:pt x="325154" y="360646"/>
+                </a:lnTo>
+                <a:close/>
+                <a:lnTo>
+                  <a:pt x="326299" y="359501"/>
+                </a:lnTo>
+                <a:close/>
+                <a:lnTo>
+                  <a:pt x="327444" y="358356"/>
+                </a:lnTo>
+                <a:close/>
+                <a:lnTo>
+                  <a:pt x="328589" y="357211"/>
+                </a:lnTo>
+                <a:close/>
+                <a:lnTo>
+                  <a:pt x="329734" y="356066"/>
+                </a:lnTo>
+                <a:close/>
+                <a:lnTo>
+                  <a:pt x="330878" y="354922"/>
+                </a:lnTo>
+                <a:close/>
+                <a:lnTo>
+                  <a:pt x="332023" y="353777"/>
+                </a:lnTo>
+                <a:close/>
+                <a:lnTo>
+                  <a:pt x="333168" y="352632"/>
+                </a:lnTo>
+                <a:close/>
+                <a:lnTo>
+                  <a:pt x="334313" y="351487"/>
+                </a:lnTo>
+                <a:close/>
+                <a:lnTo>
+                  <a:pt x="335458" y="350342"/>
+                </a:lnTo>
+                <a:close/>
+                <a:lnTo>
+                  <a:pt x="336603" y="349197"/>
+                </a:lnTo>
+                <a:close/>
+                <a:lnTo>
+                  <a:pt x="337748" y="348052"/>
+                </a:lnTo>
+                <a:close/>
+                <a:lnTo>
+                  <a:pt x="338893" y="346907"/>
+                </a:lnTo>
+                <a:close/>
+                <a:lnTo>
+                  <a:pt x="340038" y="345762"/>
+                </a:lnTo>
+                <a:close/>
+                <a:lnTo>
+                  <a:pt x="341183" y="344617"/>
+                </a:lnTo>
+                <a:close/>
+                <a:lnTo>
+                  <a:pt x="342328" y="343472"/>
+                </a:lnTo>
+                <a:close/>
+                <a:lnTo>
+                  <a:pt x="343472" y="342328"/>
+                </a:lnTo>
+                <a:close/>
+                <a:lnTo>
+                  <a:pt x="344617" y="341183"/>
+                </a:lnTo>
+                <a:close/>
+                <a:lnTo>
+                  <a:pt x="345762" y="340038"/>
+                </a:lnTo>
+                <a:close/>
+                <a:lnTo>
+                  <a:pt x="346907" y="338893"/>
+                </a:lnTo>
+                <a:close/>
+                <a:lnTo>
+                  <a:pt x="348052" y="337748"/>
+                </a:lnTo>
+                <a:close/>
+                <a:lnTo>
+                  <a:pt x="349197" y="336603"/>
+                </a:lnTo>
+                <a:close/>
+                <a:lnTo>
+                  <a:pt x="350342" y="335458"/>
+                </a:lnTo>
+                <a:close/>
+                <a:lnTo>
+                  <a:pt x="351487" y="334313"/>
+                </a:lnTo>
+                <a:close/>
+                <a:lnTo>
+                  <a:pt x="352632" y="333168"/>
+                </a:lnTo>
+                <a:close/>
+                <a:lnTo>
+                  <a:pt x="353777" y="332023"/>
+                </a:lnTo>
+                <a:close/>
+                <a:lnTo>
+                  <a:pt x="354922" y="330878"/>
+                </a:lnTo>
+                <a:close/>
+                <a:lnTo>
+                  <a:pt x="356066" y="329734"/>
+                </a:lnTo>
+                <a:close/>
+                <a:lnTo>
+                  <a:pt x="357211" y="328589"/>
+                </a:lnTo>
+                <a:close/>
+                <a:lnTo>
+                  <a:pt x="358356" y="327444"/>
+                </a:lnTo>
+                <a:close/>
+                <a:lnTo>
+                  <a:pt x="359501" y="326299"/>
+                </a:lnTo>
+                <a:close/>
+                <a:lnTo>
+                  <a:pt x="360646" y="325154"/>
+                </a:lnTo>
+                <a:close/>
+                <a:lnTo>
+                  <a:pt x="361791" y="324009"/>
+                </a:lnTo>
+                <a:close/>
+                <a:lnTo>
+                  <a:pt x="362936" y="322864"/>
+                </a:lnTo>
+                <a:close/>
+                <a:lnTo>
+                  <a:pt x="364081" y="321719"/>
+                </a:lnTo>
+                <a:close/>
+                <a:lnTo>
+                  <a:pt x="365226" y="320574"/>
+                </a:lnTo>
+                <a:close/>
+                <a:lnTo>
+                  <a:pt x="366371" y="319429"/>
+                </a:lnTo>
+                <a:close/>
+                <a:lnTo>
+                  <a:pt x="367516" y="318284"/>
+                </a:lnTo>
+                <a:close/>
+                <a:lnTo>
+                  <a:pt x="368660" y="317140"/>
+                </a:lnTo>
+                <a:close/>
+                <a:lnTo>
+                  <a:pt x="369805" y="315995"/>
+                </a:lnTo>
+                <a:close/>
+                <a:lnTo>
+                  <a:pt x="370950" y="314850"/>
+                </a:lnTo>
+                <a:close/>
+                <a:lnTo>
+                  <a:pt x="372095" y="313705"/>
+                </a:lnTo>
+                <a:close/>
+                <a:lnTo>
+                  <a:pt x="373240" y="312560"/>
+                </a:lnTo>
+                <a:close/>
+                <a:lnTo>
+                  <a:pt x="374385" y="311415"/>
+                </a:lnTo>
+                <a:close/>
+                <a:lnTo>
+                  <a:pt x="375530" y="310270"/>
+                </a:lnTo>
+                <a:close/>
+                <a:lnTo>
+                  <a:pt x="376675" y="309125"/>
+                </a:lnTo>
+                <a:close/>
+                <a:lnTo>
+                  <a:pt x="377820" y="307980"/>
+                </a:lnTo>
+                <a:close/>
+                <a:lnTo>
+                  <a:pt x="378965" y="306835"/>
+                </a:lnTo>
+                <a:close/>
+                <a:lnTo>
+                  <a:pt x="380110" y="305690"/>
+                </a:lnTo>
+                <a:close/>
+                <a:lnTo>
+                  <a:pt x="381254" y="304546"/>
+                </a:lnTo>
+                <a:close/>
+                <a:lnTo>
+                  <a:pt x="382399" y="303401"/>
+                </a:lnTo>
+                <a:close/>
+                <a:lnTo>
+                  <a:pt x="383544" y="302256"/>
+                </a:lnTo>
+                <a:close/>
+                <a:lnTo>
+                  <a:pt x="384689" y="301111"/>
+                </a:lnTo>
+                <a:close/>
+                <a:lnTo>
+                  <a:pt x="385834" y="299966"/>
+                </a:lnTo>
+                <a:close/>
+                <a:lnTo>
+                  <a:pt x="386979" y="298821"/>
+                </a:lnTo>
+                <a:close/>
+                <a:lnTo>
+                  <a:pt x="388124" y="297676"/>
+                </a:lnTo>
+                <a:close/>
+                <a:lnTo>
+                  <a:pt x="389269" y="296531"/>
+                </a:lnTo>
+                <a:close/>
+                <a:lnTo>
+                  <a:pt x="390414" y="295386"/>
+                </a:lnTo>
+                <a:close/>
+                <a:lnTo>
+                  <a:pt x="391559" y="294241"/>
+                </a:lnTo>
+                <a:close/>
+                <a:lnTo>
+                  <a:pt x="392704" y="293096"/>
+                </a:lnTo>
+                <a:close/>
+                <a:lnTo>
+                  <a:pt x="393848" y="291952"/>
+                </a:lnTo>
+                <a:close/>
+                <a:lnTo>
+                  <a:pt x="394993" y="290807"/>
+                </a:lnTo>
+                <a:close/>
+                <a:lnTo>
+                  <a:pt x="396138" y="289662"/>
+                </a:lnTo>
+                <a:close/>
+                <a:lnTo>
+                  <a:pt x="397283" y="288517"/>
+                </a:lnTo>
+                <a:close/>
+                <a:lnTo>
+                  <a:pt x="398428" y="287372"/>
+                </a:lnTo>
+                <a:close/>
+                <a:lnTo>
+                  <a:pt x="399573" y="286227"/>
+                </a:lnTo>
+                <a:close/>
+                <a:lnTo>
+                  <a:pt x="400718" y="285082"/>
+                </a:lnTo>
+                <a:close/>
+                <a:lnTo>
+                  <a:pt x="401863" y="283937"/>
+                </a:lnTo>
+                <a:close/>
+                <a:lnTo>
+                  <a:pt x="403008" y="282792"/>
+                </a:lnTo>
+                <a:close/>
+                <a:lnTo>
+                  <a:pt x="404153" y="281647"/>
+                </a:lnTo>
+                <a:close/>
+                <a:lnTo>
+                  <a:pt x="405297" y="280503"/>
+                </a:lnTo>
+                <a:close/>
+                <a:lnTo>
+                  <a:pt x="406442" y="279358"/>
+                </a:lnTo>
+                <a:close/>
+                <a:lnTo>
+                  <a:pt x="407587" y="278213"/>
+                </a:lnTo>
+                <a:close/>
+                <a:lnTo>
+                  <a:pt x="408732" y="277068"/>
+                </a:lnTo>
+                <a:close/>
+                <a:lnTo>
+                  <a:pt x="409877" y="275923"/>
+                </a:lnTo>
+                <a:close/>
+                <a:lnTo>
+                  <a:pt x="411022" y="274778"/>
+                </a:lnTo>
+                <a:close/>
+                <a:lnTo>
+                  <a:pt x="412167" y="273633"/>
+                </a:lnTo>
+                <a:close/>
+                <a:lnTo>
+                  <a:pt x="413312" y="272488"/>
+                </a:lnTo>
+                <a:close/>
+                <a:lnTo>
+                  <a:pt x="414457" y="271343"/>
+                </a:lnTo>
+                <a:close/>
+                <a:lnTo>
+                  <a:pt x="415602" y="270198"/>
+                </a:lnTo>
+                <a:close/>
+                <a:lnTo>
+                  <a:pt x="416747" y="269053"/>
+                </a:lnTo>
+                <a:close/>
+                <a:lnTo>
+                  <a:pt x="417891" y="267909"/>
+                </a:lnTo>
+                <a:close/>
+                <a:lnTo>
+                  <a:pt x="419036" y="266764"/>
+                </a:lnTo>
+                <a:close/>
+                <a:lnTo>
+                  <a:pt x="420181" y="265619"/>
+                </a:lnTo>
+                <a:close/>
+                <a:lnTo>
+                  <a:pt x="421326" y="264474"/>
+                </a:lnTo>
+                <a:close/>
+                <a:lnTo>
+                  <a:pt x="422471" y="263329"/>
+                </a:lnTo>
+                <a:close/>
+                <a:lnTo>
+                  <a:pt x="423616" y="262184"/>
+                </a:lnTo>
+                <a:close/>
+                <a:lnTo>
+                  <a:pt x="424761" y="261039"/>
+                </a:lnTo>
+                <a:close/>
+                <a:lnTo>
+                  <a:pt x="425906" y="259894"/>
+                </a:lnTo>
+                <a:close/>
+                <a:lnTo>
+                  <a:pt x="427051" y="258749"/>
+                </a:lnTo>
+                <a:close/>
+                <a:lnTo>
+                  <a:pt x="428196" y="257604"/>
+                </a:lnTo>
+                <a:close/>
+                <a:lnTo>
+                  <a:pt x="429341" y="256459"/>
+                </a:lnTo>
+                <a:close/>
+                <a:lnTo>
+                  <a:pt x="430485" y="255315"/>
+                </a:lnTo>
+                <a:close/>
+                <a:lnTo>
+                  <a:pt x="431630" y="254170"/>
+                </a:lnTo>
+                <a:close/>
+                <a:lnTo>
+                  <a:pt x="432775" y="253025"/>
+                </a:lnTo>
+                <a:close/>
+                <a:lnTo>
+                  <a:pt x="433920" y="251880"/>
+                </a:lnTo>
+                <a:close/>
+                <a:lnTo>
+                  <a:pt x="435065" y="250735"/>
+                </a:lnTo>
+                <a:close/>
+                <a:lnTo>
+                  <a:pt x="436210" y="249590"/>
+                </a:lnTo>
+                <a:close/>
+                <a:lnTo>
+                  <a:pt x="437355" y="248445"/>
+                </a:lnTo>
+                <a:close/>
+                <a:lnTo>
+                  <a:pt x="438500" y="247300"/>
+                </a:lnTo>
+                <a:close/>
+                <a:lnTo>
+                  <a:pt x="439645" y="246155"/>
+                </a:lnTo>
+                <a:close/>
+                <a:lnTo>
+                  <a:pt x="440790" y="245010"/>
+                </a:lnTo>
+                <a:close/>
+                <a:lnTo>
+                  <a:pt x="441935" y="243865"/>
+                </a:lnTo>
+                <a:close/>
+                <a:lnTo>
+                  <a:pt x="443079" y="242721"/>
+                </a:lnTo>
+                <a:close/>
+                <a:lnTo>
+                  <a:pt x="444224" y="241576"/>
+                </a:lnTo>
+                <a:close/>
+                <a:lnTo>
+                  <a:pt x="445369" y="240431"/>
+                </a:lnTo>
+                <a:close/>
+                <a:lnTo>
+                  <a:pt x="446514" y="239286"/>
+                </a:lnTo>
+                <a:close/>
+                <a:lnTo>
+                  <a:pt x="447659" y="238141"/>
+                </a:lnTo>
+                <a:close/>
+                <a:lnTo>
+                  <a:pt x="448804" y="236996"/>
+                </a:lnTo>
+                <a:close/>
+                <a:lnTo>
+                  <a:pt x="449949" y="235851"/>
+                </a:lnTo>
+                <a:close/>
+                <a:lnTo>
+                  <a:pt x="451094" y="234706"/>
+                </a:lnTo>
+                <a:close/>
+                <a:lnTo>
+                  <a:pt x="452239" y="233561"/>
+                </a:lnTo>
+                <a:close/>
+                <a:lnTo>
+                  <a:pt x="453384" y="232416"/>
+                </a:lnTo>
+                <a:close/>
+                <a:lnTo>
+                  <a:pt x="454529" y="231271"/>
+                </a:lnTo>
+                <a:close/>
+                <a:lnTo>
+                  <a:pt x="455673" y="230127"/>
+                </a:lnTo>
+                <a:close/>
+                <a:lnTo>
+                  <a:pt x="456818" y="228982"/>
+                </a:lnTo>
+                <a:close/>
+                <a:lnTo>
+                  <a:pt x="457963" y="227837"/>
+                </a:lnTo>
+                <a:close/>
+                <a:lnTo>
+                  <a:pt x="459108" y="226692"/>
+                </a:lnTo>
+                <a:close/>
+                <a:lnTo>
+                  <a:pt x="460253" y="225547"/>
+                </a:lnTo>
+                <a:close/>
+                <a:lnTo>
+                  <a:pt x="461398" y="224402"/>
+                </a:lnTo>
+                <a:close/>
+                <a:lnTo>
+                  <a:pt x="462543" y="223257"/>
+                </a:lnTo>
+                <a:close/>
+                <a:lnTo>
+                  <a:pt x="463688" y="222112"/>
+                </a:lnTo>
+                <a:close/>
+                <a:lnTo>
+                  <a:pt x="464833" y="220967"/>
+                </a:lnTo>
+                <a:close/>
+                <a:lnTo>
+                  <a:pt x="465978" y="219822"/>
+                </a:lnTo>
+                <a:close/>
+                <a:lnTo>
+                  <a:pt x="467123" y="218677"/>
+                </a:lnTo>
+                <a:close/>
+                <a:lnTo>
+                  <a:pt x="468267" y="217533"/>
+                </a:lnTo>
+                <a:close/>
+                <a:lnTo>
+                  <a:pt x="469412" y="216388"/>
+                </a:lnTo>
+                <a:close/>
+                <a:lnTo>
+                  <a:pt x="470557" y="215243"/>
+                </a:lnTo>
+                <a:close/>
+                <a:lnTo>
+                  <a:pt x="471702" y="214098"/>
+                </a:lnTo>
+                <a:close/>
+                <a:lnTo>
+                  <a:pt x="472847" y="212953"/>
+                </a:lnTo>
+                <a:close/>
+                <a:lnTo>
+                  <a:pt x="473992" y="211808"/>
+                </a:lnTo>
+                <a:close/>
+                <a:lnTo>
+                  <a:pt x="475137" y="210663"/>
+                </a:lnTo>
+                <a:close/>
+                <a:lnTo>
+                  <a:pt x="476282" y="209518"/>
+                </a:lnTo>
+                <a:close/>
+                <a:lnTo>
+                  <a:pt x="477427" y="208373"/>
+                </a:lnTo>
+                <a:close/>
+                <a:lnTo>
+                  <a:pt x="478572" y="207228"/>
+                </a:lnTo>
+                <a:close/>
+                <a:lnTo>
+                  <a:pt x="479717" y="206083"/>
+                </a:lnTo>
+                <a:close/>
+                <a:lnTo>
+                  <a:pt x="480861" y="204939"/>
+                </a:lnTo>
+                <a:close/>
+                <a:lnTo>
+                  <a:pt x="482006" y="203794"/>
+                </a:lnTo>
+                <a:close/>
+                <a:lnTo>
+                  <a:pt x="483151" y="202649"/>
+                </a:lnTo>
+                <a:close/>
+                <a:lnTo>
+                  <a:pt x="484296" y="201504"/>
+                </a:lnTo>
+                <a:close/>
+                <a:lnTo>
+                  <a:pt x="485441" y="200359"/>
+                </a:lnTo>
+                <a:close/>
+                <a:lnTo>
+                  <a:pt x="486586" y="199214"/>
+                </a:lnTo>
+                <a:close/>
+                <a:lnTo>
+                  <a:pt x="487731" y="198069"/>
+                </a:lnTo>
+                <a:close/>
+                <a:lnTo>
+                  <a:pt x="488876" y="196924"/>
+                </a:lnTo>
+                <a:close/>
+                <a:lnTo>
+                  <a:pt x="490021" y="195779"/>
+                </a:lnTo>
+                <a:close/>
+                <a:lnTo>
+                  <a:pt x="491166" y="194634"/>
+                </a:lnTo>
+                <a:close/>
+                <a:lnTo>
+                  <a:pt x="492311" y="193489"/>
+                </a:lnTo>
+                <a:close/>
+                <a:lnTo>
+                  <a:pt x="493455" y="192345"/>
+                </a:lnTo>
+                <a:close/>
+                <a:lnTo>
+                  <a:pt x="494600" y="191200"/>
+                </a:lnTo>
+                <a:close/>
+                <a:lnTo>
+                  <a:pt x="495745" y="190055"/>
+                </a:lnTo>
+                <a:close/>
+                <a:lnTo>
+                  <a:pt x="496890" y="188910"/>
+                </a:lnTo>
+                <a:close/>
+                <a:lnTo>
+                  <a:pt x="498035" y="187765"/>
+                </a:lnTo>
+                <a:close/>
+                <a:lnTo>
+                  <a:pt x="499180" y="186620"/>
+                </a:lnTo>
+                <a:close/>
+                <a:lnTo>
+                  <a:pt x="500325" y="185475"/>
+                </a:lnTo>
+                <a:close/>
+                <a:lnTo>
+                  <a:pt x="501470" y="184330"/>
+                </a:lnTo>
+                <a:close/>
+                <a:lnTo>
+                  <a:pt x="502615" y="183185"/>
+                </a:lnTo>
+                <a:close/>
+                <a:lnTo>
+                  <a:pt x="503760" y="182040"/>
+                </a:lnTo>
+                <a:close/>
+                <a:lnTo>
+                  <a:pt x="504905" y="180895"/>
+                </a:lnTo>
+                <a:close/>
+                <a:lnTo>
+                  <a:pt x="506049" y="179751"/>
+                </a:lnTo>
+                <a:close/>
+                <a:lnTo>
+                  <a:pt x="507194" y="178606"/>
+                </a:lnTo>
+                <a:close/>
+                <a:lnTo>
+                  <a:pt x="508339" y="177461"/>
+                </a:lnTo>
+                <a:close/>
+                <a:lnTo>
+                  <a:pt x="509484" y="176316"/>
+                </a:lnTo>
+                <a:close/>
+                <a:lnTo>
+                  <a:pt x="510629" y="175171"/>
+                </a:lnTo>
+                <a:close/>
+                <a:lnTo>
+                  <a:pt x="511774" y="174026"/>
+                </a:lnTo>
+                <a:close/>
+                <a:lnTo>
+                  <a:pt x="512919" y="172881"/>
+                </a:lnTo>
+                <a:close/>
+                <a:lnTo>
+                  <a:pt x="514064" y="171736"/>
+                </a:lnTo>
+                <a:close/>
+                <a:lnTo>
+                  <a:pt x="515209" y="170591"/>
+                </a:lnTo>
+                <a:close/>
+                <a:lnTo>
+                  <a:pt x="516354" y="169446"/>
+                </a:lnTo>
+                <a:close/>
+                <a:lnTo>
+                  <a:pt x="517498" y="168302"/>
+                </a:lnTo>
+                <a:close/>
+                <a:lnTo>
+                  <a:pt x="518643" y="167157"/>
+                </a:lnTo>
+                <a:close/>
+                <a:lnTo>
+                  <a:pt x="519788" y="166012"/>
+                </a:lnTo>
+                <a:close/>
+                <a:lnTo>
+                  <a:pt x="520933" y="164867"/>
+                </a:lnTo>
+                <a:close/>
+                <a:lnTo>
+                  <a:pt x="522078" y="163722"/>
+                </a:lnTo>
+                <a:close/>
+                <a:lnTo>
+                  <a:pt x="523223" y="162577"/>
+                </a:lnTo>
+                <a:close/>
+                <a:lnTo>
+                  <a:pt x="524368" y="161432"/>
+                </a:lnTo>
+                <a:close/>
+                <a:lnTo>
+                  <a:pt x="525513" y="160287"/>
+                </a:lnTo>
+                <a:close/>
+                <a:lnTo>
+                  <a:pt x="526658" y="159142"/>
+                </a:lnTo>
+                <a:close/>
+                <a:lnTo>
+                  <a:pt x="527803" y="157997"/>
+                </a:lnTo>
+                <a:close/>
+                <a:lnTo>
+                  <a:pt x="528948" y="156852"/>
+                </a:lnTo>
+                <a:close/>
+                <a:lnTo>
+                  <a:pt x="530092" y="155708"/>
+                </a:lnTo>
+                <a:close/>
+                <a:lnTo>
+                  <a:pt x="531237" y="154563"/>
+                </a:lnTo>
+                <a:close/>
+                <a:lnTo>
+                  <a:pt x="532382" y="153418"/>
+                </a:lnTo>
+                <a:close/>
+                <a:lnTo>
+                  <a:pt x="533527" y="152273"/>
+                </a:lnTo>
+                <a:close/>
+                <a:lnTo>
+                  <a:pt x="534672" y="151128"/>
+                </a:lnTo>
+                <a:close/>
+                <a:lnTo>
+                  <a:pt x="535817" y="149983"/>
+                </a:lnTo>
+                <a:close/>
+                <a:lnTo>
+                  <a:pt x="536962" y="148838"/>
+                </a:lnTo>
+                <a:close/>
+                <a:lnTo>
+                  <a:pt x="538107" y="147693"/>
+                </a:lnTo>
+                <a:close/>
+                <a:lnTo>
+                  <a:pt x="539252" y="146548"/>
+                </a:lnTo>
+                <a:close/>
+                <a:lnTo>
+                  <a:pt x="540397" y="145403"/>
+                </a:lnTo>
+                <a:close/>
+                <a:lnTo>
+                  <a:pt x="541542" y="144258"/>
+                </a:lnTo>
+                <a:close/>
+                <a:lnTo>
+                  <a:pt x="542686" y="143114"/>
+                </a:lnTo>
+                <a:close/>
+                <a:lnTo>
+                  <a:pt x="543831" y="141969"/>
+                </a:lnTo>
+                <a:close/>
+                <a:lnTo>
+                  <a:pt x="544976" y="140824"/>
+                </a:lnTo>
+                <a:close/>
+                <a:lnTo>
+                  <a:pt x="546121" y="139679"/>
+                </a:lnTo>
+                <a:close/>
+                <a:lnTo>
+                  <a:pt x="547266" y="138534"/>
+                </a:lnTo>
+                <a:close/>
+                <a:lnTo>
+                  <a:pt x="548411" y="137389"/>
+                </a:lnTo>
+                <a:close/>
+                <a:lnTo>
+                  <a:pt x="549556" y="136244"/>
+                </a:lnTo>
+                <a:close/>
+                <a:lnTo>
+                  <a:pt x="550701" y="135099"/>
+                </a:lnTo>
+                <a:close/>
+                <a:lnTo>
+                  <a:pt x="551846" y="133954"/>
+                </a:lnTo>
+                <a:close/>
+                <a:lnTo>
+                  <a:pt x="552991" y="132809"/>
+                </a:lnTo>
+                <a:close/>
+                <a:lnTo>
+                  <a:pt x="554136" y="131664"/>
+                </a:lnTo>
+                <a:close/>
+                <a:lnTo>
+                  <a:pt x="555280" y="130520"/>
+                </a:lnTo>
+                <a:close/>
+                <a:lnTo>
+                  <a:pt x="556425" y="129375"/>
+                </a:lnTo>
+                <a:close/>
+                <a:lnTo>
+                  <a:pt x="557570" y="128230"/>
+                </a:lnTo>
+                <a:close/>
+                <a:lnTo>
+                  <a:pt x="558715" y="127085"/>
+                </a:lnTo>
+                <a:close/>
+                <a:lnTo>
+                  <a:pt x="559860" y="125940"/>
+                </a:lnTo>
+                <a:close/>
+                <a:lnTo>
+                  <a:pt x="561005" y="124795"/>
+                </a:lnTo>
+                <a:close/>
+                <a:lnTo>
+                  <a:pt x="562150" y="123650"/>
+                </a:lnTo>
+                <a:close/>
+                <a:lnTo>
+                  <a:pt x="563295" y="122505"/>
+                </a:lnTo>
+                <a:close/>
+                <a:lnTo>
+                  <a:pt x="564440" y="121360"/>
+                </a:lnTo>
+                <a:close/>
+                <a:lnTo>
+                  <a:pt x="565585" y="120215"/>
+                </a:lnTo>
+                <a:close/>
+                <a:lnTo>
+                  <a:pt x="566730" y="119070"/>
+                </a:lnTo>
+                <a:close/>
+                <a:lnTo>
+                  <a:pt x="567874" y="117926"/>
+                </a:lnTo>
+                <a:close/>
+                <a:lnTo>
+                  <a:pt x="569019" y="116781"/>
+                </a:lnTo>
+                <a:close/>
+                <a:lnTo>
+                  <a:pt x="570164" y="115636"/>
+                </a:lnTo>
+                <a:close/>
+                <a:lnTo>
+                  <a:pt x="571309" y="114491"/>
+                </a:lnTo>
+                <a:close/>
+                <a:lnTo>
+                  <a:pt x="572454" y="113346"/>
+                </a:lnTo>
+                <a:close/>
+                <a:lnTo>
+                  <a:pt x="573599" y="112201"/>
+                </a:lnTo>
+                <a:close/>
+                <a:lnTo>
+                  <a:pt x="574744" y="111056"/>
+                </a:lnTo>
+                <a:close/>
+                <a:lnTo>
+                  <a:pt x="575889" y="109911"/>
+                </a:lnTo>
+                <a:close/>
+                <a:lnTo>
+                  <a:pt x="577034" y="108766"/>
+                </a:lnTo>
+                <a:close/>
+                <a:lnTo>
+                  <a:pt x="578179" y="107621"/>
+                </a:lnTo>
+                <a:close/>
+                <a:lnTo>
+                  <a:pt x="579324" y="106476"/>
+                </a:lnTo>
+                <a:close/>
+                <a:lnTo>
+                  <a:pt x="580468" y="105332"/>
+                </a:lnTo>
+                <a:close/>
+                <a:lnTo>
+                  <a:pt x="581613" y="104187"/>
+                </a:lnTo>
+                <a:close/>
+                <a:lnTo>
+                  <a:pt x="582758" y="103042"/>
+                </a:lnTo>
+                <a:close/>
+                <a:lnTo>
+                  <a:pt x="583903" y="101897"/>
+                </a:lnTo>
+                <a:close/>
+                <a:lnTo>
+                  <a:pt x="585048" y="100752"/>
+                </a:lnTo>
+                <a:close/>
+                <a:lnTo>
+                  <a:pt x="586193" y="99607"/>
+                </a:lnTo>
+                <a:close/>
+                <a:lnTo>
+                  <a:pt x="587338" y="98462"/>
+                </a:lnTo>
+                <a:close/>
+                <a:lnTo>
+                  <a:pt x="588483" y="97317"/>
+                </a:lnTo>
+                <a:close/>
+                <a:lnTo>
+                  <a:pt x="589628" y="96172"/>
+                </a:lnTo>
+                <a:close/>
+                <a:lnTo>
+                  <a:pt x="590773" y="95027"/>
+                </a:lnTo>
+                <a:close/>
+                <a:lnTo>
+                  <a:pt x="591918" y="93882"/>
+                </a:lnTo>
+                <a:close/>
+                <a:lnTo>
+                  <a:pt x="593062" y="92738"/>
+                </a:lnTo>
+                <a:close/>
+                <a:lnTo>
+                  <a:pt x="594207" y="91593"/>
+                </a:lnTo>
+                <a:close/>
+                <a:lnTo>
+                  <a:pt x="595352" y="90448"/>
+                </a:lnTo>
+                <a:close/>
+                <a:lnTo>
+                  <a:pt x="596497" y="89303"/>
+                </a:lnTo>
+                <a:close/>
+                <a:lnTo>
+                  <a:pt x="597642" y="88158"/>
+                </a:lnTo>
+                <a:close/>
+                <a:lnTo>
+                  <a:pt x="598787" y="87013"/>
+                </a:lnTo>
+                <a:close/>
+                <a:lnTo>
+                  <a:pt x="599932" y="85868"/>
+                </a:lnTo>
+                <a:close/>
+                <a:lnTo>
+                  <a:pt x="601077" y="84723"/>
+                </a:lnTo>
+                <a:close/>
+                <a:lnTo>
+                  <a:pt x="602222" y="83578"/>
+                </a:lnTo>
+                <a:close/>
+                <a:lnTo>
+                  <a:pt x="603367" y="82433"/>
+                </a:lnTo>
+                <a:close/>
+                <a:lnTo>
+                  <a:pt x="604512" y="81288"/>
+                </a:lnTo>
+                <a:close/>
+                <a:lnTo>
+                  <a:pt x="605656" y="80144"/>
+                </a:lnTo>
+                <a:close/>
+                <a:lnTo>
+                  <a:pt x="606801" y="78999"/>
+                </a:lnTo>
+                <a:close/>
+                <a:lnTo>
+                  <a:pt x="607946" y="77854"/>
+                </a:lnTo>
+                <a:close/>
+                <a:lnTo>
+                  <a:pt x="609091" y="76709"/>
+                </a:lnTo>
+                <a:close/>
+                <a:lnTo>
+                  <a:pt x="610236" y="75564"/>
+                </a:lnTo>
+                <a:close/>
+                <a:lnTo>
+                  <a:pt x="611381" y="74419"/>
+                </a:lnTo>
+                <a:close/>
+                <a:lnTo>
+                  <a:pt x="612526" y="73274"/>
+                </a:lnTo>
+                <a:close/>
+                <a:lnTo>
+                  <a:pt x="613671" y="72129"/>
+                </a:lnTo>
+                <a:close/>
+                <a:lnTo>
+                  <a:pt x="614816" y="70984"/>
+                </a:lnTo>
+                <a:close/>
+                <a:lnTo>
+                  <a:pt x="615961" y="69839"/>
+                </a:lnTo>
+                <a:close/>
+                <a:lnTo>
+                  <a:pt x="617106" y="68694"/>
+                </a:lnTo>
+                <a:close/>
+                <a:lnTo>
+                  <a:pt x="618250" y="67550"/>
+                </a:lnTo>
+                <a:close/>
+                <a:lnTo>
+                  <a:pt x="619395" y="66405"/>
+                </a:lnTo>
+                <a:close/>
+                <a:lnTo>
+                  <a:pt x="620540" y="65260"/>
+                </a:lnTo>
+                <a:close/>
+                <a:lnTo>
+                  <a:pt x="621685" y="64115"/>
+                </a:lnTo>
+                <a:close/>
+                <a:lnTo>
+                  <a:pt x="622830" y="62970"/>
+                </a:lnTo>
+                <a:close/>
+                <a:lnTo>
+                  <a:pt x="623975" y="61825"/>
+                </a:lnTo>
+                <a:close/>
+                <a:lnTo>
+                  <a:pt x="625120" y="60680"/>
+                </a:lnTo>
+                <a:close/>
+                <a:lnTo>
+                  <a:pt x="626265" y="59535"/>
+                </a:lnTo>
+                <a:close/>
+                <a:lnTo>
+                  <a:pt x="627410" y="58390"/>
+                </a:lnTo>
+                <a:close/>
+                <a:lnTo>
+                  <a:pt x="628555" y="57245"/>
+                </a:lnTo>
+                <a:close/>
+                <a:lnTo>
+                  <a:pt x="629699" y="56101"/>
+                </a:lnTo>
+                <a:close/>
+                <a:lnTo>
+                  <a:pt x="630844" y="54956"/>
+                </a:lnTo>
+                <a:close/>
+                <a:lnTo>
+                  <a:pt x="631989" y="53811"/>
+                </a:lnTo>
+                <a:close/>
+                <a:lnTo>
+                  <a:pt x="633134" y="52666"/>
+                </a:lnTo>
+                <a:close/>
+                <a:lnTo>
+                  <a:pt x="634279" y="51521"/>
+                </a:lnTo>
+                <a:close/>
+                <a:lnTo>
+                  <a:pt x="635424" y="50376"/>
+                </a:lnTo>
+                <a:close/>
+                <a:lnTo>
+                  <a:pt x="636569" y="49231"/>
+                </a:lnTo>
+                <a:close/>
+                <a:lnTo>
+                  <a:pt x="637714" y="48086"/>
+                </a:lnTo>
+                <a:close/>
+                <a:lnTo>
+                  <a:pt x="638859" y="46941"/>
+                </a:lnTo>
+                <a:close/>
+                <a:lnTo>
+                  <a:pt x="640004" y="45796"/>
+                </a:lnTo>
+                <a:close/>
+                <a:lnTo>
+                  <a:pt x="641149" y="44651"/>
+                </a:lnTo>
+                <a:close/>
+                <a:lnTo>
+                  <a:pt x="642293" y="43507"/>
+                </a:lnTo>
+                <a:close/>
+                <a:lnTo>
+                  <a:pt x="643438" y="42362"/>
+                </a:lnTo>
+                <a:close/>
+                <a:lnTo>
+                  <a:pt x="644583" y="41217"/>
+                </a:lnTo>
+                <a:close/>
+                <a:lnTo>
+                  <a:pt x="645728" y="40072"/>
+                </a:lnTo>
+                <a:close/>
+                <a:lnTo>
+                  <a:pt x="646873" y="38927"/>
+                </a:lnTo>
+                <a:close/>
+                <a:lnTo>
+                  <a:pt x="648018" y="37782"/>
+                </a:lnTo>
+                <a:close/>
+                <a:lnTo>
+                  <a:pt x="649163" y="36637"/>
+                </a:lnTo>
+                <a:close/>
+                <a:lnTo>
+                  <a:pt x="650308" y="35492"/>
+                </a:lnTo>
+                <a:close/>
+                <a:lnTo>
+                  <a:pt x="651453" y="34347"/>
+                </a:lnTo>
+                <a:close/>
+                <a:lnTo>
+                  <a:pt x="652598" y="33202"/>
+                </a:lnTo>
+                <a:close/>
+                <a:lnTo>
+                  <a:pt x="653743" y="32057"/>
+                </a:lnTo>
+                <a:close/>
+                <a:lnTo>
+                  <a:pt x="654887" y="30913"/>
+                </a:lnTo>
+                <a:close/>
+                <a:lnTo>
+                  <a:pt x="656032" y="29768"/>
+                </a:lnTo>
+                <a:close/>
+                <a:lnTo>
+                  <a:pt x="657177" y="28623"/>
+                </a:lnTo>
+                <a:close/>
+                <a:lnTo>
+                  <a:pt x="658322" y="27478"/>
+                </a:lnTo>
+                <a:close/>
+                <a:lnTo>
+                  <a:pt x="659467" y="26333"/>
+                </a:lnTo>
+                <a:close/>
+                <a:lnTo>
+                  <a:pt x="660612" y="25188"/>
+                </a:lnTo>
+                <a:close/>
+                <a:lnTo>
+                  <a:pt x="661757" y="24043"/>
+                </a:lnTo>
+                <a:close/>
+                <a:lnTo>
+                  <a:pt x="662902" y="22898"/>
+                </a:lnTo>
+                <a:close/>
+                <a:lnTo>
+                  <a:pt x="664047" y="21753"/>
+                </a:lnTo>
+                <a:close/>
+                <a:lnTo>
+                  <a:pt x="665192" y="20608"/>
+                </a:lnTo>
+                <a:close/>
+                <a:lnTo>
+                  <a:pt x="666337" y="19463"/>
+                </a:lnTo>
+                <a:close/>
+                <a:lnTo>
+                  <a:pt x="667481" y="18319"/>
+                </a:lnTo>
+                <a:close/>
+                <a:lnTo>
+                  <a:pt x="668626" y="17174"/>
+                </a:lnTo>
+                <a:close/>
+                <a:lnTo>
+                  <a:pt x="669771" y="16029"/>
+                </a:lnTo>
+                <a:close/>
+                <a:lnTo>
+                  <a:pt x="670916" y="14884"/>
+                </a:lnTo>
+                <a:close/>
+                <a:lnTo>
+                  <a:pt x="672061" y="13739"/>
+                </a:lnTo>
+                <a:close/>
+                <a:lnTo>
+                  <a:pt x="673206" y="12594"/>
+                </a:lnTo>
+                <a:close/>
+                <a:lnTo>
+                  <a:pt x="674351" y="11449"/>
+                </a:lnTo>
+                <a:close/>
+                <a:lnTo>
+                  <a:pt x="675496" y="10304"/>
+                </a:lnTo>
+                <a:close/>
+                <a:lnTo>
+                  <a:pt x="676641" y="9159"/>
+                </a:lnTo>
+                <a:close/>
+                <a:lnTo>
+                  <a:pt x="677786" y="8014"/>
+                </a:lnTo>
+                <a:close/>
+                <a:lnTo>
+                  <a:pt x="678931" y="6869"/>
+                </a:lnTo>
+                <a:close/>
+                <a:lnTo>
+                  <a:pt x="680075" y="5725"/>
+                </a:lnTo>
+                <a:close/>
+                <a:lnTo>
+                  <a:pt x="681220" y="4580"/>
+                </a:lnTo>
+                <a:close/>
+                <a:lnTo>
+                  <a:pt x="682365" y="3435"/>
+                </a:lnTo>
+                <a:close/>
+                <a:lnTo>
+                  <a:pt x="683510" y="2290"/>
+                </a:lnTo>
+                <a:close/>
+                <a:lnTo>
+                  <a:pt x="684655" y="1145"/>
                 </a:lnTo>
                 <a:close/>
                 <a:lnTo>
@@ -5780,8 +8180,8 @@
         </p:nvSpPr>
         <p:spPr>
           <a:xfrm>
-            <a:off x="4953000" y="2038350"/>
-            <a:ext cx="152400" cy="152400"/>
+            <a:off x="4940300" y="2025650"/>
+            <a:ext cx="177800" cy="177800"/>
           </a:xfrm>
           <a:prstGeom prst="ellipse">
             <a:avLst/>
@@ -5789,500 +8189,6 @@
           <a:solidFill>
             <a:srgbClr val="000000"/>
           </a:solidFill>
-          <a:ln w="12700">
-            <a:solidFill>
-              <a:srgbClr val="FFFFFF"/>
-            </a:solidFill>
-          </a:ln>
-        </p:spPr>
-        <p:style>
-          <a:lnRef idx="1">
-            <a:schemeClr val="accent1"/>
-          </a:lnRef>
-          <a:fillRef idx="3">
-            <a:schemeClr val="accent1"/>
-          </a:fillRef>
-          <a:effectRef idx="2">
-            <a:schemeClr val="accent1"/>
-          </a:effectRef>
-          <a:fontRef idx="minor">
-            <a:schemeClr val="lt1"/>
-          </a:fontRef>
-        </p:style>
-        <p:txBody>
-          <a:bodyPr rtlCol="0" anchor="ctr"/>
-          <a:lstStyle/>
-          <a:p>
-            <a:pPr algn="ctr"/>
-          </a:p>
-        </p:txBody>
-      </p:sp>
-      <p:sp>
-        <p:nvSpPr>
-          <p:cNvPr id="10" name="Oval 9"/>
-          <p:cNvSpPr/>
-          <p:nvPr/>
-        </p:nvSpPr>
-        <p:spPr>
-          <a:xfrm>
-            <a:off x="4953000" y="1581150"/>
-            <a:ext cx="152400" cy="152400"/>
-          </a:xfrm>
-          <a:prstGeom prst="ellipse">
-            <a:avLst/>
-          </a:prstGeom>
-          <a:solidFill>
-            <a:srgbClr val="FFFFFF"/>
-          </a:solidFill>
-          <a:ln w="12700">
-            <a:solidFill>
-              <a:srgbClr val="FFFFFF"/>
-            </a:solidFill>
-          </a:ln>
-        </p:spPr>
-        <p:style>
-          <a:lnRef idx="1">
-            <a:schemeClr val="accent1"/>
-          </a:lnRef>
-          <a:fillRef idx="3">
-            <a:schemeClr val="accent1"/>
-          </a:fillRef>
-          <a:effectRef idx="2">
-            <a:schemeClr val="accent1"/>
-          </a:effectRef>
-          <a:fontRef idx="minor">
-            <a:schemeClr val="lt1"/>
-          </a:fontRef>
-        </p:style>
-        <p:txBody>
-          <a:bodyPr rtlCol="0" anchor="ctr"/>
-          <a:lstStyle/>
-          <a:p>
-            <a:pPr algn="ctr"/>
-          </a:p>
-        </p:txBody>
-      </p:sp>
-      <p:sp>
-        <p:nvSpPr>
-          <p:cNvPr id="11" name="Freeform 10"/>
-          <p:cNvSpPr/>
-          <p:nvPr/>
-        </p:nvSpPr>
-        <p:spPr>
-          <a:xfrm>
-            <a:off x="4663440" y="1748790"/>
-            <a:ext cx="228600" cy="228600"/>
-          </a:xfrm>
-          <a:custGeom>
-            <a:avLst/>
-            <a:gdLst/>
-            <a:ahLst/>
-            <a:cxnLst/>
-            <a:rect l="l" t="t" r="r" b="b"/>
-            <a:pathLst>
-              <a:path w="228600" h="228600">
-                <a:moveTo>
-                  <a:pt x="0" y="0"/>
-                </a:moveTo>
-                <a:lnTo>
-                  <a:pt x="2309" y="2309"/>
-                </a:lnTo>
-                <a:close/>
-                <a:lnTo>
-                  <a:pt x="4618" y="4618"/>
-                </a:lnTo>
-                <a:close/>
-                <a:lnTo>
-                  <a:pt x="6927" y="6927"/>
-                </a:lnTo>
-                <a:close/>
-                <a:lnTo>
-                  <a:pt x="9236" y="9236"/>
-                </a:lnTo>
-                <a:close/>
-                <a:lnTo>
-                  <a:pt x="11545" y="11545"/>
-                </a:lnTo>
-                <a:close/>
-                <a:lnTo>
-                  <a:pt x="13855" y="13855"/>
-                </a:lnTo>
-                <a:close/>
-                <a:lnTo>
-                  <a:pt x="16164" y="16164"/>
-                </a:lnTo>
-                <a:close/>
-                <a:lnTo>
-                  <a:pt x="18473" y="18473"/>
-                </a:lnTo>
-                <a:close/>
-                <a:lnTo>
-                  <a:pt x="20782" y="20782"/>
-                </a:lnTo>
-                <a:close/>
-                <a:lnTo>
-                  <a:pt x="23091" y="23091"/>
-                </a:lnTo>
-                <a:close/>
-                <a:lnTo>
-                  <a:pt x="25400" y="25400"/>
-                </a:lnTo>
-                <a:close/>
-                <a:lnTo>
-                  <a:pt x="27709" y="27709"/>
-                </a:lnTo>
-                <a:close/>
-                <a:lnTo>
-                  <a:pt x="30018" y="30018"/>
-                </a:lnTo>
-                <a:close/>
-                <a:lnTo>
-                  <a:pt x="32327" y="32327"/>
-                </a:lnTo>
-                <a:close/>
-                <a:lnTo>
-                  <a:pt x="34636" y="34636"/>
-                </a:lnTo>
-                <a:close/>
-                <a:lnTo>
-                  <a:pt x="36945" y="36945"/>
-                </a:lnTo>
-                <a:close/>
-                <a:lnTo>
-                  <a:pt x="39255" y="39255"/>
-                </a:lnTo>
-                <a:close/>
-                <a:lnTo>
-                  <a:pt x="41564" y="41564"/>
-                </a:lnTo>
-                <a:close/>
-                <a:lnTo>
-                  <a:pt x="43873" y="43873"/>
-                </a:lnTo>
-                <a:close/>
-                <a:lnTo>
-                  <a:pt x="46182" y="46182"/>
-                </a:lnTo>
-                <a:close/>
-                <a:lnTo>
-                  <a:pt x="48491" y="48491"/>
-                </a:lnTo>
-                <a:close/>
-                <a:lnTo>
-                  <a:pt x="50800" y="50800"/>
-                </a:lnTo>
-                <a:close/>
-                <a:lnTo>
-                  <a:pt x="53109" y="53109"/>
-                </a:lnTo>
-                <a:close/>
-                <a:lnTo>
-                  <a:pt x="55418" y="55418"/>
-                </a:lnTo>
-                <a:close/>
-                <a:lnTo>
-                  <a:pt x="57727" y="57727"/>
-                </a:lnTo>
-                <a:close/>
-                <a:lnTo>
-                  <a:pt x="60036" y="60036"/>
-                </a:lnTo>
-                <a:close/>
-                <a:lnTo>
-                  <a:pt x="62345" y="62345"/>
-                </a:lnTo>
-                <a:close/>
-                <a:lnTo>
-                  <a:pt x="64655" y="64655"/>
-                </a:lnTo>
-                <a:close/>
-                <a:lnTo>
-                  <a:pt x="66964" y="66964"/>
-                </a:lnTo>
-                <a:close/>
-                <a:lnTo>
-                  <a:pt x="69273" y="69273"/>
-                </a:lnTo>
-                <a:close/>
-                <a:lnTo>
-                  <a:pt x="71582" y="71582"/>
-                </a:lnTo>
-                <a:close/>
-                <a:lnTo>
-                  <a:pt x="73891" y="73891"/>
-                </a:lnTo>
-                <a:close/>
-                <a:lnTo>
-                  <a:pt x="76200" y="76200"/>
-                </a:lnTo>
-                <a:close/>
-                <a:lnTo>
-                  <a:pt x="78509" y="78509"/>
-                </a:lnTo>
-                <a:close/>
-                <a:lnTo>
-                  <a:pt x="80818" y="80818"/>
-                </a:lnTo>
-                <a:close/>
-                <a:lnTo>
-                  <a:pt x="83127" y="83127"/>
-                </a:lnTo>
-                <a:close/>
-                <a:lnTo>
-                  <a:pt x="85436" y="85436"/>
-                </a:lnTo>
-                <a:close/>
-                <a:lnTo>
-                  <a:pt x="87745" y="87745"/>
-                </a:lnTo>
-                <a:close/>
-                <a:lnTo>
-                  <a:pt x="90055" y="90055"/>
-                </a:lnTo>
-                <a:close/>
-                <a:lnTo>
-                  <a:pt x="92364" y="92364"/>
-                </a:lnTo>
-                <a:close/>
-                <a:lnTo>
-                  <a:pt x="94673" y="94673"/>
-                </a:lnTo>
-                <a:close/>
-                <a:lnTo>
-                  <a:pt x="96982" y="96982"/>
-                </a:lnTo>
-                <a:close/>
-                <a:lnTo>
-                  <a:pt x="99291" y="99291"/>
-                </a:lnTo>
-                <a:close/>
-                <a:lnTo>
-                  <a:pt x="101600" y="101600"/>
-                </a:lnTo>
-                <a:close/>
-                <a:lnTo>
-                  <a:pt x="103909" y="103909"/>
-                </a:lnTo>
-                <a:close/>
-                <a:lnTo>
-                  <a:pt x="106218" y="106218"/>
-                </a:lnTo>
-                <a:close/>
-                <a:lnTo>
-                  <a:pt x="108527" y="108527"/>
-                </a:lnTo>
-                <a:close/>
-                <a:lnTo>
-                  <a:pt x="110836" y="110836"/>
-                </a:lnTo>
-                <a:close/>
-                <a:lnTo>
-                  <a:pt x="113145" y="113145"/>
-                </a:lnTo>
-                <a:close/>
-                <a:lnTo>
-                  <a:pt x="115455" y="115455"/>
-                </a:lnTo>
-                <a:close/>
-                <a:lnTo>
-                  <a:pt x="117764" y="117764"/>
-                </a:lnTo>
-                <a:close/>
-                <a:lnTo>
-                  <a:pt x="120073" y="120073"/>
-                </a:lnTo>
-                <a:close/>
-                <a:lnTo>
-                  <a:pt x="122382" y="122382"/>
-                </a:lnTo>
-                <a:close/>
-                <a:lnTo>
-                  <a:pt x="124691" y="124691"/>
-                </a:lnTo>
-                <a:close/>
-                <a:lnTo>
-                  <a:pt x="127000" y="127000"/>
-                </a:lnTo>
-                <a:close/>
-                <a:lnTo>
-                  <a:pt x="129309" y="129309"/>
-                </a:lnTo>
-                <a:close/>
-                <a:lnTo>
-                  <a:pt x="131618" y="131618"/>
-                </a:lnTo>
-                <a:close/>
-                <a:lnTo>
-                  <a:pt x="133927" y="133927"/>
-                </a:lnTo>
-                <a:close/>
-                <a:lnTo>
-                  <a:pt x="136236" y="136236"/>
-                </a:lnTo>
-                <a:close/>
-                <a:lnTo>
-                  <a:pt x="138545" y="138545"/>
-                </a:lnTo>
-                <a:close/>
-                <a:lnTo>
-                  <a:pt x="140855" y="140855"/>
-                </a:lnTo>
-                <a:close/>
-                <a:lnTo>
-                  <a:pt x="143164" y="143164"/>
-                </a:lnTo>
-                <a:close/>
-                <a:lnTo>
-                  <a:pt x="145473" y="145473"/>
-                </a:lnTo>
-                <a:close/>
-                <a:lnTo>
-                  <a:pt x="147782" y="147782"/>
-                </a:lnTo>
-                <a:close/>
-                <a:lnTo>
-                  <a:pt x="150091" y="150091"/>
-                </a:lnTo>
-                <a:close/>
-                <a:lnTo>
-                  <a:pt x="152400" y="152400"/>
-                </a:lnTo>
-                <a:close/>
-                <a:lnTo>
-                  <a:pt x="154709" y="154709"/>
-                </a:lnTo>
-                <a:close/>
-                <a:lnTo>
-                  <a:pt x="157018" y="157018"/>
-                </a:lnTo>
-                <a:close/>
-                <a:lnTo>
-                  <a:pt x="159327" y="159327"/>
-                </a:lnTo>
-                <a:close/>
-                <a:lnTo>
-                  <a:pt x="161636" y="161636"/>
-                </a:lnTo>
-                <a:close/>
-                <a:lnTo>
-                  <a:pt x="163945" y="163945"/>
-                </a:lnTo>
-                <a:close/>
-                <a:lnTo>
-                  <a:pt x="166255" y="166255"/>
-                </a:lnTo>
-                <a:close/>
-                <a:lnTo>
-                  <a:pt x="168564" y="168564"/>
-                </a:lnTo>
-                <a:close/>
-                <a:lnTo>
-                  <a:pt x="170873" y="170873"/>
-                </a:lnTo>
-                <a:close/>
-                <a:lnTo>
-                  <a:pt x="173182" y="173182"/>
-                </a:lnTo>
-                <a:close/>
-                <a:lnTo>
-                  <a:pt x="175491" y="175491"/>
-                </a:lnTo>
-                <a:close/>
-                <a:lnTo>
-                  <a:pt x="177800" y="177800"/>
-                </a:lnTo>
-                <a:close/>
-                <a:lnTo>
-                  <a:pt x="180109" y="180109"/>
-                </a:lnTo>
-                <a:close/>
-                <a:lnTo>
-                  <a:pt x="182418" y="182418"/>
-                </a:lnTo>
-                <a:close/>
-                <a:lnTo>
-                  <a:pt x="184727" y="184727"/>
-                </a:lnTo>
-                <a:close/>
-                <a:lnTo>
-                  <a:pt x="187036" y="187036"/>
-                </a:lnTo>
-                <a:close/>
-                <a:lnTo>
-                  <a:pt x="189345" y="189345"/>
-                </a:lnTo>
-                <a:close/>
-                <a:lnTo>
-                  <a:pt x="191655" y="191655"/>
-                </a:lnTo>
-                <a:close/>
-                <a:lnTo>
-                  <a:pt x="193964" y="193964"/>
-                </a:lnTo>
-                <a:close/>
-                <a:lnTo>
-                  <a:pt x="196273" y="196273"/>
-                </a:lnTo>
-                <a:close/>
-                <a:lnTo>
-                  <a:pt x="198582" y="198582"/>
-                </a:lnTo>
-                <a:close/>
-                <a:lnTo>
-                  <a:pt x="200891" y="200891"/>
-                </a:lnTo>
-                <a:close/>
-                <a:lnTo>
-                  <a:pt x="203200" y="203200"/>
-                </a:lnTo>
-                <a:close/>
-                <a:lnTo>
-                  <a:pt x="205509" y="205509"/>
-                </a:lnTo>
-                <a:close/>
-                <a:lnTo>
-                  <a:pt x="207818" y="207818"/>
-                </a:lnTo>
-                <a:close/>
-                <a:lnTo>
-                  <a:pt x="210127" y="210127"/>
-                </a:lnTo>
-                <a:close/>
-                <a:lnTo>
-                  <a:pt x="212436" y="212436"/>
-                </a:lnTo>
-                <a:close/>
-                <a:lnTo>
-                  <a:pt x="214745" y="214745"/>
-                </a:lnTo>
-                <a:close/>
-                <a:lnTo>
-                  <a:pt x="217055" y="217055"/>
-                </a:lnTo>
-                <a:close/>
-                <a:lnTo>
-                  <a:pt x="219364" y="219364"/>
-                </a:lnTo>
-                <a:close/>
-                <a:lnTo>
-                  <a:pt x="221673" y="221673"/>
-                </a:lnTo>
-                <a:close/>
-                <a:lnTo>
-                  <a:pt x="223982" y="223982"/>
-                </a:lnTo>
-                <a:close/>
-                <a:lnTo>
-                  <a:pt x="226291" y="226291"/>
-                </a:lnTo>
-                <a:close/>
-                <a:lnTo>
-                  <a:pt x="228600" y="228600"/>
-                </a:lnTo>
-                <a:close/>
-              </a:path>
-            </a:pathLst>
-          </a:custGeom>
           <a:ln w="19050">
             <a:solidFill>
               <a:srgbClr val="FFFFFF"/>
@@ -6313,425 +8219,21 @@
       </p:sp>
       <p:sp>
         <p:nvSpPr>
-          <p:cNvPr id="12" name="Freeform 11"/>
+          <p:cNvPr id="10" name="Oval 9"/>
           <p:cNvSpPr/>
           <p:nvPr/>
         </p:nvSpPr>
         <p:spPr>
           <a:xfrm>
-            <a:off x="5120640" y="1383030"/>
-            <a:ext cx="182880" cy="182880"/>
+            <a:off x="4940300" y="1568450"/>
+            <a:ext cx="177800" cy="177800"/>
           </a:xfrm>
-          <a:custGeom>
+          <a:prstGeom prst="ellipse">
             <a:avLst/>
-            <a:gdLst/>
-            <a:ahLst/>
-            <a:cxnLst/>
-            <a:rect l="l" t="t" r="r" b="b"/>
-            <a:pathLst>
-              <a:path w="182880" h="182880">
-                <a:moveTo>
-                  <a:pt x="0" y="182880"/>
-                </a:moveTo>
-                <a:lnTo>
-                  <a:pt x="1847" y="181033"/>
-                </a:lnTo>
-                <a:close/>
-                <a:lnTo>
-                  <a:pt x="3695" y="179185"/>
-                </a:lnTo>
-                <a:close/>
-                <a:lnTo>
-                  <a:pt x="5542" y="177338"/>
-                </a:lnTo>
-                <a:close/>
-                <a:lnTo>
-                  <a:pt x="7389" y="175491"/>
-                </a:lnTo>
-                <a:close/>
-                <a:lnTo>
-                  <a:pt x="9236" y="173644"/>
-                </a:lnTo>
-                <a:close/>
-                <a:lnTo>
-                  <a:pt x="11084" y="171796"/>
-                </a:lnTo>
-                <a:close/>
-                <a:lnTo>
-                  <a:pt x="12931" y="169949"/>
-                </a:lnTo>
-                <a:close/>
-                <a:lnTo>
-                  <a:pt x="14778" y="168102"/>
-                </a:lnTo>
-                <a:close/>
-                <a:lnTo>
-                  <a:pt x="16625" y="166255"/>
-                </a:lnTo>
-                <a:close/>
-                <a:lnTo>
-                  <a:pt x="18473" y="164407"/>
-                </a:lnTo>
-                <a:close/>
-                <a:lnTo>
-                  <a:pt x="20320" y="162560"/>
-                </a:lnTo>
-                <a:close/>
-                <a:lnTo>
-                  <a:pt x="22167" y="160713"/>
-                </a:lnTo>
-                <a:close/>
-                <a:lnTo>
-                  <a:pt x="24015" y="158865"/>
-                </a:lnTo>
-                <a:close/>
-                <a:lnTo>
-                  <a:pt x="25862" y="157018"/>
-                </a:lnTo>
-                <a:close/>
-                <a:lnTo>
-                  <a:pt x="27709" y="155171"/>
-                </a:lnTo>
-                <a:close/>
-                <a:lnTo>
-                  <a:pt x="29556" y="153324"/>
-                </a:lnTo>
-                <a:close/>
-                <a:lnTo>
-                  <a:pt x="31404" y="151476"/>
-                </a:lnTo>
-                <a:close/>
-                <a:lnTo>
-                  <a:pt x="33251" y="149629"/>
-                </a:lnTo>
-                <a:close/>
-                <a:lnTo>
-                  <a:pt x="35098" y="147782"/>
-                </a:lnTo>
-                <a:close/>
-                <a:lnTo>
-                  <a:pt x="36945" y="145935"/>
-                </a:lnTo>
-                <a:close/>
-                <a:lnTo>
-                  <a:pt x="38793" y="144087"/>
-                </a:lnTo>
-                <a:close/>
-                <a:lnTo>
-                  <a:pt x="40640" y="142240"/>
-                </a:lnTo>
-                <a:close/>
-                <a:lnTo>
-                  <a:pt x="42487" y="140393"/>
-                </a:lnTo>
-                <a:close/>
-                <a:lnTo>
-                  <a:pt x="44335" y="138545"/>
-                </a:lnTo>
-                <a:close/>
-                <a:lnTo>
-                  <a:pt x="46182" y="136698"/>
-                </a:lnTo>
-                <a:close/>
-                <a:lnTo>
-                  <a:pt x="48029" y="134851"/>
-                </a:lnTo>
-                <a:close/>
-                <a:lnTo>
-                  <a:pt x="49876" y="133004"/>
-                </a:lnTo>
-                <a:close/>
-                <a:lnTo>
-                  <a:pt x="51724" y="131156"/>
-                </a:lnTo>
-                <a:close/>
-                <a:lnTo>
-                  <a:pt x="53571" y="129309"/>
-                </a:lnTo>
-                <a:close/>
-                <a:lnTo>
-                  <a:pt x="55418" y="127462"/>
-                </a:lnTo>
-                <a:close/>
-                <a:lnTo>
-                  <a:pt x="57265" y="125615"/>
-                </a:lnTo>
-                <a:close/>
-                <a:lnTo>
-                  <a:pt x="59113" y="123767"/>
-                </a:lnTo>
-                <a:close/>
-                <a:lnTo>
-                  <a:pt x="60960" y="121920"/>
-                </a:lnTo>
-                <a:close/>
-                <a:lnTo>
-                  <a:pt x="62807" y="120073"/>
-                </a:lnTo>
-                <a:close/>
-                <a:lnTo>
-                  <a:pt x="64655" y="118225"/>
-                </a:lnTo>
-                <a:close/>
-                <a:lnTo>
-                  <a:pt x="66502" y="116378"/>
-                </a:lnTo>
-                <a:close/>
-                <a:lnTo>
-                  <a:pt x="68349" y="114531"/>
-                </a:lnTo>
-                <a:close/>
-                <a:lnTo>
-                  <a:pt x="70196" y="112684"/>
-                </a:lnTo>
-                <a:close/>
-                <a:lnTo>
-                  <a:pt x="72044" y="110836"/>
-                </a:lnTo>
-                <a:close/>
-                <a:lnTo>
-                  <a:pt x="73891" y="108989"/>
-                </a:lnTo>
-                <a:close/>
-                <a:lnTo>
-                  <a:pt x="75738" y="107142"/>
-                </a:lnTo>
-                <a:close/>
-                <a:lnTo>
-                  <a:pt x="77585" y="105295"/>
-                </a:lnTo>
-                <a:close/>
-                <a:lnTo>
-                  <a:pt x="79433" y="103447"/>
-                </a:lnTo>
-                <a:close/>
-                <a:lnTo>
-                  <a:pt x="81280" y="101600"/>
-                </a:lnTo>
-                <a:close/>
-                <a:lnTo>
-                  <a:pt x="83127" y="99753"/>
-                </a:lnTo>
-                <a:close/>
-                <a:lnTo>
-                  <a:pt x="84975" y="97905"/>
-                </a:lnTo>
-                <a:close/>
-                <a:lnTo>
-                  <a:pt x="86822" y="96058"/>
-                </a:lnTo>
-                <a:close/>
-                <a:lnTo>
-                  <a:pt x="88669" y="94211"/>
-                </a:lnTo>
-                <a:close/>
-                <a:lnTo>
-                  <a:pt x="90516" y="92364"/>
-                </a:lnTo>
-                <a:close/>
-                <a:lnTo>
-                  <a:pt x="92364" y="90516"/>
-                </a:lnTo>
-                <a:close/>
-                <a:lnTo>
-                  <a:pt x="94211" y="88669"/>
-                </a:lnTo>
-                <a:close/>
-                <a:lnTo>
-                  <a:pt x="96058" y="86822"/>
-                </a:lnTo>
-                <a:close/>
-                <a:lnTo>
-                  <a:pt x="97905" y="84975"/>
-                </a:lnTo>
-                <a:close/>
-                <a:lnTo>
-                  <a:pt x="99753" y="83127"/>
-                </a:lnTo>
-                <a:close/>
-                <a:lnTo>
-                  <a:pt x="101600" y="81280"/>
-                </a:lnTo>
-                <a:close/>
-                <a:lnTo>
-                  <a:pt x="103447" y="79433"/>
-                </a:lnTo>
-                <a:close/>
-                <a:lnTo>
-                  <a:pt x="105295" y="77585"/>
-                </a:lnTo>
-                <a:close/>
-                <a:lnTo>
-                  <a:pt x="107142" y="75738"/>
-                </a:lnTo>
-                <a:close/>
-                <a:lnTo>
-                  <a:pt x="108989" y="73891"/>
-                </a:lnTo>
-                <a:close/>
-                <a:lnTo>
-                  <a:pt x="110836" y="72044"/>
-                </a:lnTo>
-                <a:close/>
-                <a:lnTo>
-                  <a:pt x="112684" y="70196"/>
-                </a:lnTo>
-                <a:close/>
-                <a:lnTo>
-                  <a:pt x="114531" y="68349"/>
-                </a:lnTo>
-                <a:close/>
-                <a:lnTo>
-                  <a:pt x="116378" y="66502"/>
-                </a:lnTo>
-                <a:close/>
-                <a:lnTo>
-                  <a:pt x="118225" y="64655"/>
-                </a:lnTo>
-                <a:close/>
-                <a:lnTo>
-                  <a:pt x="120073" y="62807"/>
-                </a:lnTo>
-                <a:close/>
-                <a:lnTo>
-                  <a:pt x="121920" y="60960"/>
-                </a:lnTo>
-                <a:close/>
-                <a:lnTo>
-                  <a:pt x="123767" y="59113"/>
-                </a:lnTo>
-                <a:close/>
-                <a:lnTo>
-                  <a:pt x="125615" y="57265"/>
-                </a:lnTo>
-                <a:close/>
-                <a:lnTo>
-                  <a:pt x="127462" y="55418"/>
-                </a:lnTo>
-                <a:close/>
-                <a:lnTo>
-                  <a:pt x="129309" y="53571"/>
-                </a:lnTo>
-                <a:close/>
-                <a:lnTo>
-                  <a:pt x="131156" y="51724"/>
-                </a:lnTo>
-                <a:close/>
-                <a:lnTo>
-                  <a:pt x="133004" y="49876"/>
-                </a:lnTo>
-                <a:close/>
-                <a:lnTo>
-                  <a:pt x="134851" y="48029"/>
-                </a:lnTo>
-                <a:close/>
-                <a:lnTo>
-                  <a:pt x="136698" y="46182"/>
-                </a:lnTo>
-                <a:close/>
-                <a:lnTo>
-                  <a:pt x="138545" y="44335"/>
-                </a:lnTo>
-                <a:close/>
-                <a:lnTo>
-                  <a:pt x="140393" y="42487"/>
-                </a:lnTo>
-                <a:close/>
-                <a:lnTo>
-                  <a:pt x="142240" y="40640"/>
-                </a:lnTo>
-                <a:close/>
-                <a:lnTo>
-                  <a:pt x="144087" y="38793"/>
-                </a:lnTo>
-                <a:close/>
-                <a:lnTo>
-                  <a:pt x="145935" y="36945"/>
-                </a:lnTo>
-                <a:close/>
-                <a:lnTo>
-                  <a:pt x="147782" y="35098"/>
-                </a:lnTo>
-                <a:close/>
-                <a:lnTo>
-                  <a:pt x="149629" y="33251"/>
-                </a:lnTo>
-                <a:close/>
-                <a:lnTo>
-                  <a:pt x="151476" y="31404"/>
-                </a:lnTo>
-                <a:close/>
-                <a:lnTo>
-                  <a:pt x="153324" y="29556"/>
-                </a:lnTo>
-                <a:close/>
-                <a:lnTo>
-                  <a:pt x="155171" y="27709"/>
-                </a:lnTo>
-                <a:close/>
-                <a:lnTo>
-                  <a:pt x="157018" y="25862"/>
-                </a:lnTo>
-                <a:close/>
-                <a:lnTo>
-                  <a:pt x="158865" y="24015"/>
-                </a:lnTo>
-                <a:close/>
-                <a:lnTo>
-                  <a:pt x="160713" y="22167"/>
-                </a:lnTo>
-                <a:close/>
-                <a:lnTo>
-                  <a:pt x="162560" y="20320"/>
-                </a:lnTo>
-                <a:close/>
-                <a:lnTo>
-                  <a:pt x="164407" y="18473"/>
-                </a:lnTo>
-                <a:close/>
-                <a:lnTo>
-                  <a:pt x="166255" y="16625"/>
-                </a:lnTo>
-                <a:close/>
-                <a:lnTo>
-                  <a:pt x="168102" y="14778"/>
-                </a:lnTo>
-                <a:close/>
-                <a:lnTo>
-                  <a:pt x="169949" y="12931"/>
-                </a:lnTo>
-                <a:close/>
-                <a:lnTo>
-                  <a:pt x="171796" y="11084"/>
-                </a:lnTo>
-                <a:close/>
-                <a:lnTo>
-                  <a:pt x="173644" y="9236"/>
-                </a:lnTo>
-                <a:close/>
-                <a:lnTo>
-                  <a:pt x="175491" y="7389"/>
-                </a:lnTo>
-                <a:close/>
-                <a:lnTo>
-                  <a:pt x="177338" y="5542"/>
-                </a:lnTo>
-                <a:close/>
-                <a:lnTo>
-                  <a:pt x="179185" y="3695"/>
-                </a:lnTo>
-                <a:close/>
-                <a:lnTo>
-                  <a:pt x="181033" y="1847"/>
-                </a:lnTo>
-                <a:close/>
-                <a:lnTo>
-                  <a:pt x="182880" y="0"/>
-                </a:lnTo>
-                <a:close/>
-              </a:path>
-            </a:pathLst>
-          </a:custGeom>
+          </a:prstGeom>
+          <a:solidFill>
+            <a:srgbClr val="FFFFFF"/>
+          </a:solidFill>
           <a:ln w="19050">
             <a:solidFill>
               <a:srgbClr val="FFFFFF"/>
@@ -6762,14 +8264,84 @@
       </p:sp>
       <p:cxnSp>
         <p:nvCxnSpPr>
+          <p:cNvPr id="11" name="Connector 10"/>
+          <p:cNvCxnSpPr/>
+          <p:nvPr/>
+        </p:nvCxnSpPr>
+        <p:spPr>
+          <a:xfrm>
+            <a:off x="4617720.0" y="1703070.0"/>
+            <a:ext cx="137160.0" cy="137160.0"/>
+          </a:xfrm>
+          <a:prstGeom prst="line">
+            <a:avLst/>
+          </a:prstGeom>
+          <a:ln w="15240">
+            <a:solidFill>
+              <a:srgbClr val="FFFFFF"/>
+            </a:solidFill>
+          </a:ln>
+        </p:spPr>
+        <p:style>
+          <a:lnRef idx="2">
+            <a:schemeClr val="accent1"/>
+          </a:lnRef>
+          <a:fillRef idx="0">
+            <a:schemeClr val="accent1"/>
+          </a:fillRef>
+          <a:effectRef idx="1">
+            <a:schemeClr val="accent1"/>
+          </a:effectRef>
+          <a:fontRef idx="minor">
+            <a:schemeClr val="tx1"/>
+          </a:fontRef>
+        </p:style>
+      </p:cxnSp>
+      <p:cxnSp>
+        <p:nvCxnSpPr>
+          <p:cNvPr id="12" name="Connector 11"/>
+          <p:cNvCxnSpPr/>
+          <p:nvPr/>
+        </p:nvCxnSpPr>
+        <p:spPr>
+          <a:xfrm flipH="1">
+            <a:off x="5257800.0" y="1200150.0"/>
+            <a:ext cx="137160.0" cy="228600.0"/>
+          </a:xfrm>
+          <a:prstGeom prst="line">
+            <a:avLst/>
+          </a:prstGeom>
+          <a:ln w="15240">
+            <a:solidFill>
+              <a:srgbClr val="FFFFFF"/>
+            </a:solidFill>
+          </a:ln>
+        </p:spPr>
+        <p:style>
+          <a:lnRef idx="2">
+            <a:schemeClr val="accent1"/>
+          </a:lnRef>
+          <a:fillRef idx="0">
+            <a:schemeClr val="accent1"/>
+          </a:fillRef>
+          <a:effectRef idx="1">
+            <a:schemeClr val="accent1"/>
+          </a:effectRef>
+          <a:fontRef idx="minor">
+            <a:schemeClr val="tx1"/>
+          </a:fontRef>
+        </p:style>
+      </p:cxnSp>
+      <p:cxnSp>
+        <p:nvCxnSpPr>
           <p:cNvPr id="13" name="Connector 12"/>
           <p:cNvCxnSpPr/>
           <p:nvPr/>
         </p:nvCxnSpPr>
         <p:spPr>
           <a:xfrm>
-            <a:off x="4846320.0" y="2663190.0"/>
-            <a:ext cx="137160.0" cy="0.0"/>
+            <a:off x="4937760.0" y="2571750.0"/>
+            <a:ext cx="68580.0" cy="0.0"/>
           </a:xfrm>
           <a:prstGeom prst="line">
             <a:avLst/>
@@ -6803,8 +8375,8 @@
         </p:nvCxnSpPr>
         <p:spPr>
           <a:xfrm flipH="1">
-            <a:off x="5074920.0" y="2663190.0"/>
-            <a:ext cx="137160.0" cy="0.0"/>
+            <a:off x="5052060.0" y="2571750.0"/>
+            <a:ext cx="68580.0" cy="0.0"/>
           </a:xfrm>
           <a:prstGeom prst="line">
             <a:avLst/>
@@ -6838,7 +8410,7 @@
         </p:nvSpPr>
         <p:spPr>
           <a:xfrm>
-            <a:off x="4775200" y="2414270"/>
+            <a:off x="5140960" y="791210"/>
             <a:ext cx="1524000" cy="508000"/>
           </a:xfrm>
           <a:prstGeom prst="rect">
@@ -6853,11 +8425,47 @@
           <a:lstStyle/>
           <a:p>
             <a:pPr>
-              <a:defRPr sz="1800" b="1">
+              <a:defRPr sz="2200" b="1">
                 <a:solidFill>
                   <a:srgbClr val="FFFFFF"/>
                 </a:solidFill>
-                <a:latin typeface="Inter"/>
+                <a:latin typeface="Arial"/>
+              </a:defRPr>
+            </a:pPr>
+            <a:r>
+              <a:t>y=f(x)</a:t>
+            </a:r>
+          </a:p>
+        </p:txBody>
+      </p:sp>
+      <p:sp>
+        <p:nvSpPr>
+          <p:cNvPr id="16" name="TextBox 15"/>
+          <p:cNvSpPr txBox="1"/>
+          <p:nvPr/>
+        </p:nvSpPr>
+        <p:spPr>
+          <a:xfrm>
+            <a:off x="4775200" y="2391410"/>
+            <a:ext cx="1524000" cy="508000"/>
+          </a:xfrm>
+          <a:prstGeom prst="rect">
+            <a:avLst/>
+          </a:prstGeom>
+          <a:noFill/>
+        </p:spPr>
+        <p:txBody>
+          <a:bodyPr wrap="none">
+            <a:spAutoFit/>
+          </a:bodyPr>
+          <a:lstStyle/>
+          <a:p>
+            <a:pPr>
+              <a:defRPr sz="2200" b="1">
+                <a:solidFill>
+                  <a:srgbClr val="FFFFFF"/>
+                </a:solidFill>
+                <a:latin typeface="Arial"/>
               </a:defRPr>
             </a:pPr>
             <a:r>
@@ -6868,7 +8476,7 @@
       </p:sp>
       <p:sp>
         <p:nvSpPr>
-          <p:cNvPr id="16" name="TextBox 15"/>
+          <p:cNvPr id="17" name="TextBox 16"/>
           <p:cNvSpPr txBox="1"/>
           <p:nvPr/>
         </p:nvSpPr>
@@ -6889,11 +8497,11 @@
           <a:lstStyle/>
           <a:p>
             <a:pPr>
-              <a:defRPr sz="1800" b="1">
+              <a:defRPr sz="2200" b="1">
                 <a:solidFill>
                   <a:srgbClr val="FFFFFF"/>
                 </a:solidFill>
-                <a:latin typeface="Inter"/>
+                <a:latin typeface="Arial"/>
               </a:defRPr>
             </a:pPr>
             <a:r>
@@ -6904,7 +8512,7 @@
       </p:sp>
       <p:sp>
         <p:nvSpPr>
-          <p:cNvPr id="17" name="TextBox 16"/>
+          <p:cNvPr id="18" name="TextBox 17"/>
           <p:cNvSpPr txBox="1"/>
           <p:nvPr/>
         </p:nvSpPr>
@@ -6925,15 +8533,51 @@
           <a:lstStyle/>
           <a:p>
             <a:pPr>
-              <a:defRPr sz="1800" b="1">
+              <a:defRPr sz="2200" b="1">
                 <a:solidFill>
                   <a:srgbClr val="FFFFFF"/>
                 </a:solidFill>
-                <a:latin typeface="Inter"/>
+                <a:latin typeface="Arial"/>
               </a:defRPr>
             </a:pPr>
             <a:r>
               <a:t>2</a:t>
+            </a:r>
+          </a:p>
+        </p:txBody>
+      </p:sp>
+      <p:sp>
+        <p:nvSpPr>
+          <p:cNvPr id="19" name="TextBox 18"/>
+          <p:cNvSpPr txBox="1"/>
+          <p:nvPr/>
+        </p:nvSpPr>
+        <p:spPr>
+          <a:xfrm>
+            <a:off x="4226560" y="2345690"/>
+            <a:ext cx="1524000" cy="508000"/>
+          </a:xfrm>
+          <a:prstGeom prst="rect">
+            <a:avLst/>
+          </a:prstGeom>
+          <a:noFill/>
+        </p:spPr>
+        <p:txBody>
+          <a:bodyPr wrap="none">
+            <a:spAutoFit/>
+          </a:bodyPr>
+          <a:lstStyle/>
+          <a:p>
+            <a:pPr>
+              <a:defRPr sz="2200" b="1">
+                <a:solidFill>
+                  <a:srgbClr val="FFFFFF"/>
+                </a:solidFill>
+                <a:latin typeface="Arial"/>
+              </a:defRPr>
+            </a:pPr>
+            <a:r>
+              <a:t>O</a:t>
             </a:r>
           </a:p>
         </p:txBody>

--- a/output/2.pptx
+++ b/output/2.pptx
@@ -3104,8 +3104,8 @@
         </p:nvCxnSpPr>
         <p:spPr>
           <a:xfrm>
-            <a:off x="4206240.0" y="2571750.0"/>
-            <a:ext cx="1371600.0" cy="0.0"/>
+            <a:off x="2286000.0" y="2571750.0"/>
+            <a:ext cx="4572000.0" cy="0.0"/>
           </a:xfrm>
           <a:prstGeom prst="line">
             <a:avLst/>
@@ -3139,8 +3139,8 @@
         </p:nvCxnSpPr>
         <p:spPr>
           <a:xfrm flipV="1">
-            <a:off x="4572000.0" y="834390.0"/>
-            <a:ext cx="0.0" cy="2103120.0"/>
+            <a:off x="4572000.0" y="285750.0"/>
+            <a:ext cx="0.0" cy="4572000.0"/>
           </a:xfrm>
           <a:prstGeom prst="line">
             <a:avLst/>
@@ -3174,8 +3174,8 @@
         </p:nvSpPr>
         <p:spPr>
           <a:xfrm>
-            <a:off x="4206240" y="1291590"/>
-            <a:ext cx="822960" cy="822960"/>
+            <a:off x="4069080" y="1154430"/>
+            <a:ext cx="960120" cy="960120"/>
           </a:xfrm>
           <a:custGeom>
             <a:avLst/>
@@ -3184,12 +3184,2404 @@
             <a:cxnLst/>
             <a:rect l="l" t="t" r="r" b="b"/>
             <a:pathLst>
-              <a:path w="822960" h="822960">
+              <a:path w="960120" h="960120">
                 <a:moveTo>
                   <a:pt x="0" y="0"/>
                 </a:moveTo>
                 <a:lnTo>
-                  <a:pt x="822960" y="822960"/>
+                  <a:pt x="1601" y="1601"/>
+                </a:lnTo>
+                <a:close/>
+                <a:lnTo>
+                  <a:pt x="3203" y="3203"/>
+                </a:lnTo>
+                <a:close/>
+                <a:lnTo>
+                  <a:pt x="4806" y="4806"/>
+                </a:lnTo>
+                <a:close/>
+                <a:lnTo>
+                  <a:pt x="6410" y="6410"/>
+                </a:lnTo>
+                <a:close/>
+                <a:lnTo>
+                  <a:pt x="8015" y="8015"/>
+                </a:lnTo>
+                <a:close/>
+                <a:lnTo>
+                  <a:pt x="9621" y="9621"/>
+                </a:lnTo>
+                <a:close/>
+                <a:lnTo>
+                  <a:pt x="11226" y="11226"/>
+                </a:lnTo>
+                <a:close/>
+                <a:lnTo>
+                  <a:pt x="12832" y="12832"/>
+                </a:lnTo>
+                <a:close/>
+                <a:lnTo>
+                  <a:pt x="14438" y="14438"/>
+                </a:lnTo>
+                <a:close/>
+                <a:lnTo>
+                  <a:pt x="16044" y="16044"/>
+                </a:lnTo>
+                <a:close/>
+                <a:lnTo>
+                  <a:pt x="17649" y="17649"/>
+                </a:lnTo>
+                <a:close/>
+                <a:lnTo>
+                  <a:pt x="19253" y="19253"/>
+                </a:lnTo>
+                <a:close/>
+                <a:lnTo>
+                  <a:pt x="20857" y="20857"/>
+                </a:lnTo>
+                <a:close/>
+                <a:lnTo>
+                  <a:pt x="22459" y="22459"/>
+                </a:lnTo>
+                <a:close/>
+                <a:lnTo>
+                  <a:pt x="24060" y="24060"/>
+                </a:lnTo>
+                <a:close/>
+                <a:lnTo>
+                  <a:pt x="25659" y="25659"/>
+                </a:lnTo>
+                <a:close/>
+                <a:lnTo>
+                  <a:pt x="27257" y="27257"/>
+                </a:lnTo>
+                <a:close/>
+                <a:lnTo>
+                  <a:pt x="28854" y="28854"/>
+                </a:lnTo>
+                <a:close/>
+                <a:lnTo>
+                  <a:pt x="30451" y="30451"/>
+                </a:lnTo>
+                <a:close/>
+                <a:lnTo>
+                  <a:pt x="32048" y="32048"/>
+                </a:lnTo>
+                <a:close/>
+                <a:lnTo>
+                  <a:pt x="33646" y="33646"/>
+                </a:lnTo>
+                <a:close/>
+                <a:lnTo>
+                  <a:pt x="35244" y="35244"/>
+                </a:lnTo>
+                <a:close/>
+                <a:lnTo>
+                  <a:pt x="36844" y="36844"/>
+                </a:lnTo>
+                <a:close/>
+                <a:lnTo>
+                  <a:pt x="38445" y="38445"/>
+                </a:lnTo>
+                <a:close/>
+                <a:lnTo>
+                  <a:pt x="40048" y="40048"/>
+                </a:lnTo>
+                <a:close/>
+                <a:lnTo>
+                  <a:pt x="41652" y="41652"/>
+                </a:lnTo>
+                <a:close/>
+                <a:lnTo>
+                  <a:pt x="43257" y="43257"/>
+                </a:lnTo>
+                <a:close/>
+                <a:lnTo>
+                  <a:pt x="44862" y="44862"/>
+                </a:lnTo>
+                <a:close/>
+                <a:lnTo>
+                  <a:pt x="46467" y="46467"/>
+                </a:lnTo>
+                <a:close/>
+                <a:lnTo>
+                  <a:pt x="48072" y="48072"/>
+                </a:lnTo>
+                <a:close/>
+                <a:lnTo>
+                  <a:pt x="49677" y="49677"/>
+                </a:lnTo>
+                <a:close/>
+                <a:lnTo>
+                  <a:pt x="51281" y="51281"/>
+                </a:lnTo>
+                <a:close/>
+                <a:lnTo>
+                  <a:pt x="52886" y="52886"/>
+                </a:lnTo>
+                <a:close/>
+                <a:lnTo>
+                  <a:pt x="54489" y="54489"/>
+                </a:lnTo>
+                <a:close/>
+                <a:lnTo>
+                  <a:pt x="56093" y="56093"/>
+                </a:lnTo>
+                <a:close/>
+                <a:lnTo>
+                  <a:pt x="57697" y="57697"/>
+                </a:lnTo>
+                <a:close/>
+                <a:lnTo>
+                  <a:pt x="59300" y="59300"/>
+                </a:lnTo>
+                <a:close/>
+                <a:lnTo>
+                  <a:pt x="60904" y="60904"/>
+                </a:lnTo>
+                <a:close/>
+                <a:lnTo>
+                  <a:pt x="62508" y="62508"/>
+                </a:lnTo>
+                <a:close/>
+                <a:lnTo>
+                  <a:pt x="64112" y="64112"/>
+                </a:lnTo>
+                <a:close/>
+                <a:lnTo>
+                  <a:pt x="65716" y="65716"/>
+                </a:lnTo>
+                <a:close/>
+                <a:lnTo>
+                  <a:pt x="67320" y="67320"/>
+                </a:lnTo>
+                <a:close/>
+                <a:lnTo>
+                  <a:pt x="68924" y="68924"/>
+                </a:lnTo>
+                <a:close/>
+                <a:lnTo>
+                  <a:pt x="70528" y="70528"/>
+                </a:lnTo>
+                <a:close/>
+                <a:lnTo>
+                  <a:pt x="72132" y="72132"/>
+                </a:lnTo>
+                <a:close/>
+                <a:lnTo>
+                  <a:pt x="73735" y="73735"/>
+                </a:lnTo>
+                <a:close/>
+                <a:lnTo>
+                  <a:pt x="75339" y="75339"/>
+                </a:lnTo>
+                <a:close/>
+                <a:lnTo>
+                  <a:pt x="76943" y="76943"/>
+                </a:lnTo>
+                <a:close/>
+                <a:lnTo>
+                  <a:pt x="78546" y="78546"/>
+                </a:lnTo>
+                <a:close/>
+                <a:lnTo>
+                  <a:pt x="80150" y="80150"/>
+                </a:lnTo>
+                <a:close/>
+                <a:lnTo>
+                  <a:pt x="81754" y="81754"/>
+                </a:lnTo>
+                <a:close/>
+                <a:lnTo>
+                  <a:pt x="83358" y="83358"/>
+                </a:lnTo>
+                <a:close/>
+                <a:lnTo>
+                  <a:pt x="84963" y="84963"/>
+                </a:lnTo>
+                <a:close/>
+                <a:lnTo>
+                  <a:pt x="86568" y="86568"/>
+                </a:lnTo>
+                <a:close/>
+                <a:lnTo>
+                  <a:pt x="88173" y="88173"/>
+                </a:lnTo>
+                <a:close/>
+                <a:lnTo>
+                  <a:pt x="89779" y="89779"/>
+                </a:lnTo>
+                <a:close/>
+                <a:lnTo>
+                  <a:pt x="91384" y="91384"/>
+                </a:lnTo>
+                <a:close/>
+                <a:lnTo>
+                  <a:pt x="92988" y="92988"/>
+                </a:lnTo>
+                <a:close/>
+                <a:lnTo>
+                  <a:pt x="94591" y="94591"/>
+                </a:lnTo>
+                <a:close/>
+                <a:lnTo>
+                  <a:pt x="96193" y="96193"/>
+                </a:lnTo>
+                <a:close/>
+                <a:lnTo>
+                  <a:pt x="97793" y="97793"/>
+                </a:lnTo>
+                <a:close/>
+                <a:lnTo>
+                  <a:pt x="99392" y="99392"/>
+                </a:lnTo>
+                <a:close/>
+                <a:lnTo>
+                  <a:pt x="100990" y="100990"/>
+                </a:lnTo>
+                <a:close/>
+                <a:lnTo>
+                  <a:pt x="102587" y="102587"/>
+                </a:lnTo>
+                <a:close/>
+                <a:lnTo>
+                  <a:pt x="104184" y="104184"/>
+                </a:lnTo>
+                <a:close/>
+                <a:lnTo>
+                  <a:pt x="105781" y="105781"/>
+                </a:lnTo>
+                <a:close/>
+                <a:lnTo>
+                  <a:pt x="107378" y="107378"/>
+                </a:lnTo>
+                <a:close/>
+                <a:lnTo>
+                  <a:pt x="108977" y="108977"/>
+                </a:lnTo>
+                <a:close/>
+                <a:lnTo>
+                  <a:pt x="110578" y="110578"/>
+                </a:lnTo>
+                <a:close/>
+                <a:lnTo>
+                  <a:pt x="112180" y="112180"/>
+                </a:lnTo>
+                <a:close/>
+                <a:lnTo>
+                  <a:pt x="113783" y="113783"/>
+                </a:lnTo>
+                <a:close/>
+                <a:lnTo>
+                  <a:pt x="115388" y="115388"/>
+                </a:lnTo>
+                <a:close/>
+                <a:lnTo>
+                  <a:pt x="116993" y="116993"/>
+                </a:lnTo>
+                <a:close/>
+                <a:lnTo>
+                  <a:pt x="118598" y="118598"/>
+                </a:lnTo>
+                <a:close/>
+                <a:lnTo>
+                  <a:pt x="120203" y="120203"/>
+                </a:lnTo>
+                <a:close/>
+                <a:lnTo>
+                  <a:pt x="121808" y="121808"/>
+                </a:lnTo>
+                <a:close/>
+                <a:lnTo>
+                  <a:pt x="123413" y="123413"/>
+                </a:lnTo>
+                <a:close/>
+                <a:lnTo>
+                  <a:pt x="125017" y="125017"/>
+                </a:lnTo>
+                <a:close/>
+                <a:lnTo>
+                  <a:pt x="126621" y="126621"/>
+                </a:lnTo>
+                <a:close/>
+                <a:lnTo>
+                  <a:pt x="128225" y="128225"/>
+                </a:lnTo>
+                <a:close/>
+                <a:lnTo>
+                  <a:pt x="129828" y="129828"/>
+                </a:lnTo>
+                <a:close/>
+                <a:lnTo>
+                  <a:pt x="131432" y="131432"/>
+                </a:lnTo>
+                <a:close/>
+                <a:lnTo>
+                  <a:pt x="133036" y="133036"/>
+                </a:lnTo>
+                <a:close/>
+                <a:lnTo>
+                  <a:pt x="134639" y="134639"/>
+                </a:lnTo>
+                <a:close/>
+                <a:lnTo>
+                  <a:pt x="136243" y="136243"/>
+                </a:lnTo>
+                <a:close/>
+                <a:lnTo>
+                  <a:pt x="137847" y="137847"/>
+                </a:lnTo>
+                <a:close/>
+                <a:lnTo>
+                  <a:pt x="139451" y="139451"/>
+                </a:lnTo>
+                <a:close/>
+                <a:lnTo>
+                  <a:pt x="141055" y="141055"/>
+                </a:lnTo>
+                <a:close/>
+                <a:lnTo>
+                  <a:pt x="142659" y="142659"/>
+                </a:lnTo>
+                <a:close/>
+                <a:lnTo>
+                  <a:pt x="144263" y="144263"/>
+                </a:lnTo>
+                <a:close/>
+                <a:lnTo>
+                  <a:pt x="145867" y="145867"/>
+                </a:lnTo>
+                <a:close/>
+                <a:lnTo>
+                  <a:pt x="147471" y="147471"/>
+                </a:lnTo>
+                <a:close/>
+                <a:lnTo>
+                  <a:pt x="149074" y="149074"/>
+                </a:lnTo>
+                <a:close/>
+                <a:lnTo>
+                  <a:pt x="150678" y="150678"/>
+                </a:lnTo>
+                <a:close/>
+                <a:lnTo>
+                  <a:pt x="152282" y="152282"/>
+                </a:lnTo>
+                <a:close/>
+                <a:lnTo>
+                  <a:pt x="153886" y="153886"/>
+                </a:lnTo>
+                <a:close/>
+                <a:lnTo>
+                  <a:pt x="155490" y="155490"/>
+                </a:lnTo>
+                <a:close/>
+                <a:lnTo>
+                  <a:pt x="157094" y="157094"/>
+                </a:lnTo>
+                <a:close/>
+                <a:lnTo>
+                  <a:pt x="158699" y="158699"/>
+                </a:lnTo>
+                <a:close/>
+                <a:lnTo>
+                  <a:pt x="160304" y="160304"/>
+                </a:lnTo>
+                <a:close/>
+                <a:lnTo>
+                  <a:pt x="161910" y="161910"/>
+                </a:lnTo>
+                <a:close/>
+                <a:lnTo>
+                  <a:pt x="163515" y="163515"/>
+                </a:lnTo>
+                <a:close/>
+                <a:lnTo>
+                  <a:pt x="165119" y="165119"/>
+                </a:lnTo>
+                <a:close/>
+                <a:lnTo>
+                  <a:pt x="166723" y="166723"/>
+                </a:lnTo>
+                <a:close/>
+                <a:lnTo>
+                  <a:pt x="168326" y="168326"/>
+                </a:lnTo>
+                <a:close/>
+                <a:lnTo>
+                  <a:pt x="169927" y="169927"/>
+                </a:lnTo>
+                <a:close/>
+                <a:lnTo>
+                  <a:pt x="171526" y="171526"/>
+                </a:lnTo>
+                <a:close/>
+                <a:lnTo>
+                  <a:pt x="173125" y="173125"/>
+                </a:lnTo>
+                <a:close/>
+                <a:lnTo>
+                  <a:pt x="174722" y="174722"/>
+                </a:lnTo>
+                <a:close/>
+                <a:lnTo>
+                  <a:pt x="176319" y="176319"/>
+                </a:lnTo>
+                <a:close/>
+                <a:lnTo>
+                  <a:pt x="177916" y="177916"/>
+                </a:lnTo>
+                <a:close/>
+                <a:lnTo>
+                  <a:pt x="179513" y="179513"/>
+                </a:lnTo>
+                <a:close/>
+                <a:lnTo>
+                  <a:pt x="181111" y="181111"/>
+                </a:lnTo>
+                <a:close/>
+                <a:lnTo>
+                  <a:pt x="182711" y="182711"/>
+                </a:lnTo>
+                <a:close/>
+                <a:lnTo>
+                  <a:pt x="184312" y="184312"/>
+                </a:lnTo>
+                <a:close/>
+                <a:lnTo>
+                  <a:pt x="185915" y="185915"/>
+                </a:lnTo>
+                <a:close/>
+                <a:lnTo>
+                  <a:pt x="187519" y="187519"/>
+                </a:lnTo>
+                <a:close/>
+                <a:lnTo>
+                  <a:pt x="189123" y="189123"/>
+                </a:lnTo>
+                <a:close/>
+                <a:lnTo>
+                  <a:pt x="190729" y="190729"/>
+                </a:lnTo>
+                <a:close/>
+                <a:lnTo>
+                  <a:pt x="192334" y="192334"/>
+                </a:lnTo>
+                <a:close/>
+                <a:lnTo>
+                  <a:pt x="193939" y="193939"/>
+                </a:lnTo>
+                <a:close/>
+                <a:lnTo>
+                  <a:pt x="195544" y="195544"/>
+                </a:lnTo>
+                <a:close/>
+                <a:lnTo>
+                  <a:pt x="197149" y="197149"/>
+                </a:lnTo>
+                <a:close/>
+                <a:lnTo>
+                  <a:pt x="198753" y="198753"/>
+                </a:lnTo>
+                <a:close/>
+                <a:lnTo>
+                  <a:pt x="200357" y="200357"/>
+                </a:lnTo>
+                <a:close/>
+                <a:lnTo>
+                  <a:pt x="201961" y="201961"/>
+                </a:lnTo>
+                <a:close/>
+                <a:lnTo>
+                  <a:pt x="203564" y="203564"/>
+                </a:lnTo>
+                <a:close/>
+                <a:lnTo>
+                  <a:pt x="205168" y="205168"/>
+                </a:lnTo>
+                <a:close/>
+                <a:lnTo>
+                  <a:pt x="206771" y="206771"/>
+                </a:lnTo>
+                <a:close/>
+                <a:lnTo>
+                  <a:pt x="208374" y="208374"/>
+                </a:lnTo>
+                <a:close/>
+                <a:lnTo>
+                  <a:pt x="209978" y="209978"/>
+                </a:lnTo>
+                <a:close/>
+                <a:lnTo>
+                  <a:pt x="211582" y="211582"/>
+                </a:lnTo>
+                <a:close/>
+                <a:lnTo>
+                  <a:pt x="213185" y="213185"/>
+                </a:lnTo>
+                <a:close/>
+                <a:lnTo>
+                  <a:pt x="214789" y="214789"/>
+                </a:lnTo>
+                <a:close/>
+                <a:lnTo>
+                  <a:pt x="216394" y="216394"/>
+                </a:lnTo>
+                <a:close/>
+                <a:lnTo>
+                  <a:pt x="217998" y="217998"/>
+                </a:lnTo>
+                <a:close/>
+                <a:lnTo>
+                  <a:pt x="219603" y="219603"/>
+                </a:lnTo>
+                <a:close/>
+                <a:lnTo>
+                  <a:pt x="221209" y="221209"/>
+                </a:lnTo>
+                <a:close/>
+                <a:lnTo>
+                  <a:pt x="222814" y="222814"/>
+                </a:lnTo>
+                <a:close/>
+                <a:lnTo>
+                  <a:pt x="224419" y="224419"/>
+                </a:lnTo>
+                <a:close/>
+                <a:lnTo>
+                  <a:pt x="226023" y="226023"/>
+                </a:lnTo>
+                <a:close/>
+                <a:lnTo>
+                  <a:pt x="227627" y="227627"/>
+                </a:lnTo>
+                <a:close/>
+                <a:lnTo>
+                  <a:pt x="229229" y="229229"/>
+                </a:lnTo>
+                <a:close/>
+                <a:lnTo>
+                  <a:pt x="230830" y="230830"/>
+                </a:lnTo>
+                <a:close/>
+                <a:lnTo>
+                  <a:pt x="232430" y="232430"/>
+                </a:lnTo>
+                <a:close/>
+                <a:lnTo>
+                  <a:pt x="234028" y="234028"/>
+                </a:lnTo>
+                <a:close/>
+                <a:lnTo>
+                  <a:pt x="235625" y="235625"/>
+                </a:lnTo>
+                <a:close/>
+                <a:lnTo>
+                  <a:pt x="237222" y="237222"/>
+                </a:lnTo>
+                <a:close/>
+                <a:lnTo>
+                  <a:pt x="238819" y="238819"/>
+                </a:lnTo>
+                <a:close/>
+                <a:lnTo>
+                  <a:pt x="240416" y="240416"/>
+                </a:lnTo>
+                <a:close/>
+                <a:lnTo>
+                  <a:pt x="242015" y="242015"/>
+                </a:lnTo>
+                <a:close/>
+                <a:lnTo>
+                  <a:pt x="243615" y="243615"/>
+                </a:lnTo>
+                <a:close/>
+                <a:lnTo>
+                  <a:pt x="245216" y="245216"/>
+                </a:lnTo>
+                <a:close/>
+                <a:lnTo>
+                  <a:pt x="246819" y="246819"/>
+                </a:lnTo>
+                <a:close/>
+                <a:lnTo>
+                  <a:pt x="248423" y="248423"/>
+                </a:lnTo>
+                <a:close/>
+                <a:lnTo>
+                  <a:pt x="250028" y="250028"/>
+                </a:lnTo>
+                <a:close/>
+                <a:lnTo>
+                  <a:pt x="251633" y="251633"/>
+                </a:lnTo>
+                <a:close/>
+                <a:lnTo>
+                  <a:pt x="253238" y="253238"/>
+                </a:lnTo>
+                <a:close/>
+                <a:lnTo>
+                  <a:pt x="254843" y="254843"/>
+                </a:lnTo>
+                <a:close/>
+                <a:lnTo>
+                  <a:pt x="256448" y="256448"/>
+                </a:lnTo>
+                <a:close/>
+                <a:lnTo>
+                  <a:pt x="258053" y="258053"/>
+                </a:lnTo>
+                <a:close/>
+                <a:lnTo>
+                  <a:pt x="259657" y="259657"/>
+                </a:lnTo>
+                <a:close/>
+                <a:lnTo>
+                  <a:pt x="261260" y="261260"/>
+                </a:lnTo>
+                <a:close/>
+                <a:lnTo>
+                  <a:pt x="262864" y="262864"/>
+                </a:lnTo>
+                <a:close/>
+                <a:lnTo>
+                  <a:pt x="264468" y="264468"/>
+                </a:lnTo>
+                <a:close/>
+                <a:lnTo>
+                  <a:pt x="266071" y="266071"/>
+                </a:lnTo>
+                <a:close/>
+                <a:lnTo>
+                  <a:pt x="267675" y="267675"/>
+                </a:lnTo>
+                <a:close/>
+                <a:lnTo>
+                  <a:pt x="269279" y="269279"/>
+                </a:lnTo>
+                <a:close/>
+                <a:lnTo>
+                  <a:pt x="270883" y="270883"/>
+                </a:lnTo>
+                <a:close/>
+                <a:lnTo>
+                  <a:pt x="272487" y="272487"/>
+                </a:lnTo>
+                <a:close/>
+                <a:lnTo>
+                  <a:pt x="274091" y="274091"/>
+                </a:lnTo>
+                <a:close/>
+                <a:lnTo>
+                  <a:pt x="275695" y="275695"/>
+                </a:lnTo>
+                <a:close/>
+                <a:lnTo>
+                  <a:pt x="277299" y="277299"/>
+                </a:lnTo>
+                <a:close/>
+                <a:lnTo>
+                  <a:pt x="278903" y="278903"/>
+                </a:lnTo>
+                <a:close/>
+                <a:lnTo>
+                  <a:pt x="280506" y="280506"/>
+                </a:lnTo>
+                <a:close/>
+                <a:lnTo>
+                  <a:pt x="282110" y="282110"/>
+                </a:lnTo>
+                <a:close/>
+                <a:lnTo>
+                  <a:pt x="283714" y="283714"/>
+                </a:lnTo>
+                <a:close/>
+                <a:lnTo>
+                  <a:pt x="285317" y="285317"/>
+                </a:lnTo>
+                <a:close/>
+                <a:lnTo>
+                  <a:pt x="286921" y="286921"/>
+                </a:lnTo>
+                <a:close/>
+                <a:lnTo>
+                  <a:pt x="288525" y="288525"/>
+                </a:lnTo>
+                <a:close/>
+                <a:lnTo>
+                  <a:pt x="290130" y="290130"/>
+                </a:lnTo>
+                <a:close/>
+                <a:lnTo>
+                  <a:pt x="291734" y="291734"/>
+                </a:lnTo>
+                <a:close/>
+                <a:lnTo>
+                  <a:pt x="293339" y="293339"/>
+                </a:lnTo>
+                <a:close/>
+                <a:lnTo>
+                  <a:pt x="294945" y="294945"/>
+                </a:lnTo>
+                <a:close/>
+                <a:lnTo>
+                  <a:pt x="296550" y="296550"/>
+                </a:lnTo>
+                <a:close/>
+                <a:lnTo>
+                  <a:pt x="298155" y="298155"/>
+                </a:lnTo>
+                <a:close/>
+                <a:lnTo>
+                  <a:pt x="299759" y="299759"/>
+                </a:lnTo>
+                <a:close/>
+                <a:lnTo>
+                  <a:pt x="301362" y="301362"/>
+                </a:lnTo>
+                <a:close/>
+                <a:lnTo>
+                  <a:pt x="302964" y="302964"/>
+                </a:lnTo>
+                <a:close/>
+                <a:lnTo>
+                  <a:pt x="304564" y="304564"/>
+                </a:lnTo>
+                <a:close/>
+                <a:lnTo>
+                  <a:pt x="306163" y="306163"/>
+                </a:lnTo>
+                <a:close/>
+                <a:lnTo>
+                  <a:pt x="307760" y="307760"/>
+                </a:lnTo>
+                <a:close/>
+                <a:lnTo>
+                  <a:pt x="309357" y="309357"/>
+                </a:lnTo>
+                <a:close/>
+                <a:lnTo>
+                  <a:pt x="310954" y="310954"/>
+                </a:lnTo>
+                <a:close/>
+                <a:lnTo>
+                  <a:pt x="312551" y="312551"/>
+                </a:lnTo>
+                <a:close/>
+                <a:lnTo>
+                  <a:pt x="314149" y="314149"/>
+                </a:lnTo>
+                <a:close/>
+                <a:lnTo>
+                  <a:pt x="315748" y="315748"/>
+                </a:lnTo>
+                <a:close/>
+                <a:lnTo>
+                  <a:pt x="317349" y="317349"/>
+                </a:lnTo>
+                <a:close/>
+                <a:lnTo>
+                  <a:pt x="318951" y="318951"/>
+                </a:lnTo>
+                <a:close/>
+                <a:lnTo>
+                  <a:pt x="320554" y="320554"/>
+                </a:lnTo>
+                <a:close/>
+                <a:lnTo>
+                  <a:pt x="322159" y="322159"/>
+                </a:lnTo>
+                <a:close/>
+                <a:lnTo>
+                  <a:pt x="323764" y="323764"/>
+                </a:lnTo>
+                <a:close/>
+                <a:lnTo>
+                  <a:pt x="325369" y="325369"/>
+                </a:lnTo>
+                <a:close/>
+                <a:lnTo>
+                  <a:pt x="326974" y="326974"/>
+                </a:lnTo>
+                <a:close/>
+                <a:lnTo>
+                  <a:pt x="328579" y="328579"/>
+                </a:lnTo>
+                <a:close/>
+                <a:lnTo>
+                  <a:pt x="330184" y="330184"/>
+                </a:lnTo>
+                <a:close/>
+                <a:lnTo>
+                  <a:pt x="331788" y="331788"/>
+                </a:lnTo>
+                <a:close/>
+                <a:lnTo>
+                  <a:pt x="333392" y="333392"/>
+                </a:lnTo>
+                <a:close/>
+                <a:lnTo>
+                  <a:pt x="334996" y="334996"/>
+                </a:lnTo>
+                <a:close/>
+                <a:lnTo>
+                  <a:pt x="336600" y="336600"/>
+                </a:lnTo>
+                <a:close/>
+                <a:lnTo>
+                  <a:pt x="338203" y="338203"/>
+                </a:lnTo>
+                <a:close/>
+                <a:lnTo>
+                  <a:pt x="339807" y="339807"/>
+                </a:lnTo>
+                <a:close/>
+                <a:lnTo>
+                  <a:pt x="341411" y="341411"/>
+                </a:lnTo>
+                <a:close/>
+                <a:lnTo>
+                  <a:pt x="343014" y="343014"/>
+                </a:lnTo>
+                <a:close/>
+                <a:lnTo>
+                  <a:pt x="344618" y="344618"/>
+                </a:lnTo>
+                <a:close/>
+                <a:lnTo>
+                  <a:pt x="346222" y="346222"/>
+                </a:lnTo>
+                <a:close/>
+                <a:lnTo>
+                  <a:pt x="347826" y="347826"/>
+                </a:lnTo>
+                <a:close/>
+                <a:lnTo>
+                  <a:pt x="349430" y="349430"/>
+                </a:lnTo>
+                <a:close/>
+                <a:lnTo>
+                  <a:pt x="351034" y="351034"/>
+                </a:lnTo>
+                <a:close/>
+                <a:lnTo>
+                  <a:pt x="352638" y="352638"/>
+                </a:lnTo>
+                <a:close/>
+                <a:lnTo>
+                  <a:pt x="354242" y="354242"/>
+                </a:lnTo>
+                <a:close/>
+                <a:lnTo>
+                  <a:pt x="355845" y="355845"/>
+                </a:lnTo>
+                <a:close/>
+                <a:lnTo>
+                  <a:pt x="357449" y="357449"/>
+                </a:lnTo>
+                <a:close/>
+                <a:lnTo>
+                  <a:pt x="359053" y="359053"/>
+                </a:lnTo>
+                <a:close/>
+                <a:lnTo>
+                  <a:pt x="360657" y="360657"/>
+                </a:lnTo>
+                <a:close/>
+                <a:lnTo>
+                  <a:pt x="362261" y="362261"/>
+                </a:lnTo>
+                <a:close/>
+                <a:lnTo>
+                  <a:pt x="363865" y="363865"/>
+                </a:lnTo>
+                <a:close/>
+                <a:lnTo>
+                  <a:pt x="365470" y="365470"/>
+                </a:lnTo>
+                <a:close/>
+                <a:lnTo>
+                  <a:pt x="367076" y="367076"/>
+                </a:lnTo>
+                <a:close/>
+                <a:lnTo>
+                  <a:pt x="368681" y="368681"/>
+                </a:lnTo>
+                <a:close/>
+                <a:lnTo>
+                  <a:pt x="370286" y="370286"/>
+                </a:lnTo>
+                <a:close/>
+                <a:lnTo>
+                  <a:pt x="371890" y="371890"/>
+                </a:lnTo>
+                <a:close/>
+                <a:lnTo>
+                  <a:pt x="373494" y="373494"/>
+                </a:lnTo>
+                <a:close/>
+                <a:lnTo>
+                  <a:pt x="375096" y="375096"/>
+                </a:lnTo>
+                <a:close/>
+                <a:lnTo>
+                  <a:pt x="376697" y="376697"/>
+                </a:lnTo>
+                <a:close/>
+                <a:lnTo>
+                  <a:pt x="378297" y="378297"/>
+                </a:lnTo>
+                <a:close/>
+                <a:lnTo>
+                  <a:pt x="379895" y="379895"/>
+                </a:lnTo>
+                <a:close/>
+                <a:lnTo>
+                  <a:pt x="381492" y="381492"/>
+                </a:lnTo>
+                <a:close/>
+                <a:lnTo>
+                  <a:pt x="383089" y="383089"/>
+                </a:lnTo>
+                <a:close/>
+                <a:lnTo>
+                  <a:pt x="384686" y="384686"/>
+                </a:lnTo>
+                <a:close/>
+                <a:lnTo>
+                  <a:pt x="386283" y="386283"/>
+                </a:lnTo>
+                <a:close/>
+                <a:lnTo>
+                  <a:pt x="387882" y="387882"/>
+                </a:lnTo>
+                <a:close/>
+                <a:lnTo>
+                  <a:pt x="389482" y="389482"/>
+                </a:lnTo>
+                <a:close/>
+                <a:lnTo>
+                  <a:pt x="391083" y="391083"/>
+                </a:lnTo>
+                <a:close/>
+                <a:lnTo>
+                  <a:pt x="392686" y="392686"/>
+                </a:lnTo>
+                <a:close/>
+                <a:lnTo>
+                  <a:pt x="394290" y="394290"/>
+                </a:lnTo>
+                <a:close/>
+                <a:lnTo>
+                  <a:pt x="395895" y="395895"/>
+                </a:lnTo>
+                <a:close/>
+                <a:lnTo>
+                  <a:pt x="397500" y="397500"/>
+                </a:lnTo>
+                <a:close/>
+                <a:lnTo>
+                  <a:pt x="399105" y="399105"/>
+                </a:lnTo>
+                <a:close/>
+                <a:lnTo>
+                  <a:pt x="400710" y="400710"/>
+                </a:lnTo>
+                <a:close/>
+                <a:lnTo>
+                  <a:pt x="402315" y="402315"/>
+                </a:lnTo>
+                <a:close/>
+                <a:lnTo>
+                  <a:pt x="403920" y="403920"/>
+                </a:lnTo>
+                <a:close/>
+                <a:lnTo>
+                  <a:pt x="405524" y="405524"/>
+                </a:lnTo>
+                <a:close/>
+                <a:lnTo>
+                  <a:pt x="407128" y="407128"/>
+                </a:lnTo>
+                <a:close/>
+                <a:lnTo>
+                  <a:pt x="408732" y="408732"/>
+                </a:lnTo>
+                <a:close/>
+                <a:lnTo>
+                  <a:pt x="410335" y="410335"/>
+                </a:lnTo>
+                <a:close/>
+                <a:lnTo>
+                  <a:pt x="411939" y="411939"/>
+                </a:lnTo>
+                <a:close/>
+                <a:lnTo>
+                  <a:pt x="413542" y="413542"/>
+                </a:lnTo>
+                <a:close/>
+                <a:lnTo>
+                  <a:pt x="415146" y="415146"/>
+                </a:lnTo>
+                <a:close/>
+                <a:lnTo>
+                  <a:pt x="416749" y="416749"/>
+                </a:lnTo>
+                <a:close/>
+                <a:lnTo>
+                  <a:pt x="418353" y="418353"/>
+                </a:lnTo>
+                <a:close/>
+                <a:lnTo>
+                  <a:pt x="419956" y="419956"/>
+                </a:lnTo>
+                <a:close/>
+                <a:lnTo>
+                  <a:pt x="421560" y="421560"/>
+                </a:lnTo>
+                <a:close/>
+                <a:lnTo>
+                  <a:pt x="423165" y="423165"/>
+                </a:lnTo>
+                <a:close/>
+                <a:lnTo>
+                  <a:pt x="424769" y="424769"/>
+                </a:lnTo>
+                <a:close/>
+                <a:lnTo>
+                  <a:pt x="426374" y="426374"/>
+                </a:lnTo>
+                <a:close/>
+                <a:lnTo>
+                  <a:pt x="427980" y="427980"/>
+                </a:lnTo>
+                <a:close/>
+                <a:lnTo>
+                  <a:pt x="429585" y="429585"/>
+                </a:lnTo>
+                <a:close/>
+                <a:lnTo>
+                  <a:pt x="431190" y="431190"/>
+                </a:lnTo>
+                <a:close/>
+                <a:lnTo>
+                  <a:pt x="432794" y="432794"/>
+                </a:lnTo>
+                <a:close/>
+                <a:lnTo>
+                  <a:pt x="434398" y="434398"/>
+                </a:lnTo>
+                <a:close/>
+                <a:lnTo>
+                  <a:pt x="436000" y="436000"/>
+                </a:lnTo>
+                <a:close/>
+                <a:lnTo>
+                  <a:pt x="437601" y="437601"/>
+                </a:lnTo>
+                <a:close/>
+                <a:lnTo>
+                  <a:pt x="439200" y="439200"/>
+                </a:lnTo>
+                <a:close/>
+                <a:lnTo>
+                  <a:pt x="440798" y="440798"/>
+                </a:lnTo>
+                <a:close/>
+                <a:lnTo>
+                  <a:pt x="442396" y="442396"/>
+                </a:lnTo>
+                <a:close/>
+                <a:lnTo>
+                  <a:pt x="443992" y="443992"/>
+                </a:lnTo>
+                <a:close/>
+                <a:lnTo>
+                  <a:pt x="445589" y="445589"/>
+                </a:lnTo>
+                <a:close/>
+                <a:lnTo>
+                  <a:pt x="447187" y="447187"/>
+                </a:lnTo>
+                <a:close/>
+                <a:lnTo>
+                  <a:pt x="448785" y="448785"/>
+                </a:lnTo>
+                <a:close/>
+                <a:lnTo>
+                  <a:pt x="450386" y="450386"/>
+                </a:lnTo>
+                <a:close/>
+                <a:lnTo>
+                  <a:pt x="451987" y="451987"/>
+                </a:lnTo>
+                <a:close/>
+                <a:lnTo>
+                  <a:pt x="453590" y="453590"/>
+                </a:lnTo>
+                <a:close/>
+                <a:lnTo>
+                  <a:pt x="455194" y="455194"/>
+                </a:lnTo>
+                <a:close/>
+                <a:lnTo>
+                  <a:pt x="456799" y="456799"/>
+                </a:lnTo>
+                <a:close/>
+                <a:lnTo>
+                  <a:pt x="458404" y="458404"/>
+                </a:lnTo>
+                <a:close/>
+                <a:lnTo>
+                  <a:pt x="460009" y="460009"/>
+                </a:lnTo>
+                <a:close/>
+                <a:lnTo>
+                  <a:pt x="461615" y="461615"/>
+                </a:lnTo>
+                <a:close/>
+                <a:lnTo>
+                  <a:pt x="463219" y="463219"/>
+                </a:lnTo>
+                <a:close/>
+                <a:lnTo>
+                  <a:pt x="464824" y="464824"/>
+                </a:lnTo>
+                <a:close/>
+                <a:lnTo>
+                  <a:pt x="466428" y="466428"/>
+                </a:lnTo>
+                <a:close/>
+                <a:lnTo>
+                  <a:pt x="468032" y="468032"/>
+                </a:lnTo>
+                <a:close/>
+                <a:lnTo>
+                  <a:pt x="469635" y="469635"/>
+                </a:lnTo>
+                <a:close/>
+                <a:lnTo>
+                  <a:pt x="471239" y="471239"/>
+                </a:lnTo>
+                <a:close/>
+                <a:lnTo>
+                  <a:pt x="472842" y="472842"/>
+                </a:lnTo>
+                <a:close/>
+                <a:lnTo>
+                  <a:pt x="474446" y="474446"/>
+                </a:lnTo>
+                <a:close/>
+                <a:lnTo>
+                  <a:pt x="476050" y="476050"/>
+                </a:lnTo>
+                <a:close/>
+                <a:lnTo>
+                  <a:pt x="477654" y="477654"/>
+                </a:lnTo>
+                <a:close/>
+                <a:lnTo>
+                  <a:pt x="479258" y="479258"/>
+                </a:lnTo>
+                <a:close/>
+                <a:lnTo>
+                  <a:pt x="480862" y="480862"/>
+                </a:lnTo>
+                <a:close/>
+                <a:lnTo>
+                  <a:pt x="482466" y="482466"/>
+                </a:lnTo>
+                <a:close/>
+                <a:lnTo>
+                  <a:pt x="484070" y="484070"/>
+                </a:lnTo>
+                <a:close/>
+                <a:lnTo>
+                  <a:pt x="485674" y="485674"/>
+                </a:lnTo>
+                <a:close/>
+                <a:lnTo>
+                  <a:pt x="487278" y="487278"/>
+                </a:lnTo>
+                <a:close/>
+                <a:lnTo>
+                  <a:pt x="488881" y="488881"/>
+                </a:lnTo>
+                <a:close/>
+                <a:lnTo>
+                  <a:pt x="490485" y="490485"/>
+                </a:lnTo>
+                <a:close/>
+                <a:lnTo>
+                  <a:pt x="492088" y="492088"/>
+                </a:lnTo>
+                <a:close/>
+                <a:lnTo>
+                  <a:pt x="493692" y="493692"/>
+                </a:lnTo>
+                <a:close/>
+                <a:lnTo>
+                  <a:pt x="495296" y="495296"/>
+                </a:lnTo>
+                <a:close/>
+                <a:lnTo>
+                  <a:pt x="496901" y="496901"/>
+                </a:lnTo>
+                <a:close/>
+                <a:lnTo>
+                  <a:pt x="498505" y="498505"/>
+                </a:lnTo>
+                <a:close/>
+                <a:lnTo>
+                  <a:pt x="500111" y="500111"/>
+                </a:lnTo>
+                <a:close/>
+                <a:lnTo>
+                  <a:pt x="501716" y="501716"/>
+                </a:lnTo>
+                <a:close/>
+                <a:lnTo>
+                  <a:pt x="503321" y="503321"/>
+                </a:lnTo>
+                <a:close/>
+                <a:lnTo>
+                  <a:pt x="504926" y="504926"/>
+                </a:lnTo>
+                <a:close/>
+                <a:lnTo>
+                  <a:pt x="506530" y="506530"/>
+                </a:lnTo>
+                <a:close/>
+                <a:lnTo>
+                  <a:pt x="508133" y="508133"/>
+                </a:lnTo>
+                <a:close/>
+                <a:lnTo>
+                  <a:pt x="509734" y="509734"/>
+                </a:lnTo>
+                <a:close/>
+                <a:lnTo>
+                  <a:pt x="511335" y="511335"/>
+                </a:lnTo>
+                <a:close/>
+                <a:lnTo>
+                  <a:pt x="512933" y="512933"/>
+                </a:lnTo>
+                <a:close/>
+                <a:lnTo>
+                  <a:pt x="514531" y="514531"/>
+                </a:lnTo>
+                <a:close/>
+                <a:lnTo>
+                  <a:pt x="516128" y="516128"/>
+                </a:lnTo>
+                <a:close/>
+                <a:lnTo>
+                  <a:pt x="517724" y="517724"/>
+                </a:lnTo>
+                <a:close/>
+                <a:lnTo>
+                  <a:pt x="519322" y="519322"/>
+                </a:lnTo>
+                <a:close/>
+                <a:lnTo>
+                  <a:pt x="520920" y="520920"/>
+                </a:lnTo>
+                <a:close/>
+                <a:lnTo>
+                  <a:pt x="522519" y="522519"/>
+                </a:lnTo>
+                <a:close/>
+                <a:lnTo>
+                  <a:pt x="524120" y="524120"/>
+                </a:lnTo>
+                <a:close/>
+                <a:lnTo>
+                  <a:pt x="525722" y="525722"/>
+                </a:lnTo>
+                <a:close/>
+                <a:lnTo>
+                  <a:pt x="527326" y="527326"/>
+                </a:lnTo>
+                <a:close/>
+                <a:lnTo>
+                  <a:pt x="528930" y="528930"/>
+                </a:lnTo>
+                <a:close/>
+                <a:lnTo>
+                  <a:pt x="530535" y="530535"/>
+                </a:lnTo>
+                <a:close/>
+                <a:lnTo>
+                  <a:pt x="532140" y="532140"/>
+                </a:lnTo>
+                <a:close/>
+                <a:lnTo>
+                  <a:pt x="533746" y="533746"/>
+                </a:lnTo>
+                <a:close/>
+                <a:lnTo>
+                  <a:pt x="535351" y="535351"/>
+                </a:lnTo>
+                <a:close/>
+                <a:lnTo>
+                  <a:pt x="536955" y="536955"/>
+                </a:lnTo>
+                <a:close/>
+                <a:lnTo>
+                  <a:pt x="538560" y="538560"/>
+                </a:lnTo>
+                <a:close/>
+                <a:lnTo>
+                  <a:pt x="540164" y="540164"/>
+                </a:lnTo>
+                <a:close/>
+                <a:lnTo>
+                  <a:pt x="541767" y="541767"/>
+                </a:lnTo>
+                <a:close/>
+                <a:lnTo>
+                  <a:pt x="543371" y="543371"/>
+                </a:lnTo>
+                <a:close/>
+                <a:lnTo>
+                  <a:pt x="544974" y="544974"/>
+                </a:lnTo>
+                <a:close/>
+                <a:lnTo>
+                  <a:pt x="546578" y="546578"/>
+                </a:lnTo>
+                <a:close/>
+                <a:lnTo>
+                  <a:pt x="548181" y="548181"/>
+                </a:lnTo>
+                <a:close/>
+                <a:lnTo>
+                  <a:pt x="549785" y="549785"/>
+                </a:lnTo>
+                <a:close/>
+                <a:lnTo>
+                  <a:pt x="551388" y="551388"/>
+                </a:lnTo>
+                <a:close/>
+                <a:lnTo>
+                  <a:pt x="552992" y="552992"/>
+                </a:lnTo>
+                <a:close/>
+                <a:lnTo>
+                  <a:pt x="554596" y="554596"/>
+                </a:lnTo>
+                <a:close/>
+                <a:lnTo>
+                  <a:pt x="556200" y="556200"/>
+                </a:lnTo>
+                <a:close/>
+                <a:lnTo>
+                  <a:pt x="557805" y="557805"/>
+                </a:lnTo>
+                <a:close/>
+                <a:lnTo>
+                  <a:pt x="559410" y="559410"/>
+                </a:lnTo>
+                <a:close/>
+                <a:lnTo>
+                  <a:pt x="561015" y="561015"/>
+                </a:lnTo>
+                <a:close/>
+                <a:lnTo>
+                  <a:pt x="562620" y="562620"/>
+                </a:lnTo>
+                <a:close/>
+                <a:lnTo>
+                  <a:pt x="564225" y="564225"/>
+                </a:lnTo>
+                <a:close/>
+                <a:lnTo>
+                  <a:pt x="565830" y="565830"/>
+                </a:lnTo>
+                <a:close/>
+                <a:lnTo>
+                  <a:pt x="567434" y="567434"/>
+                </a:lnTo>
+                <a:close/>
+                <a:lnTo>
+                  <a:pt x="569037" y="569037"/>
+                </a:lnTo>
+                <a:close/>
+                <a:lnTo>
+                  <a:pt x="570638" y="570638"/>
+                </a:lnTo>
+                <a:close/>
+                <a:lnTo>
+                  <a:pt x="572238" y="572238"/>
+                </a:lnTo>
+                <a:close/>
+                <a:lnTo>
+                  <a:pt x="573837" y="573837"/>
+                </a:lnTo>
+                <a:close/>
+                <a:lnTo>
+                  <a:pt x="575434" y="575434"/>
+                </a:lnTo>
+                <a:close/>
+                <a:lnTo>
+                  <a:pt x="577031" y="577031"/>
+                </a:lnTo>
+                <a:close/>
+                <a:lnTo>
+                  <a:pt x="578628" y="578628"/>
+                </a:lnTo>
+                <a:close/>
+                <a:lnTo>
+                  <a:pt x="580225" y="580225"/>
+                </a:lnTo>
+                <a:close/>
+                <a:lnTo>
+                  <a:pt x="581823" y="581823"/>
+                </a:lnTo>
+                <a:close/>
+                <a:lnTo>
+                  <a:pt x="583423" y="583423"/>
+                </a:lnTo>
+                <a:close/>
+                <a:lnTo>
+                  <a:pt x="585024" y="585024"/>
+                </a:lnTo>
+                <a:close/>
+                <a:lnTo>
+                  <a:pt x="586626" y="586626"/>
+                </a:lnTo>
+                <a:close/>
+                <a:lnTo>
+                  <a:pt x="588230" y="588230"/>
+                </a:lnTo>
+                <a:close/>
+                <a:lnTo>
+                  <a:pt x="589834" y="589834"/>
+                </a:lnTo>
+                <a:close/>
+                <a:lnTo>
+                  <a:pt x="591439" y="591439"/>
+                </a:lnTo>
+                <a:close/>
+                <a:lnTo>
+                  <a:pt x="593044" y="593044"/>
+                </a:lnTo>
+                <a:close/>
+                <a:lnTo>
+                  <a:pt x="594650" y="594650"/>
+                </a:lnTo>
+                <a:close/>
+                <a:lnTo>
+                  <a:pt x="596255" y="596255"/>
+                </a:lnTo>
+                <a:close/>
+                <a:lnTo>
+                  <a:pt x="597859" y="597859"/>
+                </a:lnTo>
+                <a:close/>
+                <a:lnTo>
+                  <a:pt x="599463" y="599463"/>
+                </a:lnTo>
+                <a:close/>
+                <a:lnTo>
+                  <a:pt x="601067" y="601067"/>
+                </a:lnTo>
+                <a:close/>
+                <a:lnTo>
+                  <a:pt x="602671" y="602671"/>
+                </a:lnTo>
+                <a:close/>
+                <a:lnTo>
+                  <a:pt x="604275" y="604275"/>
+                </a:lnTo>
+                <a:close/>
+                <a:lnTo>
+                  <a:pt x="605878" y="605878"/>
+                </a:lnTo>
+                <a:close/>
+                <a:lnTo>
+                  <a:pt x="607482" y="607482"/>
+                </a:lnTo>
+                <a:close/>
+                <a:lnTo>
+                  <a:pt x="609086" y="609086"/>
+                </a:lnTo>
+                <a:close/>
+                <a:lnTo>
+                  <a:pt x="610690" y="610690"/>
+                </a:lnTo>
+                <a:close/>
+                <a:lnTo>
+                  <a:pt x="612294" y="612294"/>
+                </a:lnTo>
+                <a:close/>
+                <a:lnTo>
+                  <a:pt x="613898" y="613898"/>
+                </a:lnTo>
+                <a:close/>
+                <a:lnTo>
+                  <a:pt x="615502" y="615502"/>
+                </a:lnTo>
+                <a:close/>
+                <a:lnTo>
+                  <a:pt x="617106" y="617106"/>
+                </a:lnTo>
+                <a:close/>
+                <a:lnTo>
+                  <a:pt x="618709" y="618709"/>
+                </a:lnTo>
+                <a:close/>
+                <a:lnTo>
+                  <a:pt x="620313" y="620313"/>
+                </a:lnTo>
+                <a:close/>
+                <a:lnTo>
+                  <a:pt x="621917" y="621917"/>
+                </a:lnTo>
+                <a:close/>
+                <a:lnTo>
+                  <a:pt x="623520" y="623520"/>
+                </a:lnTo>
+                <a:close/>
+                <a:lnTo>
+                  <a:pt x="625124" y="625124"/>
+                </a:lnTo>
+                <a:close/>
+                <a:lnTo>
+                  <a:pt x="626728" y="626728"/>
+                </a:lnTo>
+                <a:close/>
+                <a:lnTo>
+                  <a:pt x="628332" y="628332"/>
+                </a:lnTo>
+                <a:close/>
+                <a:lnTo>
+                  <a:pt x="629936" y="629936"/>
+                </a:lnTo>
+                <a:close/>
+                <a:lnTo>
+                  <a:pt x="631541" y="631541"/>
+                </a:lnTo>
+                <a:close/>
+                <a:lnTo>
+                  <a:pt x="633146" y="633146"/>
+                </a:lnTo>
+                <a:close/>
+                <a:lnTo>
+                  <a:pt x="634751" y="634751"/>
+                </a:lnTo>
+                <a:close/>
+                <a:lnTo>
+                  <a:pt x="636356" y="636356"/>
+                </a:lnTo>
+                <a:close/>
+                <a:lnTo>
+                  <a:pt x="637961" y="637961"/>
+                </a:lnTo>
+                <a:close/>
+                <a:lnTo>
+                  <a:pt x="639566" y="639566"/>
+                </a:lnTo>
+                <a:close/>
+                <a:lnTo>
+                  <a:pt x="641169" y="641169"/>
+                </a:lnTo>
+                <a:close/>
+                <a:lnTo>
+                  <a:pt x="642771" y="642771"/>
+                </a:lnTo>
+                <a:close/>
+                <a:lnTo>
+                  <a:pt x="644372" y="644372"/>
+                </a:lnTo>
+                <a:close/>
+                <a:lnTo>
+                  <a:pt x="645971" y="645971"/>
+                </a:lnTo>
+                <a:close/>
+                <a:lnTo>
+                  <a:pt x="647569" y="647569"/>
+                </a:lnTo>
+                <a:close/>
+                <a:lnTo>
+                  <a:pt x="649166" y="649166"/>
+                </a:lnTo>
+                <a:close/>
+                <a:lnTo>
+                  <a:pt x="650763" y="650763"/>
+                </a:lnTo>
+                <a:close/>
+                <a:lnTo>
+                  <a:pt x="652360" y="652360"/>
+                </a:lnTo>
+                <a:close/>
+                <a:lnTo>
+                  <a:pt x="653957" y="653957"/>
+                </a:lnTo>
+                <a:close/>
+                <a:lnTo>
+                  <a:pt x="655556" y="655556"/>
+                </a:lnTo>
+                <a:close/>
+                <a:lnTo>
+                  <a:pt x="657156" y="657156"/>
+                </a:lnTo>
+                <a:close/>
+                <a:lnTo>
+                  <a:pt x="658758" y="658758"/>
+                </a:lnTo>
+                <a:close/>
+                <a:lnTo>
+                  <a:pt x="660361" y="660361"/>
+                </a:lnTo>
+                <a:close/>
+                <a:lnTo>
+                  <a:pt x="661965" y="661965"/>
+                </a:lnTo>
+                <a:close/>
+                <a:lnTo>
+                  <a:pt x="663570" y="663570"/>
+                </a:lnTo>
+                <a:close/>
+                <a:lnTo>
+                  <a:pt x="665175" y="665175"/>
+                </a:lnTo>
+                <a:close/>
+                <a:lnTo>
+                  <a:pt x="666781" y="666781"/>
+                </a:lnTo>
+                <a:close/>
+                <a:lnTo>
+                  <a:pt x="668386" y="668386"/>
+                </a:lnTo>
+                <a:close/>
+                <a:lnTo>
+                  <a:pt x="669990" y="669990"/>
+                </a:lnTo>
+                <a:close/>
+                <a:lnTo>
+                  <a:pt x="671595" y="671595"/>
+                </a:lnTo>
+                <a:close/>
+                <a:lnTo>
+                  <a:pt x="673199" y="673199"/>
+                </a:lnTo>
+                <a:close/>
+                <a:lnTo>
+                  <a:pt x="674803" y="674803"/>
+                </a:lnTo>
+                <a:close/>
+                <a:lnTo>
+                  <a:pt x="676406" y="676406"/>
+                </a:lnTo>
+                <a:close/>
+                <a:lnTo>
+                  <a:pt x="678010" y="678010"/>
+                </a:lnTo>
+                <a:close/>
+                <a:lnTo>
+                  <a:pt x="679614" y="679614"/>
+                </a:lnTo>
+                <a:close/>
+                <a:lnTo>
+                  <a:pt x="681217" y="681217"/>
+                </a:lnTo>
+                <a:close/>
+                <a:lnTo>
+                  <a:pt x="682821" y="682821"/>
+                </a:lnTo>
+                <a:close/>
+                <a:lnTo>
+                  <a:pt x="684425" y="684425"/>
+                </a:lnTo>
+                <a:close/>
+                <a:lnTo>
+                  <a:pt x="686029" y="686029"/>
+                </a:lnTo>
+                <a:close/>
+                <a:lnTo>
+                  <a:pt x="687633" y="687633"/>
+                </a:lnTo>
+                <a:close/>
+                <a:lnTo>
+                  <a:pt x="689237" y="689237"/>
+                </a:lnTo>
+                <a:close/>
+                <a:lnTo>
+                  <a:pt x="690841" y="690841"/>
+                </a:lnTo>
+                <a:close/>
+                <a:lnTo>
+                  <a:pt x="692445" y="692445"/>
+                </a:lnTo>
+                <a:close/>
+                <a:lnTo>
+                  <a:pt x="694049" y="694049"/>
+                </a:lnTo>
+                <a:close/>
+                <a:lnTo>
+                  <a:pt x="695652" y="695652"/>
+                </a:lnTo>
+                <a:close/>
+                <a:lnTo>
+                  <a:pt x="697256" y="697256"/>
+                </a:lnTo>
+                <a:close/>
+                <a:lnTo>
+                  <a:pt x="698860" y="698860"/>
+                </a:lnTo>
+                <a:close/>
+                <a:lnTo>
+                  <a:pt x="700463" y="700463"/>
+                </a:lnTo>
+                <a:close/>
+                <a:lnTo>
+                  <a:pt x="702067" y="702067"/>
+                </a:lnTo>
+                <a:close/>
+                <a:lnTo>
+                  <a:pt x="703672" y="703672"/>
+                </a:lnTo>
+                <a:close/>
+                <a:lnTo>
+                  <a:pt x="705277" y="705277"/>
+                </a:lnTo>
+                <a:close/>
+                <a:lnTo>
+                  <a:pt x="706882" y="706882"/>
+                </a:lnTo>
+                <a:close/>
+                <a:lnTo>
+                  <a:pt x="708487" y="708487"/>
+                </a:lnTo>
+                <a:close/>
+                <a:lnTo>
+                  <a:pt x="710092" y="710092"/>
+                </a:lnTo>
+                <a:close/>
+                <a:lnTo>
+                  <a:pt x="711697" y="711697"/>
+                </a:lnTo>
+                <a:close/>
+                <a:lnTo>
+                  <a:pt x="713301" y="713301"/>
+                </a:lnTo>
+                <a:close/>
+                <a:lnTo>
+                  <a:pt x="714904" y="714904"/>
+                </a:lnTo>
+                <a:close/>
+                <a:lnTo>
+                  <a:pt x="716505" y="716505"/>
+                </a:lnTo>
+                <a:close/>
+                <a:lnTo>
+                  <a:pt x="718105" y="718105"/>
+                </a:lnTo>
+                <a:close/>
+                <a:lnTo>
+                  <a:pt x="719704" y="719704"/>
+                </a:lnTo>
+                <a:close/>
+                <a:lnTo>
+                  <a:pt x="721301" y="721301"/>
+                </a:lnTo>
+                <a:close/>
+                <a:lnTo>
+                  <a:pt x="722898" y="722898"/>
+                </a:lnTo>
+                <a:close/>
+                <a:lnTo>
+                  <a:pt x="724495" y="724495"/>
+                </a:lnTo>
+                <a:close/>
+                <a:lnTo>
+                  <a:pt x="726092" y="726092"/>
+                </a:lnTo>
+                <a:close/>
+                <a:lnTo>
+                  <a:pt x="727690" y="727690"/>
+                </a:lnTo>
+                <a:close/>
+                <a:lnTo>
+                  <a:pt x="729290" y="729290"/>
+                </a:lnTo>
+                <a:close/>
+                <a:lnTo>
+                  <a:pt x="730891" y="730891"/>
+                </a:lnTo>
+                <a:close/>
+                <a:lnTo>
+                  <a:pt x="732493" y="732493"/>
+                </a:lnTo>
+                <a:close/>
+                <a:lnTo>
+                  <a:pt x="734097" y="734097"/>
+                </a:lnTo>
+                <a:close/>
+                <a:lnTo>
+                  <a:pt x="735701" y="735701"/>
+                </a:lnTo>
+                <a:close/>
+                <a:lnTo>
+                  <a:pt x="737306" y="737306"/>
+                </a:lnTo>
+                <a:close/>
+                <a:lnTo>
+                  <a:pt x="738911" y="738911"/>
+                </a:lnTo>
+                <a:close/>
+                <a:lnTo>
+                  <a:pt x="740517" y="740517"/>
+                </a:lnTo>
+                <a:close/>
+                <a:lnTo>
+                  <a:pt x="742122" y="742122"/>
+                </a:lnTo>
+                <a:close/>
+                <a:lnTo>
+                  <a:pt x="743726" y="743726"/>
+                </a:lnTo>
+                <a:close/>
+                <a:lnTo>
+                  <a:pt x="745331" y="745331"/>
+                </a:lnTo>
+                <a:close/>
+                <a:lnTo>
+                  <a:pt x="746935" y="746935"/>
+                </a:lnTo>
+                <a:close/>
+                <a:lnTo>
+                  <a:pt x="748538" y="748538"/>
+                </a:lnTo>
+                <a:close/>
+                <a:lnTo>
+                  <a:pt x="750142" y="750142"/>
+                </a:lnTo>
+                <a:close/>
+                <a:lnTo>
+                  <a:pt x="751746" y="751746"/>
+                </a:lnTo>
+                <a:close/>
+                <a:lnTo>
+                  <a:pt x="753349" y="753349"/>
+                </a:lnTo>
+                <a:close/>
+                <a:lnTo>
+                  <a:pt x="754952" y="754952"/>
+                </a:lnTo>
+                <a:close/>
+                <a:lnTo>
+                  <a:pt x="756556" y="756556"/>
+                </a:lnTo>
+                <a:close/>
+                <a:lnTo>
+                  <a:pt x="758159" y="758159"/>
+                </a:lnTo>
+                <a:close/>
+                <a:lnTo>
+                  <a:pt x="759763" y="759763"/>
+                </a:lnTo>
+                <a:close/>
+                <a:lnTo>
+                  <a:pt x="761367" y="761367"/>
+                </a:lnTo>
+                <a:close/>
+                <a:lnTo>
+                  <a:pt x="762971" y="762971"/>
+                </a:lnTo>
+                <a:close/>
+                <a:lnTo>
+                  <a:pt x="764576" y="764576"/>
+                </a:lnTo>
+                <a:close/>
+                <a:lnTo>
+                  <a:pt x="766181" y="766181"/>
+                </a:lnTo>
+                <a:close/>
+                <a:lnTo>
+                  <a:pt x="767786" y="767786"/>
+                </a:lnTo>
+                <a:close/>
+                <a:lnTo>
+                  <a:pt x="769391" y="769391"/>
+                </a:lnTo>
+                <a:close/>
+                <a:lnTo>
+                  <a:pt x="770997" y="770997"/>
+                </a:lnTo>
+                <a:close/>
+                <a:lnTo>
+                  <a:pt x="772601" y="772601"/>
+                </a:lnTo>
+                <a:close/>
+                <a:lnTo>
+                  <a:pt x="774205" y="774205"/>
+                </a:lnTo>
+                <a:close/>
+                <a:lnTo>
+                  <a:pt x="775808" y="775808"/>
+                </a:lnTo>
+                <a:close/>
+                <a:lnTo>
+                  <a:pt x="777409" y="777409"/>
+                </a:lnTo>
+                <a:close/>
+                <a:lnTo>
+                  <a:pt x="779009" y="779009"/>
+                </a:lnTo>
+                <a:close/>
+                <a:lnTo>
+                  <a:pt x="780607" y="780607"/>
+                </a:lnTo>
+                <a:close/>
+                <a:lnTo>
+                  <a:pt x="782204" y="782204"/>
+                </a:lnTo>
+                <a:close/>
+                <a:lnTo>
+                  <a:pt x="783801" y="783801"/>
+                </a:lnTo>
+                <a:close/>
+                <a:lnTo>
+                  <a:pt x="785398" y="785398"/>
+                </a:lnTo>
+                <a:close/>
+                <a:lnTo>
+                  <a:pt x="786995" y="786995"/>
+                </a:lnTo>
+                <a:close/>
+                <a:lnTo>
+                  <a:pt x="788594" y="788594"/>
+                </a:lnTo>
+                <a:close/>
+                <a:lnTo>
+                  <a:pt x="790193" y="790193"/>
+                </a:lnTo>
+                <a:close/>
+                <a:lnTo>
+                  <a:pt x="791794" y="791794"/>
+                </a:lnTo>
+                <a:close/>
+                <a:lnTo>
+                  <a:pt x="793397" y="793397"/>
+                </a:lnTo>
+                <a:close/>
+                <a:lnTo>
+                  <a:pt x="795001" y="795001"/>
+                </a:lnTo>
+                <a:close/>
+                <a:lnTo>
+                  <a:pt x="796605" y="796605"/>
+                </a:lnTo>
+                <a:close/>
+                <a:lnTo>
+                  <a:pt x="798210" y="798210"/>
+                </a:lnTo>
+                <a:close/>
+                <a:lnTo>
+                  <a:pt x="799816" y="799816"/>
+                </a:lnTo>
+                <a:close/>
+                <a:lnTo>
+                  <a:pt x="801421" y="801421"/>
+                </a:lnTo>
+                <a:close/>
+                <a:lnTo>
+                  <a:pt x="803026" y="803026"/>
+                </a:lnTo>
+                <a:close/>
+                <a:lnTo>
+                  <a:pt x="804630" y="804630"/>
+                </a:lnTo>
+                <a:close/>
+                <a:lnTo>
+                  <a:pt x="806234" y="806234"/>
+                </a:lnTo>
+                <a:close/>
+                <a:lnTo>
+                  <a:pt x="807838" y="807838"/>
+                </a:lnTo>
+                <a:close/>
+                <a:lnTo>
+                  <a:pt x="809442" y="809442"/>
+                </a:lnTo>
+                <a:close/>
+                <a:lnTo>
+                  <a:pt x="811046" y="811046"/>
+                </a:lnTo>
+                <a:close/>
+                <a:lnTo>
+                  <a:pt x="812649" y="812649"/>
+                </a:lnTo>
+                <a:close/>
+                <a:lnTo>
+                  <a:pt x="814253" y="814253"/>
+                </a:lnTo>
+                <a:close/>
+                <a:lnTo>
+                  <a:pt x="815857" y="815857"/>
+                </a:lnTo>
+                <a:close/>
+                <a:lnTo>
+                  <a:pt x="817461" y="817461"/>
+                </a:lnTo>
+                <a:close/>
+                <a:lnTo>
+                  <a:pt x="819065" y="819065"/>
+                </a:lnTo>
+                <a:close/>
+                <a:lnTo>
+                  <a:pt x="820669" y="820669"/>
+                </a:lnTo>
+                <a:close/>
+                <a:lnTo>
+                  <a:pt x="822273" y="822273"/>
+                </a:lnTo>
+                <a:close/>
+                <a:lnTo>
+                  <a:pt x="823877" y="823877"/>
+                </a:lnTo>
+                <a:close/>
+                <a:lnTo>
+                  <a:pt x="825481" y="825481"/>
+                </a:lnTo>
+                <a:close/>
+                <a:lnTo>
+                  <a:pt x="827084" y="827084"/>
+                </a:lnTo>
+                <a:close/>
+                <a:lnTo>
+                  <a:pt x="828688" y="828688"/>
+                </a:lnTo>
+                <a:close/>
+                <a:lnTo>
+                  <a:pt x="830292" y="830292"/>
+                </a:lnTo>
+                <a:close/>
+                <a:lnTo>
+                  <a:pt x="831895" y="831895"/>
+                </a:lnTo>
+                <a:close/>
+                <a:lnTo>
+                  <a:pt x="833499" y="833499"/>
+                </a:lnTo>
+                <a:close/>
+                <a:lnTo>
+                  <a:pt x="835103" y="835103"/>
+                </a:lnTo>
+                <a:close/>
+                <a:lnTo>
+                  <a:pt x="836707" y="836707"/>
+                </a:lnTo>
+                <a:close/>
+                <a:lnTo>
+                  <a:pt x="838312" y="838312"/>
+                </a:lnTo>
+                <a:close/>
+                <a:lnTo>
+                  <a:pt x="839917" y="839917"/>
+                </a:lnTo>
+                <a:close/>
+                <a:lnTo>
+                  <a:pt x="841522" y="841522"/>
+                </a:lnTo>
+                <a:close/>
+                <a:lnTo>
+                  <a:pt x="843127" y="843127"/>
+                </a:lnTo>
+                <a:close/>
+                <a:lnTo>
+                  <a:pt x="844732" y="844732"/>
+                </a:lnTo>
+                <a:close/>
+                <a:lnTo>
+                  <a:pt x="846337" y="846337"/>
+                </a:lnTo>
+                <a:close/>
+                <a:lnTo>
+                  <a:pt x="847940" y="847940"/>
+                </a:lnTo>
+                <a:close/>
+                <a:lnTo>
+                  <a:pt x="849542" y="849542"/>
+                </a:lnTo>
+                <a:close/>
+                <a:lnTo>
+                  <a:pt x="851143" y="851143"/>
+                </a:lnTo>
+                <a:close/>
+                <a:lnTo>
+                  <a:pt x="852742" y="852742"/>
+                </a:lnTo>
+                <a:close/>
+                <a:lnTo>
+                  <a:pt x="854339" y="854339"/>
+                </a:lnTo>
+                <a:close/>
+                <a:lnTo>
+                  <a:pt x="855936" y="855936"/>
+                </a:lnTo>
+                <a:close/>
+                <a:lnTo>
+                  <a:pt x="857533" y="857533"/>
+                </a:lnTo>
+                <a:close/>
+                <a:lnTo>
+                  <a:pt x="859130" y="859130"/>
+                </a:lnTo>
+                <a:close/>
+                <a:lnTo>
+                  <a:pt x="860728" y="860728"/>
+                </a:lnTo>
+                <a:close/>
+                <a:lnTo>
+                  <a:pt x="862327" y="862327"/>
+                </a:lnTo>
+                <a:close/>
+                <a:lnTo>
+                  <a:pt x="863927" y="863927"/>
+                </a:lnTo>
+                <a:close/>
+                <a:lnTo>
+                  <a:pt x="865529" y="865529"/>
+                </a:lnTo>
+                <a:close/>
+                <a:lnTo>
+                  <a:pt x="867132" y="867132"/>
+                </a:lnTo>
+                <a:close/>
+                <a:lnTo>
+                  <a:pt x="868736" y="868736"/>
+                </a:lnTo>
+                <a:close/>
+                <a:lnTo>
+                  <a:pt x="870341" y="870341"/>
+                </a:lnTo>
+                <a:close/>
+                <a:lnTo>
+                  <a:pt x="871947" y="871947"/>
+                </a:lnTo>
+                <a:close/>
+                <a:lnTo>
+                  <a:pt x="873552" y="873552"/>
+                </a:lnTo>
+                <a:close/>
+                <a:lnTo>
+                  <a:pt x="875157" y="875157"/>
+                </a:lnTo>
+                <a:close/>
+                <a:lnTo>
+                  <a:pt x="876762" y="876762"/>
+                </a:lnTo>
+                <a:close/>
+                <a:lnTo>
+                  <a:pt x="878366" y="878366"/>
+                </a:lnTo>
+                <a:close/>
+                <a:lnTo>
+                  <a:pt x="879970" y="879970"/>
+                </a:lnTo>
+                <a:close/>
+                <a:lnTo>
+                  <a:pt x="881574" y="881574"/>
+                </a:lnTo>
+                <a:close/>
+                <a:lnTo>
+                  <a:pt x="883177" y="883177"/>
+                </a:lnTo>
+                <a:close/>
+                <a:lnTo>
+                  <a:pt x="884781" y="884781"/>
+                </a:lnTo>
+                <a:close/>
+                <a:lnTo>
+                  <a:pt x="886385" y="886385"/>
+                </a:lnTo>
+                <a:close/>
+                <a:lnTo>
+                  <a:pt x="887988" y="887988"/>
+                </a:lnTo>
+                <a:close/>
+                <a:lnTo>
+                  <a:pt x="889592" y="889592"/>
+                </a:lnTo>
+                <a:close/>
+                <a:lnTo>
+                  <a:pt x="891196" y="891196"/>
+                </a:lnTo>
+                <a:close/>
+                <a:lnTo>
+                  <a:pt x="892800" y="892800"/>
+                </a:lnTo>
+                <a:close/>
+                <a:lnTo>
+                  <a:pt x="894404" y="894404"/>
+                </a:lnTo>
+                <a:close/>
+                <a:lnTo>
+                  <a:pt x="896008" y="896008"/>
+                </a:lnTo>
+                <a:close/>
+                <a:lnTo>
+                  <a:pt x="897612" y="897612"/>
+                </a:lnTo>
+                <a:close/>
+                <a:lnTo>
+                  <a:pt x="899216" y="899216"/>
+                </a:lnTo>
+                <a:close/>
+                <a:lnTo>
+                  <a:pt x="900820" y="900820"/>
+                </a:lnTo>
+                <a:close/>
+                <a:lnTo>
+                  <a:pt x="902423" y="902423"/>
+                </a:lnTo>
+                <a:close/>
+                <a:lnTo>
+                  <a:pt x="904027" y="904027"/>
+                </a:lnTo>
+                <a:close/>
+                <a:lnTo>
+                  <a:pt x="905631" y="905631"/>
+                </a:lnTo>
+                <a:close/>
+                <a:lnTo>
+                  <a:pt x="907234" y="907234"/>
+                </a:lnTo>
+                <a:close/>
+                <a:lnTo>
+                  <a:pt x="908839" y="908839"/>
+                </a:lnTo>
+                <a:close/>
+                <a:lnTo>
+                  <a:pt x="910443" y="910443"/>
+                </a:lnTo>
+                <a:close/>
+                <a:lnTo>
+                  <a:pt x="912048" y="912048"/>
+                </a:lnTo>
+                <a:close/>
+                <a:lnTo>
+                  <a:pt x="913653" y="913653"/>
+                </a:lnTo>
+                <a:close/>
+                <a:lnTo>
+                  <a:pt x="915258" y="915258"/>
+                </a:lnTo>
+                <a:close/>
+                <a:lnTo>
+                  <a:pt x="916863" y="916863"/>
+                </a:lnTo>
+                <a:close/>
+                <a:lnTo>
+                  <a:pt x="918468" y="918468"/>
+                </a:lnTo>
+                <a:close/>
+                <a:lnTo>
+                  <a:pt x="920072" y="920072"/>
+                </a:lnTo>
+                <a:close/>
+                <a:lnTo>
+                  <a:pt x="921675" y="921675"/>
+                </a:lnTo>
+                <a:close/>
+                <a:lnTo>
+                  <a:pt x="923276" y="923276"/>
+                </a:lnTo>
+                <a:close/>
+                <a:lnTo>
+                  <a:pt x="924876" y="924876"/>
+                </a:lnTo>
+                <a:close/>
+                <a:lnTo>
+                  <a:pt x="926474" y="926474"/>
+                </a:lnTo>
+                <a:close/>
+                <a:lnTo>
+                  <a:pt x="928072" y="928072"/>
+                </a:lnTo>
+                <a:close/>
+                <a:lnTo>
+                  <a:pt x="929669" y="929669"/>
+                </a:lnTo>
+                <a:close/>
+                <a:lnTo>
+                  <a:pt x="931266" y="931266"/>
+                </a:lnTo>
+                <a:close/>
+                <a:lnTo>
+                  <a:pt x="932863" y="932863"/>
+                </a:lnTo>
+                <a:close/>
+                <a:lnTo>
+                  <a:pt x="934461" y="934461"/>
+                </a:lnTo>
+                <a:close/>
+                <a:lnTo>
+                  <a:pt x="936060" y="936060"/>
+                </a:lnTo>
+                <a:close/>
+                <a:lnTo>
+                  <a:pt x="937661" y="937661"/>
+                </a:lnTo>
+                <a:close/>
+                <a:lnTo>
+                  <a:pt x="939263" y="939263"/>
+                </a:lnTo>
+                <a:close/>
+                <a:lnTo>
+                  <a:pt x="940867" y="940867"/>
+                </a:lnTo>
+                <a:close/>
+                <a:lnTo>
+                  <a:pt x="942471" y="942471"/>
+                </a:lnTo>
+                <a:close/>
+                <a:lnTo>
+                  <a:pt x="944076" y="944076"/>
+                </a:lnTo>
+                <a:close/>
+                <a:lnTo>
+                  <a:pt x="945682" y="945682"/>
+                </a:lnTo>
+                <a:close/>
+                <a:lnTo>
+                  <a:pt x="947288" y="947288"/>
+                </a:lnTo>
+                <a:close/>
+                <a:lnTo>
+                  <a:pt x="948894" y="948894"/>
+                </a:lnTo>
+                <a:close/>
+                <a:lnTo>
+                  <a:pt x="950499" y="950499"/>
+                </a:lnTo>
+                <a:close/>
+                <a:lnTo>
+                  <a:pt x="952105" y="952105"/>
+                </a:lnTo>
+                <a:close/>
+                <a:lnTo>
+                  <a:pt x="953710" y="953710"/>
+                </a:lnTo>
+                <a:close/>
+                <a:lnTo>
+                  <a:pt x="955314" y="955314"/>
+                </a:lnTo>
+                <a:close/>
+                <a:lnTo>
+                  <a:pt x="956917" y="956917"/>
+                </a:lnTo>
+                <a:close/>
+                <a:lnTo>
+                  <a:pt x="958519" y="958519"/>
+                </a:lnTo>
+                <a:close/>
+                <a:lnTo>
+                  <a:pt x="960120" y="960120"/>
                 </a:lnTo>
                 <a:close/>
               </a:path>
@@ -3246,6 +5638,2398 @@
                   <a:pt x="0" y="548640"/>
                 </a:moveTo>
                 <a:lnTo>
+                  <a:pt x="916" y="547724"/>
+                </a:lnTo>
+                <a:close/>
+                <a:lnTo>
+                  <a:pt x="1833" y="546807"/>
+                </a:lnTo>
+                <a:close/>
+                <a:lnTo>
+                  <a:pt x="2749" y="545891"/>
+                </a:lnTo>
+                <a:close/>
+                <a:lnTo>
+                  <a:pt x="3666" y="544974"/>
+                </a:lnTo>
+                <a:close/>
+                <a:lnTo>
+                  <a:pt x="4582" y="544058"/>
+                </a:lnTo>
+                <a:close/>
+                <a:lnTo>
+                  <a:pt x="5499" y="543141"/>
+                </a:lnTo>
+                <a:close/>
+                <a:lnTo>
+                  <a:pt x="6416" y="542224"/>
+                </a:lnTo>
+                <a:close/>
+                <a:lnTo>
+                  <a:pt x="7332" y="541308"/>
+                </a:lnTo>
+                <a:close/>
+                <a:lnTo>
+                  <a:pt x="8249" y="540391"/>
+                </a:lnTo>
+                <a:close/>
+                <a:lnTo>
+                  <a:pt x="9166" y="539474"/>
+                </a:lnTo>
+                <a:close/>
+                <a:lnTo>
+                  <a:pt x="10082" y="538558"/>
+                </a:lnTo>
+                <a:close/>
+                <a:lnTo>
+                  <a:pt x="10999" y="537641"/>
+                </a:lnTo>
+                <a:close/>
+                <a:lnTo>
+                  <a:pt x="11915" y="536725"/>
+                </a:lnTo>
+                <a:close/>
+                <a:lnTo>
+                  <a:pt x="12832" y="535808"/>
+                </a:lnTo>
+                <a:close/>
+                <a:lnTo>
+                  <a:pt x="13748" y="534892"/>
+                </a:lnTo>
+                <a:close/>
+                <a:lnTo>
+                  <a:pt x="14664" y="533976"/>
+                </a:lnTo>
+                <a:close/>
+                <a:lnTo>
+                  <a:pt x="15580" y="533060"/>
+                </a:lnTo>
+                <a:close/>
+                <a:lnTo>
+                  <a:pt x="16497" y="532143"/>
+                </a:lnTo>
+                <a:close/>
+                <a:lnTo>
+                  <a:pt x="17413" y="531227"/>
+                </a:lnTo>
+                <a:close/>
+                <a:lnTo>
+                  <a:pt x="18329" y="530311"/>
+                </a:lnTo>
+                <a:close/>
+                <a:lnTo>
+                  <a:pt x="19246" y="529394"/>
+                </a:lnTo>
+                <a:close/>
+                <a:lnTo>
+                  <a:pt x="20163" y="528477"/>
+                </a:lnTo>
+                <a:close/>
+                <a:lnTo>
+                  <a:pt x="21081" y="527559"/>
+                </a:lnTo>
+                <a:close/>
+                <a:lnTo>
+                  <a:pt x="21998" y="526642"/>
+                </a:lnTo>
+                <a:close/>
+                <a:lnTo>
+                  <a:pt x="22916" y="525724"/>
+                </a:lnTo>
+                <a:close/>
+                <a:lnTo>
+                  <a:pt x="23834" y="524806"/>
+                </a:lnTo>
+                <a:close/>
+                <a:lnTo>
+                  <a:pt x="24751" y="523889"/>
+                </a:lnTo>
+                <a:close/>
+                <a:lnTo>
+                  <a:pt x="25668" y="522972"/>
+                </a:lnTo>
+                <a:close/>
+                <a:lnTo>
+                  <a:pt x="26583" y="522057"/>
+                </a:lnTo>
+                <a:close/>
+                <a:lnTo>
+                  <a:pt x="27497" y="521143"/>
+                </a:lnTo>
+                <a:close/>
+                <a:lnTo>
+                  <a:pt x="28410" y="520230"/>
+                </a:lnTo>
+                <a:close/>
+                <a:lnTo>
+                  <a:pt x="29321" y="519319"/>
+                </a:lnTo>
+                <a:close/>
+                <a:lnTo>
+                  <a:pt x="30231" y="518409"/>
+                </a:lnTo>
+                <a:close/>
+                <a:lnTo>
+                  <a:pt x="31140" y="517500"/>
+                </a:lnTo>
+                <a:close/>
+                <a:lnTo>
+                  <a:pt x="32050" y="516590"/>
+                </a:lnTo>
+                <a:close/>
+                <a:lnTo>
+                  <a:pt x="32960" y="515680"/>
+                </a:lnTo>
+                <a:close/>
+                <a:lnTo>
+                  <a:pt x="33870" y="514770"/>
+                </a:lnTo>
+                <a:close/>
+                <a:lnTo>
+                  <a:pt x="34782" y="513858"/>
+                </a:lnTo>
+                <a:close/>
+                <a:lnTo>
+                  <a:pt x="35696" y="512944"/>
+                </a:lnTo>
+                <a:close/>
+                <a:lnTo>
+                  <a:pt x="36611" y="512029"/>
+                </a:lnTo>
+                <a:close/>
+                <a:lnTo>
+                  <a:pt x="37527" y="511113"/>
+                </a:lnTo>
+                <a:close/>
+                <a:lnTo>
+                  <a:pt x="38444" y="510196"/>
+                </a:lnTo>
+                <a:close/>
+                <a:lnTo>
+                  <a:pt x="39362" y="509278"/>
+                </a:lnTo>
+                <a:close/>
+                <a:lnTo>
+                  <a:pt x="40280" y="508360"/>
+                </a:lnTo>
+                <a:close/>
+                <a:lnTo>
+                  <a:pt x="41198" y="507442"/>
+                </a:lnTo>
+                <a:close/>
+                <a:lnTo>
+                  <a:pt x="42115" y="506525"/>
+                </a:lnTo>
+                <a:close/>
+                <a:lnTo>
+                  <a:pt x="43033" y="505607"/>
+                </a:lnTo>
+                <a:close/>
+                <a:lnTo>
+                  <a:pt x="43949" y="504691"/>
+                </a:lnTo>
+                <a:close/>
+                <a:lnTo>
+                  <a:pt x="44866" y="503774"/>
+                </a:lnTo>
+                <a:close/>
+                <a:lnTo>
+                  <a:pt x="45782" y="502858"/>
+                </a:lnTo>
+                <a:close/>
+                <a:lnTo>
+                  <a:pt x="46698" y="501942"/>
+                </a:lnTo>
+                <a:close/>
+                <a:lnTo>
+                  <a:pt x="47615" y="501025"/>
+                </a:lnTo>
+                <a:close/>
+                <a:lnTo>
+                  <a:pt x="48531" y="500109"/>
+                </a:lnTo>
+                <a:close/>
+                <a:lnTo>
+                  <a:pt x="49447" y="499193"/>
+                </a:lnTo>
+                <a:close/>
+                <a:lnTo>
+                  <a:pt x="50364" y="498276"/>
+                </a:lnTo>
+                <a:close/>
+                <a:lnTo>
+                  <a:pt x="51280" y="497360"/>
+                </a:lnTo>
+                <a:close/>
+                <a:lnTo>
+                  <a:pt x="52197" y="496443"/>
+                </a:lnTo>
+                <a:close/>
+                <a:lnTo>
+                  <a:pt x="53113" y="495527"/>
+                </a:lnTo>
+                <a:close/>
+                <a:lnTo>
+                  <a:pt x="54030" y="494610"/>
+                </a:lnTo>
+                <a:close/>
+                <a:lnTo>
+                  <a:pt x="54946" y="493694"/>
+                </a:lnTo>
+                <a:close/>
+                <a:lnTo>
+                  <a:pt x="55863" y="492777"/>
+                </a:lnTo>
+                <a:close/>
+                <a:lnTo>
+                  <a:pt x="56780" y="491860"/>
+                </a:lnTo>
+                <a:close/>
+                <a:lnTo>
+                  <a:pt x="57696" y="490944"/>
+                </a:lnTo>
+                <a:close/>
+                <a:lnTo>
+                  <a:pt x="58613" y="490027"/>
+                </a:lnTo>
+                <a:close/>
+                <a:lnTo>
+                  <a:pt x="59529" y="489111"/>
+                </a:lnTo>
+                <a:close/>
+                <a:lnTo>
+                  <a:pt x="60446" y="488194"/>
+                </a:lnTo>
+                <a:close/>
+                <a:lnTo>
+                  <a:pt x="61362" y="487278"/>
+                </a:lnTo>
+                <a:close/>
+                <a:lnTo>
+                  <a:pt x="62279" y="486361"/>
+                </a:lnTo>
+                <a:close/>
+                <a:lnTo>
+                  <a:pt x="63195" y="485445"/>
+                </a:lnTo>
+                <a:close/>
+                <a:lnTo>
+                  <a:pt x="64112" y="484528"/>
+                </a:lnTo>
+                <a:close/>
+                <a:lnTo>
+                  <a:pt x="65028" y="483612"/>
+                </a:lnTo>
+                <a:close/>
+                <a:lnTo>
+                  <a:pt x="65945" y="482695"/>
+                </a:lnTo>
+                <a:close/>
+                <a:lnTo>
+                  <a:pt x="66861" y="481779"/>
+                </a:lnTo>
+                <a:close/>
+                <a:lnTo>
+                  <a:pt x="67778" y="480862"/>
+                </a:lnTo>
+                <a:close/>
+                <a:lnTo>
+                  <a:pt x="68695" y="479945"/>
+                </a:lnTo>
+                <a:close/>
+                <a:lnTo>
+                  <a:pt x="69611" y="479029"/>
+                </a:lnTo>
+                <a:close/>
+                <a:lnTo>
+                  <a:pt x="70528" y="478112"/>
+                </a:lnTo>
+                <a:close/>
+                <a:lnTo>
+                  <a:pt x="71444" y="477196"/>
+                </a:lnTo>
+                <a:close/>
+                <a:lnTo>
+                  <a:pt x="72361" y="476279"/>
+                </a:lnTo>
+                <a:close/>
+                <a:lnTo>
+                  <a:pt x="73277" y="475363"/>
+                </a:lnTo>
+                <a:close/>
+                <a:lnTo>
+                  <a:pt x="74194" y="474446"/>
+                </a:lnTo>
+                <a:close/>
+                <a:lnTo>
+                  <a:pt x="75110" y="473530"/>
+                </a:lnTo>
+                <a:close/>
+                <a:lnTo>
+                  <a:pt x="76027" y="472613"/>
+                </a:lnTo>
+                <a:close/>
+                <a:lnTo>
+                  <a:pt x="76943" y="471697"/>
+                </a:lnTo>
+                <a:close/>
+                <a:lnTo>
+                  <a:pt x="77860" y="470780"/>
+                </a:lnTo>
+                <a:close/>
+                <a:lnTo>
+                  <a:pt x="78777" y="469863"/>
+                </a:lnTo>
+                <a:close/>
+                <a:lnTo>
+                  <a:pt x="79693" y="468947"/>
+                </a:lnTo>
+                <a:close/>
+                <a:lnTo>
+                  <a:pt x="80610" y="468030"/>
+                </a:lnTo>
+                <a:close/>
+                <a:lnTo>
+                  <a:pt x="81526" y="467114"/>
+                </a:lnTo>
+                <a:close/>
+                <a:lnTo>
+                  <a:pt x="82443" y="466197"/>
+                </a:lnTo>
+                <a:close/>
+                <a:lnTo>
+                  <a:pt x="83359" y="465281"/>
+                </a:lnTo>
+                <a:close/>
+                <a:lnTo>
+                  <a:pt x="84275" y="464365"/>
+                </a:lnTo>
+                <a:close/>
+                <a:lnTo>
+                  <a:pt x="85192" y="463448"/>
+                </a:lnTo>
+                <a:close/>
+                <a:lnTo>
+                  <a:pt x="86108" y="462532"/>
+                </a:lnTo>
+                <a:close/>
+                <a:lnTo>
+                  <a:pt x="87024" y="461616"/>
+                </a:lnTo>
+                <a:close/>
+                <a:lnTo>
+                  <a:pt x="87941" y="460699"/>
+                </a:lnTo>
+                <a:close/>
+                <a:lnTo>
+                  <a:pt x="88857" y="459783"/>
+                </a:lnTo>
+                <a:close/>
+                <a:lnTo>
+                  <a:pt x="89774" y="458866"/>
+                </a:lnTo>
+                <a:close/>
+                <a:lnTo>
+                  <a:pt x="90692" y="457948"/>
+                </a:lnTo>
+                <a:close/>
+                <a:lnTo>
+                  <a:pt x="91610" y="457030"/>
+                </a:lnTo>
+                <a:close/>
+                <a:lnTo>
+                  <a:pt x="92528" y="456112"/>
+                </a:lnTo>
+                <a:close/>
+                <a:lnTo>
+                  <a:pt x="93445" y="455195"/>
+                </a:lnTo>
+                <a:close/>
+                <a:lnTo>
+                  <a:pt x="94363" y="454277"/>
+                </a:lnTo>
+                <a:close/>
+                <a:lnTo>
+                  <a:pt x="95279" y="453361"/>
+                </a:lnTo>
+                <a:close/>
+                <a:lnTo>
+                  <a:pt x="96194" y="452446"/>
+                </a:lnTo>
+                <a:close/>
+                <a:lnTo>
+                  <a:pt x="97108" y="451532"/>
+                </a:lnTo>
+                <a:close/>
+                <a:lnTo>
+                  <a:pt x="98020" y="450620"/>
+                </a:lnTo>
+                <a:close/>
+                <a:lnTo>
+                  <a:pt x="98931" y="449709"/>
+                </a:lnTo>
+                <a:close/>
+                <a:lnTo>
+                  <a:pt x="99841" y="448799"/>
+                </a:lnTo>
+                <a:close/>
+                <a:lnTo>
+                  <a:pt x="100750" y="447890"/>
+                </a:lnTo>
+                <a:close/>
+                <a:lnTo>
+                  <a:pt x="101660" y="446980"/>
+                </a:lnTo>
+                <a:close/>
+                <a:lnTo>
+                  <a:pt x="102570" y="446070"/>
+                </a:lnTo>
+                <a:close/>
+                <a:lnTo>
+                  <a:pt x="103481" y="445159"/>
+                </a:lnTo>
+                <a:close/>
+                <a:lnTo>
+                  <a:pt x="104393" y="444247"/>
+                </a:lnTo>
+                <a:close/>
+                <a:lnTo>
+                  <a:pt x="105307" y="443333"/>
+                </a:lnTo>
+                <a:close/>
+                <a:lnTo>
+                  <a:pt x="106222" y="442418"/>
+                </a:lnTo>
+                <a:close/>
+                <a:lnTo>
+                  <a:pt x="107139" y="441501"/>
+                </a:lnTo>
+                <a:close/>
+                <a:lnTo>
+                  <a:pt x="108056" y="440584"/>
+                </a:lnTo>
+                <a:close/>
+                <a:lnTo>
+                  <a:pt x="108973" y="439667"/>
+                </a:lnTo>
+                <a:close/>
+                <a:lnTo>
+                  <a:pt x="109891" y="438749"/>
+                </a:lnTo>
+                <a:close/>
+                <a:lnTo>
+                  <a:pt x="110809" y="437831"/>
+                </a:lnTo>
+                <a:close/>
+                <a:lnTo>
+                  <a:pt x="111727" y="436913"/>
+                </a:lnTo>
+                <a:close/>
+                <a:lnTo>
+                  <a:pt x="112644" y="435996"/>
+                </a:lnTo>
+                <a:close/>
+                <a:lnTo>
+                  <a:pt x="113560" y="435080"/>
+                </a:lnTo>
+                <a:close/>
+                <a:lnTo>
+                  <a:pt x="114477" y="434163"/>
+                </a:lnTo>
+                <a:close/>
+                <a:lnTo>
+                  <a:pt x="115393" y="433247"/>
+                </a:lnTo>
+                <a:close/>
+                <a:lnTo>
+                  <a:pt x="116309" y="432331"/>
+                </a:lnTo>
+                <a:close/>
+                <a:lnTo>
+                  <a:pt x="117226" y="431414"/>
+                </a:lnTo>
+                <a:close/>
+                <a:lnTo>
+                  <a:pt x="118142" y="430498"/>
+                </a:lnTo>
+                <a:close/>
+                <a:lnTo>
+                  <a:pt x="119058" y="429582"/>
+                </a:lnTo>
+                <a:close/>
+                <a:lnTo>
+                  <a:pt x="119975" y="428665"/>
+                </a:lnTo>
+                <a:close/>
+                <a:lnTo>
+                  <a:pt x="120891" y="427749"/>
+                </a:lnTo>
+                <a:close/>
+                <a:lnTo>
+                  <a:pt x="121808" y="426832"/>
+                </a:lnTo>
+                <a:close/>
+                <a:lnTo>
+                  <a:pt x="122724" y="425916"/>
+                </a:lnTo>
+                <a:close/>
+                <a:lnTo>
+                  <a:pt x="123641" y="424999"/>
+                </a:lnTo>
+                <a:close/>
+                <a:lnTo>
+                  <a:pt x="124558" y="424082"/>
+                </a:lnTo>
+                <a:close/>
+                <a:lnTo>
+                  <a:pt x="125474" y="423166"/>
+                </a:lnTo>
+                <a:close/>
+                <a:lnTo>
+                  <a:pt x="126391" y="422249"/>
+                </a:lnTo>
+                <a:close/>
+                <a:lnTo>
+                  <a:pt x="127307" y="421333"/>
+                </a:lnTo>
+                <a:close/>
+                <a:lnTo>
+                  <a:pt x="128224" y="420416"/>
+                </a:lnTo>
+                <a:close/>
+                <a:lnTo>
+                  <a:pt x="129140" y="419500"/>
+                </a:lnTo>
+                <a:close/>
+                <a:lnTo>
+                  <a:pt x="130057" y="418583"/>
+                </a:lnTo>
+                <a:close/>
+                <a:lnTo>
+                  <a:pt x="130973" y="417667"/>
+                </a:lnTo>
+                <a:close/>
+                <a:lnTo>
+                  <a:pt x="131890" y="416750"/>
+                </a:lnTo>
+                <a:close/>
+                <a:lnTo>
+                  <a:pt x="132806" y="415834"/>
+                </a:lnTo>
+                <a:close/>
+                <a:lnTo>
+                  <a:pt x="133723" y="414917"/>
+                </a:lnTo>
+                <a:close/>
+                <a:lnTo>
+                  <a:pt x="134640" y="414000"/>
+                </a:lnTo>
+                <a:close/>
+                <a:lnTo>
+                  <a:pt x="135556" y="413084"/>
+                </a:lnTo>
+                <a:close/>
+                <a:lnTo>
+                  <a:pt x="136473" y="412167"/>
+                </a:lnTo>
+                <a:close/>
+                <a:lnTo>
+                  <a:pt x="137389" y="411251"/>
+                </a:lnTo>
+                <a:close/>
+                <a:lnTo>
+                  <a:pt x="138306" y="410334"/>
+                </a:lnTo>
+                <a:close/>
+                <a:lnTo>
+                  <a:pt x="139222" y="409418"/>
+                </a:lnTo>
+                <a:close/>
+                <a:lnTo>
+                  <a:pt x="140139" y="408501"/>
+                </a:lnTo>
+                <a:close/>
+                <a:lnTo>
+                  <a:pt x="141055" y="407585"/>
+                </a:lnTo>
+                <a:close/>
+                <a:lnTo>
+                  <a:pt x="141972" y="406668"/>
+                </a:lnTo>
+                <a:close/>
+                <a:lnTo>
+                  <a:pt x="142888" y="405752"/>
+                </a:lnTo>
+                <a:close/>
+                <a:lnTo>
+                  <a:pt x="143805" y="404835"/>
+                </a:lnTo>
+                <a:close/>
+                <a:lnTo>
+                  <a:pt x="144721" y="403919"/>
+                </a:lnTo>
+                <a:close/>
+                <a:lnTo>
+                  <a:pt x="145638" y="403002"/>
+                </a:lnTo>
+                <a:close/>
+                <a:lnTo>
+                  <a:pt x="146555" y="402085"/>
+                </a:lnTo>
+                <a:close/>
+                <a:lnTo>
+                  <a:pt x="147471" y="401169"/>
+                </a:lnTo>
+                <a:close/>
+                <a:lnTo>
+                  <a:pt x="148388" y="400252"/>
+                </a:lnTo>
+                <a:close/>
+                <a:lnTo>
+                  <a:pt x="149304" y="399336"/>
+                </a:lnTo>
+                <a:close/>
+                <a:lnTo>
+                  <a:pt x="150221" y="398419"/>
+                </a:lnTo>
+                <a:close/>
+                <a:lnTo>
+                  <a:pt x="151138" y="397502"/>
+                </a:lnTo>
+                <a:close/>
+                <a:lnTo>
+                  <a:pt x="152054" y="396586"/>
+                </a:lnTo>
+                <a:close/>
+                <a:lnTo>
+                  <a:pt x="152970" y="395670"/>
+                </a:lnTo>
+                <a:close/>
+                <a:lnTo>
+                  <a:pt x="153886" y="394754"/>
+                </a:lnTo>
+                <a:close/>
+                <a:lnTo>
+                  <a:pt x="154803" y="393837"/>
+                </a:lnTo>
+                <a:close/>
+                <a:lnTo>
+                  <a:pt x="155719" y="392921"/>
+                </a:lnTo>
+                <a:close/>
+                <a:lnTo>
+                  <a:pt x="156635" y="392005"/>
+                </a:lnTo>
+                <a:close/>
+                <a:lnTo>
+                  <a:pt x="157552" y="391088"/>
+                </a:lnTo>
+                <a:close/>
+                <a:lnTo>
+                  <a:pt x="158468" y="390172"/>
+                </a:lnTo>
+                <a:close/>
+                <a:lnTo>
+                  <a:pt x="159386" y="389254"/>
+                </a:lnTo>
+                <a:close/>
+                <a:lnTo>
+                  <a:pt x="160303" y="388337"/>
+                </a:lnTo>
+                <a:close/>
+                <a:lnTo>
+                  <a:pt x="161221" y="387419"/>
+                </a:lnTo>
+                <a:close/>
+                <a:lnTo>
+                  <a:pt x="162139" y="386501"/>
+                </a:lnTo>
+                <a:close/>
+                <a:lnTo>
+                  <a:pt x="163057" y="385583"/>
+                </a:lnTo>
+                <a:close/>
+                <a:lnTo>
+                  <a:pt x="163974" y="384666"/>
+                </a:lnTo>
+                <a:close/>
+                <a:lnTo>
+                  <a:pt x="164890" y="383750"/>
+                </a:lnTo>
+                <a:close/>
+                <a:lnTo>
+                  <a:pt x="165805" y="382835"/>
+                </a:lnTo>
+                <a:close/>
+                <a:lnTo>
+                  <a:pt x="166718" y="381922"/>
+                </a:lnTo>
+                <a:close/>
+                <a:lnTo>
+                  <a:pt x="167630" y="381010"/>
+                </a:lnTo>
+                <a:close/>
+                <a:lnTo>
+                  <a:pt x="168541" y="380099"/>
+                </a:lnTo>
+                <a:close/>
+                <a:lnTo>
+                  <a:pt x="169451" y="379189"/>
+                </a:lnTo>
+                <a:close/>
+                <a:lnTo>
+                  <a:pt x="170360" y="378280"/>
+                </a:lnTo>
+                <a:close/>
+                <a:lnTo>
+                  <a:pt x="171269" y="377371"/>
+                </a:lnTo>
+                <a:close/>
+                <a:lnTo>
+                  <a:pt x="172180" y="376460"/>
+                </a:lnTo>
+                <a:close/>
+                <a:lnTo>
+                  <a:pt x="173091" y="375549"/>
+                </a:lnTo>
+                <a:close/>
+                <a:lnTo>
+                  <a:pt x="174003" y="374637"/>
+                </a:lnTo>
+                <a:close/>
+                <a:lnTo>
+                  <a:pt x="174918" y="373722"/>
+                </a:lnTo>
+                <a:close/>
+                <a:lnTo>
+                  <a:pt x="175833" y="372807"/>
+                </a:lnTo>
+                <a:close/>
+                <a:lnTo>
+                  <a:pt x="176750" y="371890"/>
+                </a:lnTo>
+                <a:close/>
+                <a:lnTo>
+                  <a:pt x="177667" y="370973"/>
+                </a:lnTo>
+                <a:close/>
+                <a:lnTo>
+                  <a:pt x="178585" y="370055"/>
+                </a:lnTo>
+                <a:close/>
+                <a:lnTo>
+                  <a:pt x="179503" y="369137"/>
+                </a:lnTo>
+                <a:close/>
+                <a:lnTo>
+                  <a:pt x="180421" y="368219"/>
+                </a:lnTo>
+                <a:close/>
+                <a:lnTo>
+                  <a:pt x="181338" y="367302"/>
+                </a:lnTo>
+                <a:close/>
+                <a:lnTo>
+                  <a:pt x="182255" y="366385"/>
+                </a:lnTo>
+                <a:close/>
+                <a:lnTo>
+                  <a:pt x="183172" y="365468"/>
+                </a:lnTo>
+                <a:close/>
+                <a:lnTo>
+                  <a:pt x="184088" y="364552"/>
+                </a:lnTo>
+                <a:close/>
+                <a:lnTo>
+                  <a:pt x="185004" y="363636"/>
+                </a:lnTo>
+                <a:close/>
+                <a:lnTo>
+                  <a:pt x="185920" y="362720"/>
+                </a:lnTo>
+                <a:close/>
+                <a:lnTo>
+                  <a:pt x="186837" y="361803"/>
+                </a:lnTo>
+                <a:close/>
+                <a:lnTo>
+                  <a:pt x="187753" y="360887"/>
+                </a:lnTo>
+                <a:close/>
+                <a:lnTo>
+                  <a:pt x="188669" y="359971"/>
+                </a:lnTo>
+                <a:close/>
+                <a:lnTo>
+                  <a:pt x="189586" y="359054"/>
+                </a:lnTo>
+                <a:close/>
+                <a:lnTo>
+                  <a:pt x="190502" y="358138"/>
+                </a:lnTo>
+                <a:close/>
+                <a:lnTo>
+                  <a:pt x="191419" y="357221"/>
+                </a:lnTo>
+                <a:close/>
+                <a:lnTo>
+                  <a:pt x="192335" y="356305"/>
+                </a:lnTo>
+                <a:close/>
+                <a:lnTo>
+                  <a:pt x="193252" y="355388"/>
+                </a:lnTo>
+                <a:close/>
+                <a:lnTo>
+                  <a:pt x="194169" y="354471"/>
+                </a:lnTo>
+                <a:close/>
+                <a:lnTo>
+                  <a:pt x="195085" y="353555"/>
+                </a:lnTo>
+                <a:close/>
+                <a:lnTo>
+                  <a:pt x="196002" y="352638"/>
+                </a:lnTo>
+                <a:close/>
+                <a:lnTo>
+                  <a:pt x="196918" y="351722"/>
+                </a:lnTo>
+                <a:close/>
+                <a:lnTo>
+                  <a:pt x="197835" y="350805"/>
+                </a:lnTo>
+                <a:close/>
+                <a:lnTo>
+                  <a:pt x="198751" y="349889"/>
+                </a:lnTo>
+                <a:close/>
+                <a:lnTo>
+                  <a:pt x="199668" y="348972"/>
+                </a:lnTo>
+                <a:close/>
+                <a:lnTo>
+                  <a:pt x="200584" y="348056"/>
+                </a:lnTo>
+                <a:close/>
+                <a:lnTo>
+                  <a:pt x="201501" y="347139"/>
+                </a:lnTo>
+                <a:close/>
+                <a:lnTo>
+                  <a:pt x="202418" y="346222"/>
+                </a:lnTo>
+                <a:close/>
+                <a:lnTo>
+                  <a:pt x="203334" y="345306"/>
+                </a:lnTo>
+                <a:close/>
+                <a:lnTo>
+                  <a:pt x="204251" y="344389"/>
+                </a:lnTo>
+                <a:close/>
+                <a:lnTo>
+                  <a:pt x="205167" y="343473"/>
+                </a:lnTo>
+                <a:close/>
+                <a:lnTo>
+                  <a:pt x="206084" y="342556"/>
+                </a:lnTo>
+                <a:close/>
+                <a:lnTo>
+                  <a:pt x="207000" y="341640"/>
+                </a:lnTo>
+                <a:close/>
+                <a:lnTo>
+                  <a:pt x="207917" y="340723"/>
+                </a:lnTo>
+                <a:close/>
+                <a:lnTo>
+                  <a:pt x="208833" y="339807"/>
+                </a:lnTo>
+                <a:close/>
+                <a:lnTo>
+                  <a:pt x="209750" y="338890"/>
+                </a:lnTo>
+                <a:close/>
+                <a:lnTo>
+                  <a:pt x="210666" y="337974"/>
+                </a:lnTo>
+                <a:close/>
+                <a:lnTo>
+                  <a:pt x="211583" y="337057"/>
+                </a:lnTo>
+                <a:close/>
+                <a:lnTo>
+                  <a:pt x="212499" y="336141"/>
+                </a:lnTo>
+                <a:close/>
+                <a:lnTo>
+                  <a:pt x="213416" y="335224"/>
+                </a:lnTo>
+                <a:close/>
+                <a:lnTo>
+                  <a:pt x="214332" y="334308"/>
+                </a:lnTo>
+                <a:close/>
+                <a:lnTo>
+                  <a:pt x="215249" y="333391"/>
+                </a:lnTo>
+                <a:close/>
+                <a:lnTo>
+                  <a:pt x="216166" y="332474"/>
+                </a:lnTo>
+                <a:close/>
+                <a:lnTo>
+                  <a:pt x="217082" y="331558"/>
+                </a:lnTo>
+                <a:close/>
+                <a:lnTo>
+                  <a:pt x="217999" y="330641"/>
+                </a:lnTo>
+                <a:close/>
+                <a:lnTo>
+                  <a:pt x="218916" y="329724"/>
+                </a:lnTo>
+                <a:close/>
+                <a:lnTo>
+                  <a:pt x="219832" y="328808"/>
+                </a:lnTo>
+                <a:close/>
+                <a:lnTo>
+                  <a:pt x="220749" y="327891"/>
+                </a:lnTo>
+                <a:close/>
+                <a:lnTo>
+                  <a:pt x="221665" y="326975"/>
+                </a:lnTo>
+                <a:close/>
+                <a:lnTo>
+                  <a:pt x="222581" y="326059"/>
+                </a:lnTo>
+                <a:close/>
+                <a:lnTo>
+                  <a:pt x="223497" y="325143"/>
+                </a:lnTo>
+                <a:close/>
+                <a:lnTo>
+                  <a:pt x="224414" y="324226"/>
+                </a:lnTo>
+                <a:close/>
+                <a:lnTo>
+                  <a:pt x="225330" y="323310"/>
+                </a:lnTo>
+                <a:close/>
+                <a:lnTo>
+                  <a:pt x="226246" y="322394"/>
+                </a:lnTo>
+                <a:close/>
+                <a:lnTo>
+                  <a:pt x="227163" y="321477"/>
+                </a:lnTo>
+                <a:close/>
+                <a:lnTo>
+                  <a:pt x="228080" y="320560"/>
+                </a:lnTo>
+                <a:close/>
+                <a:lnTo>
+                  <a:pt x="228997" y="319643"/>
+                </a:lnTo>
+                <a:close/>
+                <a:lnTo>
+                  <a:pt x="229915" y="318725"/>
+                </a:lnTo>
+                <a:close/>
+                <a:lnTo>
+                  <a:pt x="230833" y="317807"/>
+                </a:lnTo>
+                <a:close/>
+                <a:lnTo>
+                  <a:pt x="231750" y="316890"/>
+                </a:lnTo>
+                <a:close/>
+                <a:lnTo>
+                  <a:pt x="232668" y="315972"/>
+                </a:lnTo>
+                <a:close/>
+                <a:lnTo>
+                  <a:pt x="233585" y="315055"/>
+                </a:lnTo>
+                <a:close/>
+                <a:lnTo>
+                  <a:pt x="234501" y="314139"/>
+                </a:lnTo>
+                <a:close/>
+                <a:lnTo>
+                  <a:pt x="235415" y="313225"/>
+                </a:lnTo>
+                <a:close/>
+                <a:lnTo>
+                  <a:pt x="236329" y="312311"/>
+                </a:lnTo>
+                <a:close/>
+                <a:lnTo>
+                  <a:pt x="237240" y="311400"/>
+                </a:lnTo>
+                <a:close/>
+                <a:lnTo>
+                  <a:pt x="238151" y="310489"/>
+                </a:lnTo>
+                <a:close/>
+                <a:lnTo>
+                  <a:pt x="239060" y="309580"/>
+                </a:lnTo>
+                <a:close/>
+                <a:lnTo>
+                  <a:pt x="239970" y="308670"/>
+                </a:lnTo>
+                <a:close/>
+                <a:lnTo>
+                  <a:pt x="240879" y="307761"/>
+                </a:lnTo>
+                <a:close/>
+                <a:lnTo>
+                  <a:pt x="241790" y="306850"/>
+                </a:lnTo>
+                <a:close/>
+                <a:lnTo>
+                  <a:pt x="242701" y="305939"/>
+                </a:lnTo>
+                <a:close/>
+                <a:lnTo>
+                  <a:pt x="243614" y="305026"/>
+                </a:lnTo>
+                <a:close/>
+                <a:lnTo>
+                  <a:pt x="244528" y="304112"/>
+                </a:lnTo>
+                <a:close/>
+                <a:lnTo>
+                  <a:pt x="245444" y="303196"/>
+                </a:lnTo>
+                <a:close/>
+                <a:lnTo>
+                  <a:pt x="246361" y="302279"/>
+                </a:lnTo>
+                <a:close/>
+                <a:lnTo>
+                  <a:pt x="247278" y="301362"/>
+                </a:lnTo>
+                <a:close/>
+                <a:lnTo>
+                  <a:pt x="248196" y="300444"/>
+                </a:lnTo>
+                <a:close/>
+                <a:lnTo>
+                  <a:pt x="249114" y="299526"/>
+                </a:lnTo>
+                <a:close/>
+                <a:lnTo>
+                  <a:pt x="250032" y="298608"/>
+                </a:lnTo>
+                <a:close/>
+                <a:lnTo>
+                  <a:pt x="250949" y="297691"/>
+                </a:lnTo>
+                <a:close/>
+                <a:lnTo>
+                  <a:pt x="251866" y="296774"/>
+                </a:lnTo>
+                <a:close/>
+                <a:lnTo>
+                  <a:pt x="252783" y="295857"/>
+                </a:lnTo>
+                <a:close/>
+                <a:lnTo>
+                  <a:pt x="253699" y="294941"/>
+                </a:lnTo>
+                <a:close/>
+                <a:lnTo>
+                  <a:pt x="254615" y="294025"/>
+                </a:lnTo>
+                <a:close/>
+                <a:lnTo>
+                  <a:pt x="255532" y="293108"/>
+                </a:lnTo>
+                <a:close/>
+                <a:lnTo>
+                  <a:pt x="256448" y="292192"/>
+                </a:lnTo>
+                <a:close/>
+                <a:lnTo>
+                  <a:pt x="257364" y="291276"/>
+                </a:lnTo>
+                <a:close/>
+                <a:lnTo>
+                  <a:pt x="258280" y="290360"/>
+                </a:lnTo>
+                <a:close/>
+                <a:lnTo>
+                  <a:pt x="259197" y="289443"/>
+                </a:lnTo>
+                <a:close/>
+                <a:lnTo>
+                  <a:pt x="260113" y="288527"/>
+                </a:lnTo>
+                <a:close/>
+                <a:lnTo>
+                  <a:pt x="261030" y="287610"/>
+                </a:lnTo>
+                <a:close/>
+                <a:lnTo>
+                  <a:pt x="261947" y="286693"/>
+                </a:lnTo>
+                <a:close/>
+                <a:lnTo>
+                  <a:pt x="262863" y="285777"/>
+                </a:lnTo>
+                <a:close/>
+                <a:lnTo>
+                  <a:pt x="263780" y="284860"/>
+                </a:lnTo>
+                <a:close/>
+                <a:lnTo>
+                  <a:pt x="264696" y="283944"/>
+                </a:lnTo>
+                <a:close/>
+                <a:lnTo>
+                  <a:pt x="265613" y="283027"/>
+                </a:lnTo>
+                <a:close/>
+                <a:lnTo>
+                  <a:pt x="266530" y="282110"/>
+                </a:lnTo>
+                <a:close/>
+                <a:lnTo>
+                  <a:pt x="267446" y="281194"/>
+                </a:lnTo>
+                <a:close/>
+                <a:lnTo>
+                  <a:pt x="268363" y="280277"/>
+                </a:lnTo>
+                <a:close/>
+                <a:lnTo>
+                  <a:pt x="269279" y="279361"/>
+                </a:lnTo>
+                <a:close/>
+                <a:lnTo>
+                  <a:pt x="270196" y="278444"/>
+                </a:lnTo>
+                <a:close/>
+                <a:lnTo>
+                  <a:pt x="271112" y="277528"/>
+                </a:lnTo>
+                <a:close/>
+                <a:lnTo>
+                  <a:pt x="272029" y="276611"/>
+                </a:lnTo>
+                <a:close/>
+                <a:lnTo>
+                  <a:pt x="272945" y="275695"/>
+                </a:lnTo>
+                <a:close/>
+                <a:lnTo>
+                  <a:pt x="273862" y="274778"/>
+                </a:lnTo>
+                <a:close/>
+                <a:lnTo>
+                  <a:pt x="274778" y="273862"/>
+                </a:lnTo>
+                <a:close/>
+                <a:lnTo>
+                  <a:pt x="275695" y="272945"/>
+                </a:lnTo>
+                <a:close/>
+                <a:lnTo>
+                  <a:pt x="276611" y="272029"/>
+                </a:lnTo>
+                <a:close/>
+                <a:lnTo>
+                  <a:pt x="277528" y="271112"/>
+                </a:lnTo>
+                <a:close/>
+                <a:lnTo>
+                  <a:pt x="278444" y="270196"/>
+                </a:lnTo>
+                <a:close/>
+                <a:lnTo>
+                  <a:pt x="279361" y="269279"/>
+                </a:lnTo>
+                <a:close/>
+                <a:lnTo>
+                  <a:pt x="280277" y="268363"/>
+                </a:lnTo>
+                <a:close/>
+                <a:lnTo>
+                  <a:pt x="281194" y="267446"/>
+                </a:lnTo>
+                <a:close/>
+                <a:lnTo>
+                  <a:pt x="282110" y="266530"/>
+                </a:lnTo>
+                <a:close/>
+                <a:lnTo>
+                  <a:pt x="283027" y="265613"/>
+                </a:lnTo>
+                <a:close/>
+                <a:lnTo>
+                  <a:pt x="283944" y="264696"/>
+                </a:lnTo>
+                <a:close/>
+                <a:lnTo>
+                  <a:pt x="284860" y="263780"/>
+                </a:lnTo>
+                <a:close/>
+                <a:lnTo>
+                  <a:pt x="285777" y="262863"/>
+                </a:lnTo>
+                <a:close/>
+                <a:lnTo>
+                  <a:pt x="286693" y="261947"/>
+                </a:lnTo>
+                <a:close/>
+                <a:lnTo>
+                  <a:pt x="287610" y="261030"/>
+                </a:lnTo>
+                <a:close/>
+                <a:lnTo>
+                  <a:pt x="288527" y="260113"/>
+                </a:lnTo>
+                <a:close/>
+                <a:lnTo>
+                  <a:pt x="289443" y="259197"/>
+                </a:lnTo>
+                <a:close/>
+                <a:lnTo>
+                  <a:pt x="290360" y="258280"/>
+                </a:lnTo>
+                <a:close/>
+                <a:lnTo>
+                  <a:pt x="291276" y="257364"/>
+                </a:lnTo>
+                <a:close/>
+                <a:lnTo>
+                  <a:pt x="292192" y="256448"/>
+                </a:lnTo>
+                <a:close/>
+                <a:lnTo>
+                  <a:pt x="293108" y="255532"/>
+                </a:lnTo>
+                <a:close/>
+                <a:lnTo>
+                  <a:pt x="294025" y="254615"/>
+                </a:lnTo>
+                <a:close/>
+                <a:lnTo>
+                  <a:pt x="294941" y="253699"/>
+                </a:lnTo>
+                <a:close/>
+                <a:lnTo>
+                  <a:pt x="295857" y="252783"/>
+                </a:lnTo>
+                <a:close/>
+                <a:lnTo>
+                  <a:pt x="296774" y="251866"/>
+                </a:lnTo>
+                <a:close/>
+                <a:lnTo>
+                  <a:pt x="297691" y="250949"/>
+                </a:lnTo>
+                <a:close/>
+                <a:lnTo>
+                  <a:pt x="298608" y="250032"/>
+                </a:lnTo>
+                <a:close/>
+                <a:lnTo>
+                  <a:pt x="299526" y="249114"/>
+                </a:lnTo>
+                <a:close/>
+                <a:lnTo>
+                  <a:pt x="300444" y="248196"/>
+                </a:lnTo>
+                <a:close/>
+                <a:lnTo>
+                  <a:pt x="301362" y="247278"/>
+                </a:lnTo>
+                <a:close/>
+                <a:lnTo>
+                  <a:pt x="302279" y="246361"/>
+                </a:lnTo>
+                <a:close/>
+                <a:lnTo>
+                  <a:pt x="303196" y="245444"/>
+                </a:lnTo>
+                <a:close/>
+                <a:lnTo>
+                  <a:pt x="304112" y="244528"/>
+                </a:lnTo>
+                <a:close/>
+                <a:lnTo>
+                  <a:pt x="305026" y="243614"/>
+                </a:lnTo>
+                <a:close/>
+                <a:lnTo>
+                  <a:pt x="305939" y="242701"/>
+                </a:lnTo>
+                <a:close/>
+                <a:lnTo>
+                  <a:pt x="306850" y="241790"/>
+                </a:lnTo>
+                <a:close/>
+                <a:lnTo>
+                  <a:pt x="307761" y="240879"/>
+                </a:lnTo>
+                <a:close/>
+                <a:lnTo>
+                  <a:pt x="308670" y="239970"/>
+                </a:lnTo>
+                <a:close/>
+                <a:lnTo>
+                  <a:pt x="309580" y="239060"/>
+                </a:lnTo>
+                <a:close/>
+                <a:lnTo>
+                  <a:pt x="310489" y="238151"/>
+                </a:lnTo>
+                <a:close/>
+                <a:lnTo>
+                  <a:pt x="311400" y="237240"/>
+                </a:lnTo>
+                <a:close/>
+                <a:lnTo>
+                  <a:pt x="312311" y="236329"/>
+                </a:lnTo>
+                <a:close/>
+                <a:lnTo>
+                  <a:pt x="313225" y="235415"/>
+                </a:lnTo>
+                <a:close/>
+                <a:lnTo>
+                  <a:pt x="314139" y="234501"/>
+                </a:lnTo>
+                <a:close/>
+                <a:lnTo>
+                  <a:pt x="315055" y="233585"/>
+                </a:lnTo>
+                <a:close/>
+                <a:lnTo>
+                  <a:pt x="315972" y="232668"/>
+                </a:lnTo>
+                <a:close/>
+                <a:lnTo>
+                  <a:pt x="316890" y="231750"/>
+                </a:lnTo>
+                <a:close/>
+                <a:lnTo>
+                  <a:pt x="317807" y="230833"/>
+                </a:lnTo>
+                <a:close/>
+                <a:lnTo>
+                  <a:pt x="318725" y="229915"/>
+                </a:lnTo>
+                <a:close/>
+                <a:lnTo>
+                  <a:pt x="319643" y="228997"/>
+                </a:lnTo>
+                <a:close/>
+                <a:lnTo>
+                  <a:pt x="320560" y="228080"/>
+                </a:lnTo>
+                <a:close/>
+                <a:lnTo>
+                  <a:pt x="321477" y="227163"/>
+                </a:lnTo>
+                <a:close/>
+                <a:lnTo>
+                  <a:pt x="322394" y="226246"/>
+                </a:lnTo>
+                <a:close/>
+                <a:lnTo>
+                  <a:pt x="323310" y="225330"/>
+                </a:lnTo>
+                <a:close/>
+                <a:lnTo>
+                  <a:pt x="324226" y="224414"/>
+                </a:lnTo>
+                <a:close/>
+                <a:lnTo>
+                  <a:pt x="325143" y="223497"/>
+                </a:lnTo>
+                <a:close/>
+                <a:lnTo>
+                  <a:pt x="326059" y="222581"/>
+                </a:lnTo>
+                <a:close/>
+                <a:lnTo>
+                  <a:pt x="326975" y="221665"/>
+                </a:lnTo>
+                <a:close/>
+                <a:lnTo>
+                  <a:pt x="327891" y="220749"/>
+                </a:lnTo>
+                <a:close/>
+                <a:lnTo>
+                  <a:pt x="328808" y="219832"/>
+                </a:lnTo>
+                <a:close/>
+                <a:lnTo>
+                  <a:pt x="329724" y="218916"/>
+                </a:lnTo>
+                <a:close/>
+                <a:lnTo>
+                  <a:pt x="330641" y="217999"/>
+                </a:lnTo>
+                <a:close/>
+                <a:lnTo>
+                  <a:pt x="331558" y="217082"/>
+                </a:lnTo>
+                <a:close/>
+                <a:lnTo>
+                  <a:pt x="332474" y="216166"/>
+                </a:lnTo>
+                <a:close/>
+                <a:lnTo>
+                  <a:pt x="333391" y="215249"/>
+                </a:lnTo>
+                <a:close/>
+                <a:lnTo>
+                  <a:pt x="334308" y="214332"/>
+                </a:lnTo>
+                <a:close/>
+                <a:lnTo>
+                  <a:pt x="335224" y="213416"/>
+                </a:lnTo>
+                <a:close/>
+                <a:lnTo>
+                  <a:pt x="336141" y="212499"/>
+                </a:lnTo>
+                <a:close/>
+                <a:lnTo>
+                  <a:pt x="337057" y="211583"/>
+                </a:lnTo>
+                <a:close/>
+                <a:lnTo>
+                  <a:pt x="337974" y="210666"/>
+                </a:lnTo>
+                <a:close/>
+                <a:lnTo>
+                  <a:pt x="338890" y="209750"/>
+                </a:lnTo>
+                <a:close/>
+                <a:lnTo>
+                  <a:pt x="339807" y="208833"/>
+                </a:lnTo>
+                <a:close/>
+                <a:lnTo>
+                  <a:pt x="340723" y="207917"/>
+                </a:lnTo>
+                <a:close/>
+                <a:lnTo>
+                  <a:pt x="341640" y="207000"/>
+                </a:lnTo>
+                <a:close/>
+                <a:lnTo>
+                  <a:pt x="342556" y="206084"/>
+                </a:lnTo>
+                <a:close/>
+                <a:lnTo>
+                  <a:pt x="343473" y="205167"/>
+                </a:lnTo>
+                <a:close/>
+                <a:lnTo>
+                  <a:pt x="344389" y="204251"/>
+                </a:lnTo>
+                <a:close/>
+                <a:lnTo>
+                  <a:pt x="345306" y="203334"/>
+                </a:lnTo>
+                <a:close/>
+                <a:lnTo>
+                  <a:pt x="346222" y="202418"/>
+                </a:lnTo>
+                <a:close/>
+                <a:lnTo>
+                  <a:pt x="347139" y="201501"/>
+                </a:lnTo>
+                <a:close/>
+                <a:lnTo>
+                  <a:pt x="348056" y="200584"/>
+                </a:lnTo>
+                <a:close/>
+                <a:lnTo>
+                  <a:pt x="348972" y="199668"/>
+                </a:lnTo>
+                <a:close/>
+                <a:lnTo>
+                  <a:pt x="349889" y="198751"/>
+                </a:lnTo>
+                <a:close/>
+                <a:lnTo>
+                  <a:pt x="350805" y="197835"/>
+                </a:lnTo>
+                <a:close/>
+                <a:lnTo>
+                  <a:pt x="351722" y="196918"/>
+                </a:lnTo>
+                <a:close/>
+                <a:lnTo>
+                  <a:pt x="352638" y="196002"/>
+                </a:lnTo>
+                <a:close/>
+                <a:lnTo>
+                  <a:pt x="353555" y="195085"/>
+                </a:lnTo>
+                <a:close/>
+                <a:lnTo>
+                  <a:pt x="354471" y="194169"/>
+                </a:lnTo>
+                <a:close/>
+                <a:lnTo>
+                  <a:pt x="355388" y="193252"/>
+                </a:lnTo>
+                <a:close/>
+                <a:lnTo>
+                  <a:pt x="356305" y="192335"/>
+                </a:lnTo>
+                <a:close/>
+                <a:lnTo>
+                  <a:pt x="357221" y="191419"/>
+                </a:lnTo>
+                <a:close/>
+                <a:lnTo>
+                  <a:pt x="358138" y="190502"/>
+                </a:lnTo>
+                <a:close/>
+                <a:lnTo>
+                  <a:pt x="359054" y="189586"/>
+                </a:lnTo>
+                <a:close/>
+                <a:lnTo>
+                  <a:pt x="359971" y="188669"/>
+                </a:lnTo>
+                <a:close/>
+                <a:lnTo>
+                  <a:pt x="360887" y="187753"/>
+                </a:lnTo>
+                <a:close/>
+                <a:lnTo>
+                  <a:pt x="361803" y="186837"/>
+                </a:lnTo>
+                <a:close/>
+                <a:lnTo>
+                  <a:pt x="362720" y="185920"/>
+                </a:lnTo>
+                <a:close/>
+                <a:lnTo>
+                  <a:pt x="363636" y="185004"/>
+                </a:lnTo>
+                <a:close/>
+                <a:lnTo>
+                  <a:pt x="364552" y="184088"/>
+                </a:lnTo>
+                <a:close/>
+                <a:lnTo>
+                  <a:pt x="365468" y="183172"/>
+                </a:lnTo>
+                <a:close/>
+                <a:lnTo>
+                  <a:pt x="366385" y="182255"/>
+                </a:lnTo>
+                <a:close/>
+                <a:lnTo>
+                  <a:pt x="367302" y="181338"/>
+                </a:lnTo>
+                <a:close/>
+                <a:lnTo>
+                  <a:pt x="368219" y="180421"/>
+                </a:lnTo>
+                <a:close/>
+                <a:lnTo>
+                  <a:pt x="369137" y="179503"/>
+                </a:lnTo>
+                <a:close/>
+                <a:lnTo>
+                  <a:pt x="370055" y="178585"/>
+                </a:lnTo>
+                <a:close/>
+                <a:lnTo>
+                  <a:pt x="370973" y="177667"/>
+                </a:lnTo>
+                <a:close/>
+                <a:lnTo>
+                  <a:pt x="371890" y="176750"/>
+                </a:lnTo>
+                <a:close/>
+                <a:lnTo>
+                  <a:pt x="372807" y="175833"/>
+                </a:lnTo>
+                <a:close/>
+                <a:lnTo>
+                  <a:pt x="373722" y="174918"/>
+                </a:lnTo>
+                <a:close/>
+                <a:lnTo>
+                  <a:pt x="374637" y="174003"/>
+                </a:lnTo>
+                <a:close/>
+                <a:lnTo>
+                  <a:pt x="375549" y="173091"/>
+                </a:lnTo>
+                <a:close/>
+                <a:lnTo>
+                  <a:pt x="376460" y="172180"/>
+                </a:lnTo>
+                <a:close/>
+                <a:lnTo>
+                  <a:pt x="377371" y="171269"/>
+                </a:lnTo>
+                <a:close/>
+                <a:lnTo>
+                  <a:pt x="378280" y="170360"/>
+                </a:lnTo>
+                <a:close/>
+                <a:lnTo>
+                  <a:pt x="379189" y="169451"/>
+                </a:lnTo>
+                <a:close/>
+                <a:lnTo>
+                  <a:pt x="380099" y="168541"/>
+                </a:lnTo>
+                <a:close/>
+                <a:lnTo>
+                  <a:pt x="381010" y="167630"/>
+                </a:lnTo>
+                <a:close/>
+                <a:lnTo>
+                  <a:pt x="381922" y="166718"/>
+                </a:lnTo>
+                <a:close/>
+                <a:lnTo>
+                  <a:pt x="382835" y="165805"/>
+                </a:lnTo>
+                <a:close/>
+                <a:lnTo>
+                  <a:pt x="383750" y="164890"/>
+                </a:lnTo>
+                <a:close/>
+                <a:lnTo>
+                  <a:pt x="384666" y="163974"/>
+                </a:lnTo>
+                <a:close/>
+                <a:lnTo>
+                  <a:pt x="385583" y="163057"/>
+                </a:lnTo>
+                <a:close/>
+                <a:lnTo>
+                  <a:pt x="386501" y="162139"/>
+                </a:lnTo>
+                <a:close/>
+                <a:lnTo>
+                  <a:pt x="387419" y="161221"/>
+                </a:lnTo>
+                <a:close/>
+                <a:lnTo>
+                  <a:pt x="388337" y="160303"/>
+                </a:lnTo>
+                <a:close/>
+                <a:lnTo>
+                  <a:pt x="389254" y="159386"/>
+                </a:lnTo>
+                <a:close/>
+                <a:lnTo>
+                  <a:pt x="390172" y="158468"/>
+                </a:lnTo>
+                <a:close/>
+                <a:lnTo>
+                  <a:pt x="391088" y="157552"/>
+                </a:lnTo>
+                <a:close/>
+                <a:lnTo>
+                  <a:pt x="392005" y="156635"/>
+                </a:lnTo>
+                <a:close/>
+                <a:lnTo>
+                  <a:pt x="392921" y="155719"/>
+                </a:lnTo>
+                <a:close/>
+                <a:lnTo>
+                  <a:pt x="393837" y="154803"/>
+                </a:lnTo>
+                <a:close/>
+                <a:lnTo>
+                  <a:pt x="394754" y="153886"/>
+                </a:lnTo>
+                <a:close/>
+                <a:lnTo>
+                  <a:pt x="395670" y="152970"/>
+                </a:lnTo>
+                <a:close/>
+                <a:lnTo>
+                  <a:pt x="396586" y="152054"/>
+                </a:lnTo>
+                <a:close/>
+                <a:lnTo>
+                  <a:pt x="397502" y="151138"/>
+                </a:lnTo>
+                <a:close/>
+                <a:lnTo>
+                  <a:pt x="398419" y="150221"/>
+                </a:lnTo>
+                <a:close/>
+                <a:lnTo>
+                  <a:pt x="399336" y="149304"/>
+                </a:lnTo>
+                <a:close/>
+                <a:lnTo>
+                  <a:pt x="400252" y="148388"/>
+                </a:lnTo>
+                <a:close/>
+                <a:lnTo>
+                  <a:pt x="401169" y="147471"/>
+                </a:lnTo>
+                <a:close/>
+                <a:lnTo>
+                  <a:pt x="402085" y="146555"/>
+                </a:lnTo>
+                <a:close/>
+                <a:lnTo>
+                  <a:pt x="403002" y="145638"/>
+                </a:lnTo>
+                <a:close/>
+                <a:lnTo>
+                  <a:pt x="403919" y="144721"/>
+                </a:lnTo>
+                <a:close/>
+                <a:lnTo>
+                  <a:pt x="404835" y="143805"/>
+                </a:lnTo>
+                <a:close/>
+                <a:lnTo>
+                  <a:pt x="405752" y="142888"/>
+                </a:lnTo>
+                <a:close/>
+                <a:lnTo>
+                  <a:pt x="406668" y="141972"/>
+                </a:lnTo>
+                <a:close/>
+                <a:lnTo>
+                  <a:pt x="407585" y="141055"/>
+                </a:lnTo>
+                <a:close/>
+                <a:lnTo>
+                  <a:pt x="408501" y="140139"/>
+                </a:lnTo>
+                <a:close/>
+                <a:lnTo>
+                  <a:pt x="409418" y="139222"/>
+                </a:lnTo>
+                <a:close/>
+                <a:lnTo>
+                  <a:pt x="410334" y="138306"/>
+                </a:lnTo>
+                <a:close/>
+                <a:lnTo>
+                  <a:pt x="411251" y="137389"/>
+                </a:lnTo>
+                <a:close/>
+                <a:lnTo>
+                  <a:pt x="412167" y="136473"/>
+                </a:lnTo>
+                <a:close/>
+                <a:lnTo>
+                  <a:pt x="413084" y="135556"/>
+                </a:lnTo>
+                <a:close/>
+                <a:lnTo>
+                  <a:pt x="414000" y="134640"/>
+                </a:lnTo>
+                <a:close/>
+                <a:lnTo>
+                  <a:pt x="414917" y="133723"/>
+                </a:lnTo>
+                <a:close/>
+                <a:lnTo>
+                  <a:pt x="415834" y="132806"/>
+                </a:lnTo>
+                <a:close/>
+                <a:lnTo>
+                  <a:pt x="416750" y="131890"/>
+                </a:lnTo>
+                <a:close/>
+                <a:lnTo>
+                  <a:pt x="417667" y="130973"/>
+                </a:lnTo>
+                <a:close/>
+                <a:lnTo>
+                  <a:pt x="418583" y="130057"/>
+                </a:lnTo>
+                <a:close/>
+                <a:lnTo>
+                  <a:pt x="419500" y="129140"/>
+                </a:lnTo>
+                <a:close/>
+                <a:lnTo>
+                  <a:pt x="420416" y="128224"/>
+                </a:lnTo>
+                <a:close/>
+                <a:lnTo>
+                  <a:pt x="421333" y="127307"/>
+                </a:lnTo>
+                <a:close/>
+                <a:lnTo>
+                  <a:pt x="422249" y="126391"/>
+                </a:lnTo>
+                <a:close/>
+                <a:lnTo>
+                  <a:pt x="423166" y="125474"/>
+                </a:lnTo>
+                <a:close/>
+                <a:lnTo>
+                  <a:pt x="424082" y="124558"/>
+                </a:lnTo>
+                <a:close/>
+                <a:lnTo>
+                  <a:pt x="424999" y="123641"/>
+                </a:lnTo>
+                <a:close/>
+                <a:lnTo>
+                  <a:pt x="425916" y="122724"/>
+                </a:lnTo>
+                <a:close/>
+                <a:lnTo>
+                  <a:pt x="426832" y="121808"/>
+                </a:lnTo>
+                <a:close/>
+                <a:lnTo>
+                  <a:pt x="427749" y="120891"/>
+                </a:lnTo>
+                <a:close/>
+                <a:lnTo>
+                  <a:pt x="428665" y="119975"/>
+                </a:lnTo>
+                <a:close/>
+                <a:lnTo>
+                  <a:pt x="429582" y="119058"/>
+                </a:lnTo>
+                <a:close/>
+                <a:lnTo>
+                  <a:pt x="430498" y="118142"/>
+                </a:lnTo>
+                <a:close/>
+                <a:lnTo>
+                  <a:pt x="431414" y="117226"/>
+                </a:lnTo>
+                <a:close/>
+                <a:lnTo>
+                  <a:pt x="432331" y="116309"/>
+                </a:lnTo>
+                <a:close/>
+                <a:lnTo>
+                  <a:pt x="433247" y="115393"/>
+                </a:lnTo>
+                <a:close/>
+                <a:lnTo>
+                  <a:pt x="434163" y="114477"/>
+                </a:lnTo>
+                <a:close/>
+                <a:lnTo>
+                  <a:pt x="435080" y="113560"/>
+                </a:lnTo>
+                <a:close/>
+                <a:lnTo>
+                  <a:pt x="435996" y="112644"/>
+                </a:lnTo>
+                <a:close/>
+                <a:lnTo>
+                  <a:pt x="436913" y="111727"/>
+                </a:lnTo>
+                <a:close/>
+                <a:lnTo>
+                  <a:pt x="437831" y="110809"/>
+                </a:lnTo>
+                <a:close/>
+                <a:lnTo>
+                  <a:pt x="438749" y="109891"/>
+                </a:lnTo>
+                <a:close/>
+                <a:lnTo>
+                  <a:pt x="439667" y="108973"/>
+                </a:lnTo>
+                <a:close/>
+                <a:lnTo>
+                  <a:pt x="440584" y="108056"/>
+                </a:lnTo>
+                <a:close/>
+                <a:lnTo>
+                  <a:pt x="441501" y="107139"/>
+                </a:lnTo>
+                <a:close/>
+                <a:lnTo>
+                  <a:pt x="442418" y="106222"/>
+                </a:lnTo>
+                <a:close/>
+                <a:lnTo>
+                  <a:pt x="443333" y="105307"/>
+                </a:lnTo>
+                <a:close/>
+                <a:lnTo>
+                  <a:pt x="444247" y="104393"/>
+                </a:lnTo>
+                <a:close/>
+                <a:lnTo>
+                  <a:pt x="445159" y="103481"/>
+                </a:lnTo>
+                <a:close/>
+                <a:lnTo>
+                  <a:pt x="446070" y="102570"/>
+                </a:lnTo>
+                <a:close/>
+                <a:lnTo>
+                  <a:pt x="446980" y="101660"/>
+                </a:lnTo>
+                <a:close/>
+                <a:lnTo>
+                  <a:pt x="447890" y="100750"/>
+                </a:lnTo>
+                <a:close/>
+                <a:lnTo>
+                  <a:pt x="448799" y="99841"/>
+                </a:lnTo>
+                <a:close/>
+                <a:lnTo>
+                  <a:pt x="449709" y="98931"/>
+                </a:lnTo>
+                <a:close/>
+                <a:lnTo>
+                  <a:pt x="450620" y="98020"/>
+                </a:lnTo>
+                <a:close/>
+                <a:lnTo>
+                  <a:pt x="451532" y="97108"/>
+                </a:lnTo>
+                <a:close/>
+                <a:lnTo>
+                  <a:pt x="452446" y="96194"/>
+                </a:lnTo>
+                <a:close/>
+                <a:lnTo>
+                  <a:pt x="453361" y="95279"/>
+                </a:lnTo>
+                <a:close/>
+                <a:lnTo>
+                  <a:pt x="454277" y="94363"/>
+                </a:lnTo>
+                <a:close/>
+                <a:lnTo>
+                  <a:pt x="455195" y="93445"/>
+                </a:lnTo>
+                <a:close/>
+                <a:lnTo>
+                  <a:pt x="456112" y="92528"/>
+                </a:lnTo>
+                <a:close/>
+                <a:lnTo>
+                  <a:pt x="457030" y="91610"/>
+                </a:lnTo>
+                <a:close/>
+                <a:lnTo>
+                  <a:pt x="457948" y="90692"/>
+                </a:lnTo>
+                <a:close/>
+                <a:lnTo>
+                  <a:pt x="458866" y="89774"/>
+                </a:lnTo>
+                <a:close/>
+                <a:lnTo>
+                  <a:pt x="459783" y="88857"/>
+                </a:lnTo>
+                <a:close/>
+                <a:lnTo>
+                  <a:pt x="460699" y="87941"/>
+                </a:lnTo>
+                <a:close/>
+                <a:lnTo>
+                  <a:pt x="461616" y="87024"/>
+                </a:lnTo>
+                <a:close/>
+                <a:lnTo>
+                  <a:pt x="462532" y="86108"/>
+                </a:lnTo>
+                <a:close/>
+                <a:lnTo>
+                  <a:pt x="463448" y="85192"/>
+                </a:lnTo>
+                <a:close/>
+                <a:lnTo>
+                  <a:pt x="464365" y="84275"/>
+                </a:lnTo>
+                <a:close/>
+                <a:lnTo>
+                  <a:pt x="465281" y="83359"/>
+                </a:lnTo>
+                <a:close/>
+                <a:lnTo>
+                  <a:pt x="466197" y="82443"/>
+                </a:lnTo>
+                <a:close/>
+                <a:lnTo>
+                  <a:pt x="467114" y="81526"/>
+                </a:lnTo>
+                <a:close/>
+                <a:lnTo>
+                  <a:pt x="468030" y="80610"/>
+                </a:lnTo>
+                <a:close/>
+                <a:lnTo>
+                  <a:pt x="468947" y="79693"/>
+                </a:lnTo>
+                <a:close/>
+                <a:lnTo>
+                  <a:pt x="469863" y="78777"/>
+                </a:lnTo>
+                <a:close/>
+                <a:lnTo>
+                  <a:pt x="470780" y="77860"/>
+                </a:lnTo>
+                <a:close/>
+                <a:lnTo>
+                  <a:pt x="471697" y="76943"/>
+                </a:lnTo>
+                <a:close/>
+                <a:lnTo>
+                  <a:pt x="472613" y="76027"/>
+                </a:lnTo>
+                <a:close/>
+                <a:lnTo>
+                  <a:pt x="473530" y="75110"/>
+                </a:lnTo>
+                <a:close/>
+                <a:lnTo>
+                  <a:pt x="474446" y="74194"/>
+                </a:lnTo>
+                <a:close/>
+                <a:lnTo>
+                  <a:pt x="475363" y="73277"/>
+                </a:lnTo>
+                <a:close/>
+                <a:lnTo>
+                  <a:pt x="476279" y="72361"/>
+                </a:lnTo>
+                <a:close/>
+                <a:lnTo>
+                  <a:pt x="477196" y="71444"/>
+                </a:lnTo>
+                <a:close/>
+                <a:lnTo>
+                  <a:pt x="478112" y="70528"/>
+                </a:lnTo>
+                <a:close/>
+                <a:lnTo>
+                  <a:pt x="479029" y="69611"/>
+                </a:lnTo>
+                <a:close/>
+                <a:lnTo>
+                  <a:pt x="479945" y="68695"/>
+                </a:lnTo>
+                <a:close/>
+                <a:lnTo>
+                  <a:pt x="480862" y="67778"/>
+                </a:lnTo>
+                <a:close/>
+                <a:lnTo>
+                  <a:pt x="481779" y="66861"/>
+                </a:lnTo>
+                <a:close/>
+                <a:lnTo>
+                  <a:pt x="482695" y="65945"/>
+                </a:lnTo>
+                <a:close/>
+                <a:lnTo>
+                  <a:pt x="483612" y="65028"/>
+                </a:lnTo>
+                <a:close/>
+                <a:lnTo>
+                  <a:pt x="484528" y="64112"/>
+                </a:lnTo>
+                <a:close/>
+                <a:lnTo>
+                  <a:pt x="485445" y="63195"/>
+                </a:lnTo>
+                <a:close/>
+                <a:lnTo>
+                  <a:pt x="486361" y="62279"/>
+                </a:lnTo>
+                <a:close/>
+                <a:lnTo>
+                  <a:pt x="487278" y="61362"/>
+                </a:lnTo>
+                <a:close/>
+                <a:lnTo>
+                  <a:pt x="488194" y="60446"/>
+                </a:lnTo>
+                <a:close/>
+                <a:lnTo>
+                  <a:pt x="489111" y="59529"/>
+                </a:lnTo>
+                <a:close/>
+                <a:lnTo>
+                  <a:pt x="490027" y="58613"/>
+                </a:lnTo>
+                <a:close/>
+                <a:lnTo>
+                  <a:pt x="490944" y="57696"/>
+                </a:lnTo>
+                <a:close/>
+                <a:lnTo>
+                  <a:pt x="491860" y="56780"/>
+                </a:lnTo>
+                <a:close/>
+                <a:lnTo>
+                  <a:pt x="492777" y="55863"/>
+                </a:lnTo>
+                <a:close/>
+                <a:lnTo>
+                  <a:pt x="493694" y="54946"/>
+                </a:lnTo>
+                <a:close/>
+                <a:lnTo>
+                  <a:pt x="494610" y="54030"/>
+                </a:lnTo>
+                <a:close/>
+                <a:lnTo>
+                  <a:pt x="495527" y="53113"/>
+                </a:lnTo>
+                <a:close/>
+                <a:lnTo>
+                  <a:pt x="496443" y="52197"/>
+                </a:lnTo>
+                <a:close/>
+                <a:lnTo>
+                  <a:pt x="497360" y="51280"/>
+                </a:lnTo>
+                <a:close/>
+                <a:lnTo>
+                  <a:pt x="498276" y="50364"/>
+                </a:lnTo>
+                <a:close/>
+                <a:lnTo>
+                  <a:pt x="499193" y="49447"/>
+                </a:lnTo>
+                <a:close/>
+                <a:lnTo>
+                  <a:pt x="500109" y="48531"/>
+                </a:lnTo>
+                <a:close/>
+                <a:lnTo>
+                  <a:pt x="501025" y="47615"/>
+                </a:lnTo>
+                <a:close/>
+                <a:lnTo>
+                  <a:pt x="501942" y="46698"/>
+                </a:lnTo>
+                <a:close/>
+                <a:lnTo>
+                  <a:pt x="502858" y="45782"/>
+                </a:lnTo>
+                <a:close/>
+                <a:lnTo>
+                  <a:pt x="503774" y="44866"/>
+                </a:lnTo>
+                <a:close/>
+                <a:lnTo>
+                  <a:pt x="504691" y="43949"/>
+                </a:lnTo>
+                <a:close/>
+                <a:lnTo>
+                  <a:pt x="505607" y="43033"/>
+                </a:lnTo>
+                <a:close/>
+                <a:lnTo>
+                  <a:pt x="506525" y="42115"/>
+                </a:lnTo>
+                <a:close/>
+                <a:lnTo>
+                  <a:pt x="507442" y="41198"/>
+                </a:lnTo>
+                <a:close/>
+                <a:lnTo>
+                  <a:pt x="508360" y="40280"/>
+                </a:lnTo>
+                <a:close/>
+                <a:lnTo>
+                  <a:pt x="509278" y="39362"/>
+                </a:lnTo>
+                <a:close/>
+                <a:lnTo>
+                  <a:pt x="510196" y="38444"/>
+                </a:lnTo>
+                <a:close/>
+                <a:lnTo>
+                  <a:pt x="511113" y="37527"/>
+                </a:lnTo>
+                <a:close/>
+                <a:lnTo>
+                  <a:pt x="512029" y="36611"/>
+                </a:lnTo>
+                <a:close/>
+                <a:lnTo>
+                  <a:pt x="512944" y="35696"/>
+                </a:lnTo>
+                <a:close/>
+                <a:lnTo>
+                  <a:pt x="513858" y="34782"/>
+                </a:lnTo>
+                <a:close/>
+                <a:lnTo>
+                  <a:pt x="514770" y="33870"/>
+                </a:lnTo>
+                <a:close/>
+                <a:lnTo>
+                  <a:pt x="515680" y="32960"/>
+                </a:lnTo>
+                <a:close/>
+                <a:lnTo>
+                  <a:pt x="516590" y="32050"/>
+                </a:lnTo>
+                <a:close/>
+                <a:lnTo>
+                  <a:pt x="517500" y="31140"/>
+                </a:lnTo>
+                <a:close/>
+                <a:lnTo>
+                  <a:pt x="518409" y="30231"/>
+                </a:lnTo>
+                <a:close/>
+                <a:lnTo>
+                  <a:pt x="519319" y="29321"/>
+                </a:lnTo>
+                <a:close/>
+                <a:lnTo>
+                  <a:pt x="520230" y="28410"/>
+                </a:lnTo>
+                <a:close/>
+                <a:lnTo>
+                  <a:pt x="521143" y="27497"/>
+                </a:lnTo>
+                <a:close/>
+                <a:lnTo>
+                  <a:pt x="522057" y="26583"/>
+                </a:lnTo>
+                <a:close/>
+                <a:lnTo>
+                  <a:pt x="522972" y="25668"/>
+                </a:lnTo>
+                <a:close/>
+                <a:lnTo>
+                  <a:pt x="523889" y="24751"/>
+                </a:lnTo>
+                <a:close/>
+                <a:lnTo>
+                  <a:pt x="524806" y="23834"/>
+                </a:lnTo>
+                <a:close/>
+                <a:lnTo>
+                  <a:pt x="525724" y="22916"/>
+                </a:lnTo>
+                <a:close/>
+                <a:lnTo>
+                  <a:pt x="526642" y="21998"/>
+                </a:lnTo>
+                <a:close/>
+                <a:lnTo>
+                  <a:pt x="527559" y="21081"/>
+                </a:lnTo>
+                <a:close/>
+                <a:lnTo>
+                  <a:pt x="528477" y="20163"/>
+                </a:lnTo>
+                <a:close/>
+                <a:lnTo>
+                  <a:pt x="529394" y="19246"/>
+                </a:lnTo>
+                <a:close/>
+                <a:lnTo>
+                  <a:pt x="530311" y="18329"/>
+                </a:lnTo>
+                <a:close/>
+                <a:lnTo>
+                  <a:pt x="531227" y="17413"/>
+                </a:lnTo>
+                <a:close/>
+                <a:lnTo>
+                  <a:pt x="532143" y="16497"/>
+                </a:lnTo>
+                <a:close/>
+                <a:lnTo>
+                  <a:pt x="533060" y="15580"/>
+                </a:lnTo>
+                <a:close/>
+                <a:lnTo>
+                  <a:pt x="533976" y="14664"/>
+                </a:lnTo>
+                <a:close/>
+                <a:lnTo>
+                  <a:pt x="534892" y="13748"/>
+                </a:lnTo>
+                <a:close/>
+                <a:lnTo>
+                  <a:pt x="535808" y="12832"/>
+                </a:lnTo>
+                <a:close/>
+                <a:lnTo>
+                  <a:pt x="536725" y="11915"/>
+                </a:lnTo>
+                <a:close/>
+                <a:lnTo>
+                  <a:pt x="537641" y="10999"/>
+                </a:lnTo>
+                <a:close/>
+                <a:lnTo>
+                  <a:pt x="538558" y="10082"/>
+                </a:lnTo>
+                <a:close/>
+                <a:lnTo>
+                  <a:pt x="539474" y="9166"/>
+                </a:lnTo>
+                <a:close/>
+                <a:lnTo>
+                  <a:pt x="540391" y="8249"/>
+                </a:lnTo>
+                <a:close/>
+                <a:lnTo>
+                  <a:pt x="541308" y="7332"/>
+                </a:lnTo>
+                <a:close/>
+                <a:lnTo>
+                  <a:pt x="542224" y="6416"/>
+                </a:lnTo>
+                <a:close/>
+                <a:lnTo>
+                  <a:pt x="543141" y="5499"/>
+                </a:lnTo>
+                <a:close/>
+                <a:lnTo>
+                  <a:pt x="544058" y="4582"/>
+                </a:lnTo>
+                <a:close/>
+                <a:lnTo>
+                  <a:pt x="544974" y="3666"/>
+                </a:lnTo>
+                <a:close/>
+                <a:lnTo>
+                  <a:pt x="545891" y="2749"/>
+                </a:lnTo>
+                <a:close/>
+                <a:lnTo>
+                  <a:pt x="546807" y="1833"/>
+                </a:lnTo>
+                <a:close/>
+                <a:lnTo>
+                  <a:pt x="547724" y="916"/>
+                </a:lnTo>
+                <a:close/>
+                <a:lnTo>
                   <a:pt x="548640" y="0"/>
                 </a:lnTo>
                 <a:close/>
@@ -3289,7 +8073,7 @@
         <p:spPr>
           <a:xfrm flipV="1">
             <a:off x="5029200.0" y="1657350.0"/>
-            <a:ext cx="0.0" cy="914400.0"/>
+            <a:ext cx="0.0" cy="457200.0"/>
           </a:xfrm>
           <a:prstGeom prst="line">
             <a:avLst/>
@@ -3324,7 +8108,7 @@
         </p:nvCxnSpPr>
         <p:spPr>
           <a:xfrm>
-            <a:off x="4572000.0" y="2114550.0"/>
+            <a:off x="4572000.0" y="1657350.0"/>
             <a:ext cx="457200.0" cy="0.0"/>
           </a:xfrm>
           <a:prstGeom prst="line">
@@ -3360,7 +8144,7 @@
         </p:nvCxnSpPr>
         <p:spPr>
           <a:xfrm>
-            <a:off x="4572000.0" y="1657350.0"/>
+            <a:off x="4572000.0" y="2114550.0"/>
             <a:ext cx="457200.0" cy="0.0"/>
           </a:xfrm>
           <a:prstGeom prst="line">
@@ -3487,7 +8271,7 @@
         <p:spPr>
           <a:xfrm>
             <a:off x="4754880.0" y="1840230.0"/>
-            <a:ext cx="137160.0" cy="137160.0"/>
+            <a:ext cx="182880.0" cy="182880.0"/>
           </a:xfrm>
           <a:prstGeom prst="line">
             <a:avLst/>
@@ -3520,9 +8304,9 @@
           <p:nvPr/>
         </p:nvCxnSpPr>
         <p:spPr>
-          <a:xfrm>
-            <a:off x="5120640.0" y="1200150.0"/>
-            <a:ext cx="137160.0" cy="228600.0"/>
+          <a:xfrm flipH="1">
+            <a:off x="5120640.0" y="1383030.0"/>
+            <a:ext cx="182880.0" cy="182880.0"/>
           </a:xfrm>
           <a:prstGeom prst="line">
             <a:avLst/>
@@ -3556,8 +8340,8 @@
         </p:nvCxnSpPr>
         <p:spPr>
           <a:xfrm>
-            <a:off x="4892040.0" y="2617470.0"/>
-            <a:ext cx="114300.0" cy="0.0"/>
+            <a:off x="4914900.0" y="2571750.0"/>
+            <a:ext cx="91440.0" cy="0.0"/>
           </a:xfrm>
           <a:prstGeom prst="line">
             <a:avLst/>
@@ -3591,8 +8375,8 @@
         </p:nvCxnSpPr>
         <p:spPr>
           <a:xfrm flipH="1">
-            <a:off x="5052060.0" y="2617470.0"/>
-            <a:ext cx="114300.0" cy="0.0"/>
+            <a:off x="5052060.0" y="2571750.0"/>
+            <a:ext cx="91440.0" cy="0.0"/>
           </a:xfrm>
           <a:prstGeom prst="line">
             <a:avLst/>
@@ -3626,7 +8410,7 @@
         </p:nvSpPr>
         <p:spPr>
           <a:xfrm>
-            <a:off x="4958080" y="836930"/>
+            <a:off x="5003800" y="882650"/>
             <a:ext cx="1524000" cy="508000"/>
           </a:xfrm>
           <a:prstGeom prst="rect">
@@ -3662,7 +8446,7 @@
         </p:nvSpPr>
         <p:spPr>
           <a:xfrm>
-            <a:off x="4249420" y="1339850"/>
+            <a:off x="4249420" y="2345690"/>
             <a:ext cx="1524000" cy="508000"/>
           </a:xfrm>
           <a:prstGeom prst="rect">
@@ -3685,7 +8469,7 @@
               </a:defRPr>
             </a:pPr>
             <a:r>
-              <a:t>2</a:t>
+              <a:t>O</a:t>
             </a:r>
           </a:p>
         </p:txBody>
@@ -3693,42 +8477,6 @@
       <p:sp>
         <p:nvSpPr>
           <p:cNvPr id="17" name="TextBox 16"/>
-          <p:cNvSpPr txBox="1"/>
-          <p:nvPr/>
-        </p:nvSpPr>
-        <p:spPr>
-          <a:xfrm>
-            <a:off x="4249420" y="1797050"/>
-            <a:ext cx="1524000" cy="508000"/>
-          </a:xfrm>
-          <a:prstGeom prst="rect">
-            <a:avLst/>
-          </a:prstGeom>
-          <a:noFill/>
-        </p:spPr>
-        <p:txBody>
-          <a:bodyPr wrap="none">
-            <a:spAutoFit/>
-          </a:bodyPr>
-          <a:lstStyle/>
-          <a:p>
-            <a:pPr>
-              <a:defRPr sz="2200" b="1">
-                <a:solidFill>
-                  <a:srgbClr val="FFFFFF"/>
-                </a:solidFill>
-                <a:latin typeface="Arial"/>
-              </a:defRPr>
-            </a:pPr>
-            <a:r>
-              <a:t>1</a:t>
-            </a:r>
-          </a:p>
-        </p:txBody>
-      </p:sp>
-      <p:sp>
-        <p:nvSpPr>
-          <p:cNvPr id="18" name="TextBox 17"/>
           <p:cNvSpPr txBox="1"/>
           <p:nvPr/>
         </p:nvSpPr>
@@ -3764,13 +8512,13 @@
       </p:sp>
       <p:sp>
         <p:nvSpPr>
-          <p:cNvPr id="19" name="TextBox 18"/>
+          <p:cNvPr id="18" name="TextBox 17"/>
           <p:cNvSpPr txBox="1"/>
           <p:nvPr/>
         </p:nvSpPr>
         <p:spPr>
           <a:xfrm>
-            <a:off x="4226560" y="2345690"/>
+            <a:off x="4226560" y="1797050"/>
             <a:ext cx="1524000" cy="508000"/>
           </a:xfrm>
           <a:prstGeom prst="rect">
@@ -3793,7 +8541,43 @@
               </a:defRPr>
             </a:pPr>
             <a:r>
-              <a:t>O</a:t>
+              <a:t>1</a:t>
+            </a:r>
+          </a:p>
+        </p:txBody>
+      </p:sp>
+      <p:sp>
+        <p:nvSpPr>
+          <p:cNvPr id="19" name="TextBox 18"/>
+          <p:cNvSpPr txBox="1"/>
+          <p:nvPr/>
+        </p:nvSpPr>
+        <p:spPr>
+          <a:xfrm>
+            <a:off x="4226560" y="1339850"/>
+            <a:ext cx="1524000" cy="508000"/>
+          </a:xfrm>
+          <a:prstGeom prst="rect">
+            <a:avLst/>
+          </a:prstGeom>
+          <a:noFill/>
+        </p:spPr>
+        <p:txBody>
+          <a:bodyPr wrap="none">
+            <a:spAutoFit/>
+          </a:bodyPr>
+          <a:lstStyle/>
+          <a:p>
+            <a:pPr>
+              <a:defRPr sz="2200" b="1">
+                <a:solidFill>
+                  <a:srgbClr val="FFFFFF"/>
+                </a:solidFill>
+                <a:latin typeface="Arial"/>
+              </a:defRPr>
+            </a:pPr>
+            <a:r>
+              <a:t>2</a:t>
             </a:r>
           </a:p>
         </p:txBody>
